--- a/plugins/gradient-cio/assets/examples/gradient-portfolio-construction-private-markets.pptx
+++ b/plugins/gradient-cio/assets/examples/gradient-portfolio-construction-private-markets.pptx
@@ -37,6 +37,7 @@
     <ns0:sldId id="285" ns1:id="rId36"/>
     <ns0:sldId id="286" ns1:id="rId37"/>
     <ns0:sldId id="287" ns1:id="rId38"/>
+    <ns0:sldId id="288" ns1:id="rId39"/>
   </ns0:sldIdLst>
   <ns0:sldSz cx="12191695" cy="6858000" type="screen16x9"/>
   <ns0:notesSz cx="6858000" cy="9144000"/>
@@ -5789,7 +5790,7 @@
               <a:rPr>
                 <a:latin typeface="Inter"/>
               </a:rPr>
-              <a:t>8 of 9 · Partial</a:t>
+              <a:t>9 of 10 · Partial</a:t>
             </a:r>
           </a:p>
         </p:txBody>
@@ -21979,7 +21980,2299 @@
         </p:nvGraphicFramePr>
         <p:xfrm>
           <a:off x="640080" y="1600200"/>
-          <a:ext cx="10908792" cy="2116836"/>
+          <a:ext cx="10908790" cy="1858492"/>
+        </p:xfrm>
+        <a:graphic>
+          <a:graphicData uri="http://schemas.openxmlformats.org/drawingml/2006/table">
+            <a:tbl>
+              <a:tblPr firstRow="1" bandRow="1">
+                <a:tableStyleId>{5C22544A-7EE6-4342-B048-85BDC9FD1C3A}</a:tableStyleId>
+              </a:tblPr>
+              <a:tblGrid>
+                <a:gridCol w="2011680"/>
+                <a:gridCol w="1779422"/>
+                <a:gridCol w="1779422"/>
+                <a:gridCol w="1779422"/>
+                <a:gridCol w="1779422"/>
+                <a:gridCol w="1779422"/>
+              </a:tblGrid>
+              <a:tr h="371698">
+                <a:tc>
+                  <a:txBody>
+                    <a:bodyPr/>
+                    <a:lstStyle/>
+                    <a:p>
+                      <a:pPr>
+                        <a:defRPr sz="750" b="1">
+                          <a:solidFill>
+                            <a:srgbClr val="FFFFFF"/>
+                          </a:solidFill>
+                          <a:latin typeface="Inter"/>
+                        </a:defRPr>
+                      </a:pPr>
+                      <a:r>
+                        <a:rPr>
+                          <a:latin typeface="Inter"/>
+                        </a:rPr>
+                        <a:t>Axis</a:t>
+                      </a:r>
+                    </a:p>
+                  </a:txBody>
+                  <a:tcPr marL="54864" marR="54864" marT="27432" marB="27432" anchor="ctr">
+                    <a:solidFill>
+                      <a:srgbClr val="0D1117"/>
+                    </a:solidFill>
+                  </a:tcPr>
+                </a:tc>
+                <a:tc>
+                  <a:txBody>
+                    <a:bodyPr/>
+                    <a:lstStyle/>
+                    <a:p>
+                      <a:pPr>
+                        <a:defRPr sz="750" b="1">
+                          <a:solidFill>
+                            <a:srgbClr val="FFFFFF"/>
+                          </a:solidFill>
+                          <a:latin typeface="Inter"/>
+                        </a:defRPr>
+                      </a:pPr>
+                      <a:r>
+                        <a:rPr>
+                          <a:latin typeface="Inter"/>
+                        </a:rPr>
+                        <a:t>Largest exposure</a:t>
+                      </a:r>
+                    </a:p>
+                  </a:txBody>
+                  <a:tcPr marL="54864" marR="54864" marT="27432" marB="27432" anchor="ctr">
+                    <a:solidFill>
+                      <a:srgbClr val="0D1117"/>
+                    </a:solidFill>
+                  </a:tcPr>
+                </a:tc>
+                <a:tc>
+                  <a:txBody>
+                    <a:bodyPr/>
+                    <a:lstStyle/>
+                    <a:p>
+                      <a:pPr>
+                        <a:defRPr sz="750" b="1">
+                          <a:solidFill>
+                            <a:srgbClr val="FFFFFF"/>
+                          </a:solidFill>
+                          <a:latin typeface="Inter"/>
+                        </a:defRPr>
+                      </a:pPr>
+                      <a:r>
+                        <a:rPr>
+                          <a:latin typeface="Inter"/>
+                        </a:rPr>
+                        <a:t>Share</a:t>
+                      </a:r>
+                    </a:p>
+                  </a:txBody>
+                  <a:tcPr marL="54864" marR="54864" marT="27432" marB="27432" anchor="ctr">
+                    <a:solidFill>
+                      <a:srgbClr val="0D1117"/>
+                    </a:solidFill>
+                  </a:tcPr>
+                </a:tc>
+                <a:tc>
+                  <a:txBody>
+                    <a:bodyPr/>
+                    <a:lstStyle/>
+                    <a:p>
+                      <a:pPr>
+                        <a:defRPr sz="750" b="1">
+                          <a:solidFill>
+                            <a:srgbClr val="FFFFFF"/>
+                          </a:solidFill>
+                          <a:latin typeface="Inter"/>
+                        </a:defRPr>
+                      </a:pPr>
+                      <a:r>
+                        <a:rPr>
+                          <a:latin typeface="Inter"/>
+                        </a:rPr>
+                        <a:t>Limit</a:t>
+                      </a:r>
+                    </a:p>
+                  </a:txBody>
+                  <a:tcPr marL="54864" marR="54864" marT="27432" marB="27432" anchor="ctr">
+                    <a:solidFill>
+                      <a:srgbClr val="0D1117"/>
+                    </a:solidFill>
+                  </a:tcPr>
+                </a:tc>
+                <a:tc>
+                  <a:txBody>
+                    <a:bodyPr/>
+                    <a:lstStyle/>
+                    <a:p>
+                      <a:pPr>
+                        <a:defRPr sz="750" b="1">
+                          <a:solidFill>
+                            <a:srgbClr val="FFFFFF"/>
+                          </a:solidFill>
+                          <a:latin typeface="Inter"/>
+                        </a:defRPr>
+                      </a:pPr>
+                      <a:r>
+                        <a:rPr>
+                          <a:latin typeface="Inter"/>
+                        </a:rPr>
+                        <a:t>Status</a:t>
+                      </a:r>
+                    </a:p>
+                  </a:txBody>
+                  <a:tcPr marL="54864" marR="54864" marT="27432" marB="27432" anchor="ctr">
+                    <a:solidFill>
+                      <a:srgbClr val="0D1117"/>
+                    </a:solidFill>
+                  </a:tcPr>
+                </a:tc>
+                <a:tc>
+                  <a:txBody>
+                    <a:bodyPr/>
+                    <a:lstStyle/>
+                    <a:p>
+                      <a:pPr>
+                        <a:defRPr sz="750" b="1">
+                          <a:solidFill>
+                            <a:srgbClr val="FFFFFF"/>
+                          </a:solidFill>
+                          <a:latin typeface="Inter"/>
+                        </a:defRPr>
+                      </a:pPr>
+                      <a:r>
+                        <a:rPr>
+                          <a:latin typeface="Inter"/>
+                        </a:rPr>
+                        <a:t>Server metric / basis</a:t>
+                      </a:r>
+                    </a:p>
+                  </a:txBody>
+                  <a:tcPr marL="54864" marR="54864" marT="27432" marB="27432" anchor="ctr">
+                    <a:solidFill>
+                      <a:srgbClr val="0D1117"/>
+                    </a:solidFill>
+                  </a:tcPr>
+                </a:tc>
+              </a:tr>
+              <a:tr h="371698">
+                <a:tc>
+                  <a:txBody>
+                    <a:bodyPr/>
+                    <a:lstStyle/>
+                    <a:p>
+                      <a:pPr>
+                        <a:defRPr sz="650" b="1">
+                          <a:solidFill>
+                            <a:srgbClr val="0D1117"/>
+                          </a:solidFill>
+                          <a:latin typeface="Inter"/>
+                        </a:defRPr>
+                      </a:pPr>
+                      <a:r>
+                        <a:rPr>
+                          <a:latin typeface="Inter"/>
+                        </a:rPr>
+                        <a:t>Manager</a:t>
+                      </a:r>
+                    </a:p>
+                  </a:txBody>
+                  <a:tcPr marL="54864" marR="54864" marT="27432" marB="27432" anchor="ctr">
+                    <a:solidFill>
+                      <a:srgbClr val="FFFFFF"/>
+                    </a:solidFill>
+                  </a:tcPr>
+                </a:tc>
+                <a:tc>
+                  <a:txBody>
+                    <a:bodyPr/>
+                    <a:lstStyle/>
+                    <a:p>
+                      <a:pPr>
+                        <a:defRPr sz="650" b="0">
+                          <a:solidFill>
+                            <a:srgbClr val="0D1117"/>
+                          </a:solidFill>
+                          <a:latin typeface="Inter"/>
+                        </a:defRPr>
+                      </a:pPr>
+                      <a:r>
+                        <a:rPr>
+                          <a:latin typeface="Inter"/>
+                        </a:rPr>
+                        <a:t>Example Private Manager A (TEST)</a:t>
+                      </a:r>
+                    </a:p>
+                  </a:txBody>
+                  <a:tcPr marL="54864" marR="54864" marT="27432" marB="27432" anchor="ctr">
+                    <a:solidFill>
+                      <a:srgbClr val="FFFFFF"/>
+                    </a:solidFill>
+                  </a:tcPr>
+                </a:tc>
+                <a:tc>
+                  <a:txBody>
+                    <a:bodyPr/>
+                    <a:lstStyle/>
+                    <a:p>
+                      <a:pPr>
+                        <a:defRPr sz="650" b="0">
+                          <a:solidFill>
+                            <a:srgbClr val="0D1117"/>
+                          </a:solidFill>
+                          <a:latin typeface="Inter"/>
+                        </a:defRPr>
+                      </a:pPr>
+                      <a:r>
+                        <a:rPr>
+                          <a:latin typeface="Inter"/>
+                        </a:rPr>
+                        <a:t>11.4%</a:t>
+                      </a:r>
+                    </a:p>
+                  </a:txBody>
+                  <a:tcPr marL="54864" marR="54864" marT="27432" marB="27432" anchor="ctr">
+                    <a:solidFill>
+                      <a:srgbClr val="FFFFFF"/>
+                    </a:solidFill>
+                  </a:tcPr>
+                </a:tc>
+                <a:tc>
+                  <a:txBody>
+                    <a:bodyPr/>
+                    <a:lstStyle/>
+                    <a:p>
+                      <a:pPr>
+                        <a:defRPr sz="650" b="0">
+                          <a:solidFill>
+                            <a:srgbClr val="0D1117"/>
+                          </a:solidFill>
+                          <a:latin typeface="Inter"/>
+                        </a:defRPr>
+                      </a:pPr>
+                      <a:r>
+                        <a:rPr>
+                          <a:latin typeface="Inter"/>
+                        </a:rPr>
+                        <a:t>12.0%</a:t>
+                      </a:r>
+                    </a:p>
+                  </a:txBody>
+                  <a:tcPr marL="54864" marR="54864" marT="27432" marB="27432" anchor="ctr">
+                    <a:solidFill>
+                      <a:srgbClr val="FFFFFF"/>
+                    </a:solidFill>
+                  </a:tcPr>
+                </a:tc>
+                <a:tc>
+                  <a:txBody>
+                    <a:bodyPr/>
+                    <a:lstStyle/>
+                    <a:p>
+                      <a:pPr>
+                        <a:defRPr sz="650" b="1">
+                          <a:solidFill>
+                            <a:srgbClr val="F2A93B"/>
+                          </a:solidFill>
+                          <a:latin typeface="Inter"/>
+                        </a:defRPr>
+                      </a:pPr>
+                      <a:r>
+                        <a:rPr>
+                          <a:latin typeface="Inter"/>
+                        </a:rPr>
+                        <a:t>● Watch</a:t>
+                      </a:r>
+                    </a:p>
+                  </a:txBody>
+                  <a:tcPr marL="54864" marR="54864" marT="27432" marB="27432" anchor="ctr">
+                    <a:solidFill>
+                      <a:srgbClr val="F5F7F9"/>
+                    </a:solidFill>
+                  </a:tcPr>
+                </a:tc>
+                <a:tc>
+                  <a:txBody>
+                    <a:bodyPr/>
+                    <a:lstStyle/>
+                    <a:p>
+                      <a:pPr>
+                        <a:defRPr sz="650" b="0">
+                          <a:solidFill>
+                            <a:srgbClr val="0D1117"/>
+                          </a:solidFill>
+                          <a:latin typeface="Inter"/>
+                        </a:defRPr>
+                      </a:pPr>
+                      <a:r>
+                        <a:rPr>
+                          <a:latin typeface="Inter"/>
+                        </a:rPr>
+                        <a:t>Commitment exposure; additive [S4]</a:t>
+                      </a:r>
+                    </a:p>
+                  </a:txBody>
+                  <a:tcPr marL="54864" marR="54864" marT="27432" marB="27432" anchor="ctr">
+                    <a:solidFill>
+                      <a:srgbClr val="FFFFFF"/>
+                    </a:solidFill>
+                  </a:tcPr>
+                </a:tc>
+              </a:tr>
+              <a:tr h="371698">
+                <a:tc>
+                  <a:txBody>
+                    <a:bodyPr/>
+                    <a:lstStyle/>
+                    <a:p>
+                      <a:pPr>
+                        <a:defRPr sz="650" b="1">
+                          <a:solidFill>
+                            <a:srgbClr val="0D1117"/>
+                          </a:solidFill>
+                          <a:latin typeface="Inter"/>
+                        </a:defRPr>
+                      </a:pPr>
+                      <a:r>
+                        <a:rPr>
+                          <a:latin typeface="Inter"/>
+                        </a:rPr>
+                        <a:t>Strategy</a:t>
+                      </a:r>
+                    </a:p>
+                  </a:txBody>
+                  <a:tcPr marL="54864" marR="54864" marT="27432" marB="27432" anchor="ctr">
+                    <a:solidFill>
+                      <a:srgbClr val="F5F7F9"/>
+                    </a:solidFill>
+                  </a:tcPr>
+                </a:tc>
+                <a:tc>
+                  <a:txBody>
+                    <a:bodyPr/>
+                    <a:lstStyle/>
+                    <a:p>
+                      <a:pPr>
+                        <a:defRPr sz="650" b="0">
+                          <a:solidFill>
+                            <a:srgbClr val="0D1117"/>
+                          </a:solidFill>
+                          <a:latin typeface="Inter"/>
+                        </a:defRPr>
+                      </a:pPr>
+                      <a:r>
+                        <a:rPr>
+                          <a:latin typeface="Inter"/>
+                        </a:rPr>
+                        <a:t>Private equity</a:t>
+                      </a:r>
+                    </a:p>
+                  </a:txBody>
+                  <a:tcPr marL="54864" marR="54864" marT="27432" marB="27432" anchor="ctr">
+                    <a:solidFill>
+                      <a:srgbClr val="F5F7F9"/>
+                    </a:solidFill>
+                  </a:tcPr>
+                </a:tc>
+                <a:tc>
+                  <a:txBody>
+                    <a:bodyPr/>
+                    <a:lstStyle/>
+                    <a:p>
+                      <a:pPr>
+                        <a:defRPr sz="650" b="0">
+                          <a:solidFill>
+                            <a:srgbClr val="0D1117"/>
+                          </a:solidFill>
+                          <a:latin typeface="Inter"/>
+                        </a:defRPr>
+                      </a:pPr>
+                      <a:r>
+                        <a:rPr>
+                          <a:latin typeface="Inter"/>
+                        </a:rPr>
+                        <a:t>52.2% of private NAV</a:t>
+                      </a:r>
+                    </a:p>
+                  </a:txBody>
+                  <a:tcPr marL="54864" marR="54864" marT="27432" marB="27432" anchor="ctr">
+                    <a:solidFill>
+                      <a:srgbClr val="F5F7F9"/>
+                    </a:solidFill>
+                  </a:tcPr>
+                </a:tc>
+                <a:tc>
+                  <a:txBody>
+                    <a:bodyPr/>
+                    <a:lstStyle/>
+                    <a:p>
+                      <a:pPr>
+                        <a:defRPr sz="650" b="0">
+                          <a:solidFill>
+                            <a:srgbClr val="0D1117"/>
+                          </a:solidFill>
+                          <a:latin typeface="Inter"/>
+                        </a:defRPr>
+                      </a:pPr>
+                      <a:r>
+                        <a:rPr>
+                          <a:latin typeface="Inter"/>
+                        </a:rPr>
+                        <a:t>Not assessed</a:t>
+                      </a:r>
+                    </a:p>
+                  </a:txBody>
+                  <a:tcPr marL="54864" marR="54864" marT="27432" marB="27432" anchor="ctr">
+                    <a:solidFill>
+                      <a:srgbClr val="F5F7F9"/>
+                    </a:solidFill>
+                  </a:tcPr>
+                </a:tc>
+                <a:tc>
+                  <a:txBody>
+                    <a:bodyPr/>
+                    <a:lstStyle/>
+                    <a:p>
+                      <a:pPr>
+                        <a:defRPr sz="650" b="1">
+                          <a:solidFill>
+                            <a:srgbClr val="9AA5B1"/>
+                          </a:solidFill>
+                          <a:latin typeface="Inter"/>
+                        </a:defRPr>
+                      </a:pPr>
+                      <a:r>
+                        <a:rPr>
+                          <a:latin typeface="Inter"/>
+                        </a:rPr>
+                        <a:t>● Not assessed</a:t>
+                      </a:r>
+                    </a:p>
+                  </a:txBody>
+                  <a:tcPr marL="54864" marR="54864" marT="27432" marB="27432" anchor="ctr">
+                    <a:solidFill>
+                      <a:srgbClr val="F5F7F9"/>
+                    </a:solidFill>
+                  </a:tcPr>
+                </a:tc>
+                <a:tc>
+                  <a:txBody>
+                    <a:bodyPr/>
+                    <a:lstStyle/>
+                    <a:p>
+                      <a:pPr>
+                        <a:defRPr sz="650" b="0">
+                          <a:solidFill>
+                            <a:srgbClr val="0D1117"/>
+                          </a:solidFill>
+                          <a:latin typeface="Inter"/>
+                        </a:defRPr>
+                      </a:pPr>
+                      <a:r>
+                        <a:rPr>
+                          <a:latin typeface="Inter"/>
+                        </a:rPr>
+                        <a:t>Commitment exposure; additive [S4]</a:t>
+                      </a:r>
+                    </a:p>
+                  </a:txBody>
+                  <a:tcPr marL="54864" marR="54864" marT="27432" marB="27432" anchor="ctr">
+                    <a:solidFill>
+                      <a:srgbClr val="F5F7F9"/>
+                    </a:solidFill>
+                  </a:tcPr>
+                </a:tc>
+              </a:tr>
+              <a:tr h="371698">
+                <a:tc>
+                  <a:txBody>
+                    <a:bodyPr/>
+                    <a:lstStyle/>
+                    <a:p>
+                      <a:pPr>
+                        <a:defRPr sz="650" b="1">
+                          <a:solidFill>
+                            <a:srgbClr val="0D1117"/>
+                          </a:solidFill>
+                          <a:latin typeface="Inter"/>
+                        </a:defRPr>
+                      </a:pPr>
+                      <a:r>
+                        <a:rPr>
+                          <a:latin typeface="Inter"/>
+                        </a:rPr>
+                        <a:t>Portfolio company</a:t>
+                      </a:r>
+                    </a:p>
+                  </a:txBody>
+                  <a:tcPr marL="54864" marR="54864" marT="27432" marB="27432" anchor="ctr">
+                    <a:solidFill>
+                      <a:srgbClr val="FFFFFF"/>
+                    </a:solidFill>
+                  </a:tcPr>
+                </a:tc>
+                <a:tc>
+                  <a:txBody>
+                    <a:bodyPr/>
+                    <a:lstStyle/>
+                    <a:p>
+                      <a:pPr>
+                        <a:defRPr sz="650" b="0">
+                          <a:solidFill>
+                            <a:srgbClr val="0D1117"/>
+                          </a:solidFill>
+                          <a:latin typeface="Inter"/>
+                        </a:defRPr>
+                      </a:pPr>
+                      <a:r>
+                        <a:rPr>
+                          <a:latin typeface="Inter"/>
+                        </a:rPr>
+                        <a:t>Fictional Company A (TEST)</a:t>
+                      </a:r>
+                    </a:p>
+                  </a:txBody>
+                  <a:tcPr marL="54864" marR="54864" marT="27432" marB="27432" anchor="ctr">
+                    <a:solidFill>
+                      <a:srgbClr val="FFFFFF"/>
+                    </a:solidFill>
+                  </a:tcPr>
+                </a:tc>
+                <a:tc>
+                  <a:txBody>
+                    <a:bodyPr/>
+                    <a:lstStyle/>
+                    <a:p>
+                      <a:pPr>
+                        <a:defRPr sz="650" b="0">
+                          <a:solidFill>
+                            <a:srgbClr val="0D1117"/>
+                          </a:solidFill>
+                          <a:latin typeface="Inter"/>
+                        </a:defRPr>
+                      </a:pPr>
+                      <a:r>
+                        <a:rPr>
+                          <a:latin typeface="Inter"/>
+                        </a:rPr>
+                        <a:t>24.0% of valued company NAV</a:t>
+                      </a:r>
+                    </a:p>
+                  </a:txBody>
+                  <a:tcPr marL="54864" marR="54864" marT="27432" marB="27432" anchor="ctr">
+                    <a:solidFill>
+                      <a:srgbClr val="FFFFFF"/>
+                    </a:solidFill>
+                  </a:tcPr>
+                </a:tc>
+                <a:tc>
+                  <a:txBody>
+                    <a:bodyPr/>
+                    <a:lstStyle/>
+                    <a:p>
+                      <a:pPr>
+                        <a:defRPr sz="650" b="0">
+                          <a:solidFill>
+                            <a:srgbClr val="0D1117"/>
+                          </a:solidFill>
+                          <a:latin typeface="Inter"/>
+                        </a:defRPr>
+                      </a:pPr>
+                      <a:r>
+                        <a:rPr>
+                          <a:latin typeface="Inter"/>
+                        </a:rPr>
+                        <a:t>Not assessed</a:t>
+                      </a:r>
+                    </a:p>
+                  </a:txBody>
+                  <a:tcPr marL="54864" marR="54864" marT="27432" marB="27432" anchor="ctr">
+                    <a:solidFill>
+                      <a:srgbClr val="FFFFFF"/>
+                    </a:solidFill>
+                  </a:tcPr>
+                </a:tc>
+                <a:tc>
+                  <a:txBody>
+                    <a:bodyPr/>
+                    <a:lstStyle/>
+                    <a:p>
+                      <a:pPr>
+                        <a:defRPr sz="650" b="1">
+                          <a:solidFill>
+                            <a:srgbClr val="F2A93B"/>
+                          </a:solidFill>
+                          <a:latin typeface="Inter"/>
+                        </a:defRPr>
+                      </a:pPr>
+                      <a:r>
+                        <a:rPr>
+                          <a:latin typeface="Inter"/>
+                        </a:rPr>
+                        <a:t>● Partial</a:t>
+                      </a:r>
+                    </a:p>
+                  </a:txBody>
+                  <a:tcPr marL="54864" marR="54864" marT="27432" marB="27432" anchor="ctr">
+                    <a:solidFill>
+                      <a:srgbClr val="F5F7F9"/>
+                    </a:solidFill>
+                  </a:tcPr>
+                </a:tc>
+                <a:tc>
+                  <a:txBody>
+                    <a:bodyPr/>
+                    <a:lstStyle/>
+                    <a:p>
+                      <a:pPr>
+                        <a:defRPr sz="650" b="0">
+                          <a:solidFill>
+                            <a:srgbClr val="0D1117"/>
+                          </a:solidFill>
+                          <a:latin typeface="Inter"/>
+                        </a:defRPr>
+                      </a:pPr>
+                      <a:r>
+                        <a:rPr>
+                          <a:latin typeface="Inter"/>
+                        </a:rPr>
+                        <a:t>Server company_concentration; canonical NAV; non-additive [S9]</a:t>
+                      </a:r>
+                    </a:p>
+                  </a:txBody>
+                  <a:tcPr marL="54864" marR="54864" marT="27432" marB="27432" anchor="ctr">
+                    <a:solidFill>
+                      <a:srgbClr val="FFFFFF"/>
+                    </a:solidFill>
+                  </a:tcPr>
+                </a:tc>
+              </a:tr>
+              <a:tr h="371700">
+                <a:tc>
+                  <a:txBody>
+                    <a:bodyPr/>
+                    <a:lstStyle/>
+                    <a:p>
+                      <a:pPr>
+                        <a:defRPr sz="650" b="1">
+                          <a:solidFill>
+                            <a:srgbClr val="0D1117"/>
+                          </a:solidFill>
+                          <a:latin typeface="Inter"/>
+                        </a:defRPr>
+                      </a:pPr>
+                      <a:r>
+                        <a:rPr>
+                          <a:latin typeface="Inter"/>
+                        </a:rPr>
+                        <a:t>Sector</a:t>
+                      </a:r>
+                    </a:p>
+                  </a:txBody>
+                  <a:tcPr marL="54864" marR="54864" marT="27432" marB="27432" anchor="ctr">
+                    <a:solidFill>
+                      <a:srgbClr val="F5F7F9"/>
+                    </a:solidFill>
+                  </a:tcPr>
+                </a:tc>
+                <a:tc>
+                  <a:txBody>
+                    <a:bodyPr/>
+                    <a:lstStyle/>
+                    <a:p>
+                      <a:pPr>
+                        <a:defRPr sz="650" b="0">
+                          <a:solidFill>
+                            <a:srgbClr val="0D1117"/>
+                          </a:solidFill>
+                          <a:latin typeface="Inter"/>
+                        </a:defRPr>
+                      </a:pPr>
+                      <a:r>
+                        <a:rPr>
+                          <a:latin typeface="Inter"/>
+                        </a:rPr>
+                        <a:t>Technology</a:t>
+                      </a:r>
+                    </a:p>
+                  </a:txBody>
+                  <a:tcPr marL="54864" marR="54864" marT="27432" marB="27432" anchor="ctr">
+                    <a:solidFill>
+                      <a:srgbClr val="F5F7F9"/>
+                    </a:solidFill>
+                  </a:tcPr>
+                </a:tc>
+                <a:tc>
+                  <a:txBody>
+                    <a:bodyPr/>
+                    <a:lstStyle/>
+                    <a:p>
+                      <a:pPr>
+                        <a:defRPr sz="650" b="0">
+                          <a:solidFill>
+                            <a:srgbClr val="0D1117"/>
+                          </a:solidFill>
+                          <a:latin typeface="Inter"/>
+                        </a:defRPr>
+                      </a:pPr>
+                      <a:r>
+                        <a:rPr>
+                          <a:latin typeface="Inter"/>
+                        </a:rPr>
+                        <a:t>41.0% of valued company NAV</a:t>
+                      </a:r>
+                    </a:p>
+                  </a:txBody>
+                  <a:tcPr marL="54864" marR="54864" marT="27432" marB="27432" anchor="ctr">
+                    <a:solidFill>
+                      <a:srgbClr val="F5F7F9"/>
+                    </a:solidFill>
+                  </a:tcPr>
+                </a:tc>
+                <a:tc>
+                  <a:txBody>
+                    <a:bodyPr/>
+                    <a:lstStyle/>
+                    <a:p>
+                      <a:pPr>
+                        <a:defRPr sz="650" b="0">
+                          <a:solidFill>
+                            <a:srgbClr val="0D1117"/>
+                          </a:solidFill>
+                          <a:latin typeface="Inter"/>
+                        </a:defRPr>
+                      </a:pPr>
+                      <a:r>
+                        <a:rPr>
+                          <a:latin typeface="Inter"/>
+                        </a:rPr>
+                        <a:t>Not assessed</a:t>
+                      </a:r>
+                    </a:p>
+                  </a:txBody>
+                  <a:tcPr marL="54864" marR="54864" marT="27432" marB="27432" anchor="ctr">
+                    <a:solidFill>
+                      <a:srgbClr val="F5F7F9"/>
+                    </a:solidFill>
+                  </a:tcPr>
+                </a:tc>
+                <a:tc>
+                  <a:txBody>
+                    <a:bodyPr/>
+                    <a:lstStyle/>
+                    <a:p>
+                      <a:pPr>
+                        <a:defRPr sz="650" b="1">
+                          <a:solidFill>
+                            <a:srgbClr val="F2A93B"/>
+                          </a:solidFill>
+                          <a:latin typeface="Inter"/>
+                        </a:defRPr>
+                      </a:pPr>
+                      <a:r>
+                        <a:rPr>
+                          <a:latin typeface="Inter"/>
+                        </a:rPr>
+                        <a:t>● Partial</a:t>
+                      </a:r>
+                    </a:p>
+                  </a:txBody>
+                  <a:tcPr marL="54864" marR="54864" marT="27432" marB="27432" anchor="ctr">
+                    <a:solidFill>
+                      <a:srgbClr val="F5F7F9"/>
+                    </a:solidFill>
+                  </a:tcPr>
+                </a:tc>
+                <a:tc>
+                  <a:txBody>
+                    <a:bodyPr/>
+                    <a:lstStyle/>
+                    <a:p>
+                      <a:pPr>
+                        <a:defRPr sz="650" b="0">
+                          <a:solidFill>
+                            <a:srgbClr val="0D1117"/>
+                          </a:solidFill>
+                          <a:latin typeface="Inter"/>
+                        </a:defRPr>
+                      </a:pPr>
+                      <a:r>
+                        <a:rPr>
+                          <a:latin typeface="Inter"/>
+                        </a:rPr>
+                        <a:t>Server sector_concentration; canonical NAV; non-additive [S9]</a:t>
+                      </a:r>
+                    </a:p>
+                  </a:txBody>
+                  <a:tcPr marL="54864" marR="54864" marT="27432" marB="27432" anchor="ctr">
+                    <a:solidFill>
+                      <a:srgbClr val="F5F7F9"/>
+                    </a:solidFill>
+                  </a:tcPr>
+                </a:tc>
+              </a:tr>
+            </a:tbl>
+          </a:graphicData>
+        </a:graphic>
+      </p:graphicFrame>
+      <p:sp>
+        <p:nvSpPr>
+          <p:cNvPr id="10" name="TextBox 9"/>
+          <p:cNvSpPr txBox="1"/>
+          <p:nvPr/>
+        </p:nvSpPr>
+        <p:spPr>
+          <a:xfrm>
+            <a:off x="640080" y="3568420"/>
+            <a:ext cx="10908792" cy="201168"/>
+          </a:xfrm>
+          <a:prstGeom prst="rect">
+            <a:avLst/>
+          </a:prstGeom>
+          <a:noFill/>
+        </p:spPr>
+        <p:txBody>
+          <a:bodyPr wrap="none" lIns="9144" rIns="9144" tIns="9144" bIns="9144" anchor="t">
+            <a:spAutoFit/>
+          </a:bodyPr>
+          <a:lstStyle/>
+          <a:p>
+            <a:pPr algn="l">
+              <a:spcAft>
+                <a:spcPts val="0"/>
+              </a:spcAft>
+              <a:defRPr sz="720" b="1">
+                <a:solidFill>
+                  <a:srgbClr val="4A5563"/>
+                </a:solidFill>
+                <a:latin typeface="Inter"/>
+              </a:defRPr>
+            </a:pPr>
+            <a:r>
+              <a:rPr>
+                <a:latin typeface="Inter"/>
+              </a:rPr>
+              <a:t>PORTFOLIO-COMPANY EVIDENCE</a:t>
+            </a:r>
+          </a:p>
+        </p:txBody>
+      </p:sp>
+      <p:graphicFrame>
+        <p:nvGraphicFramePr>
+          <p:cNvPr id="11" name="Table 10"/>
+          <p:cNvGraphicFramePr>
+            <a:graphicFrameLocks noGrp="1"/>
+          </p:cNvGraphicFramePr>
+          <p:nvPr/>
+        </p:nvGraphicFramePr>
+        <p:xfrm>
+          <a:off x="640080" y="3842740"/>
+          <a:ext cx="10908792" cy="1099166"/>
+        </p:xfrm>
+        <a:graphic>
+          <a:graphicData uri="http://schemas.openxmlformats.org/drawingml/2006/table">
+            <a:tbl>
+              <a:tblPr firstRow="1" bandRow="1">
+                <a:tableStyleId>{5C22544A-7EE6-4342-B048-85BDC9FD1C3A}</a:tableStyleId>
+              </a:tblPr>
+              <a:tblGrid>
+                <a:gridCol w="2011680"/>
+                <a:gridCol w="988568"/>
+                <a:gridCol w="988568"/>
+                <a:gridCol w="988568"/>
+                <a:gridCol w="988568"/>
+                <a:gridCol w="988568"/>
+                <a:gridCol w="988568"/>
+                <a:gridCol w="988568"/>
+                <a:gridCol w="988568"/>
+                <a:gridCol w="988568"/>
+              </a:tblGrid>
+              <a:tr h="366388">
+                <a:tc>
+                  <a:txBody>
+                    <a:bodyPr/>
+                    <a:lstStyle/>
+                    <a:p>
+                      <a:pPr>
+                        <a:defRPr sz="750" b="1">
+                          <a:solidFill>
+                            <a:srgbClr val="FFFFFF"/>
+                          </a:solidFill>
+                          <a:latin typeface="Inter"/>
+                        </a:defRPr>
+                      </a:pPr>
+                      <a:r>
+                        <a:rPr>
+                          <a:latin typeface="Inter"/>
+                        </a:rPr>
+                        <a:t>Company</a:t>
+                      </a:r>
+                    </a:p>
+                  </a:txBody>
+                  <a:tcPr marL="54864" marR="54864" marT="27432" marB="27432" anchor="ctr">
+                    <a:solidFill>
+                      <a:srgbClr val="0D1117"/>
+                    </a:solidFill>
+                  </a:tcPr>
+                </a:tc>
+                <a:tc>
+                  <a:txBody>
+                    <a:bodyPr/>
+                    <a:lstStyle/>
+                    <a:p>
+                      <a:pPr>
+                        <a:defRPr sz="750" b="1">
+                          <a:solidFill>
+                            <a:srgbClr val="FFFFFF"/>
+                          </a:solidFill>
+                          <a:latin typeface="Inter"/>
+                        </a:defRPr>
+                      </a:pPr>
+                      <a:r>
+                        <a:rPr>
+                          <a:latin typeface="Inter"/>
+                        </a:rPr>
+                        <a:t>Canonical NAV</a:t>
+                      </a:r>
+                    </a:p>
+                  </a:txBody>
+                  <a:tcPr marL="54864" marR="54864" marT="27432" marB="27432" anchor="ctr">
+                    <a:solidFill>
+                      <a:srgbClr val="0D1117"/>
+                    </a:solidFill>
+                  </a:tcPr>
+                </a:tc>
+                <a:tc>
+                  <a:txBody>
+                    <a:bodyPr/>
+                    <a:lstStyle/>
+                    <a:p>
+                      <a:pPr>
+                        <a:defRPr sz="750" b="1">
+                          <a:solidFill>
+                            <a:srgbClr val="FFFFFF"/>
+                          </a:solidFill>
+                          <a:latin typeface="Inter"/>
+                        </a:defRPr>
+                      </a:pPr>
+                      <a:r>
+                        <a:rPr>
+                          <a:latin typeface="Inter"/>
+                        </a:rPr>
+                        <a:t>Exact ILPA value</a:t>
+                      </a:r>
+                    </a:p>
+                  </a:txBody>
+                  <a:tcPr marL="54864" marR="54864" marT="27432" marB="27432" anchor="ctr">
+                    <a:solidFill>
+                      <a:srgbClr val="0D1117"/>
+                    </a:solidFill>
+                  </a:tcPr>
+                </a:tc>
+                <a:tc>
+                  <a:txBody>
+                    <a:bodyPr/>
+                    <a:lstStyle/>
+                    <a:p>
+                      <a:pPr>
+                        <a:defRPr sz="750" b="1">
+                          <a:solidFill>
+                            <a:srgbClr val="FFFFFF"/>
+                          </a:solidFill>
+                          <a:latin typeface="Inter"/>
+                        </a:defRPr>
+                      </a:pPr>
+                      <a:r>
+                        <a:rPr>
+                          <a:latin typeface="Inter"/>
+                        </a:rPr>
+                        <a:t>Valuation / reporting date</a:t>
+                      </a:r>
+                    </a:p>
+                  </a:txBody>
+                  <a:tcPr marL="54864" marR="54864" marT="27432" marB="27432" anchor="ctr">
+                    <a:solidFill>
+                      <a:srgbClr val="0D1117"/>
+                    </a:solidFill>
+                  </a:tcPr>
+                </a:tc>
+                <a:tc>
+                  <a:txBody>
+                    <a:bodyPr/>
+                    <a:lstStyle/>
+                    <a:p>
+                      <a:pPr>
+                        <a:defRPr sz="750" b="1">
+                          <a:solidFill>
+                            <a:srgbClr val="FFFFFF"/>
+                          </a:solidFill>
+                          <a:latin typeface="Inter"/>
+                        </a:defRPr>
+                      </a:pPr>
+                      <a:r>
+                        <a:rPr>
+                          <a:latin typeface="Inter"/>
+                        </a:rPr>
+                        <a:t>Projected range</a:t>
+                      </a:r>
+                    </a:p>
+                  </a:txBody>
+                  <a:tcPr marL="54864" marR="54864" marT="27432" marB="27432" anchor="ctr">
+                    <a:solidFill>
+                      <a:srgbClr val="0D1117"/>
+                    </a:solidFill>
+                  </a:tcPr>
+                </a:tc>
+                <a:tc>
+                  <a:txBody>
+                    <a:bodyPr/>
+                    <a:lstStyle/>
+                    <a:p>
+                      <a:pPr>
+                        <a:defRPr sz="750" b="1">
+                          <a:solidFill>
+                            <a:srgbClr val="FFFFFF"/>
+                          </a:solidFill>
+                          <a:latin typeface="Inter"/>
+                        </a:defRPr>
+                      </a:pPr>
+                      <a:r>
+                        <a:rPr>
+                          <a:latin typeface="Inter"/>
+                        </a:rPr>
+                        <a:t>Leverage / coverage</a:t>
+                      </a:r>
+                    </a:p>
+                  </a:txBody>
+                  <a:tcPr marL="54864" marR="54864" marT="27432" marB="27432" anchor="ctr">
+                    <a:solidFill>
+                      <a:srgbClr val="0D1117"/>
+                    </a:solidFill>
+                  </a:tcPr>
+                </a:tc>
+                <a:tc>
+                  <a:txBody>
+                    <a:bodyPr/>
+                    <a:lstStyle/>
+                    <a:p>
+                      <a:pPr>
+                        <a:defRPr sz="750" b="1">
+                          <a:solidFill>
+                            <a:srgbClr val="FFFFFF"/>
+                          </a:solidFill>
+                          <a:latin typeface="Inter"/>
+                        </a:defRPr>
+                      </a:pPr>
+                      <a:r>
+                        <a:rPr>
+                          <a:latin typeface="Inter"/>
+                        </a:rPr>
+                        <a:t>Covenant status</a:t>
+                      </a:r>
+                    </a:p>
+                  </a:txBody>
+                  <a:tcPr marL="54864" marR="54864" marT="27432" marB="27432" anchor="ctr">
+                    <a:solidFill>
+                      <a:srgbClr val="0D1117"/>
+                    </a:solidFill>
+                  </a:tcPr>
+                </a:tc>
+                <a:tc>
+                  <a:txBody>
+                    <a:bodyPr/>
+                    <a:lstStyle/>
+                    <a:p>
+                      <a:pPr>
+                        <a:defRPr sz="750" b="1">
+                          <a:solidFill>
+                            <a:srgbClr val="FFFFFF"/>
+                          </a:solidFill>
+                          <a:latin typeface="Inter"/>
+                        </a:defRPr>
+                      </a:pPr>
+                      <a:r>
+                        <a:rPr>
+                          <a:latin typeface="Inter"/>
+                        </a:rPr>
+                        <a:t>Operating-quality evidence</a:t>
+                      </a:r>
+                    </a:p>
+                  </a:txBody>
+                  <a:tcPr marL="54864" marR="54864" marT="27432" marB="27432" anchor="ctr">
+                    <a:solidFill>
+                      <a:srgbClr val="0D1117"/>
+                    </a:solidFill>
+                  </a:tcPr>
+                </a:tc>
+                <a:tc>
+                  <a:txBody>
+                    <a:bodyPr/>
+                    <a:lstStyle/>
+                    <a:p>
+                      <a:pPr>
+                        <a:defRPr sz="750" b="1">
+                          <a:solidFill>
+                            <a:srgbClr val="FFFFFF"/>
+                          </a:solidFill>
+                          <a:latin typeface="Inter"/>
+                        </a:defRPr>
+                      </a:pPr>
+                      <a:r>
+                        <a:rPr>
+                          <a:latin typeface="Inter"/>
+                        </a:rPr>
+                        <a:t>Reconciliation</a:t>
+                      </a:r>
+                    </a:p>
+                  </a:txBody>
+                  <a:tcPr marL="54864" marR="54864" marT="27432" marB="27432" anchor="ctr">
+                    <a:solidFill>
+                      <a:srgbClr val="0D1117"/>
+                    </a:solidFill>
+                  </a:tcPr>
+                </a:tc>
+                <a:tc>
+                  <a:txBody>
+                    <a:bodyPr/>
+                    <a:lstStyle/>
+                    <a:p>
+                      <a:pPr>
+                        <a:defRPr sz="750" b="1">
+                          <a:solidFill>
+                            <a:srgbClr val="FFFFFF"/>
+                          </a:solidFill>
+                          <a:latin typeface="Inter"/>
+                        </a:defRPr>
+                      </a:pPr>
+                      <a:r>
+                        <a:rPr>
+                          <a:latin typeface="Inter"/>
+                        </a:rPr>
+                        <a:t>Source</a:t>
+                      </a:r>
+                    </a:p>
+                  </a:txBody>
+                  <a:tcPr marL="54864" marR="54864" marT="27432" marB="27432" anchor="ctr">
+                    <a:solidFill>
+                      <a:srgbClr val="0D1117"/>
+                    </a:solidFill>
+                  </a:tcPr>
+                </a:tc>
+              </a:tr>
+              <a:tr h="366388">
+                <a:tc>
+                  <a:txBody>
+                    <a:bodyPr/>
+                    <a:lstStyle/>
+                    <a:p>
+                      <a:pPr>
+                        <a:defRPr sz="650" b="1">
+                          <a:solidFill>
+                            <a:srgbClr val="0D1117"/>
+                          </a:solidFill>
+                          <a:latin typeface="Inter"/>
+                        </a:defRPr>
+                      </a:pPr>
+                      <a:r>
+                        <a:rPr>
+                          <a:latin typeface="Inter"/>
+                        </a:rPr>
+                        <a:t>Fictional Company A (TEST)</a:t>
+                      </a:r>
+                    </a:p>
+                  </a:txBody>
+                  <a:tcPr marL="54864" marR="54864" marT="27432" marB="27432" anchor="ctr">
+                    <a:solidFill>
+                      <a:srgbClr val="FFFFFF"/>
+                    </a:solidFill>
+                  </a:tcPr>
+                </a:tc>
+                <a:tc>
+                  <a:txBody>
+                    <a:bodyPr/>
+                    <a:lstStyle/>
+                    <a:p>
+                      <a:pPr>
+                        <a:defRPr sz="650" b="0">
+                          <a:solidFill>
+                            <a:srgbClr val="0D1117"/>
+                          </a:solidFill>
+                          <a:latin typeface="Inter"/>
+                        </a:defRPr>
+                      </a:pPr>
+                      <a:r>
+                        <a:rPr>
+                          <a:latin typeface="Inter"/>
+                        </a:rPr>
+                        <a:t>$24.0M</a:t>
+                      </a:r>
+                    </a:p>
+                  </a:txBody>
+                  <a:tcPr marL="54864" marR="54864" marT="27432" marB="27432" anchor="ctr">
+                    <a:solidFill>
+                      <a:srgbClr val="FFFFFF"/>
+                    </a:solidFill>
+                  </a:tcPr>
+                </a:tc>
+                <a:tc>
+                  <a:txBody>
+                    <a:bodyPr/>
+                    <a:lstStyle/>
+                    <a:p>
+                      <a:pPr>
+                        <a:defRPr sz="650" b="0">
+                          <a:solidFill>
+                            <a:srgbClr val="0D1117"/>
+                          </a:solidFill>
+                          <a:latin typeface="Inter"/>
+                        </a:defRPr>
+                      </a:pPr>
+                      <a:r>
+                        <a:rPr>
+                          <a:latin typeface="Inter"/>
+                        </a:rPr>
+                        <a:t>FMV $24.0M in USD</a:t>
+                      </a:r>
+                    </a:p>
+                  </a:txBody>
+                  <a:tcPr marL="54864" marR="54864" marT="27432" marB="27432" anchor="ctr">
+                    <a:solidFill>
+                      <a:srgbClr val="FFFFFF"/>
+                    </a:solidFill>
+                  </a:tcPr>
+                </a:tc>
+                <a:tc>
+                  <a:txBody>
+                    <a:bodyPr/>
+                    <a:lstStyle/>
+                    <a:p>
+                      <a:pPr>
+                        <a:defRPr sz="650" b="0">
+                          <a:solidFill>
+                            <a:srgbClr val="0D1117"/>
+                          </a:solidFill>
+                          <a:latin typeface="Inter"/>
+                        </a:defRPr>
+                      </a:pPr>
+                      <a:r>
+                        <a:rPr>
+                          <a:latin typeface="Inter"/>
+                        </a:rPr>
+                        <a:t>2026-06-30 / 2026-06-30</a:t>
+                      </a:r>
+                    </a:p>
+                  </a:txBody>
+                  <a:tcPr marL="54864" marR="54864" marT="27432" marB="27432" anchor="ctr">
+                    <a:solidFill>
+                      <a:srgbClr val="FFFFFF"/>
+                    </a:solidFill>
+                  </a:tcPr>
+                </a:tc>
+                <a:tc>
+                  <a:txBody>
+                    <a:bodyPr/>
+                    <a:lstStyle/>
+                    <a:p>
+                      <a:pPr>
+                        <a:defRPr sz="650" b="0">
+                          <a:solidFill>
+                            <a:srgbClr val="0D1117"/>
+                          </a:solidFill>
+                          <a:latin typeface="Inter"/>
+                        </a:defRPr>
+                      </a:pPr>
+                      <a:r>
+                        <a:rPr>
+                          <a:latin typeface="Inter"/>
+                        </a:rPr>
+                        <a:t>Leverage 3.0–4.0x</a:t>
+                      </a:r>
+                    </a:p>
+                  </a:txBody>
+                  <a:tcPr marL="54864" marR="54864" marT="27432" marB="27432" anchor="ctr">
+                    <a:solidFill>
+                      <a:srgbClr val="FFFFFF"/>
+                    </a:solidFill>
+                  </a:tcPr>
+                </a:tc>
+                <a:tc>
+                  <a:txBody>
+                    <a:bodyPr/>
+                    <a:lstStyle/>
+                    <a:p>
+                      <a:pPr>
+                        <a:defRPr sz="650" b="0">
+                          <a:solidFill>
+                            <a:srgbClr val="0D1117"/>
+                          </a:solidFill>
+                          <a:latin typeface="Inter"/>
+                        </a:defRPr>
+                      </a:pPr>
+                      <a:r>
+                        <a:rPr>
+                          <a:latin typeface="Inter"/>
+                        </a:rPr>
+                        <a:t>Interest coverage 2.0–3.0x</a:t>
+                      </a:r>
+                    </a:p>
+                  </a:txBody>
+                  <a:tcPr marL="54864" marR="54864" marT="27432" marB="27432" anchor="ctr">
+                    <a:solidFill>
+                      <a:srgbClr val="FFFFFF"/>
+                    </a:solidFill>
+                  </a:tcPr>
+                </a:tc>
+                <a:tc>
+                  <a:txBody>
+                    <a:bodyPr/>
+                    <a:lstStyle/>
+                    <a:p>
+                      <a:pPr>
+                        <a:defRPr sz="650" b="0">
+                          <a:solidFill>
+                            <a:srgbClr val="0D1117"/>
+                          </a:solidFill>
+                          <a:latin typeface="Inter"/>
+                        </a:defRPr>
+                      </a:pPr>
+                      <a:r>
+                        <a:rPr>
+                          <a:latin typeface="Inter"/>
+                        </a:rPr>
+                        <a:t>In compliance</a:t>
+                      </a:r>
+                    </a:p>
+                  </a:txBody>
+                  <a:tcPr marL="54864" marR="54864" marT="27432" marB="27432" anchor="ctr">
+                    <a:solidFill>
+                      <a:srgbClr val="FFFFFF"/>
+                    </a:solidFill>
+                  </a:tcPr>
+                </a:tc>
+                <a:tc>
+                  <a:txBody>
+                    <a:bodyPr/>
+                    <a:lstStyle/>
+                    <a:p>
+                      <a:pPr>
+                        <a:defRPr sz="650" b="0">
+                          <a:solidFill>
+                            <a:srgbClr val="0D1117"/>
+                          </a:solidFill>
+                          <a:latin typeface="Inter"/>
+                        </a:defRPr>
+                      </a:pPr>
+                      <a:r>
+                        <a:rPr>
+                          <a:latin typeface="Inter"/>
+                        </a:rPr>
+                        <a:t>Revenue growth 5%–10%</a:t>
+                      </a:r>
+                    </a:p>
+                  </a:txBody>
+                  <a:tcPr marL="54864" marR="54864" marT="27432" marB="27432" anchor="ctr">
+                    <a:solidFill>
+                      <a:srgbClr val="FFFFFF"/>
+                    </a:solidFill>
+                  </a:tcPr>
+                </a:tc>
+                <a:tc>
+                  <a:txBody>
+                    <a:bodyPr/>
+                    <a:lstStyle/>
+                    <a:p>
+                      <a:pPr>
+                        <a:defRPr sz="650" b="0">
+                          <a:solidFill>
+                            <a:srgbClr val="0D1117"/>
+                          </a:solidFill>
+                          <a:latin typeface="Inter"/>
+                        </a:defRPr>
+                      </a:pPr>
+                      <a:r>
+                        <a:rPr>
+                          <a:latin typeface="Inter"/>
+                        </a:rPr>
+                        <a:t>Matched</a:t>
+                      </a:r>
+                    </a:p>
+                  </a:txBody>
+                  <a:tcPr marL="54864" marR="54864" marT="27432" marB="27432" anchor="ctr">
+                    <a:solidFill>
+                      <a:srgbClr val="FFFFFF"/>
+                    </a:solidFill>
+                  </a:tcPr>
+                </a:tc>
+                <a:tc>
+                  <a:txBody>
+                    <a:bodyPr/>
+                    <a:lstStyle/>
+                    <a:p>
+                      <a:pPr>
+                        <a:defRPr sz="650" b="0">
+                          <a:solidFill>
+                            <a:srgbClr val="0D1117"/>
+                          </a:solidFill>
+                          <a:latin typeface="Inter"/>
+                        </a:defRPr>
+                      </a:pPr>
+                      <a:r>
+                        <a:rPr>
+                          <a:latin typeface="Inter"/>
+                        </a:rPr>
+                        <a:t>[S9]</a:t>
+                      </a:r>
+                    </a:p>
+                  </a:txBody>
+                  <a:tcPr marL="54864" marR="54864" marT="27432" marB="27432" anchor="ctr">
+                    <a:solidFill>
+                      <a:srgbClr val="FFFFFF"/>
+                    </a:solidFill>
+                  </a:tcPr>
+                </a:tc>
+              </a:tr>
+              <a:tr h="366390">
+                <a:tc>
+                  <a:txBody>
+                    <a:bodyPr/>
+                    <a:lstStyle/>
+                    <a:p>
+                      <a:pPr>
+                        <a:defRPr sz="650" b="1">
+                          <a:solidFill>
+                            <a:srgbClr val="0D1117"/>
+                          </a:solidFill>
+                          <a:latin typeface="Inter"/>
+                        </a:defRPr>
+                      </a:pPr>
+                      <a:r>
+                        <a:rPr>
+                          <a:latin typeface="Inter"/>
+                        </a:rPr>
+                        <a:t>Fictional Company B (TEST)</a:t>
+                      </a:r>
+                    </a:p>
+                  </a:txBody>
+                  <a:tcPr marL="54864" marR="54864" marT="27432" marB="27432" anchor="ctr">
+                    <a:solidFill>
+                      <a:srgbClr val="F5F7F9"/>
+                    </a:solidFill>
+                  </a:tcPr>
+                </a:tc>
+                <a:tc>
+                  <a:txBody>
+                    <a:bodyPr/>
+                    <a:lstStyle/>
+                    <a:p>
+                      <a:pPr>
+                        <a:defRPr sz="650" b="0">
+                          <a:solidFill>
+                            <a:srgbClr val="0D1117"/>
+                          </a:solidFill>
+                          <a:latin typeface="Inter"/>
+                        </a:defRPr>
+                      </a:pPr>
+                      <a:r>
+                        <a:rPr>
+                          <a:latin typeface="Inter"/>
+                        </a:rPr>
+                        <a:t>$18.0M</a:t>
+                      </a:r>
+                    </a:p>
+                  </a:txBody>
+                  <a:tcPr marL="54864" marR="54864" marT="27432" marB="27432" anchor="ctr">
+                    <a:solidFill>
+                      <a:srgbClr val="F5F7F9"/>
+                    </a:solidFill>
+                  </a:tcPr>
+                </a:tc>
+                <a:tc>
+                  <a:txBody>
+                    <a:bodyPr/>
+                    <a:lstStyle/>
+                    <a:p>
+                      <a:pPr>
+                        <a:defRPr sz="650" b="0">
+                          <a:solidFill>
+                            <a:srgbClr val="0D1117"/>
+                          </a:solidFill>
+                          <a:latin typeface="Inter"/>
+                        </a:defRPr>
+                      </a:pPr>
+                      <a:r>
+                        <a:rPr>
+                          <a:latin typeface="Inter"/>
+                        </a:rPr>
+                        <a:t>FMV $18.0M in USD</a:t>
+                      </a:r>
+                    </a:p>
+                  </a:txBody>
+                  <a:tcPr marL="54864" marR="54864" marT="27432" marB="27432" anchor="ctr">
+                    <a:solidFill>
+                      <a:srgbClr val="F5F7F9"/>
+                    </a:solidFill>
+                  </a:tcPr>
+                </a:tc>
+                <a:tc>
+                  <a:txBody>
+                    <a:bodyPr/>
+                    <a:lstStyle/>
+                    <a:p>
+                      <a:pPr>
+                        <a:defRPr sz="650" b="0">
+                          <a:solidFill>
+                            <a:srgbClr val="0D1117"/>
+                          </a:solidFill>
+                          <a:latin typeface="Inter"/>
+                        </a:defRPr>
+                      </a:pPr>
+                      <a:r>
+                        <a:rPr>
+                          <a:latin typeface="Inter"/>
+                        </a:rPr>
+                        <a:t>2026-06-30 / 2026-06-30</a:t>
+                      </a:r>
+                    </a:p>
+                  </a:txBody>
+                  <a:tcPr marL="54864" marR="54864" marT="27432" marB="27432" anchor="ctr">
+                    <a:solidFill>
+                      <a:srgbClr val="F5F7F9"/>
+                    </a:solidFill>
+                  </a:tcPr>
+                </a:tc>
+                <a:tc>
+                  <a:txBody>
+                    <a:bodyPr/>
+                    <a:lstStyle/>
+                    <a:p>
+                      <a:pPr>
+                        <a:defRPr sz="650" b="0">
+                          <a:solidFill>
+                            <a:srgbClr val="0D1117"/>
+                          </a:solidFill>
+                          <a:latin typeface="Inter"/>
+                        </a:defRPr>
+                      </a:pPr>
+                      <a:r>
+                        <a:rPr>
+                          <a:latin typeface="Inter"/>
+                        </a:rPr>
+                        <a:t>Leverage 4.0–5.0x</a:t>
+                      </a:r>
+                    </a:p>
+                  </a:txBody>
+                  <a:tcPr marL="54864" marR="54864" marT="27432" marB="27432" anchor="ctr">
+                    <a:solidFill>
+                      <a:srgbClr val="F5F7F9"/>
+                    </a:solidFill>
+                  </a:tcPr>
+                </a:tc>
+                <a:tc>
+                  <a:txBody>
+                    <a:bodyPr/>
+                    <a:lstStyle/>
+                    <a:p>
+                      <a:pPr>
+                        <a:defRPr sz="650" b="0">
+                          <a:solidFill>
+                            <a:srgbClr val="0D1117"/>
+                          </a:solidFill>
+                          <a:latin typeface="Inter"/>
+                        </a:defRPr>
+                      </a:pPr>
+                      <a:r>
+                        <a:rPr>
+                          <a:latin typeface="Inter"/>
+                        </a:rPr>
+                        <a:t>Interest coverage 1.5–2.0x</a:t>
+                      </a:r>
+                    </a:p>
+                  </a:txBody>
+                  <a:tcPr marL="54864" marR="54864" marT="27432" marB="27432" anchor="ctr">
+                    <a:solidFill>
+                      <a:srgbClr val="F5F7F9"/>
+                    </a:solidFill>
+                  </a:tcPr>
+                </a:tc>
+                <a:tc>
+                  <a:txBody>
+                    <a:bodyPr/>
+                    <a:lstStyle/>
+                    <a:p>
+                      <a:pPr>
+                        <a:defRPr sz="650" b="0">
+                          <a:solidFill>
+                            <a:srgbClr val="0D1117"/>
+                          </a:solidFill>
+                          <a:latin typeface="Inter"/>
+                        </a:defRPr>
+                      </a:pPr>
+                      <a:r>
+                        <a:rPr>
+                          <a:latin typeface="Inter"/>
+                        </a:rPr>
+                        <a:t>Watch</a:t>
+                      </a:r>
+                    </a:p>
+                  </a:txBody>
+                  <a:tcPr marL="54864" marR="54864" marT="27432" marB="27432" anchor="ctr">
+                    <a:solidFill>
+                      <a:srgbClr val="F5F7F9"/>
+                    </a:solidFill>
+                  </a:tcPr>
+                </a:tc>
+                <a:tc>
+                  <a:txBody>
+                    <a:bodyPr/>
+                    <a:lstStyle/>
+                    <a:p>
+                      <a:pPr>
+                        <a:defRPr sz="650" b="0">
+                          <a:solidFill>
+                            <a:srgbClr val="0D1117"/>
+                          </a:solidFill>
+                          <a:latin typeface="Inter"/>
+                        </a:defRPr>
+                      </a:pPr>
+                      <a:r>
+                        <a:rPr>
+                          <a:latin typeface="Inter"/>
+                        </a:rPr>
+                        <a:t>EBITDA margin 15%–20%</a:t>
+                      </a:r>
+                    </a:p>
+                  </a:txBody>
+                  <a:tcPr marL="54864" marR="54864" marT="27432" marB="27432" anchor="ctr">
+                    <a:solidFill>
+                      <a:srgbClr val="F5F7F9"/>
+                    </a:solidFill>
+                  </a:tcPr>
+                </a:tc>
+                <a:tc>
+                  <a:txBody>
+                    <a:bodyPr/>
+                    <a:lstStyle/>
+                    <a:p>
+                      <a:pPr>
+                        <a:defRPr sz="650" b="0">
+                          <a:solidFill>
+                            <a:srgbClr val="0D1117"/>
+                          </a:solidFill>
+                          <a:latin typeface="Inter"/>
+                        </a:defRPr>
+                      </a:pPr>
+                      <a:r>
+                        <a:rPr>
+                          <a:latin typeface="Inter"/>
+                        </a:rPr>
+                        <a:t>Matched</a:t>
+                      </a:r>
+                    </a:p>
+                  </a:txBody>
+                  <a:tcPr marL="54864" marR="54864" marT="27432" marB="27432" anchor="ctr">
+                    <a:solidFill>
+                      <a:srgbClr val="F5F7F9"/>
+                    </a:solidFill>
+                  </a:tcPr>
+                </a:tc>
+                <a:tc>
+                  <a:txBody>
+                    <a:bodyPr/>
+                    <a:lstStyle/>
+                    <a:p>
+                      <a:pPr>
+                        <a:defRPr sz="650" b="0">
+                          <a:solidFill>
+                            <a:srgbClr val="0D1117"/>
+                          </a:solidFill>
+                          <a:latin typeface="Inter"/>
+                        </a:defRPr>
+                      </a:pPr>
+                      <a:r>
+                        <a:rPr>
+                          <a:latin typeface="Inter"/>
+                        </a:rPr>
+                        <a:t>[S9]</a:t>
+                      </a:r>
+                    </a:p>
+                  </a:txBody>
+                  <a:tcPr marL="54864" marR="54864" marT="27432" marB="27432" anchor="ctr">
+                    <a:solidFill>
+                      <a:srgbClr val="F5F7F9"/>
+                    </a:solidFill>
+                  </a:tcPr>
+                </a:tc>
+              </a:tr>
+            </a:tbl>
+          </a:graphicData>
+        </a:graphic>
+      </p:graphicFrame>
+      <p:sp>
+        <p:nvSpPr>
+          <p:cNvPr id="12" name="TextBox 11"/>
+          <p:cNvSpPr txBox="1"/>
+          <p:nvPr/>
+        </p:nvSpPr>
+        <p:spPr>
+          <a:xfrm>
+            <a:off x="640080" y="5051635"/>
+            <a:ext cx="10908792" cy="1166284"/>
+          </a:xfrm>
+          <a:prstGeom prst="rect">
+            <a:avLst/>
+          </a:prstGeom>
+          <a:noFill/>
+        </p:spPr>
+        <p:txBody>
+          <a:bodyPr wrap="none" lIns="9144" rIns="9144" tIns="9144" bIns="9144" anchor="t">
+            <a:spAutoFit/>
+          </a:bodyPr>
+          <a:lstStyle/>
+          <a:p>
+            <a:pPr algn="l">
+              <a:spcAft>
+                <a:spcPts val="0"/>
+              </a:spcAft>
+              <a:defRPr sz="1100" b="0">
+                <a:solidFill>
+                  <a:srgbClr val="4A5563"/>
+                </a:solidFill>
+                <a:latin typeface="Inter"/>
+              </a:defRPr>
+            </a:pPr>
+            <a:r>
+              <a:rPr>
+                <a:latin typeface="Inter"/>
+              </a:rPr>
+              <a:t>Selected artifact fictional-ilpa-artifact-test, version 1; parser ilpa_portfolio_company_draft_2026_07_22 version 1.0.0; projection registry private-markets-holding-exact-to-range-v1, checksum aaaaaaaaaaaaaaaaaaaaaaaaaaaaaaaaaaaaaaaaaaaaaaaaaaaaaaaaaaaaaaaa. Draft — July 22, 2026. Canonical values, exact ILPA source values and projected Gradient ranges remain separate [S9].</a:t>
+            </a:r>
+          </a:p>
+        </p:txBody>
+      </p:sp>
+      <p:sp>
+        <p:nvSpPr>
+          <p:cNvPr id="13" name="Rectangle 12"/>
+          <p:cNvSpPr/>
+          <p:nvPr/>
+        </p:nvSpPr>
+        <p:spPr>
+          <a:xfrm>
+            <a:off x="640080" y="6446520"/>
+            <a:ext cx="10908792" cy="9144"/>
+          </a:xfrm>
+          <a:prstGeom prst="rect">
+            <a:avLst/>
+          </a:prstGeom>
+          <a:solidFill>
+            <a:srgbClr val="E3E7EC"/>
+          </a:solidFill>
+          <a:ln>
+            <a:solidFill>
+              <a:srgbClr val="E3E7EC"/>
+            </a:solidFill>
+          </a:ln>
+        </p:spPr>
+        <p:style>
+          <a:lnRef idx="1">
+            <a:schemeClr val="accent1"/>
+          </a:lnRef>
+          <a:fillRef idx="3">
+            <a:schemeClr val="accent1"/>
+          </a:fillRef>
+          <a:effectRef idx="2">
+            <a:schemeClr val="accent1"/>
+          </a:effectRef>
+          <a:fontRef idx="minor">
+            <a:schemeClr val="lt1"/>
+          </a:fontRef>
+        </p:style>
+        <p:txBody>
+          <a:bodyPr rtlCol="0" anchor="ctr"/>
+          <a:lstStyle/>
+          <a:p>
+            <a:pPr algn="ctr">
+              <a:defRPr>
+                <a:latin typeface="Inter"/>
+              </a:defRPr>
+            </a:pPr>
+          </a:p>
+        </p:txBody>
+      </p:sp>
+      <p:sp>
+        <p:nvSpPr>
+          <p:cNvPr id="14" name="TextBox 13"/>
+          <p:cNvSpPr txBox="1"/>
+          <p:nvPr/>
+        </p:nvSpPr>
+        <p:spPr>
+          <a:xfrm>
+            <a:off x="640080" y="6501384"/>
+            <a:ext cx="4297680" cy="146304"/>
+          </a:xfrm>
+          <a:prstGeom prst="rect">
+            <a:avLst/>
+          </a:prstGeom>
+          <a:noFill/>
+        </p:spPr>
+        <p:txBody>
+          <a:bodyPr wrap="none" lIns="9144" rIns="9144" tIns="9144" bIns="9144" anchor="t">
+            <a:spAutoFit/>
+          </a:bodyPr>
+          <a:lstStyle/>
+          <a:p>
+            <a:pPr algn="l">
+              <a:spcAft>
+                <a:spcPts val="0"/>
+              </a:spcAft>
+              <a:defRPr sz="650" b="0">
+                <a:solidFill>
+                  <a:srgbClr val="8A94A1"/>
+                </a:solidFill>
+                <a:latin typeface="Inter"/>
+              </a:defRPr>
+            </a:pPr>
+            <a:r>
+              <a:rPr>
+                <a:latin typeface="Inter"/>
+              </a:rPr>
+              <a:t>Sources: S4 · S9</a:t>
+            </a:r>
+          </a:p>
+        </p:txBody>
+      </p:sp>
+      <p:sp>
+        <p:nvSpPr>
+          <p:cNvPr id="15" name="TextBox 14"/>
+          <p:cNvSpPr txBox="1"/>
+          <p:nvPr/>
+        </p:nvSpPr>
+        <p:spPr>
+          <a:xfrm>
+            <a:off x="4480560" y="6501384"/>
+            <a:ext cx="5303520" cy="146304"/>
+          </a:xfrm>
+          <a:prstGeom prst="rect">
+            <a:avLst/>
+          </a:prstGeom>
+          <a:noFill/>
+        </p:spPr>
+        <p:txBody>
+          <a:bodyPr wrap="none" lIns="9144" rIns="9144" tIns="9144" bIns="9144" anchor="t">
+            <a:spAutoFit/>
+          </a:bodyPr>
+          <a:lstStyle/>
+          <a:p>
+            <a:pPr algn="ctr">
+              <a:spcAft>
+                <a:spcPts val="0"/>
+              </a:spcAft>
+              <a:defRPr sz="650" b="0">
+                <a:solidFill>
+                  <a:srgbClr val="8A94A1"/>
+                </a:solidFill>
+                <a:latin typeface="Inter"/>
+              </a:defRPr>
+            </a:pPr>
+            <a:r>
+              <a:rPr>
+                <a:latin typeface="Inter"/>
+              </a:rPr>
+              <a:t>TEST DATA — fictional portfolio for rendering tests only · Data as of 2026-06-30</a:t>
+            </a:r>
+          </a:p>
+        </p:txBody>
+      </p:sp>
+      <p:sp>
+        <p:nvSpPr>
+          <p:cNvPr id="16" name="TextBox 15"/>
+          <p:cNvSpPr txBox="1"/>
+          <p:nvPr/>
+        </p:nvSpPr>
+        <p:spPr>
+          <a:xfrm>
+            <a:off x="10287000" y="6501384"/>
+            <a:ext cx="1261872" cy="146304"/>
+          </a:xfrm>
+          <a:prstGeom prst="rect">
+            <a:avLst/>
+          </a:prstGeom>
+          <a:noFill/>
+        </p:spPr>
+        <p:txBody>
+          <a:bodyPr wrap="none" lIns="9144" rIns="9144" tIns="9144" bIns="9144" anchor="t">
+            <a:spAutoFit/>
+          </a:bodyPr>
+          <a:lstStyle/>
+          <a:p>
+            <a:pPr algn="r">
+              <a:spcAft>
+                <a:spcPts val="0"/>
+              </a:spcAft>
+              <a:defRPr sz="650" b="0">
+                <a:solidFill>
+                  <a:srgbClr val="8A94A1"/>
+                </a:solidFill>
+                <a:latin typeface="Inter"/>
+              </a:defRPr>
+            </a:pPr>
+            <a:r>
+              <a:rPr>
+                <a:latin typeface="Inter"/>
+              </a:rPr>
+              <a:t>27</a:t>
+            </a:r>
+          </a:p>
+        </p:txBody>
+      </p:sp>
+    </p:spTree>
+  </p:cSld>
+  <p:clrMapOvr>
+    <a:masterClrMapping/>
+  </p:clrMapOvr>
+</p:sld>
+</file>
+
+<file path=ppt/slides/slide28.xml><?xml version="1.0" encoding="utf-8"?>
+<p:sld xmlns:a="http://schemas.openxmlformats.org/drawingml/2006/main" xmlns:p="http://schemas.openxmlformats.org/presentationml/2006/main" xmlns:r="http://schemas.openxmlformats.org/officeDocument/2006/relationships">
+  <p:cSld>
+    <p:spTree>
+      <p:nvGrpSpPr>
+        <p:cNvPr id="1" name=""/>
+        <p:cNvGrpSpPr/>
+        <p:nvPr/>
+      </p:nvGrpSpPr>
+      <p:grpSpPr/>
+      <p:sp>
+        <p:nvSpPr>
+          <p:cNvPr id="2" name="Rectangle 1"/>
+          <p:cNvSpPr/>
+          <p:nvPr/>
+        </p:nvSpPr>
+        <p:spPr>
+          <a:xfrm>
+            <a:off x="0" y="0"/>
+            <a:ext cx="12191695" cy="6858000"/>
+          </a:xfrm>
+          <a:prstGeom prst="rect">
+            <a:avLst/>
+          </a:prstGeom>
+          <a:solidFill>
+            <a:srgbClr val="FFFFFF"/>
+          </a:solidFill>
+          <a:ln>
+            <a:solidFill>
+              <a:srgbClr val="FFFFFF"/>
+            </a:solidFill>
+          </a:ln>
+        </p:spPr>
+        <p:style>
+          <a:lnRef idx="1">
+            <a:schemeClr val="accent1"/>
+          </a:lnRef>
+          <a:fillRef idx="3">
+            <a:schemeClr val="accent1"/>
+          </a:fillRef>
+          <a:effectRef idx="2">
+            <a:schemeClr val="accent1"/>
+          </a:effectRef>
+          <a:fontRef idx="minor">
+            <a:schemeClr val="lt1"/>
+          </a:fontRef>
+        </p:style>
+        <p:txBody>
+          <a:bodyPr rtlCol="0" anchor="ctr"/>
+          <a:lstStyle/>
+          <a:p>
+            <a:pPr algn="ctr">
+              <a:defRPr>
+                <a:latin typeface="Inter"/>
+              </a:defRPr>
+            </a:pPr>
+          </a:p>
+        </p:txBody>
+      </p:sp>
+      <p:sp>
+        <p:nvSpPr>
+          <p:cNvPr id="3" name="TextBox 2"/>
+          <p:cNvSpPr txBox="1"/>
+          <p:nvPr/>
+        </p:nvSpPr>
+        <p:spPr>
+          <a:xfrm>
+            <a:off x="640080" y="329184"/>
+            <a:ext cx="9875520" cy="182880"/>
+          </a:xfrm>
+          <a:prstGeom prst="rect">
+            <a:avLst/>
+          </a:prstGeom>
+          <a:noFill/>
+        </p:spPr>
+        <p:txBody>
+          <a:bodyPr wrap="none" lIns="9144" rIns="9144" tIns="9144" bIns="9144" anchor="t">
+            <a:spAutoFit/>
+          </a:bodyPr>
+          <a:lstStyle/>
+          <a:p>
+            <a:pPr algn="l">
+              <a:spcAft>
+                <a:spcPts val="0"/>
+              </a:spcAft>
+              <a:defRPr sz="750" b="1">
+                <a:solidFill>
+                  <a:srgbClr val="4F6B00"/>
+                </a:solidFill>
+                <a:latin typeface="Inter"/>
+              </a:defRPr>
+            </a:pPr>
+            <a:r>
+              <a:rPr>
+                <a:latin typeface="Inter"/>
+              </a:rPr>
+              <a:t>CONCENTRATION AND PRE-COMMITMENT CONDITIONS</a:t>
+            </a:r>
+          </a:p>
+        </p:txBody>
+      </p:sp>
+      <p:sp>
+        <p:nvSpPr>
+          <p:cNvPr id="4" name="TextBox 3"/>
+          <p:cNvSpPr txBox="1"/>
+          <p:nvPr/>
+        </p:nvSpPr>
+        <p:spPr>
+          <a:xfrm>
+            <a:off x="640080" y="566928"/>
+            <a:ext cx="10058400" cy="530352"/>
+          </a:xfrm>
+          <a:prstGeom prst="rect">
+            <a:avLst/>
+          </a:prstGeom>
+          <a:noFill/>
+        </p:spPr>
+        <p:txBody>
+          <a:bodyPr wrap="none" lIns="9144" rIns="9144" tIns="9144" bIns="9144" anchor="t">
+            <a:spAutoFit/>
+          </a:bodyPr>
+          <a:lstStyle/>
+          <a:p>
+            <a:pPr algn="l">
+              <a:spcAft>
+                <a:spcPts val="0"/>
+              </a:spcAft>
+              <a:defRPr sz="2300" b="1">
+                <a:solidFill>
+                  <a:srgbClr val="0D1117"/>
+                </a:solidFill>
+                <a:latin typeface="Inter"/>
+              </a:defRPr>
+            </a:pPr>
+            <a:r>
+              <a:rPr>
+                <a:latin typeface="Inter"/>
+              </a:rPr>
+              <a:t>Diversification and Manager Diligence — continued</a:t>
+            </a:r>
+          </a:p>
+        </p:txBody>
+      </p:sp>
+      <p:sp>
+        <p:nvSpPr>
+          <p:cNvPr id="5" name="Rectangle 4"/>
+          <p:cNvSpPr/>
+          <p:nvPr/>
+        </p:nvSpPr>
+        <p:spPr>
+          <a:xfrm>
+            <a:off x="640080" y="1115568"/>
+            <a:ext cx="10908792" cy="18288"/>
+          </a:xfrm>
+          <a:prstGeom prst="rect">
+            <a:avLst/>
+          </a:prstGeom>
+          <a:solidFill>
+            <a:srgbClr val="0D1117"/>
+          </a:solidFill>
+          <a:ln>
+            <a:solidFill>
+              <a:srgbClr val="0D1117"/>
+            </a:solidFill>
+          </a:ln>
+        </p:spPr>
+        <p:style>
+          <a:lnRef idx="1">
+            <a:schemeClr val="accent1"/>
+          </a:lnRef>
+          <a:fillRef idx="3">
+            <a:schemeClr val="accent1"/>
+          </a:fillRef>
+          <a:effectRef idx="2">
+            <a:schemeClr val="accent1"/>
+          </a:effectRef>
+          <a:fontRef idx="minor">
+            <a:schemeClr val="lt1"/>
+          </a:fontRef>
+        </p:style>
+        <p:txBody>
+          <a:bodyPr rtlCol="0" anchor="ctr"/>
+          <a:lstStyle/>
+          <a:p>
+            <a:pPr algn="ctr">
+              <a:defRPr>
+                <a:latin typeface="Inter"/>
+              </a:defRPr>
+            </a:pPr>
+          </a:p>
+        </p:txBody>
+      </p:sp>
+      <p:sp>
+        <p:nvSpPr>
+          <p:cNvPr id="6" name="Rectangle 5"/>
+          <p:cNvSpPr/>
+          <p:nvPr/>
+        </p:nvSpPr>
+        <p:spPr>
+          <a:xfrm>
+            <a:off x="11018520" y="502920"/>
+            <a:ext cx="530352" cy="393192"/>
+          </a:xfrm>
+          <a:prstGeom prst="rect">
+            <a:avLst/>
+          </a:prstGeom>
+          <a:solidFill>
+            <a:srgbClr val="C6F432"/>
+          </a:solidFill>
+          <a:ln>
+            <a:solidFill>
+              <a:srgbClr val="C6F432"/>
+            </a:solidFill>
+          </a:ln>
+        </p:spPr>
+        <p:style>
+          <a:lnRef idx="1">
+            <a:schemeClr val="accent1"/>
+          </a:lnRef>
+          <a:fillRef idx="3">
+            <a:schemeClr val="accent1"/>
+          </a:fillRef>
+          <a:effectRef idx="2">
+            <a:schemeClr val="accent1"/>
+          </a:effectRef>
+          <a:fontRef idx="minor">
+            <a:schemeClr val="lt1"/>
+          </a:fontRef>
+        </p:style>
+        <p:txBody>
+          <a:bodyPr rtlCol="0" anchor="ctr"/>
+          <a:lstStyle/>
+          <a:p>
+            <a:pPr algn="ctr">
+              <a:defRPr>
+                <a:latin typeface="Inter"/>
+              </a:defRPr>
+            </a:pPr>
+          </a:p>
+        </p:txBody>
+      </p:sp>
+      <p:sp>
+        <p:nvSpPr>
+          <p:cNvPr id="7" name="TextBox 6"/>
+          <p:cNvSpPr txBox="1"/>
+          <p:nvPr/>
+        </p:nvSpPr>
+        <p:spPr>
+          <a:xfrm>
+            <a:off x="11045952" y="557784"/>
+            <a:ext cx="475488" cy="182880"/>
+          </a:xfrm>
+          <a:prstGeom prst="rect">
+            <a:avLst/>
+          </a:prstGeom>
+          <a:noFill/>
+        </p:spPr>
+        <p:txBody>
+          <a:bodyPr wrap="none" lIns="9144" rIns="9144" tIns="9144" bIns="9144" anchor="t">
+            <a:spAutoFit/>
+          </a:bodyPr>
+          <a:lstStyle/>
+          <a:p>
+            <a:pPr algn="ctr">
+              <a:spcAft>
+                <a:spcPts val="0"/>
+              </a:spcAft>
+              <a:defRPr sz="1000" b="1">
+                <a:solidFill>
+                  <a:srgbClr val="0D1117"/>
+                </a:solidFill>
+                <a:latin typeface="Inter"/>
+              </a:defRPr>
+            </a:pPr>
+            <a:r>
+              <a:rPr>
+                <a:latin typeface="Inter"/>
+              </a:rPr>
+              <a:t>09</a:t>
+            </a:r>
+          </a:p>
+        </p:txBody>
+      </p:sp>
+      <p:sp>
+        <p:nvSpPr>
+          <p:cNvPr id="8" name="TextBox 7"/>
+          <p:cNvSpPr txBox="1"/>
+          <p:nvPr/>
+        </p:nvSpPr>
+        <p:spPr>
+          <a:xfrm>
+            <a:off x="640080" y="1325880"/>
+            <a:ext cx="10908792" cy="201168"/>
+          </a:xfrm>
+          <a:prstGeom prst="rect">
+            <a:avLst/>
+          </a:prstGeom>
+          <a:noFill/>
+        </p:spPr>
+        <p:txBody>
+          <a:bodyPr wrap="none" lIns="9144" rIns="9144" tIns="9144" bIns="9144" anchor="t">
+            <a:spAutoFit/>
+          </a:bodyPr>
+          <a:lstStyle/>
+          <a:p>
+            <a:pPr algn="l">
+              <a:spcAft>
+                <a:spcPts val="0"/>
+              </a:spcAft>
+              <a:defRPr sz="720" b="1">
+                <a:solidFill>
+                  <a:srgbClr val="4A5563"/>
+                </a:solidFill>
+                <a:latin typeface="Inter"/>
+              </a:defRPr>
+            </a:pPr>
+            <a:r>
+              <a:rPr>
+                <a:latin typeface="Inter"/>
+              </a:rPr>
+              <a:t>MANAGER EVIDENCE</a:t>
+            </a:r>
+          </a:p>
+        </p:txBody>
+      </p:sp>
+      <p:graphicFrame>
+        <p:nvGraphicFramePr>
+          <p:cNvPr id="9" name="Table 8"/>
+          <p:cNvGraphicFramePr>
+            <a:graphicFrameLocks noGrp="1"/>
+          </p:cNvGraphicFramePr>
+          <p:nvPr/>
+        </p:nvGraphicFramePr>
+        <p:xfrm>
+          <a:off x="640080" y="1600200"/>
+          <a:ext cx="10908792" cy="4617720"/>
         </p:xfrm>
         <a:graphic>
           <a:graphicData uri="http://schemas.openxmlformats.org/drawingml/2006/table">
@@ -21994,7 +24287,7 @@
                 <a:gridCol w="2224278"/>
                 <a:gridCol w="2224278"/>
               </a:tblGrid>
-              <a:tr h="705612">
+              <a:tr h="1539240">
                 <a:tc>
                   <a:txBody>
                     <a:bodyPr/>
@@ -22012,7 +24305,7 @@
                         <a:rPr>
                           <a:latin typeface="Inter"/>
                         </a:rPr>
-                        <a:t>Axis</a:t>
+                        <a:t>Manager / fund</a:t>
                       </a:r>
                     </a:p>
                   </a:txBody>
@@ -22039,7 +24332,7 @@
                         <a:rPr>
                           <a:latin typeface="Inter"/>
                         </a:rPr>
-                        <a:t>Largest exposure</a:t>
+                        <a:t>Exposure</a:t>
                       </a:r>
                     </a:p>
                   </a:txBody>
@@ -22066,7 +24359,7 @@
                         <a:rPr>
                           <a:latin typeface="Inter"/>
                         </a:rPr>
-                        <a:t>Share</a:t>
+                        <a:t>Diligence status</a:t>
                       </a:r>
                     </a:p>
                   </a:txBody>
@@ -22093,7 +24386,7 @@
                         <a:rPr>
                           <a:latin typeface="Inter"/>
                         </a:rPr>
-                        <a:t>Limit</a:t>
+                        <a:t>Open findings</a:t>
                       </a:r>
                     </a:p>
                   </a:txBody>
@@ -22120,7 +24413,7 @@
                         <a:rPr>
                           <a:latin typeface="Inter"/>
                         </a:rPr>
-                        <a:t>Status</a:t>
+                        <a:t>Next step</a:t>
                       </a:r>
                     </a:p>
                   </a:txBody>
@@ -22131,7 +24424,7 @@
                   </a:tcPr>
                 </a:tc>
               </a:tr>
-              <a:tr h="705612">
+              <a:tr h="1539240">
                 <a:tc>
                   <a:txBody>
                     <a:bodyPr/>
@@ -22149,7 +24442,7 @@
                         <a:rPr>
                           <a:latin typeface="Inter"/>
                         </a:rPr>
-                        <a:t>Manager</a:t>
+                        <a:t>Example Private Manager A (TEST)</a:t>
                       </a:r>
                     </a:p>
                   </a:txBody>
@@ -22176,7 +24469,7 @@
                         <a:rPr>
                           <a:latin typeface="Inter"/>
                         </a:rPr>
-                        <a:t>Example Private Manager A (TEST)</a:t>
+                        <a:t>$114.0M</a:t>
                       </a:r>
                     </a:p>
                   </a:txBody>
@@ -22203,7 +24496,7 @@
                         <a:rPr>
                           <a:latin typeface="Inter"/>
                         </a:rPr>
-                        <a:t>11.4%</a:t>
+                        <a:t>Current [S7]</a:t>
                       </a:r>
                     </a:p>
                   </a:txBody>
@@ -22230,7 +24523,7 @@
                         <a:rPr>
                           <a:latin typeface="Inter"/>
                         </a:rPr>
-                        <a:t>12.0%</a:t>
+                        <a:t>1 Medium [S7]</a:t>
                       </a:r>
                     </a:p>
                   </a:txBody>
@@ -22246,18 +24539,47 @@
                     <a:lstStyle/>
                     <a:p>
                       <a:pPr>
+                        <a:defRPr sz="720" b="0">
+                          <a:solidFill>
+                            <a:srgbClr val="0D1117"/>
+                          </a:solidFill>
+                          <a:latin typeface="Inter"/>
+                        </a:defRPr>
+                      </a:pPr>
+                      <a:r>
+                        <a:rPr>
+                          <a:latin typeface="Inter"/>
+                        </a:rPr>
+                        <a:t>Close valuation-control follow-up</a:t>
+                      </a:r>
+                    </a:p>
+                  </a:txBody>
+                  <a:tcPr marL="54864" marR="54864" marT="27432" marB="27432" anchor="ctr">
+                    <a:solidFill>
+                      <a:srgbClr val="FFFFFF"/>
+                    </a:solidFill>
+                  </a:tcPr>
+                </a:tc>
+              </a:tr>
+              <a:tr h="1539240">
+                <a:tc>
+                  <a:txBody>
+                    <a:bodyPr/>
+                    <a:lstStyle/>
+                    <a:p>
+                      <a:pPr>
                         <a:defRPr sz="720" b="1">
                           <a:solidFill>
-                            <a:srgbClr val="F2A93B"/>
-                          </a:solidFill>
-                          <a:latin typeface="Inter"/>
-                        </a:defRPr>
-                      </a:pPr>
-                      <a:r>
-                        <a:rPr>
-                          <a:latin typeface="Inter"/>
-                        </a:rPr>
-                        <a:t>● Watch</a:t>
+                            <a:srgbClr val="0D1117"/>
+                          </a:solidFill>
+                          <a:latin typeface="Inter"/>
+                        </a:defRPr>
+                      </a:pPr>
+                      <a:r>
+                        <a:rPr>
+                          <a:latin typeface="Inter"/>
+                        </a:rPr>
+                        <a:t>Proposed infrastructure manager</a:t>
                       </a:r>
                     </a:p>
                   </a:txBody>
@@ -22267,15 +24589,13 @@
                     </a:solidFill>
                   </a:tcPr>
                 </a:tc>
-              </a:tr>
-              <a:tr h="705612">
-                <a:tc>
-                  <a:txBody>
-                    <a:bodyPr/>
-                    <a:lstStyle/>
-                    <a:p>
-                      <a:pPr>
-                        <a:defRPr sz="720" b="1">
+                <a:tc>
+                  <a:txBody>
+                    <a:bodyPr/>
+                    <a:lstStyle/>
+                    <a:p>
+                      <a:pPr>
+                        <a:defRPr sz="720" b="0">
                           <a:solidFill>
                             <a:srgbClr val="0D1117"/>
                           </a:solidFill>
@@ -22286,7 +24606,7 @@
                         <a:rPr>
                           <a:latin typeface="Inter"/>
                         </a:rPr>
-                        <a:t>Strategy</a:t>
+                        <a:t>Not funded</a:t>
                       </a:r>
                     </a:p>
                   </a:txBody>
@@ -22313,7 +24633,7 @@
                         <a:rPr>
                           <a:latin typeface="Inter"/>
                         </a:rPr>
-                        <a:t>Private equity</a:t>
+                        <a:t>Not assessed [S7]</a:t>
                       </a:r>
                     </a:p>
                   </a:txBody>
@@ -22340,7 +24660,7 @@
                         <a:rPr>
                           <a:latin typeface="Inter"/>
                         </a:rPr>
-                        <a:t>52.2% of private NAV</a:t>
+                        <a:t>Not assessed</a:t>
                       </a:r>
                     </a:p>
                   </a:txBody>
@@ -22367,34 +24687,7 @@
                         <a:rPr>
                           <a:latin typeface="Inter"/>
                         </a:rPr>
-                        <a:t>Not assessed</a:t>
-                      </a:r>
-                    </a:p>
-                  </a:txBody>
-                  <a:tcPr marL="54864" marR="54864" marT="27432" marB="27432" anchor="ctr">
-                    <a:solidFill>
-                      <a:srgbClr val="F5F7F9"/>
-                    </a:solidFill>
-                  </a:tcPr>
-                </a:tc>
-                <a:tc>
-                  <a:txBody>
-                    <a:bodyPr/>
-                    <a:lstStyle/>
-                    <a:p>
-                      <a:pPr>
-                        <a:defRPr sz="720" b="1">
-                          <a:solidFill>
-                            <a:srgbClr val="9AA5B1"/>
-                          </a:solidFill>
-                          <a:latin typeface="Inter"/>
-                        </a:defRPr>
-                      </a:pPr>
-                      <a:r>
-                        <a:rPr>
-                          <a:latin typeface="Inter"/>
-                        </a:rPr>
-                        <a:t>● Not assessed</a:t>
+                        <a:t>Run manager comparison and ODD</a:t>
                       </a:r>
                     </a:p>
                   </a:txBody>
@@ -22411,489 +24704,7 @@
       </p:graphicFrame>
       <p:sp>
         <p:nvSpPr>
-          <p:cNvPr id="10" name="TextBox 9"/>
-          <p:cNvSpPr txBox="1"/>
-          <p:nvPr/>
-        </p:nvSpPr>
-        <p:spPr>
-          <a:xfrm>
-            <a:off x="640080" y="3826763"/>
-            <a:ext cx="10908792" cy="201168"/>
-          </a:xfrm>
-          <a:prstGeom prst="rect">
-            <a:avLst/>
-          </a:prstGeom>
-          <a:noFill/>
-        </p:spPr>
-        <p:txBody>
-          <a:bodyPr wrap="none" lIns="9144" rIns="9144" tIns="9144" bIns="9144" anchor="t">
-            <a:spAutoFit/>
-          </a:bodyPr>
-          <a:lstStyle/>
-          <a:p>
-            <a:pPr algn="l">
-              <a:spcAft>
-                <a:spcPts val="0"/>
-              </a:spcAft>
-              <a:defRPr sz="720" b="1">
-                <a:solidFill>
-                  <a:srgbClr val="4A5563"/>
-                </a:solidFill>
-                <a:latin typeface="Inter"/>
-              </a:defRPr>
-            </a:pPr>
-            <a:r>
-              <a:rPr>
-                <a:latin typeface="Inter"/>
-              </a:rPr>
-              <a:t>MANAGER EVIDENCE</a:t>
-            </a:r>
-          </a:p>
-        </p:txBody>
-      </p:sp>
-      <p:graphicFrame>
-        <p:nvGraphicFramePr>
-          <p:cNvPr id="11" name="Table 10"/>
-          <p:cNvGraphicFramePr>
-            <a:graphicFrameLocks noGrp="1"/>
-          </p:cNvGraphicFramePr>
-          <p:nvPr/>
-        </p:nvGraphicFramePr>
-        <p:xfrm>
-          <a:off x="640080" y="4101083"/>
-          <a:ext cx="10908792" cy="2116836"/>
-        </p:xfrm>
-        <a:graphic>
-          <a:graphicData uri="http://schemas.openxmlformats.org/drawingml/2006/table">
-            <a:tbl>
-              <a:tblPr firstRow="1" bandRow="1">
-                <a:tableStyleId>{5C22544A-7EE6-4342-B048-85BDC9FD1C3A}</a:tableStyleId>
-              </a:tblPr>
-              <a:tblGrid>
-                <a:gridCol w="2011680"/>
-                <a:gridCol w="2224278"/>
-                <a:gridCol w="2224278"/>
-                <a:gridCol w="2224278"/>
-                <a:gridCol w="2224278"/>
-              </a:tblGrid>
-              <a:tr h="705612">
-                <a:tc>
-                  <a:txBody>
-                    <a:bodyPr/>
-                    <a:lstStyle/>
-                    <a:p>
-                      <a:pPr>
-                        <a:defRPr sz="750" b="1">
-                          <a:solidFill>
-                            <a:srgbClr val="FFFFFF"/>
-                          </a:solidFill>
-                          <a:latin typeface="Inter"/>
-                        </a:defRPr>
-                      </a:pPr>
-                      <a:r>
-                        <a:rPr>
-                          <a:latin typeface="Inter"/>
-                        </a:rPr>
-                        <a:t>Manager / fund</a:t>
-                      </a:r>
-                    </a:p>
-                  </a:txBody>
-                  <a:tcPr marL="54864" marR="54864" marT="27432" marB="27432" anchor="ctr">
-                    <a:solidFill>
-                      <a:srgbClr val="0D1117"/>
-                    </a:solidFill>
-                  </a:tcPr>
-                </a:tc>
-                <a:tc>
-                  <a:txBody>
-                    <a:bodyPr/>
-                    <a:lstStyle/>
-                    <a:p>
-                      <a:pPr>
-                        <a:defRPr sz="750" b="1">
-                          <a:solidFill>
-                            <a:srgbClr val="FFFFFF"/>
-                          </a:solidFill>
-                          <a:latin typeface="Inter"/>
-                        </a:defRPr>
-                      </a:pPr>
-                      <a:r>
-                        <a:rPr>
-                          <a:latin typeface="Inter"/>
-                        </a:rPr>
-                        <a:t>Exposure</a:t>
-                      </a:r>
-                    </a:p>
-                  </a:txBody>
-                  <a:tcPr marL="54864" marR="54864" marT="27432" marB="27432" anchor="ctr">
-                    <a:solidFill>
-                      <a:srgbClr val="0D1117"/>
-                    </a:solidFill>
-                  </a:tcPr>
-                </a:tc>
-                <a:tc>
-                  <a:txBody>
-                    <a:bodyPr/>
-                    <a:lstStyle/>
-                    <a:p>
-                      <a:pPr>
-                        <a:defRPr sz="750" b="1">
-                          <a:solidFill>
-                            <a:srgbClr val="FFFFFF"/>
-                          </a:solidFill>
-                          <a:latin typeface="Inter"/>
-                        </a:defRPr>
-                      </a:pPr>
-                      <a:r>
-                        <a:rPr>
-                          <a:latin typeface="Inter"/>
-                        </a:rPr>
-                        <a:t>Diligence status</a:t>
-                      </a:r>
-                    </a:p>
-                  </a:txBody>
-                  <a:tcPr marL="54864" marR="54864" marT="27432" marB="27432" anchor="ctr">
-                    <a:solidFill>
-                      <a:srgbClr val="0D1117"/>
-                    </a:solidFill>
-                  </a:tcPr>
-                </a:tc>
-                <a:tc>
-                  <a:txBody>
-                    <a:bodyPr/>
-                    <a:lstStyle/>
-                    <a:p>
-                      <a:pPr>
-                        <a:defRPr sz="750" b="1">
-                          <a:solidFill>
-                            <a:srgbClr val="FFFFFF"/>
-                          </a:solidFill>
-                          <a:latin typeface="Inter"/>
-                        </a:defRPr>
-                      </a:pPr>
-                      <a:r>
-                        <a:rPr>
-                          <a:latin typeface="Inter"/>
-                        </a:rPr>
-                        <a:t>Open findings</a:t>
-                      </a:r>
-                    </a:p>
-                  </a:txBody>
-                  <a:tcPr marL="54864" marR="54864" marT="27432" marB="27432" anchor="ctr">
-                    <a:solidFill>
-                      <a:srgbClr val="0D1117"/>
-                    </a:solidFill>
-                  </a:tcPr>
-                </a:tc>
-                <a:tc>
-                  <a:txBody>
-                    <a:bodyPr/>
-                    <a:lstStyle/>
-                    <a:p>
-                      <a:pPr>
-                        <a:defRPr sz="750" b="1">
-                          <a:solidFill>
-                            <a:srgbClr val="FFFFFF"/>
-                          </a:solidFill>
-                          <a:latin typeface="Inter"/>
-                        </a:defRPr>
-                      </a:pPr>
-                      <a:r>
-                        <a:rPr>
-                          <a:latin typeface="Inter"/>
-                        </a:rPr>
-                        <a:t>Next step</a:t>
-                      </a:r>
-                    </a:p>
-                  </a:txBody>
-                  <a:tcPr marL="54864" marR="54864" marT="27432" marB="27432" anchor="ctr">
-                    <a:solidFill>
-                      <a:srgbClr val="0D1117"/>
-                    </a:solidFill>
-                  </a:tcPr>
-                </a:tc>
-              </a:tr>
-              <a:tr h="705612">
-                <a:tc>
-                  <a:txBody>
-                    <a:bodyPr/>
-                    <a:lstStyle/>
-                    <a:p>
-                      <a:pPr>
-                        <a:defRPr sz="720" b="1">
-                          <a:solidFill>
-                            <a:srgbClr val="0D1117"/>
-                          </a:solidFill>
-                          <a:latin typeface="Inter"/>
-                        </a:defRPr>
-                      </a:pPr>
-                      <a:r>
-                        <a:rPr>
-                          <a:latin typeface="Inter"/>
-                        </a:rPr>
-                        <a:t>Example Private Manager A (TEST)</a:t>
-                      </a:r>
-                    </a:p>
-                  </a:txBody>
-                  <a:tcPr marL="54864" marR="54864" marT="27432" marB="27432" anchor="ctr">
-                    <a:solidFill>
-                      <a:srgbClr val="FFFFFF"/>
-                    </a:solidFill>
-                  </a:tcPr>
-                </a:tc>
-                <a:tc>
-                  <a:txBody>
-                    <a:bodyPr/>
-                    <a:lstStyle/>
-                    <a:p>
-                      <a:pPr>
-                        <a:defRPr sz="720" b="0">
-                          <a:solidFill>
-                            <a:srgbClr val="0D1117"/>
-                          </a:solidFill>
-                          <a:latin typeface="Inter"/>
-                        </a:defRPr>
-                      </a:pPr>
-                      <a:r>
-                        <a:rPr>
-                          <a:latin typeface="Inter"/>
-                        </a:rPr>
-                        <a:t>$114.0M</a:t>
-                      </a:r>
-                    </a:p>
-                  </a:txBody>
-                  <a:tcPr marL="54864" marR="54864" marT="27432" marB="27432" anchor="ctr">
-                    <a:solidFill>
-                      <a:srgbClr val="FFFFFF"/>
-                    </a:solidFill>
-                  </a:tcPr>
-                </a:tc>
-                <a:tc>
-                  <a:txBody>
-                    <a:bodyPr/>
-                    <a:lstStyle/>
-                    <a:p>
-                      <a:pPr>
-                        <a:defRPr sz="720" b="0">
-                          <a:solidFill>
-                            <a:srgbClr val="0D1117"/>
-                          </a:solidFill>
-                          <a:latin typeface="Inter"/>
-                        </a:defRPr>
-                      </a:pPr>
-                      <a:r>
-                        <a:rPr>
-                          <a:latin typeface="Inter"/>
-                        </a:rPr>
-                        <a:t>Current [S7]</a:t>
-                      </a:r>
-                    </a:p>
-                  </a:txBody>
-                  <a:tcPr marL="54864" marR="54864" marT="27432" marB="27432" anchor="ctr">
-                    <a:solidFill>
-                      <a:srgbClr val="FFFFFF"/>
-                    </a:solidFill>
-                  </a:tcPr>
-                </a:tc>
-                <a:tc>
-                  <a:txBody>
-                    <a:bodyPr/>
-                    <a:lstStyle/>
-                    <a:p>
-                      <a:pPr>
-                        <a:defRPr sz="720" b="0">
-                          <a:solidFill>
-                            <a:srgbClr val="0D1117"/>
-                          </a:solidFill>
-                          <a:latin typeface="Inter"/>
-                        </a:defRPr>
-                      </a:pPr>
-                      <a:r>
-                        <a:rPr>
-                          <a:latin typeface="Inter"/>
-                        </a:rPr>
-                        <a:t>1 Medium [S7]</a:t>
-                      </a:r>
-                    </a:p>
-                  </a:txBody>
-                  <a:tcPr marL="54864" marR="54864" marT="27432" marB="27432" anchor="ctr">
-                    <a:solidFill>
-                      <a:srgbClr val="FFFFFF"/>
-                    </a:solidFill>
-                  </a:tcPr>
-                </a:tc>
-                <a:tc>
-                  <a:txBody>
-                    <a:bodyPr/>
-                    <a:lstStyle/>
-                    <a:p>
-                      <a:pPr>
-                        <a:defRPr sz="720" b="0">
-                          <a:solidFill>
-                            <a:srgbClr val="0D1117"/>
-                          </a:solidFill>
-                          <a:latin typeface="Inter"/>
-                        </a:defRPr>
-                      </a:pPr>
-                      <a:r>
-                        <a:rPr>
-                          <a:latin typeface="Inter"/>
-                        </a:rPr>
-                        <a:t>Close valuation-control follow-up</a:t>
-                      </a:r>
-                    </a:p>
-                  </a:txBody>
-                  <a:tcPr marL="54864" marR="54864" marT="27432" marB="27432" anchor="ctr">
-                    <a:solidFill>
-                      <a:srgbClr val="FFFFFF"/>
-                    </a:solidFill>
-                  </a:tcPr>
-                </a:tc>
-              </a:tr>
-              <a:tr h="705612">
-                <a:tc>
-                  <a:txBody>
-                    <a:bodyPr/>
-                    <a:lstStyle/>
-                    <a:p>
-                      <a:pPr>
-                        <a:defRPr sz="720" b="1">
-                          <a:solidFill>
-                            <a:srgbClr val="0D1117"/>
-                          </a:solidFill>
-                          <a:latin typeface="Inter"/>
-                        </a:defRPr>
-                      </a:pPr>
-                      <a:r>
-                        <a:rPr>
-                          <a:latin typeface="Inter"/>
-                        </a:rPr>
-                        <a:t>Proposed infrastructure manager</a:t>
-                      </a:r>
-                    </a:p>
-                  </a:txBody>
-                  <a:tcPr marL="54864" marR="54864" marT="27432" marB="27432" anchor="ctr">
-                    <a:solidFill>
-                      <a:srgbClr val="F5F7F9"/>
-                    </a:solidFill>
-                  </a:tcPr>
-                </a:tc>
-                <a:tc>
-                  <a:txBody>
-                    <a:bodyPr/>
-                    <a:lstStyle/>
-                    <a:p>
-                      <a:pPr>
-                        <a:defRPr sz="720" b="0">
-                          <a:solidFill>
-                            <a:srgbClr val="0D1117"/>
-                          </a:solidFill>
-                          <a:latin typeface="Inter"/>
-                        </a:defRPr>
-                      </a:pPr>
-                      <a:r>
-                        <a:rPr>
-                          <a:latin typeface="Inter"/>
-                        </a:rPr>
-                        <a:t>Not funded</a:t>
-                      </a:r>
-                    </a:p>
-                  </a:txBody>
-                  <a:tcPr marL="54864" marR="54864" marT="27432" marB="27432" anchor="ctr">
-                    <a:solidFill>
-                      <a:srgbClr val="F5F7F9"/>
-                    </a:solidFill>
-                  </a:tcPr>
-                </a:tc>
-                <a:tc>
-                  <a:txBody>
-                    <a:bodyPr/>
-                    <a:lstStyle/>
-                    <a:p>
-                      <a:pPr>
-                        <a:defRPr sz="720" b="0">
-                          <a:solidFill>
-                            <a:srgbClr val="0D1117"/>
-                          </a:solidFill>
-                          <a:latin typeface="Inter"/>
-                        </a:defRPr>
-                      </a:pPr>
-                      <a:r>
-                        <a:rPr>
-                          <a:latin typeface="Inter"/>
-                        </a:rPr>
-                        <a:t>Not assessed [S7]</a:t>
-                      </a:r>
-                    </a:p>
-                  </a:txBody>
-                  <a:tcPr marL="54864" marR="54864" marT="27432" marB="27432" anchor="ctr">
-                    <a:solidFill>
-                      <a:srgbClr val="F5F7F9"/>
-                    </a:solidFill>
-                  </a:tcPr>
-                </a:tc>
-                <a:tc>
-                  <a:txBody>
-                    <a:bodyPr/>
-                    <a:lstStyle/>
-                    <a:p>
-                      <a:pPr>
-                        <a:defRPr sz="720" b="0">
-                          <a:solidFill>
-                            <a:srgbClr val="0D1117"/>
-                          </a:solidFill>
-                          <a:latin typeface="Inter"/>
-                        </a:defRPr>
-                      </a:pPr>
-                      <a:r>
-                        <a:rPr>
-                          <a:latin typeface="Inter"/>
-                        </a:rPr>
-                        <a:t>Not assessed</a:t>
-                      </a:r>
-                    </a:p>
-                  </a:txBody>
-                  <a:tcPr marL="54864" marR="54864" marT="27432" marB="27432" anchor="ctr">
-                    <a:solidFill>
-                      <a:srgbClr val="F5F7F9"/>
-                    </a:solidFill>
-                  </a:tcPr>
-                </a:tc>
-                <a:tc>
-                  <a:txBody>
-                    <a:bodyPr/>
-                    <a:lstStyle/>
-                    <a:p>
-                      <a:pPr>
-                        <a:defRPr sz="720" b="0">
-                          <a:solidFill>
-                            <a:srgbClr val="0D1117"/>
-                          </a:solidFill>
-                          <a:latin typeface="Inter"/>
-                        </a:defRPr>
-                      </a:pPr>
-                      <a:r>
-                        <a:rPr>
-                          <a:latin typeface="Inter"/>
-                        </a:rPr>
-                        <a:t>Run manager comparison and ODD</a:t>
-                      </a:r>
-                    </a:p>
-                  </a:txBody>
-                  <a:tcPr marL="54864" marR="54864" marT="27432" marB="27432" anchor="ctr">
-                    <a:solidFill>
-                      <a:srgbClr val="F5F7F9"/>
-                    </a:solidFill>
-                  </a:tcPr>
-                </a:tc>
-              </a:tr>
-            </a:tbl>
-          </a:graphicData>
-        </a:graphic>
-      </p:graphicFrame>
-      <p:sp>
-        <p:nvSpPr>
-          <p:cNvPr id="12" name="Rectangle 11"/>
+          <p:cNvPr id="10" name="Rectangle 9"/>
           <p:cNvSpPr/>
           <p:nvPr/>
         </p:nvSpPr>
@@ -22942,7 +24753,7 @@
       </p:sp>
       <p:sp>
         <p:nvSpPr>
-          <p:cNvPr id="13" name="TextBox 12"/>
+          <p:cNvPr id="11" name="TextBox 10"/>
           <p:cNvSpPr txBox="1"/>
           <p:nvPr/>
         </p:nvSpPr>
@@ -22984,7 +24795,7 @@
       </p:sp>
       <p:sp>
         <p:nvSpPr>
-          <p:cNvPr id="14" name="TextBox 13"/>
+          <p:cNvPr id="12" name="TextBox 11"/>
           <p:cNvSpPr txBox="1"/>
           <p:nvPr/>
         </p:nvSpPr>
@@ -23026,7 +24837,7 @@
       </p:sp>
       <p:sp>
         <p:nvSpPr>
-          <p:cNvPr id="15" name="TextBox 14"/>
+          <p:cNvPr id="13" name="TextBox 12"/>
           <p:cNvSpPr txBox="1"/>
           <p:nvPr/>
         </p:nvSpPr>
@@ -23061,7 +24872,7 @@
               <a:rPr>
                 <a:latin typeface="Inter"/>
               </a:rPr>
-              <a:t>27</a:t>
+              <a:t>28</a:t>
             </a:r>
           </a:p>
         </p:txBody>
@@ -23074,7 +24885,7 @@
 </p:sld>
 </file>
 
-<file path=ppt/slides/slide28.xml><?xml version="1.0" encoding="utf-8"?>
+<file path=ppt/slides/slide29.xml><?xml version="1.0" encoding="utf-8"?>
 <p:sld xmlns:a="http://schemas.openxmlformats.org/drawingml/2006/main" xmlns:p="http://schemas.openxmlformats.org/presentationml/2006/main" xmlns:r="http://schemas.openxmlformats.org/officeDocument/2006/relationships">
   <p:cSld>
     <p:spTree>
@@ -24899,7 +26710,7 @@
               <a:rPr>
                 <a:latin typeface="Inter"/>
               </a:rPr>
-              <a:t>28</a:t>
+              <a:t>29</a:t>
             </a:r>
           </a:p>
         </p:txBody>
@@ -24912,7 +26723,1529 @@
 </p:sld>
 </file>
 
-<file path=ppt/slides/slide29.xml><?xml version="1.0" encoding="utf-8"?>
+<file path=ppt/slides/slide3.xml><?xml version="1.0" encoding="utf-8"?>
+<p:sld xmlns:a="http://schemas.openxmlformats.org/drawingml/2006/main" xmlns:p="http://schemas.openxmlformats.org/presentationml/2006/main" xmlns:r="http://schemas.openxmlformats.org/officeDocument/2006/relationships">
+  <p:cSld>
+    <p:spTree>
+      <p:nvGrpSpPr>
+        <p:cNvPr id="1" name=""/>
+        <p:cNvGrpSpPr/>
+        <p:nvPr/>
+      </p:nvGrpSpPr>
+      <p:grpSpPr/>
+      <p:sp>
+        <p:nvSpPr>
+          <p:cNvPr id="2" name="Rectangle 1"/>
+          <p:cNvSpPr/>
+          <p:nvPr/>
+        </p:nvSpPr>
+        <p:spPr>
+          <a:xfrm>
+            <a:off x="0" y="0"/>
+            <a:ext cx="12191695" cy="6858000"/>
+          </a:xfrm>
+          <a:prstGeom prst="rect">
+            <a:avLst/>
+          </a:prstGeom>
+          <a:solidFill>
+            <a:srgbClr val="FFFFFF"/>
+          </a:solidFill>
+          <a:ln>
+            <a:solidFill>
+              <a:srgbClr val="FFFFFF"/>
+            </a:solidFill>
+          </a:ln>
+        </p:spPr>
+        <p:style>
+          <a:lnRef idx="1">
+            <a:schemeClr val="accent1"/>
+          </a:lnRef>
+          <a:fillRef idx="3">
+            <a:schemeClr val="accent1"/>
+          </a:fillRef>
+          <a:effectRef idx="2">
+            <a:schemeClr val="accent1"/>
+          </a:effectRef>
+          <a:fontRef idx="minor">
+            <a:schemeClr val="lt1"/>
+          </a:fontRef>
+        </p:style>
+        <p:txBody>
+          <a:bodyPr rtlCol="0" anchor="ctr"/>
+          <a:lstStyle/>
+          <a:p>
+            <a:pPr algn="ctr">
+              <a:defRPr>
+                <a:latin typeface="Inter"/>
+              </a:defRPr>
+            </a:pPr>
+          </a:p>
+        </p:txBody>
+      </p:sp>
+      <p:sp>
+        <p:nvSpPr>
+          <p:cNvPr id="3" name="TextBox 2"/>
+          <p:cNvSpPr txBox="1"/>
+          <p:nvPr/>
+        </p:nvSpPr>
+        <p:spPr>
+          <a:xfrm>
+            <a:off x="640080" y="329184"/>
+            <a:ext cx="9875520" cy="182880"/>
+          </a:xfrm>
+          <a:prstGeom prst="rect">
+            <a:avLst/>
+          </a:prstGeom>
+          <a:noFill/>
+        </p:spPr>
+        <p:txBody>
+          <a:bodyPr wrap="none" lIns="9144" rIns="9144" tIns="9144" bIns="9144" anchor="t">
+            <a:spAutoFit/>
+          </a:bodyPr>
+          <a:lstStyle/>
+          <a:p>
+            <a:pPr algn="l">
+              <a:spcAft>
+                <a:spcPts val="0"/>
+              </a:spcAft>
+              <a:defRPr sz="750" b="1">
+                <a:solidFill>
+                  <a:srgbClr val="4F6B00"/>
+                </a:solidFill>
+                <a:latin typeface="Inter"/>
+              </a:defRPr>
+            </a:pPr>
+            <a:r>
+              <a:rPr>
+                <a:latin typeface="Inter"/>
+              </a:rPr>
+              <a:t>RECOMMENDATION AND COMMITTEE ACTION</a:t>
+            </a:r>
+          </a:p>
+        </p:txBody>
+      </p:sp>
+      <p:sp>
+        <p:nvSpPr>
+          <p:cNvPr id="4" name="TextBox 3"/>
+          <p:cNvSpPr txBox="1"/>
+          <p:nvPr/>
+        </p:nvSpPr>
+        <p:spPr>
+          <a:xfrm>
+            <a:off x="640080" y="566928"/>
+            <a:ext cx="10058400" cy="530352"/>
+          </a:xfrm>
+          <a:prstGeom prst="rect">
+            <a:avLst/>
+          </a:prstGeom>
+          <a:noFill/>
+        </p:spPr>
+        <p:txBody>
+          <a:bodyPr wrap="none" lIns="9144" rIns="9144" tIns="9144" bIns="9144" anchor="t">
+            <a:spAutoFit/>
+          </a:bodyPr>
+          <a:lstStyle/>
+          <a:p>
+            <a:pPr algn="l">
+              <a:spcAft>
+                <a:spcPts val="0"/>
+              </a:spcAft>
+              <a:defRPr sz="2300" b="1">
+                <a:solidFill>
+                  <a:srgbClr val="0D1117"/>
+                </a:solidFill>
+                <a:latin typeface="Inter"/>
+              </a:defRPr>
+            </a:pPr>
+            <a:r>
+              <a:rPr>
+                <a:latin typeface="Inter"/>
+              </a:rPr>
+              <a:t>Executive Decision — continued</a:t>
+            </a:r>
+          </a:p>
+        </p:txBody>
+      </p:sp>
+      <p:sp>
+        <p:nvSpPr>
+          <p:cNvPr id="5" name="Rectangle 4"/>
+          <p:cNvSpPr/>
+          <p:nvPr/>
+        </p:nvSpPr>
+        <p:spPr>
+          <a:xfrm>
+            <a:off x="640080" y="1115568"/>
+            <a:ext cx="10908792" cy="18288"/>
+          </a:xfrm>
+          <a:prstGeom prst="rect">
+            <a:avLst/>
+          </a:prstGeom>
+          <a:solidFill>
+            <a:srgbClr val="0D1117"/>
+          </a:solidFill>
+          <a:ln>
+            <a:solidFill>
+              <a:srgbClr val="0D1117"/>
+            </a:solidFill>
+          </a:ln>
+        </p:spPr>
+        <p:style>
+          <a:lnRef idx="1">
+            <a:schemeClr val="accent1"/>
+          </a:lnRef>
+          <a:fillRef idx="3">
+            <a:schemeClr val="accent1"/>
+          </a:fillRef>
+          <a:effectRef idx="2">
+            <a:schemeClr val="accent1"/>
+          </a:effectRef>
+          <a:fontRef idx="minor">
+            <a:schemeClr val="lt1"/>
+          </a:fontRef>
+        </p:style>
+        <p:txBody>
+          <a:bodyPr rtlCol="0" anchor="ctr"/>
+          <a:lstStyle/>
+          <a:p>
+            <a:pPr algn="ctr">
+              <a:defRPr>
+                <a:latin typeface="Inter"/>
+              </a:defRPr>
+            </a:pPr>
+          </a:p>
+        </p:txBody>
+      </p:sp>
+      <p:sp>
+        <p:nvSpPr>
+          <p:cNvPr id="6" name="Rectangle 5"/>
+          <p:cNvSpPr/>
+          <p:nvPr/>
+        </p:nvSpPr>
+        <p:spPr>
+          <a:xfrm>
+            <a:off x="11018520" y="502920"/>
+            <a:ext cx="530352" cy="393192"/>
+          </a:xfrm>
+          <a:prstGeom prst="rect">
+            <a:avLst/>
+          </a:prstGeom>
+          <a:solidFill>
+            <a:srgbClr val="C6F432"/>
+          </a:solidFill>
+          <a:ln>
+            <a:solidFill>
+              <a:srgbClr val="C6F432"/>
+            </a:solidFill>
+          </a:ln>
+        </p:spPr>
+        <p:style>
+          <a:lnRef idx="1">
+            <a:schemeClr val="accent1"/>
+          </a:lnRef>
+          <a:fillRef idx="3">
+            <a:schemeClr val="accent1"/>
+          </a:fillRef>
+          <a:effectRef idx="2">
+            <a:schemeClr val="accent1"/>
+          </a:effectRef>
+          <a:fontRef idx="minor">
+            <a:schemeClr val="lt1"/>
+          </a:fontRef>
+        </p:style>
+        <p:txBody>
+          <a:bodyPr rtlCol="0" anchor="ctr"/>
+          <a:lstStyle/>
+          <a:p>
+            <a:pPr algn="ctr">
+              <a:defRPr>
+                <a:latin typeface="Inter"/>
+              </a:defRPr>
+            </a:pPr>
+          </a:p>
+        </p:txBody>
+      </p:sp>
+      <p:sp>
+        <p:nvSpPr>
+          <p:cNvPr id="7" name="TextBox 6"/>
+          <p:cNvSpPr txBox="1"/>
+          <p:nvPr/>
+        </p:nvSpPr>
+        <p:spPr>
+          <a:xfrm>
+            <a:off x="11045952" y="557784"/>
+            <a:ext cx="475488" cy="182880"/>
+          </a:xfrm>
+          <a:prstGeom prst="rect">
+            <a:avLst/>
+          </a:prstGeom>
+          <a:noFill/>
+        </p:spPr>
+        <p:txBody>
+          <a:bodyPr wrap="none" lIns="9144" rIns="9144" tIns="9144" bIns="9144" anchor="t">
+            <a:spAutoFit/>
+          </a:bodyPr>
+          <a:lstStyle/>
+          <a:p>
+            <a:pPr algn="ctr">
+              <a:spcAft>
+                <a:spcPts val="0"/>
+              </a:spcAft>
+              <a:defRPr sz="1000" b="1">
+                <a:solidFill>
+                  <a:srgbClr val="0D1117"/>
+                </a:solidFill>
+                <a:latin typeface="Inter"/>
+              </a:defRPr>
+            </a:pPr>
+            <a:r>
+              <a:rPr>
+                <a:latin typeface="Inter"/>
+              </a:rPr>
+              <a:t>01</a:t>
+            </a:r>
+          </a:p>
+        </p:txBody>
+      </p:sp>
+      <p:sp>
+        <p:nvSpPr>
+          <p:cNvPr id="8" name="Rectangle 7"/>
+          <p:cNvSpPr/>
+          <p:nvPr/>
+        </p:nvSpPr>
+        <p:spPr>
+          <a:xfrm>
+            <a:off x="640080" y="1325880"/>
+            <a:ext cx="10908792" cy="784877"/>
+          </a:xfrm>
+          <a:prstGeom prst="rect">
+            <a:avLst/>
+          </a:prstGeom>
+          <a:solidFill>
+            <a:srgbClr val="F5F7F9"/>
+          </a:solidFill>
+          <a:ln>
+            <a:solidFill>
+              <a:srgbClr val="E3E7EC"/>
+            </a:solidFill>
+          </a:ln>
+        </p:spPr>
+        <p:style>
+          <a:lnRef idx="1">
+            <a:schemeClr val="accent1"/>
+          </a:lnRef>
+          <a:fillRef idx="3">
+            <a:schemeClr val="accent1"/>
+          </a:fillRef>
+          <a:effectRef idx="2">
+            <a:schemeClr val="accent1"/>
+          </a:effectRef>
+          <a:fontRef idx="minor">
+            <a:schemeClr val="lt1"/>
+          </a:fontRef>
+        </p:style>
+        <p:txBody>
+          <a:bodyPr rtlCol="0" anchor="ctr"/>
+          <a:lstStyle/>
+          <a:p>
+            <a:pPr algn="ctr">
+              <a:defRPr>
+                <a:latin typeface="Inter"/>
+              </a:defRPr>
+            </a:pPr>
+          </a:p>
+        </p:txBody>
+      </p:sp>
+      <p:sp>
+        <p:nvSpPr>
+          <p:cNvPr id="9" name="Rectangle 8"/>
+          <p:cNvSpPr/>
+          <p:nvPr/>
+        </p:nvSpPr>
+        <p:spPr>
+          <a:xfrm>
+            <a:off x="640080" y="1325880"/>
+            <a:ext cx="54864" cy="784877"/>
+          </a:xfrm>
+          <a:prstGeom prst="rect">
+            <a:avLst/>
+          </a:prstGeom>
+          <a:solidFill>
+            <a:srgbClr val="9AA5B1"/>
+          </a:solidFill>
+          <a:ln>
+            <a:solidFill>
+              <a:srgbClr val="9AA5B1"/>
+            </a:solidFill>
+          </a:ln>
+        </p:spPr>
+        <p:style>
+          <a:lnRef idx="1">
+            <a:schemeClr val="accent1"/>
+          </a:lnRef>
+          <a:fillRef idx="3">
+            <a:schemeClr val="accent1"/>
+          </a:fillRef>
+          <a:effectRef idx="2">
+            <a:schemeClr val="accent1"/>
+          </a:effectRef>
+          <a:fontRef idx="minor">
+            <a:schemeClr val="lt1"/>
+          </a:fontRef>
+        </p:style>
+        <p:txBody>
+          <a:bodyPr rtlCol="0" anchor="ctr"/>
+          <a:lstStyle/>
+          <a:p>
+            <a:pPr algn="ctr">
+              <a:defRPr>
+                <a:latin typeface="Inter"/>
+              </a:defRPr>
+            </a:pPr>
+          </a:p>
+        </p:txBody>
+      </p:sp>
+      <p:sp>
+        <p:nvSpPr>
+          <p:cNvPr id="10" name="TextBox 9"/>
+          <p:cNvSpPr txBox="1"/>
+          <p:nvPr/>
+        </p:nvSpPr>
+        <p:spPr>
+          <a:xfrm>
+            <a:off x="804671" y="1435607"/>
+            <a:ext cx="10616184" cy="228600"/>
+          </a:xfrm>
+          <a:prstGeom prst="rect">
+            <a:avLst/>
+          </a:prstGeom>
+          <a:noFill/>
+        </p:spPr>
+        <p:txBody>
+          <a:bodyPr wrap="none" lIns="9144" rIns="9144" tIns="9144" bIns="9144" anchor="t">
+            <a:spAutoFit/>
+          </a:bodyPr>
+          <a:lstStyle/>
+          <a:p>
+            <a:pPr algn="l">
+              <a:spcAft>
+                <a:spcPts val="0"/>
+              </a:spcAft>
+              <a:defRPr sz="1000" b="1">
+                <a:solidFill>
+                  <a:srgbClr val="0D1117"/>
+                </a:solidFill>
+                <a:latin typeface="Inter"/>
+              </a:defRPr>
+            </a:pPr>
+            <a:r>
+              <a:rPr>
+                <a:latin typeface="Inter"/>
+              </a:rPr>
+              <a:t>Recommendation and action requested</a:t>
+            </a:r>
+          </a:p>
+        </p:txBody>
+      </p:sp>
+      <p:sp>
+        <p:nvSpPr>
+          <p:cNvPr id="11" name="TextBox 10"/>
+          <p:cNvSpPr txBox="1"/>
+          <p:nvPr/>
+        </p:nvSpPr>
+        <p:spPr>
+          <a:xfrm>
+            <a:off x="804671" y="1719072"/>
+            <a:ext cx="10616184" cy="300245"/>
+          </a:xfrm>
+          <a:prstGeom prst="rect">
+            <a:avLst/>
+          </a:prstGeom>
+          <a:noFill/>
+        </p:spPr>
+        <p:txBody>
+          <a:bodyPr wrap="none" lIns="9144" rIns="9144" tIns="9144" bIns="9144" anchor="t">
+            <a:spAutoFit/>
+          </a:bodyPr>
+          <a:lstStyle/>
+          <a:p>
+            <a:pPr algn="l">
+              <a:spcAft>
+                <a:spcPts val="0"/>
+              </a:spcAft>
+              <a:defRPr sz="950" b="0">
+                <a:solidFill>
+                  <a:srgbClr val="4A5563"/>
+                </a:solidFill>
+                <a:latin typeface="Inter"/>
+              </a:defRPr>
+            </a:pPr>
+            <a:r>
+              <a:rPr>
+                <a:latin typeface="Inter"/>
+              </a:rPr>
+              <a:t>We recommend a two-year $80.0M commitment program. Committee action requested: approve a $45.0M first-year ceiling and require completed diligence before each commitment [S3][S6][S7].</a:t>
+            </a:r>
+          </a:p>
+        </p:txBody>
+      </p:sp>
+      <p:sp>
+        <p:nvSpPr>
+          <p:cNvPr id="12" name="TextBox 11"/>
+          <p:cNvSpPr txBox="1"/>
+          <p:nvPr/>
+        </p:nvSpPr>
+        <p:spPr>
+          <a:xfrm>
+            <a:off x="640080" y="2220485"/>
+            <a:ext cx="10908792" cy="201168"/>
+          </a:xfrm>
+          <a:prstGeom prst="rect">
+            <a:avLst/>
+          </a:prstGeom>
+          <a:noFill/>
+        </p:spPr>
+        <p:txBody>
+          <a:bodyPr wrap="none" lIns="9144" rIns="9144" tIns="9144" bIns="9144" anchor="t">
+            <a:spAutoFit/>
+          </a:bodyPr>
+          <a:lstStyle/>
+          <a:p>
+            <a:pPr algn="l">
+              <a:spcAft>
+                <a:spcPts val="0"/>
+              </a:spcAft>
+              <a:defRPr sz="720" b="1">
+                <a:solidFill>
+                  <a:srgbClr val="4A5563"/>
+                </a:solidFill>
+                <a:latin typeface="Inter"/>
+              </a:defRPr>
+            </a:pPr>
+            <a:r>
+              <a:rPr>
+                <a:latin typeface="Inter"/>
+              </a:rPr>
+              <a:t>DECISION SUMMARY</a:t>
+            </a:r>
+          </a:p>
+        </p:txBody>
+      </p:sp>
+      <p:graphicFrame>
+        <p:nvGraphicFramePr>
+          <p:cNvPr id="13" name="Table 12"/>
+          <p:cNvGraphicFramePr>
+            <a:graphicFrameLocks noGrp="1"/>
+          </p:cNvGraphicFramePr>
+          <p:nvPr/>
+        </p:nvGraphicFramePr>
+        <p:xfrm>
+          <a:off x="640080" y="2494805"/>
+          <a:ext cx="10908792" cy="1266002"/>
+        </p:xfrm>
+        <a:graphic>
+          <a:graphicData uri="http://schemas.openxmlformats.org/drawingml/2006/table">
+            <a:tbl>
+              <a:tblPr firstRow="1" bandRow="1">
+                <a:tableStyleId>{5C22544A-7EE6-4342-B048-85BDC9FD1C3A}</a:tableStyleId>
+              </a:tblPr>
+              <a:tblGrid>
+                <a:gridCol w="2011680"/>
+                <a:gridCol w="2965704"/>
+                <a:gridCol w="2965704"/>
+                <a:gridCol w="2965704"/>
+              </a:tblGrid>
+              <a:tr h="316500">
+                <a:tc>
+                  <a:txBody>
+                    <a:bodyPr/>
+                    <a:lstStyle/>
+                    <a:p>
+                      <a:pPr>
+                        <a:defRPr sz="750" b="1">
+                          <a:solidFill>
+                            <a:srgbClr val="FFFFFF"/>
+                          </a:solidFill>
+                          <a:latin typeface="Inter"/>
+                        </a:defRPr>
+                      </a:pPr>
+                      <a:r>
+                        <a:rPr>
+                          <a:latin typeface="Inter"/>
+                        </a:rPr>
+                        <a:t>Decision element</a:t>
+                      </a:r>
+                    </a:p>
+                  </a:txBody>
+                  <a:tcPr marL="54864" marR="54864" marT="27432" marB="27432" anchor="ctr">
+                    <a:solidFill>
+                      <a:srgbClr val="0D1117"/>
+                    </a:solidFill>
+                  </a:tcPr>
+                </a:tc>
+                <a:tc>
+                  <a:txBody>
+                    <a:bodyPr/>
+                    <a:lstStyle/>
+                    <a:p>
+                      <a:pPr>
+                        <a:defRPr sz="750" b="1">
+                          <a:solidFill>
+                            <a:srgbClr val="FFFFFF"/>
+                          </a:solidFill>
+                          <a:latin typeface="Inter"/>
+                        </a:defRPr>
+                      </a:pPr>
+                      <a:r>
+                        <a:rPr>
+                          <a:latin typeface="Inter"/>
+                        </a:rPr>
+                        <a:t>Proposed action</a:t>
+                      </a:r>
+                    </a:p>
+                  </a:txBody>
+                  <a:tcPr marL="54864" marR="54864" marT="27432" marB="27432" anchor="ctr">
+                    <a:solidFill>
+                      <a:srgbClr val="0D1117"/>
+                    </a:solidFill>
+                  </a:tcPr>
+                </a:tc>
+                <a:tc>
+                  <a:txBody>
+                    <a:bodyPr/>
+                    <a:lstStyle/>
+                    <a:p>
+                      <a:pPr>
+                        <a:defRPr sz="750" b="1">
+                          <a:solidFill>
+                            <a:srgbClr val="FFFFFF"/>
+                          </a:solidFill>
+                          <a:latin typeface="Inter"/>
+                        </a:defRPr>
+                      </a:pPr>
+                      <a:r>
+                        <a:rPr>
+                          <a:latin typeface="Inter"/>
+                        </a:rPr>
+                        <a:t>Evidence</a:t>
+                      </a:r>
+                    </a:p>
+                  </a:txBody>
+                  <a:tcPr marL="54864" marR="54864" marT="27432" marB="27432" anchor="ctr">
+                    <a:solidFill>
+                      <a:srgbClr val="0D1117"/>
+                    </a:solidFill>
+                  </a:tcPr>
+                </a:tc>
+                <a:tc>
+                  <a:txBody>
+                    <a:bodyPr/>
+                    <a:lstStyle/>
+                    <a:p>
+                      <a:pPr>
+                        <a:defRPr sz="750" b="1">
+                          <a:solidFill>
+                            <a:srgbClr val="FFFFFF"/>
+                          </a:solidFill>
+                          <a:latin typeface="Inter"/>
+                        </a:defRPr>
+                      </a:pPr>
+                      <a:r>
+                        <a:rPr>
+                          <a:latin typeface="Inter"/>
+                        </a:rPr>
+                        <a:t>Status</a:t>
+                      </a:r>
+                    </a:p>
+                  </a:txBody>
+                  <a:tcPr marL="54864" marR="54864" marT="27432" marB="27432" anchor="ctr">
+                    <a:solidFill>
+                      <a:srgbClr val="0D1117"/>
+                    </a:solidFill>
+                  </a:tcPr>
+                </a:tc>
+              </a:tr>
+              <a:tr h="316500">
+                <a:tc>
+                  <a:txBody>
+                    <a:bodyPr/>
+                    <a:lstStyle/>
+                    <a:p>
+                      <a:pPr>
+                        <a:defRPr sz="800" b="1">
+                          <a:solidFill>
+                            <a:srgbClr val="0D1117"/>
+                          </a:solidFill>
+                          <a:latin typeface="Inter"/>
+                        </a:defRPr>
+                      </a:pPr>
+                      <a:r>
+                        <a:rPr>
+                          <a:latin typeface="Inter"/>
+                        </a:rPr>
+                        <a:t>Program size</a:t>
+                      </a:r>
+                    </a:p>
+                  </a:txBody>
+                  <a:tcPr marL="54864" marR="54864" marT="27432" marB="27432" anchor="ctr">
+                    <a:solidFill>
+                      <a:srgbClr val="FFFFFF"/>
+                    </a:solidFill>
+                  </a:tcPr>
+                </a:tc>
+                <a:tc>
+                  <a:txBody>
+                    <a:bodyPr/>
+                    <a:lstStyle/>
+                    <a:p>
+                      <a:pPr>
+                        <a:defRPr sz="800" b="0">
+                          <a:solidFill>
+                            <a:srgbClr val="0D1117"/>
+                          </a:solidFill>
+                          <a:latin typeface="Inter"/>
+                        </a:defRPr>
+                      </a:pPr>
+                      <a:r>
+                        <a:rPr>
+                          <a:latin typeface="Inter"/>
+                        </a:rPr>
+                        <a:t>$80.0M over two years</a:t>
+                      </a:r>
+                    </a:p>
+                  </a:txBody>
+                  <a:tcPr marL="54864" marR="54864" marT="27432" marB="27432" anchor="ctr">
+                    <a:solidFill>
+                      <a:srgbClr val="FFFFFF"/>
+                    </a:solidFill>
+                  </a:tcPr>
+                </a:tc>
+                <a:tc>
+                  <a:txBody>
+                    <a:bodyPr/>
+                    <a:lstStyle/>
+                    <a:p>
+                      <a:pPr>
+                        <a:defRPr sz="800" b="0">
+                          <a:solidFill>
+                            <a:srgbClr val="0D1117"/>
+                          </a:solidFill>
+                          <a:latin typeface="Inter"/>
+                        </a:defRPr>
+                      </a:pPr>
+                      <a:r>
+                        <a:rPr>
+                          <a:latin typeface="Inter"/>
+                        </a:rPr>
+                        <a:t>[S6]</a:t>
+                      </a:r>
+                    </a:p>
+                  </a:txBody>
+                  <a:tcPr marL="54864" marR="54864" marT="27432" marB="27432" anchor="ctr">
+                    <a:solidFill>
+                      <a:srgbClr val="FFFFFF"/>
+                    </a:solidFill>
+                  </a:tcPr>
+                </a:tc>
+                <a:tc>
+                  <a:txBody>
+                    <a:bodyPr/>
+                    <a:lstStyle/>
+                    <a:p>
+                      <a:pPr>
+                        <a:defRPr sz="800" b="1">
+                          <a:solidFill>
+                            <a:srgbClr val="F2A93B"/>
+                          </a:solidFill>
+                          <a:latin typeface="Inter"/>
+                        </a:defRPr>
+                      </a:pPr>
+                      <a:r>
+                        <a:rPr>
+                          <a:latin typeface="Inter"/>
+                        </a:rPr>
+                        <a:t>● Proposed</a:t>
+                      </a:r>
+                    </a:p>
+                  </a:txBody>
+                  <a:tcPr marL="54864" marR="54864" marT="27432" marB="27432" anchor="ctr">
+                    <a:solidFill>
+                      <a:srgbClr val="F5F7F9"/>
+                    </a:solidFill>
+                  </a:tcPr>
+                </a:tc>
+              </a:tr>
+              <a:tr h="316500">
+                <a:tc>
+                  <a:txBody>
+                    <a:bodyPr/>
+                    <a:lstStyle/>
+                    <a:p>
+                      <a:pPr>
+                        <a:defRPr sz="800" b="1">
+                          <a:solidFill>
+                            <a:srgbClr val="0D1117"/>
+                          </a:solidFill>
+                          <a:latin typeface="Inter"/>
+                        </a:defRPr>
+                      </a:pPr>
+                      <a:r>
+                        <a:rPr>
+                          <a:latin typeface="Inter"/>
+                        </a:rPr>
+                        <a:t>First-year ceiling</a:t>
+                      </a:r>
+                    </a:p>
+                  </a:txBody>
+                  <a:tcPr marL="54864" marR="54864" marT="27432" marB="27432" anchor="ctr">
+                    <a:solidFill>
+                      <a:srgbClr val="F5F7F9"/>
+                    </a:solidFill>
+                  </a:tcPr>
+                </a:tc>
+                <a:tc>
+                  <a:txBody>
+                    <a:bodyPr/>
+                    <a:lstStyle/>
+                    <a:p>
+                      <a:pPr>
+                        <a:defRPr sz="800" b="0">
+                          <a:solidFill>
+                            <a:srgbClr val="0D1117"/>
+                          </a:solidFill>
+                          <a:latin typeface="Inter"/>
+                        </a:defRPr>
+                      </a:pPr>
+                      <a:r>
+                        <a:rPr>
+                          <a:latin typeface="Inter"/>
+                        </a:rPr>
+                        <a:t>$45.0M</a:t>
+                      </a:r>
+                    </a:p>
+                  </a:txBody>
+                  <a:tcPr marL="54864" marR="54864" marT="27432" marB="27432" anchor="ctr">
+                    <a:solidFill>
+                      <a:srgbClr val="F5F7F9"/>
+                    </a:solidFill>
+                  </a:tcPr>
+                </a:tc>
+                <a:tc>
+                  <a:txBody>
+                    <a:bodyPr/>
+                    <a:lstStyle/>
+                    <a:p>
+                      <a:pPr>
+                        <a:defRPr sz="800" b="0">
+                          <a:solidFill>
+                            <a:srgbClr val="0D1117"/>
+                          </a:solidFill>
+                          <a:latin typeface="Inter"/>
+                        </a:defRPr>
+                      </a:pPr>
+                      <a:r>
+                        <a:rPr>
+                          <a:latin typeface="Inter"/>
+                        </a:rPr>
+                        <a:t>[S6]</a:t>
+                      </a:r>
+                    </a:p>
+                  </a:txBody>
+                  <a:tcPr marL="54864" marR="54864" marT="27432" marB="27432" anchor="ctr">
+                    <a:solidFill>
+                      <a:srgbClr val="F5F7F9"/>
+                    </a:solidFill>
+                  </a:tcPr>
+                </a:tc>
+                <a:tc>
+                  <a:txBody>
+                    <a:bodyPr/>
+                    <a:lstStyle/>
+                    <a:p>
+                      <a:pPr>
+                        <a:defRPr sz="800" b="1">
+                          <a:solidFill>
+                            <a:srgbClr val="F2A93B"/>
+                          </a:solidFill>
+                          <a:latin typeface="Inter"/>
+                        </a:defRPr>
+                      </a:pPr>
+                      <a:r>
+                        <a:rPr>
+                          <a:latin typeface="Inter"/>
+                        </a:rPr>
+                        <a:t>● Proposed</a:t>
+                      </a:r>
+                    </a:p>
+                  </a:txBody>
+                  <a:tcPr marL="54864" marR="54864" marT="27432" marB="27432" anchor="ctr">
+                    <a:solidFill>
+                      <a:srgbClr val="F5F7F9"/>
+                    </a:solidFill>
+                  </a:tcPr>
+                </a:tc>
+              </a:tr>
+              <a:tr h="316502">
+                <a:tc>
+                  <a:txBody>
+                    <a:bodyPr/>
+                    <a:lstStyle/>
+                    <a:p>
+                      <a:pPr>
+                        <a:defRPr sz="800" b="1">
+                          <a:solidFill>
+                            <a:srgbClr val="0D1117"/>
+                          </a:solidFill>
+                          <a:latin typeface="Inter"/>
+                        </a:defRPr>
+                      </a:pPr>
+                      <a:r>
+                        <a:rPr>
+                          <a:latin typeface="Inter"/>
+                        </a:rPr>
+                        <a:t>Policy fit</a:t>
+                      </a:r>
+                    </a:p>
+                  </a:txBody>
+                  <a:tcPr marL="54864" marR="54864" marT="27432" marB="27432" anchor="ctr">
+                    <a:solidFill>
+                      <a:srgbClr val="FFFFFF"/>
+                    </a:solidFill>
+                  </a:tcPr>
+                </a:tc>
+                <a:tc>
+                  <a:txBody>
+                    <a:bodyPr/>
+                    <a:lstStyle/>
+                    <a:p>
+                      <a:pPr>
+                        <a:defRPr sz="800" b="0">
+                          <a:solidFill>
+                            <a:srgbClr val="0D1117"/>
+                          </a:solidFill>
+                          <a:latin typeface="Inter"/>
+                        </a:defRPr>
+                      </a:pPr>
+                      <a:r>
+                        <a:rPr>
+                          <a:latin typeface="Inter"/>
+                        </a:rPr>
+                        <a:t>Remain within 15.0%–30.0%</a:t>
+                      </a:r>
+                    </a:p>
+                  </a:txBody>
+                  <a:tcPr marL="54864" marR="54864" marT="27432" marB="27432" anchor="ctr">
+                    <a:solidFill>
+                      <a:srgbClr val="FFFFFF"/>
+                    </a:solidFill>
+                  </a:tcPr>
+                </a:tc>
+                <a:tc>
+                  <a:txBody>
+                    <a:bodyPr/>
+                    <a:lstStyle/>
+                    <a:p>
+                      <a:pPr>
+                        <a:defRPr sz="800" b="0">
+                          <a:solidFill>
+                            <a:srgbClr val="0D1117"/>
+                          </a:solidFill>
+                          <a:latin typeface="Inter"/>
+                        </a:defRPr>
+                      </a:pPr>
+                      <a:r>
+                        <a:rPr>
+                          <a:latin typeface="Inter"/>
+                        </a:rPr>
+                        <a:t>[S3]</a:t>
+                      </a:r>
+                    </a:p>
+                  </a:txBody>
+                  <a:tcPr marL="54864" marR="54864" marT="27432" marB="27432" anchor="ctr">
+                    <a:solidFill>
+                      <a:srgbClr val="FFFFFF"/>
+                    </a:solidFill>
+                  </a:tcPr>
+                </a:tc>
+                <a:tc>
+                  <a:txBody>
+                    <a:bodyPr/>
+                    <a:lstStyle/>
+                    <a:p>
+                      <a:pPr>
+                        <a:defRPr sz="800" b="1">
+                          <a:solidFill>
+                            <a:srgbClr val="C6F432"/>
+                          </a:solidFill>
+                          <a:latin typeface="Inter"/>
+                        </a:defRPr>
+                      </a:pPr>
+                      <a:r>
+                        <a:rPr>
+                          <a:latin typeface="Inter"/>
+                        </a:rPr>
+                        <a:t>● Compliant</a:t>
+                      </a:r>
+                    </a:p>
+                  </a:txBody>
+                  <a:tcPr marL="54864" marR="54864" marT="27432" marB="27432" anchor="ctr">
+                    <a:solidFill>
+                      <a:srgbClr val="F5F7F9"/>
+                    </a:solidFill>
+                  </a:tcPr>
+                </a:tc>
+              </a:tr>
+            </a:tbl>
+          </a:graphicData>
+        </a:graphic>
+      </p:graphicFrame>
+      <p:sp>
+        <p:nvSpPr>
+          <p:cNvPr id="14" name="Rectangle 13"/>
+          <p:cNvSpPr/>
+          <p:nvPr/>
+        </p:nvSpPr>
+        <p:spPr>
+          <a:xfrm>
+            <a:off x="640080" y="3870536"/>
+            <a:ext cx="10908792" cy="784877"/>
+          </a:xfrm>
+          <a:prstGeom prst="rect">
+            <a:avLst/>
+          </a:prstGeom>
+          <a:solidFill>
+            <a:srgbClr val="F5F7F9"/>
+          </a:solidFill>
+          <a:ln>
+            <a:solidFill>
+              <a:srgbClr val="E3E7EC"/>
+            </a:solidFill>
+          </a:ln>
+        </p:spPr>
+        <p:style>
+          <a:lnRef idx="1">
+            <a:schemeClr val="accent1"/>
+          </a:lnRef>
+          <a:fillRef idx="3">
+            <a:schemeClr val="accent1"/>
+          </a:fillRef>
+          <a:effectRef idx="2">
+            <a:schemeClr val="accent1"/>
+          </a:effectRef>
+          <a:fontRef idx="minor">
+            <a:schemeClr val="lt1"/>
+          </a:fontRef>
+        </p:style>
+        <p:txBody>
+          <a:bodyPr rtlCol="0" anchor="ctr"/>
+          <a:lstStyle/>
+          <a:p>
+            <a:pPr algn="ctr">
+              <a:defRPr>
+                <a:latin typeface="Inter"/>
+              </a:defRPr>
+            </a:pPr>
+          </a:p>
+        </p:txBody>
+      </p:sp>
+      <p:sp>
+        <p:nvSpPr>
+          <p:cNvPr id="15" name="Rectangle 14"/>
+          <p:cNvSpPr/>
+          <p:nvPr/>
+        </p:nvSpPr>
+        <p:spPr>
+          <a:xfrm>
+            <a:off x="640080" y="3870536"/>
+            <a:ext cx="54864" cy="784877"/>
+          </a:xfrm>
+          <a:prstGeom prst="rect">
+            <a:avLst/>
+          </a:prstGeom>
+          <a:solidFill>
+            <a:srgbClr val="F2A93B"/>
+          </a:solidFill>
+          <a:ln>
+            <a:solidFill>
+              <a:srgbClr val="F2A93B"/>
+            </a:solidFill>
+          </a:ln>
+        </p:spPr>
+        <p:style>
+          <a:lnRef idx="1">
+            <a:schemeClr val="accent1"/>
+          </a:lnRef>
+          <a:fillRef idx="3">
+            <a:schemeClr val="accent1"/>
+          </a:fillRef>
+          <a:effectRef idx="2">
+            <a:schemeClr val="accent1"/>
+          </a:effectRef>
+          <a:fontRef idx="minor">
+            <a:schemeClr val="lt1"/>
+          </a:fontRef>
+        </p:style>
+        <p:txBody>
+          <a:bodyPr rtlCol="0" anchor="ctr"/>
+          <a:lstStyle/>
+          <a:p>
+            <a:pPr algn="ctr">
+              <a:defRPr>
+                <a:latin typeface="Inter"/>
+              </a:defRPr>
+            </a:pPr>
+          </a:p>
+        </p:txBody>
+      </p:sp>
+      <p:sp>
+        <p:nvSpPr>
+          <p:cNvPr id="16" name="TextBox 15"/>
+          <p:cNvSpPr txBox="1"/>
+          <p:nvPr/>
+        </p:nvSpPr>
+        <p:spPr>
+          <a:xfrm>
+            <a:off x="804671" y="3980264"/>
+            <a:ext cx="10616184" cy="228600"/>
+          </a:xfrm>
+          <a:prstGeom prst="rect">
+            <a:avLst/>
+          </a:prstGeom>
+          <a:noFill/>
+        </p:spPr>
+        <p:txBody>
+          <a:bodyPr wrap="none" lIns="9144" rIns="9144" tIns="9144" bIns="9144" anchor="t">
+            <a:spAutoFit/>
+          </a:bodyPr>
+          <a:lstStyle/>
+          <a:p>
+            <a:pPr algn="l">
+              <a:spcAft>
+                <a:spcPts val="0"/>
+              </a:spcAft>
+              <a:defRPr sz="1000" b="1">
+                <a:solidFill>
+                  <a:srgbClr val="0D1117"/>
+                </a:solidFill>
+                <a:latin typeface="Inter"/>
+              </a:defRPr>
+            </a:pPr>
+            <a:r>
+              <a:rPr>
+                <a:latin typeface="Inter"/>
+              </a:rPr>
+              <a:t>Conditions and limits</a:t>
+            </a:r>
+          </a:p>
+        </p:txBody>
+      </p:sp>
+      <p:sp>
+        <p:nvSpPr>
+          <p:cNvPr id="17" name="TextBox 16"/>
+          <p:cNvSpPr txBox="1"/>
+          <p:nvPr/>
+        </p:nvSpPr>
+        <p:spPr>
+          <a:xfrm>
+            <a:off x="804671" y="4263728"/>
+            <a:ext cx="10616184" cy="300245"/>
+          </a:xfrm>
+          <a:prstGeom prst="rect">
+            <a:avLst/>
+          </a:prstGeom>
+          <a:noFill/>
+        </p:spPr>
+        <p:txBody>
+          <a:bodyPr wrap="none" lIns="9144" rIns="9144" tIns="9144" bIns="9144" anchor="t">
+            <a:spAutoFit/>
+          </a:bodyPr>
+          <a:lstStyle/>
+          <a:p>
+            <a:pPr algn="l">
+              <a:spcAft>
+                <a:spcPts val="0"/>
+              </a:spcAft>
+              <a:defRPr sz="950" b="0">
+                <a:solidFill>
+                  <a:srgbClr val="4A5563"/>
+                </a:solidFill>
+                <a:latin typeface="Inter"/>
+              </a:defRPr>
+            </a:pPr>
+            <a:r>
+              <a:rPr>
+                <a:latin typeface="Inter"/>
+              </a:rPr>
+              <a:t>Each manager requires completed operational and GIPS diligence; quarterly pacing proceeds only while governed liquidity coverage remains at or above the returned policy threshold [S3][S7].</a:t>
+            </a:r>
+          </a:p>
+        </p:txBody>
+      </p:sp>
+      <p:sp>
+        <p:nvSpPr>
+          <p:cNvPr id="18" name="Rectangle 17"/>
+          <p:cNvSpPr/>
+          <p:nvPr/>
+        </p:nvSpPr>
+        <p:spPr>
+          <a:xfrm>
+            <a:off x="640080" y="4765141"/>
+            <a:ext cx="10908792" cy="1452778"/>
+          </a:xfrm>
+          <a:prstGeom prst="rect">
+            <a:avLst/>
+          </a:prstGeom>
+          <a:solidFill>
+            <a:srgbClr val="F5F7F9"/>
+          </a:solidFill>
+          <a:ln>
+            <a:solidFill>
+              <a:srgbClr val="E3E7EC"/>
+            </a:solidFill>
+          </a:ln>
+        </p:spPr>
+        <p:style>
+          <a:lnRef idx="1">
+            <a:schemeClr val="accent1"/>
+          </a:lnRef>
+          <a:fillRef idx="3">
+            <a:schemeClr val="accent1"/>
+          </a:fillRef>
+          <a:effectRef idx="2">
+            <a:schemeClr val="accent1"/>
+          </a:effectRef>
+          <a:fontRef idx="minor">
+            <a:schemeClr val="lt1"/>
+          </a:fontRef>
+        </p:style>
+        <p:txBody>
+          <a:bodyPr rtlCol="0" anchor="ctr"/>
+          <a:lstStyle/>
+          <a:p>
+            <a:pPr algn="ctr">
+              <a:defRPr>
+                <a:latin typeface="Inter"/>
+              </a:defRPr>
+            </a:pPr>
+          </a:p>
+        </p:txBody>
+      </p:sp>
+      <p:sp>
+        <p:nvSpPr>
+          <p:cNvPr id="19" name="Rectangle 18"/>
+          <p:cNvSpPr/>
+          <p:nvPr/>
+        </p:nvSpPr>
+        <p:spPr>
+          <a:xfrm>
+            <a:off x="640080" y="4765141"/>
+            <a:ext cx="54864" cy="1452778"/>
+          </a:xfrm>
+          <a:prstGeom prst="rect">
+            <a:avLst/>
+          </a:prstGeom>
+          <a:solidFill>
+            <a:srgbClr val="F2A93B"/>
+          </a:solidFill>
+          <a:ln>
+            <a:solidFill>
+              <a:srgbClr val="F2A93B"/>
+            </a:solidFill>
+          </a:ln>
+        </p:spPr>
+        <p:style>
+          <a:lnRef idx="1">
+            <a:schemeClr val="accent1"/>
+          </a:lnRef>
+          <a:fillRef idx="3">
+            <a:schemeClr val="accent1"/>
+          </a:fillRef>
+          <a:effectRef idx="2">
+            <a:schemeClr val="accent1"/>
+          </a:effectRef>
+          <a:fontRef idx="minor">
+            <a:schemeClr val="lt1"/>
+          </a:fontRef>
+        </p:style>
+        <p:txBody>
+          <a:bodyPr rtlCol="0" anchor="ctr"/>
+          <a:lstStyle/>
+          <a:p>
+            <a:pPr algn="ctr">
+              <a:defRPr>
+                <a:latin typeface="Inter"/>
+              </a:defRPr>
+            </a:pPr>
+          </a:p>
+        </p:txBody>
+      </p:sp>
+      <p:sp>
+        <p:nvSpPr>
+          <p:cNvPr id="20" name="TextBox 19"/>
+          <p:cNvSpPr txBox="1"/>
+          <p:nvPr/>
+        </p:nvSpPr>
+        <p:spPr>
+          <a:xfrm>
+            <a:off x="804671" y="4874869"/>
+            <a:ext cx="10616184" cy="228600"/>
+          </a:xfrm>
+          <a:prstGeom prst="rect">
+            <a:avLst/>
+          </a:prstGeom>
+          <a:noFill/>
+        </p:spPr>
+        <p:txBody>
+          <a:bodyPr wrap="none" lIns="9144" rIns="9144" tIns="9144" bIns="9144" anchor="t">
+            <a:spAutoFit/>
+          </a:bodyPr>
+          <a:lstStyle/>
+          <a:p>
+            <a:pPr algn="l">
+              <a:spcAft>
+                <a:spcPts val="0"/>
+              </a:spcAft>
+              <a:defRPr sz="1000" b="1">
+                <a:solidFill>
+                  <a:srgbClr val="0D1117"/>
+                </a:solidFill>
+                <a:latin typeface="Inter"/>
+              </a:defRPr>
+            </a:pPr>
+            <a:r>
+              <a:rPr>
+                <a:latin typeface="Inter"/>
+              </a:rPr>
+              <a:t>Key judgment — headline signal</a:t>
+            </a:r>
+          </a:p>
+        </p:txBody>
+      </p:sp>
+      <p:sp>
+        <p:nvSpPr>
+          <p:cNvPr id="21" name="TextBox 20"/>
+          <p:cNvSpPr txBox="1"/>
+          <p:nvPr/>
+        </p:nvSpPr>
+        <p:spPr>
+          <a:xfrm>
+            <a:off x="804671" y="5158333"/>
+            <a:ext cx="10616184" cy="968146"/>
+          </a:xfrm>
+          <a:prstGeom prst="rect">
+            <a:avLst/>
+          </a:prstGeom>
+          <a:noFill/>
+        </p:spPr>
+        <p:txBody>
+          <a:bodyPr wrap="none" lIns="9144" rIns="9144" tIns="9144" bIns="9144" anchor="t">
+            <a:spAutoFit/>
+          </a:bodyPr>
+          <a:lstStyle/>
+          <a:p>
+            <a:pPr algn="l">
+              <a:spcAft>
+                <a:spcPts val="0"/>
+              </a:spcAft>
+              <a:defRPr sz="950" b="0">
+                <a:solidFill>
+                  <a:srgbClr val="4A5563"/>
+                </a:solidFill>
+                <a:latin typeface="Inter"/>
+              </a:defRPr>
+            </a:pPr>
+            <a:r>
+              <a:rPr>
+                <a:latin typeface="Inter"/>
+              </a:rPr>
+              <a:t>Observation: The fictional TEST report carries a pacing-and-concentration signal above the clear threshold [S1]. Why it matters: This signal focuses oversight on the report's most decision-relevant condition. Uncertainty: Evidence coverage may exclude newer or more detailed observations. What would change the view: A governed refresh showing a different signal or breached threshold.</a:t>
+            </a:r>
+          </a:p>
+        </p:txBody>
+      </p:sp>
+      <p:sp>
+        <p:nvSpPr>
+          <p:cNvPr id="22" name="Rectangle 21"/>
+          <p:cNvSpPr/>
+          <p:nvPr/>
+        </p:nvSpPr>
+        <p:spPr>
+          <a:xfrm>
+            <a:off x="640080" y="6446520"/>
+            <a:ext cx="10908792" cy="9144"/>
+          </a:xfrm>
+          <a:prstGeom prst="rect">
+            <a:avLst/>
+          </a:prstGeom>
+          <a:solidFill>
+            <a:srgbClr val="E3E7EC"/>
+          </a:solidFill>
+          <a:ln>
+            <a:solidFill>
+              <a:srgbClr val="E3E7EC"/>
+            </a:solidFill>
+          </a:ln>
+        </p:spPr>
+        <p:style>
+          <a:lnRef idx="1">
+            <a:schemeClr val="accent1"/>
+          </a:lnRef>
+          <a:fillRef idx="3">
+            <a:schemeClr val="accent1"/>
+          </a:fillRef>
+          <a:effectRef idx="2">
+            <a:schemeClr val="accent1"/>
+          </a:effectRef>
+          <a:fontRef idx="minor">
+            <a:schemeClr val="lt1"/>
+          </a:fontRef>
+        </p:style>
+        <p:txBody>
+          <a:bodyPr rtlCol="0" anchor="ctr"/>
+          <a:lstStyle/>
+          <a:p>
+            <a:pPr algn="ctr">
+              <a:defRPr>
+                <a:latin typeface="Inter"/>
+              </a:defRPr>
+            </a:pPr>
+          </a:p>
+        </p:txBody>
+      </p:sp>
+      <p:sp>
+        <p:nvSpPr>
+          <p:cNvPr id="23" name="TextBox 22"/>
+          <p:cNvSpPr txBox="1"/>
+          <p:nvPr/>
+        </p:nvSpPr>
+        <p:spPr>
+          <a:xfrm>
+            <a:off x="640080" y="6501384"/>
+            <a:ext cx="4297680" cy="146304"/>
+          </a:xfrm>
+          <a:prstGeom prst="rect">
+            <a:avLst/>
+          </a:prstGeom>
+          <a:noFill/>
+        </p:spPr>
+        <p:txBody>
+          <a:bodyPr wrap="none" lIns="9144" rIns="9144" tIns="9144" bIns="9144" anchor="t">
+            <a:spAutoFit/>
+          </a:bodyPr>
+          <a:lstStyle/>
+          <a:p>
+            <a:pPr algn="l">
+              <a:spcAft>
+                <a:spcPts val="0"/>
+              </a:spcAft>
+              <a:defRPr sz="650" b="0">
+                <a:solidFill>
+                  <a:srgbClr val="8A94A1"/>
+                </a:solidFill>
+                <a:latin typeface="Inter"/>
+              </a:defRPr>
+            </a:pPr>
+            <a:r>
+              <a:rPr>
+                <a:latin typeface="Inter"/>
+              </a:rPr>
+              <a:t>Sources: S1 · S3 · S6 · S7</a:t>
+            </a:r>
+          </a:p>
+        </p:txBody>
+      </p:sp>
+      <p:sp>
+        <p:nvSpPr>
+          <p:cNvPr id="24" name="TextBox 23"/>
+          <p:cNvSpPr txBox="1"/>
+          <p:nvPr/>
+        </p:nvSpPr>
+        <p:spPr>
+          <a:xfrm>
+            <a:off x="4480560" y="6501384"/>
+            <a:ext cx="5303520" cy="146304"/>
+          </a:xfrm>
+          <a:prstGeom prst="rect">
+            <a:avLst/>
+          </a:prstGeom>
+          <a:noFill/>
+        </p:spPr>
+        <p:txBody>
+          <a:bodyPr wrap="none" lIns="9144" rIns="9144" tIns="9144" bIns="9144" anchor="t">
+            <a:spAutoFit/>
+          </a:bodyPr>
+          <a:lstStyle/>
+          <a:p>
+            <a:pPr algn="ctr">
+              <a:spcAft>
+                <a:spcPts val="0"/>
+              </a:spcAft>
+              <a:defRPr sz="650" b="0">
+                <a:solidFill>
+                  <a:srgbClr val="8A94A1"/>
+                </a:solidFill>
+                <a:latin typeface="Inter"/>
+              </a:defRPr>
+            </a:pPr>
+            <a:r>
+              <a:rPr>
+                <a:latin typeface="Inter"/>
+              </a:rPr>
+              <a:t>TEST DATA — fictional portfolio for rendering tests only · Data as of 2026-06-30</a:t>
+            </a:r>
+          </a:p>
+        </p:txBody>
+      </p:sp>
+      <p:sp>
+        <p:nvSpPr>
+          <p:cNvPr id="25" name="TextBox 24"/>
+          <p:cNvSpPr txBox="1"/>
+          <p:nvPr/>
+        </p:nvSpPr>
+        <p:spPr>
+          <a:xfrm>
+            <a:off x="10287000" y="6501384"/>
+            <a:ext cx="1261872" cy="146304"/>
+          </a:xfrm>
+          <a:prstGeom prst="rect">
+            <a:avLst/>
+          </a:prstGeom>
+          <a:noFill/>
+        </p:spPr>
+        <p:txBody>
+          <a:bodyPr wrap="none" lIns="9144" rIns="9144" tIns="9144" bIns="9144" anchor="t">
+            <a:spAutoFit/>
+          </a:bodyPr>
+          <a:lstStyle/>
+          <a:p>
+            <a:pPr algn="r">
+              <a:spcAft>
+                <a:spcPts val="0"/>
+              </a:spcAft>
+              <a:defRPr sz="650" b="0">
+                <a:solidFill>
+                  <a:srgbClr val="8A94A1"/>
+                </a:solidFill>
+                <a:latin typeface="Inter"/>
+              </a:defRPr>
+            </a:pPr>
+            <a:r>
+              <a:rPr>
+                <a:latin typeface="Inter"/>
+              </a:rPr>
+              <a:t>3</a:t>
+            </a:r>
+          </a:p>
+        </p:txBody>
+      </p:sp>
+    </p:spTree>
+  </p:cSld>
+  <p:clrMapOvr>
+    <a:masterClrMapping/>
+  </p:clrMapOvr>
+</p:sld>
+</file>
+
+<file path=ppt/slides/slide30.xml><?xml version="1.0" encoding="utf-8"?>
 <p:sld xmlns:a="http://schemas.openxmlformats.org/drawingml/2006/main" xmlns:p="http://schemas.openxmlformats.org/presentationml/2006/main" xmlns:r="http://schemas.openxmlformats.org/officeDocument/2006/relationships">
   <p:cSld>
     <p:spTree>
@@ -26603,7 +29936,7 @@
               <a:rPr>
                 <a:latin typeface="Inter"/>
               </a:rPr>
-              <a:t>29</a:t>
+              <a:t>30</a:t>
             </a:r>
           </a:p>
         </p:txBody>
@@ -26616,1529 +29949,7 @@
 </p:sld>
 </file>
 
-<file path=ppt/slides/slide3.xml><?xml version="1.0" encoding="utf-8"?>
-<p:sld xmlns:a="http://schemas.openxmlformats.org/drawingml/2006/main" xmlns:p="http://schemas.openxmlformats.org/presentationml/2006/main" xmlns:r="http://schemas.openxmlformats.org/officeDocument/2006/relationships">
-  <p:cSld>
-    <p:spTree>
-      <p:nvGrpSpPr>
-        <p:cNvPr id="1" name=""/>
-        <p:cNvGrpSpPr/>
-        <p:nvPr/>
-      </p:nvGrpSpPr>
-      <p:grpSpPr/>
-      <p:sp>
-        <p:nvSpPr>
-          <p:cNvPr id="2" name="Rectangle 1"/>
-          <p:cNvSpPr/>
-          <p:nvPr/>
-        </p:nvSpPr>
-        <p:spPr>
-          <a:xfrm>
-            <a:off x="0" y="0"/>
-            <a:ext cx="12191695" cy="6858000"/>
-          </a:xfrm>
-          <a:prstGeom prst="rect">
-            <a:avLst/>
-          </a:prstGeom>
-          <a:solidFill>
-            <a:srgbClr val="FFFFFF"/>
-          </a:solidFill>
-          <a:ln>
-            <a:solidFill>
-              <a:srgbClr val="FFFFFF"/>
-            </a:solidFill>
-          </a:ln>
-        </p:spPr>
-        <p:style>
-          <a:lnRef idx="1">
-            <a:schemeClr val="accent1"/>
-          </a:lnRef>
-          <a:fillRef idx="3">
-            <a:schemeClr val="accent1"/>
-          </a:fillRef>
-          <a:effectRef idx="2">
-            <a:schemeClr val="accent1"/>
-          </a:effectRef>
-          <a:fontRef idx="minor">
-            <a:schemeClr val="lt1"/>
-          </a:fontRef>
-        </p:style>
-        <p:txBody>
-          <a:bodyPr rtlCol="0" anchor="ctr"/>
-          <a:lstStyle/>
-          <a:p>
-            <a:pPr algn="ctr">
-              <a:defRPr>
-                <a:latin typeface="Inter"/>
-              </a:defRPr>
-            </a:pPr>
-          </a:p>
-        </p:txBody>
-      </p:sp>
-      <p:sp>
-        <p:nvSpPr>
-          <p:cNvPr id="3" name="TextBox 2"/>
-          <p:cNvSpPr txBox="1"/>
-          <p:nvPr/>
-        </p:nvSpPr>
-        <p:spPr>
-          <a:xfrm>
-            <a:off x="640080" y="329184"/>
-            <a:ext cx="9875520" cy="182880"/>
-          </a:xfrm>
-          <a:prstGeom prst="rect">
-            <a:avLst/>
-          </a:prstGeom>
-          <a:noFill/>
-        </p:spPr>
-        <p:txBody>
-          <a:bodyPr wrap="none" lIns="9144" rIns="9144" tIns="9144" bIns="9144" anchor="t">
-            <a:spAutoFit/>
-          </a:bodyPr>
-          <a:lstStyle/>
-          <a:p>
-            <a:pPr algn="l">
-              <a:spcAft>
-                <a:spcPts val="0"/>
-              </a:spcAft>
-              <a:defRPr sz="750" b="1">
-                <a:solidFill>
-                  <a:srgbClr val="4F6B00"/>
-                </a:solidFill>
-                <a:latin typeface="Inter"/>
-              </a:defRPr>
-            </a:pPr>
-            <a:r>
-              <a:rPr>
-                <a:latin typeface="Inter"/>
-              </a:rPr>
-              <a:t>RECOMMENDATION AND COMMITTEE ACTION</a:t>
-            </a:r>
-          </a:p>
-        </p:txBody>
-      </p:sp>
-      <p:sp>
-        <p:nvSpPr>
-          <p:cNvPr id="4" name="TextBox 3"/>
-          <p:cNvSpPr txBox="1"/>
-          <p:nvPr/>
-        </p:nvSpPr>
-        <p:spPr>
-          <a:xfrm>
-            <a:off x="640080" y="566928"/>
-            <a:ext cx="10058400" cy="530352"/>
-          </a:xfrm>
-          <a:prstGeom prst="rect">
-            <a:avLst/>
-          </a:prstGeom>
-          <a:noFill/>
-        </p:spPr>
-        <p:txBody>
-          <a:bodyPr wrap="none" lIns="9144" rIns="9144" tIns="9144" bIns="9144" anchor="t">
-            <a:spAutoFit/>
-          </a:bodyPr>
-          <a:lstStyle/>
-          <a:p>
-            <a:pPr algn="l">
-              <a:spcAft>
-                <a:spcPts val="0"/>
-              </a:spcAft>
-              <a:defRPr sz="2300" b="1">
-                <a:solidFill>
-                  <a:srgbClr val="0D1117"/>
-                </a:solidFill>
-                <a:latin typeface="Inter"/>
-              </a:defRPr>
-            </a:pPr>
-            <a:r>
-              <a:rPr>
-                <a:latin typeface="Inter"/>
-              </a:rPr>
-              <a:t>Executive Decision — continued</a:t>
-            </a:r>
-          </a:p>
-        </p:txBody>
-      </p:sp>
-      <p:sp>
-        <p:nvSpPr>
-          <p:cNvPr id="5" name="Rectangle 4"/>
-          <p:cNvSpPr/>
-          <p:nvPr/>
-        </p:nvSpPr>
-        <p:spPr>
-          <a:xfrm>
-            <a:off x="640080" y="1115568"/>
-            <a:ext cx="10908792" cy="18288"/>
-          </a:xfrm>
-          <a:prstGeom prst="rect">
-            <a:avLst/>
-          </a:prstGeom>
-          <a:solidFill>
-            <a:srgbClr val="0D1117"/>
-          </a:solidFill>
-          <a:ln>
-            <a:solidFill>
-              <a:srgbClr val="0D1117"/>
-            </a:solidFill>
-          </a:ln>
-        </p:spPr>
-        <p:style>
-          <a:lnRef idx="1">
-            <a:schemeClr val="accent1"/>
-          </a:lnRef>
-          <a:fillRef idx="3">
-            <a:schemeClr val="accent1"/>
-          </a:fillRef>
-          <a:effectRef idx="2">
-            <a:schemeClr val="accent1"/>
-          </a:effectRef>
-          <a:fontRef idx="minor">
-            <a:schemeClr val="lt1"/>
-          </a:fontRef>
-        </p:style>
-        <p:txBody>
-          <a:bodyPr rtlCol="0" anchor="ctr"/>
-          <a:lstStyle/>
-          <a:p>
-            <a:pPr algn="ctr">
-              <a:defRPr>
-                <a:latin typeface="Inter"/>
-              </a:defRPr>
-            </a:pPr>
-          </a:p>
-        </p:txBody>
-      </p:sp>
-      <p:sp>
-        <p:nvSpPr>
-          <p:cNvPr id="6" name="Rectangle 5"/>
-          <p:cNvSpPr/>
-          <p:nvPr/>
-        </p:nvSpPr>
-        <p:spPr>
-          <a:xfrm>
-            <a:off x="11018520" y="502920"/>
-            <a:ext cx="530352" cy="393192"/>
-          </a:xfrm>
-          <a:prstGeom prst="rect">
-            <a:avLst/>
-          </a:prstGeom>
-          <a:solidFill>
-            <a:srgbClr val="C6F432"/>
-          </a:solidFill>
-          <a:ln>
-            <a:solidFill>
-              <a:srgbClr val="C6F432"/>
-            </a:solidFill>
-          </a:ln>
-        </p:spPr>
-        <p:style>
-          <a:lnRef idx="1">
-            <a:schemeClr val="accent1"/>
-          </a:lnRef>
-          <a:fillRef idx="3">
-            <a:schemeClr val="accent1"/>
-          </a:fillRef>
-          <a:effectRef idx="2">
-            <a:schemeClr val="accent1"/>
-          </a:effectRef>
-          <a:fontRef idx="minor">
-            <a:schemeClr val="lt1"/>
-          </a:fontRef>
-        </p:style>
-        <p:txBody>
-          <a:bodyPr rtlCol="0" anchor="ctr"/>
-          <a:lstStyle/>
-          <a:p>
-            <a:pPr algn="ctr">
-              <a:defRPr>
-                <a:latin typeface="Inter"/>
-              </a:defRPr>
-            </a:pPr>
-          </a:p>
-        </p:txBody>
-      </p:sp>
-      <p:sp>
-        <p:nvSpPr>
-          <p:cNvPr id="7" name="TextBox 6"/>
-          <p:cNvSpPr txBox="1"/>
-          <p:nvPr/>
-        </p:nvSpPr>
-        <p:spPr>
-          <a:xfrm>
-            <a:off x="11045952" y="557784"/>
-            <a:ext cx="475488" cy="182880"/>
-          </a:xfrm>
-          <a:prstGeom prst="rect">
-            <a:avLst/>
-          </a:prstGeom>
-          <a:noFill/>
-        </p:spPr>
-        <p:txBody>
-          <a:bodyPr wrap="none" lIns="9144" rIns="9144" tIns="9144" bIns="9144" anchor="t">
-            <a:spAutoFit/>
-          </a:bodyPr>
-          <a:lstStyle/>
-          <a:p>
-            <a:pPr algn="ctr">
-              <a:spcAft>
-                <a:spcPts val="0"/>
-              </a:spcAft>
-              <a:defRPr sz="1000" b="1">
-                <a:solidFill>
-                  <a:srgbClr val="0D1117"/>
-                </a:solidFill>
-                <a:latin typeface="Inter"/>
-              </a:defRPr>
-            </a:pPr>
-            <a:r>
-              <a:rPr>
-                <a:latin typeface="Inter"/>
-              </a:rPr>
-              <a:t>01</a:t>
-            </a:r>
-          </a:p>
-        </p:txBody>
-      </p:sp>
-      <p:sp>
-        <p:nvSpPr>
-          <p:cNvPr id="8" name="Rectangle 7"/>
-          <p:cNvSpPr/>
-          <p:nvPr/>
-        </p:nvSpPr>
-        <p:spPr>
-          <a:xfrm>
-            <a:off x="640080" y="1325880"/>
-            <a:ext cx="10908792" cy="784877"/>
-          </a:xfrm>
-          <a:prstGeom prst="rect">
-            <a:avLst/>
-          </a:prstGeom>
-          <a:solidFill>
-            <a:srgbClr val="F5F7F9"/>
-          </a:solidFill>
-          <a:ln>
-            <a:solidFill>
-              <a:srgbClr val="E3E7EC"/>
-            </a:solidFill>
-          </a:ln>
-        </p:spPr>
-        <p:style>
-          <a:lnRef idx="1">
-            <a:schemeClr val="accent1"/>
-          </a:lnRef>
-          <a:fillRef idx="3">
-            <a:schemeClr val="accent1"/>
-          </a:fillRef>
-          <a:effectRef idx="2">
-            <a:schemeClr val="accent1"/>
-          </a:effectRef>
-          <a:fontRef idx="minor">
-            <a:schemeClr val="lt1"/>
-          </a:fontRef>
-        </p:style>
-        <p:txBody>
-          <a:bodyPr rtlCol="0" anchor="ctr"/>
-          <a:lstStyle/>
-          <a:p>
-            <a:pPr algn="ctr">
-              <a:defRPr>
-                <a:latin typeface="Inter"/>
-              </a:defRPr>
-            </a:pPr>
-          </a:p>
-        </p:txBody>
-      </p:sp>
-      <p:sp>
-        <p:nvSpPr>
-          <p:cNvPr id="9" name="Rectangle 8"/>
-          <p:cNvSpPr/>
-          <p:nvPr/>
-        </p:nvSpPr>
-        <p:spPr>
-          <a:xfrm>
-            <a:off x="640080" y="1325880"/>
-            <a:ext cx="54864" cy="784877"/>
-          </a:xfrm>
-          <a:prstGeom prst="rect">
-            <a:avLst/>
-          </a:prstGeom>
-          <a:solidFill>
-            <a:srgbClr val="9AA5B1"/>
-          </a:solidFill>
-          <a:ln>
-            <a:solidFill>
-              <a:srgbClr val="9AA5B1"/>
-            </a:solidFill>
-          </a:ln>
-        </p:spPr>
-        <p:style>
-          <a:lnRef idx="1">
-            <a:schemeClr val="accent1"/>
-          </a:lnRef>
-          <a:fillRef idx="3">
-            <a:schemeClr val="accent1"/>
-          </a:fillRef>
-          <a:effectRef idx="2">
-            <a:schemeClr val="accent1"/>
-          </a:effectRef>
-          <a:fontRef idx="minor">
-            <a:schemeClr val="lt1"/>
-          </a:fontRef>
-        </p:style>
-        <p:txBody>
-          <a:bodyPr rtlCol="0" anchor="ctr"/>
-          <a:lstStyle/>
-          <a:p>
-            <a:pPr algn="ctr">
-              <a:defRPr>
-                <a:latin typeface="Inter"/>
-              </a:defRPr>
-            </a:pPr>
-          </a:p>
-        </p:txBody>
-      </p:sp>
-      <p:sp>
-        <p:nvSpPr>
-          <p:cNvPr id="10" name="TextBox 9"/>
-          <p:cNvSpPr txBox="1"/>
-          <p:nvPr/>
-        </p:nvSpPr>
-        <p:spPr>
-          <a:xfrm>
-            <a:off x="804671" y="1435607"/>
-            <a:ext cx="10616184" cy="228600"/>
-          </a:xfrm>
-          <a:prstGeom prst="rect">
-            <a:avLst/>
-          </a:prstGeom>
-          <a:noFill/>
-        </p:spPr>
-        <p:txBody>
-          <a:bodyPr wrap="none" lIns="9144" rIns="9144" tIns="9144" bIns="9144" anchor="t">
-            <a:spAutoFit/>
-          </a:bodyPr>
-          <a:lstStyle/>
-          <a:p>
-            <a:pPr algn="l">
-              <a:spcAft>
-                <a:spcPts val="0"/>
-              </a:spcAft>
-              <a:defRPr sz="1000" b="1">
-                <a:solidFill>
-                  <a:srgbClr val="0D1117"/>
-                </a:solidFill>
-                <a:latin typeface="Inter"/>
-              </a:defRPr>
-            </a:pPr>
-            <a:r>
-              <a:rPr>
-                <a:latin typeface="Inter"/>
-              </a:rPr>
-              <a:t>Recommendation and action requested</a:t>
-            </a:r>
-          </a:p>
-        </p:txBody>
-      </p:sp>
-      <p:sp>
-        <p:nvSpPr>
-          <p:cNvPr id="11" name="TextBox 10"/>
-          <p:cNvSpPr txBox="1"/>
-          <p:nvPr/>
-        </p:nvSpPr>
-        <p:spPr>
-          <a:xfrm>
-            <a:off x="804671" y="1719072"/>
-            <a:ext cx="10616184" cy="300245"/>
-          </a:xfrm>
-          <a:prstGeom prst="rect">
-            <a:avLst/>
-          </a:prstGeom>
-          <a:noFill/>
-        </p:spPr>
-        <p:txBody>
-          <a:bodyPr wrap="none" lIns="9144" rIns="9144" tIns="9144" bIns="9144" anchor="t">
-            <a:spAutoFit/>
-          </a:bodyPr>
-          <a:lstStyle/>
-          <a:p>
-            <a:pPr algn="l">
-              <a:spcAft>
-                <a:spcPts val="0"/>
-              </a:spcAft>
-              <a:defRPr sz="950" b="0">
-                <a:solidFill>
-                  <a:srgbClr val="4A5563"/>
-                </a:solidFill>
-                <a:latin typeface="Inter"/>
-              </a:defRPr>
-            </a:pPr>
-            <a:r>
-              <a:rPr>
-                <a:latin typeface="Inter"/>
-              </a:rPr>
-              <a:t>We recommend a two-year $80.0M commitment program. Committee action requested: approve a $45.0M first-year ceiling and require completed diligence before each commitment [S3][S6][S7].</a:t>
-            </a:r>
-          </a:p>
-        </p:txBody>
-      </p:sp>
-      <p:sp>
-        <p:nvSpPr>
-          <p:cNvPr id="12" name="TextBox 11"/>
-          <p:cNvSpPr txBox="1"/>
-          <p:nvPr/>
-        </p:nvSpPr>
-        <p:spPr>
-          <a:xfrm>
-            <a:off x="640080" y="2220485"/>
-            <a:ext cx="10908792" cy="201168"/>
-          </a:xfrm>
-          <a:prstGeom prst="rect">
-            <a:avLst/>
-          </a:prstGeom>
-          <a:noFill/>
-        </p:spPr>
-        <p:txBody>
-          <a:bodyPr wrap="none" lIns="9144" rIns="9144" tIns="9144" bIns="9144" anchor="t">
-            <a:spAutoFit/>
-          </a:bodyPr>
-          <a:lstStyle/>
-          <a:p>
-            <a:pPr algn="l">
-              <a:spcAft>
-                <a:spcPts val="0"/>
-              </a:spcAft>
-              <a:defRPr sz="720" b="1">
-                <a:solidFill>
-                  <a:srgbClr val="4A5563"/>
-                </a:solidFill>
-                <a:latin typeface="Inter"/>
-              </a:defRPr>
-            </a:pPr>
-            <a:r>
-              <a:rPr>
-                <a:latin typeface="Inter"/>
-              </a:rPr>
-              <a:t>DECISION SUMMARY</a:t>
-            </a:r>
-          </a:p>
-        </p:txBody>
-      </p:sp>
-      <p:graphicFrame>
-        <p:nvGraphicFramePr>
-          <p:cNvPr id="13" name="Table 12"/>
-          <p:cNvGraphicFramePr>
-            <a:graphicFrameLocks noGrp="1"/>
-          </p:cNvGraphicFramePr>
-          <p:nvPr/>
-        </p:nvGraphicFramePr>
-        <p:xfrm>
-          <a:off x="640080" y="2494805"/>
-          <a:ext cx="10908792" cy="1266002"/>
-        </p:xfrm>
-        <a:graphic>
-          <a:graphicData uri="http://schemas.openxmlformats.org/drawingml/2006/table">
-            <a:tbl>
-              <a:tblPr firstRow="1" bandRow="1">
-                <a:tableStyleId>{5C22544A-7EE6-4342-B048-85BDC9FD1C3A}</a:tableStyleId>
-              </a:tblPr>
-              <a:tblGrid>
-                <a:gridCol w="2011680"/>
-                <a:gridCol w="2965704"/>
-                <a:gridCol w="2965704"/>
-                <a:gridCol w="2965704"/>
-              </a:tblGrid>
-              <a:tr h="316500">
-                <a:tc>
-                  <a:txBody>
-                    <a:bodyPr/>
-                    <a:lstStyle/>
-                    <a:p>
-                      <a:pPr>
-                        <a:defRPr sz="750" b="1">
-                          <a:solidFill>
-                            <a:srgbClr val="FFFFFF"/>
-                          </a:solidFill>
-                          <a:latin typeface="Inter"/>
-                        </a:defRPr>
-                      </a:pPr>
-                      <a:r>
-                        <a:rPr>
-                          <a:latin typeface="Inter"/>
-                        </a:rPr>
-                        <a:t>Decision element</a:t>
-                      </a:r>
-                    </a:p>
-                  </a:txBody>
-                  <a:tcPr marL="54864" marR="54864" marT="27432" marB="27432" anchor="ctr">
-                    <a:solidFill>
-                      <a:srgbClr val="0D1117"/>
-                    </a:solidFill>
-                  </a:tcPr>
-                </a:tc>
-                <a:tc>
-                  <a:txBody>
-                    <a:bodyPr/>
-                    <a:lstStyle/>
-                    <a:p>
-                      <a:pPr>
-                        <a:defRPr sz="750" b="1">
-                          <a:solidFill>
-                            <a:srgbClr val="FFFFFF"/>
-                          </a:solidFill>
-                          <a:latin typeface="Inter"/>
-                        </a:defRPr>
-                      </a:pPr>
-                      <a:r>
-                        <a:rPr>
-                          <a:latin typeface="Inter"/>
-                        </a:rPr>
-                        <a:t>Proposed action</a:t>
-                      </a:r>
-                    </a:p>
-                  </a:txBody>
-                  <a:tcPr marL="54864" marR="54864" marT="27432" marB="27432" anchor="ctr">
-                    <a:solidFill>
-                      <a:srgbClr val="0D1117"/>
-                    </a:solidFill>
-                  </a:tcPr>
-                </a:tc>
-                <a:tc>
-                  <a:txBody>
-                    <a:bodyPr/>
-                    <a:lstStyle/>
-                    <a:p>
-                      <a:pPr>
-                        <a:defRPr sz="750" b="1">
-                          <a:solidFill>
-                            <a:srgbClr val="FFFFFF"/>
-                          </a:solidFill>
-                          <a:latin typeface="Inter"/>
-                        </a:defRPr>
-                      </a:pPr>
-                      <a:r>
-                        <a:rPr>
-                          <a:latin typeface="Inter"/>
-                        </a:rPr>
-                        <a:t>Evidence</a:t>
-                      </a:r>
-                    </a:p>
-                  </a:txBody>
-                  <a:tcPr marL="54864" marR="54864" marT="27432" marB="27432" anchor="ctr">
-                    <a:solidFill>
-                      <a:srgbClr val="0D1117"/>
-                    </a:solidFill>
-                  </a:tcPr>
-                </a:tc>
-                <a:tc>
-                  <a:txBody>
-                    <a:bodyPr/>
-                    <a:lstStyle/>
-                    <a:p>
-                      <a:pPr>
-                        <a:defRPr sz="750" b="1">
-                          <a:solidFill>
-                            <a:srgbClr val="FFFFFF"/>
-                          </a:solidFill>
-                          <a:latin typeface="Inter"/>
-                        </a:defRPr>
-                      </a:pPr>
-                      <a:r>
-                        <a:rPr>
-                          <a:latin typeface="Inter"/>
-                        </a:rPr>
-                        <a:t>Status</a:t>
-                      </a:r>
-                    </a:p>
-                  </a:txBody>
-                  <a:tcPr marL="54864" marR="54864" marT="27432" marB="27432" anchor="ctr">
-                    <a:solidFill>
-                      <a:srgbClr val="0D1117"/>
-                    </a:solidFill>
-                  </a:tcPr>
-                </a:tc>
-              </a:tr>
-              <a:tr h="316500">
-                <a:tc>
-                  <a:txBody>
-                    <a:bodyPr/>
-                    <a:lstStyle/>
-                    <a:p>
-                      <a:pPr>
-                        <a:defRPr sz="800" b="1">
-                          <a:solidFill>
-                            <a:srgbClr val="0D1117"/>
-                          </a:solidFill>
-                          <a:latin typeface="Inter"/>
-                        </a:defRPr>
-                      </a:pPr>
-                      <a:r>
-                        <a:rPr>
-                          <a:latin typeface="Inter"/>
-                        </a:rPr>
-                        <a:t>Program size</a:t>
-                      </a:r>
-                    </a:p>
-                  </a:txBody>
-                  <a:tcPr marL="54864" marR="54864" marT="27432" marB="27432" anchor="ctr">
-                    <a:solidFill>
-                      <a:srgbClr val="FFFFFF"/>
-                    </a:solidFill>
-                  </a:tcPr>
-                </a:tc>
-                <a:tc>
-                  <a:txBody>
-                    <a:bodyPr/>
-                    <a:lstStyle/>
-                    <a:p>
-                      <a:pPr>
-                        <a:defRPr sz="800" b="0">
-                          <a:solidFill>
-                            <a:srgbClr val="0D1117"/>
-                          </a:solidFill>
-                          <a:latin typeface="Inter"/>
-                        </a:defRPr>
-                      </a:pPr>
-                      <a:r>
-                        <a:rPr>
-                          <a:latin typeface="Inter"/>
-                        </a:rPr>
-                        <a:t>$80.0M over two years</a:t>
-                      </a:r>
-                    </a:p>
-                  </a:txBody>
-                  <a:tcPr marL="54864" marR="54864" marT="27432" marB="27432" anchor="ctr">
-                    <a:solidFill>
-                      <a:srgbClr val="FFFFFF"/>
-                    </a:solidFill>
-                  </a:tcPr>
-                </a:tc>
-                <a:tc>
-                  <a:txBody>
-                    <a:bodyPr/>
-                    <a:lstStyle/>
-                    <a:p>
-                      <a:pPr>
-                        <a:defRPr sz="800" b="0">
-                          <a:solidFill>
-                            <a:srgbClr val="0D1117"/>
-                          </a:solidFill>
-                          <a:latin typeface="Inter"/>
-                        </a:defRPr>
-                      </a:pPr>
-                      <a:r>
-                        <a:rPr>
-                          <a:latin typeface="Inter"/>
-                        </a:rPr>
-                        <a:t>[S6]</a:t>
-                      </a:r>
-                    </a:p>
-                  </a:txBody>
-                  <a:tcPr marL="54864" marR="54864" marT="27432" marB="27432" anchor="ctr">
-                    <a:solidFill>
-                      <a:srgbClr val="FFFFFF"/>
-                    </a:solidFill>
-                  </a:tcPr>
-                </a:tc>
-                <a:tc>
-                  <a:txBody>
-                    <a:bodyPr/>
-                    <a:lstStyle/>
-                    <a:p>
-                      <a:pPr>
-                        <a:defRPr sz="800" b="1">
-                          <a:solidFill>
-                            <a:srgbClr val="F2A93B"/>
-                          </a:solidFill>
-                          <a:latin typeface="Inter"/>
-                        </a:defRPr>
-                      </a:pPr>
-                      <a:r>
-                        <a:rPr>
-                          <a:latin typeface="Inter"/>
-                        </a:rPr>
-                        <a:t>● Proposed</a:t>
-                      </a:r>
-                    </a:p>
-                  </a:txBody>
-                  <a:tcPr marL="54864" marR="54864" marT="27432" marB="27432" anchor="ctr">
-                    <a:solidFill>
-                      <a:srgbClr val="F5F7F9"/>
-                    </a:solidFill>
-                  </a:tcPr>
-                </a:tc>
-              </a:tr>
-              <a:tr h="316500">
-                <a:tc>
-                  <a:txBody>
-                    <a:bodyPr/>
-                    <a:lstStyle/>
-                    <a:p>
-                      <a:pPr>
-                        <a:defRPr sz="800" b="1">
-                          <a:solidFill>
-                            <a:srgbClr val="0D1117"/>
-                          </a:solidFill>
-                          <a:latin typeface="Inter"/>
-                        </a:defRPr>
-                      </a:pPr>
-                      <a:r>
-                        <a:rPr>
-                          <a:latin typeface="Inter"/>
-                        </a:rPr>
-                        <a:t>First-year ceiling</a:t>
-                      </a:r>
-                    </a:p>
-                  </a:txBody>
-                  <a:tcPr marL="54864" marR="54864" marT="27432" marB="27432" anchor="ctr">
-                    <a:solidFill>
-                      <a:srgbClr val="F5F7F9"/>
-                    </a:solidFill>
-                  </a:tcPr>
-                </a:tc>
-                <a:tc>
-                  <a:txBody>
-                    <a:bodyPr/>
-                    <a:lstStyle/>
-                    <a:p>
-                      <a:pPr>
-                        <a:defRPr sz="800" b="0">
-                          <a:solidFill>
-                            <a:srgbClr val="0D1117"/>
-                          </a:solidFill>
-                          <a:latin typeface="Inter"/>
-                        </a:defRPr>
-                      </a:pPr>
-                      <a:r>
-                        <a:rPr>
-                          <a:latin typeface="Inter"/>
-                        </a:rPr>
-                        <a:t>$45.0M</a:t>
-                      </a:r>
-                    </a:p>
-                  </a:txBody>
-                  <a:tcPr marL="54864" marR="54864" marT="27432" marB="27432" anchor="ctr">
-                    <a:solidFill>
-                      <a:srgbClr val="F5F7F9"/>
-                    </a:solidFill>
-                  </a:tcPr>
-                </a:tc>
-                <a:tc>
-                  <a:txBody>
-                    <a:bodyPr/>
-                    <a:lstStyle/>
-                    <a:p>
-                      <a:pPr>
-                        <a:defRPr sz="800" b="0">
-                          <a:solidFill>
-                            <a:srgbClr val="0D1117"/>
-                          </a:solidFill>
-                          <a:latin typeface="Inter"/>
-                        </a:defRPr>
-                      </a:pPr>
-                      <a:r>
-                        <a:rPr>
-                          <a:latin typeface="Inter"/>
-                        </a:rPr>
-                        <a:t>[S6]</a:t>
-                      </a:r>
-                    </a:p>
-                  </a:txBody>
-                  <a:tcPr marL="54864" marR="54864" marT="27432" marB="27432" anchor="ctr">
-                    <a:solidFill>
-                      <a:srgbClr val="F5F7F9"/>
-                    </a:solidFill>
-                  </a:tcPr>
-                </a:tc>
-                <a:tc>
-                  <a:txBody>
-                    <a:bodyPr/>
-                    <a:lstStyle/>
-                    <a:p>
-                      <a:pPr>
-                        <a:defRPr sz="800" b="1">
-                          <a:solidFill>
-                            <a:srgbClr val="F2A93B"/>
-                          </a:solidFill>
-                          <a:latin typeface="Inter"/>
-                        </a:defRPr>
-                      </a:pPr>
-                      <a:r>
-                        <a:rPr>
-                          <a:latin typeface="Inter"/>
-                        </a:rPr>
-                        <a:t>● Proposed</a:t>
-                      </a:r>
-                    </a:p>
-                  </a:txBody>
-                  <a:tcPr marL="54864" marR="54864" marT="27432" marB="27432" anchor="ctr">
-                    <a:solidFill>
-                      <a:srgbClr val="F5F7F9"/>
-                    </a:solidFill>
-                  </a:tcPr>
-                </a:tc>
-              </a:tr>
-              <a:tr h="316502">
-                <a:tc>
-                  <a:txBody>
-                    <a:bodyPr/>
-                    <a:lstStyle/>
-                    <a:p>
-                      <a:pPr>
-                        <a:defRPr sz="800" b="1">
-                          <a:solidFill>
-                            <a:srgbClr val="0D1117"/>
-                          </a:solidFill>
-                          <a:latin typeface="Inter"/>
-                        </a:defRPr>
-                      </a:pPr>
-                      <a:r>
-                        <a:rPr>
-                          <a:latin typeface="Inter"/>
-                        </a:rPr>
-                        <a:t>Policy fit</a:t>
-                      </a:r>
-                    </a:p>
-                  </a:txBody>
-                  <a:tcPr marL="54864" marR="54864" marT="27432" marB="27432" anchor="ctr">
-                    <a:solidFill>
-                      <a:srgbClr val="FFFFFF"/>
-                    </a:solidFill>
-                  </a:tcPr>
-                </a:tc>
-                <a:tc>
-                  <a:txBody>
-                    <a:bodyPr/>
-                    <a:lstStyle/>
-                    <a:p>
-                      <a:pPr>
-                        <a:defRPr sz="800" b="0">
-                          <a:solidFill>
-                            <a:srgbClr val="0D1117"/>
-                          </a:solidFill>
-                          <a:latin typeface="Inter"/>
-                        </a:defRPr>
-                      </a:pPr>
-                      <a:r>
-                        <a:rPr>
-                          <a:latin typeface="Inter"/>
-                        </a:rPr>
-                        <a:t>Remain within 15.0%–30.0%</a:t>
-                      </a:r>
-                    </a:p>
-                  </a:txBody>
-                  <a:tcPr marL="54864" marR="54864" marT="27432" marB="27432" anchor="ctr">
-                    <a:solidFill>
-                      <a:srgbClr val="FFFFFF"/>
-                    </a:solidFill>
-                  </a:tcPr>
-                </a:tc>
-                <a:tc>
-                  <a:txBody>
-                    <a:bodyPr/>
-                    <a:lstStyle/>
-                    <a:p>
-                      <a:pPr>
-                        <a:defRPr sz="800" b="0">
-                          <a:solidFill>
-                            <a:srgbClr val="0D1117"/>
-                          </a:solidFill>
-                          <a:latin typeface="Inter"/>
-                        </a:defRPr>
-                      </a:pPr>
-                      <a:r>
-                        <a:rPr>
-                          <a:latin typeface="Inter"/>
-                        </a:rPr>
-                        <a:t>[S3]</a:t>
-                      </a:r>
-                    </a:p>
-                  </a:txBody>
-                  <a:tcPr marL="54864" marR="54864" marT="27432" marB="27432" anchor="ctr">
-                    <a:solidFill>
-                      <a:srgbClr val="FFFFFF"/>
-                    </a:solidFill>
-                  </a:tcPr>
-                </a:tc>
-                <a:tc>
-                  <a:txBody>
-                    <a:bodyPr/>
-                    <a:lstStyle/>
-                    <a:p>
-                      <a:pPr>
-                        <a:defRPr sz="800" b="1">
-                          <a:solidFill>
-                            <a:srgbClr val="C6F432"/>
-                          </a:solidFill>
-                          <a:latin typeface="Inter"/>
-                        </a:defRPr>
-                      </a:pPr>
-                      <a:r>
-                        <a:rPr>
-                          <a:latin typeface="Inter"/>
-                        </a:rPr>
-                        <a:t>● Compliant</a:t>
-                      </a:r>
-                    </a:p>
-                  </a:txBody>
-                  <a:tcPr marL="54864" marR="54864" marT="27432" marB="27432" anchor="ctr">
-                    <a:solidFill>
-                      <a:srgbClr val="F5F7F9"/>
-                    </a:solidFill>
-                  </a:tcPr>
-                </a:tc>
-              </a:tr>
-            </a:tbl>
-          </a:graphicData>
-        </a:graphic>
-      </p:graphicFrame>
-      <p:sp>
-        <p:nvSpPr>
-          <p:cNvPr id="14" name="Rectangle 13"/>
-          <p:cNvSpPr/>
-          <p:nvPr/>
-        </p:nvSpPr>
-        <p:spPr>
-          <a:xfrm>
-            <a:off x="640080" y="3870536"/>
-            <a:ext cx="10908792" cy="784877"/>
-          </a:xfrm>
-          <a:prstGeom prst="rect">
-            <a:avLst/>
-          </a:prstGeom>
-          <a:solidFill>
-            <a:srgbClr val="F5F7F9"/>
-          </a:solidFill>
-          <a:ln>
-            <a:solidFill>
-              <a:srgbClr val="E3E7EC"/>
-            </a:solidFill>
-          </a:ln>
-        </p:spPr>
-        <p:style>
-          <a:lnRef idx="1">
-            <a:schemeClr val="accent1"/>
-          </a:lnRef>
-          <a:fillRef idx="3">
-            <a:schemeClr val="accent1"/>
-          </a:fillRef>
-          <a:effectRef idx="2">
-            <a:schemeClr val="accent1"/>
-          </a:effectRef>
-          <a:fontRef idx="minor">
-            <a:schemeClr val="lt1"/>
-          </a:fontRef>
-        </p:style>
-        <p:txBody>
-          <a:bodyPr rtlCol="0" anchor="ctr"/>
-          <a:lstStyle/>
-          <a:p>
-            <a:pPr algn="ctr">
-              <a:defRPr>
-                <a:latin typeface="Inter"/>
-              </a:defRPr>
-            </a:pPr>
-          </a:p>
-        </p:txBody>
-      </p:sp>
-      <p:sp>
-        <p:nvSpPr>
-          <p:cNvPr id="15" name="Rectangle 14"/>
-          <p:cNvSpPr/>
-          <p:nvPr/>
-        </p:nvSpPr>
-        <p:spPr>
-          <a:xfrm>
-            <a:off x="640080" y="3870536"/>
-            <a:ext cx="54864" cy="784877"/>
-          </a:xfrm>
-          <a:prstGeom prst="rect">
-            <a:avLst/>
-          </a:prstGeom>
-          <a:solidFill>
-            <a:srgbClr val="F2A93B"/>
-          </a:solidFill>
-          <a:ln>
-            <a:solidFill>
-              <a:srgbClr val="F2A93B"/>
-            </a:solidFill>
-          </a:ln>
-        </p:spPr>
-        <p:style>
-          <a:lnRef idx="1">
-            <a:schemeClr val="accent1"/>
-          </a:lnRef>
-          <a:fillRef idx="3">
-            <a:schemeClr val="accent1"/>
-          </a:fillRef>
-          <a:effectRef idx="2">
-            <a:schemeClr val="accent1"/>
-          </a:effectRef>
-          <a:fontRef idx="minor">
-            <a:schemeClr val="lt1"/>
-          </a:fontRef>
-        </p:style>
-        <p:txBody>
-          <a:bodyPr rtlCol="0" anchor="ctr"/>
-          <a:lstStyle/>
-          <a:p>
-            <a:pPr algn="ctr">
-              <a:defRPr>
-                <a:latin typeface="Inter"/>
-              </a:defRPr>
-            </a:pPr>
-          </a:p>
-        </p:txBody>
-      </p:sp>
-      <p:sp>
-        <p:nvSpPr>
-          <p:cNvPr id="16" name="TextBox 15"/>
-          <p:cNvSpPr txBox="1"/>
-          <p:nvPr/>
-        </p:nvSpPr>
-        <p:spPr>
-          <a:xfrm>
-            <a:off x="804671" y="3980264"/>
-            <a:ext cx="10616184" cy="228600"/>
-          </a:xfrm>
-          <a:prstGeom prst="rect">
-            <a:avLst/>
-          </a:prstGeom>
-          <a:noFill/>
-        </p:spPr>
-        <p:txBody>
-          <a:bodyPr wrap="none" lIns="9144" rIns="9144" tIns="9144" bIns="9144" anchor="t">
-            <a:spAutoFit/>
-          </a:bodyPr>
-          <a:lstStyle/>
-          <a:p>
-            <a:pPr algn="l">
-              <a:spcAft>
-                <a:spcPts val="0"/>
-              </a:spcAft>
-              <a:defRPr sz="1000" b="1">
-                <a:solidFill>
-                  <a:srgbClr val="0D1117"/>
-                </a:solidFill>
-                <a:latin typeface="Inter"/>
-              </a:defRPr>
-            </a:pPr>
-            <a:r>
-              <a:rPr>
-                <a:latin typeface="Inter"/>
-              </a:rPr>
-              <a:t>Conditions and limits</a:t>
-            </a:r>
-          </a:p>
-        </p:txBody>
-      </p:sp>
-      <p:sp>
-        <p:nvSpPr>
-          <p:cNvPr id="17" name="TextBox 16"/>
-          <p:cNvSpPr txBox="1"/>
-          <p:nvPr/>
-        </p:nvSpPr>
-        <p:spPr>
-          <a:xfrm>
-            <a:off x="804671" y="4263728"/>
-            <a:ext cx="10616184" cy="300245"/>
-          </a:xfrm>
-          <a:prstGeom prst="rect">
-            <a:avLst/>
-          </a:prstGeom>
-          <a:noFill/>
-        </p:spPr>
-        <p:txBody>
-          <a:bodyPr wrap="none" lIns="9144" rIns="9144" tIns="9144" bIns="9144" anchor="t">
-            <a:spAutoFit/>
-          </a:bodyPr>
-          <a:lstStyle/>
-          <a:p>
-            <a:pPr algn="l">
-              <a:spcAft>
-                <a:spcPts val="0"/>
-              </a:spcAft>
-              <a:defRPr sz="950" b="0">
-                <a:solidFill>
-                  <a:srgbClr val="4A5563"/>
-                </a:solidFill>
-                <a:latin typeface="Inter"/>
-              </a:defRPr>
-            </a:pPr>
-            <a:r>
-              <a:rPr>
-                <a:latin typeface="Inter"/>
-              </a:rPr>
-              <a:t>Each manager requires completed operational and GIPS diligence; quarterly pacing proceeds only while governed liquidity coverage remains at or above the returned policy threshold [S3][S7].</a:t>
-            </a:r>
-          </a:p>
-        </p:txBody>
-      </p:sp>
-      <p:sp>
-        <p:nvSpPr>
-          <p:cNvPr id="18" name="Rectangle 17"/>
-          <p:cNvSpPr/>
-          <p:nvPr/>
-        </p:nvSpPr>
-        <p:spPr>
-          <a:xfrm>
-            <a:off x="640080" y="4765141"/>
-            <a:ext cx="10908792" cy="1452778"/>
-          </a:xfrm>
-          <a:prstGeom prst="rect">
-            <a:avLst/>
-          </a:prstGeom>
-          <a:solidFill>
-            <a:srgbClr val="F5F7F9"/>
-          </a:solidFill>
-          <a:ln>
-            <a:solidFill>
-              <a:srgbClr val="E3E7EC"/>
-            </a:solidFill>
-          </a:ln>
-        </p:spPr>
-        <p:style>
-          <a:lnRef idx="1">
-            <a:schemeClr val="accent1"/>
-          </a:lnRef>
-          <a:fillRef idx="3">
-            <a:schemeClr val="accent1"/>
-          </a:fillRef>
-          <a:effectRef idx="2">
-            <a:schemeClr val="accent1"/>
-          </a:effectRef>
-          <a:fontRef idx="minor">
-            <a:schemeClr val="lt1"/>
-          </a:fontRef>
-        </p:style>
-        <p:txBody>
-          <a:bodyPr rtlCol="0" anchor="ctr"/>
-          <a:lstStyle/>
-          <a:p>
-            <a:pPr algn="ctr">
-              <a:defRPr>
-                <a:latin typeface="Inter"/>
-              </a:defRPr>
-            </a:pPr>
-          </a:p>
-        </p:txBody>
-      </p:sp>
-      <p:sp>
-        <p:nvSpPr>
-          <p:cNvPr id="19" name="Rectangle 18"/>
-          <p:cNvSpPr/>
-          <p:nvPr/>
-        </p:nvSpPr>
-        <p:spPr>
-          <a:xfrm>
-            <a:off x="640080" y="4765141"/>
-            <a:ext cx="54864" cy="1452778"/>
-          </a:xfrm>
-          <a:prstGeom prst="rect">
-            <a:avLst/>
-          </a:prstGeom>
-          <a:solidFill>
-            <a:srgbClr val="F2A93B"/>
-          </a:solidFill>
-          <a:ln>
-            <a:solidFill>
-              <a:srgbClr val="F2A93B"/>
-            </a:solidFill>
-          </a:ln>
-        </p:spPr>
-        <p:style>
-          <a:lnRef idx="1">
-            <a:schemeClr val="accent1"/>
-          </a:lnRef>
-          <a:fillRef idx="3">
-            <a:schemeClr val="accent1"/>
-          </a:fillRef>
-          <a:effectRef idx="2">
-            <a:schemeClr val="accent1"/>
-          </a:effectRef>
-          <a:fontRef idx="minor">
-            <a:schemeClr val="lt1"/>
-          </a:fontRef>
-        </p:style>
-        <p:txBody>
-          <a:bodyPr rtlCol="0" anchor="ctr"/>
-          <a:lstStyle/>
-          <a:p>
-            <a:pPr algn="ctr">
-              <a:defRPr>
-                <a:latin typeface="Inter"/>
-              </a:defRPr>
-            </a:pPr>
-          </a:p>
-        </p:txBody>
-      </p:sp>
-      <p:sp>
-        <p:nvSpPr>
-          <p:cNvPr id="20" name="TextBox 19"/>
-          <p:cNvSpPr txBox="1"/>
-          <p:nvPr/>
-        </p:nvSpPr>
-        <p:spPr>
-          <a:xfrm>
-            <a:off x="804671" y="4874869"/>
-            <a:ext cx="10616184" cy="228600"/>
-          </a:xfrm>
-          <a:prstGeom prst="rect">
-            <a:avLst/>
-          </a:prstGeom>
-          <a:noFill/>
-        </p:spPr>
-        <p:txBody>
-          <a:bodyPr wrap="none" lIns="9144" rIns="9144" tIns="9144" bIns="9144" anchor="t">
-            <a:spAutoFit/>
-          </a:bodyPr>
-          <a:lstStyle/>
-          <a:p>
-            <a:pPr algn="l">
-              <a:spcAft>
-                <a:spcPts val="0"/>
-              </a:spcAft>
-              <a:defRPr sz="1000" b="1">
-                <a:solidFill>
-                  <a:srgbClr val="0D1117"/>
-                </a:solidFill>
-                <a:latin typeface="Inter"/>
-              </a:defRPr>
-            </a:pPr>
-            <a:r>
-              <a:rPr>
-                <a:latin typeface="Inter"/>
-              </a:rPr>
-              <a:t>Key judgment — headline signal</a:t>
-            </a:r>
-          </a:p>
-        </p:txBody>
-      </p:sp>
-      <p:sp>
-        <p:nvSpPr>
-          <p:cNvPr id="21" name="TextBox 20"/>
-          <p:cNvSpPr txBox="1"/>
-          <p:nvPr/>
-        </p:nvSpPr>
-        <p:spPr>
-          <a:xfrm>
-            <a:off x="804671" y="5158333"/>
-            <a:ext cx="10616184" cy="968146"/>
-          </a:xfrm>
-          <a:prstGeom prst="rect">
-            <a:avLst/>
-          </a:prstGeom>
-          <a:noFill/>
-        </p:spPr>
-        <p:txBody>
-          <a:bodyPr wrap="none" lIns="9144" rIns="9144" tIns="9144" bIns="9144" anchor="t">
-            <a:spAutoFit/>
-          </a:bodyPr>
-          <a:lstStyle/>
-          <a:p>
-            <a:pPr algn="l">
-              <a:spcAft>
-                <a:spcPts val="0"/>
-              </a:spcAft>
-              <a:defRPr sz="950" b="0">
-                <a:solidFill>
-                  <a:srgbClr val="4A5563"/>
-                </a:solidFill>
-                <a:latin typeface="Inter"/>
-              </a:defRPr>
-            </a:pPr>
-            <a:r>
-              <a:rPr>
-                <a:latin typeface="Inter"/>
-              </a:rPr>
-              <a:t>Observation: The fictional TEST report carries a pacing-and-concentration signal above the clear threshold [S1]. Why it matters: This signal focuses oversight on the report's most decision-relevant condition. Uncertainty: Evidence coverage may exclude newer or more detailed observations. What would change the view: A governed refresh showing a different signal or breached threshold.</a:t>
-            </a:r>
-          </a:p>
-        </p:txBody>
-      </p:sp>
-      <p:sp>
-        <p:nvSpPr>
-          <p:cNvPr id="22" name="Rectangle 21"/>
-          <p:cNvSpPr/>
-          <p:nvPr/>
-        </p:nvSpPr>
-        <p:spPr>
-          <a:xfrm>
-            <a:off x="640080" y="6446520"/>
-            <a:ext cx="10908792" cy="9144"/>
-          </a:xfrm>
-          <a:prstGeom prst="rect">
-            <a:avLst/>
-          </a:prstGeom>
-          <a:solidFill>
-            <a:srgbClr val="E3E7EC"/>
-          </a:solidFill>
-          <a:ln>
-            <a:solidFill>
-              <a:srgbClr val="E3E7EC"/>
-            </a:solidFill>
-          </a:ln>
-        </p:spPr>
-        <p:style>
-          <a:lnRef idx="1">
-            <a:schemeClr val="accent1"/>
-          </a:lnRef>
-          <a:fillRef idx="3">
-            <a:schemeClr val="accent1"/>
-          </a:fillRef>
-          <a:effectRef idx="2">
-            <a:schemeClr val="accent1"/>
-          </a:effectRef>
-          <a:fontRef idx="minor">
-            <a:schemeClr val="lt1"/>
-          </a:fontRef>
-        </p:style>
-        <p:txBody>
-          <a:bodyPr rtlCol="0" anchor="ctr"/>
-          <a:lstStyle/>
-          <a:p>
-            <a:pPr algn="ctr">
-              <a:defRPr>
-                <a:latin typeface="Inter"/>
-              </a:defRPr>
-            </a:pPr>
-          </a:p>
-        </p:txBody>
-      </p:sp>
-      <p:sp>
-        <p:nvSpPr>
-          <p:cNvPr id="23" name="TextBox 22"/>
-          <p:cNvSpPr txBox="1"/>
-          <p:nvPr/>
-        </p:nvSpPr>
-        <p:spPr>
-          <a:xfrm>
-            <a:off x="640080" y="6501384"/>
-            <a:ext cx="4297680" cy="146304"/>
-          </a:xfrm>
-          <a:prstGeom prst="rect">
-            <a:avLst/>
-          </a:prstGeom>
-          <a:noFill/>
-        </p:spPr>
-        <p:txBody>
-          <a:bodyPr wrap="none" lIns="9144" rIns="9144" tIns="9144" bIns="9144" anchor="t">
-            <a:spAutoFit/>
-          </a:bodyPr>
-          <a:lstStyle/>
-          <a:p>
-            <a:pPr algn="l">
-              <a:spcAft>
-                <a:spcPts val="0"/>
-              </a:spcAft>
-              <a:defRPr sz="650" b="0">
-                <a:solidFill>
-                  <a:srgbClr val="8A94A1"/>
-                </a:solidFill>
-                <a:latin typeface="Inter"/>
-              </a:defRPr>
-            </a:pPr>
-            <a:r>
-              <a:rPr>
-                <a:latin typeface="Inter"/>
-              </a:rPr>
-              <a:t>Sources: S1 · S3 · S6 · S7</a:t>
-            </a:r>
-          </a:p>
-        </p:txBody>
-      </p:sp>
-      <p:sp>
-        <p:nvSpPr>
-          <p:cNvPr id="24" name="TextBox 23"/>
-          <p:cNvSpPr txBox="1"/>
-          <p:nvPr/>
-        </p:nvSpPr>
-        <p:spPr>
-          <a:xfrm>
-            <a:off x="4480560" y="6501384"/>
-            <a:ext cx="5303520" cy="146304"/>
-          </a:xfrm>
-          <a:prstGeom prst="rect">
-            <a:avLst/>
-          </a:prstGeom>
-          <a:noFill/>
-        </p:spPr>
-        <p:txBody>
-          <a:bodyPr wrap="none" lIns="9144" rIns="9144" tIns="9144" bIns="9144" anchor="t">
-            <a:spAutoFit/>
-          </a:bodyPr>
-          <a:lstStyle/>
-          <a:p>
-            <a:pPr algn="ctr">
-              <a:spcAft>
-                <a:spcPts val="0"/>
-              </a:spcAft>
-              <a:defRPr sz="650" b="0">
-                <a:solidFill>
-                  <a:srgbClr val="8A94A1"/>
-                </a:solidFill>
-                <a:latin typeface="Inter"/>
-              </a:defRPr>
-            </a:pPr>
-            <a:r>
-              <a:rPr>
-                <a:latin typeface="Inter"/>
-              </a:rPr>
-              <a:t>TEST DATA — fictional portfolio for rendering tests only · Data as of 2026-06-30</a:t>
-            </a:r>
-          </a:p>
-        </p:txBody>
-      </p:sp>
-      <p:sp>
-        <p:nvSpPr>
-          <p:cNvPr id="25" name="TextBox 24"/>
-          <p:cNvSpPr txBox="1"/>
-          <p:nvPr/>
-        </p:nvSpPr>
-        <p:spPr>
-          <a:xfrm>
-            <a:off x="10287000" y="6501384"/>
-            <a:ext cx="1261872" cy="146304"/>
-          </a:xfrm>
-          <a:prstGeom prst="rect">
-            <a:avLst/>
-          </a:prstGeom>
-          <a:noFill/>
-        </p:spPr>
-        <p:txBody>
-          <a:bodyPr wrap="none" lIns="9144" rIns="9144" tIns="9144" bIns="9144" anchor="t">
-            <a:spAutoFit/>
-          </a:bodyPr>
-          <a:lstStyle/>
-          <a:p>
-            <a:pPr algn="r">
-              <a:spcAft>
-                <a:spcPts val="0"/>
-              </a:spcAft>
-              <a:defRPr sz="650" b="0">
-                <a:solidFill>
-                  <a:srgbClr val="8A94A1"/>
-                </a:solidFill>
-                <a:latin typeface="Inter"/>
-              </a:defRPr>
-            </a:pPr>
-            <a:r>
-              <a:rPr>
-                <a:latin typeface="Inter"/>
-              </a:rPr>
-              <a:t>3</a:t>
-            </a:r>
-          </a:p>
-        </p:txBody>
-      </p:sp>
-    </p:spTree>
-  </p:cSld>
-  <p:clrMapOvr>
-    <a:masterClrMapping/>
-  </p:clrMapOvr>
-</p:sld>
-</file>
-
-<file path=ppt/slides/slide30.xml><?xml version="1.0" encoding="utf-8"?>
+<file path=ppt/slides/slide31.xml><?xml version="1.0" encoding="utf-8"?>
 <p:sld xmlns:a="http://schemas.openxmlformats.org/drawingml/2006/main" xmlns:p="http://schemas.openxmlformats.org/presentationml/2006/main" xmlns:r="http://schemas.openxmlformats.org/officeDocument/2006/relationships">
   <p:cSld>
     <p:spTree>
@@ -28402,7 +30213,7 @@
                 <a:gridCol w="4448556"/>
                 <a:gridCol w="4448556"/>
               </a:tblGrid>
-              <a:tr h="376310">
+              <a:tr h="349431">
                 <a:tc>
                   <a:txBody>
                     <a:bodyPr/>
@@ -28485,7 +30296,7 @@
                   </a:tcPr>
                 </a:tc>
               </a:tr>
-              <a:tr h="376310">
+              <a:tr h="349431">
                 <a:tc>
                   <a:txBody>
                     <a:bodyPr/>
@@ -28568,7 +30379,7 @@
                   </a:tcPr>
                 </a:tc>
               </a:tr>
-              <a:tr h="376310">
+              <a:tr h="349431">
                 <a:tc>
                   <a:txBody>
                     <a:bodyPr/>
@@ -28651,7 +30462,7 @@
                   </a:tcPr>
                 </a:tc>
               </a:tr>
-              <a:tr h="376310">
+              <a:tr h="349431">
                 <a:tc>
                   <a:txBody>
                     <a:bodyPr/>
@@ -28734,7 +30545,7 @@
                   </a:tcPr>
                 </a:tc>
               </a:tr>
-              <a:tr h="376310">
+              <a:tr h="349431">
                 <a:tc>
                   <a:txBody>
                     <a:bodyPr/>
@@ -28752,12 +30563,122 @@
                         <a:rPr>
                           <a:latin typeface="Inter"/>
                         </a:rPr>
+                        <a:t>ILPA portfolio-company look-through</a:t>
+                      </a:r>
+                    </a:p>
+                  </a:txBody>
+                  <a:tcPr marL="54864" marR="54864" marT="27432" marB="27432" anchor="ctr">
+                    <a:solidFill>
+                      <a:srgbClr val="F5F7F9"/>
+                    </a:solidFill>
+                  </a:tcPr>
+                </a:tc>
+                <a:tc>
+                  <a:txBody>
+                    <a:bodyPr/>
+                    <a:lstStyle/>
+                    <a:p>
+                      <a:pPr>
+                        <a:defRPr sz="800" b="1">
+                          <a:solidFill>
+                            <a:srgbClr val="F2A93B"/>
+                          </a:solidFill>
+                          <a:latin typeface="Inter"/>
+                        </a:defRPr>
+                      </a:pPr>
+                      <a:r>
+                        <a:rPr>
+                          <a:latin typeface="Inter"/>
+                        </a:rPr>
+                        <a:t>● degraded</a:t>
+                      </a:r>
+                    </a:p>
+                  </a:txBody>
+                  <a:tcPr marL="54864" marR="54864" marT="27432" marB="27432" anchor="ctr">
+                    <a:solidFill>
+                      <a:srgbClr val="F5F7F9"/>
+                    </a:solidFill>
+                  </a:tcPr>
+                </a:tc>
+                <a:tc>
+                  <a:txBody>
+                    <a:bodyPr/>
+                    <a:lstStyle/>
+                    <a:p>
+                      <a:pPr>
+                        <a:defRPr sz="800" b="0">
+                          <a:solidFill>
+                            <a:srgbClr val="0D1117"/>
+                          </a:solidFill>
+                          <a:latin typeface="Inter"/>
+                        </a:defRPr>
+                      </a:pPr>
+                      <a:r>
+                        <a:rPr>
+                          <a:latin typeface="Inter"/>
+                        </a:rPr>
+                        <a:t>Partial — 2 of 3 holdings assessed; one unknown grain; Draft — July 22, 2026 [S9]</a:t>
+                      </a:r>
+                    </a:p>
+                  </a:txBody>
+                  <a:tcPr marL="54864" marR="54864" marT="27432" marB="27432" anchor="ctr">
+                    <a:solidFill>
+                      <a:srgbClr val="F5F7F9"/>
+                    </a:solidFill>
+                  </a:tcPr>
+                </a:tc>
+              </a:tr>
+              <a:tr h="349431">
+                <a:tc>
+                  <a:txBody>
+                    <a:bodyPr/>
+                    <a:lstStyle/>
+                    <a:p>
+                      <a:pPr>
+                        <a:defRPr sz="800" b="1">
+                          <a:solidFill>
+                            <a:srgbClr val="0D1117"/>
+                          </a:solidFill>
+                          <a:latin typeface="Inter"/>
+                        </a:defRPr>
+                      </a:pPr>
+                      <a:r>
+                        <a:rPr>
+                          <a:latin typeface="Inter"/>
+                        </a:rPr>
                         <a:t>Forward assumptions</a:t>
                       </a:r>
                     </a:p>
                   </a:txBody>
                   <a:tcPr marL="54864" marR="54864" marT="27432" marB="27432" anchor="ctr">
                     <a:solidFill>
+                      <a:srgbClr val="FFFFFF"/>
+                    </a:solidFill>
+                  </a:tcPr>
+                </a:tc>
+                <a:tc>
+                  <a:txBody>
+                    <a:bodyPr/>
+                    <a:lstStyle/>
+                    <a:p>
+                      <a:pPr>
+                        <a:defRPr sz="800" b="1">
+                          <a:solidFill>
+                            <a:srgbClr val="C6F432"/>
+                          </a:solidFill>
+                          <a:latin typeface="Inter"/>
+                        </a:defRPr>
+                      </a:pPr>
+                      <a:r>
+                        <a:rPr>
+                          <a:latin typeface="Inter"/>
+                        </a:rPr>
+                        <a:t>● available</a:t>
+                      </a:r>
+                    </a:p>
+                  </a:txBody>
+                  <a:tcPr marL="54864" marR="54864" marT="27432" marB="27432" anchor="ctr">
+                    <a:solidFill>
                       <a:srgbClr val="F5F7F9"/>
                     </a:solidFill>
                   </a:tcPr>
@@ -28768,8 +30689,64 @@
                     <a:lstStyle/>
                     <a:p>
                       <a:pPr>
+                        <a:defRPr sz="800" b="0">
+                          <a:solidFill>
+                            <a:srgbClr val="0D1117"/>
+                          </a:solidFill>
+                          <a:latin typeface="Inter"/>
+                        </a:defRPr>
+                      </a:pPr>
+                      <a:r>
+                        <a:rPr>
+                          <a:latin typeface="Inter"/>
+                        </a:rPr>
+                        <a:t>2026 Strategic CMA (TEST) [S5]</a:t>
+                      </a:r>
+                    </a:p>
+                  </a:txBody>
+                  <a:tcPr marL="54864" marR="54864" marT="27432" marB="27432" anchor="ctr">
+                    <a:solidFill>
+                      <a:srgbClr val="FFFFFF"/>
+                    </a:solidFill>
+                  </a:tcPr>
+                </a:tc>
+              </a:tr>
+              <a:tr h="349431">
+                <a:tc>
+                  <a:txBody>
+                    <a:bodyPr/>
+                    <a:lstStyle/>
+                    <a:p>
+                      <a:pPr>
                         <a:defRPr sz="800" b="1">
                           <a:solidFill>
+                            <a:srgbClr val="0D1117"/>
+                          </a:solidFill>
+                          <a:latin typeface="Inter"/>
+                        </a:defRPr>
+                      </a:pPr>
+                      <a:r>
+                        <a:rPr>
+                          <a:latin typeface="Inter"/>
+                        </a:rPr>
+                        <a:t>Commitments charts</a:t>
+                      </a:r>
+                    </a:p>
+                  </a:txBody>
+                  <a:tcPr marL="54864" marR="54864" marT="27432" marB="27432" anchor="ctr">
+                    <a:solidFill>
+                      <a:srgbClr val="F5F7F9"/>
+                    </a:solidFill>
+                  </a:tcPr>
+                </a:tc>
+                <a:tc>
+                  <a:txBody>
+                    <a:bodyPr/>
+                    <a:lstStyle/>
+                    <a:p>
+                      <a:pPr>
+                        <a:defRPr sz="800" b="1">
+                          <a:solidFill>
                             <a:srgbClr val="C6F432"/>
                           </a:solidFill>
                           <a:latin typeface="Inter"/>
@@ -28806,7 +30783,7 @@
                         <a:rPr>
                           <a:latin typeface="Inter"/>
                         </a:rPr>
-                        <a:t>2026 Strategic CMA (TEST) [S5]</a:t>
+                        <a:t>Returned pacing projection [S6]</a:t>
                       </a:r>
                     </a:p>
                   </a:txBody>
@@ -28817,7 +30794,7 @@
                   </a:tcPr>
                 </a:tc>
               </a:tr>
-              <a:tr h="376310">
+              <a:tr h="349431">
                 <a:tc>
                   <a:txBody>
                     <a:bodyPr/>
@@ -28835,7 +30812,7 @@
                         <a:rPr>
                           <a:latin typeface="Inter"/>
                         </a:rPr>
-                        <a:t>Commitments charts</a:t>
+                        <a:t>Manager diligence</a:t>
                       </a:r>
                     </a:p>
                   </a:txBody>
@@ -28853,16 +30830,16 @@
                       <a:pPr>
                         <a:defRPr sz="800" b="1">
                           <a:solidFill>
-                            <a:srgbClr val="C6F432"/>
-                          </a:solidFill>
-                          <a:latin typeface="Inter"/>
-                        </a:defRPr>
-                      </a:pPr>
-                      <a:r>
-                        <a:rPr>
-                          <a:latin typeface="Inter"/>
-                        </a:rPr>
-                        <a:t>● available</a:t>
+                            <a:srgbClr val="F2A93B"/>
+                          </a:solidFill>
+                          <a:latin typeface="Inter"/>
+                        </a:defRPr>
+                      </a:pPr>
+                      <a:r>
+                        <a:rPr>
+                          <a:latin typeface="Inter"/>
+                        </a:rPr>
+                        <a:t>● degraded</a:t>
                       </a:r>
                     </a:p>
                   </a:txBody>
@@ -28889,7 +30866,7 @@
                         <a:rPr>
                           <a:latin typeface="Inter"/>
                         </a:rPr>
-                        <a:t>Returned pacing projection [S6]</a:t>
+                        <a:t>Proposed manager not assessed [S7]</a:t>
                       </a:r>
                     </a:p>
                   </a:txBody>
@@ -28900,7 +30877,7 @@
                   </a:tcPr>
                 </a:tc>
               </a:tr>
-              <a:tr h="376310">
+              <a:tr h="349431">
                 <a:tc>
                   <a:txBody>
                     <a:bodyPr/>
@@ -28918,7 +30895,7 @@
                         <a:rPr>
                           <a:latin typeface="Inter"/>
                         </a:rPr>
-                        <a:t>Manager diligence</a:t>
+                        <a:t>Returns and attribution</a:t>
                       </a:r>
                     </a:p>
                   </a:txBody>
@@ -28972,7 +30949,7 @@
                         <a:rPr>
                           <a:latin typeface="Inter"/>
                         </a:rPr>
-                        <a:t>Proposed manager not assessed [S7]</a:t>
+                        <a:t>No sleeve-specific return [S8]</a:t>
                       </a:r>
                     </a:p>
                   </a:txBody>
@@ -28983,7 +30960,7 @@
                   </a:tcPr>
                 </a:tc>
               </a:tr>
-              <a:tr h="376310">
+              <a:tr h="349431">
                 <a:tc>
                   <a:txBody>
                     <a:bodyPr/>
@@ -29001,7 +30978,7 @@
                         <a:rPr>
                           <a:latin typeface="Inter"/>
                         </a:rPr>
-                        <a:t>Returns and attribution</a:t>
+                        <a:t>CMA consensus</a:t>
                       </a:r>
                     </a:p>
                   </a:txBody>
@@ -29019,16 +30996,16 @@
                       <a:pPr>
                         <a:defRPr sz="800" b="1">
                           <a:solidFill>
-                            <a:srgbClr val="F2A93B"/>
-                          </a:solidFill>
-                          <a:latin typeface="Inter"/>
-                        </a:defRPr>
-                      </a:pPr>
-                      <a:r>
-                        <a:rPr>
-                          <a:latin typeface="Inter"/>
-                        </a:rPr>
-                        <a:t>● degraded</a:t>
+                            <a:srgbClr val="FF6B5E"/>
+                          </a:solidFill>
+                          <a:latin typeface="Inter"/>
+                        </a:defRPr>
+                      </a:pPr>
+                      <a:r>
+                        <a:rPr>
+                          <a:latin typeface="Inter"/>
+                        </a:rPr>
+                        <a:t>● unavailable</a:t>
                       </a:r>
                     </a:p>
                   </a:txBody>
@@ -29055,7 +31032,7 @@
                         <a:rPr>
                           <a:latin typeface="Inter"/>
                         </a:rPr>
-                        <a:t>No sleeve-specific return [S8]</a:t>
+                        <a:t>Optional context not returned [S5]</a:t>
                       </a:r>
                     </a:p>
                   </a:txBody>
@@ -29066,7 +31043,7 @@
                   </a:tcPr>
                 </a:tc>
               </a:tr>
-              <a:tr h="376310">
+              <a:tr h="349431">
                 <a:tc>
                   <a:txBody>
                     <a:bodyPr/>
@@ -29084,7 +31061,7 @@
                         <a:rPr>
                           <a:latin typeface="Inter"/>
                         </a:rPr>
-                        <a:t>CMA consensus</a:t>
+                        <a:t>Macro regime</a:t>
                       </a:r>
                     </a:p>
                   </a:txBody>
@@ -29149,7 +31126,7 @@
                   </a:tcPr>
                 </a:tc>
               </a:tr>
-              <a:tr h="376310">
+              <a:tr h="349431">
                 <a:tc>
                   <a:txBody>
                     <a:bodyPr/>
@@ -29167,7 +31144,7 @@
                         <a:rPr>
                           <a:latin typeface="Inter"/>
                         </a:rPr>
-                        <a:t>Macro regime</a:t>
+                        <a:t>Strategy Lab</a:t>
                       </a:r>
                     </a:p>
                   </a:txBody>
@@ -29221,7 +31198,7 @@
                         <a:rPr>
                           <a:latin typeface="Inter"/>
                         </a:rPr>
-                        <a:t>Optional context not returned [S5]</a:t>
+                        <a:t>No selected series [S8]</a:t>
                       </a:r>
                     </a:p>
                   </a:txBody>
@@ -29232,7 +31209,7 @@
                   </a:tcPr>
                 </a:tc>
               </a:tr>
-              <a:tr h="376310">
+              <a:tr h="349431">
                 <a:tc>
                   <a:txBody>
                     <a:bodyPr/>
@@ -29250,7 +31227,7 @@
                         <a:rPr>
                           <a:latin typeface="Inter"/>
                         </a:rPr>
-                        <a:t>Strategy Lab</a:t>
+                        <a:t>Peer allocation context</a:t>
                       </a:r>
                     </a:p>
                   </a:txBody>
@@ -29304,7 +31281,7 @@
                         <a:rPr>
                           <a:latin typeface="Inter"/>
                         </a:rPr>
-                        <a:t>No selected series [S8]</a:t>
+                        <a:t>Optional context not returned [S7]</a:t>
                       </a:r>
                     </a:p>
                   </a:txBody>
@@ -29315,7 +31292,7 @@
                   </a:tcPr>
                 </a:tc>
               </a:tr>
-              <a:tr h="376310">
+              <a:tr h="349437">
                 <a:tc>
                   <a:txBody>
                     <a:bodyPr/>
@@ -29333,7 +31310,7 @@
                         <a:rPr>
                           <a:latin typeface="Inter"/>
                         </a:rPr>
-                        <a:t>Peer allocation context</a:t>
+                        <a:t>Transaction costs</a:t>
                       </a:r>
                     </a:p>
                   </a:txBody>
@@ -29387,96 +31364,13 @@
                         <a:rPr>
                           <a:latin typeface="Inter"/>
                         </a:rPr>
-                        <a:t>Optional context not returned [S7]</a:t>
+                        <a:t>Not returned [S8]</a:t>
                       </a:r>
                     </a:p>
                   </a:txBody>
                   <a:tcPr marL="54864" marR="54864" marT="27432" marB="27432" anchor="ctr">
                     <a:solidFill>
                       <a:srgbClr val="FFFFFF"/>
-                    </a:solidFill>
-                  </a:tcPr>
-                </a:tc>
-              </a:tr>
-              <a:tr h="376320">
-                <a:tc>
-                  <a:txBody>
-                    <a:bodyPr/>
-                    <a:lstStyle/>
-                    <a:p>
-                      <a:pPr>
-                        <a:defRPr sz="800" b="1">
-                          <a:solidFill>
-                            <a:srgbClr val="0D1117"/>
-                          </a:solidFill>
-                          <a:latin typeface="Inter"/>
-                        </a:defRPr>
-                      </a:pPr>
-                      <a:r>
-                        <a:rPr>
-                          <a:latin typeface="Inter"/>
-                        </a:rPr>
-                        <a:t>Transaction costs</a:t>
-                      </a:r>
-                    </a:p>
-                  </a:txBody>
-                  <a:tcPr marL="54864" marR="54864" marT="27432" marB="27432" anchor="ctr">
-                    <a:solidFill>
-                      <a:srgbClr val="F5F7F9"/>
-                    </a:solidFill>
-                  </a:tcPr>
-                </a:tc>
-                <a:tc>
-                  <a:txBody>
-                    <a:bodyPr/>
-                    <a:lstStyle/>
-                    <a:p>
-                      <a:pPr>
-                        <a:defRPr sz="800" b="1">
-                          <a:solidFill>
-                            <a:srgbClr val="FF6B5E"/>
-                          </a:solidFill>
-                          <a:latin typeface="Inter"/>
-                        </a:defRPr>
-                      </a:pPr>
-                      <a:r>
-                        <a:rPr>
-                          <a:latin typeface="Inter"/>
-                        </a:rPr>
-                        <a:t>● unavailable</a:t>
-                      </a:r>
-                    </a:p>
-                  </a:txBody>
-                  <a:tcPr marL="54864" marR="54864" marT="27432" marB="27432" anchor="ctr">
-                    <a:solidFill>
-                      <a:srgbClr val="F5F7F9"/>
-                    </a:solidFill>
-                  </a:tcPr>
-                </a:tc>
-                <a:tc>
-                  <a:txBody>
-                    <a:bodyPr/>
-                    <a:lstStyle/>
-                    <a:p>
-                      <a:pPr>
-                        <a:defRPr sz="800" b="0">
-                          <a:solidFill>
-                            <a:srgbClr val="0D1117"/>
-                          </a:solidFill>
-                          <a:latin typeface="Inter"/>
-                        </a:defRPr>
-                      </a:pPr>
-                      <a:r>
-                        <a:rPr>
-                          <a:latin typeface="Inter"/>
-                        </a:rPr>
-                        <a:t>Not returned [S8]</a:t>
-                      </a:r>
-                    </a:p>
-                  </a:txBody>
-                  <a:tcPr marL="54864" marR="54864" marT="27432" marB="27432" anchor="ctr">
-                    <a:solidFill>
-                      <a:srgbClr val="F5F7F9"/>
                     </a:solidFill>
                   </a:tcPr>
                 </a:tc>
@@ -29571,7 +31465,7 @@
               <a:rPr>
                 <a:latin typeface="Inter"/>
               </a:rPr>
-              <a:t>Sources: S2 · S3 · S4 · S5 · S6 · S7 · S8</a:t>
+              <a:t>Sources: S2 · S3 · S4 · S5 · S6 · S7 · S8 · S9</a:t>
             </a:r>
           </a:p>
         </p:txBody>
@@ -29655,7 +31549,7 @@
               <a:rPr>
                 <a:latin typeface="Inter"/>
               </a:rPr>
-              <a:t>30</a:t>
+              <a:t>31</a:t>
             </a:r>
           </a:p>
         </p:txBody>
@@ -29668,7 +31562,7 @@
 </p:sld>
 </file>
 
-<file path=ppt/slides/slide31.xml><?xml version="1.0" encoding="utf-8"?>
+<file path=ppt/slides/slide32.xml><?xml version="1.0" encoding="utf-8"?>
 <p:sld xmlns:a="http://schemas.openxmlformats.org/drawingml/2006/main" xmlns:p="http://schemas.openxmlformats.org/presentationml/2006/main" xmlns:r="http://schemas.openxmlformats.org/officeDocument/2006/relationships">
   <p:cSld>
     <p:spTree>
@@ -29937,7 +31831,7 @@
                 <a:gridCol w="1271016"/>
                 <a:gridCol w="1271016"/>
               </a:tblGrid>
-              <a:tr h="543560">
+              <a:tr h="489204">
                 <a:tc>
                   <a:txBody>
                     <a:bodyPr/>
@@ -30155,7 +32049,7 @@
                   </a:tcPr>
                 </a:tc>
               </a:tr>
-              <a:tr h="543560">
+              <a:tr h="489204">
                 <a:tc>
                   <a:txBody>
                     <a:bodyPr/>
@@ -30200,7 +32094,7 @@
                         <a:rPr>
                           <a:latin typeface="Inter"/>
                         </a:rPr>
-                        <a:t>Organization and capabilities</a:t>
+                        <a:t>Org capabilities</a:t>
                       </a:r>
                     </a:p>
                   </a:txBody>
@@ -30254,7 +32148,7 @@
                         <a:rPr>
                           <a:latin typeface="Inter"/>
                         </a:rPr>
-                        <a:t>organization=test</a:t>
+                        <a:t>org=test</a:t>
                       </a:r>
                     </a:p>
                   </a:txBody>
@@ -30373,7 +32267,7 @@
                   </a:tcPr>
                 </a:tc>
               </a:tr>
-              <a:tr h="543560">
+              <a:tr h="489204">
                 <a:tc>
                   <a:txBody>
                     <a:bodyPr/>
@@ -30418,7 +32312,7 @@
                         <a:rPr>
                           <a:latin typeface="Inter"/>
                         </a:rPr>
-                        <a:t>Portfolio and allocation</a:t>
+                        <a:t>Portfolio / allocation</a:t>
                       </a:r>
                     </a:p>
                   </a:txBody>
@@ -30591,7 +32485,7 @@
                   </a:tcPr>
                 </a:tc>
               </a:tr>
-              <a:tr h="543560">
+              <a:tr h="489204">
                 <a:tc>
                   <a:txBody>
                     <a:bodyPr/>
@@ -30809,7 +32703,7 @@
                   </a:tcPr>
                 </a:tc>
               </a:tr>
-              <a:tr h="543560">
+              <a:tr h="489204">
                 <a:tc>
                   <a:txBody>
                     <a:bodyPr/>
@@ -31027,7 +32921,7 @@
                   </a:tcPr>
                 </a:tc>
               </a:tr>
-              <a:tr h="543560">
+              <a:tr h="489204">
                 <a:tc>
                   <a:txBody>
                     <a:bodyPr/>
@@ -31245,7 +33139,7 @@
                   </a:tcPr>
                 </a:tc>
               </a:tr>
-              <a:tr h="543560">
+              <a:tr h="489204">
                 <a:tc>
                   <a:txBody>
                     <a:bodyPr/>
@@ -31463,7 +33357,7 @@
                   </a:tcPr>
                 </a:tc>
               </a:tr>
-              <a:tr h="543560">
+              <a:tr h="489204">
                 <a:tc>
                   <a:txBody>
                     <a:bodyPr/>
@@ -31508,7 +33402,7 @@
                         <a:rPr>
                           <a:latin typeface="Inter"/>
                         </a:rPr>
-                        <a:t>Manager evidence and mandate</a:t>
+                        <a:t>Manager / mandate</a:t>
                       </a:r>
                     </a:p>
                   </a:txBody>
@@ -31535,7 +33429,7 @@
                         <a:rPr>
                           <a:latin typeface="Inter"/>
                         </a:rPr>
-                        <a:t>User document; diligence evidence</a:t>
+                        <a:t>User document; diligence</a:t>
                       </a:r>
                     </a:p>
                   </a:txBody>
@@ -31681,7 +33575,7 @@
                   </a:tcPr>
                 </a:tc>
               </a:tr>
-              <a:tr h="543560">
+              <a:tr h="489204">
                 <a:tc>
                   <a:txBody>
                     <a:bodyPr/>
@@ -31726,7 +33620,7 @@
                         <a:rPr>
                           <a:latin typeface="Inter"/>
                         </a:rPr>
-                        <a:t>Returns and attribution</a:t>
+                        <a:t>Returns / attribution</a:t>
                       </a:r>
                     </a:p>
                   </a:txBody>
@@ -31895,6 +33789,224 @@
                   <a:tcPr marL="54864" marR="54864" marT="27432" marB="27432" anchor="ctr">
                     <a:solidFill>
                       <a:srgbClr val="F5F7F9"/>
+                    </a:solidFill>
+                  </a:tcPr>
+                </a:tc>
+              </a:tr>
+              <a:tr h="489204">
+                <a:tc>
+                  <a:txBody>
+                    <a:bodyPr/>
+                    <a:lstStyle/>
+                    <a:p>
+                      <a:pPr>
+                        <a:defRPr sz="650" b="1">
+                          <a:solidFill>
+                            <a:srgbClr val="0D1117"/>
+                          </a:solidFill>
+                          <a:latin typeface="Inter"/>
+                        </a:defRPr>
+                      </a:pPr>
+                      <a:r>
+                        <a:rPr>
+                          <a:latin typeface="Inter"/>
+                        </a:rPr>
+                        <a:t>S9</a:t>
+                      </a:r>
+                    </a:p>
+                  </a:txBody>
+                  <a:tcPr marL="54864" marR="54864" marT="27432" marB="27432" anchor="ctr">
+                    <a:solidFill>
+                      <a:srgbClr val="FFFFFF"/>
+                    </a:solidFill>
+                  </a:tcPr>
+                </a:tc>
+                <a:tc>
+                  <a:txBody>
+                    <a:bodyPr/>
+                    <a:lstStyle/>
+                    <a:p>
+                      <a:pPr>
+                        <a:defRPr sz="650" b="0">
+                          <a:solidFill>
+                            <a:srgbClr val="0D1117"/>
+                          </a:solidFill>
+                          <a:latin typeface="Inter"/>
+                        </a:defRPr>
+                      </a:pPr>
+                      <a:r>
+                        <a:rPr>
+                          <a:latin typeface="Inter"/>
+                        </a:rPr>
+                        <a:t>ILPA company look-through</a:t>
+                      </a:r>
+                    </a:p>
+                  </a:txBody>
+                  <a:tcPr marL="54864" marR="54864" marT="27432" marB="27432" anchor="ctr">
+                    <a:solidFill>
+                      <a:srgbClr val="FFFFFF"/>
+                    </a:solidFill>
+                  </a:tcPr>
+                </a:tc>
+                <a:tc>
+                  <a:txBody>
+                    <a:bodyPr/>
+                    <a:lstStyle/>
+                    <a:p>
+                      <a:pPr>
+                        <a:defRPr sz="650" b="0">
+                          <a:solidFill>
+                            <a:srgbClr val="0D1117"/>
+                          </a:solidFill>
+                          <a:latin typeface="Inter"/>
+                        </a:defRPr>
+                      </a:pPr>
+                      <a:r>
+                        <a:rPr>
+                          <a:latin typeface="Inter"/>
+                        </a:rPr>
+                        <a:t>get_private_markets_holdings</a:t>
+                      </a:r>
+                    </a:p>
+                  </a:txBody>
+                  <a:tcPr marL="54864" marR="54864" marT="27432" marB="27432" anchor="ctr">
+                    <a:solidFill>
+                      <a:srgbClr val="FFFFFF"/>
+                    </a:solidFill>
+                  </a:tcPr>
+                </a:tc>
+                <a:tc>
+                  <a:txBody>
+                    <a:bodyPr/>
+                    <a:lstStyle/>
+                    <a:p>
+                      <a:pPr>
+                        <a:defRPr sz="650" b="0">
+                          <a:solidFill>
+                            <a:srgbClr val="0D1117"/>
+                          </a:solidFill>
+                          <a:latin typeface="Inter"/>
+                        </a:defRPr>
+                      </a:pPr>
+                      <a:r>
+                        <a:rPr>
+                          <a:latin typeface="Inter"/>
+                        </a:rPr>
+                        <a:t>paged; server aggregates</a:t>
+                      </a:r>
+                    </a:p>
+                  </a:txBody>
+                  <a:tcPr marL="54864" marR="54864" marT="27432" marB="27432" anchor="ctr">
+                    <a:solidFill>
+                      <a:srgbClr val="FFFFFF"/>
+                    </a:solidFill>
+                  </a:tcPr>
+                </a:tc>
+                <a:tc>
+                  <a:txBody>
+                    <a:bodyPr/>
+                    <a:lstStyle/>
+                    <a:p>
+                      <a:pPr>
+                        <a:defRPr sz="650" b="0">
+                          <a:solidFill>
+                            <a:srgbClr val="0D1117"/>
+                          </a:solidFill>
+                          <a:latin typeface="Inter"/>
+                        </a:defRPr>
+                      </a:pPr>
+                      <a:r>
+                        <a:rPr>
+                          <a:latin typeface="Inter"/>
+                        </a:rPr>
+                        <a:t>2026-06-30</a:t>
+                      </a:r>
+                    </a:p>
+                  </a:txBody>
+                  <a:tcPr marL="54864" marR="54864" marT="27432" marB="27432" anchor="ctr">
+                    <a:solidFill>
+                      <a:srgbClr val="FFFFFF"/>
+                    </a:solidFill>
+                  </a:tcPr>
+                </a:tc>
+                <a:tc>
+                  <a:txBody>
+                    <a:bodyPr/>
+                    <a:lstStyle/>
+                    <a:p>
+                      <a:pPr>
+                        <a:defRPr sz="650" b="0">
+                          <a:solidFill>
+                            <a:srgbClr val="0D1117"/>
+                          </a:solidFill>
+                          <a:latin typeface="Inter"/>
+                        </a:defRPr>
+                      </a:pPr>
+                      <a:r>
+                        <a:rPr>
+                          <a:latin typeface="Inter"/>
+                        </a:rPr>
+                        <a:t>Fictional TEST data</a:t>
+                      </a:r>
+                    </a:p>
+                  </a:txBody>
+                  <a:tcPr marL="54864" marR="54864" marT="27432" marB="27432" anchor="ctr">
+                    <a:solidFill>
+                      <a:srgbClr val="FFFFFF"/>
+                    </a:solidFill>
+                  </a:tcPr>
+                </a:tc>
+                <a:tc>
+                  <a:txBody>
+                    <a:bodyPr/>
+                    <a:lstStyle/>
+                    <a:p>
+                      <a:pPr>
+                        <a:defRPr sz="650" b="0">
+                          <a:solidFill>
+                            <a:srgbClr val="0D1117"/>
+                          </a:solidFill>
+                          <a:latin typeface="Inter"/>
+                        </a:defRPr>
+                      </a:pPr>
+                      <a:r>
+                        <a:rPr>
+                          <a:latin typeface="Inter"/>
+                        </a:rPr>
+                        <a:t>partial</a:t>
+                      </a:r>
+                    </a:p>
+                  </a:txBody>
+                  <a:tcPr marL="54864" marR="54864" marT="27432" marB="27432" anchor="ctr">
+                    <a:solidFill>
+                      <a:srgbClr val="FFFFFF"/>
+                    </a:solidFill>
+                  </a:tcPr>
+                </a:tc>
+                <a:tc>
+                  <a:txBody>
+                    <a:bodyPr/>
+                    <a:lstStyle/>
+                    <a:p>
+                      <a:pPr>
+                        <a:defRPr sz="650" b="0">
+                          <a:solidFill>
+                            <a:srgbClr val="0D1117"/>
+                          </a:solidFill>
+                          <a:latin typeface="Inter"/>
+                        </a:defRPr>
+                      </a:pPr>
+                      <a:r>
+                        <a:rPr>
+                          <a:latin typeface="Inter"/>
+                        </a:rPr>
+                        <a:t>pm-s9</a:t>
+                      </a:r>
+                    </a:p>
+                  </a:txBody>
+                  <a:tcPr marL="54864" marR="54864" marT="27432" marB="27432" anchor="ctr">
+                    <a:solidFill>
+                      <a:srgbClr val="FFFFFF"/>
                     </a:solidFill>
                   </a:tcPr>
                 </a:tc>
@@ -31989,7 +34101,7 @@
               <a:rPr>
                 <a:latin typeface="Inter"/>
               </a:rPr>
-              <a:t>Sources: S1 · S2 · S3 · S4 · S5 · S6 · S7 · S8</a:t>
+              <a:t>Sources: S1 · S2 · S3 · S4 · S5 · S6 · S7 · S8 · S9</a:t>
             </a:r>
           </a:p>
         </p:txBody>
@@ -32073,7 +34185,7 @@
               <a:rPr>
                 <a:latin typeface="Inter"/>
               </a:rPr>
-              <a:t>31</a:t>
+              <a:t>32</a:t>
             </a:r>
           </a:p>
         </p:txBody>
@@ -32086,7 +34198,7 @@
 </p:sld>
 </file>
 
-<file path=ppt/slides/slide32.xml><?xml version="1.0" encoding="utf-8"?>
+<file path=ppt/slides/slide33.xml><?xml version="1.0" encoding="utf-8"?>
 <p:sld xmlns:a="http://schemas.openxmlformats.org/drawingml/2006/main" xmlns:p="http://schemas.openxmlformats.org/presentationml/2006/main" xmlns:r="http://schemas.openxmlformats.org/officeDocument/2006/relationships">
   <p:cSld>
     <p:spTree>
@@ -32379,7 +34491,7 @@
         </p:nvGraphicFramePr>
         <p:xfrm>
           <a:off x="640080" y="1600200"/>
-          <a:ext cx="10908792" cy="1765959"/>
+          <a:ext cx="10908792" cy="2494556"/>
         </p:xfrm>
         <a:graphic>
           <a:graphicData uri="http://schemas.openxmlformats.org/drawingml/2006/table">
@@ -32394,7 +34506,7 @@
                 <a:gridCol w="2224278"/>
                 <a:gridCol w="2224278"/>
               </a:tblGrid>
-              <a:tr h="441489">
+              <a:tr h="498911">
                 <a:tc>
                   <a:txBody>
                     <a:bodyPr/>
@@ -32531,7 +34643,7 @@
                   </a:tcPr>
                 </a:tc>
               </a:tr>
-              <a:tr h="441489">
+              <a:tr h="498911">
                 <a:tc>
                   <a:txBody>
                     <a:bodyPr/>
@@ -32668,7 +34780,7 @@
                   </a:tcPr>
                 </a:tc>
               </a:tr>
-              <a:tr h="441489">
+              <a:tr h="498911">
                 <a:tc>
                   <a:txBody>
                     <a:bodyPr/>
@@ -32805,7 +34917,7 @@
                   </a:tcPr>
                 </a:tc>
               </a:tr>
-              <a:tr h="441492">
+              <a:tr h="498911">
                 <a:tc>
                   <a:txBody>
                     <a:bodyPr/>
@@ -32938,6 +35050,143 @@
                   <a:tcPr marL="54864" marR="54864" marT="27432" marB="27432" anchor="ctr">
                     <a:solidFill>
                       <a:srgbClr val="FFFFFF"/>
+                    </a:solidFill>
+                  </a:tcPr>
+                </a:tc>
+              </a:tr>
+              <a:tr h="498912">
+                <a:tc>
+                  <a:txBody>
+                    <a:bodyPr/>
+                    <a:lstStyle/>
+                    <a:p>
+                      <a:pPr>
+                        <a:defRPr sz="720" b="1">
+                          <a:solidFill>
+                            <a:srgbClr val="0D1117"/>
+                          </a:solidFill>
+                          <a:latin typeface="Inter"/>
+                        </a:defRPr>
+                      </a:pPr>
+                      <a:r>
+                        <a:rPr>
+                          <a:latin typeface="Inter"/>
+                        </a:rPr>
+                        <a:t>S9</a:t>
+                      </a:r>
+                    </a:p>
+                  </a:txBody>
+                  <a:tcPr marL="54864" marR="54864" marT="27432" marB="27432" anchor="ctr">
+                    <a:solidFill>
+                      <a:srgbClr val="F5F7F9"/>
+                    </a:solidFill>
+                  </a:tcPr>
+                </a:tc>
+                <a:tc>
+                  <a:txBody>
+                    <a:bodyPr/>
+                    <a:lstStyle/>
+                    <a:p>
+                      <a:pPr>
+                        <a:defRPr sz="720" b="0">
+                          <a:solidFill>
+                            <a:srgbClr val="0D1117"/>
+                          </a:solidFill>
+                          <a:latin typeface="Inter"/>
+                        </a:defRPr>
+                      </a:pPr>
+                      <a:r>
+                        <a:rPr>
+                          <a:latin typeface="Inter"/>
+                        </a:rPr>
+                        <a:t>Company concentration</a:t>
+                      </a:r>
+                    </a:p>
+                  </a:txBody>
+                  <a:tcPr marL="54864" marR="54864" marT="27432" marB="27432" anchor="ctr">
+                    <a:solidFill>
+                      <a:srgbClr val="F5F7F9"/>
+                    </a:solidFill>
+                  </a:tcPr>
+                </a:tc>
+                <a:tc>
+                  <a:txBody>
+                    <a:bodyPr/>
+                    <a:lstStyle/>
+                    <a:p>
+                      <a:pPr>
+                        <a:defRPr sz="720" b="0">
+                          <a:solidFill>
+                            <a:srgbClr val="0D1117"/>
+                          </a:solidFill>
+                          <a:latin typeface="Inter"/>
+                        </a:defRPr>
+                      </a:pPr>
+                      <a:r>
+                        <a:rPr>
+                          <a:latin typeface="Inter"/>
+                        </a:rPr>
+                        <a:t>Server aggregates only</a:t>
+                      </a:r>
+                    </a:p>
+                  </a:txBody>
+                  <a:tcPr marL="54864" marR="54864" marT="27432" marB="27432" anchor="ctr">
+                    <a:solidFill>
+                      <a:srgbClr val="F5F7F9"/>
+                    </a:solidFill>
+                  </a:tcPr>
+                </a:tc>
+                <a:tc>
+                  <a:txBody>
+                    <a:bodyPr/>
+                    <a:lstStyle/>
+                    <a:p>
+                      <a:pPr>
+                        <a:defRPr sz="720" b="0">
+                          <a:solidFill>
+                            <a:srgbClr val="0D1117"/>
+                          </a:solidFill>
+                          <a:latin typeface="Inter"/>
+                        </a:defRPr>
+                      </a:pPr>
+                      <a:r>
+                        <a:rPr>
+                          <a:latin typeface="Inter"/>
+                        </a:rPr>
+                        <a:t>private-markets-holding-exact-to-range-v1</a:t>
+                      </a:r>
+                    </a:p>
+                  </a:txBody>
+                  <a:tcPr marL="54864" marR="54864" marT="27432" marB="27432" anchor="ctr">
+                    <a:solidFill>
+                      <a:srgbClr val="F5F7F9"/>
+                    </a:solidFill>
+                  </a:tcPr>
+                </a:tc>
+                <a:tc>
+                  <a:txBody>
+                    <a:bodyPr/>
+                    <a:lstStyle/>
+                    <a:p>
+                      <a:pPr>
+                        <a:defRPr sz="720" b="0">
+                          <a:solidFill>
+                            <a:srgbClr val="0D1117"/>
+                          </a:solidFill>
+                          <a:latin typeface="Inter"/>
+                        </a:defRPr>
+                      </a:pPr>
+                      <a:r>
+                        <a:rPr>
+                          <a:latin typeface="Inter"/>
+                        </a:rPr>
+                        <a:t>Canonical NAV; non-additive; partial coverage</a:t>
+                      </a:r>
+                    </a:p>
+                  </a:txBody>
+                  <a:tcPr marL="54864" marR="54864" marT="27432" marB="27432" anchor="ctr">
+                    <a:solidFill>
+                      <a:srgbClr val="F5F7F9"/>
                     </a:solidFill>
                   </a:tcPr>
                 </a:tc>
@@ -32954,8 +35203,8 @@
         </p:nvSpPr>
         <p:spPr>
           <a:xfrm>
-            <a:off x="640080" y="3475887"/>
-            <a:ext cx="10908792" cy="2742032"/>
+            <a:off x="640080" y="4204484"/>
+            <a:ext cx="10908792" cy="2013435"/>
           </a:xfrm>
           <a:prstGeom prst="rect">
             <a:avLst/>
@@ -32970,11 +35219,11 @@
           <a:p>
             <a:pPr algn="l">
               <a:spcAft>
-                <a:spcPts val="500"/>
+                <a:spcPts val="0"/>
               </a:spcAft>
-              <a:defRPr sz="1050" b="0">
+              <a:defRPr sz="1100" b="0">
                 <a:solidFill>
-                  <a:srgbClr val="0D1117"/>
+                  <a:srgbClr val="4A5563"/>
                 </a:solidFill>
                 <a:latin typeface="Inter"/>
               </a:defRPr>
@@ -32983,64 +35232,7 @@
               <a:rPr>
                 <a:latin typeface="Inter"/>
               </a:rPr>
-              <a:t>•  Private-market valuations may lag the report date [S4].</a:t>
-            </a:r>
-          </a:p>
-          <a:p>
-            <a:pPr algn="l">
-              <a:spcAft>
-                <a:spcPts val="500"/>
-              </a:spcAft>
-              <a:defRPr sz="1050" b="0">
-                <a:solidFill>
-                  <a:srgbClr val="0D1117"/>
-                </a:solidFill>
-                <a:latin typeface="Inter"/>
-              </a:defRPr>
-            </a:pPr>
-            <a:r>
-              <a:rPr>
-                <a:latin typeface="Inter"/>
-              </a:rPr>
-              <a:t>•  Forward values are assumptions, not forecasts or guarantees [S5].</a:t>
-            </a:r>
-          </a:p>
-          <a:p>
-            <a:pPr algn="l">
-              <a:spcAft>
-                <a:spcPts val="500"/>
-              </a:spcAft>
-              <a:defRPr sz="1050" b="0">
-                <a:solidFill>
-                  <a:srgbClr val="0D1117"/>
-                </a:solidFill>
-                <a:latin typeface="Inter"/>
-              </a:defRPr>
-            </a:pPr>
-            <a:r>
-              <a:rPr>
-                <a:latin typeface="Inter"/>
-              </a:rPr>
-              <a:t>•  Portfolio Analytics and Strategy Lab are separate analytical scopes.</a:t>
-            </a:r>
-          </a:p>
-          <a:p>
-            <a:pPr algn="l">
-              <a:spcAft>
-                <a:spcPts val="500"/>
-              </a:spcAft>
-              <a:defRPr sz="1050" b="0">
-                <a:solidFill>
-                  <a:srgbClr val="0D1117"/>
-                </a:solidFill>
-                <a:latin typeface="Inter"/>
-              </a:defRPr>
-            </a:pPr>
-            <a:r>
-              <a:rPr>
-                <a:latin typeface="Inter"/>
-              </a:rPr>
-              <a:t>•  This AI-assisted construction analysis is not investment, legal or compliance advice.</a:t>
+              <a:t>Private-market valuations may lag the report date [S4]. Company look-through is non-additive to commitment exposure, and exact ILPA source money is not summed across currencies [S9]. The selected portfolio-company artifact is Draft — July 22, 2026, not a final ILPA release [S9]. Forward values are assumptions, not forecasts or guarantees [S5]. Portfolio Analytics and Strategy Lab are separate analytical scopes. This AI-assisted construction analysis is not investment, legal or compliance advice.</a:t>
             </a:r>
           </a:p>
         </p:txBody>
@@ -33131,7 +35323,7 @@
               <a:rPr>
                 <a:latin typeface="Inter"/>
               </a:rPr>
-              <a:t>Sources: S3 · S4 · S5</a:t>
+              <a:t>Sources: S3 · S4 · S5 · S9</a:t>
             </a:r>
           </a:p>
         </p:txBody>
@@ -33215,7 +35407,7 @@
               <a:rPr>
                 <a:latin typeface="Inter"/>
               </a:rPr>
-              <a:t>32</a:t>
+              <a:t>33</a:t>
             </a:r>
           </a:p>
         </p:txBody>
@@ -36366,7 +38558,7 @@
         </p:nvGraphicFramePr>
         <p:xfrm>
           <a:off x="640080" y="1600200"/>
-          <a:ext cx="10908790" cy="3033270"/>
+          <a:ext cx="10908790" cy="1934566"/>
         </p:xfrm>
         <a:graphic>
           <a:graphicData uri="http://schemas.openxmlformats.org/drawingml/2006/table">
@@ -36382,7 +38574,7 @@
                 <a:gridCol w="1779422"/>
                 <a:gridCol w="1779422"/>
               </a:tblGrid>
-              <a:tr h="758317">
+              <a:tr h="483641">
                 <a:tc>
                   <a:txBody>
                     <a:bodyPr/>
@@ -36546,7 +38738,7 @@
                   </a:tcPr>
                 </a:tc>
               </a:tr>
-              <a:tr h="758317">
+              <a:tr h="483641">
                 <a:tc>
                   <a:txBody>
                     <a:bodyPr/>
@@ -36710,7 +38902,7 @@
                   </a:tcPr>
                 </a:tc>
               </a:tr>
-              <a:tr h="758317">
+              <a:tr h="483641">
                 <a:tc>
                   <a:txBody>
                     <a:bodyPr/>
@@ -36874,7 +39066,7 @@
                   </a:tcPr>
                 </a:tc>
               </a:tr>
-              <a:tr h="758319">
+              <a:tr h="483643">
                 <a:tc>
                   <a:txBody>
                     <a:bodyPr/>
@@ -37050,8 +39242,518 @@
         </p:nvSpPr>
         <p:spPr>
           <a:xfrm>
-            <a:off x="640080" y="4743198"/>
-            <a:ext cx="10908792" cy="1474721"/>
+            <a:off x="640080" y="3644494"/>
+            <a:ext cx="10908792" cy="201168"/>
+          </a:xfrm>
+          <a:prstGeom prst="rect">
+            <a:avLst/>
+          </a:prstGeom>
+          <a:noFill/>
+        </p:spPr>
+        <p:txBody>
+          <a:bodyPr wrap="none" lIns="9144" rIns="9144" tIns="9144" bIns="9144" anchor="t">
+            <a:spAutoFit/>
+          </a:bodyPr>
+          <a:lstStyle/>
+          <a:p>
+            <a:pPr algn="l">
+              <a:spcAft>
+                <a:spcPts val="0"/>
+              </a:spcAft>
+              <a:defRPr sz="720" b="1">
+                <a:solidFill>
+                  <a:srgbClr val="4A5563"/>
+                </a:solidFill>
+                <a:latin typeface="Inter"/>
+              </a:defRPr>
+            </a:pPr>
+            <a:r>
+              <a:rPr>
+                <a:latin typeface="Inter"/>
+              </a:rPr>
+              <a:t>ILPA COMPANY COVERAGE</a:t>
+            </a:r>
+          </a:p>
+        </p:txBody>
+      </p:sp>
+      <p:graphicFrame>
+        <p:nvGraphicFramePr>
+          <p:cNvPr id="11" name="Table 10"/>
+          <p:cNvGraphicFramePr>
+            <a:graphicFrameLocks noGrp="1"/>
+          </p:cNvGraphicFramePr>
+          <p:nvPr/>
+        </p:nvGraphicFramePr>
+        <p:xfrm>
+          <a:off x="640080" y="3918814"/>
+          <a:ext cx="10908792" cy="977851"/>
+        </p:xfrm>
+        <a:graphic>
+          <a:graphicData uri="http://schemas.openxmlformats.org/drawingml/2006/table">
+            <a:tbl>
+              <a:tblPr firstRow="1" bandRow="1">
+                <a:tableStyleId>{5C22544A-7EE6-4342-B048-85BDC9FD1C3A}</a:tableStyleId>
+              </a:tblPr>
+              <a:tblGrid>
+                <a:gridCol w="2011680"/>
+                <a:gridCol w="1271016"/>
+                <a:gridCol w="1271016"/>
+                <a:gridCol w="1271016"/>
+                <a:gridCol w="1271016"/>
+                <a:gridCol w="1271016"/>
+                <a:gridCol w="1271016"/>
+                <a:gridCol w="1271016"/>
+              </a:tblGrid>
+              <a:tr h="488925">
+                <a:tc>
+                  <a:txBody>
+                    <a:bodyPr/>
+                    <a:lstStyle/>
+                    <a:p>
+                      <a:pPr>
+                        <a:defRPr sz="750" b="1">
+                          <a:solidFill>
+                            <a:srgbClr val="FFFFFF"/>
+                          </a:solidFill>
+                          <a:latin typeface="Inter"/>
+                        </a:defRPr>
+                      </a:pPr>
+                      <a:r>
+                        <a:rPr>
+                          <a:latin typeface="Inter"/>
+                        </a:rPr>
+                        <a:t>Data status</a:t>
+                      </a:r>
+                    </a:p>
+                  </a:txBody>
+                  <a:tcPr marL="54864" marR="54864" marT="27432" marB="27432" anchor="ctr">
+                    <a:solidFill>
+                      <a:srgbClr val="0D1117"/>
+                    </a:solidFill>
+                  </a:tcPr>
+                </a:tc>
+                <a:tc>
+                  <a:txBody>
+                    <a:bodyPr/>
+                    <a:lstStyle/>
+                    <a:p>
+                      <a:pPr>
+                        <a:defRPr sz="750" b="1">
+                          <a:solidFill>
+                            <a:srgbClr val="FFFFFF"/>
+                          </a:solidFill>
+                          <a:latin typeface="Inter"/>
+                        </a:defRPr>
+                      </a:pPr>
+                      <a:r>
+                        <a:rPr>
+                          <a:latin typeface="Inter"/>
+                        </a:rPr>
+                        <a:t>Mapped companies</a:t>
+                      </a:r>
+                    </a:p>
+                  </a:txBody>
+                  <a:tcPr marL="54864" marR="54864" marT="27432" marB="27432" anchor="ctr">
+                    <a:solidFill>
+                      <a:srgbClr val="0D1117"/>
+                    </a:solidFill>
+                  </a:tcPr>
+                </a:tc>
+                <a:tc>
+                  <a:txBody>
+                    <a:bodyPr/>
+                    <a:lstStyle/>
+                    <a:p>
+                      <a:pPr>
+                        <a:defRPr sz="750" b="1">
+                          <a:solidFill>
+                            <a:srgbClr val="FFFFFF"/>
+                          </a:solidFill>
+                          <a:latin typeface="Inter"/>
+                        </a:defRPr>
+                      </a:pPr>
+                      <a:r>
+                        <a:rPr>
+                          <a:latin typeface="Inter"/>
+                        </a:rPr>
+                        <a:t>Valued companies</a:t>
+                      </a:r>
+                    </a:p>
+                  </a:txBody>
+                  <a:tcPr marL="54864" marR="54864" marT="27432" marB="27432" anchor="ctr">
+                    <a:solidFill>
+                      <a:srgbClr val="0D1117"/>
+                    </a:solidFill>
+                  </a:tcPr>
+                </a:tc>
+                <a:tc>
+                  <a:txBody>
+                    <a:bodyPr/>
+                    <a:lstStyle/>
+                    <a:p>
+                      <a:pPr>
+                        <a:defRPr sz="750" b="1">
+                          <a:solidFill>
+                            <a:srgbClr val="FFFFFF"/>
+                          </a:solidFill>
+                          <a:latin typeface="Inter"/>
+                        </a:defRPr>
+                      </a:pPr>
+                      <a:r>
+                        <a:rPr>
+                          <a:latin typeface="Inter"/>
+                        </a:rPr>
+                        <a:t>Assessed / total</a:t>
+                      </a:r>
+                    </a:p>
+                  </a:txBody>
+                  <a:tcPr marL="54864" marR="54864" marT="27432" marB="27432" anchor="ctr">
+                    <a:solidFill>
+                      <a:srgbClr val="0D1117"/>
+                    </a:solidFill>
+                  </a:tcPr>
+                </a:tc>
+                <a:tc>
+                  <a:txBody>
+                    <a:bodyPr/>
+                    <a:lstStyle/>
+                    <a:p>
+                      <a:pPr>
+                        <a:defRPr sz="750" b="1">
+                          <a:solidFill>
+                            <a:srgbClr val="FFFFFF"/>
+                          </a:solidFill>
+                          <a:latin typeface="Inter"/>
+                        </a:defRPr>
+                      </a:pPr>
+                      <a:r>
+                        <a:rPr>
+                          <a:latin typeface="Inter"/>
+                        </a:rPr>
+                        <a:t>Aggregate completeness</a:t>
+                      </a:r>
+                    </a:p>
+                  </a:txBody>
+                  <a:tcPr marL="54864" marR="54864" marT="27432" marB="27432" anchor="ctr">
+                    <a:solidFill>
+                      <a:srgbClr val="0D1117"/>
+                    </a:solidFill>
+                  </a:tcPr>
+                </a:tc>
+                <a:tc>
+                  <a:txBody>
+                    <a:bodyPr/>
+                    <a:lstStyle/>
+                    <a:p>
+                      <a:pPr>
+                        <a:defRPr sz="750" b="1">
+                          <a:solidFill>
+                            <a:srgbClr val="FFFFFF"/>
+                          </a:solidFill>
+                          <a:latin typeface="Inter"/>
+                        </a:defRPr>
+                      </a:pPr>
+                      <a:r>
+                        <a:rPr>
+                          <a:latin typeface="Inter"/>
+                        </a:rPr>
+                        <a:t>Selected artifacts</a:t>
+                      </a:r>
+                    </a:p>
+                  </a:txBody>
+                  <a:tcPr marL="54864" marR="54864" marT="27432" marB="27432" anchor="ctr">
+                    <a:solidFill>
+                      <a:srgbClr val="0D1117"/>
+                    </a:solidFill>
+                  </a:tcPr>
+                </a:tc>
+                <a:tc>
+                  <a:txBody>
+                    <a:bodyPr/>
+                    <a:lstStyle/>
+                    <a:p>
+                      <a:pPr>
+                        <a:defRPr sz="750" b="1">
+                          <a:solidFill>
+                            <a:srgbClr val="FFFFFF"/>
+                          </a:solidFill>
+                          <a:latin typeface="Inter"/>
+                        </a:defRPr>
+                      </a:pPr>
+                      <a:r>
+                        <a:rPr>
+                          <a:latin typeface="Inter"/>
+                        </a:rPr>
+                        <a:t>Reporting date</a:t>
+                      </a:r>
+                    </a:p>
+                  </a:txBody>
+                  <a:tcPr marL="54864" marR="54864" marT="27432" marB="27432" anchor="ctr">
+                    <a:solidFill>
+                      <a:srgbClr val="0D1117"/>
+                    </a:solidFill>
+                  </a:tcPr>
+                </a:tc>
+                <a:tc>
+                  <a:txBody>
+                    <a:bodyPr/>
+                    <a:lstStyle/>
+                    <a:p>
+                      <a:pPr>
+                        <a:defRPr sz="750" b="1">
+                          <a:solidFill>
+                            <a:srgbClr val="FFFFFF"/>
+                          </a:solidFill>
+                          <a:latin typeface="Inter"/>
+                        </a:defRPr>
+                      </a:pPr>
+                      <a:r>
+                        <a:rPr>
+                          <a:latin typeface="Inter"/>
+                        </a:rPr>
+                        <a:t>Draft label</a:t>
+                      </a:r>
+                    </a:p>
+                  </a:txBody>
+                  <a:tcPr marL="54864" marR="54864" marT="27432" marB="27432" anchor="ctr">
+                    <a:solidFill>
+                      <a:srgbClr val="0D1117"/>
+                    </a:solidFill>
+                  </a:tcPr>
+                </a:tc>
+              </a:tr>
+              <a:tr h="488926">
+                <a:tc>
+                  <a:txBody>
+                    <a:bodyPr/>
+                    <a:lstStyle/>
+                    <a:p>
+                      <a:pPr>
+                        <a:defRPr sz="650" b="1">
+                          <a:solidFill>
+                            <a:srgbClr val="0D1117"/>
+                          </a:solidFill>
+                          <a:latin typeface="Inter"/>
+                        </a:defRPr>
+                      </a:pPr>
+                      <a:r>
+                        <a:rPr>
+                          <a:latin typeface="Inter"/>
+                        </a:rPr>
+                        <a:t>Partial</a:t>
+                      </a:r>
+                    </a:p>
+                  </a:txBody>
+                  <a:tcPr marL="54864" marR="54864" marT="27432" marB="27432" anchor="ctr">
+                    <a:solidFill>
+                      <a:srgbClr val="FFFFFF"/>
+                    </a:solidFill>
+                  </a:tcPr>
+                </a:tc>
+                <a:tc>
+                  <a:txBody>
+                    <a:bodyPr/>
+                    <a:lstStyle/>
+                    <a:p>
+                      <a:pPr>
+                        <a:defRPr sz="650" b="0">
+                          <a:solidFill>
+                            <a:srgbClr val="0D1117"/>
+                          </a:solidFill>
+                          <a:latin typeface="Inter"/>
+                        </a:defRPr>
+                      </a:pPr>
+                      <a:r>
+                        <a:rPr>
+                          <a:latin typeface="Inter"/>
+                        </a:rPr>
+                        <a:t>2</a:t>
+                      </a:r>
+                    </a:p>
+                  </a:txBody>
+                  <a:tcPr marL="54864" marR="54864" marT="27432" marB="27432" anchor="ctr">
+                    <a:solidFill>
+                      <a:srgbClr val="FFFFFF"/>
+                    </a:solidFill>
+                  </a:tcPr>
+                </a:tc>
+                <a:tc>
+                  <a:txBody>
+                    <a:bodyPr/>
+                    <a:lstStyle/>
+                    <a:p>
+                      <a:pPr>
+                        <a:defRPr sz="650" b="0">
+                          <a:solidFill>
+                            <a:srgbClr val="0D1117"/>
+                          </a:solidFill>
+                          <a:latin typeface="Inter"/>
+                        </a:defRPr>
+                      </a:pPr>
+                      <a:r>
+                        <a:rPr>
+                          <a:latin typeface="Inter"/>
+                        </a:rPr>
+                        <a:t>2</a:t>
+                      </a:r>
+                    </a:p>
+                  </a:txBody>
+                  <a:tcPr marL="54864" marR="54864" marT="27432" marB="27432" anchor="ctr">
+                    <a:solidFill>
+                      <a:srgbClr val="FFFFFF"/>
+                    </a:solidFill>
+                  </a:tcPr>
+                </a:tc>
+                <a:tc>
+                  <a:txBody>
+                    <a:bodyPr/>
+                    <a:lstStyle/>
+                    <a:p>
+                      <a:pPr>
+                        <a:defRPr sz="650" b="0">
+                          <a:solidFill>
+                            <a:srgbClr val="0D1117"/>
+                          </a:solidFill>
+                          <a:latin typeface="Inter"/>
+                        </a:defRPr>
+                      </a:pPr>
+                      <a:r>
+                        <a:rPr>
+                          <a:latin typeface="Inter"/>
+                        </a:rPr>
+                        <a:t>2 / 3</a:t>
+                      </a:r>
+                    </a:p>
+                  </a:txBody>
+                  <a:tcPr marL="54864" marR="54864" marT="27432" marB="27432" anchor="ctr">
+                    <a:solidFill>
+                      <a:srgbClr val="FFFFFF"/>
+                    </a:solidFill>
+                  </a:tcPr>
+                </a:tc>
+                <a:tc>
+                  <a:txBody>
+                    <a:bodyPr/>
+                    <a:lstStyle/>
+                    <a:p>
+                      <a:pPr>
+                        <a:defRPr sz="650" b="0">
+                          <a:solidFill>
+                            <a:srgbClr val="0D1117"/>
+                          </a:solidFill>
+                          <a:latin typeface="Inter"/>
+                        </a:defRPr>
+                      </a:pPr>
+                      <a:r>
+                        <a:rPr>
+                          <a:latin typeface="Inter"/>
+                        </a:rPr>
+                        <a:t>Partial — one unknown-grain holding excluded</a:t>
+                      </a:r>
+                    </a:p>
+                  </a:txBody>
+                  <a:tcPr marL="54864" marR="54864" marT="27432" marB="27432" anchor="ctr">
+                    <a:solidFill>
+                      <a:srgbClr val="FFFFFF"/>
+                    </a:solidFill>
+                  </a:tcPr>
+                </a:tc>
+                <a:tc>
+                  <a:txBody>
+                    <a:bodyPr/>
+                    <a:lstStyle/>
+                    <a:p>
+                      <a:pPr>
+                        <a:defRPr sz="650" b="0">
+                          <a:solidFill>
+                            <a:srgbClr val="0D1117"/>
+                          </a:solidFill>
+                          <a:latin typeface="Inter"/>
+                        </a:defRPr>
+                      </a:pPr>
+                      <a:r>
+                        <a:rPr>
+                          <a:latin typeface="Inter"/>
+                        </a:rPr>
+                        <a:t>1</a:t>
+                      </a:r>
+                    </a:p>
+                  </a:txBody>
+                  <a:tcPr marL="54864" marR="54864" marT="27432" marB="27432" anchor="ctr">
+                    <a:solidFill>
+                      <a:srgbClr val="FFFFFF"/>
+                    </a:solidFill>
+                  </a:tcPr>
+                </a:tc>
+                <a:tc>
+                  <a:txBody>
+                    <a:bodyPr/>
+                    <a:lstStyle/>
+                    <a:p>
+                      <a:pPr>
+                        <a:defRPr sz="650" b="0">
+                          <a:solidFill>
+                            <a:srgbClr val="0D1117"/>
+                          </a:solidFill>
+                          <a:latin typeface="Inter"/>
+                        </a:defRPr>
+                      </a:pPr>
+                      <a:r>
+                        <a:rPr>
+                          <a:latin typeface="Inter"/>
+                        </a:rPr>
+                        <a:t>2026-06-30</a:t>
+                      </a:r>
+                    </a:p>
+                  </a:txBody>
+                  <a:tcPr marL="54864" marR="54864" marT="27432" marB="27432" anchor="ctr">
+                    <a:solidFill>
+                      <a:srgbClr val="FFFFFF"/>
+                    </a:solidFill>
+                  </a:tcPr>
+                </a:tc>
+                <a:tc>
+                  <a:txBody>
+                    <a:bodyPr/>
+                    <a:lstStyle/>
+                    <a:p>
+                      <a:pPr>
+                        <a:defRPr sz="650" b="0">
+                          <a:solidFill>
+                            <a:srgbClr val="0D1117"/>
+                          </a:solidFill>
+                          <a:latin typeface="Inter"/>
+                        </a:defRPr>
+                      </a:pPr>
+                      <a:r>
+                        <a:rPr>
+                          <a:latin typeface="Inter"/>
+                        </a:rPr>
+                        <a:t>Draft — July 22, 2026 [S9]</a:t>
+                      </a:r>
+                    </a:p>
+                  </a:txBody>
+                  <a:tcPr marL="54864" marR="54864" marT="27432" marB="27432" anchor="ctr">
+                    <a:solidFill>
+                      <a:srgbClr val="FFFFFF"/>
+                    </a:solidFill>
+                  </a:tcPr>
+                </a:tc>
+              </a:tr>
+            </a:tbl>
+          </a:graphicData>
+        </a:graphic>
+      </p:graphicFrame>
+      <p:sp>
+        <p:nvSpPr>
+          <p:cNvPr id="12" name="TextBox 11"/>
+          <p:cNvSpPr txBox="1"/>
+          <p:nvPr/>
+        </p:nvSpPr>
+        <p:spPr>
+          <a:xfrm>
+            <a:off x="640080" y="5006393"/>
+            <a:ext cx="10908792" cy="1211526"/>
           </a:xfrm>
           <a:prstGeom prst="rect">
             <a:avLst/>
@@ -37079,14 +39781,14 @@
               <a:rPr>
                 <a:latin typeface="Inter"/>
               </a:rPr>
-              <a:t>All reported private-market NAVs are dated 2026-03-31 and therefore lag the report date; unfunded amounts are shown separately and are not included in NAV [S4].</a:t>
+              <a:t>All reported private-market NAVs are dated 2026-03-31 and therefore lag the report date; unfunded amounts are shown separately and are not included in NAV. Company look-through is a non-additive risk overlay; the partial server aggregates assess two of three holdings, with one unknown grain excluded [S4][S9].</a:t>
             </a:r>
           </a:p>
         </p:txBody>
       </p:sp>
       <p:sp>
         <p:nvSpPr>
-          <p:cNvPr id="11" name="Rectangle 10"/>
+          <p:cNvPr id="13" name="Rectangle 12"/>
           <p:cNvSpPr/>
           <p:nvPr/>
         </p:nvSpPr>
@@ -37135,7 +39837,7 @@
       </p:sp>
       <p:sp>
         <p:nvSpPr>
-          <p:cNvPr id="12" name="TextBox 11"/>
+          <p:cNvPr id="14" name="TextBox 13"/>
           <p:cNvSpPr txBox="1"/>
           <p:nvPr/>
         </p:nvSpPr>
@@ -37170,14 +39872,14 @@
               <a:rPr>
                 <a:latin typeface="Inter"/>
               </a:rPr>
-              <a:t>Sources: S4</a:t>
+              <a:t>Sources: S4 · S9</a:t>
             </a:r>
           </a:p>
         </p:txBody>
       </p:sp>
       <p:sp>
         <p:nvSpPr>
-          <p:cNvPr id="13" name="TextBox 12"/>
+          <p:cNvPr id="15" name="TextBox 14"/>
           <p:cNvSpPr txBox="1"/>
           <p:nvPr/>
         </p:nvSpPr>
@@ -37219,7 +39921,7 @@
       </p:sp>
       <p:sp>
         <p:nvSpPr>
-          <p:cNvPr id="14" name="TextBox 13"/>
+          <p:cNvPr id="16" name="TextBox 15"/>
           <p:cNvSpPr txBox="1"/>
           <p:nvPr/>
         </p:nvSpPr>

--- a/plugins/gradient-cio/assets/examples/gradient-portfolio-construction-private-markets.pptx
+++ b/plugins/gradient-cio/assets/examples/gradient-portfolio-construction-private-markets.pptx
@@ -1486,6 +1486,59 @@
               </a:solidFill>
             </c:spPr>
           </c:dPt>
+          <c:dLbls>
+            <c:dLbl>
+              <c:idx val="0"/>
+              <c:tx>
+                <c:rich>
+                  <a:bodyPr/>
+                  <a:lstStyle/>
+                  <a:p>
+                    <a:r>
+                      <a:rPr lang="en-US" sz="800"/>
+                      <a:t>9.6%</a:t>
+                    </a:r>
+                  </a:p>
+                </c:rich>
+              </c:tx>
+              <c:dLblPos val="outEnd"/>
+              <c:showLegendKey val="0"/>
+              <c:showVal val="0"/>
+              <c:showCatName val="0"/>
+              <c:showSerName val="0"/>
+              <c:showPercent val="0"/>
+              <c:showBubbleSize val="0"/>
+            </c:dLbl>
+            <c:dLbl>
+              <c:idx val="1"/>
+              <c:tx>
+                <c:rich>
+                  <a:bodyPr/>
+                  <a:lstStyle/>
+                  <a:p>
+                    <a:r>
+                      <a:rPr lang="en-US" sz="800"/>
+                      <a:t>18.5%</a:t>
+                    </a:r>
+                  </a:p>
+                </c:rich>
+              </c:tx>
+              <c:dLblPos val="outEnd"/>
+              <c:showLegendKey val="0"/>
+              <c:showVal val="0"/>
+              <c:showCatName val="0"/>
+              <c:showSerName val="0"/>
+              <c:showPercent val="0"/>
+              <c:showBubbleSize val="0"/>
+            </c:dLbl>
+            <c:dLblPos val="outEnd"/>
+            <c:showLegendKey val="0"/>
+            <c:showVal val="0"/>
+            <c:showCatName val="0"/>
+            <c:showSerName val="0"/>
+            <c:showPercent val="0"/>
+            <c:showBubbleSize val="0"/>
+          </c:dLbls>
           <c:cat>
             <c:strRef>
               <c:f>Sheet1!$A$2:$A$3</c:f>
@@ -1800,6 +1853,15 @@
       <c:legendPos val="b"/>
       <c:layout/>
       <c:overlay val="0"/>
+      <c:txPr>
+        <a:bodyPr/>
+        <a:lstStyle/>
+        <a:p>
+          <a:pPr>
+            <a:defRPr sz="700"/>
+          </a:pPr>
+        </a:p>
+      </c:txPr>
     </c:legend>
     <c:plotVisOnly val="1"/>
     <c:dispBlanksAs val="gap"/>
@@ -1857,6 +1919,37 @@
               </a:solidFill>
             </c:spPr>
           </c:dPt>
+          <c:dLbls>
+            <c:dLbl>
+              <c:idx val="0"/>
+              <c:tx>
+                <c:rich>
+                  <a:bodyPr/>
+                  <a:lstStyle/>
+                  <a:p>
+                    <a:r>
+                      <a:rPr lang="en-US" sz="800"/>
+                      <a:t>4.8x</a:t>
+                    </a:r>
+                  </a:p>
+                </c:rich>
+              </c:tx>
+              <c:dLblPos val="outEnd"/>
+              <c:showLegendKey val="0"/>
+              <c:showVal val="0"/>
+              <c:showCatName val="0"/>
+              <c:showSerName val="0"/>
+              <c:showPercent val="0"/>
+              <c:showBubbleSize val="0"/>
+            </c:dLbl>
+            <c:dLblPos val="outEnd"/>
+            <c:showLegendKey val="0"/>
+            <c:showVal val="0"/>
+            <c:showCatName val="0"/>
+            <c:showSerName val="0"/>
+            <c:showPercent val="0"/>
+            <c:showBubbleSize val="0"/>
+          </c:dLbls>
           <c:cat>
             <c:strRef>
               <c:f>Sheet1!$A$2:$A$2</c:f>
@@ -2004,7 +2097,7 @@
               <c:strCache>
                 <c:ptCount val="1"/>
                 <c:pt idx="0">
-                  <c:v>Portfolio (TEST)</c:v>
+                  <c:v>Portfolio</c:v>
                 </c:pt>
               </c:strCache>
             </c:strRef>
@@ -2047,7 +2140,7 @@
               <c:strCache>
                 <c:ptCount val="1"/>
                 <c:pt idx="0">
-                  <c:v>Portfolio (TEST)</c:v>
+                  <c:v>Portfolio</c:v>
                 </c:pt>
               </c:strCache>
             </c:strRef>
@@ -4949,7 +5042,7 @@
         </p:nvSpPr>
         <p:spPr>
           <a:xfrm>
-            <a:off x="685800" y="1828800"/>
+            <a:off x="685800" y="1664208"/>
             <a:ext cx="9966960" cy="274320"/>
           </a:xfrm>
           <a:prstGeom prst="rect">
@@ -4967,7 +5060,7 @@
               <a:spcAft>
                 <a:spcPts val="0"/>
               </a:spcAft>
-              <a:defRPr sz="900" b="1">
+              <a:defRPr sz="850" b="1">
                 <a:solidFill>
                   <a:srgbClr val="C6F432"/>
                 </a:solidFill>
@@ -4991,7 +5084,7 @@
         </p:nvSpPr>
         <p:spPr>
           <a:xfrm>
-            <a:off x="685800" y="2176272"/>
+            <a:off x="685800" y="2011680"/>
             <a:ext cx="9966960" cy="1234440"/>
           </a:xfrm>
           <a:prstGeom prst="rect">
@@ -5009,7 +5102,7 @@
               <a:spcAft>
                 <a:spcPts val="0"/>
               </a:spcAft>
-              <a:defRPr sz="3400" b="1">
+              <a:defRPr sz="3300" b="1">
                 <a:solidFill>
                   <a:srgbClr val="FFFFFF"/>
                 </a:solidFill>
@@ -5020,7 +5113,7 @@
               <a:rPr>
                 <a:latin typeface="Inter"/>
               </a:rPr>
-              <a:t>Northstar Private Markets Program (TEST)</a:t>
+              <a:t>Northstar Private Markets Program</a:t>
             </a:r>
           </a:p>
         </p:txBody>
@@ -5033,8 +5126,8 @@
         </p:nvSpPr>
         <p:spPr>
           <a:xfrm>
-            <a:off x="685800" y="3456432"/>
-            <a:ext cx="9692640" cy="640080"/>
+            <a:off x="685800" y="3273552"/>
+            <a:ext cx="9692640" cy="594360"/>
           </a:xfrm>
           <a:prstGeom prst="rect">
             <a:avLst/>
@@ -5051,7 +5144,7 @@
               <a:spcAft>
                 <a:spcPts val="0"/>
               </a:spcAft>
-              <a:defRPr sz="1500" b="0">
+              <a:defRPr sz="1400" b="0">
                 <a:solidFill>
                   <a:srgbClr val="9AA5B1"/>
                 </a:solidFill>
@@ -5062,7 +5155,7 @@
               <a:rPr>
                 <a:latin typeface="Inter"/>
               </a:rPr>
-              <a:t>Decision pack · prepared for the Investment Committee (TEST)</a:t>
+              <a:t>Portfolio construction review · prepared for the Investment Committee</a:t>
             </a:r>
           </a:p>
         </p:txBody>
@@ -5075,8 +5168,8 @@
         </p:nvSpPr>
         <p:spPr>
           <a:xfrm>
-            <a:off x="685800" y="4251960"/>
-            <a:ext cx="1005840" cy="54864"/>
+            <a:off x="685800" y="4005072"/>
+            <a:ext cx="822960" cy="45720"/>
           </a:xfrm>
           <a:prstGeom prst="rect">
             <a:avLst/>
@@ -5124,8 +5217,8 @@
         </p:nvSpPr>
         <p:spPr>
           <a:xfrm>
-            <a:off x="685800" y="4572000"/>
-            <a:ext cx="3063240" cy="182880"/>
+            <a:off x="685800" y="4315968"/>
+            <a:ext cx="4709160" cy="182880"/>
           </a:xfrm>
           <a:prstGeom prst="rect">
             <a:avLst/>
@@ -5166,8 +5259,8 @@
         </p:nvSpPr>
         <p:spPr>
           <a:xfrm>
-            <a:off x="685800" y="4773168"/>
-            <a:ext cx="3063240" cy="320040"/>
+            <a:off x="685800" y="4507992"/>
+            <a:ext cx="4709160" cy="310896"/>
           </a:xfrm>
           <a:prstGeom prst="rect">
             <a:avLst/>
@@ -5208,8 +5301,8 @@
         </p:nvSpPr>
         <p:spPr>
           <a:xfrm>
-            <a:off x="4160520" y="4572000"/>
-            <a:ext cx="3063240" cy="182880"/>
+            <a:off x="5852160" y="4315968"/>
+            <a:ext cx="4709160" cy="182880"/>
           </a:xfrm>
           <a:prstGeom prst="rect">
             <a:avLst/>
@@ -5237,7 +5330,7 @@
               <a:rPr>
                 <a:latin typeface="Inter"/>
               </a:rPr>
-              <a:t>BASE CURRENCY</a:t>
+              <a:t>PRIVATE-MARKETS NAV</a:t>
             </a:r>
           </a:p>
         </p:txBody>
@@ -5250,8 +5343,8 @@
         </p:nvSpPr>
         <p:spPr>
           <a:xfrm>
-            <a:off x="4160520" y="4773168"/>
-            <a:ext cx="3063240" cy="320040"/>
+            <a:off x="5852160" y="4507992"/>
+            <a:ext cx="4709160" cy="310896"/>
           </a:xfrm>
           <a:prstGeom prst="rect">
             <a:avLst/>
@@ -5279,7 +5372,7 @@
               <a:rPr>
                 <a:latin typeface="Inter"/>
               </a:rPr>
-              <a:t>USD</a:t>
+              <a:t>$230.0M</a:t>
             </a:r>
           </a:p>
         </p:txBody>
@@ -5292,8 +5385,8 @@
         </p:nvSpPr>
         <p:spPr>
           <a:xfrm>
-            <a:off x="7635240" y="4572000"/>
-            <a:ext cx="3063240" cy="182880"/>
+            <a:off x="685800" y="4937759"/>
+            <a:ext cx="4709160" cy="182880"/>
           </a:xfrm>
           <a:prstGeom prst="rect">
             <a:avLst/>
@@ -5321,7 +5414,7 @@
               <a:rPr>
                 <a:latin typeface="Inter"/>
               </a:rPr>
-              <a:t>TOTAL NAV</a:t>
+              <a:t>UNFUNDED COMMITMENTS</a:t>
             </a:r>
           </a:p>
         </p:txBody>
@@ -5334,8 +5427,8 @@
         </p:nvSpPr>
         <p:spPr>
           <a:xfrm>
-            <a:off x="7635240" y="4773168"/>
-            <a:ext cx="3063240" cy="320040"/>
+            <a:off x="685800" y="5129783"/>
+            <a:ext cx="4709160" cy="310896"/>
           </a:xfrm>
           <a:prstGeom prst="rect">
             <a:avLst/>
@@ -5363,7 +5456,7 @@
               <a:rPr>
                 <a:latin typeface="Inter"/>
               </a:rPr>
-              <a:t>$1,000.0M</a:t>
+              <a:t>$92.0M</a:t>
             </a:r>
           </a:p>
         </p:txBody>
@@ -5376,8 +5469,8 @@
         </p:nvSpPr>
         <p:spPr>
           <a:xfrm>
-            <a:off x="685800" y="5230368"/>
-            <a:ext cx="3063240" cy="182880"/>
+            <a:off x="5852160" y="4937759"/>
+            <a:ext cx="4709160" cy="182880"/>
           </a:xfrm>
           <a:prstGeom prst="rect">
             <a:avLst/>
@@ -5405,7 +5498,7 @@
               <a:rPr>
                 <a:latin typeface="Inter"/>
               </a:rPr>
-              <a:t>PRIVATE-MARKETS NAV</a:t>
+              <a:t>REVIEW</a:t>
             </a:r>
           </a:p>
         </p:txBody>
@@ -5418,8 +5511,8 @@
         </p:nvSpPr>
         <p:spPr>
           <a:xfrm>
-            <a:off x="685800" y="5431536"/>
-            <a:ext cx="3063240" cy="320040"/>
+            <a:off x="5852160" y="5129783"/>
+            <a:ext cx="4709160" cy="310896"/>
           </a:xfrm>
           <a:prstGeom prst="rect">
             <a:avLst/>
@@ -5447,189 +5540,21 @@
               <a:rPr>
                 <a:latin typeface="Inter"/>
               </a:rPr>
-              <a:t>$230.0M</a:t>
+              <a:t>Program construction</a:t>
             </a:r>
           </a:p>
         </p:txBody>
       </p:sp>
       <p:sp>
         <p:nvSpPr>
-          <p:cNvPr id="17" name="TextBox 16"/>
-          <p:cNvSpPr txBox="1"/>
-          <p:nvPr/>
-        </p:nvSpPr>
-        <p:spPr>
-          <a:xfrm>
-            <a:off x="4160520" y="5230368"/>
-            <a:ext cx="3063240" cy="182880"/>
-          </a:xfrm>
-          <a:prstGeom prst="rect">
-            <a:avLst/>
-          </a:prstGeom>
-          <a:noFill/>
-        </p:spPr>
-        <p:txBody>
-          <a:bodyPr wrap="none" lIns="9144" rIns="9144" tIns="9144" bIns="9144" anchor="t">
-            <a:spAutoFit/>
-          </a:bodyPr>
-          <a:lstStyle/>
-          <a:p>
-            <a:pPr algn="l">
-              <a:spcAft>
-                <a:spcPts val="0"/>
-              </a:spcAft>
-              <a:defRPr sz="700" b="1">
-                <a:solidFill>
-                  <a:srgbClr val="8A94A1"/>
-                </a:solidFill>
-                <a:latin typeface="Inter"/>
-              </a:defRPr>
-            </a:pPr>
-            <a:r>
-              <a:rPr>
-                <a:latin typeface="Inter"/>
-              </a:rPr>
-              <a:t>UNFUNDED COMMITMENTS</a:t>
-            </a:r>
-          </a:p>
-        </p:txBody>
-      </p:sp>
-      <p:sp>
-        <p:nvSpPr>
-          <p:cNvPr id="18" name="TextBox 17"/>
-          <p:cNvSpPr txBox="1"/>
-          <p:nvPr/>
-        </p:nvSpPr>
-        <p:spPr>
-          <a:xfrm>
-            <a:off x="4160520" y="5431536"/>
-            <a:ext cx="3063240" cy="320040"/>
-          </a:xfrm>
-          <a:prstGeom prst="rect">
-            <a:avLst/>
-          </a:prstGeom>
-          <a:noFill/>
-        </p:spPr>
-        <p:txBody>
-          <a:bodyPr wrap="none" lIns="9144" rIns="9144" tIns="9144" bIns="9144" anchor="t">
-            <a:spAutoFit/>
-          </a:bodyPr>
-          <a:lstStyle/>
-          <a:p>
-            <a:pPr algn="l">
-              <a:spcAft>
-                <a:spcPts val="0"/>
-              </a:spcAft>
-              <a:defRPr sz="1000" b="1">
-                <a:solidFill>
-                  <a:srgbClr val="FFFFFF"/>
-                </a:solidFill>
-                <a:latin typeface="Inter"/>
-              </a:defRPr>
-            </a:pPr>
-            <a:r>
-              <a:rPr>
-                <a:latin typeface="Inter"/>
-              </a:rPr>
-              <a:t>$92.0M</a:t>
-            </a:r>
-          </a:p>
-        </p:txBody>
-      </p:sp>
-      <p:sp>
-        <p:nvSpPr>
-          <p:cNvPr id="19" name="TextBox 18"/>
-          <p:cNvSpPr txBox="1"/>
-          <p:nvPr/>
-        </p:nvSpPr>
-        <p:spPr>
-          <a:xfrm>
-            <a:off x="7635240" y="5230368"/>
-            <a:ext cx="3063240" cy="182880"/>
-          </a:xfrm>
-          <a:prstGeom prst="rect">
-            <a:avLst/>
-          </a:prstGeom>
-          <a:noFill/>
-        </p:spPr>
-        <p:txBody>
-          <a:bodyPr wrap="none" lIns="9144" rIns="9144" tIns="9144" bIns="9144" anchor="t">
-            <a:spAutoFit/>
-          </a:bodyPr>
-          <a:lstStyle/>
-          <a:p>
-            <a:pPr algn="l">
-              <a:spcAft>
-                <a:spcPts val="0"/>
-              </a:spcAft>
-              <a:defRPr sz="700" b="1">
-                <a:solidFill>
-                  <a:srgbClr val="8A94A1"/>
-                </a:solidFill>
-                <a:latin typeface="Inter"/>
-              </a:defRPr>
-            </a:pPr>
-            <a:r>
-              <a:rPr>
-                <a:latin typeface="Inter"/>
-              </a:rPr>
-              <a:t>DATA SCOPE</a:t>
-            </a:r>
-          </a:p>
-        </p:txBody>
-      </p:sp>
-      <p:sp>
-        <p:nvSpPr>
-          <p:cNvPr id="20" name="TextBox 19"/>
-          <p:cNvSpPr txBox="1"/>
-          <p:nvPr/>
-        </p:nvSpPr>
-        <p:spPr>
-          <a:xfrm>
-            <a:off x="7635240" y="5431536"/>
-            <a:ext cx="3063240" cy="320040"/>
-          </a:xfrm>
-          <a:prstGeom prst="rect">
-            <a:avLst/>
-          </a:prstGeom>
-          <a:noFill/>
-        </p:spPr>
-        <p:txBody>
-          <a:bodyPr wrap="none" lIns="9144" rIns="9144" tIns="9144" bIns="9144" anchor="t">
-            <a:spAutoFit/>
-          </a:bodyPr>
-          <a:lstStyle/>
-          <a:p>
-            <a:pPr algn="l">
-              <a:spcAft>
-                <a:spcPts val="0"/>
-              </a:spcAft>
-              <a:defRPr sz="1000" b="1">
-                <a:solidFill>
-                  <a:srgbClr val="FFFFFF"/>
-                </a:solidFill>
-                <a:latin typeface="Inter"/>
-              </a:defRPr>
-            </a:pPr>
-            <a:r>
-              <a:rPr>
-                <a:latin typeface="Inter"/>
-              </a:rPr>
-              <a:t>Fictional TEST data</a:t>
-            </a:r>
-          </a:p>
-        </p:txBody>
-      </p:sp>
-      <p:sp>
-        <p:nvSpPr>
-          <p:cNvPr id="21" name="Rectangle 20"/>
+          <p:cNvPr id="17" name="Rectangle 16"/>
           <p:cNvSpPr/>
           <p:nvPr/>
         </p:nvSpPr>
         <p:spPr>
           <a:xfrm>
-            <a:off x="685800" y="5833872"/>
-            <a:ext cx="3063240" cy="384048"/>
+            <a:off x="685800" y="5687568"/>
+            <a:ext cx="3337560" cy="530352"/>
           </a:xfrm>
           <a:prstGeom prst="rect">
             <a:avLst/>
@@ -5671,14 +5596,14 @@
       </p:sp>
       <p:sp>
         <p:nvSpPr>
-          <p:cNvPr id="22" name="TextBox 21"/>
+          <p:cNvPr id="18" name="TextBox 17"/>
           <p:cNvSpPr txBox="1"/>
           <p:nvPr/>
         </p:nvSpPr>
         <p:spPr>
           <a:xfrm>
-            <a:off x="822960" y="5934456"/>
-            <a:ext cx="2788920" cy="164592"/>
+            <a:off x="822960" y="5760720"/>
+            <a:ext cx="3063240" cy="128016"/>
           </a:xfrm>
           <a:prstGeom prst="rect">
             <a:avLst/>
@@ -5695,7 +5620,7 @@
               <a:spcAft>
                 <a:spcPts val="0"/>
               </a:spcAft>
-              <a:defRPr sz="800" b="1">
+              <a:defRPr sz="620" b="1">
                 <a:solidFill>
                   <a:srgbClr val="0D1117"/>
                 </a:solidFill>
@@ -5706,6 +5631,48 @@
               <a:rPr>
                 <a:latin typeface="Inter"/>
               </a:rPr>
+              <a:t>OVERALL VIEW</a:t>
+            </a:r>
+          </a:p>
+        </p:txBody>
+      </p:sp>
+      <p:sp>
+        <p:nvSpPr>
+          <p:cNvPr id="19" name="TextBox 18"/>
+          <p:cNvSpPr txBox="1"/>
+          <p:nvPr/>
+        </p:nvSpPr>
+        <p:spPr>
+          <a:xfrm>
+            <a:off x="822960" y="5916168"/>
+            <a:ext cx="3063240" cy="182880"/>
+          </a:xfrm>
+          <a:prstGeom prst="rect">
+            <a:avLst/>
+          </a:prstGeom>
+          <a:noFill/>
+        </p:spPr>
+        <p:txBody>
+          <a:bodyPr wrap="none" lIns="9144" rIns="9144" tIns="9144" bIns="9144" anchor="t">
+            <a:spAutoFit/>
+          </a:bodyPr>
+          <a:lstStyle/>
+          <a:p>
+            <a:pPr algn="l">
+              <a:spcAft>
+                <a:spcPts val="0"/>
+              </a:spcAft>
+              <a:defRPr sz="900" b="1">
+                <a:solidFill>
+                  <a:srgbClr val="0D1117"/>
+                </a:solidFill>
+                <a:latin typeface="Inter"/>
+              </a:defRPr>
+            </a:pPr>
+            <a:r>
+              <a:rPr>
+                <a:latin typeface="Inter"/>
+              </a:rPr>
               <a:t>Pacing and concentration on watch</a:t>
             </a:r>
           </a:p>
@@ -5713,13 +5680,13 @@
       </p:sp>
       <p:sp>
         <p:nvSpPr>
-          <p:cNvPr id="23" name="TextBox 22"/>
+          <p:cNvPr id="20" name="TextBox 19"/>
           <p:cNvSpPr txBox="1"/>
           <p:nvPr/>
         </p:nvSpPr>
         <p:spPr>
           <a:xfrm>
-            <a:off x="3977639" y="5824728"/>
+            <a:off x="4297680" y="5733288"/>
             <a:ext cx="3108960" cy="164592"/>
           </a:xfrm>
           <a:prstGeom prst="rect">
@@ -5748,20 +5715,20 @@
               <a:rPr>
                 <a:latin typeface="Inter"/>
               </a:rPr>
-              <a:t>EVIDENCE COMPLETENESS</a:t>
+              <a:t>SCOPE REVIEWED</a:t>
             </a:r>
           </a:p>
         </p:txBody>
       </p:sp>
       <p:sp>
         <p:nvSpPr>
-          <p:cNvPr id="24" name="TextBox 23"/>
+          <p:cNvPr id="21" name="TextBox 20"/>
           <p:cNvSpPr txBox="1"/>
           <p:nvPr/>
         </p:nvSpPr>
         <p:spPr>
           <a:xfrm>
-            <a:off x="3977639" y="5998464"/>
+            <a:off x="4297680" y="5934456"/>
             <a:ext cx="3108960" cy="201168"/>
           </a:xfrm>
           <a:prstGeom prst="rect">
@@ -5797,14 +5764,14 @@
       </p:sp>
       <p:sp>
         <p:nvSpPr>
-          <p:cNvPr id="25" name="TextBox 24"/>
+          <p:cNvPr id="22" name="TextBox 21"/>
           <p:cNvSpPr txBox="1"/>
           <p:nvPr/>
         </p:nvSpPr>
         <p:spPr>
           <a:xfrm>
-            <a:off x="685800" y="6473952"/>
-            <a:ext cx="8046720" cy="182880"/>
+            <a:off x="685800" y="6400800"/>
+            <a:ext cx="8046720" cy="146304"/>
           </a:xfrm>
           <a:prstGeom prst="rect">
             <a:avLst/>
@@ -5832,14 +5799,56 @@
               <a:rPr>
                 <a:latin typeface="Inter"/>
               </a:rPr>
-              <a:t>TEST DATA — fictional portfolio for rendering tests only</a:t>
+              <a:t>Confidential — Investment Committee</a:t>
             </a:r>
           </a:p>
         </p:txBody>
       </p:sp>
       <p:sp>
         <p:nvSpPr>
-          <p:cNvPr id="26" name="TextBox 25"/>
+          <p:cNvPr id="23" name="TextBox 22"/>
+          <p:cNvSpPr txBox="1"/>
+          <p:nvPr/>
+        </p:nvSpPr>
+        <p:spPr>
+          <a:xfrm>
+            <a:off x="685800" y="6556248"/>
+            <a:ext cx="8046720" cy="128016"/>
+          </a:xfrm>
+          <a:prstGeom prst="rect">
+            <a:avLst/>
+          </a:prstGeom>
+          <a:noFill/>
+        </p:spPr>
+        <p:txBody>
+          <a:bodyPr wrap="none" lIns="9144" rIns="9144" tIns="9144" bIns="9144" anchor="t">
+            <a:spAutoFit/>
+          </a:bodyPr>
+          <a:lstStyle/>
+          <a:p>
+            <a:pPr algn="l">
+              <a:spcAft>
+                <a:spcPts val="0"/>
+              </a:spcAft>
+              <a:defRPr sz="650" b="0">
+                <a:solidFill>
+                  <a:srgbClr val="8A94A1"/>
+                </a:solidFill>
+                <a:latin typeface="Inter"/>
+              </a:defRPr>
+            </a:pPr>
+            <a:r>
+              <a:rPr>
+                <a:latin typeface="Inter"/>
+              </a:rPr>
+              <a:t>Illustrative sample · not client data</a:t>
+            </a:r>
+          </a:p>
+        </p:txBody>
+      </p:sp>
+      <p:sp>
+        <p:nvSpPr>
+          <p:cNvPr id="24" name="TextBox 23"/>
           <p:cNvSpPr txBox="1"/>
           <p:nvPr/>
         </p:nvSpPr>
@@ -5955,7 +5964,7 @@
         <p:spPr>
           <a:xfrm>
             <a:off x="640080" y="329184"/>
-            <a:ext cx="9875520" cy="182880"/>
+            <a:ext cx="5303520" cy="182880"/>
           </a:xfrm>
           <a:prstGeom prst="rect">
             <a:avLst/>
@@ -5996,6 +6005,48 @@
         </p:nvSpPr>
         <p:spPr>
           <a:xfrm>
+            <a:off x="5897880" y="310896"/>
+            <a:ext cx="4800600" cy="256032"/>
+          </a:xfrm>
+          <a:prstGeom prst="rect">
+            <a:avLst/>
+          </a:prstGeom>
+          <a:noFill/>
+        </p:spPr>
+        <p:txBody>
+          <a:bodyPr wrap="none" lIns="9144" rIns="9144" tIns="9144" bIns="9144" anchor="t">
+            <a:spAutoFit/>
+          </a:bodyPr>
+          <a:lstStyle/>
+          <a:p>
+            <a:pPr algn="r">
+              <a:spcAft>
+                <a:spcPts val="0"/>
+              </a:spcAft>
+              <a:defRPr sz="680" b="1">
+                <a:solidFill>
+                  <a:srgbClr val="4F6B00"/>
+                </a:solidFill>
+                <a:latin typeface="Inter"/>
+              </a:defRPr>
+            </a:pPr>
+            <a:r>
+              <a:rPr>
+                <a:latin typeface="Inter"/>
+              </a:rPr>
+              <a:t>Illustrative, Gradient Maintained — demo data, not the client's holdings or managers</a:t>
+            </a:r>
+          </a:p>
+        </p:txBody>
+      </p:sp>
+      <p:sp>
+        <p:nvSpPr>
+          <p:cNvPr id="5" name="TextBox 4"/>
+          <p:cNvSpPr txBox="1"/>
+          <p:nvPr/>
+        </p:nvSpPr>
+        <p:spPr>
+          <a:xfrm>
             <a:off x="640080" y="566928"/>
             <a:ext cx="10058400" cy="530352"/>
           </a:xfrm>
@@ -6032,7 +6083,7 @@
       </p:sp>
       <p:sp>
         <p:nvSpPr>
-          <p:cNvPr id="5" name="Rectangle 4"/>
+          <p:cNvPr id="6" name="Rectangle 5"/>
           <p:cNvSpPr/>
           <p:nvPr/>
         </p:nvSpPr>
@@ -6081,7 +6132,7 @@
       </p:sp>
       <p:sp>
         <p:nvSpPr>
-          <p:cNvPr id="6" name="Rectangle 5"/>
+          <p:cNvPr id="7" name="Rectangle 6"/>
           <p:cNvSpPr/>
           <p:nvPr/>
         </p:nvSpPr>
@@ -6130,7 +6181,7 @@
       </p:sp>
       <p:sp>
         <p:nvSpPr>
-          <p:cNvPr id="7" name="TextBox 6"/>
+          <p:cNvPr id="8" name="TextBox 7"/>
           <p:cNvSpPr txBox="1"/>
           <p:nvPr/>
         </p:nvSpPr>
@@ -6172,7 +6223,7 @@
       </p:sp>
       <p:sp>
         <p:nvSpPr>
-          <p:cNvPr id="8" name="TextBox 7"/>
+          <p:cNvPr id="9" name="TextBox 8"/>
           <p:cNvSpPr txBox="1"/>
           <p:nvPr/>
         </p:nvSpPr>
@@ -6214,7 +6265,7 @@
       </p:sp>
       <p:graphicFrame>
         <p:nvGraphicFramePr>
-          <p:cNvPr id="9" name="Chart 8"/>
+          <p:cNvPr id="10" name="Chart 9"/>
           <p:cNvGraphicFramePr>
             <a:graphicFrameLocks noGrp="1"/>
           </p:cNvGraphicFramePr>
@@ -6232,7 +6283,7 @@
       </p:graphicFrame>
       <p:sp>
         <p:nvSpPr>
-          <p:cNvPr id="10" name="Rectangle 9"/>
+          <p:cNvPr id="11" name="Rectangle 10"/>
           <p:cNvSpPr/>
           <p:nvPr/>
         </p:nvSpPr>
@@ -6281,7 +6332,7 @@
       </p:sp>
       <p:sp>
         <p:nvSpPr>
-          <p:cNvPr id="11" name="TextBox 10"/>
+          <p:cNvPr id="12" name="TextBox 11"/>
           <p:cNvSpPr txBox="1"/>
           <p:nvPr/>
         </p:nvSpPr>
@@ -6323,7 +6374,7 @@
       </p:sp>
       <p:sp>
         <p:nvSpPr>
-          <p:cNvPr id="12" name="TextBox 11"/>
+          <p:cNvPr id="13" name="TextBox 12"/>
           <p:cNvSpPr txBox="1"/>
           <p:nvPr/>
         </p:nvSpPr>
@@ -6358,14 +6409,14 @@
               <a:rPr>
                 <a:latin typeface="Inter"/>
               </a:rPr>
-              <a:t>TEST DATA — fictional portfolio for rendering tests only · Data as of 2026-06-30</a:t>
+              <a:t>Confidential — Investment Committee · Data as of 2026-06-30</a:t>
             </a:r>
           </a:p>
         </p:txBody>
       </p:sp>
       <p:sp>
         <p:nvSpPr>
-          <p:cNvPr id="13" name="TextBox 12"/>
+          <p:cNvPr id="14" name="TextBox 13"/>
           <p:cNvSpPr txBox="1"/>
           <p:nvPr/>
         </p:nvSpPr>
@@ -6481,7 +6532,7 @@
         <p:spPr>
           <a:xfrm>
             <a:off x="640080" y="329184"/>
-            <a:ext cx="9875520" cy="182880"/>
+            <a:ext cx="5303520" cy="182880"/>
           </a:xfrm>
           <a:prstGeom prst="rect">
             <a:avLst/>
@@ -6522,6 +6573,48 @@
         </p:nvSpPr>
         <p:spPr>
           <a:xfrm>
+            <a:off x="5897880" y="310896"/>
+            <a:ext cx="4800600" cy="256032"/>
+          </a:xfrm>
+          <a:prstGeom prst="rect">
+            <a:avLst/>
+          </a:prstGeom>
+          <a:noFill/>
+        </p:spPr>
+        <p:txBody>
+          <a:bodyPr wrap="none" lIns="9144" rIns="9144" tIns="9144" bIns="9144" anchor="t">
+            <a:spAutoFit/>
+          </a:bodyPr>
+          <a:lstStyle/>
+          <a:p>
+            <a:pPr algn="r">
+              <a:spcAft>
+                <a:spcPts val="0"/>
+              </a:spcAft>
+              <a:defRPr sz="680" b="1">
+                <a:solidFill>
+                  <a:srgbClr val="4F6B00"/>
+                </a:solidFill>
+                <a:latin typeface="Inter"/>
+              </a:defRPr>
+            </a:pPr>
+            <a:r>
+              <a:rPr>
+                <a:latin typeface="Inter"/>
+              </a:rPr>
+              <a:t>Illustrative, Gradient Maintained — demo data, not the client's holdings or managers</a:t>
+            </a:r>
+          </a:p>
+        </p:txBody>
+      </p:sp>
+      <p:sp>
+        <p:nvSpPr>
+          <p:cNvPr id="5" name="TextBox 4"/>
+          <p:cNvSpPr txBox="1"/>
+          <p:nvPr/>
+        </p:nvSpPr>
+        <p:spPr>
+          <a:xfrm>
             <a:off x="640080" y="566928"/>
             <a:ext cx="10058400" cy="530352"/>
           </a:xfrm>
@@ -6558,7 +6651,7 @@
       </p:sp>
       <p:sp>
         <p:nvSpPr>
-          <p:cNvPr id="5" name="Rectangle 4"/>
+          <p:cNvPr id="6" name="Rectangle 5"/>
           <p:cNvSpPr/>
           <p:nvPr/>
         </p:nvSpPr>
@@ -6607,7 +6700,7 @@
       </p:sp>
       <p:sp>
         <p:nvSpPr>
-          <p:cNvPr id="6" name="Rectangle 5"/>
+          <p:cNvPr id="7" name="Rectangle 6"/>
           <p:cNvSpPr/>
           <p:nvPr/>
         </p:nvSpPr>
@@ -6656,7 +6749,7 @@
       </p:sp>
       <p:sp>
         <p:nvSpPr>
-          <p:cNvPr id="7" name="TextBox 6"/>
+          <p:cNvPr id="8" name="TextBox 7"/>
           <p:cNvSpPr txBox="1"/>
           <p:nvPr/>
         </p:nvSpPr>
@@ -6698,7 +6791,7 @@
       </p:sp>
       <p:sp>
         <p:nvSpPr>
-          <p:cNvPr id="8" name="TextBox 7"/>
+          <p:cNvPr id="9" name="TextBox 8"/>
           <p:cNvSpPr txBox="1"/>
           <p:nvPr/>
         </p:nvSpPr>
@@ -6740,7 +6833,7 @@
       </p:sp>
       <p:graphicFrame>
         <p:nvGraphicFramePr>
-          <p:cNvPr id="9" name="Chart 8"/>
+          <p:cNvPr id="10" name="Chart 9"/>
           <p:cNvGraphicFramePr>
             <a:graphicFrameLocks noGrp="1"/>
           </p:cNvGraphicFramePr>
@@ -6758,7 +6851,7 @@
       </p:graphicFrame>
       <p:sp>
         <p:nvSpPr>
-          <p:cNvPr id="10" name="Rectangle 9"/>
+          <p:cNvPr id="11" name="Rectangle 10"/>
           <p:cNvSpPr/>
           <p:nvPr/>
         </p:nvSpPr>
@@ -6807,7 +6900,7 @@
       </p:sp>
       <p:sp>
         <p:nvSpPr>
-          <p:cNvPr id="11" name="TextBox 10"/>
+          <p:cNvPr id="12" name="TextBox 11"/>
           <p:cNvSpPr txBox="1"/>
           <p:nvPr/>
         </p:nvSpPr>
@@ -6842,14 +6935,14 @@
               <a:rPr>
                 <a:latin typeface="Inter"/>
               </a:rPr>
-              <a:t>Sources: none cited</a:t>
+              <a:t>Sources: S1</a:t>
             </a:r>
           </a:p>
         </p:txBody>
       </p:sp>
       <p:sp>
         <p:nvSpPr>
-          <p:cNvPr id="12" name="TextBox 11"/>
+          <p:cNvPr id="13" name="TextBox 12"/>
           <p:cNvSpPr txBox="1"/>
           <p:nvPr/>
         </p:nvSpPr>
@@ -6884,14 +6977,14 @@
               <a:rPr>
                 <a:latin typeface="Inter"/>
               </a:rPr>
-              <a:t>TEST DATA — fictional portfolio for rendering tests only · Data as of 2026-06-30</a:t>
+              <a:t>Confidential — Investment Committee · Data as of 2026-06-30</a:t>
             </a:r>
           </a:p>
         </p:txBody>
       </p:sp>
       <p:sp>
         <p:nvSpPr>
-          <p:cNvPr id="13" name="TextBox 12"/>
+          <p:cNvPr id="14" name="TextBox 13"/>
           <p:cNvSpPr txBox="1"/>
           <p:nvPr/>
         </p:nvSpPr>
@@ -7007,7 +7100,7 @@
         <p:spPr>
           <a:xfrm>
             <a:off x="640080" y="329184"/>
-            <a:ext cx="9875520" cy="182880"/>
+            <a:ext cx="5303520" cy="182880"/>
           </a:xfrm>
           <a:prstGeom prst="rect">
             <a:avLst/>
@@ -7048,6 +7141,48 @@
         </p:nvSpPr>
         <p:spPr>
           <a:xfrm>
+            <a:off x="5897880" y="310896"/>
+            <a:ext cx="4800600" cy="256032"/>
+          </a:xfrm>
+          <a:prstGeom prst="rect">
+            <a:avLst/>
+          </a:prstGeom>
+          <a:noFill/>
+        </p:spPr>
+        <p:txBody>
+          <a:bodyPr wrap="none" lIns="9144" rIns="9144" tIns="9144" bIns="9144" anchor="t">
+            <a:spAutoFit/>
+          </a:bodyPr>
+          <a:lstStyle/>
+          <a:p>
+            <a:pPr algn="r">
+              <a:spcAft>
+                <a:spcPts val="0"/>
+              </a:spcAft>
+              <a:defRPr sz="680" b="1">
+                <a:solidFill>
+                  <a:srgbClr val="4F6B00"/>
+                </a:solidFill>
+                <a:latin typeface="Inter"/>
+              </a:defRPr>
+            </a:pPr>
+            <a:r>
+              <a:rPr>
+                <a:latin typeface="Inter"/>
+              </a:rPr>
+              <a:t>Illustrative, Gradient Maintained — demo data, not the client's holdings or managers</a:t>
+            </a:r>
+          </a:p>
+        </p:txBody>
+      </p:sp>
+      <p:sp>
+        <p:nvSpPr>
+          <p:cNvPr id="5" name="TextBox 4"/>
+          <p:cNvSpPr txBox="1"/>
+          <p:nvPr/>
+        </p:nvSpPr>
+        <p:spPr>
+          <a:xfrm>
             <a:off x="640080" y="566928"/>
             <a:ext cx="10058400" cy="530352"/>
           </a:xfrm>
@@ -7084,7 +7219,7 @@
       </p:sp>
       <p:sp>
         <p:nvSpPr>
-          <p:cNvPr id="5" name="Rectangle 4"/>
+          <p:cNvPr id="6" name="Rectangle 5"/>
           <p:cNvSpPr/>
           <p:nvPr/>
         </p:nvSpPr>
@@ -7133,7 +7268,7 @@
       </p:sp>
       <p:sp>
         <p:nvSpPr>
-          <p:cNvPr id="6" name="Rectangle 5"/>
+          <p:cNvPr id="7" name="Rectangle 6"/>
           <p:cNvSpPr/>
           <p:nvPr/>
         </p:nvSpPr>
@@ -7182,7 +7317,7 @@
       </p:sp>
       <p:sp>
         <p:nvSpPr>
-          <p:cNvPr id="7" name="TextBox 6"/>
+          <p:cNvPr id="8" name="TextBox 7"/>
           <p:cNvSpPr txBox="1"/>
           <p:nvPr/>
         </p:nvSpPr>
@@ -7224,7 +7359,7 @@
       </p:sp>
       <p:sp>
         <p:nvSpPr>
-          <p:cNvPr id="8" name="TextBox 7"/>
+          <p:cNvPr id="9" name="TextBox 8"/>
           <p:cNvSpPr txBox="1"/>
           <p:nvPr/>
         </p:nvSpPr>
@@ -7266,7 +7401,7 @@
       </p:sp>
       <p:graphicFrame>
         <p:nvGraphicFramePr>
-          <p:cNvPr id="9" name="Table 8"/>
+          <p:cNvPr id="10" name="Table 9"/>
           <p:cNvGraphicFramePr>
             <a:graphicFrameLocks noGrp="1"/>
           </p:cNvGraphicFramePr>
@@ -8116,7 +8251,7 @@
       </p:graphicFrame>
       <p:sp>
         <p:nvSpPr>
-          <p:cNvPr id="10" name="Rectangle 9"/>
+          <p:cNvPr id="11" name="Rectangle 10"/>
           <p:cNvSpPr/>
           <p:nvPr/>
         </p:nvSpPr>
@@ -8165,7 +8300,7 @@
       </p:sp>
       <p:sp>
         <p:nvSpPr>
-          <p:cNvPr id="11" name="Rectangle 10"/>
+          <p:cNvPr id="12" name="Rectangle 11"/>
           <p:cNvSpPr/>
           <p:nvPr/>
         </p:nvSpPr>
@@ -8214,7 +8349,7 @@
       </p:sp>
       <p:sp>
         <p:nvSpPr>
-          <p:cNvPr id="12" name="TextBox 11"/>
+          <p:cNvPr id="13" name="TextBox 12"/>
           <p:cNvSpPr txBox="1"/>
           <p:nvPr/>
         </p:nvSpPr>
@@ -8256,7 +8391,7 @@
       </p:sp>
       <p:sp>
         <p:nvSpPr>
-          <p:cNvPr id="13" name="TextBox 12"/>
+          <p:cNvPr id="14" name="TextBox 13"/>
           <p:cNvSpPr txBox="1"/>
           <p:nvPr/>
         </p:nvSpPr>
@@ -8298,7 +8433,7 @@
       </p:sp>
       <p:sp>
         <p:nvSpPr>
-          <p:cNvPr id="14" name="TextBox 13"/>
+          <p:cNvPr id="15" name="TextBox 14"/>
           <p:cNvSpPr txBox="1"/>
           <p:nvPr/>
         </p:nvSpPr>
@@ -8333,14 +8468,14 @@
               <a:rPr>
                 <a:latin typeface="Inter"/>
               </a:rPr>
-              <a:t>Targets are a committee proposal from the fictional mandate and returned policy headroom; they are not changes saved to GradientCIO [S3][S7].</a:t>
+              <a:t>Targets are a committee proposal from the illustrative mandate and returned policy headroom; they are not changes saved to GradientCIO [S3][S7].</a:t>
             </a:r>
           </a:p>
         </p:txBody>
       </p:sp>
       <p:sp>
         <p:nvSpPr>
-          <p:cNvPr id="15" name="Rectangle 14"/>
+          <p:cNvPr id="16" name="Rectangle 15"/>
           <p:cNvSpPr/>
           <p:nvPr/>
         </p:nvSpPr>
@@ -8389,7 +8524,7 @@
       </p:sp>
       <p:sp>
         <p:nvSpPr>
-          <p:cNvPr id="16" name="TextBox 15"/>
+          <p:cNvPr id="17" name="TextBox 16"/>
           <p:cNvSpPr txBox="1"/>
           <p:nvPr/>
         </p:nvSpPr>
@@ -8431,7 +8566,7 @@
       </p:sp>
       <p:sp>
         <p:nvSpPr>
-          <p:cNvPr id="17" name="TextBox 16"/>
+          <p:cNvPr id="18" name="TextBox 17"/>
           <p:cNvSpPr txBox="1"/>
           <p:nvPr/>
         </p:nvSpPr>
@@ -8466,14 +8601,14 @@
               <a:rPr>
                 <a:latin typeface="Inter"/>
               </a:rPr>
-              <a:t>TEST DATA — fictional portfolio for rendering tests only · Data as of 2026-06-30</a:t>
+              <a:t>Confidential — Investment Committee · Data as of 2026-06-30</a:t>
             </a:r>
           </a:p>
         </p:txBody>
       </p:sp>
       <p:sp>
         <p:nvSpPr>
-          <p:cNvPr id="18" name="TextBox 17"/>
+          <p:cNvPr id="19" name="TextBox 18"/>
           <p:cNvSpPr txBox="1"/>
           <p:nvPr/>
         </p:nvSpPr>
@@ -8589,7 +8724,7 @@
         <p:spPr>
           <a:xfrm>
             <a:off x="640080" y="329184"/>
-            <a:ext cx="9875520" cy="182880"/>
+            <a:ext cx="5303520" cy="182880"/>
           </a:xfrm>
           <a:prstGeom prst="rect">
             <a:avLst/>
@@ -8630,6 +8765,48 @@
         </p:nvSpPr>
         <p:spPr>
           <a:xfrm>
+            <a:off x="5897880" y="310896"/>
+            <a:ext cx="4800600" cy="256032"/>
+          </a:xfrm>
+          <a:prstGeom prst="rect">
+            <a:avLst/>
+          </a:prstGeom>
+          <a:noFill/>
+        </p:spPr>
+        <p:txBody>
+          <a:bodyPr wrap="none" lIns="9144" rIns="9144" tIns="9144" bIns="9144" anchor="t">
+            <a:spAutoFit/>
+          </a:bodyPr>
+          <a:lstStyle/>
+          <a:p>
+            <a:pPr algn="r">
+              <a:spcAft>
+                <a:spcPts val="0"/>
+              </a:spcAft>
+              <a:defRPr sz="680" b="1">
+                <a:solidFill>
+                  <a:srgbClr val="4F6B00"/>
+                </a:solidFill>
+                <a:latin typeface="Inter"/>
+              </a:defRPr>
+            </a:pPr>
+            <a:r>
+              <a:rPr>
+                <a:latin typeface="Inter"/>
+              </a:rPr>
+              <a:t>Illustrative, Gradient Maintained — demo data, not the client's holdings or managers</a:t>
+            </a:r>
+          </a:p>
+        </p:txBody>
+      </p:sp>
+      <p:sp>
+        <p:nvSpPr>
+          <p:cNvPr id="5" name="TextBox 4"/>
+          <p:cNvSpPr txBox="1"/>
+          <p:nvPr/>
+        </p:nvSpPr>
+        <p:spPr>
+          <a:xfrm>
             <a:off x="640080" y="566928"/>
             <a:ext cx="10058400" cy="530352"/>
           </a:xfrm>
@@ -8666,7 +8843,7 @@
       </p:sp>
       <p:sp>
         <p:nvSpPr>
-          <p:cNvPr id="5" name="Rectangle 4"/>
+          <p:cNvPr id="6" name="Rectangle 5"/>
           <p:cNvSpPr/>
           <p:nvPr/>
         </p:nvSpPr>
@@ -8715,7 +8892,7 @@
       </p:sp>
       <p:sp>
         <p:nvSpPr>
-          <p:cNvPr id="6" name="Rectangle 5"/>
+          <p:cNvPr id="7" name="Rectangle 6"/>
           <p:cNvSpPr/>
           <p:nvPr/>
         </p:nvSpPr>
@@ -8764,7 +8941,7 @@
       </p:sp>
       <p:sp>
         <p:nvSpPr>
-          <p:cNvPr id="7" name="TextBox 6"/>
+          <p:cNvPr id="8" name="TextBox 7"/>
           <p:cNvSpPr txBox="1"/>
           <p:nvPr/>
         </p:nvSpPr>
@@ -8806,7 +8983,7 @@
       </p:sp>
       <p:sp>
         <p:nvSpPr>
-          <p:cNvPr id="8" name="TextBox 7"/>
+          <p:cNvPr id="9" name="TextBox 8"/>
           <p:cNvSpPr txBox="1"/>
           <p:nvPr/>
         </p:nvSpPr>
@@ -8848,7 +9025,7 @@
       </p:sp>
       <p:graphicFrame>
         <p:nvGraphicFramePr>
-          <p:cNvPr id="9" name="Chart 8"/>
+          <p:cNvPr id="10" name="Chart 9"/>
           <p:cNvGraphicFramePr>
             <a:graphicFrameLocks noGrp="1"/>
           </p:cNvGraphicFramePr>
@@ -8866,7 +9043,7 @@
       </p:graphicFrame>
       <p:sp>
         <p:nvSpPr>
-          <p:cNvPr id="10" name="Rectangle 9"/>
+          <p:cNvPr id="11" name="Rectangle 10"/>
           <p:cNvSpPr/>
           <p:nvPr/>
         </p:nvSpPr>
@@ -8915,7 +9092,7 @@
       </p:sp>
       <p:sp>
         <p:nvSpPr>
-          <p:cNvPr id="11" name="TextBox 10"/>
+          <p:cNvPr id="12" name="TextBox 11"/>
           <p:cNvSpPr txBox="1"/>
           <p:nvPr/>
         </p:nvSpPr>
@@ -8957,7 +9134,7 @@
       </p:sp>
       <p:sp>
         <p:nvSpPr>
-          <p:cNvPr id="12" name="TextBox 11"/>
+          <p:cNvPr id="13" name="TextBox 12"/>
           <p:cNvSpPr txBox="1"/>
           <p:nvPr/>
         </p:nvSpPr>
@@ -8992,14 +9169,14 @@
               <a:rPr>
                 <a:latin typeface="Inter"/>
               </a:rPr>
-              <a:t>TEST DATA — fictional portfolio for rendering tests only · Data as of 2026-06-30</a:t>
+              <a:t>Confidential — Investment Committee · Data as of 2026-06-30</a:t>
             </a:r>
           </a:p>
         </p:txBody>
       </p:sp>
       <p:sp>
         <p:nvSpPr>
-          <p:cNvPr id="13" name="TextBox 12"/>
+          <p:cNvPr id="14" name="TextBox 13"/>
           <p:cNvSpPr txBox="1"/>
           <p:nvPr/>
         </p:nvSpPr>
@@ -9115,7 +9292,7 @@
         <p:spPr>
           <a:xfrm>
             <a:off x="640080" y="329184"/>
-            <a:ext cx="9875520" cy="182880"/>
+            <a:ext cx="5303520" cy="182880"/>
           </a:xfrm>
           <a:prstGeom prst="rect">
             <a:avLst/>
@@ -9156,6 +9333,48 @@
         </p:nvSpPr>
         <p:spPr>
           <a:xfrm>
+            <a:off x="5897880" y="310896"/>
+            <a:ext cx="4800600" cy="256032"/>
+          </a:xfrm>
+          <a:prstGeom prst="rect">
+            <a:avLst/>
+          </a:prstGeom>
+          <a:noFill/>
+        </p:spPr>
+        <p:txBody>
+          <a:bodyPr wrap="none" lIns="9144" rIns="9144" tIns="9144" bIns="9144" anchor="t">
+            <a:spAutoFit/>
+          </a:bodyPr>
+          <a:lstStyle/>
+          <a:p>
+            <a:pPr algn="r">
+              <a:spcAft>
+                <a:spcPts val="0"/>
+              </a:spcAft>
+              <a:defRPr sz="680" b="1">
+                <a:solidFill>
+                  <a:srgbClr val="4F6B00"/>
+                </a:solidFill>
+                <a:latin typeface="Inter"/>
+              </a:defRPr>
+            </a:pPr>
+            <a:r>
+              <a:rPr>
+                <a:latin typeface="Inter"/>
+              </a:rPr>
+              <a:t>Illustrative, Gradient Maintained — demo data, not the client's holdings or managers</a:t>
+            </a:r>
+          </a:p>
+        </p:txBody>
+      </p:sp>
+      <p:sp>
+        <p:nvSpPr>
+          <p:cNvPr id="5" name="TextBox 4"/>
+          <p:cNvSpPr txBox="1"/>
+          <p:nvPr/>
+        </p:nvSpPr>
+        <p:spPr>
+          <a:xfrm>
             <a:off x="640080" y="566928"/>
             <a:ext cx="10058400" cy="530352"/>
           </a:xfrm>
@@ -9192,7 +9411,7 @@
       </p:sp>
       <p:sp>
         <p:nvSpPr>
-          <p:cNvPr id="5" name="Rectangle 4"/>
+          <p:cNvPr id="6" name="Rectangle 5"/>
           <p:cNvSpPr/>
           <p:nvPr/>
         </p:nvSpPr>
@@ -9241,7 +9460,7 @@
       </p:sp>
       <p:sp>
         <p:nvSpPr>
-          <p:cNvPr id="6" name="Rectangle 5"/>
+          <p:cNvPr id="7" name="Rectangle 6"/>
           <p:cNvSpPr/>
           <p:nvPr/>
         </p:nvSpPr>
@@ -9290,7 +9509,7 @@
       </p:sp>
       <p:sp>
         <p:nvSpPr>
-          <p:cNvPr id="7" name="TextBox 6"/>
+          <p:cNvPr id="8" name="TextBox 7"/>
           <p:cNvSpPr txBox="1"/>
           <p:nvPr/>
         </p:nvSpPr>
@@ -9332,7 +9551,7 @@
       </p:sp>
       <p:sp>
         <p:nvSpPr>
-          <p:cNvPr id="8" name="TextBox 7"/>
+          <p:cNvPr id="9" name="TextBox 8"/>
           <p:cNvSpPr txBox="1"/>
           <p:nvPr/>
         </p:nvSpPr>
@@ -9374,7 +9593,7 @@
       </p:sp>
       <p:graphicFrame>
         <p:nvGraphicFramePr>
-          <p:cNvPr id="9" name="Table 8"/>
+          <p:cNvPr id="10" name="Table 9"/>
           <p:cNvGraphicFramePr>
             <a:graphicFrameLocks noGrp="1"/>
           </p:cNvGraphicFramePr>
@@ -9814,7 +10033,7 @@
       </p:graphicFrame>
       <p:sp>
         <p:nvSpPr>
-          <p:cNvPr id="10" name="TextBox 9"/>
+          <p:cNvPr id="11" name="TextBox 10"/>
           <p:cNvSpPr txBox="1"/>
           <p:nvPr/>
         </p:nvSpPr>
@@ -9856,7 +10075,7 @@
       </p:sp>
       <p:graphicFrame>
         <p:nvGraphicFramePr>
-          <p:cNvPr id="11" name="Table 10"/>
+          <p:cNvPr id="12" name="Table 11"/>
           <p:cNvGraphicFramePr>
             <a:graphicFrameLocks noGrp="1"/>
           </p:cNvGraphicFramePr>
@@ -10215,7 +10434,7 @@
       </p:graphicFrame>
       <p:sp>
         <p:nvSpPr>
-          <p:cNvPr id="12" name="TextBox 11"/>
+          <p:cNvPr id="13" name="TextBox 12"/>
           <p:cNvSpPr txBox="1"/>
           <p:nvPr/>
         </p:nvSpPr>
@@ -10257,7 +10476,7 @@
       </p:sp>
       <p:sp>
         <p:nvSpPr>
-          <p:cNvPr id="13" name="Rectangle 12"/>
+          <p:cNvPr id="14" name="Rectangle 13"/>
           <p:cNvSpPr/>
           <p:nvPr/>
         </p:nvSpPr>
@@ -10306,7 +10525,7 @@
       </p:sp>
       <p:sp>
         <p:nvSpPr>
-          <p:cNvPr id="14" name="TextBox 13"/>
+          <p:cNvPr id="15" name="TextBox 14"/>
           <p:cNvSpPr txBox="1"/>
           <p:nvPr/>
         </p:nvSpPr>
@@ -10348,7 +10567,7 @@
       </p:sp>
       <p:sp>
         <p:nvSpPr>
-          <p:cNvPr id="15" name="TextBox 14"/>
+          <p:cNvPr id="16" name="TextBox 15"/>
           <p:cNvSpPr txBox="1"/>
           <p:nvPr/>
         </p:nvSpPr>
@@ -10383,14 +10602,14 @@
               <a:rPr>
                 <a:latin typeface="Inter"/>
               </a:rPr>
-              <a:t>TEST DATA — fictional portfolio for rendering tests only · Data as of 2026-06-30</a:t>
+              <a:t>Confidential — Investment Committee · Data as of 2026-06-30</a:t>
             </a:r>
           </a:p>
         </p:txBody>
       </p:sp>
       <p:sp>
         <p:nvSpPr>
-          <p:cNvPr id="16" name="TextBox 15"/>
+          <p:cNvPr id="17" name="TextBox 16"/>
           <p:cNvSpPr txBox="1"/>
           <p:nvPr/>
         </p:nvSpPr>
@@ -10506,7 +10725,7 @@
         <p:spPr>
           <a:xfrm>
             <a:off x="640080" y="329184"/>
-            <a:ext cx="9875520" cy="182880"/>
+            <a:ext cx="5303520" cy="182880"/>
           </a:xfrm>
           <a:prstGeom prst="rect">
             <a:avLst/>
@@ -10547,6 +10766,48 @@
         </p:nvSpPr>
         <p:spPr>
           <a:xfrm>
+            <a:off x="5897880" y="310896"/>
+            <a:ext cx="4800600" cy="256032"/>
+          </a:xfrm>
+          <a:prstGeom prst="rect">
+            <a:avLst/>
+          </a:prstGeom>
+          <a:noFill/>
+        </p:spPr>
+        <p:txBody>
+          <a:bodyPr wrap="none" lIns="9144" rIns="9144" tIns="9144" bIns="9144" anchor="t">
+            <a:spAutoFit/>
+          </a:bodyPr>
+          <a:lstStyle/>
+          <a:p>
+            <a:pPr algn="r">
+              <a:spcAft>
+                <a:spcPts val="0"/>
+              </a:spcAft>
+              <a:defRPr sz="680" b="1">
+                <a:solidFill>
+                  <a:srgbClr val="4F6B00"/>
+                </a:solidFill>
+                <a:latin typeface="Inter"/>
+              </a:defRPr>
+            </a:pPr>
+            <a:r>
+              <a:rPr>
+                <a:latin typeface="Inter"/>
+              </a:rPr>
+              <a:t>Illustrative, Gradient Maintained — demo data, not the client's holdings or managers</a:t>
+            </a:r>
+          </a:p>
+        </p:txBody>
+      </p:sp>
+      <p:sp>
+        <p:nvSpPr>
+          <p:cNvPr id="5" name="TextBox 4"/>
+          <p:cNvSpPr txBox="1"/>
+          <p:nvPr/>
+        </p:nvSpPr>
+        <p:spPr>
+          <a:xfrm>
             <a:off x="640080" y="566928"/>
             <a:ext cx="10058400" cy="530352"/>
           </a:xfrm>
@@ -10583,7 +10844,7 @@
       </p:sp>
       <p:sp>
         <p:nvSpPr>
-          <p:cNvPr id="5" name="Rectangle 4"/>
+          <p:cNvPr id="6" name="Rectangle 5"/>
           <p:cNvSpPr/>
           <p:nvPr/>
         </p:nvSpPr>
@@ -10632,7 +10893,7 @@
       </p:sp>
       <p:sp>
         <p:nvSpPr>
-          <p:cNvPr id="6" name="Rectangle 5"/>
+          <p:cNvPr id="7" name="Rectangle 6"/>
           <p:cNvSpPr/>
           <p:nvPr/>
         </p:nvSpPr>
@@ -10681,7 +10942,7 @@
       </p:sp>
       <p:sp>
         <p:nvSpPr>
-          <p:cNvPr id="7" name="TextBox 6"/>
+          <p:cNvPr id="8" name="TextBox 7"/>
           <p:cNvSpPr txBox="1"/>
           <p:nvPr/>
         </p:nvSpPr>
@@ -10723,7 +10984,7 @@
       </p:sp>
       <p:sp>
         <p:nvSpPr>
-          <p:cNvPr id="8" name="TextBox 7"/>
+          <p:cNvPr id="9" name="TextBox 8"/>
           <p:cNvSpPr txBox="1"/>
           <p:nvPr/>
         </p:nvSpPr>
@@ -10765,7 +11026,7 @@
       </p:sp>
       <p:graphicFrame>
         <p:nvGraphicFramePr>
-          <p:cNvPr id="9" name="Table 8"/>
+          <p:cNvPr id="10" name="Table 9"/>
           <p:cNvGraphicFramePr>
             <a:graphicFrameLocks noGrp="1"/>
           </p:cNvGraphicFramePr>
@@ -11015,7 +11276,7 @@
       </p:graphicFrame>
       <p:sp>
         <p:nvSpPr>
-          <p:cNvPr id="10" name="Rectangle 9"/>
+          <p:cNvPr id="11" name="Rectangle 10"/>
           <p:cNvSpPr/>
           <p:nvPr/>
         </p:nvSpPr>
@@ -11064,7 +11325,7 @@
       </p:sp>
       <p:sp>
         <p:nvSpPr>
-          <p:cNvPr id="11" name="TextBox 10"/>
+          <p:cNvPr id="12" name="TextBox 11"/>
           <p:cNvSpPr txBox="1"/>
           <p:nvPr/>
         </p:nvSpPr>
@@ -11106,7 +11367,7 @@
       </p:sp>
       <p:sp>
         <p:nvSpPr>
-          <p:cNvPr id="12" name="TextBox 11"/>
+          <p:cNvPr id="13" name="TextBox 12"/>
           <p:cNvSpPr txBox="1"/>
           <p:nvPr/>
         </p:nvSpPr>
@@ -11141,14 +11402,14 @@
               <a:rPr>
                 <a:latin typeface="Inter"/>
               </a:rPr>
-              <a:t>TEST DATA — fictional portfolio for rendering tests only · Data as of 2026-06-30</a:t>
+              <a:t>Confidential — Investment Committee · Data as of 2026-06-30</a:t>
             </a:r>
           </a:p>
         </p:txBody>
       </p:sp>
       <p:sp>
         <p:nvSpPr>
-          <p:cNvPr id="13" name="TextBox 12"/>
+          <p:cNvPr id="14" name="TextBox 13"/>
           <p:cNvSpPr txBox="1"/>
           <p:nvPr/>
         </p:nvSpPr>
@@ -11264,7 +11525,7 @@
         <p:spPr>
           <a:xfrm>
             <a:off x="640080" y="329184"/>
-            <a:ext cx="9875520" cy="182880"/>
+            <a:ext cx="5303520" cy="182880"/>
           </a:xfrm>
           <a:prstGeom prst="rect">
             <a:avLst/>
@@ -11305,6 +11566,48 @@
         </p:nvSpPr>
         <p:spPr>
           <a:xfrm>
+            <a:off x="5897880" y="310896"/>
+            <a:ext cx="4800600" cy="256032"/>
+          </a:xfrm>
+          <a:prstGeom prst="rect">
+            <a:avLst/>
+          </a:prstGeom>
+          <a:noFill/>
+        </p:spPr>
+        <p:txBody>
+          <a:bodyPr wrap="none" lIns="9144" rIns="9144" tIns="9144" bIns="9144" anchor="t">
+            <a:spAutoFit/>
+          </a:bodyPr>
+          <a:lstStyle/>
+          <a:p>
+            <a:pPr algn="r">
+              <a:spcAft>
+                <a:spcPts val="0"/>
+              </a:spcAft>
+              <a:defRPr sz="680" b="1">
+                <a:solidFill>
+                  <a:srgbClr val="4F6B00"/>
+                </a:solidFill>
+                <a:latin typeface="Inter"/>
+              </a:defRPr>
+            </a:pPr>
+            <a:r>
+              <a:rPr>
+                <a:latin typeface="Inter"/>
+              </a:rPr>
+              <a:t>Illustrative, Gradient Maintained — demo data, not the client's holdings or managers</a:t>
+            </a:r>
+          </a:p>
+        </p:txBody>
+      </p:sp>
+      <p:sp>
+        <p:nvSpPr>
+          <p:cNvPr id="5" name="TextBox 4"/>
+          <p:cNvSpPr txBox="1"/>
+          <p:nvPr/>
+        </p:nvSpPr>
+        <p:spPr>
+          <a:xfrm>
             <a:off x="640080" y="566928"/>
             <a:ext cx="10058400" cy="530352"/>
           </a:xfrm>
@@ -11341,7 +11644,7 @@
       </p:sp>
       <p:sp>
         <p:nvSpPr>
-          <p:cNvPr id="5" name="Rectangle 4"/>
+          <p:cNvPr id="6" name="Rectangle 5"/>
           <p:cNvSpPr/>
           <p:nvPr/>
         </p:nvSpPr>
@@ -11390,7 +11693,7 @@
       </p:sp>
       <p:sp>
         <p:nvSpPr>
-          <p:cNvPr id="6" name="Rectangle 5"/>
+          <p:cNvPr id="7" name="Rectangle 6"/>
           <p:cNvSpPr/>
           <p:nvPr/>
         </p:nvSpPr>
@@ -11439,7 +11742,7 @@
       </p:sp>
       <p:sp>
         <p:nvSpPr>
-          <p:cNvPr id="7" name="TextBox 6"/>
+          <p:cNvPr id="8" name="TextBox 7"/>
           <p:cNvSpPr txBox="1"/>
           <p:nvPr/>
         </p:nvSpPr>
@@ -11481,7 +11784,7 @@
       </p:sp>
       <p:sp>
         <p:nvSpPr>
-          <p:cNvPr id="8" name="TextBox 7"/>
+          <p:cNvPr id="9" name="TextBox 8"/>
           <p:cNvSpPr txBox="1"/>
           <p:nvPr/>
         </p:nvSpPr>
@@ -11523,7 +11826,7 @@
       </p:sp>
       <p:graphicFrame>
         <p:nvGraphicFramePr>
-          <p:cNvPr id="9" name="Chart 8"/>
+          <p:cNvPr id="10" name="Chart 9"/>
           <p:cNvGraphicFramePr>
             <a:graphicFrameLocks noGrp="1"/>
           </p:cNvGraphicFramePr>
@@ -11541,7 +11844,7 @@
       </p:graphicFrame>
       <p:sp>
         <p:nvSpPr>
-          <p:cNvPr id="10" name="Rectangle 9"/>
+          <p:cNvPr id="11" name="Rectangle 10"/>
           <p:cNvSpPr/>
           <p:nvPr/>
         </p:nvSpPr>
@@ -11590,7 +11893,7 @@
       </p:sp>
       <p:sp>
         <p:nvSpPr>
-          <p:cNvPr id="11" name="TextBox 10"/>
+          <p:cNvPr id="12" name="TextBox 11"/>
           <p:cNvSpPr txBox="1"/>
           <p:nvPr/>
         </p:nvSpPr>
@@ -11632,7 +11935,7 @@
       </p:sp>
       <p:sp>
         <p:nvSpPr>
-          <p:cNvPr id="12" name="TextBox 11"/>
+          <p:cNvPr id="13" name="TextBox 12"/>
           <p:cNvSpPr txBox="1"/>
           <p:nvPr/>
         </p:nvSpPr>
@@ -11667,14 +11970,14 @@
               <a:rPr>
                 <a:latin typeface="Inter"/>
               </a:rPr>
-              <a:t>TEST DATA — fictional portfolio for rendering tests only · Data as of 2026-06-30</a:t>
+              <a:t>Confidential — Investment Committee · Data as of 2026-06-30</a:t>
             </a:r>
           </a:p>
         </p:txBody>
       </p:sp>
       <p:sp>
         <p:nvSpPr>
-          <p:cNvPr id="13" name="TextBox 12"/>
+          <p:cNvPr id="14" name="TextBox 13"/>
           <p:cNvSpPr txBox="1"/>
           <p:nvPr/>
         </p:nvSpPr>
@@ -11790,7 +12093,7 @@
         <p:spPr>
           <a:xfrm>
             <a:off x="640080" y="329184"/>
-            <a:ext cx="9875520" cy="182880"/>
+            <a:ext cx="5303520" cy="182880"/>
           </a:xfrm>
           <a:prstGeom prst="rect">
             <a:avLst/>
@@ -11831,6 +12134,48 @@
         </p:nvSpPr>
         <p:spPr>
           <a:xfrm>
+            <a:off x="5897880" y="310896"/>
+            <a:ext cx="4800600" cy="256032"/>
+          </a:xfrm>
+          <a:prstGeom prst="rect">
+            <a:avLst/>
+          </a:prstGeom>
+          <a:noFill/>
+        </p:spPr>
+        <p:txBody>
+          <a:bodyPr wrap="none" lIns="9144" rIns="9144" tIns="9144" bIns="9144" anchor="t">
+            <a:spAutoFit/>
+          </a:bodyPr>
+          <a:lstStyle/>
+          <a:p>
+            <a:pPr algn="r">
+              <a:spcAft>
+                <a:spcPts val="0"/>
+              </a:spcAft>
+              <a:defRPr sz="680" b="1">
+                <a:solidFill>
+                  <a:srgbClr val="4F6B00"/>
+                </a:solidFill>
+                <a:latin typeface="Inter"/>
+              </a:defRPr>
+            </a:pPr>
+            <a:r>
+              <a:rPr>
+                <a:latin typeface="Inter"/>
+              </a:rPr>
+              <a:t>Illustrative, Gradient Maintained — demo data, not the client's holdings or managers</a:t>
+            </a:r>
+          </a:p>
+        </p:txBody>
+      </p:sp>
+      <p:sp>
+        <p:nvSpPr>
+          <p:cNvPr id="5" name="TextBox 4"/>
+          <p:cNvSpPr txBox="1"/>
+          <p:nvPr/>
+        </p:nvSpPr>
+        <p:spPr>
+          <a:xfrm>
             <a:off x="640080" y="566928"/>
             <a:ext cx="10058400" cy="530352"/>
           </a:xfrm>
@@ -11867,7 +12212,7 @@
       </p:sp>
       <p:sp>
         <p:nvSpPr>
-          <p:cNvPr id="5" name="Rectangle 4"/>
+          <p:cNvPr id="6" name="Rectangle 5"/>
           <p:cNvSpPr/>
           <p:nvPr/>
         </p:nvSpPr>
@@ -11916,7 +12261,7 @@
       </p:sp>
       <p:sp>
         <p:nvSpPr>
-          <p:cNvPr id="6" name="Rectangle 5"/>
+          <p:cNvPr id="7" name="Rectangle 6"/>
           <p:cNvSpPr/>
           <p:nvPr/>
         </p:nvSpPr>
@@ -11965,7 +12310,7 @@
       </p:sp>
       <p:sp>
         <p:nvSpPr>
-          <p:cNvPr id="7" name="TextBox 6"/>
+          <p:cNvPr id="8" name="TextBox 7"/>
           <p:cNvSpPr txBox="1"/>
           <p:nvPr/>
         </p:nvSpPr>
@@ -12007,7 +12352,7 @@
       </p:sp>
       <p:graphicFrame>
         <p:nvGraphicFramePr>
-          <p:cNvPr id="8" name="Table 7"/>
+          <p:cNvPr id="9" name="Table 8"/>
           <p:cNvGraphicFramePr>
             <a:graphicFrameLocks noGrp="1"/>
           </p:cNvGraphicFramePr>
@@ -12072,7 +12417,7 @@
                         <a:rPr>
                           <a:latin typeface="Inter"/>
                         </a:rPr>
-                        <a:t>2026 Strategic CMA (TEST) [S5]</a:t>
+                        <a:t>2026 Strategic CMA [S5]</a:t>
                       </a:r>
                     </a:p>
                   </a:txBody>
@@ -12313,7 +12658,7 @@
       </p:graphicFrame>
       <p:sp>
         <p:nvSpPr>
-          <p:cNvPr id="9" name="Rectangle 8"/>
+          <p:cNvPr id="10" name="Rectangle 9"/>
           <p:cNvSpPr/>
           <p:nvPr/>
         </p:nvSpPr>
@@ -12362,7 +12707,7 @@
       </p:sp>
       <p:sp>
         <p:nvSpPr>
-          <p:cNvPr id="10" name="TextBox 9"/>
+          <p:cNvPr id="11" name="TextBox 10"/>
           <p:cNvSpPr txBox="1"/>
           <p:nvPr/>
         </p:nvSpPr>
@@ -12404,7 +12749,7 @@
       </p:sp>
       <p:sp>
         <p:nvSpPr>
-          <p:cNvPr id="11" name="TextBox 10"/>
+          <p:cNvPr id="12" name="TextBox 11"/>
           <p:cNvSpPr txBox="1"/>
           <p:nvPr/>
         </p:nvSpPr>
@@ -12439,14 +12784,14 @@
               <a:rPr>
                 <a:latin typeface="Inter"/>
               </a:rPr>
-              <a:t>TEST DATA — fictional portfolio for rendering tests only · Data as of 2026-06-30</a:t>
+              <a:t>Confidential — Investment Committee · Data as of 2026-06-30</a:t>
             </a:r>
           </a:p>
         </p:txBody>
       </p:sp>
       <p:sp>
         <p:nvSpPr>
-          <p:cNvPr id="12" name="TextBox 11"/>
+          <p:cNvPr id="13" name="TextBox 12"/>
           <p:cNvSpPr txBox="1"/>
           <p:nvPr/>
         </p:nvSpPr>
@@ -12562,7 +12907,7 @@
         <p:spPr>
           <a:xfrm>
             <a:off x="640080" y="329184"/>
-            <a:ext cx="9875520" cy="182880"/>
+            <a:ext cx="5303520" cy="182880"/>
           </a:xfrm>
           <a:prstGeom prst="rect">
             <a:avLst/>
@@ -12603,6 +12948,48 @@
         </p:nvSpPr>
         <p:spPr>
           <a:xfrm>
+            <a:off x="5897880" y="310896"/>
+            <a:ext cx="4800600" cy="256032"/>
+          </a:xfrm>
+          <a:prstGeom prst="rect">
+            <a:avLst/>
+          </a:prstGeom>
+          <a:noFill/>
+        </p:spPr>
+        <p:txBody>
+          <a:bodyPr wrap="none" lIns="9144" rIns="9144" tIns="9144" bIns="9144" anchor="t">
+            <a:spAutoFit/>
+          </a:bodyPr>
+          <a:lstStyle/>
+          <a:p>
+            <a:pPr algn="r">
+              <a:spcAft>
+                <a:spcPts val="0"/>
+              </a:spcAft>
+              <a:defRPr sz="680" b="1">
+                <a:solidFill>
+                  <a:srgbClr val="4F6B00"/>
+                </a:solidFill>
+                <a:latin typeface="Inter"/>
+              </a:defRPr>
+            </a:pPr>
+            <a:r>
+              <a:rPr>
+                <a:latin typeface="Inter"/>
+              </a:rPr>
+              <a:t>Illustrative, Gradient Maintained — demo data, not the client's holdings or managers</a:t>
+            </a:r>
+          </a:p>
+        </p:txBody>
+      </p:sp>
+      <p:sp>
+        <p:nvSpPr>
+          <p:cNvPr id="5" name="TextBox 4"/>
+          <p:cNvSpPr txBox="1"/>
+          <p:nvPr/>
+        </p:nvSpPr>
+        <p:spPr>
+          <a:xfrm>
             <a:off x="640080" y="566928"/>
             <a:ext cx="10058400" cy="530352"/>
           </a:xfrm>
@@ -12639,7 +13026,7 @@
       </p:sp>
       <p:sp>
         <p:nvSpPr>
-          <p:cNvPr id="5" name="Rectangle 4"/>
+          <p:cNvPr id="6" name="Rectangle 5"/>
           <p:cNvSpPr/>
           <p:nvPr/>
         </p:nvSpPr>
@@ -12688,7 +13075,7 @@
       </p:sp>
       <p:sp>
         <p:nvSpPr>
-          <p:cNvPr id="6" name="Rectangle 5"/>
+          <p:cNvPr id="7" name="Rectangle 6"/>
           <p:cNvSpPr/>
           <p:nvPr/>
         </p:nvSpPr>
@@ -12737,7 +13124,7 @@
       </p:sp>
       <p:sp>
         <p:nvSpPr>
-          <p:cNvPr id="7" name="TextBox 6"/>
+          <p:cNvPr id="8" name="TextBox 7"/>
           <p:cNvSpPr txBox="1"/>
           <p:nvPr/>
         </p:nvSpPr>
@@ -12779,7 +13166,7 @@
       </p:sp>
       <p:sp>
         <p:nvSpPr>
-          <p:cNvPr id="8" name="TextBox 7"/>
+          <p:cNvPr id="9" name="TextBox 8"/>
           <p:cNvSpPr txBox="1"/>
           <p:nvPr/>
         </p:nvSpPr>
@@ -12814,14 +13201,14 @@
               <a:rPr>
                 <a:latin typeface="Inter"/>
               </a:rPr>
-              <a:t>PRIVATE-MARKET FORWARD ASSUMPTIONS (TEST)</a:t>
+              <a:t>PRIVATE-MARKET FORWARD ASSUMPTIONS</a:t>
             </a:r>
           </a:p>
         </p:txBody>
       </p:sp>
       <p:graphicFrame>
         <p:nvGraphicFramePr>
-          <p:cNvPr id="9" name="Table 8"/>
+          <p:cNvPr id="10" name="Table 9"/>
           <p:cNvGraphicFramePr>
             <a:graphicFrameLocks noGrp="1"/>
           </p:cNvGraphicFramePr>
@@ -13180,7 +13567,7 @@
       </p:graphicFrame>
       <p:sp>
         <p:nvSpPr>
-          <p:cNvPr id="10" name="Rectangle 9"/>
+          <p:cNvPr id="11" name="Rectangle 10"/>
           <p:cNvSpPr/>
           <p:nvPr/>
         </p:nvSpPr>
@@ -13229,7 +13616,7 @@
       </p:sp>
       <p:sp>
         <p:nvSpPr>
-          <p:cNvPr id="11" name="TextBox 10"/>
+          <p:cNvPr id="12" name="TextBox 11"/>
           <p:cNvSpPr txBox="1"/>
           <p:nvPr/>
         </p:nvSpPr>
@@ -13264,14 +13651,14 @@
               <a:rPr>
                 <a:latin typeface="Inter"/>
               </a:rPr>
-              <a:t>Sources: none cited</a:t>
+              <a:t>Sources: S1</a:t>
             </a:r>
           </a:p>
         </p:txBody>
       </p:sp>
       <p:sp>
         <p:nvSpPr>
-          <p:cNvPr id="12" name="TextBox 11"/>
+          <p:cNvPr id="13" name="TextBox 12"/>
           <p:cNvSpPr txBox="1"/>
           <p:nvPr/>
         </p:nvSpPr>
@@ -13306,14 +13693,14 @@
               <a:rPr>
                 <a:latin typeface="Inter"/>
               </a:rPr>
-              <a:t>TEST DATA — fictional portfolio for rendering tests only · Data as of 2026-06-30</a:t>
+              <a:t>Confidential — Investment Committee · Data as of 2026-06-30</a:t>
             </a:r>
           </a:p>
         </p:txBody>
       </p:sp>
       <p:sp>
         <p:nvSpPr>
-          <p:cNvPr id="13" name="TextBox 12"/>
+          <p:cNvPr id="14" name="TextBox 13"/>
           <p:cNvSpPr txBox="1"/>
           <p:nvPr/>
         </p:nvSpPr>
@@ -13429,7 +13816,7 @@
         <p:spPr>
           <a:xfrm>
             <a:off x="640080" y="329184"/>
-            <a:ext cx="9875520" cy="182880"/>
+            <a:ext cx="5303520" cy="182880"/>
           </a:xfrm>
           <a:prstGeom prst="rect">
             <a:avLst/>
@@ -13470,6 +13857,48 @@
         </p:nvSpPr>
         <p:spPr>
           <a:xfrm>
+            <a:off x="5897880" y="310896"/>
+            <a:ext cx="4800600" cy="256032"/>
+          </a:xfrm>
+          <a:prstGeom prst="rect">
+            <a:avLst/>
+          </a:prstGeom>
+          <a:noFill/>
+        </p:spPr>
+        <p:txBody>
+          <a:bodyPr wrap="none" lIns="9144" rIns="9144" tIns="9144" bIns="9144" anchor="t">
+            <a:spAutoFit/>
+          </a:bodyPr>
+          <a:lstStyle/>
+          <a:p>
+            <a:pPr algn="r">
+              <a:spcAft>
+                <a:spcPts val="0"/>
+              </a:spcAft>
+              <a:defRPr sz="680" b="1">
+                <a:solidFill>
+                  <a:srgbClr val="4F6B00"/>
+                </a:solidFill>
+                <a:latin typeface="Inter"/>
+              </a:defRPr>
+            </a:pPr>
+            <a:r>
+              <a:rPr>
+                <a:latin typeface="Inter"/>
+              </a:rPr>
+              <a:t>Illustrative, Gradient Maintained — demo data, not the client's holdings or managers</a:t>
+            </a:r>
+          </a:p>
+        </p:txBody>
+      </p:sp>
+      <p:sp>
+        <p:nvSpPr>
+          <p:cNvPr id="5" name="TextBox 4"/>
+          <p:cNvSpPr txBox="1"/>
+          <p:nvPr/>
+        </p:nvSpPr>
+        <p:spPr>
+          <a:xfrm>
             <a:off x="640080" y="566928"/>
             <a:ext cx="10058400" cy="530352"/>
           </a:xfrm>
@@ -13506,7 +13935,7 @@
       </p:sp>
       <p:sp>
         <p:nvSpPr>
-          <p:cNvPr id="5" name="Rectangle 4"/>
+          <p:cNvPr id="6" name="Rectangle 5"/>
           <p:cNvSpPr/>
           <p:nvPr/>
         </p:nvSpPr>
@@ -13555,7 +13984,7 @@
       </p:sp>
       <p:sp>
         <p:nvSpPr>
-          <p:cNvPr id="6" name="Rectangle 5"/>
+          <p:cNvPr id="7" name="Rectangle 6"/>
           <p:cNvSpPr/>
           <p:nvPr/>
         </p:nvSpPr>
@@ -13604,7 +14033,7 @@
       </p:sp>
       <p:sp>
         <p:nvSpPr>
-          <p:cNvPr id="7" name="TextBox 6"/>
+          <p:cNvPr id="8" name="TextBox 7"/>
           <p:cNvSpPr txBox="1"/>
           <p:nvPr/>
         </p:nvSpPr>
@@ -13646,7 +14075,7 @@
       </p:sp>
       <p:sp>
         <p:nvSpPr>
-          <p:cNvPr id="8" name="Rectangle 7"/>
+          <p:cNvPr id="9" name="Rectangle 8"/>
           <p:cNvSpPr/>
           <p:nvPr/>
         </p:nvSpPr>
@@ -13695,7 +14124,7 @@
       </p:sp>
       <p:sp>
         <p:nvSpPr>
-          <p:cNvPr id="9" name="Rectangle 8"/>
+          <p:cNvPr id="10" name="Rectangle 9"/>
           <p:cNvSpPr/>
           <p:nvPr/>
         </p:nvSpPr>
@@ -13744,7 +14173,7 @@
       </p:sp>
       <p:sp>
         <p:nvSpPr>
-          <p:cNvPr id="10" name="TextBox 9"/>
+          <p:cNvPr id="11" name="TextBox 10"/>
           <p:cNvSpPr txBox="1"/>
           <p:nvPr/>
         </p:nvSpPr>
@@ -13786,7 +14215,7 @@
       </p:sp>
       <p:sp>
         <p:nvSpPr>
-          <p:cNvPr id="11" name="TextBox 10"/>
+          <p:cNvPr id="12" name="TextBox 11"/>
           <p:cNvSpPr txBox="1"/>
           <p:nvPr/>
         </p:nvSpPr>
@@ -13828,7 +14257,7 @@
       </p:sp>
       <p:sp>
         <p:nvSpPr>
-          <p:cNvPr id="12" name="TextBox 11"/>
+          <p:cNvPr id="13" name="TextBox 12"/>
           <p:cNvSpPr txBox="1"/>
           <p:nvPr/>
         </p:nvSpPr>
@@ -13870,7 +14299,7 @@
       </p:sp>
       <p:sp>
         <p:nvSpPr>
-          <p:cNvPr id="13" name="Rectangle 12"/>
+          <p:cNvPr id="14" name="Rectangle 13"/>
           <p:cNvSpPr/>
           <p:nvPr/>
         </p:nvSpPr>
@@ -13919,7 +14348,7 @@
       </p:sp>
       <p:sp>
         <p:nvSpPr>
-          <p:cNvPr id="14" name="TextBox 13"/>
+          <p:cNvPr id="15" name="TextBox 14"/>
           <p:cNvSpPr txBox="1"/>
           <p:nvPr/>
         </p:nvSpPr>
@@ -13961,7 +14390,7 @@
       </p:sp>
       <p:sp>
         <p:nvSpPr>
-          <p:cNvPr id="15" name="TextBox 14"/>
+          <p:cNvPr id="16" name="TextBox 15"/>
           <p:cNvSpPr txBox="1"/>
           <p:nvPr/>
         </p:nvSpPr>
@@ -13996,14 +14425,14 @@
               <a:rPr>
                 <a:latin typeface="Inter"/>
               </a:rPr>
-              <a:t>TEST DATA — fictional portfolio for rendering tests only · Data as of 2026-06-30</a:t>
+              <a:t>Confidential — Investment Committee · Data as of 2026-06-30</a:t>
             </a:r>
           </a:p>
         </p:txBody>
       </p:sp>
       <p:sp>
         <p:nvSpPr>
-          <p:cNvPr id="16" name="TextBox 15"/>
+          <p:cNvPr id="17" name="TextBox 16"/>
           <p:cNvSpPr txBox="1"/>
           <p:nvPr/>
         </p:nvSpPr>
@@ -14119,7 +14548,7 @@
         <p:spPr>
           <a:xfrm>
             <a:off x="640080" y="329184"/>
-            <a:ext cx="9875520" cy="182880"/>
+            <a:ext cx="5303520" cy="182880"/>
           </a:xfrm>
           <a:prstGeom prst="rect">
             <a:avLst/>
@@ -14160,6 +14589,48 @@
         </p:nvSpPr>
         <p:spPr>
           <a:xfrm>
+            <a:off x="5897880" y="310896"/>
+            <a:ext cx="4800600" cy="256032"/>
+          </a:xfrm>
+          <a:prstGeom prst="rect">
+            <a:avLst/>
+          </a:prstGeom>
+          <a:noFill/>
+        </p:spPr>
+        <p:txBody>
+          <a:bodyPr wrap="none" lIns="9144" rIns="9144" tIns="9144" bIns="9144" anchor="t">
+            <a:spAutoFit/>
+          </a:bodyPr>
+          <a:lstStyle/>
+          <a:p>
+            <a:pPr algn="r">
+              <a:spcAft>
+                <a:spcPts val="0"/>
+              </a:spcAft>
+              <a:defRPr sz="680" b="1">
+                <a:solidFill>
+                  <a:srgbClr val="4F6B00"/>
+                </a:solidFill>
+                <a:latin typeface="Inter"/>
+              </a:defRPr>
+            </a:pPr>
+            <a:r>
+              <a:rPr>
+                <a:latin typeface="Inter"/>
+              </a:rPr>
+              <a:t>Illustrative, Gradient Maintained — demo data, not the client's holdings or managers</a:t>
+            </a:r>
+          </a:p>
+        </p:txBody>
+      </p:sp>
+      <p:sp>
+        <p:nvSpPr>
+          <p:cNvPr id="5" name="TextBox 4"/>
+          <p:cNvSpPr txBox="1"/>
+          <p:nvPr/>
+        </p:nvSpPr>
+        <p:spPr>
+          <a:xfrm>
             <a:off x="640080" y="566928"/>
             <a:ext cx="10058400" cy="530352"/>
           </a:xfrm>
@@ -14196,7 +14667,7 @@
       </p:sp>
       <p:sp>
         <p:nvSpPr>
-          <p:cNvPr id="5" name="Rectangle 4"/>
+          <p:cNvPr id="6" name="Rectangle 5"/>
           <p:cNvSpPr/>
           <p:nvPr/>
         </p:nvSpPr>
@@ -14245,7 +14716,7 @@
       </p:sp>
       <p:sp>
         <p:nvSpPr>
-          <p:cNvPr id="6" name="Rectangle 5"/>
+          <p:cNvPr id="7" name="Rectangle 6"/>
           <p:cNvSpPr/>
           <p:nvPr/>
         </p:nvSpPr>
@@ -14294,7 +14765,7 @@
       </p:sp>
       <p:sp>
         <p:nvSpPr>
-          <p:cNvPr id="7" name="TextBox 6"/>
+          <p:cNvPr id="8" name="TextBox 7"/>
           <p:cNvSpPr txBox="1"/>
           <p:nvPr/>
         </p:nvSpPr>
@@ -14336,7 +14807,7 @@
       </p:sp>
       <p:sp>
         <p:nvSpPr>
-          <p:cNvPr id="8" name="Rectangle 7"/>
+          <p:cNvPr id="9" name="Rectangle 8"/>
           <p:cNvSpPr/>
           <p:nvPr/>
         </p:nvSpPr>
@@ -14385,7 +14856,7 @@
       </p:sp>
       <p:sp>
         <p:nvSpPr>
-          <p:cNvPr id="9" name="Rectangle 8"/>
+          <p:cNvPr id="10" name="Rectangle 9"/>
           <p:cNvSpPr/>
           <p:nvPr/>
         </p:nvSpPr>
@@ -14434,7 +14905,7 @@
       </p:sp>
       <p:sp>
         <p:nvSpPr>
-          <p:cNvPr id="10" name="TextBox 9"/>
+          <p:cNvPr id="11" name="TextBox 10"/>
           <p:cNvSpPr txBox="1"/>
           <p:nvPr/>
         </p:nvSpPr>
@@ -14476,7 +14947,7 @@
       </p:sp>
       <p:sp>
         <p:nvSpPr>
-          <p:cNvPr id="11" name="TextBox 10"/>
+          <p:cNvPr id="12" name="TextBox 11"/>
           <p:cNvSpPr txBox="1"/>
           <p:nvPr/>
         </p:nvSpPr>
@@ -14518,7 +14989,7 @@
       </p:sp>
       <p:sp>
         <p:nvSpPr>
-          <p:cNvPr id="12" name="Rectangle 11"/>
+          <p:cNvPr id="13" name="Rectangle 12"/>
           <p:cNvSpPr/>
           <p:nvPr/>
         </p:nvSpPr>
@@ -14567,7 +15038,7 @@
       </p:sp>
       <p:sp>
         <p:nvSpPr>
-          <p:cNvPr id="13" name="Rectangle 12"/>
+          <p:cNvPr id="14" name="Rectangle 13"/>
           <p:cNvSpPr/>
           <p:nvPr/>
         </p:nvSpPr>
@@ -14616,7 +15087,7 @@
       </p:sp>
       <p:sp>
         <p:nvSpPr>
-          <p:cNvPr id="14" name="TextBox 13"/>
+          <p:cNvPr id="15" name="TextBox 14"/>
           <p:cNvSpPr txBox="1"/>
           <p:nvPr/>
         </p:nvSpPr>
@@ -14658,7 +15129,7 @@
       </p:sp>
       <p:sp>
         <p:nvSpPr>
-          <p:cNvPr id="15" name="TextBox 14"/>
+          <p:cNvPr id="16" name="TextBox 15"/>
           <p:cNvSpPr txBox="1"/>
           <p:nvPr/>
         </p:nvSpPr>
@@ -14700,7 +15171,7 @@
       </p:sp>
       <p:sp>
         <p:nvSpPr>
-          <p:cNvPr id="16" name="TextBox 15"/>
+          <p:cNvPr id="17" name="TextBox 16"/>
           <p:cNvSpPr txBox="1"/>
           <p:nvPr/>
         </p:nvSpPr>
@@ -14742,7 +15213,7 @@
       </p:sp>
       <p:sp>
         <p:nvSpPr>
-          <p:cNvPr id="17" name="Rectangle 16"/>
+          <p:cNvPr id="18" name="Rectangle 17"/>
           <p:cNvSpPr/>
           <p:nvPr/>
         </p:nvSpPr>
@@ -14791,7 +15262,7 @@
       </p:sp>
       <p:sp>
         <p:nvSpPr>
-          <p:cNvPr id="18" name="Rectangle 17"/>
+          <p:cNvPr id="19" name="Rectangle 18"/>
           <p:cNvSpPr/>
           <p:nvPr/>
         </p:nvSpPr>
@@ -14840,7 +15311,7 @@
       </p:sp>
       <p:sp>
         <p:nvSpPr>
-          <p:cNvPr id="19" name="TextBox 18"/>
+          <p:cNvPr id="20" name="TextBox 19"/>
           <p:cNvSpPr txBox="1"/>
           <p:nvPr/>
         </p:nvSpPr>
@@ -14882,7 +15353,7 @@
       </p:sp>
       <p:sp>
         <p:nvSpPr>
-          <p:cNvPr id="20" name="TextBox 19"/>
+          <p:cNvPr id="21" name="TextBox 20"/>
           <p:cNvSpPr txBox="1"/>
           <p:nvPr/>
         </p:nvSpPr>
@@ -14924,7 +15395,7 @@
       </p:sp>
       <p:sp>
         <p:nvSpPr>
-          <p:cNvPr id="21" name="TextBox 20"/>
+          <p:cNvPr id="22" name="TextBox 21"/>
           <p:cNvSpPr txBox="1"/>
           <p:nvPr/>
         </p:nvSpPr>
@@ -14966,7 +15437,7 @@
       </p:sp>
       <p:sp>
         <p:nvSpPr>
-          <p:cNvPr id="22" name="Rectangle 21"/>
+          <p:cNvPr id="23" name="Rectangle 22"/>
           <p:cNvSpPr/>
           <p:nvPr/>
         </p:nvSpPr>
@@ -15015,7 +15486,7 @@
       </p:sp>
       <p:sp>
         <p:nvSpPr>
-          <p:cNvPr id="23" name="Rectangle 22"/>
+          <p:cNvPr id="24" name="Rectangle 23"/>
           <p:cNvSpPr/>
           <p:nvPr/>
         </p:nvSpPr>
@@ -15064,7 +15535,7 @@
       </p:sp>
       <p:sp>
         <p:nvSpPr>
-          <p:cNvPr id="24" name="TextBox 23"/>
+          <p:cNvPr id="25" name="TextBox 24"/>
           <p:cNvSpPr txBox="1"/>
           <p:nvPr/>
         </p:nvSpPr>
@@ -15106,7 +15577,7 @@
       </p:sp>
       <p:sp>
         <p:nvSpPr>
-          <p:cNvPr id="25" name="TextBox 24"/>
+          <p:cNvPr id="26" name="TextBox 25"/>
           <p:cNvSpPr txBox="1"/>
           <p:nvPr/>
         </p:nvSpPr>
@@ -15148,7 +15619,7 @@
       </p:sp>
       <p:sp>
         <p:nvSpPr>
-          <p:cNvPr id="26" name="TextBox 25"/>
+          <p:cNvPr id="27" name="TextBox 26"/>
           <p:cNvSpPr txBox="1"/>
           <p:nvPr/>
         </p:nvSpPr>
@@ -15190,7 +15661,7 @@
       </p:sp>
       <p:sp>
         <p:nvSpPr>
-          <p:cNvPr id="27" name="Rectangle 26"/>
+          <p:cNvPr id="28" name="Rectangle 27"/>
           <p:cNvSpPr/>
           <p:nvPr/>
         </p:nvSpPr>
@@ -15239,7 +15710,7 @@
       </p:sp>
       <p:sp>
         <p:nvSpPr>
-          <p:cNvPr id="28" name="Rectangle 27"/>
+          <p:cNvPr id="29" name="Rectangle 28"/>
           <p:cNvSpPr/>
           <p:nvPr/>
         </p:nvSpPr>
@@ -15288,7 +15759,7 @@
       </p:sp>
       <p:sp>
         <p:nvSpPr>
-          <p:cNvPr id="29" name="TextBox 28"/>
+          <p:cNvPr id="30" name="TextBox 29"/>
           <p:cNvSpPr txBox="1"/>
           <p:nvPr/>
         </p:nvSpPr>
@@ -15330,7 +15801,7 @@
       </p:sp>
       <p:sp>
         <p:nvSpPr>
-          <p:cNvPr id="30" name="TextBox 29"/>
+          <p:cNvPr id="31" name="TextBox 30"/>
           <p:cNvSpPr txBox="1"/>
           <p:nvPr/>
         </p:nvSpPr>
@@ -15372,7 +15843,7 @@
       </p:sp>
       <p:sp>
         <p:nvSpPr>
-          <p:cNvPr id="31" name="TextBox 30"/>
+          <p:cNvPr id="32" name="TextBox 31"/>
           <p:cNvSpPr txBox="1"/>
           <p:nvPr/>
         </p:nvSpPr>
@@ -15414,7 +15885,7 @@
       </p:sp>
       <p:sp>
         <p:nvSpPr>
-          <p:cNvPr id="32" name="Rectangle 31"/>
+          <p:cNvPr id="33" name="Rectangle 32"/>
           <p:cNvSpPr/>
           <p:nvPr/>
         </p:nvSpPr>
@@ -15463,7 +15934,7 @@
       </p:sp>
       <p:sp>
         <p:nvSpPr>
-          <p:cNvPr id="33" name="TextBox 32"/>
+          <p:cNvPr id="34" name="TextBox 33"/>
           <p:cNvSpPr txBox="1"/>
           <p:nvPr/>
         </p:nvSpPr>
@@ -15505,7 +15976,7 @@
       </p:sp>
       <p:sp>
         <p:nvSpPr>
-          <p:cNvPr id="34" name="TextBox 33"/>
+          <p:cNvPr id="35" name="TextBox 34"/>
           <p:cNvSpPr txBox="1"/>
           <p:nvPr/>
         </p:nvSpPr>
@@ -15540,14 +16011,14 @@
               <a:rPr>
                 <a:latin typeface="Inter"/>
               </a:rPr>
-              <a:t>TEST DATA — fictional portfolio for rendering tests only · Data as of 2026-06-30</a:t>
+              <a:t>Confidential — Investment Committee · Data as of 2026-06-30</a:t>
             </a:r>
           </a:p>
         </p:txBody>
       </p:sp>
       <p:sp>
         <p:nvSpPr>
-          <p:cNvPr id="35" name="TextBox 34"/>
+          <p:cNvPr id="36" name="TextBox 35"/>
           <p:cNvSpPr txBox="1"/>
           <p:nvPr/>
         </p:nvSpPr>
@@ -15663,7 +16134,7 @@
         <p:spPr>
           <a:xfrm>
             <a:off x="640080" y="329184"/>
-            <a:ext cx="9875520" cy="182880"/>
+            <a:ext cx="5303520" cy="182880"/>
           </a:xfrm>
           <a:prstGeom prst="rect">
             <a:avLst/>
@@ -15704,6 +16175,48 @@
         </p:nvSpPr>
         <p:spPr>
           <a:xfrm>
+            <a:off x="5897880" y="310896"/>
+            <a:ext cx="4800600" cy="256032"/>
+          </a:xfrm>
+          <a:prstGeom prst="rect">
+            <a:avLst/>
+          </a:prstGeom>
+          <a:noFill/>
+        </p:spPr>
+        <p:txBody>
+          <a:bodyPr wrap="none" lIns="9144" rIns="9144" tIns="9144" bIns="9144" anchor="t">
+            <a:spAutoFit/>
+          </a:bodyPr>
+          <a:lstStyle/>
+          <a:p>
+            <a:pPr algn="r">
+              <a:spcAft>
+                <a:spcPts val="0"/>
+              </a:spcAft>
+              <a:defRPr sz="680" b="1">
+                <a:solidFill>
+                  <a:srgbClr val="4F6B00"/>
+                </a:solidFill>
+                <a:latin typeface="Inter"/>
+              </a:defRPr>
+            </a:pPr>
+            <a:r>
+              <a:rPr>
+                <a:latin typeface="Inter"/>
+              </a:rPr>
+              <a:t>Illustrative, Gradient Maintained — demo data, not the client's holdings or managers</a:t>
+            </a:r>
+          </a:p>
+        </p:txBody>
+      </p:sp>
+      <p:sp>
+        <p:nvSpPr>
+          <p:cNvPr id="5" name="TextBox 4"/>
+          <p:cNvSpPr txBox="1"/>
+          <p:nvPr/>
+        </p:nvSpPr>
+        <p:spPr>
+          <a:xfrm>
             <a:off x="640080" y="566928"/>
             <a:ext cx="10058400" cy="530352"/>
           </a:xfrm>
@@ -15740,7 +16253,7 @@
       </p:sp>
       <p:sp>
         <p:nvSpPr>
-          <p:cNvPr id="5" name="Rectangle 4"/>
+          <p:cNvPr id="6" name="Rectangle 5"/>
           <p:cNvSpPr/>
           <p:nvPr/>
         </p:nvSpPr>
@@ -15789,7 +16302,7 @@
       </p:sp>
       <p:sp>
         <p:nvSpPr>
-          <p:cNvPr id="6" name="Rectangle 5"/>
+          <p:cNvPr id="7" name="Rectangle 6"/>
           <p:cNvSpPr/>
           <p:nvPr/>
         </p:nvSpPr>
@@ -15838,7 +16351,7 @@
       </p:sp>
       <p:sp>
         <p:nvSpPr>
-          <p:cNvPr id="7" name="TextBox 6"/>
+          <p:cNvPr id="8" name="TextBox 7"/>
           <p:cNvSpPr txBox="1"/>
           <p:nvPr/>
         </p:nvSpPr>
@@ -15880,7 +16393,7 @@
       </p:sp>
       <p:sp>
         <p:nvSpPr>
-          <p:cNvPr id="8" name="TextBox 7"/>
+          <p:cNvPr id="9" name="TextBox 8"/>
           <p:cNvSpPr txBox="1"/>
           <p:nvPr/>
         </p:nvSpPr>
@@ -15922,7 +16435,7 @@
       </p:sp>
       <p:graphicFrame>
         <p:nvGraphicFramePr>
-          <p:cNvPr id="9" name="Chart 8"/>
+          <p:cNvPr id="10" name="Chart 9"/>
           <p:cNvGraphicFramePr>
             <a:graphicFrameLocks noGrp="1"/>
           </p:cNvGraphicFramePr>
@@ -15940,7 +16453,7 @@
       </p:graphicFrame>
       <p:sp>
         <p:nvSpPr>
-          <p:cNvPr id="10" name="Rectangle 9"/>
+          <p:cNvPr id="11" name="Rectangle 10"/>
           <p:cNvSpPr/>
           <p:nvPr/>
         </p:nvSpPr>
@@ -15989,7 +16502,7 @@
       </p:sp>
       <p:sp>
         <p:nvSpPr>
-          <p:cNvPr id="11" name="TextBox 10"/>
+          <p:cNvPr id="12" name="TextBox 11"/>
           <p:cNvSpPr txBox="1"/>
           <p:nvPr/>
         </p:nvSpPr>
@@ -16031,7 +16544,7 @@
       </p:sp>
       <p:sp>
         <p:nvSpPr>
-          <p:cNvPr id="12" name="TextBox 11"/>
+          <p:cNvPr id="13" name="TextBox 12"/>
           <p:cNvSpPr txBox="1"/>
           <p:nvPr/>
         </p:nvSpPr>
@@ -16066,14 +16579,14 @@
               <a:rPr>
                 <a:latin typeface="Inter"/>
               </a:rPr>
-              <a:t>TEST DATA — fictional portfolio for rendering tests only · Data as of 2026-06-30</a:t>
+              <a:t>Confidential — Investment Committee · Data as of 2026-06-30</a:t>
             </a:r>
           </a:p>
         </p:txBody>
       </p:sp>
       <p:sp>
         <p:nvSpPr>
-          <p:cNvPr id="13" name="TextBox 12"/>
+          <p:cNvPr id="14" name="TextBox 13"/>
           <p:cNvSpPr txBox="1"/>
           <p:nvPr/>
         </p:nvSpPr>
@@ -16189,7 +16702,7 @@
         <p:spPr>
           <a:xfrm>
             <a:off x="640080" y="329184"/>
-            <a:ext cx="9875520" cy="182880"/>
+            <a:ext cx="5303520" cy="182880"/>
           </a:xfrm>
           <a:prstGeom prst="rect">
             <a:avLst/>
@@ -16230,6 +16743,48 @@
         </p:nvSpPr>
         <p:spPr>
           <a:xfrm>
+            <a:off x="5897880" y="310896"/>
+            <a:ext cx="4800600" cy="256032"/>
+          </a:xfrm>
+          <a:prstGeom prst="rect">
+            <a:avLst/>
+          </a:prstGeom>
+          <a:noFill/>
+        </p:spPr>
+        <p:txBody>
+          <a:bodyPr wrap="none" lIns="9144" rIns="9144" tIns="9144" bIns="9144" anchor="t">
+            <a:spAutoFit/>
+          </a:bodyPr>
+          <a:lstStyle/>
+          <a:p>
+            <a:pPr algn="r">
+              <a:spcAft>
+                <a:spcPts val="0"/>
+              </a:spcAft>
+              <a:defRPr sz="680" b="1">
+                <a:solidFill>
+                  <a:srgbClr val="4F6B00"/>
+                </a:solidFill>
+                <a:latin typeface="Inter"/>
+              </a:defRPr>
+            </a:pPr>
+            <a:r>
+              <a:rPr>
+                <a:latin typeface="Inter"/>
+              </a:rPr>
+              <a:t>Illustrative, Gradient Maintained — demo data, not the client's holdings or managers</a:t>
+            </a:r>
+          </a:p>
+        </p:txBody>
+      </p:sp>
+      <p:sp>
+        <p:nvSpPr>
+          <p:cNvPr id="5" name="TextBox 4"/>
+          <p:cNvSpPr txBox="1"/>
+          <p:nvPr/>
+        </p:nvSpPr>
+        <p:spPr>
+          <a:xfrm>
             <a:off x="640080" y="566928"/>
             <a:ext cx="10058400" cy="530352"/>
           </a:xfrm>
@@ -16266,7 +16821,7 @@
       </p:sp>
       <p:sp>
         <p:nvSpPr>
-          <p:cNvPr id="5" name="Rectangle 4"/>
+          <p:cNvPr id="6" name="Rectangle 5"/>
           <p:cNvSpPr/>
           <p:nvPr/>
         </p:nvSpPr>
@@ -16315,7 +16870,7 @@
       </p:sp>
       <p:sp>
         <p:nvSpPr>
-          <p:cNvPr id="6" name="Rectangle 5"/>
+          <p:cNvPr id="7" name="Rectangle 6"/>
           <p:cNvSpPr/>
           <p:nvPr/>
         </p:nvSpPr>
@@ -16364,7 +16919,7 @@
       </p:sp>
       <p:sp>
         <p:nvSpPr>
-          <p:cNvPr id="7" name="TextBox 6"/>
+          <p:cNvPr id="8" name="TextBox 7"/>
           <p:cNvSpPr txBox="1"/>
           <p:nvPr/>
         </p:nvSpPr>
@@ -16406,7 +16961,7 @@
       </p:sp>
       <p:sp>
         <p:nvSpPr>
-          <p:cNvPr id="8" name="TextBox 7"/>
+          <p:cNvPr id="9" name="TextBox 8"/>
           <p:cNvSpPr txBox="1"/>
           <p:nvPr/>
         </p:nvSpPr>
@@ -16441,14 +16996,14 @@
               <a:rPr>
                 <a:latin typeface="Inter"/>
               </a:rPr>
-              <a:t>PROJECTED CALLS AND DISTRIBUTIONS (TEST)</a:t>
+              <a:t>PROJECTED CALLS AND DISTRIBUTIONS</a:t>
             </a:r>
           </a:p>
         </p:txBody>
       </p:sp>
       <p:graphicFrame>
         <p:nvGraphicFramePr>
-          <p:cNvPr id="9" name="Table 8"/>
+          <p:cNvPr id="10" name="Table 9"/>
           <p:cNvGraphicFramePr>
             <a:graphicFrameLocks noGrp="1"/>
           </p:cNvGraphicFramePr>
@@ -16890,7 +17445,7 @@
       </p:graphicFrame>
       <p:sp>
         <p:nvSpPr>
-          <p:cNvPr id="10" name="Rectangle 9"/>
+          <p:cNvPr id="11" name="Rectangle 10"/>
           <p:cNvSpPr/>
           <p:nvPr/>
         </p:nvSpPr>
@@ -16939,7 +17494,7 @@
       </p:sp>
       <p:sp>
         <p:nvSpPr>
-          <p:cNvPr id="11" name="TextBox 10"/>
+          <p:cNvPr id="12" name="TextBox 11"/>
           <p:cNvSpPr txBox="1"/>
           <p:nvPr/>
         </p:nvSpPr>
@@ -16974,14 +17529,14 @@
               <a:rPr>
                 <a:latin typeface="Inter"/>
               </a:rPr>
-              <a:t>Sources: none cited</a:t>
+              <a:t>Sources: S1</a:t>
             </a:r>
           </a:p>
         </p:txBody>
       </p:sp>
       <p:sp>
         <p:nvSpPr>
-          <p:cNvPr id="12" name="TextBox 11"/>
+          <p:cNvPr id="13" name="TextBox 12"/>
           <p:cNvSpPr txBox="1"/>
           <p:nvPr/>
         </p:nvSpPr>
@@ -17016,14 +17571,14 @@
               <a:rPr>
                 <a:latin typeface="Inter"/>
               </a:rPr>
-              <a:t>TEST DATA — fictional portfolio for rendering tests only · Data as of 2026-06-30</a:t>
+              <a:t>Confidential — Investment Committee · Data as of 2026-06-30</a:t>
             </a:r>
           </a:p>
         </p:txBody>
       </p:sp>
       <p:sp>
         <p:nvSpPr>
-          <p:cNvPr id="13" name="TextBox 12"/>
+          <p:cNvPr id="14" name="TextBox 13"/>
           <p:cNvSpPr txBox="1"/>
           <p:nvPr/>
         </p:nvSpPr>
@@ -17139,7 +17694,7 @@
         <p:spPr>
           <a:xfrm>
             <a:off x="640080" y="329184"/>
-            <a:ext cx="9875520" cy="182880"/>
+            <a:ext cx="5303520" cy="182880"/>
           </a:xfrm>
           <a:prstGeom prst="rect">
             <a:avLst/>
@@ -17180,6 +17735,48 @@
         </p:nvSpPr>
         <p:spPr>
           <a:xfrm>
+            <a:off x="5897880" y="310896"/>
+            <a:ext cx="4800600" cy="256032"/>
+          </a:xfrm>
+          <a:prstGeom prst="rect">
+            <a:avLst/>
+          </a:prstGeom>
+          <a:noFill/>
+        </p:spPr>
+        <p:txBody>
+          <a:bodyPr wrap="none" lIns="9144" rIns="9144" tIns="9144" bIns="9144" anchor="t">
+            <a:spAutoFit/>
+          </a:bodyPr>
+          <a:lstStyle/>
+          <a:p>
+            <a:pPr algn="r">
+              <a:spcAft>
+                <a:spcPts val="0"/>
+              </a:spcAft>
+              <a:defRPr sz="680" b="1">
+                <a:solidFill>
+                  <a:srgbClr val="4F6B00"/>
+                </a:solidFill>
+                <a:latin typeface="Inter"/>
+              </a:defRPr>
+            </a:pPr>
+            <a:r>
+              <a:rPr>
+                <a:latin typeface="Inter"/>
+              </a:rPr>
+              <a:t>Illustrative, Gradient Maintained — demo data, not the client's holdings or managers</a:t>
+            </a:r>
+          </a:p>
+        </p:txBody>
+      </p:sp>
+      <p:sp>
+        <p:nvSpPr>
+          <p:cNvPr id="5" name="TextBox 4"/>
+          <p:cNvSpPr txBox="1"/>
+          <p:nvPr/>
+        </p:nvSpPr>
+        <p:spPr>
+          <a:xfrm>
             <a:off x="640080" y="566928"/>
             <a:ext cx="10058400" cy="530352"/>
           </a:xfrm>
@@ -17216,7 +17813,7 @@
       </p:sp>
       <p:sp>
         <p:nvSpPr>
-          <p:cNvPr id="5" name="Rectangle 4"/>
+          <p:cNvPr id="6" name="Rectangle 5"/>
           <p:cNvSpPr/>
           <p:nvPr/>
         </p:nvSpPr>
@@ -17265,7 +17862,7 @@
       </p:sp>
       <p:sp>
         <p:nvSpPr>
-          <p:cNvPr id="6" name="Rectangle 5"/>
+          <p:cNvPr id="7" name="Rectangle 6"/>
           <p:cNvSpPr/>
           <p:nvPr/>
         </p:nvSpPr>
@@ -17314,7 +17911,7 @@
       </p:sp>
       <p:sp>
         <p:nvSpPr>
-          <p:cNvPr id="7" name="TextBox 6"/>
+          <p:cNvPr id="8" name="TextBox 7"/>
           <p:cNvSpPr txBox="1"/>
           <p:nvPr/>
         </p:nvSpPr>
@@ -17356,7 +17953,7 @@
       </p:sp>
       <p:sp>
         <p:nvSpPr>
-          <p:cNvPr id="8" name="TextBox 7"/>
+          <p:cNvPr id="9" name="TextBox 8"/>
           <p:cNvSpPr txBox="1"/>
           <p:nvPr/>
         </p:nvSpPr>
@@ -17398,7 +17995,7 @@
       </p:sp>
       <p:graphicFrame>
         <p:nvGraphicFramePr>
-          <p:cNvPr id="9" name="Table 8"/>
+          <p:cNvPr id="10" name="Table 9"/>
           <p:cNvGraphicFramePr>
             <a:graphicFrameLocks noGrp="1"/>
           </p:cNvGraphicFramePr>
@@ -18084,7 +18681,7 @@
       </p:graphicFrame>
       <p:sp>
         <p:nvSpPr>
-          <p:cNvPr id="10" name="Rectangle 9"/>
+          <p:cNvPr id="11" name="Rectangle 10"/>
           <p:cNvSpPr/>
           <p:nvPr/>
         </p:nvSpPr>
@@ -18133,7 +18730,7 @@
       </p:sp>
       <p:sp>
         <p:nvSpPr>
-          <p:cNvPr id="11" name="TextBox 10"/>
+          <p:cNvPr id="12" name="TextBox 11"/>
           <p:cNvSpPr txBox="1"/>
           <p:nvPr/>
         </p:nvSpPr>
@@ -18175,7 +18772,7 @@
       </p:sp>
       <p:sp>
         <p:nvSpPr>
-          <p:cNvPr id="12" name="TextBox 11"/>
+          <p:cNvPr id="13" name="TextBox 12"/>
           <p:cNvSpPr txBox="1"/>
           <p:nvPr/>
         </p:nvSpPr>
@@ -18210,14 +18807,14 @@
               <a:rPr>
                 <a:latin typeface="Inter"/>
               </a:rPr>
-              <a:t>TEST DATA — fictional portfolio for rendering tests only · Data as of 2026-06-30</a:t>
+              <a:t>Confidential — Investment Committee · Data as of 2026-06-30</a:t>
             </a:r>
           </a:p>
         </p:txBody>
       </p:sp>
       <p:sp>
         <p:nvSpPr>
-          <p:cNvPr id="13" name="TextBox 12"/>
+          <p:cNvPr id="14" name="TextBox 13"/>
           <p:cNvSpPr txBox="1"/>
           <p:nvPr/>
         </p:nvSpPr>
@@ -18333,7 +18930,7 @@
         <p:spPr>
           <a:xfrm>
             <a:off x="640080" y="329184"/>
-            <a:ext cx="9875520" cy="182880"/>
+            <a:ext cx="5303520" cy="182880"/>
           </a:xfrm>
           <a:prstGeom prst="rect">
             <a:avLst/>
@@ -18361,7 +18958,7 @@
               <a:rPr>
                 <a:latin typeface="Inter"/>
               </a:rPr>
-              <a:t>COVERAGE REMAINS ADEQUATE UNDER THE FICTIONAL TEST STRESS CASE</a:t>
+              <a:t>COVERAGE REMAINS ADEQUATE UNDER THE SAMPLE STRESS CASE</a:t>
             </a:r>
           </a:p>
         </p:txBody>
@@ -18369,6 +18966,48 @@
       <p:sp>
         <p:nvSpPr>
           <p:cNvPr id="4" name="TextBox 3"/>
+          <p:cNvSpPr txBox="1"/>
+          <p:nvPr/>
+        </p:nvSpPr>
+        <p:spPr>
+          <a:xfrm>
+            <a:off x="5897880" y="310896"/>
+            <a:ext cx="4800600" cy="256032"/>
+          </a:xfrm>
+          <a:prstGeom prst="rect">
+            <a:avLst/>
+          </a:prstGeom>
+          <a:noFill/>
+        </p:spPr>
+        <p:txBody>
+          <a:bodyPr wrap="none" lIns="9144" rIns="9144" tIns="9144" bIns="9144" anchor="t">
+            <a:spAutoFit/>
+          </a:bodyPr>
+          <a:lstStyle/>
+          <a:p>
+            <a:pPr algn="r">
+              <a:spcAft>
+                <a:spcPts val="0"/>
+              </a:spcAft>
+              <a:defRPr sz="680" b="1">
+                <a:solidFill>
+                  <a:srgbClr val="4F6B00"/>
+                </a:solidFill>
+                <a:latin typeface="Inter"/>
+              </a:defRPr>
+            </a:pPr>
+            <a:r>
+              <a:rPr>
+                <a:latin typeface="Inter"/>
+              </a:rPr>
+              <a:t>Illustrative, Gradient Maintained — demo data, not the client's holdings or managers</a:t>
+            </a:r>
+          </a:p>
+        </p:txBody>
+      </p:sp>
+      <p:sp>
+        <p:nvSpPr>
+          <p:cNvPr id="5" name="TextBox 4"/>
           <p:cNvSpPr txBox="1"/>
           <p:nvPr/>
         </p:nvSpPr>
@@ -18410,7 +19049,7 @@
       </p:sp>
       <p:sp>
         <p:nvSpPr>
-          <p:cNvPr id="5" name="Rectangle 4"/>
+          <p:cNvPr id="6" name="Rectangle 5"/>
           <p:cNvSpPr/>
           <p:nvPr/>
         </p:nvSpPr>
@@ -18459,7 +19098,7 @@
       </p:sp>
       <p:sp>
         <p:nvSpPr>
-          <p:cNvPr id="6" name="Rectangle 5"/>
+          <p:cNvPr id="7" name="Rectangle 6"/>
           <p:cNvSpPr/>
           <p:nvPr/>
         </p:nvSpPr>
@@ -18508,7 +19147,7 @@
       </p:sp>
       <p:sp>
         <p:nvSpPr>
-          <p:cNvPr id="7" name="TextBox 6"/>
+          <p:cNvPr id="8" name="TextBox 7"/>
           <p:cNvSpPr txBox="1"/>
           <p:nvPr/>
         </p:nvSpPr>
@@ -18550,7 +19189,7 @@
       </p:sp>
       <p:sp>
         <p:nvSpPr>
-          <p:cNvPr id="8" name="TextBox 7"/>
+          <p:cNvPr id="9" name="TextBox 8"/>
           <p:cNvSpPr txBox="1"/>
           <p:nvPr/>
         </p:nvSpPr>
@@ -18592,7 +19231,7 @@
       </p:sp>
       <p:graphicFrame>
         <p:nvGraphicFramePr>
-          <p:cNvPr id="9" name="Chart 8"/>
+          <p:cNvPr id="10" name="Chart 9"/>
           <p:cNvGraphicFramePr>
             <a:graphicFrameLocks noGrp="1"/>
           </p:cNvGraphicFramePr>
@@ -18610,7 +19249,7 @@
       </p:graphicFrame>
       <p:sp>
         <p:nvSpPr>
-          <p:cNvPr id="10" name="Rectangle 9"/>
+          <p:cNvPr id="11" name="Rectangle 10"/>
           <p:cNvSpPr/>
           <p:nvPr/>
         </p:nvSpPr>
@@ -18659,7 +19298,7 @@
       </p:sp>
       <p:sp>
         <p:nvSpPr>
-          <p:cNvPr id="11" name="TextBox 10"/>
+          <p:cNvPr id="12" name="TextBox 11"/>
           <p:cNvSpPr txBox="1"/>
           <p:nvPr/>
         </p:nvSpPr>
@@ -18701,7 +19340,7 @@
       </p:sp>
       <p:sp>
         <p:nvSpPr>
-          <p:cNvPr id="12" name="TextBox 11"/>
+          <p:cNvPr id="13" name="TextBox 12"/>
           <p:cNvSpPr txBox="1"/>
           <p:nvPr/>
         </p:nvSpPr>
@@ -18736,14 +19375,14 @@
               <a:rPr>
                 <a:latin typeface="Inter"/>
               </a:rPr>
-              <a:t>TEST DATA — fictional portfolio for rendering tests only · Data as of 2026-06-30</a:t>
+              <a:t>Confidential — Investment Committee · Data as of 2026-06-30</a:t>
             </a:r>
           </a:p>
         </p:txBody>
       </p:sp>
       <p:sp>
         <p:nvSpPr>
-          <p:cNvPr id="13" name="TextBox 12"/>
+          <p:cNvPr id="14" name="TextBox 13"/>
           <p:cNvSpPr txBox="1"/>
           <p:nvPr/>
         </p:nvSpPr>
@@ -18859,7 +19498,7 @@
         <p:spPr>
           <a:xfrm>
             <a:off x="640080" y="329184"/>
-            <a:ext cx="9875520" cy="182880"/>
+            <a:ext cx="5303520" cy="182880"/>
           </a:xfrm>
           <a:prstGeom prst="rect">
             <a:avLst/>
@@ -18887,7 +19526,7 @@
               <a:rPr>
                 <a:latin typeface="Inter"/>
               </a:rPr>
-              <a:t>COVERAGE REMAINS ADEQUATE UNDER THE FICTIONAL TEST STRESS CASE</a:t>
+              <a:t>COVERAGE REMAINS ADEQUATE UNDER THE SAMPLE STRESS CASE</a:t>
             </a:r>
           </a:p>
         </p:txBody>
@@ -18895,6 +19534,48 @@
       <p:sp>
         <p:nvSpPr>
           <p:cNvPr id="4" name="TextBox 3"/>
+          <p:cNvSpPr txBox="1"/>
+          <p:nvPr/>
+        </p:nvSpPr>
+        <p:spPr>
+          <a:xfrm>
+            <a:off x="5897880" y="310896"/>
+            <a:ext cx="4800600" cy="256032"/>
+          </a:xfrm>
+          <a:prstGeom prst="rect">
+            <a:avLst/>
+          </a:prstGeom>
+          <a:noFill/>
+        </p:spPr>
+        <p:txBody>
+          <a:bodyPr wrap="none" lIns="9144" rIns="9144" tIns="9144" bIns="9144" anchor="t">
+            <a:spAutoFit/>
+          </a:bodyPr>
+          <a:lstStyle/>
+          <a:p>
+            <a:pPr algn="r">
+              <a:spcAft>
+                <a:spcPts val="0"/>
+              </a:spcAft>
+              <a:defRPr sz="680" b="1">
+                <a:solidFill>
+                  <a:srgbClr val="4F6B00"/>
+                </a:solidFill>
+                <a:latin typeface="Inter"/>
+              </a:defRPr>
+            </a:pPr>
+            <a:r>
+              <a:rPr>
+                <a:latin typeface="Inter"/>
+              </a:rPr>
+              <a:t>Illustrative, Gradient Maintained — demo data, not the client's holdings or managers</a:t>
+            </a:r>
+          </a:p>
+        </p:txBody>
+      </p:sp>
+      <p:sp>
+        <p:nvSpPr>
+          <p:cNvPr id="5" name="TextBox 4"/>
           <p:cNvSpPr txBox="1"/>
           <p:nvPr/>
         </p:nvSpPr>
@@ -18936,7 +19617,7 @@
       </p:sp>
       <p:sp>
         <p:nvSpPr>
-          <p:cNvPr id="5" name="Rectangle 4"/>
+          <p:cNvPr id="6" name="Rectangle 5"/>
           <p:cNvSpPr/>
           <p:nvPr/>
         </p:nvSpPr>
@@ -18985,7 +19666,7 @@
       </p:sp>
       <p:sp>
         <p:nvSpPr>
-          <p:cNvPr id="6" name="Rectangle 5"/>
+          <p:cNvPr id="7" name="Rectangle 6"/>
           <p:cNvSpPr/>
           <p:nvPr/>
         </p:nvSpPr>
@@ -19034,7 +19715,7 @@
       </p:sp>
       <p:sp>
         <p:nvSpPr>
-          <p:cNvPr id="7" name="TextBox 6"/>
+          <p:cNvPr id="8" name="TextBox 7"/>
           <p:cNvSpPr txBox="1"/>
           <p:nvPr/>
         </p:nvSpPr>
@@ -19076,7 +19757,7 @@
       </p:sp>
       <p:sp>
         <p:nvSpPr>
-          <p:cNvPr id="8" name="TextBox 7"/>
+          <p:cNvPr id="9" name="TextBox 8"/>
           <p:cNvSpPr txBox="1"/>
           <p:nvPr/>
         </p:nvSpPr>
@@ -19111,14 +19792,14 @@
               <a:rPr>
                 <a:latin typeface="Inter"/>
               </a:rPr>
-              <a:t>LIQUIDITY COMPOSITION (TEST)</a:t>
+              <a:t>LIQUIDITY COMPOSITION</a:t>
             </a:r>
           </a:p>
         </p:txBody>
       </p:sp>
       <p:graphicFrame>
         <p:nvGraphicFramePr>
-          <p:cNvPr id="9" name="Chart 8"/>
+          <p:cNvPr id="10" name="Chart 9"/>
           <p:cNvGraphicFramePr>
             <a:graphicFrameLocks noGrp="1"/>
           </p:cNvGraphicFramePr>
@@ -19136,7 +19817,7 @@
       </p:graphicFrame>
       <p:sp>
         <p:nvSpPr>
-          <p:cNvPr id="10" name="Rectangle 9"/>
+          <p:cNvPr id="11" name="Rectangle 10"/>
           <p:cNvSpPr/>
           <p:nvPr/>
         </p:nvSpPr>
@@ -19185,7 +19866,7 @@
       </p:sp>
       <p:sp>
         <p:nvSpPr>
-          <p:cNvPr id="11" name="TextBox 10"/>
+          <p:cNvPr id="12" name="TextBox 11"/>
           <p:cNvSpPr txBox="1"/>
           <p:nvPr/>
         </p:nvSpPr>
@@ -19220,14 +19901,14 @@
               <a:rPr>
                 <a:latin typeface="Inter"/>
               </a:rPr>
-              <a:t>Sources: none cited</a:t>
+              <a:t>Sources: S1</a:t>
             </a:r>
           </a:p>
         </p:txBody>
       </p:sp>
       <p:sp>
         <p:nvSpPr>
-          <p:cNvPr id="12" name="TextBox 11"/>
+          <p:cNvPr id="13" name="TextBox 12"/>
           <p:cNvSpPr txBox="1"/>
           <p:nvPr/>
         </p:nvSpPr>
@@ -19262,14 +19943,14 @@
               <a:rPr>
                 <a:latin typeface="Inter"/>
               </a:rPr>
-              <a:t>TEST DATA — fictional portfolio for rendering tests only · Data as of 2026-06-30</a:t>
+              <a:t>Confidential — Investment Committee · Data as of 2026-06-30</a:t>
             </a:r>
           </a:p>
         </p:txBody>
       </p:sp>
       <p:sp>
         <p:nvSpPr>
-          <p:cNvPr id="13" name="TextBox 12"/>
+          <p:cNvPr id="14" name="TextBox 13"/>
           <p:cNvSpPr txBox="1"/>
           <p:nvPr/>
         </p:nvSpPr>
@@ -19385,7 +20066,7 @@
         <p:spPr>
           <a:xfrm>
             <a:off x="640080" y="329184"/>
-            <a:ext cx="9875520" cy="182880"/>
+            <a:ext cx="5303520" cy="182880"/>
           </a:xfrm>
           <a:prstGeom prst="rect">
             <a:avLst/>
@@ -19413,7 +20094,7 @@
               <a:rPr>
                 <a:latin typeface="Inter"/>
               </a:rPr>
-              <a:t>COVERAGE REMAINS ADEQUATE UNDER THE FICTIONAL TEST STRESS CASE</a:t>
+              <a:t>COVERAGE REMAINS ADEQUATE UNDER THE SAMPLE STRESS CASE</a:t>
             </a:r>
           </a:p>
         </p:txBody>
@@ -19421,6 +20102,48 @@
       <p:sp>
         <p:nvSpPr>
           <p:cNvPr id="4" name="TextBox 3"/>
+          <p:cNvSpPr txBox="1"/>
+          <p:nvPr/>
+        </p:nvSpPr>
+        <p:spPr>
+          <a:xfrm>
+            <a:off x="5897880" y="310896"/>
+            <a:ext cx="4800600" cy="256032"/>
+          </a:xfrm>
+          <a:prstGeom prst="rect">
+            <a:avLst/>
+          </a:prstGeom>
+          <a:noFill/>
+        </p:spPr>
+        <p:txBody>
+          <a:bodyPr wrap="none" lIns="9144" rIns="9144" tIns="9144" bIns="9144" anchor="t">
+            <a:spAutoFit/>
+          </a:bodyPr>
+          <a:lstStyle/>
+          <a:p>
+            <a:pPr algn="r">
+              <a:spcAft>
+                <a:spcPts val="0"/>
+              </a:spcAft>
+              <a:defRPr sz="680" b="1">
+                <a:solidFill>
+                  <a:srgbClr val="4F6B00"/>
+                </a:solidFill>
+                <a:latin typeface="Inter"/>
+              </a:defRPr>
+            </a:pPr>
+            <a:r>
+              <a:rPr>
+                <a:latin typeface="Inter"/>
+              </a:rPr>
+              <a:t>Illustrative, Gradient Maintained — demo data, not the client's holdings or managers</a:t>
+            </a:r>
+          </a:p>
+        </p:txBody>
+      </p:sp>
+      <p:sp>
+        <p:nvSpPr>
+          <p:cNvPr id="5" name="TextBox 4"/>
           <p:cNvSpPr txBox="1"/>
           <p:nvPr/>
         </p:nvSpPr>
@@ -19462,7 +20185,7 @@
       </p:sp>
       <p:sp>
         <p:nvSpPr>
-          <p:cNvPr id="5" name="Rectangle 4"/>
+          <p:cNvPr id="6" name="Rectangle 5"/>
           <p:cNvSpPr/>
           <p:nvPr/>
         </p:nvSpPr>
@@ -19511,7 +20234,7 @@
       </p:sp>
       <p:sp>
         <p:nvSpPr>
-          <p:cNvPr id="6" name="Rectangle 5"/>
+          <p:cNvPr id="7" name="Rectangle 6"/>
           <p:cNvSpPr/>
           <p:nvPr/>
         </p:nvSpPr>
@@ -19560,7 +20283,7 @@
       </p:sp>
       <p:sp>
         <p:nvSpPr>
-          <p:cNvPr id="7" name="TextBox 6"/>
+          <p:cNvPr id="8" name="TextBox 7"/>
           <p:cNvSpPr txBox="1"/>
           <p:nvPr/>
         </p:nvSpPr>
@@ -19602,7 +20325,7 @@
       </p:sp>
       <p:sp>
         <p:nvSpPr>
-          <p:cNvPr id="8" name="TextBox 7"/>
+          <p:cNvPr id="9" name="TextBox 8"/>
           <p:cNvSpPr txBox="1"/>
           <p:nvPr/>
         </p:nvSpPr>
@@ -19644,7 +20367,7 @@
       </p:sp>
       <p:graphicFrame>
         <p:nvGraphicFramePr>
-          <p:cNvPr id="9" name="Table 8"/>
+          <p:cNvPr id="10" name="Table 9"/>
           <p:cNvGraphicFramePr>
             <a:graphicFrameLocks noGrp="1"/>
           </p:cNvGraphicFramePr>
@@ -20084,7 +20807,7 @@
       </p:graphicFrame>
       <p:graphicFrame>
         <p:nvGraphicFramePr>
-          <p:cNvPr id="10" name="Table 9"/>
+          <p:cNvPr id="11" name="Table 10"/>
           <p:cNvGraphicFramePr>
             <a:graphicFrameLocks noGrp="1"/>
           </p:cNvGraphicFramePr>
@@ -20334,7 +21057,7 @@
       </p:graphicFrame>
       <p:sp>
         <p:nvSpPr>
-          <p:cNvPr id="11" name="Rectangle 10"/>
+          <p:cNvPr id="12" name="Rectangle 11"/>
           <p:cNvSpPr/>
           <p:nvPr/>
         </p:nvSpPr>
@@ -20383,7 +21106,7 @@
       </p:sp>
       <p:sp>
         <p:nvSpPr>
-          <p:cNvPr id="12" name="Rectangle 11"/>
+          <p:cNvPr id="13" name="Rectangle 12"/>
           <p:cNvSpPr/>
           <p:nvPr/>
         </p:nvSpPr>
@@ -20432,7 +21155,7 @@
       </p:sp>
       <p:sp>
         <p:nvSpPr>
-          <p:cNvPr id="13" name="TextBox 12"/>
+          <p:cNvPr id="14" name="TextBox 13"/>
           <p:cNvSpPr txBox="1"/>
           <p:nvPr/>
         </p:nvSpPr>
@@ -20474,7 +21197,7 @@
       </p:sp>
       <p:sp>
         <p:nvSpPr>
-          <p:cNvPr id="14" name="TextBox 13"/>
+          <p:cNvPr id="15" name="TextBox 14"/>
           <p:cNvSpPr txBox="1"/>
           <p:nvPr/>
         </p:nvSpPr>
@@ -20516,7 +21239,7 @@
       </p:sp>
       <p:sp>
         <p:nvSpPr>
-          <p:cNvPr id="15" name="Rectangle 14"/>
+          <p:cNvPr id="16" name="Rectangle 15"/>
           <p:cNvSpPr/>
           <p:nvPr/>
         </p:nvSpPr>
@@ -20565,7 +21288,7 @@
       </p:sp>
       <p:sp>
         <p:nvSpPr>
-          <p:cNvPr id="16" name="TextBox 15"/>
+          <p:cNvPr id="17" name="TextBox 16"/>
           <p:cNvSpPr txBox="1"/>
           <p:nvPr/>
         </p:nvSpPr>
@@ -20600,14 +21323,14 @@
               <a:rPr>
                 <a:latin typeface="Inter"/>
               </a:rPr>
-              <a:t>Sources: S3 · S4 · S6</a:t>
+              <a:t>Sources: S1 · S3 · S4 · S6</a:t>
             </a:r>
           </a:p>
         </p:txBody>
       </p:sp>
       <p:sp>
         <p:nvSpPr>
-          <p:cNvPr id="17" name="TextBox 16"/>
+          <p:cNvPr id="18" name="TextBox 17"/>
           <p:cNvSpPr txBox="1"/>
           <p:nvPr/>
         </p:nvSpPr>
@@ -20642,14 +21365,14 @@
               <a:rPr>
                 <a:latin typeface="Inter"/>
               </a:rPr>
-              <a:t>TEST DATA — fictional portfolio for rendering tests only · Data as of 2026-06-30</a:t>
+              <a:t>Confidential — Investment Committee · Data as of 2026-06-30</a:t>
             </a:r>
           </a:p>
         </p:txBody>
       </p:sp>
       <p:sp>
         <p:nvSpPr>
-          <p:cNvPr id="18" name="TextBox 17"/>
+          <p:cNvPr id="19" name="TextBox 18"/>
           <p:cNvSpPr txBox="1"/>
           <p:nvPr/>
         </p:nvSpPr>
@@ -20765,7 +21488,7 @@
         <p:spPr>
           <a:xfrm>
             <a:off x="640080" y="329184"/>
-            <a:ext cx="9875520" cy="182880"/>
+            <a:ext cx="5303520" cy="182880"/>
           </a:xfrm>
           <a:prstGeom prst="rect">
             <a:avLst/>
@@ -20793,7 +21516,7 @@
               <a:rPr>
                 <a:latin typeface="Inter"/>
               </a:rPr>
-              <a:t>COVERAGE REMAINS ADEQUATE UNDER THE FICTIONAL TEST STRESS CASE</a:t>
+              <a:t>COVERAGE REMAINS ADEQUATE UNDER THE SAMPLE STRESS CASE</a:t>
             </a:r>
           </a:p>
         </p:txBody>
@@ -20801,6 +21524,48 @@
       <p:sp>
         <p:nvSpPr>
           <p:cNvPr id="4" name="TextBox 3"/>
+          <p:cNvSpPr txBox="1"/>
+          <p:nvPr/>
+        </p:nvSpPr>
+        <p:spPr>
+          <a:xfrm>
+            <a:off x="5897880" y="310896"/>
+            <a:ext cx="4800600" cy="256032"/>
+          </a:xfrm>
+          <a:prstGeom prst="rect">
+            <a:avLst/>
+          </a:prstGeom>
+          <a:noFill/>
+        </p:spPr>
+        <p:txBody>
+          <a:bodyPr wrap="none" lIns="9144" rIns="9144" tIns="9144" bIns="9144" anchor="t">
+            <a:spAutoFit/>
+          </a:bodyPr>
+          <a:lstStyle/>
+          <a:p>
+            <a:pPr algn="r">
+              <a:spcAft>
+                <a:spcPts val="0"/>
+              </a:spcAft>
+              <a:defRPr sz="680" b="1">
+                <a:solidFill>
+                  <a:srgbClr val="4F6B00"/>
+                </a:solidFill>
+                <a:latin typeface="Inter"/>
+              </a:defRPr>
+            </a:pPr>
+            <a:r>
+              <a:rPr>
+                <a:latin typeface="Inter"/>
+              </a:rPr>
+              <a:t>Illustrative, Gradient Maintained — demo data, not the client's holdings or managers</a:t>
+            </a:r>
+          </a:p>
+        </p:txBody>
+      </p:sp>
+      <p:sp>
+        <p:nvSpPr>
+          <p:cNvPr id="5" name="TextBox 4"/>
           <p:cNvSpPr txBox="1"/>
           <p:nvPr/>
         </p:nvSpPr>
@@ -20842,7 +21607,7 @@
       </p:sp>
       <p:sp>
         <p:nvSpPr>
-          <p:cNvPr id="5" name="Rectangle 4"/>
+          <p:cNvPr id="6" name="Rectangle 5"/>
           <p:cNvSpPr/>
           <p:nvPr/>
         </p:nvSpPr>
@@ -20891,7 +21656,7 @@
       </p:sp>
       <p:sp>
         <p:nvSpPr>
-          <p:cNvPr id="6" name="Rectangle 5"/>
+          <p:cNvPr id="7" name="Rectangle 6"/>
           <p:cNvSpPr/>
           <p:nvPr/>
         </p:nvSpPr>
@@ -20940,7 +21705,7 @@
       </p:sp>
       <p:sp>
         <p:nvSpPr>
-          <p:cNvPr id="7" name="TextBox 6"/>
+          <p:cNvPr id="8" name="TextBox 7"/>
           <p:cNvSpPr txBox="1"/>
           <p:nvPr/>
         </p:nvSpPr>
@@ -20982,7 +21747,7 @@
       </p:sp>
       <p:sp>
         <p:nvSpPr>
-          <p:cNvPr id="8" name="TextBox 7"/>
+          <p:cNvPr id="9" name="TextBox 8"/>
           <p:cNvSpPr txBox="1"/>
           <p:nvPr/>
         </p:nvSpPr>
@@ -21024,7 +21789,7 @@
       </p:sp>
       <p:graphicFrame>
         <p:nvGraphicFramePr>
-          <p:cNvPr id="9" name="Table 8"/>
+          <p:cNvPr id="10" name="Table 9"/>
           <p:cNvGraphicFramePr>
             <a:graphicFrameLocks noGrp="1"/>
           </p:cNvGraphicFramePr>
@@ -21447,7 +22212,7 @@
                         <a:rPr>
                           <a:latin typeface="Inter"/>
                         </a:rPr>
-                        <a:t>● Not assessed</a:t>
+                        <a:t>● not assessed</a:t>
                       </a:r>
                     </a:p>
                   </a:txBody>
@@ -21464,7 +22229,7 @@
       </p:graphicFrame>
       <p:sp>
         <p:nvSpPr>
-          <p:cNvPr id="10" name="Rectangle 9"/>
+          <p:cNvPr id="11" name="Rectangle 10"/>
           <p:cNvSpPr/>
           <p:nvPr/>
         </p:nvSpPr>
@@ -21513,7 +22278,7 @@
       </p:sp>
       <p:sp>
         <p:nvSpPr>
-          <p:cNvPr id="11" name="TextBox 10"/>
+          <p:cNvPr id="12" name="TextBox 11"/>
           <p:cNvSpPr txBox="1"/>
           <p:nvPr/>
         </p:nvSpPr>
@@ -21548,14 +22313,14 @@
               <a:rPr>
                 <a:latin typeface="Inter"/>
               </a:rPr>
-              <a:t>Sources: none cited</a:t>
+              <a:t>Sources: S1</a:t>
             </a:r>
           </a:p>
         </p:txBody>
       </p:sp>
       <p:sp>
         <p:nvSpPr>
-          <p:cNvPr id="12" name="TextBox 11"/>
+          <p:cNvPr id="13" name="TextBox 12"/>
           <p:cNvSpPr txBox="1"/>
           <p:nvPr/>
         </p:nvSpPr>
@@ -21590,14 +22355,14 @@
               <a:rPr>
                 <a:latin typeface="Inter"/>
               </a:rPr>
-              <a:t>TEST DATA — fictional portfolio for rendering tests only · Data as of 2026-06-30</a:t>
+              <a:t>Confidential — Investment Committee · Data as of 2026-06-30</a:t>
             </a:r>
           </a:p>
         </p:txBody>
       </p:sp>
       <p:sp>
         <p:nvSpPr>
-          <p:cNvPr id="13" name="TextBox 12"/>
+          <p:cNvPr id="14" name="TextBox 13"/>
           <p:cNvSpPr txBox="1"/>
           <p:nvPr/>
         </p:nvSpPr>
@@ -21713,7 +22478,7 @@
         <p:spPr>
           <a:xfrm>
             <a:off x="640080" y="329184"/>
-            <a:ext cx="9875520" cy="182880"/>
+            <a:ext cx="5303520" cy="182880"/>
           </a:xfrm>
           <a:prstGeom prst="rect">
             <a:avLst/>
@@ -21754,6 +22519,48 @@
         </p:nvSpPr>
         <p:spPr>
           <a:xfrm>
+            <a:off x="5897880" y="310896"/>
+            <a:ext cx="4800600" cy="256032"/>
+          </a:xfrm>
+          <a:prstGeom prst="rect">
+            <a:avLst/>
+          </a:prstGeom>
+          <a:noFill/>
+        </p:spPr>
+        <p:txBody>
+          <a:bodyPr wrap="none" lIns="9144" rIns="9144" tIns="9144" bIns="9144" anchor="t">
+            <a:spAutoFit/>
+          </a:bodyPr>
+          <a:lstStyle/>
+          <a:p>
+            <a:pPr algn="r">
+              <a:spcAft>
+                <a:spcPts val="0"/>
+              </a:spcAft>
+              <a:defRPr sz="680" b="1">
+                <a:solidFill>
+                  <a:srgbClr val="4F6B00"/>
+                </a:solidFill>
+                <a:latin typeface="Inter"/>
+              </a:defRPr>
+            </a:pPr>
+            <a:r>
+              <a:rPr>
+                <a:latin typeface="Inter"/>
+              </a:rPr>
+              <a:t>Illustrative, Gradient Maintained — demo data, not the client's holdings or managers</a:t>
+            </a:r>
+          </a:p>
+        </p:txBody>
+      </p:sp>
+      <p:sp>
+        <p:nvSpPr>
+          <p:cNvPr id="5" name="TextBox 4"/>
+          <p:cNvSpPr txBox="1"/>
+          <p:nvPr/>
+        </p:nvSpPr>
+        <p:spPr>
+          <a:xfrm>
             <a:off x="640080" y="566928"/>
             <a:ext cx="10058400" cy="530352"/>
           </a:xfrm>
@@ -21790,7 +22597,7 @@
       </p:sp>
       <p:sp>
         <p:nvSpPr>
-          <p:cNvPr id="5" name="Rectangle 4"/>
+          <p:cNvPr id="6" name="Rectangle 5"/>
           <p:cNvSpPr/>
           <p:nvPr/>
         </p:nvSpPr>
@@ -21839,7 +22646,7 @@
       </p:sp>
       <p:sp>
         <p:nvSpPr>
-          <p:cNvPr id="6" name="Rectangle 5"/>
+          <p:cNvPr id="7" name="Rectangle 6"/>
           <p:cNvSpPr/>
           <p:nvPr/>
         </p:nvSpPr>
@@ -21888,7 +22695,7 @@
       </p:sp>
       <p:sp>
         <p:nvSpPr>
-          <p:cNvPr id="7" name="TextBox 6"/>
+          <p:cNvPr id="8" name="TextBox 7"/>
           <p:cNvSpPr txBox="1"/>
           <p:nvPr/>
         </p:nvSpPr>
@@ -21930,7 +22737,7 @@
       </p:sp>
       <p:sp>
         <p:nvSpPr>
-          <p:cNvPr id="8" name="TextBox 7"/>
+          <p:cNvPr id="9" name="TextBox 8"/>
           <p:cNvSpPr txBox="1"/>
           <p:nvPr/>
         </p:nvSpPr>
@@ -21972,7 +22779,7 @@
       </p:sp>
       <p:graphicFrame>
         <p:nvGraphicFramePr>
-          <p:cNvPr id="9" name="Table 8"/>
+          <p:cNvPr id="10" name="Table 9"/>
           <p:cNvGraphicFramePr>
             <a:graphicFrameLocks noGrp="1"/>
           </p:cNvGraphicFramePr>
@@ -21980,7 +22787,7 @@
         </p:nvGraphicFramePr>
         <p:xfrm>
           <a:off x="640080" y="1600200"/>
-          <a:ext cx="10908790" cy="1858492"/>
+          <a:ext cx="10908790" cy="1854253"/>
         </p:xfrm>
         <a:graphic>
           <a:graphicData uri="http://schemas.openxmlformats.org/drawingml/2006/table">
@@ -21996,7 +22803,7 @@
                 <a:gridCol w="1779422"/>
                 <a:gridCol w="1779422"/>
               </a:tblGrid>
-              <a:tr h="371698">
+              <a:tr h="370850">
                 <a:tc>
                   <a:txBody>
                     <a:bodyPr/>
@@ -22160,7 +22967,7 @@
                   </a:tcPr>
                 </a:tc>
               </a:tr>
-              <a:tr h="371698">
+              <a:tr h="370850">
                 <a:tc>
                   <a:txBody>
                     <a:bodyPr/>
@@ -22205,7 +23012,7 @@
                         <a:rPr>
                           <a:latin typeface="Inter"/>
                         </a:rPr>
-                        <a:t>Example Private Manager A (TEST)</a:t>
+                        <a:t>Example Private Manager A</a:t>
                       </a:r>
                     </a:p>
                   </a:txBody>
@@ -22324,7 +23131,7 @@
                   </a:tcPr>
                 </a:tc>
               </a:tr>
-              <a:tr h="371698">
+              <a:tr h="370850">
                 <a:tc>
                   <a:txBody>
                     <a:bodyPr/>
@@ -22450,7 +23257,7 @@
                         <a:rPr>
                           <a:latin typeface="Inter"/>
                         </a:rPr>
-                        <a:t>● Not assessed</a:t>
+                        <a:t>● not assessed</a:t>
                       </a:r>
                     </a:p>
                   </a:txBody>
@@ -22488,7 +23295,7 @@
                   </a:tcPr>
                 </a:tc>
               </a:tr>
-              <a:tr h="371698">
+              <a:tr h="370850">
                 <a:tc>
                   <a:txBody>
                     <a:bodyPr/>
@@ -22533,7 +23340,7 @@
                         <a:rPr>
                           <a:latin typeface="Inter"/>
                         </a:rPr>
-                        <a:t>Fictional Company A (TEST)</a:t>
+                        <a:t>illustrative Company A</a:t>
                       </a:r>
                     </a:p>
                   </a:txBody>
@@ -22652,7 +23459,7 @@
                   </a:tcPr>
                 </a:tc>
               </a:tr>
-              <a:tr h="371700">
+              <a:tr h="370853">
                 <a:tc>
                   <a:txBody>
                     <a:bodyPr/>
@@ -22822,13 +23629,13 @@
       </p:graphicFrame>
       <p:sp>
         <p:nvSpPr>
-          <p:cNvPr id="10" name="TextBox 9"/>
+          <p:cNvPr id="11" name="TextBox 10"/>
           <p:cNvSpPr txBox="1"/>
           <p:nvPr/>
         </p:nvSpPr>
         <p:spPr>
           <a:xfrm>
-            <a:off x="640080" y="3568420"/>
+            <a:off x="640080" y="3564181"/>
             <a:ext cx="10908792" cy="201168"/>
           </a:xfrm>
           <a:prstGeom prst="rect">
@@ -22864,15 +23671,15 @@
       </p:sp>
       <p:graphicFrame>
         <p:nvGraphicFramePr>
-          <p:cNvPr id="11" name="Table 10"/>
+          <p:cNvPr id="12" name="Table 11"/>
           <p:cNvGraphicFramePr>
             <a:graphicFrameLocks noGrp="1"/>
           </p:cNvGraphicFramePr>
           <p:nvPr/>
         </p:nvGraphicFramePr>
         <p:xfrm>
-          <a:off x="640080" y="3842740"/>
-          <a:ext cx="10908792" cy="1099166"/>
+          <a:off x="640080" y="3838501"/>
+          <a:ext cx="10908792" cy="1096436"/>
         </p:xfrm>
         <a:graphic>
           <a:graphicData uri="http://schemas.openxmlformats.org/drawingml/2006/table">
@@ -22892,7 +23699,7 @@
                 <a:gridCol w="988568"/>
                 <a:gridCol w="988568"/>
               </a:tblGrid>
-              <a:tr h="366388">
+              <a:tr h="365478">
                 <a:tc>
                   <a:txBody>
                     <a:bodyPr/>
@@ -23164,7 +23971,7 @@
                   </a:tcPr>
                 </a:tc>
               </a:tr>
-              <a:tr h="366388">
+              <a:tr h="365478">
                 <a:tc>
                   <a:txBody>
                     <a:bodyPr/>
@@ -23182,7 +23989,7 @@
                         <a:rPr>
                           <a:latin typeface="Inter"/>
                         </a:rPr>
-                        <a:t>Fictional Company A (TEST)</a:t>
+                        <a:t>illustrative Company A</a:t>
                       </a:r>
                     </a:p>
                   </a:txBody>
@@ -23436,7 +24243,7 @@
                   </a:tcPr>
                 </a:tc>
               </a:tr>
-              <a:tr h="366390">
+              <a:tr h="365480">
                 <a:tc>
                   <a:txBody>
                     <a:bodyPr/>
@@ -23454,7 +24261,7 @@
                         <a:rPr>
                           <a:latin typeface="Inter"/>
                         </a:rPr>
-                        <a:t>Fictional Company B (TEST)</a:t>
+                        <a:t>illustrative Company B</a:t>
                       </a:r>
                     </a:p>
                   </a:txBody>
@@ -23714,14 +24521,14 @@
       </p:graphicFrame>
       <p:sp>
         <p:nvSpPr>
-          <p:cNvPr id="12" name="TextBox 11"/>
+          <p:cNvPr id="13" name="TextBox 12"/>
           <p:cNvSpPr txBox="1"/>
           <p:nvPr/>
         </p:nvSpPr>
         <p:spPr>
           <a:xfrm>
-            <a:off x="640080" y="5051635"/>
-            <a:ext cx="10908792" cy="1166284"/>
+            <a:off x="640080" y="5044666"/>
+            <a:ext cx="10908792" cy="1173253"/>
           </a:xfrm>
           <a:prstGeom prst="rect">
             <a:avLst/>
@@ -23749,14 +24556,14 @@
               <a:rPr>
                 <a:latin typeface="Inter"/>
               </a:rPr>
-              <a:t>Selected artifact fictional-ilpa-artifact-test, version 1; parser ilpa_portfolio_company_draft_2026_07_22 version 1.0.0; projection registry private-markets-holding-exact-to-range-v1, checksum aaaaaaaaaaaaaaaaaaaaaaaaaaaaaaaaaaaaaaaaaaaaaaaaaaaaaaaaaaaaaaaa. Draft — July 22, 2026. Canonical values, exact ILPA source values and projected Gradient ranges remain separate [S9].</a:t>
+              <a:t>Selected artifact illustrative-ilpa-artifact-test, version 1; parser ilpa_portfolio_company_draft_2026_07_22 version 1.0.0; projection registry private-markets-holding-exact-to-range-v1, checksum aaaaaaaaaaaaaaaaaaaaaaaaaaaaaaaaaaaaaaaaaaaaaaaaaaaaaaaaaaaaaaaa. Draft — July 22, 2026. Canonical values, exact ILPA source values and projected Gradient ranges remain separate [S9].</a:t>
             </a:r>
           </a:p>
         </p:txBody>
       </p:sp>
       <p:sp>
         <p:nvSpPr>
-          <p:cNvPr id="13" name="Rectangle 12"/>
+          <p:cNvPr id="14" name="Rectangle 13"/>
           <p:cNvSpPr/>
           <p:nvPr/>
         </p:nvSpPr>
@@ -23805,7 +24612,7 @@
       </p:sp>
       <p:sp>
         <p:nvSpPr>
-          <p:cNvPr id="14" name="TextBox 13"/>
+          <p:cNvPr id="15" name="TextBox 14"/>
           <p:cNvSpPr txBox="1"/>
           <p:nvPr/>
         </p:nvSpPr>
@@ -23847,7 +24654,7 @@
       </p:sp>
       <p:sp>
         <p:nvSpPr>
-          <p:cNvPr id="15" name="TextBox 14"/>
+          <p:cNvPr id="16" name="TextBox 15"/>
           <p:cNvSpPr txBox="1"/>
           <p:nvPr/>
         </p:nvSpPr>
@@ -23882,14 +24689,14 @@
               <a:rPr>
                 <a:latin typeface="Inter"/>
               </a:rPr>
-              <a:t>TEST DATA — fictional portfolio for rendering tests only · Data as of 2026-06-30</a:t>
+              <a:t>Confidential — Investment Committee · Data as of 2026-06-30</a:t>
             </a:r>
           </a:p>
         </p:txBody>
       </p:sp>
       <p:sp>
         <p:nvSpPr>
-          <p:cNvPr id="16" name="TextBox 15"/>
+          <p:cNvPr id="17" name="TextBox 16"/>
           <p:cNvSpPr txBox="1"/>
           <p:nvPr/>
         </p:nvSpPr>
@@ -24005,7 +24812,7 @@
         <p:spPr>
           <a:xfrm>
             <a:off x="640080" y="329184"/>
-            <a:ext cx="9875520" cy="182880"/>
+            <a:ext cx="5303520" cy="182880"/>
           </a:xfrm>
           <a:prstGeom prst="rect">
             <a:avLst/>
@@ -24046,6 +24853,48 @@
         </p:nvSpPr>
         <p:spPr>
           <a:xfrm>
+            <a:off x="5897880" y="310896"/>
+            <a:ext cx="4800600" cy="256032"/>
+          </a:xfrm>
+          <a:prstGeom prst="rect">
+            <a:avLst/>
+          </a:prstGeom>
+          <a:noFill/>
+        </p:spPr>
+        <p:txBody>
+          <a:bodyPr wrap="none" lIns="9144" rIns="9144" tIns="9144" bIns="9144" anchor="t">
+            <a:spAutoFit/>
+          </a:bodyPr>
+          <a:lstStyle/>
+          <a:p>
+            <a:pPr algn="r">
+              <a:spcAft>
+                <a:spcPts val="0"/>
+              </a:spcAft>
+              <a:defRPr sz="680" b="1">
+                <a:solidFill>
+                  <a:srgbClr val="4F6B00"/>
+                </a:solidFill>
+                <a:latin typeface="Inter"/>
+              </a:defRPr>
+            </a:pPr>
+            <a:r>
+              <a:rPr>
+                <a:latin typeface="Inter"/>
+              </a:rPr>
+              <a:t>Illustrative, Gradient Maintained — demo data, not the client's holdings or managers</a:t>
+            </a:r>
+          </a:p>
+        </p:txBody>
+      </p:sp>
+      <p:sp>
+        <p:nvSpPr>
+          <p:cNvPr id="5" name="TextBox 4"/>
+          <p:cNvSpPr txBox="1"/>
+          <p:nvPr/>
+        </p:nvSpPr>
+        <p:spPr>
+          <a:xfrm>
             <a:off x="640080" y="566928"/>
             <a:ext cx="10058400" cy="530352"/>
           </a:xfrm>
@@ -24082,7 +24931,7 @@
       </p:sp>
       <p:sp>
         <p:nvSpPr>
-          <p:cNvPr id="5" name="Rectangle 4"/>
+          <p:cNvPr id="6" name="Rectangle 5"/>
           <p:cNvSpPr/>
           <p:nvPr/>
         </p:nvSpPr>
@@ -24131,7 +24980,7 @@
       </p:sp>
       <p:sp>
         <p:nvSpPr>
-          <p:cNvPr id="6" name="Rectangle 5"/>
+          <p:cNvPr id="7" name="Rectangle 6"/>
           <p:cNvSpPr/>
           <p:nvPr/>
         </p:nvSpPr>
@@ -24180,7 +25029,7 @@
       </p:sp>
       <p:sp>
         <p:nvSpPr>
-          <p:cNvPr id="7" name="TextBox 6"/>
+          <p:cNvPr id="8" name="TextBox 7"/>
           <p:cNvSpPr txBox="1"/>
           <p:nvPr/>
         </p:nvSpPr>
@@ -24222,7 +25071,7 @@
       </p:sp>
       <p:sp>
         <p:nvSpPr>
-          <p:cNvPr id="8" name="TextBox 7"/>
+          <p:cNvPr id="9" name="TextBox 8"/>
           <p:cNvSpPr txBox="1"/>
           <p:nvPr/>
         </p:nvSpPr>
@@ -24264,7 +25113,7 @@
       </p:sp>
       <p:graphicFrame>
         <p:nvGraphicFramePr>
-          <p:cNvPr id="9" name="Table 8"/>
+          <p:cNvPr id="10" name="Table 9"/>
           <p:cNvGraphicFramePr>
             <a:graphicFrameLocks noGrp="1"/>
           </p:cNvGraphicFramePr>
@@ -24442,7 +25291,7 @@
                         <a:rPr>
                           <a:latin typeface="Inter"/>
                         </a:rPr>
-                        <a:t>Example Private Manager A (TEST)</a:t>
+                        <a:t>Example Private Manager A</a:t>
                       </a:r>
                     </a:p>
                   </a:txBody>
@@ -24704,7 +25553,7 @@
       </p:graphicFrame>
       <p:sp>
         <p:nvSpPr>
-          <p:cNvPr id="10" name="Rectangle 9"/>
+          <p:cNvPr id="11" name="Rectangle 10"/>
           <p:cNvSpPr/>
           <p:nvPr/>
         </p:nvSpPr>
@@ -24753,7 +25602,7 @@
       </p:sp>
       <p:sp>
         <p:nvSpPr>
-          <p:cNvPr id="11" name="TextBox 10"/>
+          <p:cNvPr id="12" name="TextBox 11"/>
           <p:cNvSpPr txBox="1"/>
           <p:nvPr/>
         </p:nvSpPr>
@@ -24795,7 +25644,7 @@
       </p:sp>
       <p:sp>
         <p:nvSpPr>
-          <p:cNvPr id="12" name="TextBox 11"/>
+          <p:cNvPr id="13" name="TextBox 12"/>
           <p:cNvSpPr txBox="1"/>
           <p:nvPr/>
         </p:nvSpPr>
@@ -24830,14 +25679,14 @@
               <a:rPr>
                 <a:latin typeface="Inter"/>
               </a:rPr>
-              <a:t>TEST DATA — fictional portfolio for rendering tests only · Data as of 2026-06-30</a:t>
+              <a:t>Confidential — Investment Committee · Data as of 2026-06-30</a:t>
             </a:r>
           </a:p>
         </p:txBody>
       </p:sp>
       <p:sp>
         <p:nvSpPr>
-          <p:cNvPr id="13" name="TextBox 12"/>
+          <p:cNvPr id="14" name="TextBox 13"/>
           <p:cNvSpPr txBox="1"/>
           <p:nvPr/>
         </p:nvSpPr>
@@ -24953,7 +25802,7 @@
         <p:spPr>
           <a:xfrm>
             <a:off x="640080" y="329184"/>
-            <a:ext cx="9875520" cy="182880"/>
+            <a:ext cx="5303520" cy="182880"/>
           </a:xfrm>
           <a:prstGeom prst="rect">
             <a:avLst/>
@@ -24994,6 +25843,48 @@
         </p:nvSpPr>
         <p:spPr>
           <a:xfrm>
+            <a:off x="5897880" y="310896"/>
+            <a:ext cx="4800600" cy="256032"/>
+          </a:xfrm>
+          <a:prstGeom prst="rect">
+            <a:avLst/>
+          </a:prstGeom>
+          <a:noFill/>
+        </p:spPr>
+        <p:txBody>
+          <a:bodyPr wrap="none" lIns="9144" rIns="9144" tIns="9144" bIns="9144" anchor="t">
+            <a:spAutoFit/>
+          </a:bodyPr>
+          <a:lstStyle/>
+          <a:p>
+            <a:pPr algn="r">
+              <a:spcAft>
+                <a:spcPts val="0"/>
+              </a:spcAft>
+              <a:defRPr sz="680" b="1">
+                <a:solidFill>
+                  <a:srgbClr val="4F6B00"/>
+                </a:solidFill>
+                <a:latin typeface="Inter"/>
+              </a:defRPr>
+            </a:pPr>
+            <a:r>
+              <a:rPr>
+                <a:latin typeface="Inter"/>
+              </a:rPr>
+              <a:t>Illustrative, Gradient Maintained — demo data, not the client's holdings or managers</a:t>
+            </a:r>
+          </a:p>
+        </p:txBody>
+      </p:sp>
+      <p:sp>
+        <p:nvSpPr>
+          <p:cNvPr id="5" name="TextBox 4"/>
+          <p:cNvSpPr txBox="1"/>
+          <p:nvPr/>
+        </p:nvSpPr>
+        <p:spPr>
+          <a:xfrm>
             <a:off x="640080" y="566928"/>
             <a:ext cx="10058400" cy="530352"/>
           </a:xfrm>
@@ -25030,7 +25921,7 @@
       </p:sp>
       <p:sp>
         <p:nvSpPr>
-          <p:cNvPr id="5" name="Rectangle 4"/>
+          <p:cNvPr id="6" name="Rectangle 5"/>
           <p:cNvSpPr/>
           <p:nvPr/>
         </p:nvSpPr>
@@ -25079,7 +25970,7 @@
       </p:sp>
       <p:sp>
         <p:nvSpPr>
-          <p:cNvPr id="6" name="Rectangle 5"/>
+          <p:cNvPr id="7" name="Rectangle 6"/>
           <p:cNvSpPr/>
           <p:nvPr/>
         </p:nvSpPr>
@@ -25128,7 +26019,7 @@
       </p:sp>
       <p:sp>
         <p:nvSpPr>
-          <p:cNvPr id="7" name="TextBox 6"/>
+          <p:cNvPr id="8" name="TextBox 7"/>
           <p:cNvSpPr txBox="1"/>
           <p:nvPr/>
         </p:nvSpPr>
@@ -25170,7 +26061,7 @@
       </p:sp>
       <p:sp>
         <p:nvSpPr>
-          <p:cNvPr id="8" name="TextBox 7"/>
+          <p:cNvPr id="9" name="TextBox 8"/>
           <p:cNvSpPr txBox="1"/>
           <p:nvPr/>
         </p:nvSpPr>
@@ -25212,7 +26103,7 @@
       </p:sp>
       <p:graphicFrame>
         <p:nvGraphicFramePr>
-          <p:cNvPr id="9" name="Table 8"/>
+          <p:cNvPr id="10" name="Table 9"/>
           <p:cNvGraphicFramePr>
             <a:graphicFrameLocks noGrp="1"/>
           </p:cNvGraphicFramePr>
@@ -26062,7 +26953,7 @@
       </p:graphicFrame>
       <p:sp>
         <p:nvSpPr>
-          <p:cNvPr id="10" name="TextBox 9"/>
+          <p:cNvPr id="11" name="TextBox 10"/>
           <p:cNvSpPr txBox="1"/>
           <p:nvPr/>
         </p:nvSpPr>
@@ -26104,7 +26995,7 @@
       </p:sp>
       <p:graphicFrame>
         <p:nvGraphicFramePr>
-          <p:cNvPr id="11" name="Table 10"/>
+          <p:cNvPr id="12" name="Table 11"/>
           <p:cNvGraphicFramePr>
             <a:graphicFrameLocks noGrp="1"/>
           </p:cNvGraphicFramePr>
@@ -26462,7 +27353,7 @@
       </p:graphicFrame>
       <p:sp>
         <p:nvSpPr>
-          <p:cNvPr id="12" name="TextBox 11"/>
+          <p:cNvPr id="13" name="TextBox 12"/>
           <p:cNvSpPr txBox="1"/>
           <p:nvPr/>
         </p:nvSpPr>
@@ -26542,7 +27433,7 @@
       </p:sp>
       <p:sp>
         <p:nvSpPr>
-          <p:cNvPr id="13" name="Rectangle 12"/>
+          <p:cNvPr id="14" name="Rectangle 13"/>
           <p:cNvSpPr/>
           <p:nvPr/>
         </p:nvSpPr>
@@ -26591,7 +27482,7 @@
       </p:sp>
       <p:sp>
         <p:nvSpPr>
-          <p:cNvPr id="14" name="TextBox 13"/>
+          <p:cNvPr id="15" name="TextBox 14"/>
           <p:cNvSpPr txBox="1"/>
           <p:nvPr/>
         </p:nvSpPr>
@@ -26633,7 +27524,7 @@
       </p:sp>
       <p:sp>
         <p:nvSpPr>
-          <p:cNvPr id="15" name="TextBox 14"/>
+          <p:cNvPr id="16" name="TextBox 15"/>
           <p:cNvSpPr txBox="1"/>
           <p:nvPr/>
         </p:nvSpPr>
@@ -26668,14 +27559,14 @@
               <a:rPr>
                 <a:latin typeface="Inter"/>
               </a:rPr>
-              <a:t>TEST DATA — fictional portfolio for rendering tests only · Data as of 2026-06-30</a:t>
+              <a:t>Confidential — Investment Committee · Data as of 2026-06-30</a:t>
             </a:r>
           </a:p>
         </p:txBody>
       </p:sp>
       <p:sp>
         <p:nvSpPr>
-          <p:cNvPr id="16" name="TextBox 15"/>
+          <p:cNvPr id="17" name="TextBox 16"/>
           <p:cNvSpPr txBox="1"/>
           <p:nvPr/>
         </p:nvSpPr>
@@ -26791,7 +27682,7 @@
         <p:spPr>
           <a:xfrm>
             <a:off x="640080" y="329184"/>
-            <a:ext cx="9875520" cy="182880"/>
+            <a:ext cx="5303520" cy="182880"/>
           </a:xfrm>
           <a:prstGeom prst="rect">
             <a:avLst/>
@@ -26832,6 +27723,48 @@
         </p:nvSpPr>
         <p:spPr>
           <a:xfrm>
+            <a:off x="5897880" y="310896"/>
+            <a:ext cx="4800600" cy="256032"/>
+          </a:xfrm>
+          <a:prstGeom prst="rect">
+            <a:avLst/>
+          </a:prstGeom>
+          <a:noFill/>
+        </p:spPr>
+        <p:txBody>
+          <a:bodyPr wrap="none" lIns="9144" rIns="9144" tIns="9144" bIns="9144" anchor="t">
+            <a:spAutoFit/>
+          </a:bodyPr>
+          <a:lstStyle/>
+          <a:p>
+            <a:pPr algn="r">
+              <a:spcAft>
+                <a:spcPts val="0"/>
+              </a:spcAft>
+              <a:defRPr sz="680" b="1">
+                <a:solidFill>
+                  <a:srgbClr val="4F6B00"/>
+                </a:solidFill>
+                <a:latin typeface="Inter"/>
+              </a:defRPr>
+            </a:pPr>
+            <a:r>
+              <a:rPr>
+                <a:latin typeface="Inter"/>
+              </a:rPr>
+              <a:t>Illustrative, Gradient Maintained — demo data, not the client's holdings or managers</a:t>
+            </a:r>
+          </a:p>
+        </p:txBody>
+      </p:sp>
+      <p:sp>
+        <p:nvSpPr>
+          <p:cNvPr id="5" name="TextBox 4"/>
+          <p:cNvSpPr txBox="1"/>
+          <p:nvPr/>
+        </p:nvSpPr>
+        <p:spPr>
+          <a:xfrm>
             <a:off x="640080" y="566928"/>
             <a:ext cx="10058400" cy="530352"/>
           </a:xfrm>
@@ -26868,7 +27801,7 @@
       </p:sp>
       <p:sp>
         <p:nvSpPr>
-          <p:cNvPr id="5" name="Rectangle 4"/>
+          <p:cNvPr id="6" name="Rectangle 5"/>
           <p:cNvSpPr/>
           <p:nvPr/>
         </p:nvSpPr>
@@ -26917,7 +27850,7 @@
       </p:sp>
       <p:sp>
         <p:nvSpPr>
-          <p:cNvPr id="6" name="Rectangle 5"/>
+          <p:cNvPr id="7" name="Rectangle 6"/>
           <p:cNvSpPr/>
           <p:nvPr/>
         </p:nvSpPr>
@@ -26966,7 +27899,7 @@
       </p:sp>
       <p:sp>
         <p:nvSpPr>
-          <p:cNvPr id="7" name="TextBox 6"/>
+          <p:cNvPr id="8" name="TextBox 7"/>
           <p:cNvSpPr txBox="1"/>
           <p:nvPr/>
         </p:nvSpPr>
@@ -27008,14 +27941,14 @@
       </p:sp>
       <p:sp>
         <p:nvSpPr>
-          <p:cNvPr id="8" name="Rectangle 7"/>
+          <p:cNvPr id="9" name="Rectangle 8"/>
           <p:cNvSpPr/>
           <p:nvPr/>
         </p:nvSpPr>
         <p:spPr>
           <a:xfrm>
             <a:off x="640080" y="1325880"/>
-            <a:ext cx="10908792" cy="784877"/>
+            <a:ext cx="10908792" cy="790104"/>
           </a:xfrm>
           <a:prstGeom prst="rect">
             <a:avLst/>
@@ -27057,14 +27990,14 @@
       </p:sp>
       <p:sp>
         <p:nvSpPr>
-          <p:cNvPr id="9" name="Rectangle 8"/>
+          <p:cNvPr id="10" name="Rectangle 9"/>
           <p:cNvSpPr/>
           <p:nvPr/>
         </p:nvSpPr>
         <p:spPr>
           <a:xfrm>
             <a:off x="640080" y="1325880"/>
-            <a:ext cx="54864" cy="784877"/>
+            <a:ext cx="54864" cy="790104"/>
           </a:xfrm>
           <a:prstGeom prst="rect">
             <a:avLst/>
@@ -27106,7 +28039,7 @@
       </p:sp>
       <p:sp>
         <p:nvSpPr>
-          <p:cNvPr id="10" name="TextBox 9"/>
+          <p:cNvPr id="11" name="TextBox 10"/>
           <p:cNvSpPr txBox="1"/>
           <p:nvPr/>
         </p:nvSpPr>
@@ -27148,14 +28081,14 @@
       </p:sp>
       <p:sp>
         <p:nvSpPr>
-          <p:cNvPr id="11" name="TextBox 10"/>
+          <p:cNvPr id="12" name="TextBox 11"/>
           <p:cNvSpPr txBox="1"/>
           <p:nvPr/>
         </p:nvSpPr>
         <p:spPr>
           <a:xfrm>
             <a:off x="804671" y="1719072"/>
-            <a:ext cx="10616184" cy="300245"/>
+            <a:ext cx="10616184" cy="305472"/>
           </a:xfrm>
           <a:prstGeom prst="rect">
             <a:avLst/>
@@ -27190,13 +28123,13 @@
       </p:sp>
       <p:sp>
         <p:nvSpPr>
-          <p:cNvPr id="12" name="TextBox 11"/>
+          <p:cNvPr id="13" name="TextBox 12"/>
           <p:cNvSpPr txBox="1"/>
           <p:nvPr/>
         </p:nvSpPr>
         <p:spPr>
           <a:xfrm>
-            <a:off x="640080" y="2220485"/>
+            <a:off x="640080" y="2225712"/>
             <a:ext cx="10908792" cy="201168"/>
           </a:xfrm>
           <a:prstGeom prst="rect">
@@ -27232,15 +28165,15 @@
       </p:sp>
       <p:graphicFrame>
         <p:nvGraphicFramePr>
-          <p:cNvPr id="13" name="Table 12"/>
+          <p:cNvPr id="14" name="Table 13"/>
           <p:cNvGraphicFramePr>
             <a:graphicFrameLocks noGrp="1"/>
           </p:cNvGraphicFramePr>
           <p:nvPr/>
         </p:nvGraphicFramePr>
         <p:xfrm>
-          <a:off x="640080" y="2494805"/>
-          <a:ext cx="10908792" cy="1266002"/>
+          <a:off x="640080" y="2500032"/>
+          <a:ext cx="10908792" cy="1276260"/>
         </p:xfrm>
         <a:graphic>
           <a:graphicData uri="http://schemas.openxmlformats.org/drawingml/2006/table">
@@ -27254,7 +28187,7 @@
                 <a:gridCol w="2965704"/>
                 <a:gridCol w="2965704"/>
               </a:tblGrid>
-              <a:tr h="316500">
+              <a:tr h="319065">
                 <a:tc>
                   <a:txBody>
                     <a:bodyPr/>
@@ -27364,7 +28297,7 @@
                   </a:tcPr>
                 </a:tc>
               </a:tr>
-              <a:tr h="316500">
+              <a:tr h="319065">
                 <a:tc>
                   <a:txBody>
                     <a:bodyPr/>
@@ -27474,7 +28407,7 @@
                   </a:tcPr>
                 </a:tc>
               </a:tr>
-              <a:tr h="316500">
+              <a:tr h="319065">
                 <a:tc>
                   <a:txBody>
                     <a:bodyPr/>
@@ -27584,7 +28517,7 @@
                   </a:tcPr>
                 </a:tc>
               </a:tr>
-              <a:tr h="316502">
+              <a:tr h="319065">
                 <a:tc>
                   <a:txBody>
                     <a:bodyPr/>
@@ -27700,14 +28633,14 @@
       </p:graphicFrame>
       <p:sp>
         <p:nvSpPr>
-          <p:cNvPr id="14" name="Rectangle 13"/>
+          <p:cNvPr id="15" name="Rectangle 14"/>
           <p:cNvSpPr/>
           <p:nvPr/>
         </p:nvSpPr>
         <p:spPr>
           <a:xfrm>
-            <a:off x="640080" y="3870536"/>
-            <a:ext cx="10908792" cy="784877"/>
+            <a:off x="640080" y="3886021"/>
+            <a:ext cx="10908792" cy="790104"/>
           </a:xfrm>
           <a:prstGeom prst="rect">
             <a:avLst/>
@@ -27749,14 +28682,14 @@
       </p:sp>
       <p:sp>
         <p:nvSpPr>
-          <p:cNvPr id="15" name="Rectangle 14"/>
+          <p:cNvPr id="16" name="Rectangle 15"/>
           <p:cNvSpPr/>
           <p:nvPr/>
         </p:nvSpPr>
         <p:spPr>
           <a:xfrm>
-            <a:off x="640080" y="3870536"/>
-            <a:ext cx="54864" cy="784877"/>
+            <a:off x="640080" y="3886021"/>
+            <a:ext cx="54864" cy="790104"/>
           </a:xfrm>
           <a:prstGeom prst="rect">
             <a:avLst/>
@@ -27798,13 +28731,13 @@
       </p:sp>
       <p:sp>
         <p:nvSpPr>
-          <p:cNvPr id="16" name="TextBox 15"/>
+          <p:cNvPr id="17" name="TextBox 16"/>
           <p:cNvSpPr txBox="1"/>
           <p:nvPr/>
         </p:nvSpPr>
         <p:spPr>
           <a:xfrm>
-            <a:off x="804671" y="3980264"/>
+            <a:off x="804671" y="3995749"/>
             <a:ext cx="10616184" cy="228600"/>
           </a:xfrm>
           <a:prstGeom prst="rect">
@@ -27840,14 +28773,14 @@
       </p:sp>
       <p:sp>
         <p:nvSpPr>
-          <p:cNvPr id="17" name="TextBox 16"/>
+          <p:cNvPr id="18" name="TextBox 17"/>
           <p:cNvSpPr txBox="1"/>
           <p:nvPr/>
         </p:nvSpPr>
         <p:spPr>
           <a:xfrm>
-            <a:off x="804671" y="4263728"/>
-            <a:ext cx="10616184" cy="300245"/>
+            <a:off x="804671" y="4279213"/>
+            <a:ext cx="10616184" cy="305472"/>
           </a:xfrm>
           <a:prstGeom prst="rect">
             <a:avLst/>
@@ -27882,14 +28815,14 @@
       </p:sp>
       <p:sp>
         <p:nvSpPr>
-          <p:cNvPr id="18" name="Rectangle 17"/>
+          <p:cNvPr id="19" name="Rectangle 18"/>
           <p:cNvSpPr/>
           <p:nvPr/>
         </p:nvSpPr>
         <p:spPr>
           <a:xfrm>
-            <a:off x="640080" y="4765141"/>
-            <a:ext cx="10908792" cy="1452778"/>
+            <a:off x="640080" y="4785854"/>
+            <a:ext cx="10908792" cy="1432065"/>
           </a:xfrm>
           <a:prstGeom prst="rect">
             <a:avLst/>
@@ -27931,14 +28864,14 @@
       </p:sp>
       <p:sp>
         <p:nvSpPr>
-          <p:cNvPr id="19" name="Rectangle 18"/>
+          <p:cNvPr id="20" name="Rectangle 19"/>
           <p:cNvSpPr/>
           <p:nvPr/>
         </p:nvSpPr>
         <p:spPr>
           <a:xfrm>
-            <a:off x="640080" y="4765141"/>
-            <a:ext cx="54864" cy="1452778"/>
+            <a:off x="640080" y="4785854"/>
+            <a:ext cx="54864" cy="1432065"/>
           </a:xfrm>
           <a:prstGeom prst="rect">
             <a:avLst/>
@@ -27980,13 +28913,13 @@
       </p:sp>
       <p:sp>
         <p:nvSpPr>
-          <p:cNvPr id="20" name="TextBox 19"/>
+          <p:cNvPr id="21" name="TextBox 20"/>
           <p:cNvSpPr txBox="1"/>
           <p:nvPr/>
         </p:nvSpPr>
         <p:spPr>
           <a:xfrm>
-            <a:off x="804671" y="4874869"/>
+            <a:off x="804671" y="4895582"/>
             <a:ext cx="10616184" cy="228600"/>
           </a:xfrm>
           <a:prstGeom prst="rect">
@@ -28022,14 +28955,14 @@
       </p:sp>
       <p:sp>
         <p:nvSpPr>
-          <p:cNvPr id="21" name="TextBox 20"/>
+          <p:cNvPr id="22" name="TextBox 21"/>
           <p:cNvSpPr txBox="1"/>
           <p:nvPr/>
         </p:nvSpPr>
         <p:spPr>
           <a:xfrm>
-            <a:off x="804671" y="5158333"/>
-            <a:ext cx="10616184" cy="968146"/>
+            <a:off x="804671" y="5179046"/>
+            <a:ext cx="10616184" cy="947433"/>
           </a:xfrm>
           <a:prstGeom prst="rect">
             <a:avLst/>
@@ -28057,14 +28990,14 @@
               <a:rPr>
                 <a:latin typeface="Inter"/>
               </a:rPr>
-              <a:t>Observation: The fictional TEST report carries a pacing-and-concentration signal above the clear threshold [S1]. Why it matters: This signal focuses oversight on the report's most decision-relevant condition. Uncertainty: Evidence coverage may exclude newer or more detailed observations. What would change the view: A governed refresh showing a different signal or breached threshold.</a:t>
+              <a:t>Observation: The sample report carries a pacing-and-concentration signal above the clear threshold [S1]. Why it matters: This signal focuses oversight on the report's most decision-relevant condition. Uncertainty: Evidence coverage may exclude newer or more detailed observations. What would change the view: A governed refresh showing a different signal or breached threshold.</a:t>
             </a:r>
           </a:p>
         </p:txBody>
       </p:sp>
       <p:sp>
         <p:nvSpPr>
-          <p:cNvPr id="22" name="Rectangle 21"/>
+          <p:cNvPr id="23" name="Rectangle 22"/>
           <p:cNvSpPr/>
           <p:nvPr/>
         </p:nvSpPr>
@@ -28113,7 +29046,7 @@
       </p:sp>
       <p:sp>
         <p:nvSpPr>
-          <p:cNvPr id="23" name="TextBox 22"/>
+          <p:cNvPr id="24" name="TextBox 23"/>
           <p:cNvSpPr txBox="1"/>
           <p:nvPr/>
         </p:nvSpPr>
@@ -28155,7 +29088,7 @@
       </p:sp>
       <p:sp>
         <p:nvSpPr>
-          <p:cNvPr id="24" name="TextBox 23"/>
+          <p:cNvPr id="25" name="TextBox 24"/>
           <p:cNvSpPr txBox="1"/>
           <p:nvPr/>
         </p:nvSpPr>
@@ -28190,14 +29123,14 @@
               <a:rPr>
                 <a:latin typeface="Inter"/>
               </a:rPr>
-              <a:t>TEST DATA — fictional portfolio for rendering tests only · Data as of 2026-06-30</a:t>
+              <a:t>Confidential — Investment Committee · Data as of 2026-06-30</a:t>
             </a:r>
           </a:p>
         </p:txBody>
       </p:sp>
       <p:sp>
         <p:nvSpPr>
-          <p:cNvPr id="25" name="TextBox 24"/>
+          <p:cNvPr id="26" name="TextBox 25"/>
           <p:cNvSpPr txBox="1"/>
           <p:nvPr/>
         </p:nvSpPr>
@@ -28313,7 +29246,7 @@
         <p:spPr>
           <a:xfrm>
             <a:off x="640080" y="329184"/>
-            <a:ext cx="9875520" cy="182880"/>
+            <a:ext cx="5303520" cy="182880"/>
           </a:xfrm>
           <a:prstGeom prst="rect">
             <a:avLst/>
@@ -28354,6 +29287,48 @@
         </p:nvSpPr>
         <p:spPr>
           <a:xfrm>
+            <a:off x="5897880" y="310896"/>
+            <a:ext cx="4800600" cy="256032"/>
+          </a:xfrm>
+          <a:prstGeom prst="rect">
+            <a:avLst/>
+          </a:prstGeom>
+          <a:noFill/>
+        </p:spPr>
+        <p:txBody>
+          <a:bodyPr wrap="none" lIns="9144" rIns="9144" tIns="9144" bIns="9144" anchor="t">
+            <a:spAutoFit/>
+          </a:bodyPr>
+          <a:lstStyle/>
+          <a:p>
+            <a:pPr algn="r">
+              <a:spcAft>
+                <a:spcPts val="0"/>
+              </a:spcAft>
+              <a:defRPr sz="680" b="1">
+                <a:solidFill>
+                  <a:srgbClr val="4F6B00"/>
+                </a:solidFill>
+                <a:latin typeface="Inter"/>
+              </a:defRPr>
+            </a:pPr>
+            <a:r>
+              <a:rPr>
+                <a:latin typeface="Inter"/>
+              </a:rPr>
+              <a:t>Illustrative, Gradient Maintained — demo data, not the client's holdings or managers</a:t>
+            </a:r>
+          </a:p>
+        </p:txBody>
+      </p:sp>
+      <p:sp>
+        <p:nvSpPr>
+          <p:cNvPr id="5" name="TextBox 4"/>
+          <p:cNvSpPr txBox="1"/>
+          <p:nvPr/>
+        </p:nvSpPr>
+        <p:spPr>
+          <a:xfrm>
             <a:off x="640080" y="566928"/>
             <a:ext cx="10058400" cy="530352"/>
           </a:xfrm>
@@ -28390,7 +29365,7 @@
       </p:sp>
       <p:sp>
         <p:nvSpPr>
-          <p:cNvPr id="5" name="Rectangle 4"/>
+          <p:cNvPr id="6" name="Rectangle 5"/>
           <p:cNvSpPr/>
           <p:nvPr/>
         </p:nvSpPr>
@@ -28439,7 +29414,7 @@
       </p:sp>
       <p:sp>
         <p:nvSpPr>
-          <p:cNvPr id="6" name="Rectangle 5"/>
+          <p:cNvPr id="7" name="Rectangle 6"/>
           <p:cNvSpPr/>
           <p:nvPr/>
         </p:nvSpPr>
@@ -28488,7 +29463,7 @@
       </p:sp>
       <p:sp>
         <p:nvSpPr>
-          <p:cNvPr id="7" name="TextBox 6"/>
+          <p:cNvPr id="8" name="TextBox 7"/>
           <p:cNvSpPr txBox="1"/>
           <p:nvPr/>
         </p:nvSpPr>
@@ -28530,7 +29505,7 @@
       </p:sp>
       <p:sp>
         <p:nvSpPr>
-          <p:cNvPr id="8" name="TextBox 7"/>
+          <p:cNvPr id="9" name="TextBox 8"/>
           <p:cNvSpPr txBox="1"/>
           <p:nvPr/>
         </p:nvSpPr>
@@ -28572,7 +29547,7 @@
       </p:sp>
       <p:graphicFrame>
         <p:nvGraphicFramePr>
-          <p:cNvPr id="9" name="Table 8"/>
+          <p:cNvPr id="10" name="Table 9"/>
           <p:cNvGraphicFramePr>
             <a:graphicFrameLocks noGrp="1"/>
           </p:cNvGraphicFramePr>
@@ -29149,7 +30124,7 @@
       </p:graphicFrame>
       <p:sp>
         <p:nvSpPr>
-          <p:cNvPr id="10" name="TextBox 9"/>
+          <p:cNvPr id="11" name="TextBox 10"/>
           <p:cNvSpPr txBox="1"/>
           <p:nvPr/>
         </p:nvSpPr>
@@ -29191,7 +30166,7 @@
       </p:sp>
       <p:graphicFrame>
         <p:nvGraphicFramePr>
-          <p:cNvPr id="11" name="Table 10"/>
+          <p:cNvPr id="12" name="Table 11"/>
           <p:cNvGraphicFramePr>
             <a:graphicFrameLocks noGrp="1"/>
           </p:cNvGraphicFramePr>
@@ -29768,7 +30743,7 @@
       </p:graphicFrame>
       <p:sp>
         <p:nvSpPr>
-          <p:cNvPr id="12" name="Rectangle 11"/>
+          <p:cNvPr id="13" name="Rectangle 12"/>
           <p:cNvSpPr/>
           <p:nvPr/>
         </p:nvSpPr>
@@ -29817,7 +30792,7 @@
       </p:sp>
       <p:sp>
         <p:nvSpPr>
-          <p:cNvPr id="13" name="TextBox 12"/>
+          <p:cNvPr id="14" name="TextBox 13"/>
           <p:cNvSpPr txBox="1"/>
           <p:nvPr/>
         </p:nvSpPr>
@@ -29859,7 +30834,7 @@
       </p:sp>
       <p:sp>
         <p:nvSpPr>
-          <p:cNvPr id="14" name="TextBox 13"/>
+          <p:cNvPr id="15" name="TextBox 14"/>
           <p:cNvSpPr txBox="1"/>
           <p:nvPr/>
         </p:nvSpPr>
@@ -29894,14 +30869,14 @@
               <a:rPr>
                 <a:latin typeface="Inter"/>
               </a:rPr>
-              <a:t>TEST DATA — fictional portfolio for rendering tests only · Data as of 2026-06-30</a:t>
+              <a:t>Confidential — Investment Committee · Data as of 2026-06-30</a:t>
             </a:r>
           </a:p>
         </p:txBody>
       </p:sp>
       <p:sp>
         <p:nvSpPr>
-          <p:cNvPr id="15" name="TextBox 14"/>
+          <p:cNvPr id="16" name="TextBox 15"/>
           <p:cNvSpPr txBox="1"/>
           <p:nvPr/>
         </p:nvSpPr>
@@ -30016,6 +30991,48 @@
         </p:nvSpPr>
         <p:spPr>
           <a:xfrm>
+            <a:off x="5897880" y="310896"/>
+            <a:ext cx="4800600" cy="256032"/>
+          </a:xfrm>
+          <a:prstGeom prst="rect">
+            <a:avLst/>
+          </a:prstGeom>
+          <a:noFill/>
+        </p:spPr>
+        <p:txBody>
+          <a:bodyPr wrap="none" lIns="9144" rIns="9144" tIns="9144" bIns="9144" anchor="t">
+            <a:spAutoFit/>
+          </a:bodyPr>
+          <a:lstStyle/>
+          <a:p>
+            <a:pPr algn="r">
+              <a:spcAft>
+                <a:spcPts val="0"/>
+              </a:spcAft>
+              <a:defRPr sz="680" b="1">
+                <a:solidFill>
+                  <a:srgbClr val="4F6B00"/>
+                </a:solidFill>
+                <a:latin typeface="Inter"/>
+              </a:defRPr>
+            </a:pPr>
+            <a:r>
+              <a:rPr>
+                <a:latin typeface="Inter"/>
+              </a:rPr>
+              <a:t>Illustrative, Gradient Maintained — demo data, not the client's holdings or managers</a:t>
+            </a:r>
+          </a:p>
+        </p:txBody>
+      </p:sp>
+      <p:sp>
+        <p:nvSpPr>
+          <p:cNvPr id="4" name="TextBox 3"/>
+          <p:cNvSpPr txBox="1"/>
+          <p:nvPr/>
+        </p:nvSpPr>
+        <p:spPr>
+          <a:xfrm>
             <a:off x="640080" y="566928"/>
             <a:ext cx="10058400" cy="530352"/>
           </a:xfrm>
@@ -30052,7 +31069,7 @@
       </p:sp>
       <p:sp>
         <p:nvSpPr>
-          <p:cNvPr id="4" name="Rectangle 3"/>
+          <p:cNvPr id="5" name="Rectangle 4"/>
           <p:cNvSpPr/>
           <p:nvPr/>
         </p:nvSpPr>
@@ -30101,7 +31118,7 @@
       </p:sp>
       <p:sp>
         <p:nvSpPr>
-          <p:cNvPr id="5" name="Rectangle 4"/>
+          <p:cNvPr id="6" name="Rectangle 5"/>
           <p:cNvSpPr/>
           <p:nvPr/>
         </p:nvSpPr>
@@ -30150,7 +31167,7 @@
       </p:sp>
       <p:sp>
         <p:nvSpPr>
-          <p:cNvPr id="6" name="TextBox 5"/>
+          <p:cNvPr id="7" name="TextBox 6"/>
           <p:cNvSpPr txBox="1"/>
           <p:nvPr/>
         </p:nvSpPr>
@@ -30192,7 +31209,7 @@
       </p:sp>
       <p:graphicFrame>
         <p:nvGraphicFramePr>
-          <p:cNvPr id="7" name="Table 6"/>
+          <p:cNvPr id="8" name="Table 7"/>
           <p:cNvGraphicFramePr>
             <a:graphicFrameLocks noGrp="1"/>
           </p:cNvGraphicFramePr>
@@ -30368,7 +31385,7 @@
                         <a:rPr>
                           <a:latin typeface="Inter"/>
                         </a:rPr>
-                        <a:t>Fictional TEST data [S2]</a:t>
+                        <a:t>Illustrative sample data [S2]</a:t>
                       </a:r>
                     </a:p>
                   </a:txBody>
@@ -30700,7 +31717,7 @@
                         <a:rPr>
                           <a:latin typeface="Inter"/>
                         </a:rPr>
-                        <a:t>2026 Strategic CMA (TEST) [S5]</a:t>
+                        <a:t>2026 Strategic CMA [S5]</a:t>
                       </a:r>
                     </a:p>
                   </a:txBody>
@@ -31381,7 +32398,7 @@
       </p:graphicFrame>
       <p:sp>
         <p:nvSpPr>
-          <p:cNvPr id="8" name="Rectangle 7"/>
+          <p:cNvPr id="9" name="Rectangle 8"/>
           <p:cNvSpPr/>
           <p:nvPr/>
         </p:nvSpPr>
@@ -31430,7 +32447,7 @@
       </p:sp>
       <p:sp>
         <p:nvSpPr>
-          <p:cNvPr id="9" name="TextBox 8"/>
+          <p:cNvPr id="10" name="TextBox 9"/>
           <p:cNvSpPr txBox="1"/>
           <p:nvPr/>
         </p:nvSpPr>
@@ -31472,7 +32489,7 @@
       </p:sp>
       <p:sp>
         <p:nvSpPr>
-          <p:cNvPr id="10" name="TextBox 9"/>
+          <p:cNvPr id="11" name="TextBox 10"/>
           <p:cNvSpPr txBox="1"/>
           <p:nvPr/>
         </p:nvSpPr>
@@ -31507,14 +32524,14 @@
               <a:rPr>
                 <a:latin typeface="Inter"/>
               </a:rPr>
-              <a:t>TEST DATA — fictional portfolio for rendering tests only · Data as of 2026-06-30</a:t>
+              <a:t>Confidential — Investment Committee · Data as of 2026-06-30</a:t>
             </a:r>
           </a:p>
         </p:txBody>
       </p:sp>
       <p:sp>
         <p:nvSpPr>
-          <p:cNvPr id="11" name="TextBox 10"/>
+          <p:cNvPr id="12" name="TextBox 11"/>
           <p:cNvSpPr txBox="1"/>
           <p:nvPr/>
         </p:nvSpPr>
@@ -31629,6 +32646,48 @@
         </p:nvSpPr>
         <p:spPr>
           <a:xfrm>
+            <a:off x="5897880" y="310896"/>
+            <a:ext cx="4800600" cy="256032"/>
+          </a:xfrm>
+          <a:prstGeom prst="rect">
+            <a:avLst/>
+          </a:prstGeom>
+          <a:noFill/>
+        </p:spPr>
+        <p:txBody>
+          <a:bodyPr wrap="none" lIns="9144" rIns="9144" tIns="9144" bIns="9144" anchor="t">
+            <a:spAutoFit/>
+          </a:bodyPr>
+          <a:lstStyle/>
+          <a:p>
+            <a:pPr algn="r">
+              <a:spcAft>
+                <a:spcPts val="0"/>
+              </a:spcAft>
+              <a:defRPr sz="680" b="1">
+                <a:solidFill>
+                  <a:srgbClr val="4F6B00"/>
+                </a:solidFill>
+                <a:latin typeface="Inter"/>
+              </a:defRPr>
+            </a:pPr>
+            <a:r>
+              <a:rPr>
+                <a:latin typeface="Inter"/>
+              </a:rPr>
+              <a:t>Illustrative, Gradient Maintained — demo data, not the client's holdings or managers</a:t>
+            </a:r>
+          </a:p>
+        </p:txBody>
+      </p:sp>
+      <p:sp>
+        <p:nvSpPr>
+          <p:cNvPr id="4" name="TextBox 3"/>
+          <p:cNvSpPr txBox="1"/>
+          <p:nvPr/>
+        </p:nvSpPr>
+        <p:spPr>
+          <a:xfrm>
             <a:off x="640080" y="566928"/>
             <a:ext cx="10058400" cy="530352"/>
           </a:xfrm>
@@ -31658,14 +32717,14 @@
               <a:rPr>
                 <a:latin typeface="Inter"/>
               </a:rPr>
-              <a:t>Appendix A — Sources</a:t>
+              <a:t>Appendix — Sources and methods</a:t>
             </a:r>
           </a:p>
         </p:txBody>
       </p:sp>
       <p:sp>
         <p:nvSpPr>
-          <p:cNvPr id="4" name="Rectangle 3"/>
+          <p:cNvPr id="5" name="Rectangle 4"/>
           <p:cNvSpPr/>
           <p:nvPr/>
         </p:nvSpPr>
@@ -31714,7 +32773,7 @@
       </p:sp>
       <p:sp>
         <p:nvSpPr>
-          <p:cNvPr id="5" name="Rectangle 4"/>
+          <p:cNvPr id="6" name="Rectangle 5"/>
           <p:cNvSpPr/>
           <p:nvPr/>
         </p:nvSpPr>
@@ -31763,7 +32822,7 @@
       </p:sp>
       <p:sp>
         <p:nvSpPr>
-          <p:cNvPr id="6" name="TextBox 5"/>
+          <p:cNvPr id="7" name="TextBox 6"/>
           <p:cNvSpPr txBox="1"/>
           <p:nvPr/>
         </p:nvSpPr>
@@ -31805,7 +32864,7 @@
       </p:sp>
       <p:graphicFrame>
         <p:nvGraphicFramePr>
-          <p:cNvPr id="7" name="Table 6"/>
+          <p:cNvPr id="8" name="Table 7"/>
           <p:cNvGraphicFramePr>
             <a:graphicFrameLocks noGrp="1"/>
           </p:cNvGraphicFramePr>
@@ -31813,7 +32872,7 @@
         </p:nvGraphicFramePr>
         <p:xfrm>
           <a:off x="640080" y="1325880"/>
-          <a:ext cx="10908792" cy="4892040"/>
+          <a:ext cx="10908792" cy="4690872"/>
         </p:xfrm>
         <a:graphic>
           <a:graphicData uri="http://schemas.openxmlformats.org/drawingml/2006/table">
@@ -31823,15 +32882,16 @@
               </a:tblPr>
               <a:tblGrid>
                 <a:gridCol w="2011680"/>
-                <a:gridCol w="1271016"/>
-                <a:gridCol w="1271016"/>
-                <a:gridCol w="1271016"/>
-                <a:gridCol w="1271016"/>
-                <a:gridCol w="1271016"/>
-                <a:gridCol w="1271016"/>
-                <a:gridCol w="1271016"/>
+                <a:gridCol w="1112139"/>
+                <a:gridCol w="1112139"/>
+                <a:gridCol w="1112139"/>
+                <a:gridCol w="1112139"/>
+                <a:gridCol w="1112139"/>
+                <a:gridCol w="1112139"/>
+                <a:gridCol w="1112139"/>
+                <a:gridCol w="1112139"/>
               </a:tblGrid>
-              <a:tr h="489204">
+              <a:tr h="469087">
                 <a:tc>
                   <a:txBody>
                     <a:bodyPr/>
@@ -31903,6 +32963,33 @@
                         <a:rPr>
                           <a:latin typeface="Inter"/>
                         </a:rPr>
+                        <a:t>Basis</a:t>
+                      </a:r>
+                    </a:p>
+                  </a:txBody>
+                  <a:tcPr marL="54864" marR="54864" marT="27432" marB="27432" anchor="ctr">
+                    <a:solidFill>
+                      <a:srgbClr val="0D1117"/>
+                    </a:solidFill>
+                  </a:tcPr>
+                </a:tc>
+                <a:tc>
+                  <a:txBody>
+                    <a:bodyPr/>
+                    <a:lstStyle/>
+                    <a:p>
+                      <a:pPr>
+                        <a:defRPr sz="750" b="1">
+                          <a:solidFill>
+                            <a:srgbClr val="FFFFFF"/>
+                          </a:solidFill>
+                          <a:latin typeface="Inter"/>
+                        </a:defRPr>
+                      </a:pPr>
+                      <a:r>
+                        <a:rPr>
+                          <a:latin typeface="Inter"/>
+                        </a:rPr>
                         <a:t>Tool / view</a:t>
                       </a:r>
                     </a:p>
@@ -32049,7 +33136,7 @@
                   </a:tcPr>
                 </a:tc>
               </a:tr>
-              <a:tr h="489204">
+              <a:tr h="469087">
                 <a:tc>
                   <a:txBody>
                     <a:bodyPr/>
@@ -32121,6 +33208,33 @@
                         <a:rPr>
                           <a:latin typeface="Inter"/>
                         </a:rPr>
+                        <a:t>gradient_tool</a:t>
+                      </a:r>
+                    </a:p>
+                  </a:txBody>
+                  <a:tcPr marL="54864" marR="54864" marT="27432" marB="27432" anchor="ctr">
+                    <a:solidFill>
+                      <a:srgbClr val="FFFFFF"/>
+                    </a:solidFill>
+                  </a:tcPr>
+                </a:tc>
+                <a:tc>
+                  <a:txBody>
+                    <a:bodyPr/>
+                    <a:lstStyle/>
+                    <a:p>
+                      <a:pPr>
+                        <a:defRPr sz="650" b="0">
+                          <a:solidFill>
+                            <a:srgbClr val="0D1117"/>
+                          </a:solidFill>
+                          <a:latin typeface="Inter"/>
+                        </a:defRPr>
+                      </a:pPr>
+                      <a:r>
+                        <a:rPr>
+                          <a:latin typeface="Inter"/>
+                        </a:rPr>
                         <a:t>list_organizations; get_gradient_capabilities</a:t>
                       </a:r>
                     </a:p>
@@ -32202,7 +33316,7 @@
                         <a:rPr>
                           <a:latin typeface="Inter"/>
                         </a:rPr>
-                        <a:t>Fictional TEST data</a:t>
+                        <a:t>Illustrative sample data</a:t>
                       </a:r>
                     </a:p>
                   </a:txBody>
@@ -32256,7 +33370,7 @@
                         <a:rPr>
                           <a:latin typeface="Inter"/>
                         </a:rPr>
-                        <a:t>pm-s1</a:t>
+                        <a:t>sha256:aaaaaaaaaaaaaaaaaaaaaaaaaaaaaaaaaaaaaaaaaaaaaaaaaaaaaaaaaaaaaaaa</a:t>
                       </a:r>
                     </a:p>
                   </a:txBody>
@@ -32267,7 +33381,7 @@
                   </a:tcPr>
                 </a:tc>
               </a:tr>
-              <a:tr h="489204">
+              <a:tr h="469087">
                 <a:tc>
                   <a:txBody>
                     <a:bodyPr/>
@@ -32339,6 +33453,33 @@
                         <a:rPr>
                           <a:latin typeface="Inter"/>
                         </a:rPr>
+                        <a:t>gradient_tool</a:t>
+                      </a:r>
+                    </a:p>
+                  </a:txBody>
+                  <a:tcPr marL="54864" marR="54864" marT="27432" marB="27432" anchor="ctr">
+                    <a:solidFill>
+                      <a:srgbClr val="F5F7F9"/>
+                    </a:solidFill>
+                  </a:tcPr>
+                </a:tc>
+                <a:tc>
+                  <a:txBody>
+                    <a:bodyPr/>
+                    <a:lstStyle/>
+                    <a:p>
+                      <a:pPr>
+                        <a:defRPr sz="650" b="0">
+                          <a:solidFill>
+                            <a:srgbClr val="0D1117"/>
+                          </a:solidFill>
+                          <a:latin typeface="Inter"/>
+                        </a:defRPr>
+                      </a:pPr>
+                      <a:r>
+                        <a:rPr>
+                          <a:latin typeface="Inter"/>
+                        </a:rPr>
                         <a:t>list_portfolios; get_portfolio_structure</a:t>
                       </a:r>
                     </a:p>
@@ -32420,7 +33561,7 @@
                         <a:rPr>
                           <a:latin typeface="Inter"/>
                         </a:rPr>
-                        <a:t>Fictional TEST data</a:t>
+                        <a:t>Illustrative sample data</a:t>
                       </a:r>
                     </a:p>
                   </a:txBody>
@@ -32474,7 +33615,7 @@
                         <a:rPr>
                           <a:latin typeface="Inter"/>
                         </a:rPr>
-                        <a:t>pm-s2</a:t>
+                        <a:t>sha256:aaaaaaaaaaaaaaaaaaaaaaaaaaaaaaaaaaaaaaaaaaaaaaaaaaaaaaaaaaaaaaaa</a:t>
                       </a:r>
                     </a:p>
                   </a:txBody>
@@ -32485,7 +33626,7 @@
                   </a:tcPr>
                 </a:tc>
               </a:tr>
-              <a:tr h="489204">
+              <a:tr h="469087">
                 <a:tc>
                   <a:txBody>
                     <a:bodyPr/>
@@ -32557,6 +33698,33 @@
                         <a:rPr>
                           <a:latin typeface="Inter"/>
                         </a:rPr>
+                        <a:t>gradient_tool</a:t>
+                      </a:r>
+                    </a:p>
+                  </a:txBody>
+                  <a:tcPr marL="54864" marR="54864" marT="27432" marB="27432" anchor="ctr">
+                    <a:solidFill>
+                      <a:srgbClr val="FFFFFF"/>
+                    </a:solidFill>
+                  </a:tcPr>
+                </a:tc>
+                <a:tc>
+                  <a:txBody>
+                    <a:bodyPr/>
+                    <a:lstStyle/>
+                    <a:p>
+                      <a:pPr>
+                        <a:defRPr sz="650" b="0">
+                          <a:solidFill>
+                            <a:srgbClr val="0D1117"/>
+                          </a:solidFill>
+                          <a:latin typeface="Inter"/>
+                        </a:defRPr>
+                      </a:pPr>
+                      <a:r>
+                        <a:rPr>
+                          <a:latin typeface="Inter"/>
+                        </a:rPr>
                         <a:t>check_portfolio_policy</a:t>
                       </a:r>
                     </a:p>
@@ -32638,7 +33806,7 @@
                         <a:rPr>
                           <a:latin typeface="Inter"/>
                         </a:rPr>
-                        <a:t>Fictional TEST data</a:t>
+                        <a:t>Illustrative sample data</a:t>
                       </a:r>
                     </a:p>
                   </a:txBody>
@@ -32692,7 +33860,7 @@
                         <a:rPr>
                           <a:latin typeface="Inter"/>
                         </a:rPr>
-                        <a:t>pm-s3</a:t>
+                        <a:t>sha256:aaaaaaaaaaaaaaaaaaaaaaaaaaaaaaaaaaaaaaaaaaaaaaaaaaaaaaaaaaaaaaaa</a:t>
                       </a:r>
                     </a:p>
                   </a:txBody>
@@ -32703,7 +33871,7 @@
                   </a:tcPr>
                 </a:tc>
               </a:tr>
-              <a:tr h="489204">
+              <a:tr h="469087">
                 <a:tc>
                   <a:txBody>
                     <a:bodyPr/>
@@ -32775,6 +33943,33 @@
                         <a:rPr>
                           <a:latin typeface="Inter"/>
                         </a:rPr>
+                        <a:t>gradient_tool</a:t>
+                      </a:r>
+                    </a:p>
+                  </a:txBody>
+                  <a:tcPr marL="54864" marR="54864" marT="27432" marB="27432" anchor="ctr">
+                    <a:solidFill>
+                      <a:srgbClr val="F5F7F9"/>
+                    </a:solidFill>
+                  </a:tcPr>
+                </a:tc>
+                <a:tc>
+                  <a:txBody>
+                    <a:bodyPr/>
+                    <a:lstStyle/>
+                    <a:p>
+                      <a:pPr>
+                        <a:defRPr sz="650" b="0">
+                          <a:solidFill>
+                            <a:srgbClr val="0D1117"/>
+                          </a:solidFill>
+                          <a:latin typeface="Inter"/>
+                        </a:defRPr>
+                      </a:pPr>
+                      <a:r>
+                        <a:rPr>
+                          <a:latin typeface="Inter"/>
+                        </a:rPr>
                         <a:t>get_portfolio_exposure</a:t>
                       </a:r>
                     </a:p>
@@ -32856,7 +34051,7 @@
                         <a:rPr>
                           <a:latin typeface="Inter"/>
                         </a:rPr>
-                        <a:t>Fictional TEST data</a:t>
+                        <a:t>Illustrative sample data</a:t>
                       </a:r>
                     </a:p>
                   </a:txBody>
@@ -32910,7 +34105,7 @@
                         <a:rPr>
                           <a:latin typeface="Inter"/>
                         </a:rPr>
-                        <a:t>pm-s4</a:t>
+                        <a:t>sha256:aaaaaaaaaaaaaaaaaaaaaaaaaaaaaaaaaaaaaaaaaaaaaaaaaaaaaaaaaaaaaaaa</a:t>
                       </a:r>
                     </a:p>
                   </a:txBody>
@@ -32921,7 +34116,7 @@
                   </a:tcPr>
                 </a:tc>
               </a:tr>
-              <a:tr h="489204">
+              <a:tr h="469087">
                 <a:tc>
                   <a:txBody>
                     <a:bodyPr/>
@@ -32993,6 +34188,33 @@
                         <a:rPr>
                           <a:latin typeface="Inter"/>
                         </a:rPr>
+                        <a:t>gradient_tool</a:t>
+                      </a:r>
+                    </a:p>
+                  </a:txBody>
+                  <a:tcPr marL="54864" marR="54864" marT="27432" marB="27432" anchor="ctr">
+                    <a:solidFill>
+                      <a:srgbClr val="FFFFFF"/>
+                    </a:solidFill>
+                  </a:tcPr>
+                </a:tc>
+                <a:tc>
+                  <a:txBody>
+                    <a:bodyPr/>
+                    <a:lstStyle/>
+                    <a:p>
+                      <a:pPr>
+                        <a:defRPr sz="650" b="0">
+                          <a:solidFill>
+                            <a:srgbClr val="0D1117"/>
+                          </a:solidFill>
+                          <a:latin typeface="Inter"/>
+                        </a:defRPr>
+                      </a:pPr>
+                      <a:r>
+                        <a:rPr>
+                          <a:latin typeface="Inter"/>
+                        </a:rPr>
                         <a:t>get_capital_market_assumptions</a:t>
                       </a:r>
                     </a:p>
@@ -33074,7 +34296,7 @@
                         <a:rPr>
                           <a:latin typeface="Inter"/>
                         </a:rPr>
-                        <a:t>Fictional TEST data</a:t>
+                        <a:t>Illustrative sample data</a:t>
                       </a:r>
                     </a:p>
                   </a:txBody>
@@ -33128,7 +34350,7 @@
                         <a:rPr>
                           <a:latin typeface="Inter"/>
                         </a:rPr>
-                        <a:t>pm-s5</a:t>
+                        <a:t>sha256:aaaaaaaaaaaaaaaaaaaaaaaaaaaaaaaaaaaaaaaaaaaaaaaaaaaaaaaaaaaaaaaa</a:t>
                       </a:r>
                     </a:p>
                   </a:txBody>
@@ -33139,7 +34361,7 @@
                   </a:tcPr>
                 </a:tc>
               </a:tr>
-              <a:tr h="489204">
+              <a:tr h="469087">
                 <a:tc>
                   <a:txBody>
                     <a:bodyPr/>
@@ -33211,6 +34433,33 @@
                         <a:rPr>
                           <a:latin typeface="Inter"/>
                         </a:rPr>
+                        <a:t>gradient_tool</a:t>
+                      </a:r>
+                    </a:p>
+                  </a:txBody>
+                  <a:tcPr marL="54864" marR="54864" marT="27432" marB="27432" anchor="ctr">
+                    <a:solidFill>
+                      <a:srgbClr val="F5F7F9"/>
+                    </a:solidFill>
+                  </a:tcPr>
+                </a:tc>
+                <a:tc>
+                  <a:txBody>
+                    <a:bodyPr/>
+                    <a:lstStyle/>
+                    <a:p>
+                      <a:pPr>
+                        <a:defRPr sz="650" b="0">
+                          <a:solidFill>
+                            <a:srgbClr val="0D1117"/>
+                          </a:solidFill>
+                          <a:latin typeface="Inter"/>
+                        </a:defRPr>
+                      </a:pPr>
+                      <a:r>
+                        <a:rPr>
+                          <a:latin typeface="Inter"/>
+                        </a:rPr>
                         <a:t>get_chart_data</a:t>
                       </a:r>
                     </a:p>
@@ -33292,7 +34541,7 @@
                         <a:rPr>
                           <a:latin typeface="Inter"/>
                         </a:rPr>
-                        <a:t>Fictional TEST data</a:t>
+                        <a:t>Illustrative sample data</a:t>
                       </a:r>
                     </a:p>
                   </a:txBody>
@@ -33346,7 +34595,7 @@
                         <a:rPr>
                           <a:latin typeface="Inter"/>
                         </a:rPr>
-                        <a:t>pm-s6</a:t>
+                        <a:t>sha256:aaaaaaaaaaaaaaaaaaaaaaaaaaaaaaaaaaaaaaaaaaaaaaaaaaaaaaaaaaaaaaaa</a:t>
                       </a:r>
                     </a:p>
                   </a:txBody>
@@ -33357,7 +34606,7 @@
                   </a:tcPr>
                 </a:tc>
               </a:tr>
-              <a:tr h="489204">
+              <a:tr h="469087">
                 <a:tc>
                   <a:txBody>
                     <a:bodyPr/>
@@ -33429,7 +34678,7 @@
                         <a:rPr>
                           <a:latin typeface="Inter"/>
                         </a:rPr>
-                        <a:t>User document; diligence</a:t>
+                        <a:t>gradient_tool</a:t>
                       </a:r>
                     </a:p>
                   </a:txBody>
@@ -33456,7 +34705,7 @@
                         <a:rPr>
                           <a:latin typeface="Inter"/>
                         </a:rPr>
-                        <a:t>fictional</a:t>
+                        <a:t>get_gradient_capabilities</a:t>
                       </a:r>
                     </a:p>
                   </a:txBody>
@@ -33483,6 +34732,33 @@
                         <a:rPr>
                           <a:latin typeface="Inter"/>
                         </a:rPr>
+                        <a:t>illustrative</a:t>
+                      </a:r>
+                    </a:p>
+                  </a:txBody>
+                  <a:tcPr marL="54864" marR="54864" marT="27432" marB="27432" anchor="ctr">
+                    <a:solidFill>
+                      <a:srgbClr val="FFFFFF"/>
+                    </a:solidFill>
+                  </a:tcPr>
+                </a:tc>
+                <a:tc>
+                  <a:txBody>
+                    <a:bodyPr/>
+                    <a:lstStyle/>
+                    <a:p>
+                      <a:pPr>
+                        <a:defRPr sz="650" b="0">
+                          <a:solidFill>
+                            <a:srgbClr val="0D1117"/>
+                          </a:solidFill>
+                          <a:latin typeface="Inter"/>
+                        </a:defRPr>
+                      </a:pPr>
+                      <a:r>
+                        <a:rPr>
+                          <a:latin typeface="Inter"/>
+                        </a:rPr>
                         <a:t>2026-06-30</a:t>
                       </a:r>
                     </a:p>
@@ -33510,7 +34786,7 @@
                         <a:rPr>
                           <a:latin typeface="Inter"/>
                         </a:rPr>
-                        <a:t>Fictional TEST data</a:t>
+                        <a:t>Illustrative sample data</a:t>
                       </a:r>
                     </a:p>
                   </a:txBody>
@@ -33564,7 +34840,7 @@
                         <a:rPr>
                           <a:latin typeface="Inter"/>
                         </a:rPr>
-                        <a:t>pm-s7</a:t>
+                        <a:t>sha256:aaaaaaaaaaaaaaaaaaaaaaaaaaaaaaaaaaaaaaaaaaaaaaaaaaaaaaaaaaaaaaaa</a:t>
                       </a:r>
                     </a:p>
                   </a:txBody>
@@ -33575,7 +34851,7 @@
                   </a:tcPr>
                 </a:tc>
               </a:tr>
-              <a:tr h="489204">
+              <a:tr h="469087">
                 <a:tc>
                   <a:txBody>
                     <a:bodyPr/>
@@ -33647,6 +34923,33 @@
                         <a:rPr>
                           <a:latin typeface="Inter"/>
                         </a:rPr>
+                        <a:t>gradient_tool</a:t>
+                      </a:r>
+                    </a:p>
+                  </a:txBody>
+                  <a:tcPr marL="54864" marR="54864" marT="27432" marB="27432" anchor="ctr">
+                    <a:solidFill>
+                      <a:srgbClr val="F5F7F9"/>
+                    </a:solidFill>
+                  </a:tcPr>
+                </a:tc>
+                <a:tc>
+                  <a:txBody>
+                    <a:bodyPr/>
+                    <a:lstStyle/>
+                    <a:p>
+                      <a:pPr>
+                        <a:defRPr sz="650" b="0">
+                          <a:solidFill>
+                            <a:srgbClr val="0D1117"/>
+                          </a:solidFill>
+                          <a:latin typeface="Inter"/>
+                        </a:defRPr>
+                      </a:pPr>
+                      <a:r>
+                        <a:rPr>
+                          <a:latin typeface="Inter"/>
+                        </a:rPr>
                         <a:t>get_portfolio_historical_returns; get_portfolio_attribution</a:t>
                       </a:r>
                     </a:p>
@@ -33728,7 +35031,7 @@
                         <a:rPr>
                           <a:latin typeface="Inter"/>
                         </a:rPr>
-                        <a:t>Fictional TEST data</a:t>
+                        <a:t>Illustrative sample data</a:t>
                       </a:r>
                     </a:p>
                   </a:txBody>
@@ -33782,7 +35085,7 @@
                         <a:rPr>
                           <a:latin typeface="Inter"/>
                         </a:rPr>
-                        <a:t>pm-s8</a:t>
+                        <a:t>sha256:aaaaaaaaaaaaaaaaaaaaaaaaaaaaaaaaaaaaaaaaaaaaaaaaaaaaaaaaaaaaaaaa</a:t>
                       </a:r>
                     </a:p>
                   </a:txBody>
@@ -33793,7 +35096,7 @@
                   </a:tcPr>
                 </a:tc>
               </a:tr>
-              <a:tr h="489204">
+              <a:tr h="469089">
                 <a:tc>
                   <a:txBody>
                     <a:bodyPr/>
@@ -33865,6 +35168,33 @@
                         <a:rPr>
                           <a:latin typeface="Inter"/>
                         </a:rPr>
+                        <a:t>gradient_tool</a:t>
+                      </a:r>
+                    </a:p>
+                  </a:txBody>
+                  <a:tcPr marL="54864" marR="54864" marT="27432" marB="27432" anchor="ctr">
+                    <a:solidFill>
+                      <a:srgbClr val="FFFFFF"/>
+                    </a:solidFill>
+                  </a:tcPr>
+                </a:tc>
+                <a:tc>
+                  <a:txBody>
+                    <a:bodyPr/>
+                    <a:lstStyle/>
+                    <a:p>
+                      <a:pPr>
+                        <a:defRPr sz="650" b="0">
+                          <a:solidFill>
+                            <a:srgbClr val="0D1117"/>
+                          </a:solidFill>
+                          <a:latin typeface="Inter"/>
+                        </a:defRPr>
+                      </a:pPr>
+                      <a:r>
+                        <a:rPr>
+                          <a:latin typeface="Inter"/>
+                        </a:rPr>
                         <a:t>get_private_markets_holdings</a:t>
                       </a:r>
                     </a:p>
@@ -33946,7 +35276,7 @@
                         <a:rPr>
                           <a:latin typeface="Inter"/>
                         </a:rPr>
-                        <a:t>Fictional TEST data</a:t>
+                        <a:t>Illustrative sample data</a:t>
                       </a:r>
                     </a:p>
                   </a:txBody>
@@ -34000,7 +35330,7 @@
                         <a:rPr>
                           <a:latin typeface="Inter"/>
                         </a:rPr>
-                        <a:t>pm-s9</a:t>
+                        <a:t>sha256:aaaaaaaaaaaaaaaaaaaaaaaaaaaaaaaaaaaaaaaaaaaaaaaaaaaaaaaaaaaaaaaa</a:t>
                       </a:r>
                     </a:p>
                   </a:txBody>
@@ -34017,7 +35347,49 @@
       </p:graphicFrame>
       <p:sp>
         <p:nvSpPr>
-          <p:cNvPr id="8" name="Rectangle 7"/>
+          <p:cNvPr id="9" name="TextBox 8"/>
+          <p:cNvSpPr txBox="1"/>
+          <p:nvPr/>
+        </p:nvSpPr>
+        <p:spPr>
+          <a:xfrm>
+            <a:off x="640080" y="6035040"/>
+            <a:ext cx="10908792" cy="164592"/>
+          </a:xfrm>
+          <a:prstGeom prst="rect">
+            <a:avLst/>
+          </a:prstGeom>
+          <a:noFill/>
+        </p:spPr>
+        <p:txBody>
+          <a:bodyPr wrap="none" lIns="9144" rIns="9144" tIns="9144" bIns="9144" anchor="t">
+            <a:spAutoFit/>
+          </a:bodyPr>
+          <a:lstStyle/>
+          <a:p>
+            <a:pPr algn="l">
+              <a:spcAft>
+                <a:spcPts val="0"/>
+              </a:spcAft>
+              <a:defRPr sz="680" b="0">
+                <a:solidFill>
+                  <a:srgbClr val="8A94A1"/>
+                </a:solidFill>
+                <a:latin typeface="Inter"/>
+              </a:defRPr>
+            </a:pPr>
+            <a:r>
+              <a:rPr>
+                <a:latin typeface="Inter"/>
+              </a:rPr>
+              <a:t>Illustrative, Gradient Maintained — demo data, not the client's holdings or managers. All organizations, portfolios, managers and results in this public example are illustrative.</a:t>
+            </a:r>
+          </a:p>
+        </p:txBody>
+      </p:sp>
+      <p:sp>
+        <p:nvSpPr>
+          <p:cNvPr id="10" name="Rectangle 9"/>
           <p:cNvSpPr/>
           <p:nvPr/>
         </p:nvSpPr>
@@ -34066,7 +35438,7 @@
       </p:sp>
       <p:sp>
         <p:nvSpPr>
-          <p:cNvPr id="9" name="TextBox 8"/>
+          <p:cNvPr id="11" name="TextBox 10"/>
           <p:cNvSpPr txBox="1"/>
           <p:nvPr/>
         </p:nvSpPr>
@@ -34108,7 +35480,7 @@
       </p:sp>
       <p:sp>
         <p:nvSpPr>
-          <p:cNvPr id="10" name="TextBox 9"/>
+          <p:cNvPr id="12" name="TextBox 11"/>
           <p:cNvSpPr txBox="1"/>
           <p:nvPr/>
         </p:nvSpPr>
@@ -34143,14 +35515,14 @@
               <a:rPr>
                 <a:latin typeface="Inter"/>
               </a:rPr>
-              <a:t>TEST DATA — fictional portfolio for rendering tests only · Data as of 2026-06-30</a:t>
+              <a:t>Confidential — Investment Committee · Data as of 2026-06-30</a:t>
             </a:r>
           </a:p>
         </p:txBody>
       </p:sp>
       <p:sp>
         <p:nvSpPr>
-          <p:cNvPr id="11" name="TextBox 10"/>
+          <p:cNvPr id="13" name="TextBox 12"/>
           <p:cNvSpPr txBox="1"/>
           <p:nvPr/>
         </p:nvSpPr>
@@ -34265,6 +35637,48 @@
         </p:nvSpPr>
         <p:spPr>
           <a:xfrm>
+            <a:off x="5897880" y="310896"/>
+            <a:ext cx="4800600" cy="256032"/>
+          </a:xfrm>
+          <a:prstGeom prst="rect">
+            <a:avLst/>
+          </a:prstGeom>
+          <a:noFill/>
+        </p:spPr>
+        <p:txBody>
+          <a:bodyPr wrap="none" lIns="9144" rIns="9144" tIns="9144" bIns="9144" anchor="t">
+            <a:spAutoFit/>
+          </a:bodyPr>
+          <a:lstStyle/>
+          <a:p>
+            <a:pPr algn="r">
+              <a:spcAft>
+                <a:spcPts val="0"/>
+              </a:spcAft>
+              <a:defRPr sz="680" b="1">
+                <a:solidFill>
+                  <a:srgbClr val="4F6B00"/>
+                </a:solidFill>
+                <a:latin typeface="Inter"/>
+              </a:defRPr>
+            </a:pPr>
+            <a:r>
+              <a:rPr>
+                <a:latin typeface="Inter"/>
+              </a:rPr>
+              <a:t>Illustrative, Gradient Maintained — demo data, not the client's holdings or managers</a:t>
+            </a:r>
+          </a:p>
+        </p:txBody>
+      </p:sp>
+      <p:sp>
+        <p:nvSpPr>
+          <p:cNvPr id="4" name="TextBox 3"/>
+          <p:cNvSpPr txBox="1"/>
+          <p:nvPr/>
+        </p:nvSpPr>
+        <p:spPr>
+          <a:xfrm>
             <a:off x="640080" y="566928"/>
             <a:ext cx="10058400" cy="530352"/>
           </a:xfrm>
@@ -34294,14 +35708,14 @@
               <a:rPr>
                 <a:latin typeface="Inter"/>
               </a:rPr>
-              <a:t>Appendix B — Server Metric Methods and Disclosures</a:t>
+              <a:t>Appendix — Server Metric Methods and Disclosures</a:t>
             </a:r>
           </a:p>
         </p:txBody>
       </p:sp>
       <p:sp>
         <p:nvSpPr>
-          <p:cNvPr id="4" name="Rectangle 3"/>
+          <p:cNvPr id="5" name="Rectangle 4"/>
           <p:cNvSpPr/>
           <p:nvPr/>
         </p:nvSpPr>
@@ -34350,7 +35764,7 @@
       </p:sp>
       <p:sp>
         <p:nvSpPr>
-          <p:cNvPr id="5" name="Rectangle 4"/>
+          <p:cNvPr id="6" name="Rectangle 5"/>
           <p:cNvSpPr/>
           <p:nvPr/>
         </p:nvSpPr>
@@ -34399,7 +35813,7 @@
       </p:sp>
       <p:sp>
         <p:nvSpPr>
-          <p:cNvPr id="6" name="TextBox 5"/>
+          <p:cNvPr id="7" name="TextBox 6"/>
           <p:cNvSpPr txBox="1"/>
           <p:nvPr/>
         </p:nvSpPr>
@@ -34441,7 +35855,7 @@
       </p:sp>
       <p:sp>
         <p:nvSpPr>
-          <p:cNvPr id="7" name="TextBox 6"/>
+          <p:cNvPr id="8" name="TextBox 7"/>
           <p:cNvSpPr txBox="1"/>
           <p:nvPr/>
         </p:nvSpPr>
@@ -34483,7 +35897,7 @@
       </p:sp>
       <p:graphicFrame>
         <p:nvGraphicFramePr>
-          <p:cNvPr id="8" name="Table 7"/>
+          <p:cNvPr id="9" name="Table 8"/>
           <p:cNvGraphicFramePr>
             <a:graphicFrameLocks noGrp="1"/>
           </p:cNvGraphicFramePr>
@@ -35197,7 +36611,7 @@
       </p:graphicFrame>
       <p:sp>
         <p:nvSpPr>
-          <p:cNvPr id="9" name="TextBox 8"/>
+          <p:cNvPr id="10" name="TextBox 9"/>
           <p:cNvSpPr txBox="1"/>
           <p:nvPr/>
         </p:nvSpPr>
@@ -35239,7 +36653,7 @@
       </p:sp>
       <p:sp>
         <p:nvSpPr>
-          <p:cNvPr id="10" name="Rectangle 9"/>
+          <p:cNvPr id="11" name="Rectangle 10"/>
           <p:cNvSpPr/>
           <p:nvPr/>
         </p:nvSpPr>
@@ -35288,7 +36702,7 @@
       </p:sp>
       <p:sp>
         <p:nvSpPr>
-          <p:cNvPr id="11" name="TextBox 10"/>
+          <p:cNvPr id="12" name="TextBox 11"/>
           <p:cNvSpPr txBox="1"/>
           <p:nvPr/>
         </p:nvSpPr>
@@ -35330,7 +36744,7 @@
       </p:sp>
       <p:sp>
         <p:nvSpPr>
-          <p:cNvPr id="12" name="TextBox 11"/>
+          <p:cNvPr id="13" name="TextBox 12"/>
           <p:cNvSpPr txBox="1"/>
           <p:nvPr/>
         </p:nvSpPr>
@@ -35365,14 +36779,14 @@
               <a:rPr>
                 <a:latin typeface="Inter"/>
               </a:rPr>
-              <a:t>TEST DATA — fictional portfolio for rendering tests only · Data as of 2026-06-30</a:t>
+              <a:t>Confidential — Investment Committee · Data as of 2026-06-30</a:t>
             </a:r>
           </a:p>
         </p:txBody>
       </p:sp>
       <p:sp>
         <p:nvSpPr>
-          <p:cNvPr id="13" name="TextBox 12"/>
+          <p:cNvPr id="14" name="TextBox 13"/>
           <p:cNvSpPr txBox="1"/>
           <p:nvPr/>
         </p:nvSpPr>
@@ -35488,7 +36902,7 @@
         <p:spPr>
           <a:xfrm>
             <a:off x="640080" y="329184"/>
-            <a:ext cx="9875520" cy="182880"/>
+            <a:ext cx="5303520" cy="182880"/>
           </a:xfrm>
           <a:prstGeom prst="rect">
             <a:avLst/>
@@ -35529,6 +36943,48 @@
         </p:nvSpPr>
         <p:spPr>
           <a:xfrm>
+            <a:off x="5897880" y="310896"/>
+            <a:ext cx="4800600" cy="256032"/>
+          </a:xfrm>
+          <a:prstGeom prst="rect">
+            <a:avLst/>
+          </a:prstGeom>
+          <a:noFill/>
+        </p:spPr>
+        <p:txBody>
+          <a:bodyPr wrap="none" lIns="9144" rIns="9144" tIns="9144" bIns="9144" anchor="t">
+            <a:spAutoFit/>
+          </a:bodyPr>
+          <a:lstStyle/>
+          <a:p>
+            <a:pPr algn="r">
+              <a:spcAft>
+                <a:spcPts val="0"/>
+              </a:spcAft>
+              <a:defRPr sz="680" b="1">
+                <a:solidFill>
+                  <a:srgbClr val="4F6B00"/>
+                </a:solidFill>
+                <a:latin typeface="Inter"/>
+              </a:defRPr>
+            </a:pPr>
+            <a:r>
+              <a:rPr>
+                <a:latin typeface="Inter"/>
+              </a:rPr>
+              <a:t>Illustrative, Gradient Maintained — demo data, not the client's holdings or managers</a:t>
+            </a:r>
+          </a:p>
+        </p:txBody>
+      </p:sp>
+      <p:sp>
+        <p:nvSpPr>
+          <p:cNvPr id="5" name="TextBox 4"/>
+          <p:cNvSpPr txBox="1"/>
+          <p:nvPr/>
+        </p:nvSpPr>
+        <p:spPr>
+          <a:xfrm>
             <a:off x="640080" y="566928"/>
             <a:ext cx="10058400" cy="530352"/>
           </a:xfrm>
@@ -35565,7 +37021,7 @@
       </p:sp>
       <p:sp>
         <p:nvSpPr>
-          <p:cNvPr id="5" name="Rectangle 4"/>
+          <p:cNvPr id="6" name="Rectangle 5"/>
           <p:cNvSpPr/>
           <p:nvPr/>
         </p:nvSpPr>
@@ -35614,7 +37070,7 @@
       </p:sp>
       <p:sp>
         <p:nvSpPr>
-          <p:cNvPr id="6" name="Rectangle 5"/>
+          <p:cNvPr id="7" name="Rectangle 6"/>
           <p:cNvSpPr/>
           <p:nvPr/>
         </p:nvSpPr>
@@ -35663,7 +37119,7 @@
       </p:sp>
       <p:sp>
         <p:nvSpPr>
-          <p:cNvPr id="7" name="TextBox 6"/>
+          <p:cNvPr id="8" name="TextBox 7"/>
           <p:cNvSpPr txBox="1"/>
           <p:nvPr/>
         </p:nvSpPr>
@@ -35705,14 +37161,14 @@
       </p:sp>
       <p:sp>
         <p:nvSpPr>
-          <p:cNvPr id="8" name="Rectangle 7"/>
+          <p:cNvPr id="9" name="Rectangle 8"/>
           <p:cNvSpPr/>
           <p:nvPr/>
         </p:nvSpPr>
         <p:spPr>
           <a:xfrm>
             <a:off x="640080" y="1325880"/>
-            <a:ext cx="10908792" cy="2285352"/>
+            <a:ext cx="10908792" cy="2318487"/>
           </a:xfrm>
           <a:prstGeom prst="rect">
             <a:avLst/>
@@ -35754,14 +37210,14 @@
       </p:sp>
       <p:sp>
         <p:nvSpPr>
-          <p:cNvPr id="9" name="Rectangle 8"/>
+          <p:cNvPr id="10" name="Rectangle 9"/>
           <p:cNvSpPr/>
           <p:nvPr/>
         </p:nvSpPr>
         <p:spPr>
           <a:xfrm>
             <a:off x="640080" y="1325880"/>
-            <a:ext cx="54864" cy="2285352"/>
+            <a:ext cx="54864" cy="2318487"/>
           </a:xfrm>
           <a:prstGeom prst="rect">
             <a:avLst/>
@@ -35803,7 +37259,7 @@
       </p:sp>
       <p:sp>
         <p:nvSpPr>
-          <p:cNvPr id="10" name="TextBox 9"/>
+          <p:cNvPr id="11" name="TextBox 10"/>
           <p:cNvSpPr txBox="1"/>
           <p:nvPr/>
         </p:nvSpPr>
@@ -35845,14 +37301,14 @@
       </p:sp>
       <p:sp>
         <p:nvSpPr>
-          <p:cNvPr id="11" name="TextBox 10"/>
+          <p:cNvPr id="12" name="TextBox 11"/>
           <p:cNvSpPr txBox="1"/>
           <p:nvPr/>
         </p:nvSpPr>
         <p:spPr>
           <a:xfrm>
             <a:off x="804671" y="1719072"/>
-            <a:ext cx="10616184" cy="1800720"/>
+            <a:ext cx="10616184" cy="1833855"/>
           </a:xfrm>
           <a:prstGeom prst="rect">
             <a:avLst/>
@@ -35880,21 +37336,21 @@
               <a:rPr>
                 <a:latin typeface="Inter"/>
               </a:rPr>
-              <a:t>Observation: Private-markets weight is 23.0% in the TEST evidence [S2]. Why it matters: This measure establishes the baseline for comparing later governed results. Uncertainty: The source basis may omit newer observations outside this fixture. What would change the view: A refreshed source report showing a change above 1%.</a:t>
+              <a:t>Observation: Private-markets weight is 23.0% in the review evidence [S2]. Why it matters: This measure establishes the baseline for comparing later governed results. Uncertainty: The source basis may omit newer observations outside the reviewed evidence. What would change the view: A refreshed source report showing a change above 1%.</a:t>
             </a:r>
           </a:p>
         </p:txBody>
       </p:sp>
       <p:sp>
         <p:nvSpPr>
-          <p:cNvPr id="12" name="Rectangle 11"/>
+          <p:cNvPr id="13" name="Rectangle 12"/>
           <p:cNvSpPr/>
           <p:nvPr/>
         </p:nvSpPr>
         <p:spPr>
           <a:xfrm>
-            <a:off x="640080" y="3720960"/>
-            <a:ext cx="10908792" cy="2496959"/>
+            <a:off x="640080" y="3754095"/>
+            <a:ext cx="10908792" cy="2463824"/>
           </a:xfrm>
           <a:prstGeom prst="rect">
             <a:avLst/>
@@ -35936,14 +37392,14 @@
       </p:sp>
       <p:sp>
         <p:nvSpPr>
-          <p:cNvPr id="13" name="Rectangle 12"/>
+          <p:cNvPr id="14" name="Rectangle 13"/>
           <p:cNvSpPr/>
           <p:nvPr/>
         </p:nvSpPr>
         <p:spPr>
           <a:xfrm>
-            <a:off x="640080" y="3720960"/>
-            <a:ext cx="54864" cy="2496959"/>
+            <a:off x="640080" y="3754095"/>
+            <a:ext cx="54864" cy="2463824"/>
           </a:xfrm>
           <a:prstGeom prst="rect">
             <a:avLst/>
@@ -35985,13 +37441,13 @@
       </p:sp>
       <p:sp>
         <p:nvSpPr>
-          <p:cNvPr id="14" name="TextBox 13"/>
+          <p:cNvPr id="15" name="TextBox 14"/>
           <p:cNvSpPr txBox="1"/>
           <p:nvPr/>
         </p:nvSpPr>
         <p:spPr>
           <a:xfrm>
-            <a:off x="804671" y="3830688"/>
+            <a:off x="804671" y="3863823"/>
             <a:ext cx="10616184" cy="228600"/>
           </a:xfrm>
           <a:prstGeom prst="rect">
@@ -36027,14 +37483,14 @@
       </p:sp>
       <p:sp>
         <p:nvSpPr>
-          <p:cNvPr id="15" name="TextBox 14"/>
+          <p:cNvPr id="16" name="TextBox 15"/>
           <p:cNvSpPr txBox="1"/>
           <p:nvPr/>
         </p:nvSpPr>
         <p:spPr>
           <a:xfrm>
-            <a:off x="804671" y="4114152"/>
-            <a:ext cx="10616184" cy="2012327"/>
+            <a:off x="804671" y="4147287"/>
+            <a:ext cx="10616184" cy="1979192"/>
           </a:xfrm>
           <a:prstGeom prst="rect">
             <a:avLst/>
@@ -36062,14 +37518,14 @@
               <a:rPr>
                 <a:latin typeface="Inter"/>
               </a:rPr>
-              <a:t>Observation: Policy status is Watch rather than Clear in the TEST evidence [S3]. Why it matters: This result determines which item receives priority in the next monitoring cycle. Uncertainty: Supporting coverage may omit later filings or corroborating detail. What would change the view: A new filing or report that resolves the item or changes it by 1%.</a:t>
+              <a:t>Observation: Policy status is Watch rather than Clear in the review evidence [S3]. Why it matters: This result determines which item receives priority in the next monitoring cycle. Uncertainty: Supporting coverage may omit later filings or corroborating detail. What would change the view: A new filing or report that resolves the item or changes it by 1%.</a:t>
             </a:r>
           </a:p>
         </p:txBody>
       </p:sp>
       <p:sp>
         <p:nvSpPr>
-          <p:cNvPr id="16" name="Rectangle 15"/>
+          <p:cNvPr id="17" name="Rectangle 16"/>
           <p:cNvSpPr/>
           <p:nvPr/>
         </p:nvSpPr>
@@ -36118,7 +37574,7 @@
       </p:sp>
       <p:sp>
         <p:nvSpPr>
-          <p:cNvPr id="17" name="TextBox 16"/>
+          <p:cNvPr id="18" name="TextBox 17"/>
           <p:cNvSpPr txBox="1"/>
           <p:nvPr/>
         </p:nvSpPr>
@@ -36160,7 +37616,7 @@
       </p:sp>
       <p:sp>
         <p:nvSpPr>
-          <p:cNvPr id="18" name="TextBox 17"/>
+          <p:cNvPr id="19" name="TextBox 18"/>
           <p:cNvSpPr txBox="1"/>
           <p:nvPr/>
         </p:nvSpPr>
@@ -36195,14 +37651,14 @@
               <a:rPr>
                 <a:latin typeface="Inter"/>
               </a:rPr>
-              <a:t>TEST DATA — fictional portfolio for rendering tests only · Data as of 2026-06-30</a:t>
+              <a:t>Confidential — Investment Committee · Data as of 2026-06-30</a:t>
             </a:r>
           </a:p>
         </p:txBody>
       </p:sp>
       <p:sp>
         <p:nvSpPr>
-          <p:cNvPr id="19" name="TextBox 18"/>
+          <p:cNvPr id="20" name="TextBox 19"/>
           <p:cNvSpPr txBox="1"/>
           <p:nvPr/>
         </p:nvSpPr>
@@ -36318,7 +37774,7 @@
         <p:spPr>
           <a:xfrm>
             <a:off x="640080" y="329184"/>
-            <a:ext cx="9875520" cy="182880"/>
+            <a:ext cx="5303520" cy="182880"/>
           </a:xfrm>
           <a:prstGeom prst="rect">
             <a:avLst/>
@@ -36359,6 +37815,48 @@
         </p:nvSpPr>
         <p:spPr>
           <a:xfrm>
+            <a:off x="5897880" y="310896"/>
+            <a:ext cx="4800600" cy="256032"/>
+          </a:xfrm>
+          <a:prstGeom prst="rect">
+            <a:avLst/>
+          </a:prstGeom>
+          <a:noFill/>
+        </p:spPr>
+        <p:txBody>
+          <a:bodyPr wrap="none" lIns="9144" rIns="9144" tIns="9144" bIns="9144" anchor="t">
+            <a:spAutoFit/>
+          </a:bodyPr>
+          <a:lstStyle/>
+          <a:p>
+            <a:pPr algn="r">
+              <a:spcAft>
+                <a:spcPts val="0"/>
+              </a:spcAft>
+              <a:defRPr sz="680" b="1">
+                <a:solidFill>
+                  <a:srgbClr val="4F6B00"/>
+                </a:solidFill>
+                <a:latin typeface="Inter"/>
+              </a:defRPr>
+            </a:pPr>
+            <a:r>
+              <a:rPr>
+                <a:latin typeface="Inter"/>
+              </a:rPr>
+              <a:t>Illustrative, Gradient Maintained — demo data, not the client's holdings or managers</a:t>
+            </a:r>
+          </a:p>
+        </p:txBody>
+      </p:sp>
+      <p:sp>
+        <p:nvSpPr>
+          <p:cNvPr id="5" name="TextBox 4"/>
+          <p:cNvSpPr txBox="1"/>
+          <p:nvPr/>
+        </p:nvSpPr>
+        <p:spPr>
+          <a:xfrm>
             <a:off x="640080" y="566928"/>
             <a:ext cx="10058400" cy="530352"/>
           </a:xfrm>
@@ -36395,7 +37893,7 @@
       </p:sp>
       <p:sp>
         <p:nvSpPr>
-          <p:cNvPr id="5" name="Rectangle 4"/>
+          <p:cNvPr id="6" name="Rectangle 5"/>
           <p:cNvSpPr/>
           <p:nvPr/>
         </p:nvSpPr>
@@ -36444,7 +37942,7 @@
       </p:sp>
       <p:sp>
         <p:nvSpPr>
-          <p:cNvPr id="6" name="Rectangle 5"/>
+          <p:cNvPr id="7" name="Rectangle 6"/>
           <p:cNvSpPr/>
           <p:nvPr/>
         </p:nvSpPr>
@@ -36493,7 +37991,7 @@
       </p:sp>
       <p:sp>
         <p:nvSpPr>
-          <p:cNvPr id="7" name="TextBox 6"/>
+          <p:cNvPr id="8" name="TextBox 7"/>
           <p:cNvSpPr txBox="1"/>
           <p:nvPr/>
         </p:nvSpPr>
@@ -36535,7 +38033,7 @@
       </p:sp>
       <p:graphicFrame>
         <p:nvGraphicFramePr>
-          <p:cNvPr id="8" name="Table 7"/>
+          <p:cNvPr id="9" name="Table 8"/>
           <p:cNvGraphicFramePr>
             <a:graphicFrameLocks noGrp="1"/>
           </p:cNvGraphicFramePr>
@@ -36600,7 +38098,7 @@
                         <a:rPr>
                           <a:latin typeface="Inter"/>
                         </a:rPr>
-                        <a:t>Northstar Total Fund (TEST) [S2]</a:t>
+                        <a:t>Northstar Total Fund [S2]</a:t>
                       </a:r>
                     </a:p>
                   </a:txBody>
@@ -36880,7 +38378,7 @@
                         <a:rPr>
                           <a:latin typeface="Inter"/>
                         </a:rPr>
-                        <a:t>Fictional TEST data [S1] [S1]</a:t>
+                        <a:t>Illustrative sample data [S1] [S1]</a:t>
                       </a:r>
                     </a:p>
                   </a:txBody>
@@ -36897,7 +38395,7 @@
       </p:graphicFrame>
       <p:sp>
         <p:nvSpPr>
-          <p:cNvPr id="9" name="TextBox 8"/>
+          <p:cNvPr id="10" name="TextBox 9"/>
           <p:cNvSpPr txBox="1"/>
           <p:nvPr/>
         </p:nvSpPr>
@@ -36939,7 +38437,7 @@
       </p:sp>
       <p:graphicFrame>
         <p:nvGraphicFramePr>
-          <p:cNvPr id="10" name="Table 9"/>
+          <p:cNvPr id="11" name="Table 10"/>
           <p:cNvGraphicFramePr>
             <a:graphicFrameLocks noGrp="1"/>
           </p:cNvGraphicFramePr>
@@ -37516,7 +39014,7 @@
       </p:graphicFrame>
       <p:sp>
         <p:nvSpPr>
-          <p:cNvPr id="11" name="Rectangle 10"/>
+          <p:cNvPr id="12" name="Rectangle 11"/>
           <p:cNvSpPr/>
           <p:nvPr/>
         </p:nvSpPr>
@@ -37565,7 +39063,7 @@
       </p:sp>
       <p:sp>
         <p:nvSpPr>
-          <p:cNvPr id="12" name="TextBox 11"/>
+          <p:cNvPr id="13" name="TextBox 12"/>
           <p:cNvSpPr txBox="1"/>
           <p:nvPr/>
         </p:nvSpPr>
@@ -37607,7 +39105,7 @@
       </p:sp>
       <p:sp>
         <p:nvSpPr>
-          <p:cNvPr id="13" name="TextBox 12"/>
+          <p:cNvPr id="14" name="TextBox 13"/>
           <p:cNvSpPr txBox="1"/>
           <p:nvPr/>
         </p:nvSpPr>
@@ -37642,14 +39140,14 @@
               <a:rPr>
                 <a:latin typeface="Inter"/>
               </a:rPr>
-              <a:t>TEST DATA — fictional portfolio for rendering tests only · Data as of 2026-06-30</a:t>
+              <a:t>Confidential — Investment Committee · Data as of 2026-06-30</a:t>
             </a:r>
           </a:p>
         </p:txBody>
       </p:sp>
       <p:sp>
         <p:nvSpPr>
-          <p:cNvPr id="14" name="TextBox 13"/>
+          <p:cNvPr id="15" name="TextBox 14"/>
           <p:cNvSpPr txBox="1"/>
           <p:nvPr/>
         </p:nvSpPr>
@@ -37765,7 +39263,7 @@
         <p:spPr>
           <a:xfrm>
             <a:off x="640080" y="329184"/>
-            <a:ext cx="9875520" cy="182880"/>
+            <a:ext cx="5303520" cy="182880"/>
           </a:xfrm>
           <a:prstGeom prst="rect">
             <a:avLst/>
@@ -37806,6 +39304,48 @@
         </p:nvSpPr>
         <p:spPr>
           <a:xfrm>
+            <a:off x="5897880" y="310896"/>
+            <a:ext cx="4800600" cy="256032"/>
+          </a:xfrm>
+          <a:prstGeom prst="rect">
+            <a:avLst/>
+          </a:prstGeom>
+          <a:noFill/>
+        </p:spPr>
+        <p:txBody>
+          <a:bodyPr wrap="none" lIns="9144" rIns="9144" tIns="9144" bIns="9144" anchor="t">
+            <a:spAutoFit/>
+          </a:bodyPr>
+          <a:lstStyle/>
+          <a:p>
+            <a:pPr algn="r">
+              <a:spcAft>
+                <a:spcPts val="0"/>
+              </a:spcAft>
+              <a:defRPr sz="680" b="1">
+                <a:solidFill>
+                  <a:srgbClr val="4F6B00"/>
+                </a:solidFill>
+                <a:latin typeface="Inter"/>
+              </a:defRPr>
+            </a:pPr>
+            <a:r>
+              <a:rPr>
+                <a:latin typeface="Inter"/>
+              </a:rPr>
+              <a:t>Illustrative, Gradient Maintained — demo data, not the client's holdings or managers</a:t>
+            </a:r>
+          </a:p>
+        </p:txBody>
+      </p:sp>
+      <p:sp>
+        <p:nvSpPr>
+          <p:cNvPr id="5" name="TextBox 4"/>
+          <p:cNvSpPr txBox="1"/>
+          <p:nvPr/>
+        </p:nvSpPr>
+        <p:spPr>
+          <a:xfrm>
             <a:off x="640080" y="566928"/>
             <a:ext cx="10058400" cy="530352"/>
           </a:xfrm>
@@ -37842,7 +39382,7 @@
       </p:sp>
       <p:sp>
         <p:nvSpPr>
-          <p:cNvPr id="5" name="Rectangle 4"/>
+          <p:cNvPr id="6" name="Rectangle 5"/>
           <p:cNvSpPr/>
           <p:nvPr/>
         </p:nvSpPr>
@@ -37891,7 +39431,7 @@
       </p:sp>
       <p:sp>
         <p:nvSpPr>
-          <p:cNvPr id="6" name="Rectangle 5"/>
+          <p:cNvPr id="7" name="Rectangle 6"/>
           <p:cNvSpPr/>
           <p:nvPr/>
         </p:nvSpPr>
@@ -37940,7 +39480,7 @@
       </p:sp>
       <p:sp>
         <p:nvSpPr>
-          <p:cNvPr id="7" name="TextBox 6"/>
+          <p:cNvPr id="8" name="TextBox 7"/>
           <p:cNvSpPr txBox="1"/>
           <p:nvPr/>
         </p:nvSpPr>
@@ -37982,7 +39522,7 @@
       </p:sp>
       <p:sp>
         <p:nvSpPr>
-          <p:cNvPr id="8" name="TextBox 7"/>
+          <p:cNvPr id="9" name="TextBox 8"/>
           <p:cNvSpPr txBox="1"/>
           <p:nvPr/>
         </p:nvSpPr>
@@ -38017,14 +39557,14 @@
               <a:rPr>
                 <a:latin typeface="Inter"/>
               </a:rPr>
-              <a:t>PRIVATE-MARKETS NAV BY STRATEGY (TEST)</a:t>
+              <a:t>PRIVATE-MARKETS NAV BY STRATEGY</a:t>
             </a:r>
           </a:p>
         </p:txBody>
       </p:sp>
       <p:graphicFrame>
         <p:nvGraphicFramePr>
-          <p:cNvPr id="9" name="Chart 8"/>
+          <p:cNvPr id="10" name="Chart 9"/>
           <p:cNvGraphicFramePr>
             <a:graphicFrameLocks noGrp="1"/>
           </p:cNvGraphicFramePr>
@@ -38042,7 +39582,7 @@
       </p:graphicFrame>
       <p:sp>
         <p:nvSpPr>
-          <p:cNvPr id="10" name="Rectangle 9"/>
+          <p:cNvPr id="11" name="Rectangle 10"/>
           <p:cNvSpPr/>
           <p:nvPr/>
         </p:nvSpPr>
@@ -38091,7 +39631,7 @@
       </p:sp>
       <p:sp>
         <p:nvSpPr>
-          <p:cNvPr id="11" name="TextBox 10"/>
+          <p:cNvPr id="12" name="TextBox 11"/>
           <p:cNvSpPr txBox="1"/>
           <p:nvPr/>
         </p:nvSpPr>
@@ -38126,14 +39666,14 @@
               <a:rPr>
                 <a:latin typeface="Inter"/>
               </a:rPr>
-              <a:t>Sources: none cited</a:t>
+              <a:t>Sources: S1</a:t>
             </a:r>
           </a:p>
         </p:txBody>
       </p:sp>
       <p:sp>
         <p:nvSpPr>
-          <p:cNvPr id="12" name="TextBox 11"/>
+          <p:cNvPr id="13" name="TextBox 12"/>
           <p:cNvSpPr txBox="1"/>
           <p:nvPr/>
         </p:nvSpPr>
@@ -38168,14 +39708,14 @@
               <a:rPr>
                 <a:latin typeface="Inter"/>
               </a:rPr>
-              <a:t>TEST DATA — fictional portfolio for rendering tests only · Data as of 2026-06-30</a:t>
+              <a:t>Confidential — Investment Committee · Data as of 2026-06-30</a:t>
             </a:r>
           </a:p>
         </p:txBody>
       </p:sp>
       <p:sp>
         <p:nvSpPr>
-          <p:cNvPr id="13" name="TextBox 12"/>
+          <p:cNvPr id="14" name="TextBox 13"/>
           <p:cNvSpPr txBox="1"/>
           <p:nvPr/>
         </p:nvSpPr>
@@ -38291,7 +39831,7 @@
         <p:spPr>
           <a:xfrm>
             <a:off x="640080" y="329184"/>
-            <a:ext cx="9875520" cy="182880"/>
+            <a:ext cx="5303520" cy="182880"/>
           </a:xfrm>
           <a:prstGeom prst="rect">
             <a:avLst/>
@@ -38332,6 +39872,48 @@
         </p:nvSpPr>
         <p:spPr>
           <a:xfrm>
+            <a:off x="5897880" y="310896"/>
+            <a:ext cx="4800600" cy="256032"/>
+          </a:xfrm>
+          <a:prstGeom prst="rect">
+            <a:avLst/>
+          </a:prstGeom>
+          <a:noFill/>
+        </p:spPr>
+        <p:txBody>
+          <a:bodyPr wrap="none" lIns="9144" rIns="9144" tIns="9144" bIns="9144" anchor="t">
+            <a:spAutoFit/>
+          </a:bodyPr>
+          <a:lstStyle/>
+          <a:p>
+            <a:pPr algn="r">
+              <a:spcAft>
+                <a:spcPts val="0"/>
+              </a:spcAft>
+              <a:defRPr sz="680" b="1">
+                <a:solidFill>
+                  <a:srgbClr val="4F6B00"/>
+                </a:solidFill>
+                <a:latin typeface="Inter"/>
+              </a:defRPr>
+            </a:pPr>
+            <a:r>
+              <a:rPr>
+                <a:latin typeface="Inter"/>
+              </a:rPr>
+              <a:t>Illustrative, Gradient Maintained — demo data, not the client's holdings or managers</a:t>
+            </a:r>
+          </a:p>
+        </p:txBody>
+      </p:sp>
+      <p:sp>
+        <p:nvSpPr>
+          <p:cNvPr id="5" name="TextBox 4"/>
+          <p:cNvSpPr txBox="1"/>
+          <p:nvPr/>
+        </p:nvSpPr>
+        <p:spPr>
+          <a:xfrm>
             <a:off x="640080" y="566928"/>
             <a:ext cx="10058400" cy="530352"/>
           </a:xfrm>
@@ -38368,7 +39950,7 @@
       </p:sp>
       <p:sp>
         <p:nvSpPr>
-          <p:cNvPr id="5" name="Rectangle 4"/>
+          <p:cNvPr id="6" name="Rectangle 5"/>
           <p:cNvSpPr/>
           <p:nvPr/>
         </p:nvSpPr>
@@ -38417,7 +39999,7 @@
       </p:sp>
       <p:sp>
         <p:nvSpPr>
-          <p:cNvPr id="6" name="Rectangle 5"/>
+          <p:cNvPr id="7" name="Rectangle 6"/>
           <p:cNvSpPr/>
           <p:nvPr/>
         </p:nvSpPr>
@@ -38466,7 +40048,7 @@
       </p:sp>
       <p:sp>
         <p:nvSpPr>
-          <p:cNvPr id="7" name="TextBox 6"/>
+          <p:cNvPr id="8" name="TextBox 7"/>
           <p:cNvSpPr txBox="1"/>
           <p:nvPr/>
         </p:nvSpPr>
@@ -38508,7 +40090,7 @@
       </p:sp>
       <p:sp>
         <p:nvSpPr>
-          <p:cNvPr id="8" name="TextBox 7"/>
+          <p:cNvPr id="9" name="TextBox 8"/>
           <p:cNvSpPr txBox="1"/>
           <p:nvPr/>
         </p:nvSpPr>
@@ -38550,7 +40132,7 @@
       </p:sp>
       <p:graphicFrame>
         <p:nvGraphicFramePr>
-          <p:cNvPr id="9" name="Table 8"/>
+          <p:cNvPr id="10" name="Table 9"/>
           <p:cNvGraphicFramePr>
             <a:graphicFrameLocks noGrp="1"/>
           </p:cNvGraphicFramePr>
@@ -39236,7 +40818,7 @@
       </p:graphicFrame>
       <p:sp>
         <p:nvSpPr>
-          <p:cNvPr id="10" name="TextBox 9"/>
+          <p:cNvPr id="11" name="TextBox 10"/>
           <p:cNvSpPr txBox="1"/>
           <p:nvPr/>
         </p:nvSpPr>
@@ -39278,7 +40860,7 @@
       </p:sp>
       <p:graphicFrame>
         <p:nvGraphicFramePr>
-          <p:cNvPr id="11" name="Table 10"/>
+          <p:cNvPr id="12" name="Table 11"/>
           <p:cNvGraphicFramePr>
             <a:graphicFrameLocks noGrp="1"/>
           </p:cNvGraphicFramePr>
@@ -39746,7 +41328,7 @@
       </p:graphicFrame>
       <p:sp>
         <p:nvSpPr>
-          <p:cNvPr id="12" name="TextBox 11"/>
+          <p:cNvPr id="13" name="TextBox 12"/>
           <p:cNvSpPr txBox="1"/>
           <p:nvPr/>
         </p:nvSpPr>
@@ -39788,7 +41370,7 @@
       </p:sp>
       <p:sp>
         <p:nvSpPr>
-          <p:cNvPr id="13" name="Rectangle 12"/>
+          <p:cNvPr id="14" name="Rectangle 13"/>
           <p:cNvSpPr/>
           <p:nvPr/>
         </p:nvSpPr>
@@ -39837,7 +41419,7 @@
       </p:sp>
       <p:sp>
         <p:nvSpPr>
-          <p:cNvPr id="14" name="TextBox 13"/>
+          <p:cNvPr id="15" name="TextBox 14"/>
           <p:cNvSpPr txBox="1"/>
           <p:nvPr/>
         </p:nvSpPr>
@@ -39879,7 +41461,7 @@
       </p:sp>
       <p:sp>
         <p:nvSpPr>
-          <p:cNvPr id="15" name="TextBox 14"/>
+          <p:cNvPr id="16" name="TextBox 15"/>
           <p:cNvSpPr txBox="1"/>
           <p:nvPr/>
         </p:nvSpPr>
@@ -39914,14 +41496,14 @@
               <a:rPr>
                 <a:latin typeface="Inter"/>
               </a:rPr>
-              <a:t>TEST DATA — fictional portfolio for rendering tests only · Data as of 2026-06-30</a:t>
+              <a:t>Confidential — Investment Committee · Data as of 2026-06-30</a:t>
             </a:r>
           </a:p>
         </p:txBody>
       </p:sp>
       <p:sp>
         <p:nvSpPr>
-          <p:cNvPr id="16" name="TextBox 15"/>
+          <p:cNvPr id="17" name="TextBox 16"/>
           <p:cNvSpPr txBox="1"/>
           <p:nvPr/>
         </p:nvSpPr>
@@ -40037,7 +41619,7 @@
         <p:spPr>
           <a:xfrm>
             <a:off x="640080" y="329184"/>
-            <a:ext cx="9875520" cy="182880"/>
+            <a:ext cx="5303520" cy="182880"/>
           </a:xfrm>
           <a:prstGeom prst="rect">
             <a:avLst/>
@@ -40078,6 +41660,48 @@
         </p:nvSpPr>
         <p:spPr>
           <a:xfrm>
+            <a:off x="5897880" y="310896"/>
+            <a:ext cx="4800600" cy="256032"/>
+          </a:xfrm>
+          <a:prstGeom prst="rect">
+            <a:avLst/>
+          </a:prstGeom>
+          <a:noFill/>
+        </p:spPr>
+        <p:txBody>
+          <a:bodyPr wrap="none" lIns="9144" rIns="9144" tIns="9144" bIns="9144" anchor="t">
+            <a:spAutoFit/>
+          </a:bodyPr>
+          <a:lstStyle/>
+          <a:p>
+            <a:pPr algn="r">
+              <a:spcAft>
+                <a:spcPts val="0"/>
+              </a:spcAft>
+              <a:defRPr sz="680" b="1">
+                <a:solidFill>
+                  <a:srgbClr val="4F6B00"/>
+                </a:solidFill>
+                <a:latin typeface="Inter"/>
+              </a:defRPr>
+            </a:pPr>
+            <a:r>
+              <a:rPr>
+                <a:latin typeface="Inter"/>
+              </a:rPr>
+              <a:t>Illustrative, Gradient Maintained — demo data, not the client's holdings or managers</a:t>
+            </a:r>
+          </a:p>
+        </p:txBody>
+      </p:sp>
+      <p:sp>
+        <p:nvSpPr>
+          <p:cNvPr id="5" name="TextBox 4"/>
+          <p:cNvSpPr txBox="1"/>
+          <p:nvPr/>
+        </p:nvSpPr>
+        <p:spPr>
+          <a:xfrm>
             <a:off x="640080" y="566928"/>
             <a:ext cx="10058400" cy="530352"/>
           </a:xfrm>
@@ -40114,7 +41738,7 @@
       </p:sp>
       <p:sp>
         <p:nvSpPr>
-          <p:cNvPr id="5" name="Rectangle 4"/>
+          <p:cNvPr id="6" name="Rectangle 5"/>
           <p:cNvSpPr/>
           <p:nvPr/>
         </p:nvSpPr>
@@ -40163,7 +41787,7 @@
       </p:sp>
       <p:sp>
         <p:nvSpPr>
-          <p:cNvPr id="6" name="Rectangle 5"/>
+          <p:cNvPr id="7" name="Rectangle 6"/>
           <p:cNvSpPr/>
           <p:nvPr/>
         </p:nvSpPr>
@@ -40212,7 +41836,7 @@
       </p:sp>
       <p:sp>
         <p:nvSpPr>
-          <p:cNvPr id="7" name="TextBox 6"/>
+          <p:cNvPr id="8" name="TextBox 7"/>
           <p:cNvSpPr txBox="1"/>
           <p:nvPr/>
         </p:nvSpPr>
@@ -40254,7 +41878,7 @@
       </p:sp>
       <p:sp>
         <p:nvSpPr>
-          <p:cNvPr id="8" name="TextBox 7"/>
+          <p:cNvPr id="9" name="TextBox 8"/>
           <p:cNvSpPr txBox="1"/>
           <p:nvPr/>
         </p:nvSpPr>
@@ -40296,7 +41920,7 @@
       </p:sp>
       <p:sp>
         <p:nvSpPr>
-          <p:cNvPr id="9" name="TextBox 8"/>
+          <p:cNvPr id="10" name="TextBox 9"/>
           <p:cNvSpPr txBox="1"/>
           <p:nvPr/>
         </p:nvSpPr>
@@ -40338,7 +41962,7 @@
       </p:sp>
       <p:sp>
         <p:nvSpPr>
-          <p:cNvPr id="10" name="Rectangle 9"/>
+          <p:cNvPr id="11" name="Rectangle 10"/>
           <p:cNvSpPr/>
           <p:nvPr/>
         </p:nvSpPr>
@@ -40387,7 +42011,7 @@
       </p:sp>
       <p:sp>
         <p:nvSpPr>
-          <p:cNvPr id="11" name="Oval 10"/>
+          <p:cNvPr id="12" name="Oval 11"/>
           <p:cNvSpPr/>
           <p:nvPr/>
         </p:nvSpPr>
@@ -40436,7 +42060,7 @@
       </p:sp>
       <p:sp>
         <p:nvSpPr>
-          <p:cNvPr id="12" name="Rectangle 11"/>
+          <p:cNvPr id="13" name="Rectangle 12"/>
           <p:cNvSpPr/>
           <p:nvPr/>
         </p:nvSpPr>
@@ -40485,7 +42109,7 @@
       </p:sp>
       <p:sp>
         <p:nvSpPr>
-          <p:cNvPr id="13" name="TextBox 12"/>
+          <p:cNvPr id="14" name="TextBox 13"/>
           <p:cNvSpPr txBox="1"/>
           <p:nvPr/>
         </p:nvSpPr>
@@ -40527,7 +42151,7 @@
       </p:sp>
       <p:sp>
         <p:nvSpPr>
-          <p:cNvPr id="14" name="Rectangle 13"/>
+          <p:cNvPr id="15" name="Rectangle 14"/>
           <p:cNvSpPr/>
           <p:nvPr/>
         </p:nvSpPr>
@@ -40576,7 +42200,7 @@
       </p:sp>
       <p:sp>
         <p:nvSpPr>
-          <p:cNvPr id="15" name="Oval 14"/>
+          <p:cNvPr id="16" name="Oval 15"/>
           <p:cNvSpPr/>
           <p:nvPr/>
         </p:nvSpPr>
@@ -40625,7 +42249,7 @@
       </p:sp>
       <p:sp>
         <p:nvSpPr>
-          <p:cNvPr id="16" name="Rectangle 15"/>
+          <p:cNvPr id="17" name="Rectangle 16"/>
           <p:cNvSpPr/>
           <p:nvPr/>
         </p:nvSpPr>
@@ -40674,7 +42298,7 @@
       </p:sp>
       <p:sp>
         <p:nvSpPr>
-          <p:cNvPr id="17" name="TextBox 16"/>
+          <p:cNvPr id="18" name="TextBox 17"/>
           <p:cNvSpPr txBox="1"/>
           <p:nvPr/>
         </p:nvSpPr>
@@ -40716,7 +42340,7 @@
       </p:sp>
       <p:sp>
         <p:nvSpPr>
-          <p:cNvPr id="18" name="Rectangle 17"/>
+          <p:cNvPr id="19" name="Rectangle 18"/>
           <p:cNvSpPr/>
           <p:nvPr/>
         </p:nvSpPr>
@@ -40765,7 +42389,7 @@
       </p:sp>
       <p:sp>
         <p:nvSpPr>
-          <p:cNvPr id="19" name="Oval 18"/>
+          <p:cNvPr id="20" name="Oval 19"/>
           <p:cNvSpPr/>
           <p:nvPr/>
         </p:nvSpPr>
@@ -40814,7 +42438,7 @@
       </p:sp>
       <p:sp>
         <p:nvSpPr>
-          <p:cNvPr id="20" name="Rectangle 19"/>
+          <p:cNvPr id="21" name="Rectangle 20"/>
           <p:cNvSpPr/>
           <p:nvPr/>
         </p:nvSpPr>
@@ -40863,7 +42487,7 @@
       </p:sp>
       <p:sp>
         <p:nvSpPr>
-          <p:cNvPr id="21" name="TextBox 20"/>
+          <p:cNvPr id="22" name="TextBox 21"/>
           <p:cNvSpPr txBox="1"/>
           <p:nvPr/>
         </p:nvSpPr>
@@ -40905,7 +42529,7 @@
       </p:sp>
       <p:sp>
         <p:nvSpPr>
-          <p:cNvPr id="22" name="Rectangle 21"/>
+          <p:cNvPr id="23" name="Rectangle 22"/>
           <p:cNvSpPr/>
           <p:nvPr/>
         </p:nvSpPr>
@@ -40954,7 +42578,7 @@
       </p:sp>
       <p:sp>
         <p:nvSpPr>
-          <p:cNvPr id="23" name="Oval 22"/>
+          <p:cNvPr id="24" name="Oval 23"/>
           <p:cNvSpPr/>
           <p:nvPr/>
         </p:nvSpPr>
@@ -41003,7 +42627,7 @@
       </p:sp>
       <p:sp>
         <p:nvSpPr>
-          <p:cNvPr id="24" name="Rectangle 23"/>
+          <p:cNvPr id="25" name="Rectangle 24"/>
           <p:cNvSpPr/>
           <p:nvPr/>
         </p:nvSpPr>
@@ -41052,7 +42676,7 @@
       </p:sp>
       <p:sp>
         <p:nvSpPr>
-          <p:cNvPr id="25" name="Rectangle 24"/>
+          <p:cNvPr id="26" name="Rectangle 25"/>
           <p:cNvSpPr/>
           <p:nvPr/>
         </p:nvSpPr>
@@ -41101,7 +42725,7 @@
       </p:sp>
       <p:sp>
         <p:nvSpPr>
-          <p:cNvPr id="26" name="TextBox 25"/>
+          <p:cNvPr id="27" name="TextBox 26"/>
           <p:cNvSpPr txBox="1"/>
           <p:nvPr/>
         </p:nvSpPr>
@@ -41136,14 +42760,14 @@
               <a:rPr>
                 <a:latin typeface="Inter"/>
               </a:rPr>
-              <a:t>Sources: none cited</a:t>
+              <a:t>Sources: S1</a:t>
             </a:r>
           </a:p>
         </p:txBody>
       </p:sp>
       <p:sp>
         <p:nvSpPr>
-          <p:cNvPr id="27" name="TextBox 26"/>
+          <p:cNvPr id="28" name="TextBox 27"/>
           <p:cNvSpPr txBox="1"/>
           <p:nvPr/>
         </p:nvSpPr>
@@ -41178,14 +42802,14 @@
               <a:rPr>
                 <a:latin typeface="Inter"/>
               </a:rPr>
-              <a:t>TEST DATA — fictional portfolio for rendering tests only · Data as of 2026-06-30</a:t>
+              <a:t>Confidential — Investment Committee · Data as of 2026-06-30</a:t>
             </a:r>
           </a:p>
         </p:txBody>
       </p:sp>
       <p:sp>
         <p:nvSpPr>
-          <p:cNvPr id="28" name="TextBox 27"/>
+          <p:cNvPr id="29" name="TextBox 28"/>
           <p:cNvSpPr txBox="1"/>
           <p:nvPr/>
         </p:nvSpPr>
@@ -41301,7 +42925,7 @@
         <p:spPr>
           <a:xfrm>
             <a:off x="640080" y="329184"/>
-            <a:ext cx="9875520" cy="182880"/>
+            <a:ext cx="5303520" cy="182880"/>
           </a:xfrm>
           <a:prstGeom prst="rect">
             <a:avLst/>
@@ -41342,6 +42966,48 @@
         </p:nvSpPr>
         <p:spPr>
           <a:xfrm>
+            <a:off x="5897880" y="310896"/>
+            <a:ext cx="4800600" cy="256032"/>
+          </a:xfrm>
+          <a:prstGeom prst="rect">
+            <a:avLst/>
+          </a:prstGeom>
+          <a:noFill/>
+        </p:spPr>
+        <p:txBody>
+          <a:bodyPr wrap="none" lIns="9144" rIns="9144" tIns="9144" bIns="9144" anchor="t">
+            <a:spAutoFit/>
+          </a:bodyPr>
+          <a:lstStyle/>
+          <a:p>
+            <a:pPr algn="r">
+              <a:spcAft>
+                <a:spcPts val="0"/>
+              </a:spcAft>
+              <a:defRPr sz="680" b="1">
+                <a:solidFill>
+                  <a:srgbClr val="4F6B00"/>
+                </a:solidFill>
+                <a:latin typeface="Inter"/>
+              </a:defRPr>
+            </a:pPr>
+            <a:r>
+              <a:rPr>
+                <a:latin typeface="Inter"/>
+              </a:rPr>
+              <a:t>Illustrative, Gradient Maintained — demo data, not the client's holdings or managers</a:t>
+            </a:r>
+          </a:p>
+        </p:txBody>
+      </p:sp>
+      <p:sp>
+        <p:nvSpPr>
+          <p:cNvPr id="5" name="TextBox 4"/>
+          <p:cNvSpPr txBox="1"/>
+          <p:nvPr/>
+        </p:nvSpPr>
+        <p:spPr>
+          <a:xfrm>
             <a:off x="640080" y="566928"/>
             <a:ext cx="10058400" cy="530352"/>
           </a:xfrm>
@@ -41378,7 +43044,7 @@
       </p:sp>
       <p:sp>
         <p:nvSpPr>
-          <p:cNvPr id="5" name="Rectangle 4"/>
+          <p:cNvPr id="6" name="Rectangle 5"/>
           <p:cNvSpPr/>
           <p:nvPr/>
         </p:nvSpPr>
@@ -41427,7 +43093,7 @@
       </p:sp>
       <p:sp>
         <p:nvSpPr>
-          <p:cNvPr id="6" name="Rectangle 5"/>
+          <p:cNvPr id="7" name="Rectangle 6"/>
           <p:cNvSpPr/>
           <p:nvPr/>
         </p:nvSpPr>
@@ -41476,7 +43142,7 @@
       </p:sp>
       <p:sp>
         <p:nvSpPr>
-          <p:cNvPr id="7" name="TextBox 6"/>
+          <p:cNvPr id="8" name="TextBox 7"/>
           <p:cNvSpPr txBox="1"/>
           <p:nvPr/>
         </p:nvSpPr>
@@ -41518,7 +43184,7 @@
       </p:sp>
       <p:sp>
         <p:nvSpPr>
-          <p:cNvPr id="8" name="TextBox 7"/>
+          <p:cNvPr id="9" name="TextBox 8"/>
           <p:cNvSpPr txBox="1"/>
           <p:nvPr/>
         </p:nvSpPr>
@@ -41560,7 +43226,7 @@
       </p:sp>
       <p:graphicFrame>
         <p:nvGraphicFramePr>
-          <p:cNvPr id="9" name="Chart 8"/>
+          <p:cNvPr id="10" name="Chart 9"/>
           <p:cNvGraphicFramePr>
             <a:graphicFrameLocks noGrp="1"/>
           </p:cNvGraphicFramePr>
@@ -41578,7 +43244,7 @@
       </p:graphicFrame>
       <p:sp>
         <p:nvSpPr>
-          <p:cNvPr id="10" name="Rectangle 9"/>
+          <p:cNvPr id="11" name="Rectangle 10"/>
           <p:cNvSpPr/>
           <p:nvPr/>
         </p:nvSpPr>
@@ -41627,7 +43293,7 @@
       </p:sp>
       <p:sp>
         <p:nvSpPr>
-          <p:cNvPr id="11" name="TextBox 10"/>
+          <p:cNvPr id="12" name="TextBox 11"/>
           <p:cNvSpPr txBox="1"/>
           <p:nvPr/>
         </p:nvSpPr>
@@ -41662,14 +43328,14 @@
               <a:rPr>
                 <a:latin typeface="Inter"/>
               </a:rPr>
-              <a:t>Sources: none cited</a:t>
+              <a:t>Sources: S1</a:t>
             </a:r>
           </a:p>
         </p:txBody>
       </p:sp>
       <p:sp>
         <p:nvSpPr>
-          <p:cNvPr id="12" name="TextBox 11"/>
+          <p:cNvPr id="13" name="TextBox 12"/>
           <p:cNvSpPr txBox="1"/>
           <p:nvPr/>
         </p:nvSpPr>
@@ -41704,14 +43370,14 @@
               <a:rPr>
                 <a:latin typeface="Inter"/>
               </a:rPr>
-              <a:t>TEST DATA — fictional portfolio for rendering tests only · Data as of 2026-06-30</a:t>
+              <a:t>Confidential — Investment Committee · Data as of 2026-06-30</a:t>
             </a:r>
           </a:p>
         </p:txBody>
       </p:sp>
       <p:sp>
         <p:nvSpPr>
-          <p:cNvPr id="13" name="TextBox 12"/>
+          <p:cNvPr id="14" name="TextBox 13"/>
           <p:cNvSpPr txBox="1"/>
           <p:nvPr/>
         </p:nvSpPr>

--- a/plugins/gradient-cio/assets/examples/gradient-portfolio-construction-private-markets.pptx
+++ b/plugins/gradient-cio/assets/examples/gradient-portfolio-construction-private-markets.pptx
@@ -38,6 +38,7 @@
     <ns0:sldId id="286" ns1:id="rId37"/>
     <ns0:sldId id="287" ns1:id="rId38"/>
     <ns0:sldId id="288" ns1:id="rId39"/>
+    <ns0:sldId id="289" ns1:id="rId40"/>
   </ns0:sldIdLst>
   <ns0:sldSz cx="12191695" cy="6858000" type="screen16x9"/>
   <ns0:notesSz cx="6858000" cy="9144000"/>
@@ -5547,224 +5548,7 @@
       </p:sp>
       <p:sp>
         <p:nvSpPr>
-          <p:cNvPr id="17" name="Rectangle 16"/>
-          <p:cNvSpPr/>
-          <p:nvPr/>
-        </p:nvSpPr>
-        <p:spPr>
-          <a:xfrm>
-            <a:off x="685800" y="5687568"/>
-            <a:ext cx="3337560" cy="530352"/>
-          </a:xfrm>
-          <a:prstGeom prst="rect">
-            <a:avLst/>
-          </a:prstGeom>
-          <a:solidFill>
-            <a:srgbClr val="F2A93B"/>
-          </a:solidFill>
-          <a:ln>
-            <a:solidFill>
-              <a:srgbClr val="F2A93B"/>
-            </a:solidFill>
-          </a:ln>
-        </p:spPr>
-        <p:style>
-          <a:lnRef idx="1">
-            <a:schemeClr val="accent1"/>
-          </a:lnRef>
-          <a:fillRef idx="3">
-            <a:schemeClr val="accent1"/>
-          </a:fillRef>
-          <a:effectRef idx="2">
-            <a:schemeClr val="accent1"/>
-          </a:effectRef>
-          <a:fontRef idx="minor">
-            <a:schemeClr val="lt1"/>
-          </a:fontRef>
-        </p:style>
-        <p:txBody>
-          <a:bodyPr rtlCol="0" anchor="ctr"/>
-          <a:lstStyle/>
-          <a:p>
-            <a:pPr algn="ctr">
-              <a:defRPr>
-                <a:latin typeface="Inter"/>
-              </a:defRPr>
-            </a:pPr>
-          </a:p>
-        </p:txBody>
-      </p:sp>
-      <p:sp>
-        <p:nvSpPr>
-          <p:cNvPr id="18" name="TextBox 17"/>
-          <p:cNvSpPr txBox="1"/>
-          <p:nvPr/>
-        </p:nvSpPr>
-        <p:spPr>
-          <a:xfrm>
-            <a:off x="822960" y="5760720"/>
-            <a:ext cx="3063240" cy="128016"/>
-          </a:xfrm>
-          <a:prstGeom prst="rect">
-            <a:avLst/>
-          </a:prstGeom>
-          <a:noFill/>
-        </p:spPr>
-        <p:txBody>
-          <a:bodyPr wrap="none" lIns="9144" rIns="9144" tIns="9144" bIns="9144" anchor="t">
-            <a:spAutoFit/>
-          </a:bodyPr>
-          <a:lstStyle/>
-          <a:p>
-            <a:pPr algn="l">
-              <a:spcAft>
-                <a:spcPts val="0"/>
-              </a:spcAft>
-              <a:defRPr sz="620" b="1">
-                <a:solidFill>
-                  <a:srgbClr val="0D1117"/>
-                </a:solidFill>
-                <a:latin typeface="Inter"/>
-              </a:defRPr>
-            </a:pPr>
-            <a:r>
-              <a:rPr>
-                <a:latin typeface="Inter"/>
-              </a:rPr>
-              <a:t>OVERALL VIEW</a:t>
-            </a:r>
-          </a:p>
-        </p:txBody>
-      </p:sp>
-      <p:sp>
-        <p:nvSpPr>
-          <p:cNvPr id="19" name="TextBox 18"/>
-          <p:cNvSpPr txBox="1"/>
-          <p:nvPr/>
-        </p:nvSpPr>
-        <p:spPr>
-          <a:xfrm>
-            <a:off x="822960" y="5916168"/>
-            <a:ext cx="3063240" cy="182880"/>
-          </a:xfrm>
-          <a:prstGeom prst="rect">
-            <a:avLst/>
-          </a:prstGeom>
-          <a:noFill/>
-        </p:spPr>
-        <p:txBody>
-          <a:bodyPr wrap="none" lIns="9144" rIns="9144" tIns="9144" bIns="9144" anchor="t">
-            <a:spAutoFit/>
-          </a:bodyPr>
-          <a:lstStyle/>
-          <a:p>
-            <a:pPr algn="l">
-              <a:spcAft>
-                <a:spcPts val="0"/>
-              </a:spcAft>
-              <a:defRPr sz="900" b="1">
-                <a:solidFill>
-                  <a:srgbClr val="0D1117"/>
-                </a:solidFill>
-                <a:latin typeface="Inter"/>
-              </a:defRPr>
-            </a:pPr>
-            <a:r>
-              <a:rPr>
-                <a:latin typeface="Inter"/>
-              </a:rPr>
-              <a:t>Pacing and concentration on watch</a:t>
-            </a:r>
-          </a:p>
-        </p:txBody>
-      </p:sp>
-      <p:sp>
-        <p:nvSpPr>
-          <p:cNvPr id="20" name="TextBox 19"/>
-          <p:cNvSpPr txBox="1"/>
-          <p:nvPr/>
-        </p:nvSpPr>
-        <p:spPr>
-          <a:xfrm>
-            <a:off x="4297680" y="5733288"/>
-            <a:ext cx="3108960" cy="164592"/>
-          </a:xfrm>
-          <a:prstGeom prst="rect">
-            <a:avLst/>
-          </a:prstGeom>
-          <a:noFill/>
-        </p:spPr>
-        <p:txBody>
-          <a:bodyPr wrap="none" lIns="9144" rIns="9144" tIns="9144" bIns="9144" anchor="t">
-            <a:spAutoFit/>
-          </a:bodyPr>
-          <a:lstStyle/>
-          <a:p>
-            <a:pPr algn="l">
-              <a:spcAft>
-                <a:spcPts val="0"/>
-              </a:spcAft>
-              <a:defRPr sz="650" b="1">
-                <a:solidFill>
-                  <a:srgbClr val="8A94A1"/>
-                </a:solidFill>
-                <a:latin typeface="Inter"/>
-              </a:defRPr>
-            </a:pPr>
-            <a:r>
-              <a:rPr>
-                <a:latin typeface="Inter"/>
-              </a:rPr>
-              <a:t>SCOPE REVIEWED</a:t>
-            </a:r>
-          </a:p>
-        </p:txBody>
-      </p:sp>
-      <p:sp>
-        <p:nvSpPr>
-          <p:cNvPr id="21" name="TextBox 20"/>
-          <p:cNvSpPr txBox="1"/>
-          <p:nvPr/>
-        </p:nvSpPr>
-        <p:spPr>
-          <a:xfrm>
-            <a:off x="4297680" y="5934456"/>
-            <a:ext cx="3108960" cy="201168"/>
-          </a:xfrm>
-          <a:prstGeom prst="rect">
-            <a:avLst/>
-          </a:prstGeom>
-          <a:noFill/>
-        </p:spPr>
-        <p:txBody>
-          <a:bodyPr wrap="none" lIns="9144" rIns="9144" tIns="9144" bIns="9144" anchor="t">
-            <a:spAutoFit/>
-          </a:bodyPr>
-          <a:lstStyle/>
-          <a:p>
-            <a:pPr algn="l">
-              <a:spcAft>
-                <a:spcPts val="0"/>
-              </a:spcAft>
-              <a:defRPr sz="800" b="1">
-                <a:solidFill>
-                  <a:srgbClr val="FFFFFF"/>
-                </a:solidFill>
-                <a:latin typeface="Inter"/>
-              </a:defRPr>
-            </a:pPr>
-            <a:r>
-              <a:rPr>
-                <a:latin typeface="Inter"/>
-              </a:rPr>
-              <a:t>9 of 10 · Partial</a:t>
-            </a:r>
-          </a:p>
-        </p:txBody>
-      </p:sp>
-      <p:sp>
-        <p:nvSpPr>
-          <p:cNvPr id="22" name="TextBox 21"/>
+          <p:cNvPr id="17" name="TextBox 16"/>
           <p:cNvSpPr txBox="1"/>
           <p:nvPr/>
         </p:nvSpPr>
@@ -5806,7 +5590,7 @@
       </p:sp>
       <p:sp>
         <p:nvSpPr>
-          <p:cNvPr id="23" name="TextBox 22"/>
+          <p:cNvPr id="18" name="TextBox 17"/>
           <p:cNvSpPr txBox="1"/>
           <p:nvPr/>
         </p:nvSpPr>
@@ -5848,7 +5632,7 @@
       </p:sp>
       <p:sp>
         <p:nvSpPr>
-          <p:cNvPr id="24" name="TextBox 23"/>
+          <p:cNvPr id="19" name="TextBox 18"/>
           <p:cNvSpPr txBox="1"/>
           <p:nvPr/>
         </p:nvSpPr>
@@ -5964,7 +5748,7 @@
         <p:spPr>
           <a:xfrm>
             <a:off x="640080" y="329184"/>
-            <a:ext cx="5303520" cy="182880"/>
+            <a:ext cx="9875520" cy="182880"/>
           </a:xfrm>
           <a:prstGeom prst="rect">
             <a:avLst/>
@@ -6005,48 +5789,6 @@
         </p:nvSpPr>
         <p:spPr>
           <a:xfrm>
-            <a:off x="5897880" y="310896"/>
-            <a:ext cx="4800600" cy="256032"/>
-          </a:xfrm>
-          <a:prstGeom prst="rect">
-            <a:avLst/>
-          </a:prstGeom>
-          <a:noFill/>
-        </p:spPr>
-        <p:txBody>
-          <a:bodyPr wrap="none" lIns="9144" rIns="9144" tIns="9144" bIns="9144" anchor="t">
-            <a:spAutoFit/>
-          </a:bodyPr>
-          <a:lstStyle/>
-          <a:p>
-            <a:pPr algn="r">
-              <a:spcAft>
-                <a:spcPts val="0"/>
-              </a:spcAft>
-              <a:defRPr sz="680" b="1">
-                <a:solidFill>
-                  <a:srgbClr val="4F6B00"/>
-                </a:solidFill>
-                <a:latin typeface="Inter"/>
-              </a:defRPr>
-            </a:pPr>
-            <a:r>
-              <a:rPr>
-                <a:latin typeface="Inter"/>
-              </a:rPr>
-              <a:t>Illustrative, Gradient Maintained — demo data, not the client's holdings or managers</a:t>
-            </a:r>
-          </a:p>
-        </p:txBody>
-      </p:sp>
-      <p:sp>
-        <p:nvSpPr>
-          <p:cNvPr id="5" name="TextBox 4"/>
-          <p:cNvSpPr txBox="1"/>
-          <p:nvPr/>
-        </p:nvSpPr>
-        <p:spPr>
-          <a:xfrm>
             <a:off x="640080" y="566928"/>
             <a:ext cx="10058400" cy="530352"/>
           </a:xfrm>
@@ -6083,7 +5825,7 @@
       </p:sp>
       <p:sp>
         <p:nvSpPr>
-          <p:cNvPr id="6" name="Rectangle 5"/>
+          <p:cNvPr id="5" name="Rectangle 4"/>
           <p:cNvSpPr/>
           <p:nvPr/>
         </p:nvSpPr>
@@ -6132,7 +5874,7 @@
       </p:sp>
       <p:sp>
         <p:nvSpPr>
-          <p:cNvPr id="7" name="Rectangle 6"/>
+          <p:cNvPr id="6" name="Rectangle 5"/>
           <p:cNvSpPr/>
           <p:nvPr/>
         </p:nvSpPr>
@@ -6181,7 +5923,7 @@
       </p:sp>
       <p:sp>
         <p:nvSpPr>
-          <p:cNvPr id="8" name="TextBox 7"/>
+          <p:cNvPr id="7" name="TextBox 6"/>
           <p:cNvSpPr txBox="1"/>
           <p:nvPr/>
         </p:nvSpPr>
@@ -6223,7 +5965,7 @@
       </p:sp>
       <p:sp>
         <p:nvSpPr>
-          <p:cNvPr id="9" name="TextBox 8"/>
+          <p:cNvPr id="8" name="TextBox 7"/>
           <p:cNvSpPr txBox="1"/>
           <p:nvPr/>
         </p:nvSpPr>
@@ -6265,7 +6007,7 @@
       </p:sp>
       <p:graphicFrame>
         <p:nvGraphicFramePr>
-          <p:cNvPr id="10" name="Chart 9"/>
+          <p:cNvPr id="9" name="Chart 8"/>
           <p:cNvGraphicFramePr>
             <a:graphicFrameLocks noGrp="1"/>
           </p:cNvGraphicFramePr>
@@ -6283,7 +6025,7 @@
       </p:graphicFrame>
       <p:sp>
         <p:nvSpPr>
-          <p:cNvPr id="11" name="Rectangle 10"/>
+          <p:cNvPr id="10" name="Rectangle 9"/>
           <p:cNvSpPr/>
           <p:nvPr/>
         </p:nvSpPr>
@@ -6332,7 +6074,7 @@
       </p:sp>
       <p:sp>
         <p:nvSpPr>
-          <p:cNvPr id="12" name="TextBox 11"/>
+          <p:cNvPr id="11" name="TextBox 10"/>
           <p:cNvSpPr txBox="1"/>
           <p:nvPr/>
         </p:nvSpPr>
@@ -6374,7 +6116,7 @@
       </p:sp>
       <p:sp>
         <p:nvSpPr>
-          <p:cNvPr id="13" name="TextBox 12"/>
+          <p:cNvPr id="12" name="TextBox 11"/>
           <p:cNvSpPr txBox="1"/>
           <p:nvPr/>
         </p:nvSpPr>
@@ -6416,7 +6158,7 @@
       </p:sp>
       <p:sp>
         <p:nvSpPr>
-          <p:cNvPr id="14" name="TextBox 13"/>
+          <p:cNvPr id="13" name="TextBox 12"/>
           <p:cNvSpPr txBox="1"/>
           <p:nvPr/>
         </p:nvSpPr>
@@ -6532,7 +6274,7 @@
         <p:spPr>
           <a:xfrm>
             <a:off x="640080" y="329184"/>
-            <a:ext cx="5303520" cy="182880"/>
+            <a:ext cx="9875520" cy="182880"/>
           </a:xfrm>
           <a:prstGeom prst="rect">
             <a:avLst/>
@@ -6573,48 +6315,6 @@
         </p:nvSpPr>
         <p:spPr>
           <a:xfrm>
-            <a:off x="5897880" y="310896"/>
-            <a:ext cx="4800600" cy="256032"/>
-          </a:xfrm>
-          <a:prstGeom prst="rect">
-            <a:avLst/>
-          </a:prstGeom>
-          <a:noFill/>
-        </p:spPr>
-        <p:txBody>
-          <a:bodyPr wrap="none" lIns="9144" rIns="9144" tIns="9144" bIns="9144" anchor="t">
-            <a:spAutoFit/>
-          </a:bodyPr>
-          <a:lstStyle/>
-          <a:p>
-            <a:pPr algn="r">
-              <a:spcAft>
-                <a:spcPts val="0"/>
-              </a:spcAft>
-              <a:defRPr sz="680" b="1">
-                <a:solidFill>
-                  <a:srgbClr val="4F6B00"/>
-                </a:solidFill>
-                <a:latin typeface="Inter"/>
-              </a:defRPr>
-            </a:pPr>
-            <a:r>
-              <a:rPr>
-                <a:latin typeface="Inter"/>
-              </a:rPr>
-              <a:t>Illustrative, Gradient Maintained — demo data, not the client's holdings or managers</a:t>
-            </a:r>
-          </a:p>
-        </p:txBody>
-      </p:sp>
-      <p:sp>
-        <p:nvSpPr>
-          <p:cNvPr id="5" name="TextBox 4"/>
-          <p:cNvSpPr txBox="1"/>
-          <p:nvPr/>
-        </p:nvSpPr>
-        <p:spPr>
-          <a:xfrm>
             <a:off x="640080" y="566928"/>
             <a:ext cx="10058400" cy="530352"/>
           </a:xfrm>
@@ -6651,7 +6351,7 @@
       </p:sp>
       <p:sp>
         <p:nvSpPr>
-          <p:cNvPr id="6" name="Rectangle 5"/>
+          <p:cNvPr id="5" name="Rectangle 4"/>
           <p:cNvSpPr/>
           <p:nvPr/>
         </p:nvSpPr>
@@ -6700,7 +6400,7 @@
       </p:sp>
       <p:sp>
         <p:nvSpPr>
-          <p:cNvPr id="7" name="Rectangle 6"/>
+          <p:cNvPr id="6" name="Rectangle 5"/>
           <p:cNvSpPr/>
           <p:nvPr/>
         </p:nvSpPr>
@@ -6749,7 +6449,7 @@
       </p:sp>
       <p:sp>
         <p:nvSpPr>
-          <p:cNvPr id="8" name="TextBox 7"/>
+          <p:cNvPr id="7" name="TextBox 6"/>
           <p:cNvSpPr txBox="1"/>
           <p:nvPr/>
         </p:nvSpPr>
@@ -6791,7 +6491,7 @@
       </p:sp>
       <p:sp>
         <p:nvSpPr>
-          <p:cNvPr id="9" name="TextBox 8"/>
+          <p:cNvPr id="8" name="TextBox 7"/>
           <p:cNvSpPr txBox="1"/>
           <p:nvPr/>
         </p:nvSpPr>
@@ -6833,7 +6533,7 @@
       </p:sp>
       <p:graphicFrame>
         <p:nvGraphicFramePr>
-          <p:cNvPr id="10" name="Chart 9"/>
+          <p:cNvPr id="9" name="Chart 8"/>
           <p:cNvGraphicFramePr>
             <a:graphicFrameLocks noGrp="1"/>
           </p:cNvGraphicFramePr>
@@ -6851,7 +6551,7 @@
       </p:graphicFrame>
       <p:sp>
         <p:nvSpPr>
-          <p:cNvPr id="11" name="Rectangle 10"/>
+          <p:cNvPr id="10" name="Rectangle 9"/>
           <p:cNvSpPr/>
           <p:nvPr/>
         </p:nvSpPr>
@@ -6900,7 +6600,7 @@
       </p:sp>
       <p:sp>
         <p:nvSpPr>
-          <p:cNvPr id="12" name="TextBox 11"/>
+          <p:cNvPr id="11" name="TextBox 10"/>
           <p:cNvSpPr txBox="1"/>
           <p:nvPr/>
         </p:nvSpPr>
@@ -6942,7 +6642,7 @@
       </p:sp>
       <p:sp>
         <p:nvSpPr>
-          <p:cNvPr id="13" name="TextBox 12"/>
+          <p:cNvPr id="12" name="TextBox 11"/>
           <p:cNvSpPr txBox="1"/>
           <p:nvPr/>
         </p:nvSpPr>
@@ -6984,7 +6684,7 @@
       </p:sp>
       <p:sp>
         <p:nvSpPr>
-          <p:cNvPr id="14" name="TextBox 13"/>
+          <p:cNvPr id="13" name="TextBox 12"/>
           <p:cNvSpPr txBox="1"/>
           <p:nvPr/>
         </p:nvSpPr>
@@ -7100,7 +6800,7 @@
         <p:spPr>
           <a:xfrm>
             <a:off x="640080" y="329184"/>
-            <a:ext cx="5303520" cy="182880"/>
+            <a:ext cx="9875520" cy="182880"/>
           </a:xfrm>
           <a:prstGeom prst="rect">
             <a:avLst/>
@@ -7141,48 +6841,6 @@
         </p:nvSpPr>
         <p:spPr>
           <a:xfrm>
-            <a:off x="5897880" y="310896"/>
-            <a:ext cx="4800600" cy="256032"/>
-          </a:xfrm>
-          <a:prstGeom prst="rect">
-            <a:avLst/>
-          </a:prstGeom>
-          <a:noFill/>
-        </p:spPr>
-        <p:txBody>
-          <a:bodyPr wrap="none" lIns="9144" rIns="9144" tIns="9144" bIns="9144" anchor="t">
-            <a:spAutoFit/>
-          </a:bodyPr>
-          <a:lstStyle/>
-          <a:p>
-            <a:pPr algn="r">
-              <a:spcAft>
-                <a:spcPts val="0"/>
-              </a:spcAft>
-              <a:defRPr sz="680" b="1">
-                <a:solidFill>
-                  <a:srgbClr val="4F6B00"/>
-                </a:solidFill>
-                <a:latin typeface="Inter"/>
-              </a:defRPr>
-            </a:pPr>
-            <a:r>
-              <a:rPr>
-                <a:latin typeface="Inter"/>
-              </a:rPr>
-              <a:t>Illustrative, Gradient Maintained — demo data, not the client's holdings or managers</a:t>
-            </a:r>
-          </a:p>
-        </p:txBody>
-      </p:sp>
-      <p:sp>
-        <p:nvSpPr>
-          <p:cNvPr id="5" name="TextBox 4"/>
-          <p:cNvSpPr txBox="1"/>
-          <p:nvPr/>
-        </p:nvSpPr>
-        <p:spPr>
-          <a:xfrm>
             <a:off x="640080" y="566928"/>
             <a:ext cx="10058400" cy="530352"/>
           </a:xfrm>
@@ -7219,7 +6877,7 @@
       </p:sp>
       <p:sp>
         <p:nvSpPr>
-          <p:cNvPr id="6" name="Rectangle 5"/>
+          <p:cNvPr id="5" name="Rectangle 4"/>
           <p:cNvSpPr/>
           <p:nvPr/>
         </p:nvSpPr>
@@ -7268,7 +6926,7 @@
       </p:sp>
       <p:sp>
         <p:nvSpPr>
-          <p:cNvPr id="7" name="Rectangle 6"/>
+          <p:cNvPr id="6" name="Rectangle 5"/>
           <p:cNvSpPr/>
           <p:nvPr/>
         </p:nvSpPr>
@@ -7317,7 +6975,7 @@
       </p:sp>
       <p:sp>
         <p:nvSpPr>
-          <p:cNvPr id="8" name="TextBox 7"/>
+          <p:cNvPr id="7" name="TextBox 6"/>
           <p:cNvSpPr txBox="1"/>
           <p:nvPr/>
         </p:nvSpPr>
@@ -7359,7 +7017,7 @@
       </p:sp>
       <p:sp>
         <p:nvSpPr>
-          <p:cNvPr id="9" name="TextBox 8"/>
+          <p:cNvPr id="8" name="TextBox 7"/>
           <p:cNvSpPr txBox="1"/>
           <p:nvPr/>
         </p:nvSpPr>
@@ -7401,7 +7059,7 @@
       </p:sp>
       <p:graphicFrame>
         <p:nvGraphicFramePr>
-          <p:cNvPr id="10" name="Table 9"/>
+          <p:cNvPr id="9" name="Table 8"/>
           <p:cNvGraphicFramePr>
             <a:graphicFrameLocks noGrp="1"/>
           </p:cNvGraphicFramePr>
@@ -8251,7 +7909,7 @@
       </p:graphicFrame>
       <p:sp>
         <p:nvSpPr>
-          <p:cNvPr id="11" name="Rectangle 10"/>
+          <p:cNvPr id="10" name="Rectangle 9"/>
           <p:cNvSpPr/>
           <p:nvPr/>
         </p:nvSpPr>
@@ -8300,7 +7958,7 @@
       </p:sp>
       <p:sp>
         <p:nvSpPr>
-          <p:cNvPr id="12" name="Rectangle 11"/>
+          <p:cNvPr id="11" name="Rectangle 10"/>
           <p:cNvSpPr/>
           <p:nvPr/>
         </p:nvSpPr>
@@ -8349,7 +8007,7 @@
       </p:sp>
       <p:sp>
         <p:nvSpPr>
-          <p:cNvPr id="13" name="TextBox 12"/>
+          <p:cNvPr id="12" name="TextBox 11"/>
           <p:cNvSpPr txBox="1"/>
           <p:nvPr/>
         </p:nvSpPr>
@@ -8391,7 +8049,7 @@
       </p:sp>
       <p:sp>
         <p:nvSpPr>
-          <p:cNvPr id="14" name="TextBox 13"/>
+          <p:cNvPr id="13" name="TextBox 12"/>
           <p:cNvSpPr txBox="1"/>
           <p:nvPr/>
         </p:nvSpPr>
@@ -8433,7 +8091,7 @@
       </p:sp>
       <p:sp>
         <p:nvSpPr>
-          <p:cNvPr id="15" name="TextBox 14"/>
+          <p:cNvPr id="14" name="TextBox 13"/>
           <p:cNvSpPr txBox="1"/>
           <p:nvPr/>
         </p:nvSpPr>
@@ -8475,7 +8133,7 @@
       </p:sp>
       <p:sp>
         <p:nvSpPr>
-          <p:cNvPr id="16" name="Rectangle 15"/>
+          <p:cNvPr id="15" name="Rectangle 14"/>
           <p:cNvSpPr/>
           <p:nvPr/>
         </p:nvSpPr>
@@ -8524,7 +8182,7 @@
       </p:sp>
       <p:sp>
         <p:nvSpPr>
-          <p:cNvPr id="17" name="TextBox 16"/>
+          <p:cNvPr id="16" name="TextBox 15"/>
           <p:cNvSpPr txBox="1"/>
           <p:nvPr/>
         </p:nvSpPr>
@@ -8566,7 +8224,7 @@
       </p:sp>
       <p:sp>
         <p:nvSpPr>
-          <p:cNvPr id="18" name="TextBox 17"/>
+          <p:cNvPr id="17" name="TextBox 16"/>
           <p:cNvSpPr txBox="1"/>
           <p:nvPr/>
         </p:nvSpPr>
@@ -8608,7 +8266,7 @@
       </p:sp>
       <p:sp>
         <p:nvSpPr>
-          <p:cNvPr id="19" name="TextBox 18"/>
+          <p:cNvPr id="18" name="TextBox 17"/>
           <p:cNvSpPr txBox="1"/>
           <p:nvPr/>
         </p:nvSpPr>
@@ -8724,7 +8382,7 @@
         <p:spPr>
           <a:xfrm>
             <a:off x="640080" y="329184"/>
-            <a:ext cx="5303520" cy="182880"/>
+            <a:ext cx="9875520" cy="182880"/>
           </a:xfrm>
           <a:prstGeom prst="rect">
             <a:avLst/>
@@ -8765,48 +8423,6 @@
         </p:nvSpPr>
         <p:spPr>
           <a:xfrm>
-            <a:off x="5897880" y="310896"/>
-            <a:ext cx="4800600" cy="256032"/>
-          </a:xfrm>
-          <a:prstGeom prst="rect">
-            <a:avLst/>
-          </a:prstGeom>
-          <a:noFill/>
-        </p:spPr>
-        <p:txBody>
-          <a:bodyPr wrap="none" lIns="9144" rIns="9144" tIns="9144" bIns="9144" anchor="t">
-            <a:spAutoFit/>
-          </a:bodyPr>
-          <a:lstStyle/>
-          <a:p>
-            <a:pPr algn="r">
-              <a:spcAft>
-                <a:spcPts val="0"/>
-              </a:spcAft>
-              <a:defRPr sz="680" b="1">
-                <a:solidFill>
-                  <a:srgbClr val="4F6B00"/>
-                </a:solidFill>
-                <a:latin typeface="Inter"/>
-              </a:defRPr>
-            </a:pPr>
-            <a:r>
-              <a:rPr>
-                <a:latin typeface="Inter"/>
-              </a:rPr>
-              <a:t>Illustrative, Gradient Maintained — demo data, not the client's holdings or managers</a:t>
-            </a:r>
-          </a:p>
-        </p:txBody>
-      </p:sp>
-      <p:sp>
-        <p:nvSpPr>
-          <p:cNvPr id="5" name="TextBox 4"/>
-          <p:cNvSpPr txBox="1"/>
-          <p:nvPr/>
-        </p:nvSpPr>
-        <p:spPr>
-          <a:xfrm>
             <a:off x="640080" y="566928"/>
             <a:ext cx="10058400" cy="530352"/>
           </a:xfrm>
@@ -8843,7 +8459,7 @@
       </p:sp>
       <p:sp>
         <p:nvSpPr>
-          <p:cNvPr id="6" name="Rectangle 5"/>
+          <p:cNvPr id="5" name="Rectangle 4"/>
           <p:cNvSpPr/>
           <p:nvPr/>
         </p:nvSpPr>
@@ -8892,7 +8508,7 @@
       </p:sp>
       <p:sp>
         <p:nvSpPr>
-          <p:cNvPr id="7" name="Rectangle 6"/>
+          <p:cNvPr id="6" name="Rectangle 5"/>
           <p:cNvSpPr/>
           <p:nvPr/>
         </p:nvSpPr>
@@ -8941,7 +8557,7 @@
       </p:sp>
       <p:sp>
         <p:nvSpPr>
-          <p:cNvPr id="8" name="TextBox 7"/>
+          <p:cNvPr id="7" name="TextBox 6"/>
           <p:cNvSpPr txBox="1"/>
           <p:nvPr/>
         </p:nvSpPr>
@@ -8983,7 +8599,7 @@
       </p:sp>
       <p:sp>
         <p:nvSpPr>
-          <p:cNvPr id="9" name="TextBox 8"/>
+          <p:cNvPr id="8" name="TextBox 7"/>
           <p:cNvSpPr txBox="1"/>
           <p:nvPr/>
         </p:nvSpPr>
@@ -9025,7 +8641,7 @@
       </p:sp>
       <p:graphicFrame>
         <p:nvGraphicFramePr>
-          <p:cNvPr id="10" name="Chart 9"/>
+          <p:cNvPr id="9" name="Chart 8"/>
           <p:cNvGraphicFramePr>
             <a:graphicFrameLocks noGrp="1"/>
           </p:cNvGraphicFramePr>
@@ -9043,7 +8659,7 @@
       </p:graphicFrame>
       <p:sp>
         <p:nvSpPr>
-          <p:cNvPr id="11" name="Rectangle 10"/>
+          <p:cNvPr id="10" name="Rectangle 9"/>
           <p:cNvSpPr/>
           <p:nvPr/>
         </p:nvSpPr>
@@ -9092,7 +8708,7 @@
       </p:sp>
       <p:sp>
         <p:nvSpPr>
-          <p:cNvPr id="12" name="TextBox 11"/>
+          <p:cNvPr id="11" name="TextBox 10"/>
           <p:cNvSpPr txBox="1"/>
           <p:nvPr/>
         </p:nvSpPr>
@@ -9134,7 +8750,7 @@
       </p:sp>
       <p:sp>
         <p:nvSpPr>
-          <p:cNvPr id="13" name="TextBox 12"/>
+          <p:cNvPr id="12" name="TextBox 11"/>
           <p:cNvSpPr txBox="1"/>
           <p:nvPr/>
         </p:nvSpPr>
@@ -9176,7 +8792,7 @@
       </p:sp>
       <p:sp>
         <p:nvSpPr>
-          <p:cNvPr id="14" name="TextBox 13"/>
+          <p:cNvPr id="13" name="TextBox 12"/>
           <p:cNvSpPr txBox="1"/>
           <p:nvPr/>
         </p:nvSpPr>
@@ -9292,7 +8908,7 @@
         <p:spPr>
           <a:xfrm>
             <a:off x="640080" y="329184"/>
-            <a:ext cx="5303520" cy="182880"/>
+            <a:ext cx="9875520" cy="182880"/>
           </a:xfrm>
           <a:prstGeom prst="rect">
             <a:avLst/>
@@ -9333,48 +8949,6 @@
         </p:nvSpPr>
         <p:spPr>
           <a:xfrm>
-            <a:off x="5897880" y="310896"/>
-            <a:ext cx="4800600" cy="256032"/>
-          </a:xfrm>
-          <a:prstGeom prst="rect">
-            <a:avLst/>
-          </a:prstGeom>
-          <a:noFill/>
-        </p:spPr>
-        <p:txBody>
-          <a:bodyPr wrap="none" lIns="9144" rIns="9144" tIns="9144" bIns="9144" anchor="t">
-            <a:spAutoFit/>
-          </a:bodyPr>
-          <a:lstStyle/>
-          <a:p>
-            <a:pPr algn="r">
-              <a:spcAft>
-                <a:spcPts val="0"/>
-              </a:spcAft>
-              <a:defRPr sz="680" b="1">
-                <a:solidFill>
-                  <a:srgbClr val="4F6B00"/>
-                </a:solidFill>
-                <a:latin typeface="Inter"/>
-              </a:defRPr>
-            </a:pPr>
-            <a:r>
-              <a:rPr>
-                <a:latin typeface="Inter"/>
-              </a:rPr>
-              <a:t>Illustrative, Gradient Maintained — demo data, not the client's holdings or managers</a:t>
-            </a:r>
-          </a:p>
-        </p:txBody>
-      </p:sp>
-      <p:sp>
-        <p:nvSpPr>
-          <p:cNvPr id="5" name="TextBox 4"/>
-          <p:cNvSpPr txBox="1"/>
-          <p:nvPr/>
-        </p:nvSpPr>
-        <p:spPr>
-          <a:xfrm>
             <a:off x="640080" y="566928"/>
             <a:ext cx="10058400" cy="530352"/>
           </a:xfrm>
@@ -9411,7 +8985,7 @@
       </p:sp>
       <p:sp>
         <p:nvSpPr>
-          <p:cNvPr id="6" name="Rectangle 5"/>
+          <p:cNvPr id="5" name="Rectangle 4"/>
           <p:cNvSpPr/>
           <p:nvPr/>
         </p:nvSpPr>
@@ -9460,7 +9034,7 @@
       </p:sp>
       <p:sp>
         <p:nvSpPr>
-          <p:cNvPr id="7" name="Rectangle 6"/>
+          <p:cNvPr id="6" name="Rectangle 5"/>
           <p:cNvSpPr/>
           <p:nvPr/>
         </p:nvSpPr>
@@ -9509,7 +9083,7 @@
       </p:sp>
       <p:sp>
         <p:nvSpPr>
-          <p:cNvPr id="8" name="TextBox 7"/>
+          <p:cNvPr id="7" name="TextBox 6"/>
           <p:cNvSpPr txBox="1"/>
           <p:nvPr/>
         </p:nvSpPr>
@@ -9551,7 +9125,7 @@
       </p:sp>
       <p:sp>
         <p:nvSpPr>
-          <p:cNvPr id="9" name="TextBox 8"/>
+          <p:cNvPr id="8" name="TextBox 7"/>
           <p:cNvSpPr txBox="1"/>
           <p:nvPr/>
         </p:nvSpPr>
@@ -9593,7 +9167,7 @@
       </p:sp>
       <p:graphicFrame>
         <p:nvGraphicFramePr>
-          <p:cNvPr id="10" name="Table 9"/>
+          <p:cNvPr id="9" name="Table 8"/>
           <p:cNvGraphicFramePr>
             <a:graphicFrameLocks noGrp="1"/>
           </p:cNvGraphicFramePr>
@@ -10033,7 +9607,7 @@
       </p:graphicFrame>
       <p:sp>
         <p:nvSpPr>
-          <p:cNvPr id="11" name="TextBox 10"/>
+          <p:cNvPr id="10" name="TextBox 9"/>
           <p:cNvSpPr txBox="1"/>
           <p:nvPr/>
         </p:nvSpPr>
@@ -10075,7 +9649,7 @@
       </p:sp>
       <p:graphicFrame>
         <p:nvGraphicFramePr>
-          <p:cNvPr id="12" name="Table 11"/>
+          <p:cNvPr id="11" name="Table 10"/>
           <p:cNvGraphicFramePr>
             <a:graphicFrameLocks noGrp="1"/>
           </p:cNvGraphicFramePr>
@@ -10434,7 +10008,7 @@
       </p:graphicFrame>
       <p:sp>
         <p:nvSpPr>
-          <p:cNvPr id="13" name="TextBox 12"/>
+          <p:cNvPr id="12" name="TextBox 11"/>
           <p:cNvSpPr txBox="1"/>
           <p:nvPr/>
         </p:nvSpPr>
@@ -10476,7 +10050,7 @@
       </p:sp>
       <p:sp>
         <p:nvSpPr>
-          <p:cNvPr id="14" name="Rectangle 13"/>
+          <p:cNvPr id="13" name="Rectangle 12"/>
           <p:cNvSpPr/>
           <p:nvPr/>
         </p:nvSpPr>
@@ -10525,7 +10099,7 @@
       </p:sp>
       <p:sp>
         <p:nvSpPr>
-          <p:cNvPr id="15" name="TextBox 14"/>
+          <p:cNvPr id="14" name="TextBox 13"/>
           <p:cNvSpPr txBox="1"/>
           <p:nvPr/>
         </p:nvSpPr>
@@ -10567,7 +10141,7 @@
       </p:sp>
       <p:sp>
         <p:nvSpPr>
-          <p:cNvPr id="16" name="TextBox 15"/>
+          <p:cNvPr id="15" name="TextBox 14"/>
           <p:cNvSpPr txBox="1"/>
           <p:nvPr/>
         </p:nvSpPr>
@@ -10609,7 +10183,7 @@
       </p:sp>
       <p:sp>
         <p:nvSpPr>
-          <p:cNvPr id="17" name="TextBox 16"/>
+          <p:cNvPr id="16" name="TextBox 15"/>
           <p:cNvSpPr txBox="1"/>
           <p:nvPr/>
         </p:nvSpPr>
@@ -10725,7 +10299,7 @@
         <p:spPr>
           <a:xfrm>
             <a:off x="640080" y="329184"/>
-            <a:ext cx="5303520" cy="182880"/>
+            <a:ext cx="9875520" cy="182880"/>
           </a:xfrm>
           <a:prstGeom prst="rect">
             <a:avLst/>
@@ -10766,48 +10340,6 @@
         </p:nvSpPr>
         <p:spPr>
           <a:xfrm>
-            <a:off x="5897880" y="310896"/>
-            <a:ext cx="4800600" cy="256032"/>
-          </a:xfrm>
-          <a:prstGeom prst="rect">
-            <a:avLst/>
-          </a:prstGeom>
-          <a:noFill/>
-        </p:spPr>
-        <p:txBody>
-          <a:bodyPr wrap="none" lIns="9144" rIns="9144" tIns="9144" bIns="9144" anchor="t">
-            <a:spAutoFit/>
-          </a:bodyPr>
-          <a:lstStyle/>
-          <a:p>
-            <a:pPr algn="r">
-              <a:spcAft>
-                <a:spcPts val="0"/>
-              </a:spcAft>
-              <a:defRPr sz="680" b="1">
-                <a:solidFill>
-                  <a:srgbClr val="4F6B00"/>
-                </a:solidFill>
-                <a:latin typeface="Inter"/>
-              </a:defRPr>
-            </a:pPr>
-            <a:r>
-              <a:rPr>
-                <a:latin typeface="Inter"/>
-              </a:rPr>
-              <a:t>Illustrative, Gradient Maintained — demo data, not the client's holdings or managers</a:t>
-            </a:r>
-          </a:p>
-        </p:txBody>
-      </p:sp>
-      <p:sp>
-        <p:nvSpPr>
-          <p:cNvPr id="5" name="TextBox 4"/>
-          <p:cNvSpPr txBox="1"/>
-          <p:nvPr/>
-        </p:nvSpPr>
-        <p:spPr>
-          <a:xfrm>
             <a:off x="640080" y="566928"/>
             <a:ext cx="10058400" cy="530352"/>
           </a:xfrm>
@@ -10844,7 +10376,7 @@
       </p:sp>
       <p:sp>
         <p:nvSpPr>
-          <p:cNvPr id="6" name="Rectangle 5"/>
+          <p:cNvPr id="5" name="Rectangle 4"/>
           <p:cNvSpPr/>
           <p:nvPr/>
         </p:nvSpPr>
@@ -10893,7 +10425,7 @@
       </p:sp>
       <p:sp>
         <p:nvSpPr>
-          <p:cNvPr id="7" name="Rectangle 6"/>
+          <p:cNvPr id="6" name="Rectangle 5"/>
           <p:cNvSpPr/>
           <p:nvPr/>
         </p:nvSpPr>
@@ -10942,7 +10474,7 @@
       </p:sp>
       <p:sp>
         <p:nvSpPr>
-          <p:cNvPr id="8" name="TextBox 7"/>
+          <p:cNvPr id="7" name="TextBox 6"/>
           <p:cNvSpPr txBox="1"/>
           <p:nvPr/>
         </p:nvSpPr>
@@ -10984,7 +10516,7 @@
       </p:sp>
       <p:sp>
         <p:nvSpPr>
-          <p:cNvPr id="9" name="TextBox 8"/>
+          <p:cNvPr id="8" name="TextBox 7"/>
           <p:cNvSpPr txBox="1"/>
           <p:nvPr/>
         </p:nvSpPr>
@@ -11026,7 +10558,7 @@
       </p:sp>
       <p:graphicFrame>
         <p:nvGraphicFramePr>
-          <p:cNvPr id="10" name="Table 9"/>
+          <p:cNvPr id="9" name="Table 8"/>
           <p:cNvGraphicFramePr>
             <a:graphicFrameLocks noGrp="1"/>
           </p:cNvGraphicFramePr>
@@ -11276,7 +10808,7 @@
       </p:graphicFrame>
       <p:sp>
         <p:nvSpPr>
-          <p:cNvPr id="11" name="Rectangle 10"/>
+          <p:cNvPr id="10" name="Rectangle 9"/>
           <p:cNvSpPr/>
           <p:nvPr/>
         </p:nvSpPr>
@@ -11325,7 +10857,7 @@
       </p:sp>
       <p:sp>
         <p:nvSpPr>
-          <p:cNvPr id="12" name="TextBox 11"/>
+          <p:cNvPr id="11" name="TextBox 10"/>
           <p:cNvSpPr txBox="1"/>
           <p:nvPr/>
         </p:nvSpPr>
@@ -11367,7 +10899,7 @@
       </p:sp>
       <p:sp>
         <p:nvSpPr>
-          <p:cNvPr id="13" name="TextBox 12"/>
+          <p:cNvPr id="12" name="TextBox 11"/>
           <p:cNvSpPr txBox="1"/>
           <p:nvPr/>
         </p:nvSpPr>
@@ -11409,7 +10941,7 @@
       </p:sp>
       <p:sp>
         <p:nvSpPr>
-          <p:cNvPr id="14" name="TextBox 13"/>
+          <p:cNvPr id="13" name="TextBox 12"/>
           <p:cNvSpPr txBox="1"/>
           <p:nvPr/>
         </p:nvSpPr>
@@ -11525,7 +11057,7 @@
         <p:spPr>
           <a:xfrm>
             <a:off x="640080" y="329184"/>
-            <a:ext cx="5303520" cy="182880"/>
+            <a:ext cx="9875520" cy="182880"/>
           </a:xfrm>
           <a:prstGeom prst="rect">
             <a:avLst/>
@@ -11566,48 +11098,6 @@
         </p:nvSpPr>
         <p:spPr>
           <a:xfrm>
-            <a:off x="5897880" y="310896"/>
-            <a:ext cx="4800600" cy="256032"/>
-          </a:xfrm>
-          <a:prstGeom prst="rect">
-            <a:avLst/>
-          </a:prstGeom>
-          <a:noFill/>
-        </p:spPr>
-        <p:txBody>
-          <a:bodyPr wrap="none" lIns="9144" rIns="9144" tIns="9144" bIns="9144" anchor="t">
-            <a:spAutoFit/>
-          </a:bodyPr>
-          <a:lstStyle/>
-          <a:p>
-            <a:pPr algn="r">
-              <a:spcAft>
-                <a:spcPts val="0"/>
-              </a:spcAft>
-              <a:defRPr sz="680" b="1">
-                <a:solidFill>
-                  <a:srgbClr val="4F6B00"/>
-                </a:solidFill>
-                <a:latin typeface="Inter"/>
-              </a:defRPr>
-            </a:pPr>
-            <a:r>
-              <a:rPr>
-                <a:latin typeface="Inter"/>
-              </a:rPr>
-              <a:t>Illustrative, Gradient Maintained — demo data, not the client's holdings or managers</a:t>
-            </a:r>
-          </a:p>
-        </p:txBody>
-      </p:sp>
-      <p:sp>
-        <p:nvSpPr>
-          <p:cNvPr id="5" name="TextBox 4"/>
-          <p:cNvSpPr txBox="1"/>
-          <p:nvPr/>
-        </p:nvSpPr>
-        <p:spPr>
-          <a:xfrm>
             <a:off x="640080" y="566928"/>
             <a:ext cx="10058400" cy="530352"/>
           </a:xfrm>
@@ -11644,7 +11134,7 @@
       </p:sp>
       <p:sp>
         <p:nvSpPr>
-          <p:cNvPr id="6" name="Rectangle 5"/>
+          <p:cNvPr id="5" name="Rectangle 4"/>
           <p:cNvSpPr/>
           <p:nvPr/>
         </p:nvSpPr>
@@ -11693,7 +11183,7 @@
       </p:sp>
       <p:sp>
         <p:nvSpPr>
-          <p:cNvPr id="7" name="Rectangle 6"/>
+          <p:cNvPr id="6" name="Rectangle 5"/>
           <p:cNvSpPr/>
           <p:nvPr/>
         </p:nvSpPr>
@@ -11742,7 +11232,7 @@
       </p:sp>
       <p:sp>
         <p:nvSpPr>
-          <p:cNvPr id="8" name="TextBox 7"/>
+          <p:cNvPr id="7" name="TextBox 6"/>
           <p:cNvSpPr txBox="1"/>
           <p:nvPr/>
         </p:nvSpPr>
@@ -11784,7 +11274,7 @@
       </p:sp>
       <p:sp>
         <p:nvSpPr>
-          <p:cNvPr id="9" name="TextBox 8"/>
+          <p:cNvPr id="8" name="TextBox 7"/>
           <p:cNvSpPr txBox="1"/>
           <p:nvPr/>
         </p:nvSpPr>
@@ -11826,7 +11316,7 @@
       </p:sp>
       <p:graphicFrame>
         <p:nvGraphicFramePr>
-          <p:cNvPr id="10" name="Chart 9"/>
+          <p:cNvPr id="9" name="Chart 8"/>
           <p:cNvGraphicFramePr>
             <a:graphicFrameLocks noGrp="1"/>
           </p:cNvGraphicFramePr>
@@ -11844,7 +11334,7 @@
       </p:graphicFrame>
       <p:sp>
         <p:nvSpPr>
-          <p:cNvPr id="11" name="Rectangle 10"/>
+          <p:cNvPr id="10" name="Rectangle 9"/>
           <p:cNvSpPr/>
           <p:nvPr/>
         </p:nvSpPr>
@@ -11893,7 +11383,7 @@
       </p:sp>
       <p:sp>
         <p:nvSpPr>
-          <p:cNvPr id="12" name="TextBox 11"/>
+          <p:cNvPr id="11" name="TextBox 10"/>
           <p:cNvSpPr txBox="1"/>
           <p:nvPr/>
         </p:nvSpPr>
@@ -11935,7 +11425,7 @@
       </p:sp>
       <p:sp>
         <p:nvSpPr>
-          <p:cNvPr id="13" name="TextBox 12"/>
+          <p:cNvPr id="12" name="TextBox 11"/>
           <p:cNvSpPr txBox="1"/>
           <p:nvPr/>
         </p:nvSpPr>
@@ -11977,7 +11467,7 @@
       </p:sp>
       <p:sp>
         <p:nvSpPr>
-          <p:cNvPr id="14" name="TextBox 13"/>
+          <p:cNvPr id="13" name="TextBox 12"/>
           <p:cNvSpPr txBox="1"/>
           <p:nvPr/>
         </p:nvSpPr>
@@ -12093,7 +11583,7 @@
         <p:spPr>
           <a:xfrm>
             <a:off x="640080" y="329184"/>
-            <a:ext cx="5303520" cy="182880"/>
+            <a:ext cx="9875520" cy="182880"/>
           </a:xfrm>
           <a:prstGeom prst="rect">
             <a:avLst/>
@@ -12134,48 +11624,6 @@
         </p:nvSpPr>
         <p:spPr>
           <a:xfrm>
-            <a:off x="5897880" y="310896"/>
-            <a:ext cx="4800600" cy="256032"/>
-          </a:xfrm>
-          <a:prstGeom prst="rect">
-            <a:avLst/>
-          </a:prstGeom>
-          <a:noFill/>
-        </p:spPr>
-        <p:txBody>
-          <a:bodyPr wrap="none" lIns="9144" rIns="9144" tIns="9144" bIns="9144" anchor="t">
-            <a:spAutoFit/>
-          </a:bodyPr>
-          <a:lstStyle/>
-          <a:p>
-            <a:pPr algn="r">
-              <a:spcAft>
-                <a:spcPts val="0"/>
-              </a:spcAft>
-              <a:defRPr sz="680" b="1">
-                <a:solidFill>
-                  <a:srgbClr val="4F6B00"/>
-                </a:solidFill>
-                <a:latin typeface="Inter"/>
-              </a:defRPr>
-            </a:pPr>
-            <a:r>
-              <a:rPr>
-                <a:latin typeface="Inter"/>
-              </a:rPr>
-              <a:t>Illustrative, Gradient Maintained — demo data, not the client's holdings or managers</a:t>
-            </a:r>
-          </a:p>
-        </p:txBody>
-      </p:sp>
-      <p:sp>
-        <p:nvSpPr>
-          <p:cNvPr id="5" name="TextBox 4"/>
-          <p:cNvSpPr txBox="1"/>
-          <p:nvPr/>
-        </p:nvSpPr>
-        <p:spPr>
-          <a:xfrm>
             <a:off x="640080" y="566928"/>
             <a:ext cx="10058400" cy="530352"/>
           </a:xfrm>
@@ -12212,7 +11660,7 @@
       </p:sp>
       <p:sp>
         <p:nvSpPr>
-          <p:cNvPr id="6" name="Rectangle 5"/>
+          <p:cNvPr id="5" name="Rectangle 4"/>
           <p:cNvSpPr/>
           <p:nvPr/>
         </p:nvSpPr>
@@ -12261,7 +11709,7 @@
       </p:sp>
       <p:sp>
         <p:nvSpPr>
-          <p:cNvPr id="7" name="Rectangle 6"/>
+          <p:cNvPr id="6" name="Rectangle 5"/>
           <p:cNvSpPr/>
           <p:nvPr/>
         </p:nvSpPr>
@@ -12310,7 +11758,7 @@
       </p:sp>
       <p:sp>
         <p:nvSpPr>
-          <p:cNvPr id="8" name="TextBox 7"/>
+          <p:cNvPr id="7" name="TextBox 6"/>
           <p:cNvSpPr txBox="1"/>
           <p:nvPr/>
         </p:nvSpPr>
@@ -12352,7 +11800,7 @@
       </p:sp>
       <p:graphicFrame>
         <p:nvGraphicFramePr>
-          <p:cNvPr id="9" name="Table 8"/>
+          <p:cNvPr id="8" name="Table 7"/>
           <p:cNvGraphicFramePr>
             <a:graphicFrameLocks noGrp="1"/>
           </p:cNvGraphicFramePr>
@@ -12658,7 +12106,7 @@
       </p:graphicFrame>
       <p:sp>
         <p:nvSpPr>
-          <p:cNvPr id="10" name="Rectangle 9"/>
+          <p:cNvPr id="9" name="Rectangle 8"/>
           <p:cNvSpPr/>
           <p:nvPr/>
         </p:nvSpPr>
@@ -12707,7 +12155,7 @@
       </p:sp>
       <p:sp>
         <p:nvSpPr>
-          <p:cNvPr id="11" name="TextBox 10"/>
+          <p:cNvPr id="10" name="TextBox 9"/>
           <p:cNvSpPr txBox="1"/>
           <p:nvPr/>
         </p:nvSpPr>
@@ -12749,7 +12197,7 @@
       </p:sp>
       <p:sp>
         <p:nvSpPr>
-          <p:cNvPr id="12" name="TextBox 11"/>
+          <p:cNvPr id="11" name="TextBox 10"/>
           <p:cNvSpPr txBox="1"/>
           <p:nvPr/>
         </p:nvSpPr>
@@ -12791,7 +12239,7 @@
       </p:sp>
       <p:sp>
         <p:nvSpPr>
-          <p:cNvPr id="13" name="TextBox 12"/>
+          <p:cNvPr id="12" name="TextBox 11"/>
           <p:cNvSpPr txBox="1"/>
           <p:nvPr/>
         </p:nvSpPr>
@@ -12907,7 +12355,7 @@
         <p:spPr>
           <a:xfrm>
             <a:off x="640080" y="329184"/>
-            <a:ext cx="5303520" cy="182880"/>
+            <a:ext cx="9875520" cy="182880"/>
           </a:xfrm>
           <a:prstGeom prst="rect">
             <a:avLst/>
@@ -12948,48 +12396,6 @@
         </p:nvSpPr>
         <p:spPr>
           <a:xfrm>
-            <a:off x="5897880" y="310896"/>
-            <a:ext cx="4800600" cy="256032"/>
-          </a:xfrm>
-          <a:prstGeom prst="rect">
-            <a:avLst/>
-          </a:prstGeom>
-          <a:noFill/>
-        </p:spPr>
-        <p:txBody>
-          <a:bodyPr wrap="none" lIns="9144" rIns="9144" tIns="9144" bIns="9144" anchor="t">
-            <a:spAutoFit/>
-          </a:bodyPr>
-          <a:lstStyle/>
-          <a:p>
-            <a:pPr algn="r">
-              <a:spcAft>
-                <a:spcPts val="0"/>
-              </a:spcAft>
-              <a:defRPr sz="680" b="1">
-                <a:solidFill>
-                  <a:srgbClr val="4F6B00"/>
-                </a:solidFill>
-                <a:latin typeface="Inter"/>
-              </a:defRPr>
-            </a:pPr>
-            <a:r>
-              <a:rPr>
-                <a:latin typeface="Inter"/>
-              </a:rPr>
-              <a:t>Illustrative, Gradient Maintained — demo data, not the client's holdings or managers</a:t>
-            </a:r>
-          </a:p>
-        </p:txBody>
-      </p:sp>
-      <p:sp>
-        <p:nvSpPr>
-          <p:cNvPr id="5" name="TextBox 4"/>
-          <p:cNvSpPr txBox="1"/>
-          <p:nvPr/>
-        </p:nvSpPr>
-        <p:spPr>
-          <a:xfrm>
             <a:off x="640080" y="566928"/>
             <a:ext cx="10058400" cy="530352"/>
           </a:xfrm>
@@ -13026,7 +12432,7 @@
       </p:sp>
       <p:sp>
         <p:nvSpPr>
-          <p:cNvPr id="6" name="Rectangle 5"/>
+          <p:cNvPr id="5" name="Rectangle 4"/>
           <p:cNvSpPr/>
           <p:nvPr/>
         </p:nvSpPr>
@@ -13075,7 +12481,7 @@
       </p:sp>
       <p:sp>
         <p:nvSpPr>
-          <p:cNvPr id="7" name="Rectangle 6"/>
+          <p:cNvPr id="6" name="Rectangle 5"/>
           <p:cNvSpPr/>
           <p:nvPr/>
         </p:nvSpPr>
@@ -13124,7 +12530,7 @@
       </p:sp>
       <p:sp>
         <p:nvSpPr>
-          <p:cNvPr id="8" name="TextBox 7"/>
+          <p:cNvPr id="7" name="TextBox 6"/>
           <p:cNvSpPr txBox="1"/>
           <p:nvPr/>
         </p:nvSpPr>
@@ -13166,7 +12572,7 @@
       </p:sp>
       <p:sp>
         <p:nvSpPr>
-          <p:cNvPr id="9" name="TextBox 8"/>
+          <p:cNvPr id="8" name="TextBox 7"/>
           <p:cNvSpPr txBox="1"/>
           <p:nvPr/>
         </p:nvSpPr>
@@ -13208,7 +12614,7 @@
       </p:sp>
       <p:graphicFrame>
         <p:nvGraphicFramePr>
-          <p:cNvPr id="10" name="Table 9"/>
+          <p:cNvPr id="9" name="Table 8"/>
           <p:cNvGraphicFramePr>
             <a:graphicFrameLocks noGrp="1"/>
           </p:cNvGraphicFramePr>
@@ -13567,7 +12973,7 @@
       </p:graphicFrame>
       <p:sp>
         <p:nvSpPr>
-          <p:cNvPr id="11" name="Rectangle 10"/>
+          <p:cNvPr id="10" name="Rectangle 9"/>
           <p:cNvSpPr/>
           <p:nvPr/>
         </p:nvSpPr>
@@ -13616,7 +13022,7 @@
       </p:sp>
       <p:sp>
         <p:nvSpPr>
-          <p:cNvPr id="12" name="TextBox 11"/>
+          <p:cNvPr id="11" name="TextBox 10"/>
           <p:cNvSpPr txBox="1"/>
           <p:nvPr/>
         </p:nvSpPr>
@@ -13658,7 +13064,7 @@
       </p:sp>
       <p:sp>
         <p:nvSpPr>
-          <p:cNvPr id="13" name="TextBox 12"/>
+          <p:cNvPr id="12" name="TextBox 11"/>
           <p:cNvSpPr txBox="1"/>
           <p:nvPr/>
         </p:nvSpPr>
@@ -13700,7 +13106,7 @@
       </p:sp>
       <p:sp>
         <p:nvSpPr>
-          <p:cNvPr id="14" name="TextBox 13"/>
+          <p:cNvPr id="13" name="TextBox 12"/>
           <p:cNvSpPr txBox="1"/>
           <p:nvPr/>
         </p:nvSpPr>
@@ -13816,7 +13222,7 @@
         <p:spPr>
           <a:xfrm>
             <a:off x="640080" y="329184"/>
-            <a:ext cx="5303520" cy="182880"/>
+            <a:ext cx="9875520" cy="182880"/>
           </a:xfrm>
           <a:prstGeom prst="rect">
             <a:avLst/>
@@ -13857,48 +13263,6 @@
         </p:nvSpPr>
         <p:spPr>
           <a:xfrm>
-            <a:off x="5897880" y="310896"/>
-            <a:ext cx="4800600" cy="256032"/>
-          </a:xfrm>
-          <a:prstGeom prst="rect">
-            <a:avLst/>
-          </a:prstGeom>
-          <a:noFill/>
-        </p:spPr>
-        <p:txBody>
-          <a:bodyPr wrap="none" lIns="9144" rIns="9144" tIns="9144" bIns="9144" anchor="t">
-            <a:spAutoFit/>
-          </a:bodyPr>
-          <a:lstStyle/>
-          <a:p>
-            <a:pPr algn="r">
-              <a:spcAft>
-                <a:spcPts val="0"/>
-              </a:spcAft>
-              <a:defRPr sz="680" b="1">
-                <a:solidFill>
-                  <a:srgbClr val="4F6B00"/>
-                </a:solidFill>
-                <a:latin typeface="Inter"/>
-              </a:defRPr>
-            </a:pPr>
-            <a:r>
-              <a:rPr>
-                <a:latin typeface="Inter"/>
-              </a:rPr>
-              <a:t>Illustrative, Gradient Maintained — demo data, not the client's holdings or managers</a:t>
-            </a:r>
-          </a:p>
-        </p:txBody>
-      </p:sp>
-      <p:sp>
-        <p:nvSpPr>
-          <p:cNvPr id="5" name="TextBox 4"/>
-          <p:cNvSpPr txBox="1"/>
-          <p:nvPr/>
-        </p:nvSpPr>
-        <p:spPr>
-          <a:xfrm>
             <a:off x="640080" y="566928"/>
             <a:ext cx="10058400" cy="530352"/>
           </a:xfrm>
@@ -13935,7 +13299,7 @@
       </p:sp>
       <p:sp>
         <p:nvSpPr>
-          <p:cNvPr id="6" name="Rectangle 5"/>
+          <p:cNvPr id="5" name="Rectangle 4"/>
           <p:cNvSpPr/>
           <p:nvPr/>
         </p:nvSpPr>
@@ -13984,7 +13348,7 @@
       </p:sp>
       <p:sp>
         <p:nvSpPr>
-          <p:cNvPr id="7" name="Rectangle 6"/>
+          <p:cNvPr id="6" name="Rectangle 5"/>
           <p:cNvSpPr/>
           <p:nvPr/>
         </p:nvSpPr>
@@ -14033,7 +13397,7 @@
       </p:sp>
       <p:sp>
         <p:nvSpPr>
-          <p:cNvPr id="8" name="TextBox 7"/>
+          <p:cNvPr id="7" name="TextBox 6"/>
           <p:cNvSpPr txBox="1"/>
           <p:nvPr/>
         </p:nvSpPr>
@@ -14075,7 +13439,7 @@
       </p:sp>
       <p:sp>
         <p:nvSpPr>
-          <p:cNvPr id="9" name="Rectangle 8"/>
+          <p:cNvPr id="8" name="Rectangle 7"/>
           <p:cNvSpPr/>
           <p:nvPr/>
         </p:nvSpPr>
@@ -14124,7 +13488,7 @@
       </p:sp>
       <p:sp>
         <p:nvSpPr>
-          <p:cNvPr id="10" name="Rectangle 9"/>
+          <p:cNvPr id="9" name="Rectangle 8"/>
           <p:cNvSpPr/>
           <p:nvPr/>
         </p:nvSpPr>
@@ -14173,7 +13537,7 @@
       </p:sp>
       <p:sp>
         <p:nvSpPr>
-          <p:cNvPr id="11" name="TextBox 10"/>
+          <p:cNvPr id="10" name="TextBox 9"/>
           <p:cNvSpPr txBox="1"/>
           <p:nvPr/>
         </p:nvSpPr>
@@ -14215,7 +13579,7 @@
       </p:sp>
       <p:sp>
         <p:nvSpPr>
-          <p:cNvPr id="12" name="TextBox 11"/>
+          <p:cNvPr id="11" name="TextBox 10"/>
           <p:cNvSpPr txBox="1"/>
           <p:nvPr/>
         </p:nvSpPr>
@@ -14257,7 +13621,7 @@
       </p:sp>
       <p:sp>
         <p:nvSpPr>
-          <p:cNvPr id="13" name="TextBox 12"/>
+          <p:cNvPr id="12" name="TextBox 11"/>
           <p:cNvSpPr txBox="1"/>
           <p:nvPr/>
         </p:nvSpPr>
@@ -14299,7 +13663,7 @@
       </p:sp>
       <p:sp>
         <p:nvSpPr>
-          <p:cNvPr id="14" name="Rectangle 13"/>
+          <p:cNvPr id="13" name="Rectangle 12"/>
           <p:cNvSpPr/>
           <p:nvPr/>
         </p:nvSpPr>
@@ -14348,7 +13712,7 @@
       </p:sp>
       <p:sp>
         <p:nvSpPr>
-          <p:cNvPr id="15" name="TextBox 14"/>
+          <p:cNvPr id="14" name="TextBox 13"/>
           <p:cNvSpPr txBox="1"/>
           <p:nvPr/>
         </p:nvSpPr>
@@ -14390,7 +13754,7 @@
       </p:sp>
       <p:sp>
         <p:nvSpPr>
-          <p:cNvPr id="16" name="TextBox 15"/>
+          <p:cNvPr id="15" name="TextBox 14"/>
           <p:cNvSpPr txBox="1"/>
           <p:nvPr/>
         </p:nvSpPr>
@@ -14432,7 +13796,7 @@
       </p:sp>
       <p:sp>
         <p:nvSpPr>
-          <p:cNvPr id="17" name="TextBox 16"/>
+          <p:cNvPr id="16" name="TextBox 15"/>
           <p:cNvSpPr txBox="1"/>
           <p:nvPr/>
         </p:nvSpPr>
@@ -14548,7 +13912,7 @@
         <p:spPr>
           <a:xfrm>
             <a:off x="640080" y="329184"/>
-            <a:ext cx="5303520" cy="182880"/>
+            <a:ext cx="9875520" cy="182880"/>
           </a:xfrm>
           <a:prstGeom prst="rect">
             <a:avLst/>
@@ -14589,48 +13953,6 @@
         </p:nvSpPr>
         <p:spPr>
           <a:xfrm>
-            <a:off x="5897880" y="310896"/>
-            <a:ext cx="4800600" cy="256032"/>
-          </a:xfrm>
-          <a:prstGeom prst="rect">
-            <a:avLst/>
-          </a:prstGeom>
-          <a:noFill/>
-        </p:spPr>
-        <p:txBody>
-          <a:bodyPr wrap="none" lIns="9144" rIns="9144" tIns="9144" bIns="9144" anchor="t">
-            <a:spAutoFit/>
-          </a:bodyPr>
-          <a:lstStyle/>
-          <a:p>
-            <a:pPr algn="r">
-              <a:spcAft>
-                <a:spcPts val="0"/>
-              </a:spcAft>
-              <a:defRPr sz="680" b="1">
-                <a:solidFill>
-                  <a:srgbClr val="4F6B00"/>
-                </a:solidFill>
-                <a:latin typeface="Inter"/>
-              </a:defRPr>
-            </a:pPr>
-            <a:r>
-              <a:rPr>
-                <a:latin typeface="Inter"/>
-              </a:rPr>
-              <a:t>Illustrative, Gradient Maintained — demo data, not the client's holdings or managers</a:t>
-            </a:r>
-          </a:p>
-        </p:txBody>
-      </p:sp>
-      <p:sp>
-        <p:nvSpPr>
-          <p:cNvPr id="5" name="TextBox 4"/>
-          <p:cNvSpPr txBox="1"/>
-          <p:nvPr/>
-        </p:nvSpPr>
-        <p:spPr>
-          <a:xfrm>
             <a:off x="640080" y="566928"/>
             <a:ext cx="10058400" cy="530352"/>
           </a:xfrm>
@@ -14667,7 +13989,7 @@
       </p:sp>
       <p:sp>
         <p:nvSpPr>
-          <p:cNvPr id="6" name="Rectangle 5"/>
+          <p:cNvPr id="5" name="Rectangle 4"/>
           <p:cNvSpPr/>
           <p:nvPr/>
         </p:nvSpPr>
@@ -14716,7 +14038,7 @@
       </p:sp>
       <p:sp>
         <p:nvSpPr>
-          <p:cNvPr id="7" name="Rectangle 6"/>
+          <p:cNvPr id="6" name="Rectangle 5"/>
           <p:cNvSpPr/>
           <p:nvPr/>
         </p:nvSpPr>
@@ -14765,7 +14087,7 @@
       </p:sp>
       <p:sp>
         <p:nvSpPr>
-          <p:cNvPr id="8" name="TextBox 7"/>
+          <p:cNvPr id="7" name="TextBox 6"/>
           <p:cNvSpPr txBox="1"/>
           <p:nvPr/>
         </p:nvSpPr>
@@ -14807,14 +14129,105 @@
       </p:sp>
       <p:sp>
         <p:nvSpPr>
-          <p:cNvPr id="9" name="Rectangle 8"/>
+          <p:cNvPr id="8" name="Rectangle 7"/>
           <p:cNvSpPr/>
           <p:nvPr/>
         </p:nvSpPr>
         <p:spPr>
           <a:xfrm>
-            <a:off x="640080" y="1325880"/>
-            <a:ext cx="10908792" cy="2516639"/>
+            <a:off x="640080" y="1399032"/>
+            <a:ext cx="73152" cy="940829"/>
+          </a:xfrm>
+          <a:prstGeom prst="rect">
+            <a:avLst/>
+          </a:prstGeom>
+          <a:solidFill>
+            <a:srgbClr val="F2A93B"/>
+          </a:solidFill>
+          <a:ln>
+            <a:solidFill>
+              <a:srgbClr val="F2A93B"/>
+            </a:solidFill>
+          </a:ln>
+        </p:spPr>
+        <p:style>
+          <a:lnRef idx="1">
+            <a:schemeClr val="accent1"/>
+          </a:lnRef>
+          <a:fillRef idx="3">
+            <a:schemeClr val="accent1"/>
+          </a:fillRef>
+          <a:effectRef idx="2">
+            <a:schemeClr val="accent1"/>
+          </a:effectRef>
+          <a:fontRef idx="minor">
+            <a:schemeClr val="lt1"/>
+          </a:fontRef>
+        </p:style>
+        <p:txBody>
+          <a:bodyPr rtlCol="0" anchor="ctr"/>
+          <a:lstStyle/>
+          <a:p>
+            <a:pPr algn="ctr">
+              <a:defRPr>
+                <a:latin typeface="Inter"/>
+              </a:defRPr>
+            </a:pPr>
+          </a:p>
+        </p:txBody>
+      </p:sp>
+      <p:sp>
+        <p:nvSpPr>
+          <p:cNvPr id="9" name="TextBox 8"/>
+          <p:cNvSpPr txBox="1"/>
+          <p:nvPr/>
+        </p:nvSpPr>
+        <p:spPr>
+          <a:xfrm>
+            <a:off x="896112" y="1371600"/>
+            <a:ext cx="10588752" cy="630537"/>
+          </a:xfrm>
+          <a:prstGeom prst="rect">
+            <a:avLst/>
+          </a:prstGeom>
+          <a:noFill/>
+        </p:spPr>
+        <p:txBody>
+          <a:bodyPr wrap="none" lIns="9144" rIns="9144" tIns="9144" bIns="9144" anchor="t">
+            <a:spAutoFit/>
+          </a:bodyPr>
+          <a:lstStyle/>
+          <a:p>
+            <a:pPr algn="l">
+              <a:spcAft>
+                <a:spcPts val="0"/>
+              </a:spcAft>
+              <a:defRPr sz="1800" b="1">
+                <a:solidFill>
+                  <a:srgbClr val="0D1117"/>
+                </a:solidFill>
+                <a:latin typeface="Inter"/>
+              </a:defRPr>
+            </a:pPr>
+            <a:r>
+              <a:rPr>
+                <a:latin typeface="Inter"/>
+              </a:rPr>
+              <a:t>Pacing and concentration need monitoring</a:t>
+            </a:r>
+          </a:p>
+        </p:txBody>
+      </p:sp>
+      <p:sp>
+        <p:nvSpPr>
+          <p:cNvPr id="10" name="Rectangle 9"/>
+          <p:cNvSpPr/>
+          <p:nvPr/>
+        </p:nvSpPr>
+        <p:spPr>
+          <a:xfrm>
+            <a:off x="640080" y="2522741"/>
+            <a:ext cx="10908792" cy="1886804"/>
           </a:xfrm>
           <a:prstGeom prst="rect">
             <a:avLst/>
@@ -14856,14 +14269,14 @@
       </p:sp>
       <p:sp>
         <p:nvSpPr>
-          <p:cNvPr id="10" name="Rectangle 9"/>
+          <p:cNvPr id="11" name="Rectangle 10"/>
           <p:cNvSpPr/>
           <p:nvPr/>
         </p:nvSpPr>
         <p:spPr>
           <a:xfrm>
-            <a:off x="640080" y="1325880"/>
-            <a:ext cx="54864" cy="2516639"/>
+            <a:off x="640080" y="2522741"/>
+            <a:ext cx="54864" cy="1886804"/>
           </a:xfrm>
           <a:prstGeom prst="rect">
             <a:avLst/>
@@ -14905,13 +14318,13 @@
       </p:sp>
       <p:sp>
         <p:nvSpPr>
-          <p:cNvPr id="11" name="TextBox 10"/>
+          <p:cNvPr id="12" name="TextBox 11"/>
           <p:cNvSpPr txBox="1"/>
           <p:nvPr/>
         </p:nvSpPr>
         <p:spPr>
           <a:xfrm>
-            <a:off x="804671" y="1435607"/>
+            <a:off x="804671" y="2632469"/>
             <a:ext cx="10616184" cy="228600"/>
           </a:xfrm>
           <a:prstGeom prst="rect">
@@ -14947,14 +14360,14 @@
       </p:sp>
       <p:sp>
         <p:nvSpPr>
-          <p:cNvPr id="12" name="TextBox 11"/>
+          <p:cNvPr id="13" name="TextBox 12"/>
           <p:cNvSpPr txBox="1"/>
           <p:nvPr/>
         </p:nvSpPr>
         <p:spPr>
           <a:xfrm>
-            <a:off x="804671" y="1719072"/>
-            <a:ext cx="10616184" cy="2032007"/>
+            <a:off x="804671" y="2915933"/>
+            <a:ext cx="10616184" cy="1402172"/>
           </a:xfrm>
           <a:prstGeom prst="rect">
             <a:avLst/>
@@ -14989,14 +14402,14 @@
       </p:sp>
       <p:sp>
         <p:nvSpPr>
-          <p:cNvPr id="13" name="Rectangle 12"/>
+          <p:cNvPr id="14" name="Rectangle 13"/>
           <p:cNvSpPr/>
           <p:nvPr/>
         </p:nvSpPr>
         <p:spPr>
           <a:xfrm>
-            <a:off x="640080" y="3952247"/>
-            <a:ext cx="2644902" cy="2265672"/>
+            <a:off x="640080" y="4519273"/>
+            <a:ext cx="2644902" cy="1698646"/>
           </a:xfrm>
           <a:prstGeom prst="rect">
             <a:avLst/>
@@ -15038,13 +14451,13 @@
       </p:sp>
       <p:sp>
         <p:nvSpPr>
-          <p:cNvPr id="14" name="Rectangle 13"/>
+          <p:cNvPr id="15" name="Rectangle 14"/>
           <p:cNvSpPr/>
           <p:nvPr/>
         </p:nvSpPr>
         <p:spPr>
           <a:xfrm>
-            <a:off x="640080" y="3952247"/>
+            <a:off x="640080" y="4519273"/>
             <a:ext cx="2644902" cy="45720"/>
           </a:xfrm>
           <a:prstGeom prst="rect">
@@ -15087,13 +14500,13 @@
       </p:sp>
       <p:sp>
         <p:nvSpPr>
-          <p:cNvPr id="15" name="TextBox 14"/>
+          <p:cNvPr id="16" name="TextBox 15"/>
           <p:cNvSpPr txBox="1"/>
           <p:nvPr/>
         </p:nvSpPr>
         <p:spPr>
           <a:xfrm>
-            <a:off x="749808" y="4080263"/>
+            <a:off x="749808" y="4647289"/>
             <a:ext cx="2425446" cy="201168"/>
           </a:xfrm>
           <a:prstGeom prst="rect">
@@ -15129,13 +14542,13 @@
       </p:sp>
       <p:sp>
         <p:nvSpPr>
-          <p:cNvPr id="16" name="TextBox 15"/>
+          <p:cNvPr id="17" name="TextBox 16"/>
           <p:cNvSpPr txBox="1"/>
           <p:nvPr/>
         </p:nvSpPr>
         <p:spPr>
           <a:xfrm>
-            <a:off x="749808" y="4336295"/>
+            <a:off x="749808" y="4903321"/>
             <a:ext cx="2425446" cy="475488"/>
           </a:xfrm>
           <a:prstGeom prst="rect">
@@ -15171,13 +14584,13 @@
       </p:sp>
       <p:sp>
         <p:nvSpPr>
-          <p:cNvPr id="17" name="TextBox 16"/>
+          <p:cNvPr id="18" name="TextBox 17"/>
           <p:cNvSpPr txBox="1"/>
           <p:nvPr/>
         </p:nvSpPr>
         <p:spPr>
           <a:xfrm>
-            <a:off x="749808" y="5888735"/>
+            <a:off x="749808" y="5888736"/>
             <a:ext cx="2425446" cy="228600"/>
           </a:xfrm>
           <a:prstGeom prst="rect">
@@ -15213,14 +14626,14 @@
       </p:sp>
       <p:sp>
         <p:nvSpPr>
-          <p:cNvPr id="18" name="Rectangle 17"/>
+          <p:cNvPr id="19" name="Rectangle 18"/>
           <p:cNvSpPr/>
           <p:nvPr/>
         </p:nvSpPr>
         <p:spPr>
           <a:xfrm>
-            <a:off x="3394710" y="3952247"/>
-            <a:ext cx="2644902" cy="2265672"/>
+            <a:off x="3394710" y="4519273"/>
+            <a:ext cx="2644902" cy="1698646"/>
           </a:xfrm>
           <a:prstGeom prst="rect">
             <a:avLst/>
@@ -15262,13 +14675,13 @@
       </p:sp>
       <p:sp>
         <p:nvSpPr>
-          <p:cNvPr id="19" name="Rectangle 18"/>
+          <p:cNvPr id="20" name="Rectangle 19"/>
           <p:cNvSpPr/>
           <p:nvPr/>
         </p:nvSpPr>
         <p:spPr>
           <a:xfrm>
-            <a:off x="3394710" y="3952247"/>
+            <a:off x="3394710" y="4519273"/>
             <a:ext cx="2644902" cy="45720"/>
           </a:xfrm>
           <a:prstGeom prst="rect">
@@ -15311,13 +14724,13 @@
       </p:sp>
       <p:sp>
         <p:nvSpPr>
-          <p:cNvPr id="20" name="TextBox 19"/>
+          <p:cNvPr id="21" name="TextBox 20"/>
           <p:cNvSpPr txBox="1"/>
           <p:nvPr/>
         </p:nvSpPr>
         <p:spPr>
           <a:xfrm>
-            <a:off x="3504438" y="4080263"/>
+            <a:off x="3504438" y="4647289"/>
             <a:ext cx="2425446" cy="201168"/>
           </a:xfrm>
           <a:prstGeom prst="rect">
@@ -15353,13 +14766,13 @@
       </p:sp>
       <p:sp>
         <p:nvSpPr>
-          <p:cNvPr id="21" name="TextBox 20"/>
+          <p:cNvPr id="22" name="TextBox 21"/>
           <p:cNvSpPr txBox="1"/>
           <p:nvPr/>
         </p:nvSpPr>
         <p:spPr>
           <a:xfrm>
-            <a:off x="3504438" y="4336295"/>
+            <a:off x="3504438" y="4903321"/>
             <a:ext cx="2425446" cy="475488"/>
           </a:xfrm>
           <a:prstGeom prst="rect">
@@ -15395,13 +14808,13 @@
       </p:sp>
       <p:sp>
         <p:nvSpPr>
-          <p:cNvPr id="22" name="TextBox 21"/>
+          <p:cNvPr id="23" name="TextBox 22"/>
           <p:cNvSpPr txBox="1"/>
           <p:nvPr/>
         </p:nvSpPr>
         <p:spPr>
           <a:xfrm>
-            <a:off x="3504438" y="5888735"/>
+            <a:off x="3504438" y="5888736"/>
             <a:ext cx="2425446" cy="228600"/>
           </a:xfrm>
           <a:prstGeom prst="rect">
@@ -15437,14 +14850,14 @@
       </p:sp>
       <p:sp>
         <p:nvSpPr>
-          <p:cNvPr id="23" name="Rectangle 22"/>
+          <p:cNvPr id="24" name="Rectangle 23"/>
           <p:cNvSpPr/>
           <p:nvPr/>
         </p:nvSpPr>
         <p:spPr>
           <a:xfrm>
-            <a:off x="6149340" y="3952247"/>
-            <a:ext cx="2644902" cy="2265672"/>
+            <a:off x="6149340" y="4519273"/>
+            <a:ext cx="2644902" cy="1698646"/>
           </a:xfrm>
           <a:prstGeom prst="rect">
             <a:avLst/>
@@ -15486,13 +14899,13 @@
       </p:sp>
       <p:sp>
         <p:nvSpPr>
-          <p:cNvPr id="24" name="Rectangle 23"/>
+          <p:cNvPr id="25" name="Rectangle 24"/>
           <p:cNvSpPr/>
           <p:nvPr/>
         </p:nvSpPr>
         <p:spPr>
           <a:xfrm>
-            <a:off x="6149340" y="3952247"/>
+            <a:off x="6149340" y="4519273"/>
             <a:ext cx="2644902" cy="45720"/>
           </a:xfrm>
           <a:prstGeom prst="rect">
@@ -15535,13 +14948,13 @@
       </p:sp>
       <p:sp>
         <p:nvSpPr>
-          <p:cNvPr id="25" name="TextBox 24"/>
+          <p:cNvPr id="26" name="TextBox 25"/>
           <p:cNvSpPr txBox="1"/>
           <p:nvPr/>
         </p:nvSpPr>
         <p:spPr>
           <a:xfrm>
-            <a:off x="6259068" y="4080263"/>
+            <a:off x="6259068" y="4647289"/>
             <a:ext cx="2425446" cy="201168"/>
           </a:xfrm>
           <a:prstGeom prst="rect">
@@ -15577,13 +14990,13 @@
       </p:sp>
       <p:sp>
         <p:nvSpPr>
-          <p:cNvPr id="26" name="TextBox 25"/>
+          <p:cNvPr id="27" name="TextBox 26"/>
           <p:cNvSpPr txBox="1"/>
           <p:nvPr/>
         </p:nvSpPr>
         <p:spPr>
           <a:xfrm>
-            <a:off x="6259068" y="4336295"/>
+            <a:off x="6259068" y="4903321"/>
             <a:ext cx="2425446" cy="475488"/>
           </a:xfrm>
           <a:prstGeom prst="rect">
@@ -15619,13 +15032,13 @@
       </p:sp>
       <p:sp>
         <p:nvSpPr>
-          <p:cNvPr id="27" name="TextBox 26"/>
+          <p:cNvPr id="28" name="TextBox 27"/>
           <p:cNvSpPr txBox="1"/>
           <p:nvPr/>
         </p:nvSpPr>
         <p:spPr>
           <a:xfrm>
-            <a:off x="6259068" y="5888735"/>
+            <a:off x="6259068" y="5888736"/>
             <a:ext cx="2425446" cy="228600"/>
           </a:xfrm>
           <a:prstGeom prst="rect">
@@ -15661,14 +15074,14 @@
       </p:sp>
       <p:sp>
         <p:nvSpPr>
-          <p:cNvPr id="28" name="Rectangle 27"/>
+          <p:cNvPr id="29" name="Rectangle 28"/>
           <p:cNvSpPr/>
           <p:nvPr/>
         </p:nvSpPr>
         <p:spPr>
           <a:xfrm>
-            <a:off x="8903970" y="3952247"/>
-            <a:ext cx="2644902" cy="2265672"/>
+            <a:off x="8903970" y="4519273"/>
+            <a:ext cx="2644902" cy="1698646"/>
           </a:xfrm>
           <a:prstGeom prst="rect">
             <a:avLst/>
@@ -15710,13 +15123,13 @@
       </p:sp>
       <p:sp>
         <p:nvSpPr>
-          <p:cNvPr id="29" name="Rectangle 28"/>
+          <p:cNvPr id="30" name="Rectangle 29"/>
           <p:cNvSpPr/>
           <p:nvPr/>
         </p:nvSpPr>
         <p:spPr>
           <a:xfrm>
-            <a:off x="8903970" y="3952247"/>
+            <a:off x="8903970" y="4519273"/>
             <a:ext cx="2644902" cy="45720"/>
           </a:xfrm>
           <a:prstGeom prst="rect">
@@ -15759,13 +15172,13 @@
       </p:sp>
       <p:sp>
         <p:nvSpPr>
-          <p:cNvPr id="30" name="TextBox 29"/>
+          <p:cNvPr id="31" name="TextBox 30"/>
           <p:cNvSpPr txBox="1"/>
           <p:nvPr/>
         </p:nvSpPr>
         <p:spPr>
           <a:xfrm>
-            <a:off x="9013698" y="4080263"/>
+            <a:off x="9013698" y="4647289"/>
             <a:ext cx="2425446" cy="201168"/>
           </a:xfrm>
           <a:prstGeom prst="rect">
@@ -15801,13 +15214,13 @@
       </p:sp>
       <p:sp>
         <p:nvSpPr>
-          <p:cNvPr id="31" name="TextBox 30"/>
+          <p:cNvPr id="32" name="TextBox 31"/>
           <p:cNvSpPr txBox="1"/>
           <p:nvPr/>
         </p:nvSpPr>
         <p:spPr>
           <a:xfrm>
-            <a:off x="9013698" y="4336295"/>
+            <a:off x="9013698" y="4903321"/>
             <a:ext cx="2425446" cy="475488"/>
           </a:xfrm>
           <a:prstGeom prst="rect">
@@ -15836,20 +15249,20 @@
               <a:rPr>
                 <a:latin typeface="Inter"/>
               </a:rPr>
-              <a:t>Watch</a:t>
+              <a:t>Near limit</a:t>
             </a:r>
           </a:p>
         </p:txBody>
       </p:sp>
       <p:sp>
         <p:nvSpPr>
-          <p:cNvPr id="32" name="TextBox 31"/>
+          <p:cNvPr id="33" name="TextBox 32"/>
           <p:cNvSpPr txBox="1"/>
           <p:nvPr/>
         </p:nvSpPr>
         <p:spPr>
           <a:xfrm>
-            <a:off x="9013698" y="5888735"/>
+            <a:off x="9013698" y="5888736"/>
             <a:ext cx="2425446" cy="228600"/>
           </a:xfrm>
           <a:prstGeom prst="rect">
@@ -15885,7 +15298,7 @@
       </p:sp>
       <p:sp>
         <p:nvSpPr>
-          <p:cNvPr id="33" name="Rectangle 32"/>
+          <p:cNvPr id="34" name="Rectangle 33"/>
           <p:cNvSpPr/>
           <p:nvPr/>
         </p:nvSpPr>
@@ -15934,7 +15347,7 @@
       </p:sp>
       <p:sp>
         <p:nvSpPr>
-          <p:cNvPr id="34" name="TextBox 33"/>
+          <p:cNvPr id="35" name="TextBox 34"/>
           <p:cNvSpPr txBox="1"/>
           <p:nvPr/>
         </p:nvSpPr>
@@ -15976,7 +15389,7 @@
       </p:sp>
       <p:sp>
         <p:nvSpPr>
-          <p:cNvPr id="35" name="TextBox 34"/>
+          <p:cNvPr id="36" name="TextBox 35"/>
           <p:cNvSpPr txBox="1"/>
           <p:nvPr/>
         </p:nvSpPr>
@@ -16018,7 +15431,7 @@
       </p:sp>
       <p:sp>
         <p:nvSpPr>
-          <p:cNvPr id="36" name="TextBox 35"/>
+          <p:cNvPr id="37" name="TextBox 36"/>
           <p:cNvSpPr txBox="1"/>
           <p:nvPr/>
         </p:nvSpPr>
@@ -16134,7 +15547,7 @@
         <p:spPr>
           <a:xfrm>
             <a:off x="640080" y="329184"/>
-            <a:ext cx="5303520" cy="182880"/>
+            <a:ext cx="9875520" cy="182880"/>
           </a:xfrm>
           <a:prstGeom prst="rect">
             <a:avLst/>
@@ -16175,48 +15588,6 @@
         </p:nvSpPr>
         <p:spPr>
           <a:xfrm>
-            <a:off x="5897880" y="310896"/>
-            <a:ext cx="4800600" cy="256032"/>
-          </a:xfrm>
-          <a:prstGeom prst="rect">
-            <a:avLst/>
-          </a:prstGeom>
-          <a:noFill/>
-        </p:spPr>
-        <p:txBody>
-          <a:bodyPr wrap="none" lIns="9144" rIns="9144" tIns="9144" bIns="9144" anchor="t">
-            <a:spAutoFit/>
-          </a:bodyPr>
-          <a:lstStyle/>
-          <a:p>
-            <a:pPr algn="r">
-              <a:spcAft>
-                <a:spcPts val="0"/>
-              </a:spcAft>
-              <a:defRPr sz="680" b="1">
-                <a:solidFill>
-                  <a:srgbClr val="4F6B00"/>
-                </a:solidFill>
-                <a:latin typeface="Inter"/>
-              </a:defRPr>
-            </a:pPr>
-            <a:r>
-              <a:rPr>
-                <a:latin typeface="Inter"/>
-              </a:rPr>
-              <a:t>Illustrative, Gradient Maintained — demo data, not the client's holdings or managers</a:t>
-            </a:r>
-          </a:p>
-        </p:txBody>
-      </p:sp>
-      <p:sp>
-        <p:nvSpPr>
-          <p:cNvPr id="5" name="TextBox 4"/>
-          <p:cNvSpPr txBox="1"/>
-          <p:nvPr/>
-        </p:nvSpPr>
-        <p:spPr>
-          <a:xfrm>
             <a:off x="640080" y="566928"/>
             <a:ext cx="10058400" cy="530352"/>
           </a:xfrm>
@@ -16253,7 +15624,7 @@
       </p:sp>
       <p:sp>
         <p:nvSpPr>
-          <p:cNvPr id="6" name="Rectangle 5"/>
+          <p:cNvPr id="5" name="Rectangle 4"/>
           <p:cNvSpPr/>
           <p:nvPr/>
         </p:nvSpPr>
@@ -16302,7 +15673,7 @@
       </p:sp>
       <p:sp>
         <p:nvSpPr>
-          <p:cNvPr id="7" name="Rectangle 6"/>
+          <p:cNvPr id="6" name="Rectangle 5"/>
           <p:cNvSpPr/>
           <p:nvPr/>
         </p:nvSpPr>
@@ -16351,7 +15722,7 @@
       </p:sp>
       <p:sp>
         <p:nvSpPr>
-          <p:cNvPr id="8" name="TextBox 7"/>
+          <p:cNvPr id="7" name="TextBox 6"/>
           <p:cNvSpPr txBox="1"/>
           <p:nvPr/>
         </p:nvSpPr>
@@ -16393,7 +15764,7 @@
       </p:sp>
       <p:sp>
         <p:nvSpPr>
-          <p:cNvPr id="9" name="TextBox 8"/>
+          <p:cNvPr id="8" name="TextBox 7"/>
           <p:cNvSpPr txBox="1"/>
           <p:nvPr/>
         </p:nvSpPr>
@@ -16435,7 +15806,7 @@
       </p:sp>
       <p:graphicFrame>
         <p:nvGraphicFramePr>
-          <p:cNvPr id="10" name="Chart 9"/>
+          <p:cNvPr id="9" name="Chart 8"/>
           <p:cNvGraphicFramePr>
             <a:graphicFrameLocks noGrp="1"/>
           </p:cNvGraphicFramePr>
@@ -16453,7 +15824,7 @@
       </p:graphicFrame>
       <p:sp>
         <p:nvSpPr>
-          <p:cNvPr id="11" name="Rectangle 10"/>
+          <p:cNvPr id="10" name="Rectangle 9"/>
           <p:cNvSpPr/>
           <p:nvPr/>
         </p:nvSpPr>
@@ -16502,7 +15873,7 @@
       </p:sp>
       <p:sp>
         <p:nvSpPr>
-          <p:cNvPr id="12" name="TextBox 11"/>
+          <p:cNvPr id="11" name="TextBox 10"/>
           <p:cNvSpPr txBox="1"/>
           <p:nvPr/>
         </p:nvSpPr>
@@ -16544,7 +15915,7 @@
       </p:sp>
       <p:sp>
         <p:nvSpPr>
-          <p:cNvPr id="13" name="TextBox 12"/>
+          <p:cNvPr id="12" name="TextBox 11"/>
           <p:cNvSpPr txBox="1"/>
           <p:nvPr/>
         </p:nvSpPr>
@@ -16586,7 +15957,7 @@
       </p:sp>
       <p:sp>
         <p:nvSpPr>
-          <p:cNvPr id="14" name="TextBox 13"/>
+          <p:cNvPr id="13" name="TextBox 12"/>
           <p:cNvSpPr txBox="1"/>
           <p:nvPr/>
         </p:nvSpPr>
@@ -16702,7 +16073,7 @@
         <p:spPr>
           <a:xfrm>
             <a:off x="640080" y="329184"/>
-            <a:ext cx="5303520" cy="182880"/>
+            <a:ext cx="9875520" cy="182880"/>
           </a:xfrm>
           <a:prstGeom prst="rect">
             <a:avLst/>
@@ -16743,48 +16114,6 @@
         </p:nvSpPr>
         <p:spPr>
           <a:xfrm>
-            <a:off x="5897880" y="310896"/>
-            <a:ext cx="4800600" cy="256032"/>
-          </a:xfrm>
-          <a:prstGeom prst="rect">
-            <a:avLst/>
-          </a:prstGeom>
-          <a:noFill/>
-        </p:spPr>
-        <p:txBody>
-          <a:bodyPr wrap="none" lIns="9144" rIns="9144" tIns="9144" bIns="9144" anchor="t">
-            <a:spAutoFit/>
-          </a:bodyPr>
-          <a:lstStyle/>
-          <a:p>
-            <a:pPr algn="r">
-              <a:spcAft>
-                <a:spcPts val="0"/>
-              </a:spcAft>
-              <a:defRPr sz="680" b="1">
-                <a:solidFill>
-                  <a:srgbClr val="4F6B00"/>
-                </a:solidFill>
-                <a:latin typeface="Inter"/>
-              </a:defRPr>
-            </a:pPr>
-            <a:r>
-              <a:rPr>
-                <a:latin typeface="Inter"/>
-              </a:rPr>
-              <a:t>Illustrative, Gradient Maintained — demo data, not the client's holdings or managers</a:t>
-            </a:r>
-          </a:p>
-        </p:txBody>
-      </p:sp>
-      <p:sp>
-        <p:nvSpPr>
-          <p:cNvPr id="5" name="TextBox 4"/>
-          <p:cNvSpPr txBox="1"/>
-          <p:nvPr/>
-        </p:nvSpPr>
-        <p:spPr>
-          <a:xfrm>
             <a:off x="640080" y="566928"/>
             <a:ext cx="10058400" cy="530352"/>
           </a:xfrm>
@@ -16821,7 +16150,7 @@
       </p:sp>
       <p:sp>
         <p:nvSpPr>
-          <p:cNvPr id="6" name="Rectangle 5"/>
+          <p:cNvPr id="5" name="Rectangle 4"/>
           <p:cNvSpPr/>
           <p:nvPr/>
         </p:nvSpPr>
@@ -16870,7 +16199,7 @@
       </p:sp>
       <p:sp>
         <p:nvSpPr>
-          <p:cNvPr id="7" name="Rectangle 6"/>
+          <p:cNvPr id="6" name="Rectangle 5"/>
           <p:cNvSpPr/>
           <p:nvPr/>
         </p:nvSpPr>
@@ -16919,7 +16248,7 @@
       </p:sp>
       <p:sp>
         <p:nvSpPr>
-          <p:cNvPr id="8" name="TextBox 7"/>
+          <p:cNvPr id="7" name="TextBox 6"/>
           <p:cNvSpPr txBox="1"/>
           <p:nvPr/>
         </p:nvSpPr>
@@ -16961,7 +16290,7 @@
       </p:sp>
       <p:sp>
         <p:nvSpPr>
-          <p:cNvPr id="9" name="TextBox 8"/>
+          <p:cNvPr id="8" name="TextBox 7"/>
           <p:cNvSpPr txBox="1"/>
           <p:nvPr/>
         </p:nvSpPr>
@@ -17003,7 +16332,7 @@
       </p:sp>
       <p:graphicFrame>
         <p:nvGraphicFramePr>
-          <p:cNvPr id="10" name="Table 9"/>
+          <p:cNvPr id="9" name="Table 8"/>
           <p:cNvGraphicFramePr>
             <a:graphicFrameLocks noGrp="1"/>
           </p:cNvGraphicFramePr>
@@ -17445,7 +16774,7 @@
       </p:graphicFrame>
       <p:sp>
         <p:nvSpPr>
-          <p:cNvPr id="11" name="Rectangle 10"/>
+          <p:cNvPr id="10" name="Rectangle 9"/>
           <p:cNvSpPr/>
           <p:nvPr/>
         </p:nvSpPr>
@@ -17494,7 +16823,7 @@
       </p:sp>
       <p:sp>
         <p:nvSpPr>
-          <p:cNvPr id="12" name="TextBox 11"/>
+          <p:cNvPr id="11" name="TextBox 10"/>
           <p:cNvSpPr txBox="1"/>
           <p:nvPr/>
         </p:nvSpPr>
@@ -17536,7 +16865,7 @@
       </p:sp>
       <p:sp>
         <p:nvSpPr>
-          <p:cNvPr id="13" name="TextBox 12"/>
+          <p:cNvPr id="12" name="TextBox 11"/>
           <p:cNvSpPr txBox="1"/>
           <p:nvPr/>
         </p:nvSpPr>
@@ -17578,7 +16907,7 @@
       </p:sp>
       <p:sp>
         <p:nvSpPr>
-          <p:cNvPr id="14" name="TextBox 13"/>
+          <p:cNvPr id="13" name="TextBox 12"/>
           <p:cNvSpPr txBox="1"/>
           <p:nvPr/>
         </p:nvSpPr>
@@ -17694,7 +17023,7 @@
         <p:spPr>
           <a:xfrm>
             <a:off x="640080" y="329184"/>
-            <a:ext cx="5303520" cy="182880"/>
+            <a:ext cx="9875520" cy="182880"/>
           </a:xfrm>
           <a:prstGeom prst="rect">
             <a:avLst/>
@@ -17735,48 +17064,6 @@
         </p:nvSpPr>
         <p:spPr>
           <a:xfrm>
-            <a:off x="5897880" y="310896"/>
-            <a:ext cx="4800600" cy="256032"/>
-          </a:xfrm>
-          <a:prstGeom prst="rect">
-            <a:avLst/>
-          </a:prstGeom>
-          <a:noFill/>
-        </p:spPr>
-        <p:txBody>
-          <a:bodyPr wrap="none" lIns="9144" rIns="9144" tIns="9144" bIns="9144" anchor="t">
-            <a:spAutoFit/>
-          </a:bodyPr>
-          <a:lstStyle/>
-          <a:p>
-            <a:pPr algn="r">
-              <a:spcAft>
-                <a:spcPts val="0"/>
-              </a:spcAft>
-              <a:defRPr sz="680" b="1">
-                <a:solidFill>
-                  <a:srgbClr val="4F6B00"/>
-                </a:solidFill>
-                <a:latin typeface="Inter"/>
-              </a:defRPr>
-            </a:pPr>
-            <a:r>
-              <a:rPr>
-                <a:latin typeface="Inter"/>
-              </a:rPr>
-              <a:t>Illustrative, Gradient Maintained — demo data, not the client's holdings or managers</a:t>
-            </a:r>
-          </a:p>
-        </p:txBody>
-      </p:sp>
-      <p:sp>
-        <p:nvSpPr>
-          <p:cNvPr id="5" name="TextBox 4"/>
-          <p:cNvSpPr txBox="1"/>
-          <p:nvPr/>
-        </p:nvSpPr>
-        <p:spPr>
-          <a:xfrm>
             <a:off x="640080" y="566928"/>
             <a:ext cx="10058400" cy="530352"/>
           </a:xfrm>
@@ -17813,7 +17100,7 @@
       </p:sp>
       <p:sp>
         <p:nvSpPr>
-          <p:cNvPr id="6" name="Rectangle 5"/>
+          <p:cNvPr id="5" name="Rectangle 4"/>
           <p:cNvSpPr/>
           <p:nvPr/>
         </p:nvSpPr>
@@ -17862,7 +17149,7 @@
       </p:sp>
       <p:sp>
         <p:nvSpPr>
-          <p:cNvPr id="7" name="Rectangle 6"/>
+          <p:cNvPr id="6" name="Rectangle 5"/>
           <p:cNvSpPr/>
           <p:nvPr/>
         </p:nvSpPr>
@@ -17911,7 +17198,7 @@
       </p:sp>
       <p:sp>
         <p:nvSpPr>
-          <p:cNvPr id="8" name="TextBox 7"/>
+          <p:cNvPr id="7" name="TextBox 6"/>
           <p:cNvSpPr txBox="1"/>
           <p:nvPr/>
         </p:nvSpPr>
@@ -17953,7 +17240,7 @@
       </p:sp>
       <p:sp>
         <p:nvSpPr>
-          <p:cNvPr id="9" name="TextBox 8"/>
+          <p:cNvPr id="8" name="TextBox 7"/>
           <p:cNvSpPr txBox="1"/>
           <p:nvPr/>
         </p:nvSpPr>
@@ -17995,7 +17282,7 @@
       </p:sp>
       <p:graphicFrame>
         <p:nvGraphicFramePr>
-          <p:cNvPr id="10" name="Table 9"/>
+          <p:cNvPr id="9" name="Table 8"/>
           <p:cNvGraphicFramePr>
             <a:graphicFrameLocks noGrp="1"/>
           </p:cNvGraphicFramePr>
@@ -18681,7 +17968,7 @@
       </p:graphicFrame>
       <p:sp>
         <p:nvSpPr>
-          <p:cNvPr id="11" name="Rectangle 10"/>
+          <p:cNvPr id="10" name="Rectangle 9"/>
           <p:cNvSpPr/>
           <p:nvPr/>
         </p:nvSpPr>
@@ -18730,7 +18017,7 @@
       </p:sp>
       <p:sp>
         <p:nvSpPr>
-          <p:cNvPr id="12" name="TextBox 11"/>
+          <p:cNvPr id="11" name="TextBox 10"/>
           <p:cNvSpPr txBox="1"/>
           <p:nvPr/>
         </p:nvSpPr>
@@ -18772,7 +18059,7 @@
       </p:sp>
       <p:sp>
         <p:nvSpPr>
-          <p:cNvPr id="13" name="TextBox 12"/>
+          <p:cNvPr id="12" name="TextBox 11"/>
           <p:cNvSpPr txBox="1"/>
           <p:nvPr/>
         </p:nvSpPr>
@@ -18814,7 +18101,7 @@
       </p:sp>
       <p:sp>
         <p:nvSpPr>
-          <p:cNvPr id="14" name="TextBox 13"/>
+          <p:cNvPr id="13" name="TextBox 12"/>
           <p:cNvSpPr txBox="1"/>
           <p:nvPr/>
         </p:nvSpPr>
@@ -18930,7 +18217,7 @@
         <p:spPr>
           <a:xfrm>
             <a:off x="640080" y="329184"/>
-            <a:ext cx="5303520" cy="182880"/>
+            <a:ext cx="9875520" cy="182880"/>
           </a:xfrm>
           <a:prstGeom prst="rect">
             <a:avLst/>
@@ -18971,48 +18258,6 @@
         </p:nvSpPr>
         <p:spPr>
           <a:xfrm>
-            <a:off x="5897880" y="310896"/>
-            <a:ext cx="4800600" cy="256032"/>
-          </a:xfrm>
-          <a:prstGeom prst="rect">
-            <a:avLst/>
-          </a:prstGeom>
-          <a:noFill/>
-        </p:spPr>
-        <p:txBody>
-          <a:bodyPr wrap="none" lIns="9144" rIns="9144" tIns="9144" bIns="9144" anchor="t">
-            <a:spAutoFit/>
-          </a:bodyPr>
-          <a:lstStyle/>
-          <a:p>
-            <a:pPr algn="r">
-              <a:spcAft>
-                <a:spcPts val="0"/>
-              </a:spcAft>
-              <a:defRPr sz="680" b="1">
-                <a:solidFill>
-                  <a:srgbClr val="4F6B00"/>
-                </a:solidFill>
-                <a:latin typeface="Inter"/>
-              </a:defRPr>
-            </a:pPr>
-            <a:r>
-              <a:rPr>
-                <a:latin typeface="Inter"/>
-              </a:rPr>
-              <a:t>Illustrative, Gradient Maintained — demo data, not the client's holdings or managers</a:t>
-            </a:r>
-          </a:p>
-        </p:txBody>
-      </p:sp>
-      <p:sp>
-        <p:nvSpPr>
-          <p:cNvPr id="5" name="TextBox 4"/>
-          <p:cNvSpPr txBox="1"/>
-          <p:nvPr/>
-        </p:nvSpPr>
-        <p:spPr>
-          <a:xfrm>
             <a:off x="640080" y="566928"/>
             <a:ext cx="10058400" cy="530352"/>
           </a:xfrm>
@@ -19049,7 +18294,7 @@
       </p:sp>
       <p:sp>
         <p:nvSpPr>
-          <p:cNvPr id="6" name="Rectangle 5"/>
+          <p:cNvPr id="5" name="Rectangle 4"/>
           <p:cNvSpPr/>
           <p:nvPr/>
         </p:nvSpPr>
@@ -19098,7 +18343,7 @@
       </p:sp>
       <p:sp>
         <p:nvSpPr>
-          <p:cNvPr id="7" name="Rectangle 6"/>
+          <p:cNvPr id="6" name="Rectangle 5"/>
           <p:cNvSpPr/>
           <p:nvPr/>
         </p:nvSpPr>
@@ -19147,7 +18392,7 @@
       </p:sp>
       <p:sp>
         <p:nvSpPr>
-          <p:cNvPr id="8" name="TextBox 7"/>
+          <p:cNvPr id="7" name="TextBox 6"/>
           <p:cNvSpPr txBox="1"/>
           <p:nvPr/>
         </p:nvSpPr>
@@ -19189,7 +18434,7 @@
       </p:sp>
       <p:sp>
         <p:nvSpPr>
-          <p:cNvPr id="9" name="TextBox 8"/>
+          <p:cNvPr id="8" name="TextBox 7"/>
           <p:cNvSpPr txBox="1"/>
           <p:nvPr/>
         </p:nvSpPr>
@@ -19231,7 +18476,7 @@
       </p:sp>
       <p:graphicFrame>
         <p:nvGraphicFramePr>
-          <p:cNvPr id="10" name="Chart 9"/>
+          <p:cNvPr id="9" name="Chart 8"/>
           <p:cNvGraphicFramePr>
             <a:graphicFrameLocks noGrp="1"/>
           </p:cNvGraphicFramePr>
@@ -19249,7 +18494,7 @@
       </p:graphicFrame>
       <p:sp>
         <p:nvSpPr>
-          <p:cNvPr id="11" name="Rectangle 10"/>
+          <p:cNvPr id="10" name="Rectangle 9"/>
           <p:cNvSpPr/>
           <p:nvPr/>
         </p:nvSpPr>
@@ -19298,7 +18543,7 @@
       </p:sp>
       <p:sp>
         <p:nvSpPr>
-          <p:cNvPr id="12" name="TextBox 11"/>
+          <p:cNvPr id="11" name="TextBox 10"/>
           <p:cNvSpPr txBox="1"/>
           <p:nvPr/>
         </p:nvSpPr>
@@ -19340,7 +18585,7 @@
       </p:sp>
       <p:sp>
         <p:nvSpPr>
-          <p:cNvPr id="13" name="TextBox 12"/>
+          <p:cNvPr id="12" name="TextBox 11"/>
           <p:cNvSpPr txBox="1"/>
           <p:nvPr/>
         </p:nvSpPr>
@@ -19382,7 +18627,7 @@
       </p:sp>
       <p:sp>
         <p:nvSpPr>
-          <p:cNvPr id="14" name="TextBox 13"/>
+          <p:cNvPr id="13" name="TextBox 12"/>
           <p:cNvSpPr txBox="1"/>
           <p:nvPr/>
         </p:nvSpPr>
@@ -19498,7 +18743,7 @@
         <p:spPr>
           <a:xfrm>
             <a:off x="640080" y="329184"/>
-            <a:ext cx="5303520" cy="182880"/>
+            <a:ext cx="9875520" cy="182880"/>
           </a:xfrm>
           <a:prstGeom prst="rect">
             <a:avLst/>
@@ -19539,48 +18784,6 @@
         </p:nvSpPr>
         <p:spPr>
           <a:xfrm>
-            <a:off x="5897880" y="310896"/>
-            <a:ext cx="4800600" cy="256032"/>
-          </a:xfrm>
-          <a:prstGeom prst="rect">
-            <a:avLst/>
-          </a:prstGeom>
-          <a:noFill/>
-        </p:spPr>
-        <p:txBody>
-          <a:bodyPr wrap="none" lIns="9144" rIns="9144" tIns="9144" bIns="9144" anchor="t">
-            <a:spAutoFit/>
-          </a:bodyPr>
-          <a:lstStyle/>
-          <a:p>
-            <a:pPr algn="r">
-              <a:spcAft>
-                <a:spcPts val="0"/>
-              </a:spcAft>
-              <a:defRPr sz="680" b="1">
-                <a:solidFill>
-                  <a:srgbClr val="4F6B00"/>
-                </a:solidFill>
-                <a:latin typeface="Inter"/>
-              </a:defRPr>
-            </a:pPr>
-            <a:r>
-              <a:rPr>
-                <a:latin typeface="Inter"/>
-              </a:rPr>
-              <a:t>Illustrative, Gradient Maintained — demo data, not the client's holdings or managers</a:t>
-            </a:r>
-          </a:p>
-        </p:txBody>
-      </p:sp>
-      <p:sp>
-        <p:nvSpPr>
-          <p:cNvPr id="5" name="TextBox 4"/>
-          <p:cNvSpPr txBox="1"/>
-          <p:nvPr/>
-        </p:nvSpPr>
-        <p:spPr>
-          <a:xfrm>
             <a:off x="640080" y="566928"/>
             <a:ext cx="10058400" cy="530352"/>
           </a:xfrm>
@@ -19617,7 +18820,7 @@
       </p:sp>
       <p:sp>
         <p:nvSpPr>
-          <p:cNvPr id="6" name="Rectangle 5"/>
+          <p:cNvPr id="5" name="Rectangle 4"/>
           <p:cNvSpPr/>
           <p:nvPr/>
         </p:nvSpPr>
@@ -19666,7 +18869,7 @@
       </p:sp>
       <p:sp>
         <p:nvSpPr>
-          <p:cNvPr id="7" name="Rectangle 6"/>
+          <p:cNvPr id="6" name="Rectangle 5"/>
           <p:cNvSpPr/>
           <p:nvPr/>
         </p:nvSpPr>
@@ -19715,7 +18918,7 @@
       </p:sp>
       <p:sp>
         <p:nvSpPr>
-          <p:cNvPr id="8" name="TextBox 7"/>
+          <p:cNvPr id="7" name="TextBox 6"/>
           <p:cNvSpPr txBox="1"/>
           <p:nvPr/>
         </p:nvSpPr>
@@ -19757,7 +18960,7 @@
       </p:sp>
       <p:sp>
         <p:nvSpPr>
-          <p:cNvPr id="9" name="TextBox 8"/>
+          <p:cNvPr id="8" name="TextBox 7"/>
           <p:cNvSpPr txBox="1"/>
           <p:nvPr/>
         </p:nvSpPr>
@@ -19799,7 +19002,7 @@
       </p:sp>
       <p:graphicFrame>
         <p:nvGraphicFramePr>
-          <p:cNvPr id="10" name="Chart 9"/>
+          <p:cNvPr id="9" name="Chart 8"/>
           <p:cNvGraphicFramePr>
             <a:graphicFrameLocks noGrp="1"/>
           </p:cNvGraphicFramePr>
@@ -19817,7 +19020,7 @@
       </p:graphicFrame>
       <p:sp>
         <p:nvSpPr>
-          <p:cNvPr id="11" name="Rectangle 10"/>
+          <p:cNvPr id="10" name="Rectangle 9"/>
           <p:cNvSpPr/>
           <p:nvPr/>
         </p:nvSpPr>
@@ -19866,7 +19069,7 @@
       </p:sp>
       <p:sp>
         <p:nvSpPr>
-          <p:cNvPr id="12" name="TextBox 11"/>
+          <p:cNvPr id="11" name="TextBox 10"/>
           <p:cNvSpPr txBox="1"/>
           <p:nvPr/>
         </p:nvSpPr>
@@ -19908,7 +19111,7 @@
       </p:sp>
       <p:sp>
         <p:nvSpPr>
-          <p:cNvPr id="13" name="TextBox 12"/>
+          <p:cNvPr id="12" name="TextBox 11"/>
           <p:cNvSpPr txBox="1"/>
           <p:nvPr/>
         </p:nvSpPr>
@@ -19950,7 +19153,7 @@
       </p:sp>
       <p:sp>
         <p:nvSpPr>
-          <p:cNvPr id="14" name="TextBox 13"/>
+          <p:cNvPr id="13" name="TextBox 12"/>
           <p:cNvSpPr txBox="1"/>
           <p:nvPr/>
         </p:nvSpPr>
@@ -20066,7 +19269,7 @@
         <p:spPr>
           <a:xfrm>
             <a:off x="640080" y="329184"/>
-            <a:ext cx="5303520" cy="182880"/>
+            <a:ext cx="9875520" cy="182880"/>
           </a:xfrm>
           <a:prstGeom prst="rect">
             <a:avLst/>
@@ -20107,48 +19310,6 @@
         </p:nvSpPr>
         <p:spPr>
           <a:xfrm>
-            <a:off x="5897880" y="310896"/>
-            <a:ext cx="4800600" cy="256032"/>
-          </a:xfrm>
-          <a:prstGeom prst="rect">
-            <a:avLst/>
-          </a:prstGeom>
-          <a:noFill/>
-        </p:spPr>
-        <p:txBody>
-          <a:bodyPr wrap="none" lIns="9144" rIns="9144" tIns="9144" bIns="9144" anchor="t">
-            <a:spAutoFit/>
-          </a:bodyPr>
-          <a:lstStyle/>
-          <a:p>
-            <a:pPr algn="r">
-              <a:spcAft>
-                <a:spcPts val="0"/>
-              </a:spcAft>
-              <a:defRPr sz="680" b="1">
-                <a:solidFill>
-                  <a:srgbClr val="4F6B00"/>
-                </a:solidFill>
-                <a:latin typeface="Inter"/>
-              </a:defRPr>
-            </a:pPr>
-            <a:r>
-              <a:rPr>
-                <a:latin typeface="Inter"/>
-              </a:rPr>
-              <a:t>Illustrative, Gradient Maintained — demo data, not the client's holdings or managers</a:t>
-            </a:r>
-          </a:p>
-        </p:txBody>
-      </p:sp>
-      <p:sp>
-        <p:nvSpPr>
-          <p:cNvPr id="5" name="TextBox 4"/>
-          <p:cNvSpPr txBox="1"/>
-          <p:nvPr/>
-        </p:nvSpPr>
-        <p:spPr>
-          <a:xfrm>
             <a:off x="640080" y="566928"/>
             <a:ext cx="10058400" cy="530352"/>
           </a:xfrm>
@@ -20185,7 +19346,7 @@
       </p:sp>
       <p:sp>
         <p:nvSpPr>
-          <p:cNvPr id="6" name="Rectangle 5"/>
+          <p:cNvPr id="5" name="Rectangle 4"/>
           <p:cNvSpPr/>
           <p:nvPr/>
         </p:nvSpPr>
@@ -20234,7 +19395,7 @@
       </p:sp>
       <p:sp>
         <p:nvSpPr>
-          <p:cNvPr id="7" name="Rectangle 6"/>
+          <p:cNvPr id="6" name="Rectangle 5"/>
           <p:cNvSpPr/>
           <p:nvPr/>
         </p:nvSpPr>
@@ -20283,7 +19444,7 @@
       </p:sp>
       <p:sp>
         <p:nvSpPr>
-          <p:cNvPr id="8" name="TextBox 7"/>
+          <p:cNvPr id="7" name="TextBox 6"/>
           <p:cNvSpPr txBox="1"/>
           <p:nvPr/>
         </p:nvSpPr>
@@ -20325,7 +19486,7 @@
       </p:sp>
       <p:sp>
         <p:nvSpPr>
-          <p:cNvPr id="9" name="TextBox 8"/>
+          <p:cNvPr id="8" name="TextBox 7"/>
           <p:cNvSpPr txBox="1"/>
           <p:nvPr/>
         </p:nvSpPr>
@@ -20367,7 +19528,7 @@
       </p:sp>
       <p:graphicFrame>
         <p:nvGraphicFramePr>
-          <p:cNvPr id="10" name="Table 9"/>
+          <p:cNvPr id="9" name="Table 8"/>
           <p:cNvGraphicFramePr>
             <a:graphicFrameLocks noGrp="1"/>
           </p:cNvGraphicFramePr>
@@ -20807,7 +19968,7 @@
       </p:graphicFrame>
       <p:graphicFrame>
         <p:nvGraphicFramePr>
-          <p:cNvPr id="11" name="Table 10"/>
+          <p:cNvPr id="10" name="Table 9"/>
           <p:cNvGraphicFramePr>
             <a:graphicFrameLocks noGrp="1"/>
           </p:cNvGraphicFramePr>
@@ -21057,7 +20218,7 @@
       </p:graphicFrame>
       <p:sp>
         <p:nvSpPr>
-          <p:cNvPr id="12" name="Rectangle 11"/>
+          <p:cNvPr id="11" name="Rectangle 10"/>
           <p:cNvSpPr/>
           <p:nvPr/>
         </p:nvSpPr>
@@ -21106,7 +20267,7 @@
       </p:sp>
       <p:sp>
         <p:nvSpPr>
-          <p:cNvPr id="13" name="Rectangle 12"/>
+          <p:cNvPr id="12" name="Rectangle 11"/>
           <p:cNvSpPr/>
           <p:nvPr/>
         </p:nvSpPr>
@@ -21155,7 +20316,7 @@
       </p:sp>
       <p:sp>
         <p:nvSpPr>
-          <p:cNvPr id="14" name="TextBox 13"/>
+          <p:cNvPr id="13" name="TextBox 12"/>
           <p:cNvSpPr txBox="1"/>
           <p:nvPr/>
         </p:nvSpPr>
@@ -21197,7 +20358,7 @@
       </p:sp>
       <p:sp>
         <p:nvSpPr>
-          <p:cNvPr id="15" name="TextBox 14"/>
+          <p:cNvPr id="14" name="TextBox 13"/>
           <p:cNvSpPr txBox="1"/>
           <p:nvPr/>
         </p:nvSpPr>
@@ -21239,7 +20400,7 @@
       </p:sp>
       <p:sp>
         <p:nvSpPr>
-          <p:cNvPr id="16" name="Rectangle 15"/>
+          <p:cNvPr id="15" name="Rectangle 14"/>
           <p:cNvSpPr/>
           <p:nvPr/>
         </p:nvSpPr>
@@ -21288,7 +20449,7 @@
       </p:sp>
       <p:sp>
         <p:nvSpPr>
-          <p:cNvPr id="17" name="TextBox 16"/>
+          <p:cNvPr id="16" name="TextBox 15"/>
           <p:cNvSpPr txBox="1"/>
           <p:nvPr/>
         </p:nvSpPr>
@@ -21330,7 +20491,7 @@
       </p:sp>
       <p:sp>
         <p:nvSpPr>
-          <p:cNvPr id="18" name="TextBox 17"/>
+          <p:cNvPr id="17" name="TextBox 16"/>
           <p:cNvSpPr txBox="1"/>
           <p:nvPr/>
         </p:nvSpPr>
@@ -21372,7 +20533,7 @@
       </p:sp>
       <p:sp>
         <p:nvSpPr>
-          <p:cNvPr id="19" name="TextBox 18"/>
+          <p:cNvPr id="18" name="TextBox 17"/>
           <p:cNvSpPr txBox="1"/>
           <p:nvPr/>
         </p:nvSpPr>
@@ -21488,7 +20649,7 @@
         <p:spPr>
           <a:xfrm>
             <a:off x="640080" y="329184"/>
-            <a:ext cx="5303520" cy="182880"/>
+            <a:ext cx="9875520" cy="182880"/>
           </a:xfrm>
           <a:prstGeom prst="rect">
             <a:avLst/>
@@ -21529,48 +20690,6 @@
         </p:nvSpPr>
         <p:spPr>
           <a:xfrm>
-            <a:off x="5897880" y="310896"/>
-            <a:ext cx="4800600" cy="256032"/>
-          </a:xfrm>
-          <a:prstGeom prst="rect">
-            <a:avLst/>
-          </a:prstGeom>
-          <a:noFill/>
-        </p:spPr>
-        <p:txBody>
-          <a:bodyPr wrap="none" lIns="9144" rIns="9144" tIns="9144" bIns="9144" anchor="t">
-            <a:spAutoFit/>
-          </a:bodyPr>
-          <a:lstStyle/>
-          <a:p>
-            <a:pPr algn="r">
-              <a:spcAft>
-                <a:spcPts val="0"/>
-              </a:spcAft>
-              <a:defRPr sz="680" b="1">
-                <a:solidFill>
-                  <a:srgbClr val="4F6B00"/>
-                </a:solidFill>
-                <a:latin typeface="Inter"/>
-              </a:defRPr>
-            </a:pPr>
-            <a:r>
-              <a:rPr>
-                <a:latin typeface="Inter"/>
-              </a:rPr>
-              <a:t>Illustrative, Gradient Maintained — demo data, not the client's holdings or managers</a:t>
-            </a:r>
-          </a:p>
-        </p:txBody>
-      </p:sp>
-      <p:sp>
-        <p:nvSpPr>
-          <p:cNvPr id="5" name="TextBox 4"/>
-          <p:cNvSpPr txBox="1"/>
-          <p:nvPr/>
-        </p:nvSpPr>
-        <p:spPr>
-          <a:xfrm>
             <a:off x="640080" y="566928"/>
             <a:ext cx="10058400" cy="530352"/>
           </a:xfrm>
@@ -21607,7 +20726,7 @@
       </p:sp>
       <p:sp>
         <p:nvSpPr>
-          <p:cNvPr id="6" name="Rectangle 5"/>
+          <p:cNvPr id="5" name="Rectangle 4"/>
           <p:cNvSpPr/>
           <p:nvPr/>
         </p:nvSpPr>
@@ -21656,7 +20775,7 @@
       </p:sp>
       <p:sp>
         <p:nvSpPr>
-          <p:cNvPr id="7" name="Rectangle 6"/>
+          <p:cNvPr id="6" name="Rectangle 5"/>
           <p:cNvSpPr/>
           <p:nvPr/>
         </p:nvSpPr>
@@ -21705,7 +20824,7 @@
       </p:sp>
       <p:sp>
         <p:nvSpPr>
-          <p:cNvPr id="8" name="TextBox 7"/>
+          <p:cNvPr id="7" name="TextBox 6"/>
           <p:cNvSpPr txBox="1"/>
           <p:nvPr/>
         </p:nvSpPr>
@@ -21747,7 +20866,7 @@
       </p:sp>
       <p:sp>
         <p:nvSpPr>
-          <p:cNvPr id="9" name="TextBox 8"/>
+          <p:cNvPr id="8" name="TextBox 7"/>
           <p:cNvSpPr txBox="1"/>
           <p:nvPr/>
         </p:nvSpPr>
@@ -21789,7 +20908,7 @@
       </p:sp>
       <p:graphicFrame>
         <p:nvGraphicFramePr>
-          <p:cNvPr id="10" name="Table 9"/>
+          <p:cNvPr id="9" name="Table 8"/>
           <p:cNvGraphicFramePr>
             <a:graphicFrameLocks noGrp="1"/>
           </p:cNvGraphicFramePr>
@@ -22212,7 +21331,7 @@
                         <a:rPr>
                           <a:latin typeface="Inter"/>
                         </a:rPr>
-                        <a:t>● not assessed</a:t>
+                        <a:t>● Not assessed</a:t>
                       </a:r>
                     </a:p>
                   </a:txBody>
@@ -22229,7 +21348,7 @@
       </p:graphicFrame>
       <p:sp>
         <p:nvSpPr>
-          <p:cNvPr id="11" name="Rectangle 10"/>
+          <p:cNvPr id="10" name="Rectangle 9"/>
           <p:cNvSpPr/>
           <p:nvPr/>
         </p:nvSpPr>
@@ -22278,7 +21397,7 @@
       </p:sp>
       <p:sp>
         <p:nvSpPr>
-          <p:cNvPr id="12" name="TextBox 11"/>
+          <p:cNvPr id="11" name="TextBox 10"/>
           <p:cNvSpPr txBox="1"/>
           <p:nvPr/>
         </p:nvSpPr>
@@ -22320,7 +21439,7 @@
       </p:sp>
       <p:sp>
         <p:nvSpPr>
-          <p:cNvPr id="13" name="TextBox 12"/>
+          <p:cNvPr id="12" name="TextBox 11"/>
           <p:cNvSpPr txBox="1"/>
           <p:nvPr/>
         </p:nvSpPr>
@@ -22362,7 +21481,7 @@
       </p:sp>
       <p:sp>
         <p:nvSpPr>
-          <p:cNvPr id="14" name="TextBox 13"/>
+          <p:cNvPr id="13" name="TextBox 12"/>
           <p:cNvSpPr txBox="1"/>
           <p:nvPr/>
         </p:nvSpPr>
@@ -22478,7 +21597,7 @@
         <p:spPr>
           <a:xfrm>
             <a:off x="640080" y="329184"/>
-            <a:ext cx="5303520" cy="182880"/>
+            <a:ext cx="9875520" cy="182880"/>
           </a:xfrm>
           <a:prstGeom prst="rect">
             <a:avLst/>
@@ -22519,48 +21638,6 @@
         </p:nvSpPr>
         <p:spPr>
           <a:xfrm>
-            <a:off x="5897880" y="310896"/>
-            <a:ext cx="4800600" cy="256032"/>
-          </a:xfrm>
-          <a:prstGeom prst="rect">
-            <a:avLst/>
-          </a:prstGeom>
-          <a:noFill/>
-        </p:spPr>
-        <p:txBody>
-          <a:bodyPr wrap="none" lIns="9144" rIns="9144" tIns="9144" bIns="9144" anchor="t">
-            <a:spAutoFit/>
-          </a:bodyPr>
-          <a:lstStyle/>
-          <a:p>
-            <a:pPr algn="r">
-              <a:spcAft>
-                <a:spcPts val="0"/>
-              </a:spcAft>
-              <a:defRPr sz="680" b="1">
-                <a:solidFill>
-                  <a:srgbClr val="4F6B00"/>
-                </a:solidFill>
-                <a:latin typeface="Inter"/>
-              </a:defRPr>
-            </a:pPr>
-            <a:r>
-              <a:rPr>
-                <a:latin typeface="Inter"/>
-              </a:rPr>
-              <a:t>Illustrative, Gradient Maintained — demo data, not the client's holdings or managers</a:t>
-            </a:r>
-          </a:p>
-        </p:txBody>
-      </p:sp>
-      <p:sp>
-        <p:nvSpPr>
-          <p:cNvPr id="5" name="TextBox 4"/>
-          <p:cNvSpPr txBox="1"/>
-          <p:nvPr/>
-        </p:nvSpPr>
-        <p:spPr>
-          <a:xfrm>
             <a:off x="640080" y="566928"/>
             <a:ext cx="10058400" cy="530352"/>
           </a:xfrm>
@@ -22597,7 +21674,7 @@
       </p:sp>
       <p:sp>
         <p:nvSpPr>
-          <p:cNvPr id="6" name="Rectangle 5"/>
+          <p:cNvPr id="5" name="Rectangle 4"/>
           <p:cNvSpPr/>
           <p:nvPr/>
         </p:nvSpPr>
@@ -22646,7 +21723,7 @@
       </p:sp>
       <p:sp>
         <p:nvSpPr>
-          <p:cNvPr id="7" name="Rectangle 6"/>
+          <p:cNvPr id="6" name="Rectangle 5"/>
           <p:cNvSpPr/>
           <p:nvPr/>
         </p:nvSpPr>
@@ -22695,7 +21772,7 @@
       </p:sp>
       <p:sp>
         <p:nvSpPr>
-          <p:cNvPr id="8" name="TextBox 7"/>
+          <p:cNvPr id="7" name="TextBox 6"/>
           <p:cNvSpPr txBox="1"/>
           <p:nvPr/>
         </p:nvSpPr>
@@ -22737,7 +21814,7 @@
       </p:sp>
       <p:sp>
         <p:nvSpPr>
-          <p:cNvPr id="9" name="TextBox 8"/>
+          <p:cNvPr id="8" name="TextBox 7"/>
           <p:cNvSpPr txBox="1"/>
           <p:nvPr/>
         </p:nvSpPr>
@@ -22779,7 +21856,7 @@
       </p:sp>
       <p:graphicFrame>
         <p:nvGraphicFramePr>
-          <p:cNvPr id="10" name="Table 9"/>
+          <p:cNvPr id="9" name="Table 8"/>
           <p:cNvGraphicFramePr>
             <a:graphicFrameLocks noGrp="1"/>
           </p:cNvGraphicFramePr>
@@ -23093,7 +22170,7 @@
                         <a:rPr>
                           <a:latin typeface="Inter"/>
                         </a:rPr>
-                        <a:t>● Watch</a:t>
+                        <a:t>● Near limit</a:t>
                       </a:r>
                     </a:p>
                   </a:txBody>
@@ -23257,7 +22334,7 @@
                         <a:rPr>
                           <a:latin typeface="Inter"/>
                         </a:rPr>
-                        <a:t>● not assessed</a:t>
+                        <a:t>● Not assessed</a:t>
                       </a:r>
                     </a:p>
                   </a:txBody>
@@ -23421,7 +22498,7 @@
                         <a:rPr>
                           <a:latin typeface="Inter"/>
                         </a:rPr>
-                        <a:t>● Partial</a:t>
+                        <a:t>● Partly available</a:t>
                       </a:r>
                     </a:p>
                   </a:txBody>
@@ -23585,7 +22662,7 @@
                         <a:rPr>
                           <a:latin typeface="Inter"/>
                         </a:rPr>
-                        <a:t>● Partial</a:t>
+                        <a:t>● Partly available</a:t>
                       </a:r>
                     </a:p>
                   </a:txBody>
@@ -23629,7 +22706,7 @@
       </p:graphicFrame>
       <p:sp>
         <p:nvSpPr>
-          <p:cNvPr id="11" name="TextBox 10"/>
+          <p:cNvPr id="10" name="TextBox 9"/>
           <p:cNvSpPr txBox="1"/>
           <p:nvPr/>
         </p:nvSpPr>
@@ -23671,7 +22748,7 @@
       </p:sp>
       <p:graphicFrame>
         <p:nvGraphicFramePr>
-          <p:cNvPr id="12" name="Table 11"/>
+          <p:cNvPr id="11" name="Table 10"/>
           <p:cNvGraphicFramePr>
             <a:graphicFrameLocks noGrp="1"/>
           </p:cNvGraphicFramePr>
@@ -24521,7 +23598,7 @@
       </p:graphicFrame>
       <p:sp>
         <p:nvSpPr>
-          <p:cNvPr id="13" name="TextBox 12"/>
+          <p:cNvPr id="12" name="TextBox 11"/>
           <p:cNvSpPr txBox="1"/>
           <p:nvPr/>
         </p:nvSpPr>
@@ -24563,7 +23640,7 @@
       </p:sp>
       <p:sp>
         <p:nvSpPr>
-          <p:cNvPr id="14" name="Rectangle 13"/>
+          <p:cNvPr id="13" name="Rectangle 12"/>
           <p:cNvSpPr/>
           <p:nvPr/>
         </p:nvSpPr>
@@ -24612,7 +23689,7 @@
       </p:sp>
       <p:sp>
         <p:nvSpPr>
-          <p:cNvPr id="15" name="TextBox 14"/>
+          <p:cNvPr id="14" name="TextBox 13"/>
           <p:cNvSpPr txBox="1"/>
           <p:nvPr/>
         </p:nvSpPr>
@@ -24654,7 +23731,7 @@
       </p:sp>
       <p:sp>
         <p:nvSpPr>
-          <p:cNvPr id="16" name="TextBox 15"/>
+          <p:cNvPr id="15" name="TextBox 14"/>
           <p:cNvSpPr txBox="1"/>
           <p:nvPr/>
         </p:nvSpPr>
@@ -24696,7 +23773,7 @@
       </p:sp>
       <p:sp>
         <p:nvSpPr>
-          <p:cNvPr id="17" name="TextBox 16"/>
+          <p:cNvPr id="16" name="TextBox 15"/>
           <p:cNvSpPr txBox="1"/>
           <p:nvPr/>
         </p:nvSpPr>
@@ -24812,7 +23889,7 @@
         <p:spPr>
           <a:xfrm>
             <a:off x="640080" y="329184"/>
-            <a:ext cx="5303520" cy="182880"/>
+            <a:ext cx="9875520" cy="182880"/>
           </a:xfrm>
           <a:prstGeom prst="rect">
             <a:avLst/>
@@ -24853,48 +23930,6 @@
         </p:nvSpPr>
         <p:spPr>
           <a:xfrm>
-            <a:off x="5897880" y="310896"/>
-            <a:ext cx="4800600" cy="256032"/>
-          </a:xfrm>
-          <a:prstGeom prst="rect">
-            <a:avLst/>
-          </a:prstGeom>
-          <a:noFill/>
-        </p:spPr>
-        <p:txBody>
-          <a:bodyPr wrap="none" lIns="9144" rIns="9144" tIns="9144" bIns="9144" anchor="t">
-            <a:spAutoFit/>
-          </a:bodyPr>
-          <a:lstStyle/>
-          <a:p>
-            <a:pPr algn="r">
-              <a:spcAft>
-                <a:spcPts val="0"/>
-              </a:spcAft>
-              <a:defRPr sz="680" b="1">
-                <a:solidFill>
-                  <a:srgbClr val="4F6B00"/>
-                </a:solidFill>
-                <a:latin typeface="Inter"/>
-              </a:defRPr>
-            </a:pPr>
-            <a:r>
-              <a:rPr>
-                <a:latin typeface="Inter"/>
-              </a:rPr>
-              <a:t>Illustrative, Gradient Maintained — demo data, not the client's holdings or managers</a:t>
-            </a:r>
-          </a:p>
-        </p:txBody>
-      </p:sp>
-      <p:sp>
-        <p:nvSpPr>
-          <p:cNvPr id="5" name="TextBox 4"/>
-          <p:cNvSpPr txBox="1"/>
-          <p:nvPr/>
-        </p:nvSpPr>
-        <p:spPr>
-          <a:xfrm>
             <a:off x="640080" y="566928"/>
             <a:ext cx="10058400" cy="530352"/>
           </a:xfrm>
@@ -24931,7 +23966,7 @@
       </p:sp>
       <p:sp>
         <p:nvSpPr>
-          <p:cNvPr id="6" name="Rectangle 5"/>
+          <p:cNvPr id="5" name="Rectangle 4"/>
           <p:cNvSpPr/>
           <p:nvPr/>
         </p:nvSpPr>
@@ -24980,7 +24015,7 @@
       </p:sp>
       <p:sp>
         <p:nvSpPr>
-          <p:cNvPr id="7" name="Rectangle 6"/>
+          <p:cNvPr id="6" name="Rectangle 5"/>
           <p:cNvSpPr/>
           <p:nvPr/>
         </p:nvSpPr>
@@ -25029,7 +24064,7 @@
       </p:sp>
       <p:sp>
         <p:nvSpPr>
-          <p:cNvPr id="8" name="TextBox 7"/>
+          <p:cNvPr id="7" name="TextBox 6"/>
           <p:cNvSpPr txBox="1"/>
           <p:nvPr/>
         </p:nvSpPr>
@@ -25071,7 +24106,7 @@
       </p:sp>
       <p:sp>
         <p:nvSpPr>
-          <p:cNvPr id="9" name="TextBox 8"/>
+          <p:cNvPr id="8" name="TextBox 7"/>
           <p:cNvSpPr txBox="1"/>
           <p:nvPr/>
         </p:nvSpPr>
@@ -25113,7 +24148,7 @@
       </p:sp>
       <p:graphicFrame>
         <p:nvGraphicFramePr>
-          <p:cNvPr id="10" name="Table 9"/>
+          <p:cNvPr id="9" name="Table 8"/>
           <p:cNvGraphicFramePr>
             <a:graphicFrameLocks noGrp="1"/>
           </p:cNvGraphicFramePr>
@@ -25553,7 +24588,7 @@
       </p:graphicFrame>
       <p:sp>
         <p:nvSpPr>
-          <p:cNvPr id="11" name="Rectangle 10"/>
+          <p:cNvPr id="10" name="Rectangle 9"/>
           <p:cNvSpPr/>
           <p:nvPr/>
         </p:nvSpPr>
@@ -25602,7 +24637,7 @@
       </p:sp>
       <p:sp>
         <p:nvSpPr>
-          <p:cNvPr id="12" name="TextBox 11"/>
+          <p:cNvPr id="11" name="TextBox 10"/>
           <p:cNvSpPr txBox="1"/>
           <p:nvPr/>
         </p:nvSpPr>
@@ -25644,7 +24679,7 @@
       </p:sp>
       <p:sp>
         <p:nvSpPr>
-          <p:cNvPr id="13" name="TextBox 12"/>
+          <p:cNvPr id="12" name="TextBox 11"/>
           <p:cNvSpPr txBox="1"/>
           <p:nvPr/>
         </p:nvSpPr>
@@ -25686,7 +24721,7 @@
       </p:sp>
       <p:sp>
         <p:nvSpPr>
-          <p:cNvPr id="14" name="TextBox 13"/>
+          <p:cNvPr id="13" name="TextBox 12"/>
           <p:cNvSpPr txBox="1"/>
           <p:nvPr/>
         </p:nvSpPr>
@@ -25802,7 +24837,7 @@
         <p:spPr>
           <a:xfrm>
             <a:off x="640080" y="329184"/>
-            <a:ext cx="5303520" cy="182880"/>
+            <a:ext cx="9875520" cy="182880"/>
           </a:xfrm>
           <a:prstGeom prst="rect">
             <a:avLst/>
@@ -25843,48 +24878,6 @@
         </p:nvSpPr>
         <p:spPr>
           <a:xfrm>
-            <a:off x="5897880" y="310896"/>
-            <a:ext cx="4800600" cy="256032"/>
-          </a:xfrm>
-          <a:prstGeom prst="rect">
-            <a:avLst/>
-          </a:prstGeom>
-          <a:noFill/>
-        </p:spPr>
-        <p:txBody>
-          <a:bodyPr wrap="none" lIns="9144" rIns="9144" tIns="9144" bIns="9144" anchor="t">
-            <a:spAutoFit/>
-          </a:bodyPr>
-          <a:lstStyle/>
-          <a:p>
-            <a:pPr algn="r">
-              <a:spcAft>
-                <a:spcPts val="0"/>
-              </a:spcAft>
-              <a:defRPr sz="680" b="1">
-                <a:solidFill>
-                  <a:srgbClr val="4F6B00"/>
-                </a:solidFill>
-                <a:latin typeface="Inter"/>
-              </a:defRPr>
-            </a:pPr>
-            <a:r>
-              <a:rPr>
-                <a:latin typeface="Inter"/>
-              </a:rPr>
-              <a:t>Illustrative, Gradient Maintained — demo data, not the client's holdings or managers</a:t>
-            </a:r>
-          </a:p>
-        </p:txBody>
-      </p:sp>
-      <p:sp>
-        <p:nvSpPr>
-          <p:cNvPr id="5" name="TextBox 4"/>
-          <p:cNvSpPr txBox="1"/>
-          <p:nvPr/>
-        </p:nvSpPr>
-        <p:spPr>
-          <a:xfrm>
             <a:off x="640080" y="566928"/>
             <a:ext cx="10058400" cy="530352"/>
           </a:xfrm>
@@ -25921,7 +24914,7 @@
       </p:sp>
       <p:sp>
         <p:nvSpPr>
-          <p:cNvPr id="6" name="Rectangle 5"/>
+          <p:cNvPr id="5" name="Rectangle 4"/>
           <p:cNvSpPr/>
           <p:nvPr/>
         </p:nvSpPr>
@@ -25970,7 +24963,7 @@
       </p:sp>
       <p:sp>
         <p:nvSpPr>
-          <p:cNvPr id="7" name="Rectangle 6"/>
+          <p:cNvPr id="6" name="Rectangle 5"/>
           <p:cNvSpPr/>
           <p:nvPr/>
         </p:nvSpPr>
@@ -26019,7 +25012,7 @@
       </p:sp>
       <p:sp>
         <p:nvSpPr>
-          <p:cNvPr id="8" name="TextBox 7"/>
+          <p:cNvPr id="7" name="TextBox 6"/>
           <p:cNvSpPr txBox="1"/>
           <p:nvPr/>
         </p:nvSpPr>
@@ -26061,7 +25054,7 @@
       </p:sp>
       <p:sp>
         <p:nvSpPr>
-          <p:cNvPr id="9" name="TextBox 8"/>
+          <p:cNvPr id="8" name="TextBox 7"/>
           <p:cNvSpPr txBox="1"/>
           <p:nvPr/>
         </p:nvSpPr>
@@ -26103,7 +25096,7 @@
       </p:sp>
       <p:graphicFrame>
         <p:nvGraphicFramePr>
-          <p:cNvPr id="10" name="Table 9"/>
+          <p:cNvPr id="9" name="Table 8"/>
           <p:cNvGraphicFramePr>
             <a:graphicFrameLocks noGrp="1"/>
           </p:cNvGraphicFramePr>
@@ -26953,7 +25946,7 @@
       </p:graphicFrame>
       <p:sp>
         <p:nvSpPr>
-          <p:cNvPr id="11" name="TextBox 10"/>
+          <p:cNvPr id="10" name="TextBox 9"/>
           <p:cNvSpPr txBox="1"/>
           <p:nvPr/>
         </p:nvSpPr>
@@ -26995,7 +25988,7 @@
       </p:sp>
       <p:graphicFrame>
         <p:nvGraphicFramePr>
-          <p:cNvPr id="12" name="Table 11"/>
+          <p:cNvPr id="11" name="Table 10"/>
           <p:cNvGraphicFramePr>
             <a:graphicFrameLocks noGrp="1"/>
           </p:cNvGraphicFramePr>
@@ -27353,7 +26346,7 @@
       </p:graphicFrame>
       <p:sp>
         <p:nvSpPr>
-          <p:cNvPr id="13" name="TextBox 12"/>
+          <p:cNvPr id="12" name="TextBox 11"/>
           <p:cNvSpPr txBox="1"/>
           <p:nvPr/>
         </p:nvSpPr>
@@ -27433,7 +26426,7 @@
       </p:sp>
       <p:sp>
         <p:nvSpPr>
-          <p:cNvPr id="14" name="Rectangle 13"/>
+          <p:cNvPr id="13" name="Rectangle 12"/>
           <p:cNvSpPr/>
           <p:nvPr/>
         </p:nvSpPr>
@@ -27482,7 +26475,7 @@
       </p:sp>
       <p:sp>
         <p:nvSpPr>
-          <p:cNvPr id="15" name="TextBox 14"/>
+          <p:cNvPr id="14" name="TextBox 13"/>
           <p:cNvSpPr txBox="1"/>
           <p:nvPr/>
         </p:nvSpPr>
@@ -27524,7 +26517,7 @@
       </p:sp>
       <p:sp>
         <p:nvSpPr>
-          <p:cNvPr id="16" name="TextBox 15"/>
+          <p:cNvPr id="15" name="TextBox 14"/>
           <p:cNvSpPr txBox="1"/>
           <p:nvPr/>
         </p:nvSpPr>
@@ -27566,7 +26559,7 @@
       </p:sp>
       <p:sp>
         <p:nvSpPr>
-          <p:cNvPr id="17" name="TextBox 16"/>
+          <p:cNvPr id="16" name="TextBox 15"/>
           <p:cNvSpPr txBox="1"/>
           <p:nvPr/>
         </p:nvSpPr>
@@ -27682,7 +26675,7 @@
         <p:spPr>
           <a:xfrm>
             <a:off x="640080" y="329184"/>
-            <a:ext cx="5303520" cy="182880"/>
+            <a:ext cx="9875520" cy="182880"/>
           </a:xfrm>
           <a:prstGeom prst="rect">
             <a:avLst/>
@@ -27723,48 +26716,6 @@
         </p:nvSpPr>
         <p:spPr>
           <a:xfrm>
-            <a:off x="5897880" y="310896"/>
-            <a:ext cx="4800600" cy="256032"/>
-          </a:xfrm>
-          <a:prstGeom prst="rect">
-            <a:avLst/>
-          </a:prstGeom>
-          <a:noFill/>
-        </p:spPr>
-        <p:txBody>
-          <a:bodyPr wrap="none" lIns="9144" rIns="9144" tIns="9144" bIns="9144" anchor="t">
-            <a:spAutoFit/>
-          </a:bodyPr>
-          <a:lstStyle/>
-          <a:p>
-            <a:pPr algn="r">
-              <a:spcAft>
-                <a:spcPts val="0"/>
-              </a:spcAft>
-              <a:defRPr sz="680" b="1">
-                <a:solidFill>
-                  <a:srgbClr val="4F6B00"/>
-                </a:solidFill>
-                <a:latin typeface="Inter"/>
-              </a:defRPr>
-            </a:pPr>
-            <a:r>
-              <a:rPr>
-                <a:latin typeface="Inter"/>
-              </a:rPr>
-              <a:t>Illustrative, Gradient Maintained — demo data, not the client's holdings or managers</a:t>
-            </a:r>
-          </a:p>
-        </p:txBody>
-      </p:sp>
-      <p:sp>
-        <p:nvSpPr>
-          <p:cNvPr id="5" name="TextBox 4"/>
-          <p:cNvSpPr txBox="1"/>
-          <p:nvPr/>
-        </p:nvSpPr>
-        <p:spPr>
-          <a:xfrm>
             <a:off x="640080" y="566928"/>
             <a:ext cx="10058400" cy="530352"/>
           </a:xfrm>
@@ -27801,7 +26752,7 @@
       </p:sp>
       <p:sp>
         <p:nvSpPr>
-          <p:cNvPr id="6" name="Rectangle 5"/>
+          <p:cNvPr id="5" name="Rectangle 4"/>
           <p:cNvSpPr/>
           <p:nvPr/>
         </p:nvSpPr>
@@ -27850,7 +26801,7 @@
       </p:sp>
       <p:sp>
         <p:nvSpPr>
-          <p:cNvPr id="7" name="Rectangle 6"/>
+          <p:cNvPr id="6" name="Rectangle 5"/>
           <p:cNvSpPr/>
           <p:nvPr/>
         </p:nvSpPr>
@@ -27899,7 +26850,7 @@
       </p:sp>
       <p:sp>
         <p:nvSpPr>
-          <p:cNvPr id="8" name="TextBox 7"/>
+          <p:cNvPr id="7" name="TextBox 6"/>
           <p:cNvSpPr txBox="1"/>
           <p:nvPr/>
         </p:nvSpPr>
@@ -27941,14 +26892,14 @@
       </p:sp>
       <p:sp>
         <p:nvSpPr>
-          <p:cNvPr id="9" name="Rectangle 8"/>
+          <p:cNvPr id="8" name="Rectangle 7"/>
           <p:cNvSpPr/>
           <p:nvPr/>
         </p:nvSpPr>
         <p:spPr>
           <a:xfrm>
             <a:off x="640080" y="1325880"/>
-            <a:ext cx="10908792" cy="790104"/>
+            <a:ext cx="10908792" cy="838997"/>
           </a:xfrm>
           <a:prstGeom prst="rect">
             <a:avLst/>
@@ -27990,14 +26941,14 @@
       </p:sp>
       <p:sp>
         <p:nvSpPr>
-          <p:cNvPr id="10" name="Rectangle 9"/>
+          <p:cNvPr id="9" name="Rectangle 8"/>
           <p:cNvSpPr/>
           <p:nvPr/>
         </p:nvSpPr>
         <p:spPr>
           <a:xfrm>
             <a:off x="640080" y="1325880"/>
-            <a:ext cx="54864" cy="790104"/>
+            <a:ext cx="54864" cy="838997"/>
           </a:xfrm>
           <a:prstGeom prst="rect">
             <a:avLst/>
@@ -28039,7 +26990,7 @@
       </p:sp>
       <p:sp>
         <p:nvSpPr>
-          <p:cNvPr id="11" name="TextBox 10"/>
+          <p:cNvPr id="10" name="TextBox 9"/>
           <p:cNvSpPr txBox="1"/>
           <p:nvPr/>
         </p:nvSpPr>
@@ -28081,14 +27032,14 @@
       </p:sp>
       <p:sp>
         <p:nvSpPr>
-          <p:cNvPr id="12" name="TextBox 11"/>
+          <p:cNvPr id="11" name="TextBox 10"/>
           <p:cNvSpPr txBox="1"/>
           <p:nvPr/>
         </p:nvSpPr>
         <p:spPr>
           <a:xfrm>
             <a:off x="804671" y="1719072"/>
-            <a:ext cx="10616184" cy="305472"/>
+            <a:ext cx="10616184" cy="354365"/>
           </a:xfrm>
           <a:prstGeom prst="rect">
             <a:avLst/>
@@ -28123,13 +27074,13 @@
       </p:sp>
       <p:sp>
         <p:nvSpPr>
-          <p:cNvPr id="13" name="TextBox 12"/>
+          <p:cNvPr id="12" name="TextBox 11"/>
           <p:cNvSpPr txBox="1"/>
           <p:nvPr/>
         </p:nvSpPr>
         <p:spPr>
           <a:xfrm>
-            <a:off x="640080" y="2225712"/>
+            <a:off x="640080" y="2274605"/>
             <a:ext cx="10908792" cy="201168"/>
           </a:xfrm>
           <a:prstGeom prst="rect">
@@ -28165,15 +27116,15 @@
       </p:sp>
       <p:graphicFrame>
         <p:nvGraphicFramePr>
-          <p:cNvPr id="14" name="Table 13"/>
+          <p:cNvPr id="13" name="Table 12"/>
           <p:cNvGraphicFramePr>
             <a:graphicFrameLocks noGrp="1"/>
           </p:cNvGraphicFramePr>
           <p:nvPr/>
         </p:nvGraphicFramePr>
         <p:xfrm>
-          <a:off x="640080" y="2500032"/>
-          <a:ext cx="10908792" cy="1276260"/>
+          <a:off x="640080" y="2548925"/>
+          <a:ext cx="10908792" cy="1372212"/>
         </p:xfrm>
         <a:graphic>
           <a:graphicData uri="http://schemas.openxmlformats.org/drawingml/2006/table">
@@ -28187,7 +27138,7 @@
                 <a:gridCol w="2965704"/>
                 <a:gridCol w="2965704"/>
               </a:tblGrid>
-              <a:tr h="319065">
+              <a:tr h="343053">
                 <a:tc>
                   <a:txBody>
                     <a:bodyPr/>
@@ -28297,7 +27248,7 @@
                   </a:tcPr>
                 </a:tc>
               </a:tr>
-              <a:tr h="319065">
+              <a:tr h="343053">
                 <a:tc>
                   <a:txBody>
                     <a:bodyPr/>
@@ -28407,7 +27358,7 @@
                   </a:tcPr>
                 </a:tc>
               </a:tr>
-              <a:tr h="319065">
+              <a:tr h="343053">
                 <a:tc>
                   <a:txBody>
                     <a:bodyPr/>
@@ -28517,7 +27468,7 @@
                   </a:tcPr>
                 </a:tc>
               </a:tr>
-              <a:tr h="319065">
+              <a:tr h="343053">
                 <a:tc>
                   <a:txBody>
                     <a:bodyPr/>
@@ -28633,14 +27584,14 @@
       </p:graphicFrame>
       <p:sp>
         <p:nvSpPr>
-          <p:cNvPr id="15" name="Rectangle 14"/>
+          <p:cNvPr id="14" name="Rectangle 13"/>
           <p:cNvSpPr/>
           <p:nvPr/>
         </p:nvSpPr>
         <p:spPr>
           <a:xfrm>
-            <a:off x="640080" y="3886021"/>
-            <a:ext cx="10908792" cy="790104"/>
+            <a:off x="640080" y="4030866"/>
+            <a:ext cx="10908792" cy="838997"/>
           </a:xfrm>
           <a:prstGeom prst="rect">
             <a:avLst/>
@@ -28682,14 +27633,14 @@
       </p:sp>
       <p:sp>
         <p:nvSpPr>
-          <p:cNvPr id="16" name="Rectangle 15"/>
+          <p:cNvPr id="15" name="Rectangle 14"/>
           <p:cNvSpPr/>
           <p:nvPr/>
         </p:nvSpPr>
         <p:spPr>
           <a:xfrm>
-            <a:off x="640080" y="3886021"/>
-            <a:ext cx="54864" cy="790104"/>
+            <a:off x="640080" y="4030866"/>
+            <a:ext cx="54864" cy="838997"/>
           </a:xfrm>
           <a:prstGeom prst="rect">
             <a:avLst/>
@@ -28731,13 +27682,13 @@
       </p:sp>
       <p:sp>
         <p:nvSpPr>
-          <p:cNvPr id="17" name="TextBox 16"/>
+          <p:cNvPr id="16" name="TextBox 15"/>
           <p:cNvSpPr txBox="1"/>
           <p:nvPr/>
         </p:nvSpPr>
         <p:spPr>
           <a:xfrm>
-            <a:off x="804671" y="3995749"/>
+            <a:off x="804671" y="4140594"/>
             <a:ext cx="10616184" cy="228600"/>
           </a:xfrm>
           <a:prstGeom prst="rect">
@@ -28773,14 +27724,14 @@
       </p:sp>
       <p:sp>
         <p:nvSpPr>
-          <p:cNvPr id="18" name="TextBox 17"/>
+          <p:cNvPr id="17" name="TextBox 16"/>
           <p:cNvSpPr txBox="1"/>
           <p:nvPr/>
         </p:nvSpPr>
         <p:spPr>
           <a:xfrm>
-            <a:off x="804671" y="4279213"/>
-            <a:ext cx="10616184" cy="305472"/>
+            <a:off x="804671" y="4424058"/>
+            <a:ext cx="10616184" cy="354365"/>
           </a:xfrm>
           <a:prstGeom prst="rect">
             <a:avLst/>
@@ -28815,14 +27766,14 @@
       </p:sp>
       <p:sp>
         <p:nvSpPr>
-          <p:cNvPr id="19" name="Rectangle 18"/>
+          <p:cNvPr id="18" name="Rectangle 17"/>
           <p:cNvSpPr/>
           <p:nvPr/>
         </p:nvSpPr>
         <p:spPr>
           <a:xfrm>
-            <a:off x="640080" y="4785854"/>
-            <a:ext cx="10908792" cy="1432065"/>
+            <a:off x="640080" y="4979591"/>
+            <a:ext cx="10908792" cy="1238328"/>
           </a:xfrm>
           <a:prstGeom prst="rect">
             <a:avLst/>
@@ -28864,14 +27815,14 @@
       </p:sp>
       <p:sp>
         <p:nvSpPr>
-          <p:cNvPr id="20" name="Rectangle 19"/>
+          <p:cNvPr id="19" name="Rectangle 18"/>
           <p:cNvSpPr/>
           <p:nvPr/>
         </p:nvSpPr>
         <p:spPr>
           <a:xfrm>
-            <a:off x="640080" y="4785854"/>
-            <a:ext cx="54864" cy="1432065"/>
+            <a:off x="640080" y="4979591"/>
+            <a:ext cx="54864" cy="1238328"/>
           </a:xfrm>
           <a:prstGeom prst="rect">
             <a:avLst/>
@@ -28913,13 +27864,13 @@
       </p:sp>
       <p:sp>
         <p:nvSpPr>
-          <p:cNvPr id="21" name="TextBox 20"/>
+          <p:cNvPr id="20" name="TextBox 19"/>
           <p:cNvSpPr txBox="1"/>
           <p:nvPr/>
         </p:nvSpPr>
         <p:spPr>
           <a:xfrm>
-            <a:off x="804671" y="4895582"/>
+            <a:off x="804671" y="5089319"/>
             <a:ext cx="10616184" cy="228600"/>
           </a:xfrm>
           <a:prstGeom prst="rect">
@@ -28948,21 +27899,21 @@
               <a:rPr>
                 <a:latin typeface="Inter"/>
               </a:rPr>
-              <a:t>Key judgment — headline signal</a:t>
+              <a:t>Key judgment — Pacing</a:t>
             </a:r>
           </a:p>
         </p:txBody>
       </p:sp>
       <p:sp>
         <p:nvSpPr>
-          <p:cNvPr id="22" name="TextBox 21"/>
+          <p:cNvPr id="21" name="TextBox 20"/>
           <p:cNvSpPr txBox="1"/>
           <p:nvPr/>
         </p:nvSpPr>
         <p:spPr>
           <a:xfrm>
-            <a:off x="804671" y="5179046"/>
-            <a:ext cx="10616184" cy="947433"/>
+            <a:off x="804671" y="5372783"/>
+            <a:ext cx="10616184" cy="753696"/>
           </a:xfrm>
           <a:prstGeom prst="rect">
             <a:avLst/>
@@ -28990,14 +27941,14 @@
               <a:rPr>
                 <a:latin typeface="Inter"/>
               </a:rPr>
-              <a:t>Observation: The sample report carries a pacing-and-concentration signal above the clear threshold [S1]. Why it matters: This signal focuses oversight on the report's most decision-relevant condition. Uncertainty: Evidence coverage may exclude newer or more detailed observations. What would change the view: A governed refresh showing a different signal or breached threshold.</a:t>
+              <a:t>Observation: Commitment pacing and manager concentration both need monitoring [S1]. Why it matters: The $45.0M first-year ceiling keeps the program inside its liquidity limits. Uncertainty: Capital calls depend on manager deployment speed. What would change the view: Calls running ahead of the pacing plan.</a:t>
             </a:r>
           </a:p>
         </p:txBody>
       </p:sp>
       <p:sp>
         <p:nvSpPr>
-          <p:cNvPr id="23" name="Rectangle 22"/>
+          <p:cNvPr id="22" name="Rectangle 21"/>
           <p:cNvSpPr/>
           <p:nvPr/>
         </p:nvSpPr>
@@ -29046,7 +27997,7 @@
       </p:sp>
       <p:sp>
         <p:nvSpPr>
-          <p:cNvPr id="24" name="TextBox 23"/>
+          <p:cNvPr id="23" name="TextBox 22"/>
           <p:cNvSpPr txBox="1"/>
           <p:nvPr/>
         </p:nvSpPr>
@@ -29088,7 +28039,7 @@
       </p:sp>
       <p:sp>
         <p:nvSpPr>
-          <p:cNvPr id="25" name="TextBox 24"/>
+          <p:cNvPr id="24" name="TextBox 23"/>
           <p:cNvSpPr txBox="1"/>
           <p:nvPr/>
         </p:nvSpPr>
@@ -29130,7 +28081,7 @@
       </p:sp>
       <p:sp>
         <p:nvSpPr>
-          <p:cNvPr id="26" name="TextBox 25"/>
+          <p:cNvPr id="25" name="TextBox 24"/>
           <p:cNvSpPr txBox="1"/>
           <p:nvPr/>
         </p:nvSpPr>
@@ -29246,7 +28197,7 @@
         <p:spPr>
           <a:xfrm>
             <a:off x="640080" y="329184"/>
-            <a:ext cx="5303520" cy="182880"/>
+            <a:ext cx="9875520" cy="182880"/>
           </a:xfrm>
           <a:prstGeom prst="rect">
             <a:avLst/>
@@ -29287,48 +28238,6 @@
         </p:nvSpPr>
         <p:spPr>
           <a:xfrm>
-            <a:off x="5897880" y="310896"/>
-            <a:ext cx="4800600" cy="256032"/>
-          </a:xfrm>
-          <a:prstGeom prst="rect">
-            <a:avLst/>
-          </a:prstGeom>
-          <a:noFill/>
-        </p:spPr>
-        <p:txBody>
-          <a:bodyPr wrap="none" lIns="9144" rIns="9144" tIns="9144" bIns="9144" anchor="t">
-            <a:spAutoFit/>
-          </a:bodyPr>
-          <a:lstStyle/>
-          <a:p>
-            <a:pPr algn="r">
-              <a:spcAft>
-                <a:spcPts val="0"/>
-              </a:spcAft>
-              <a:defRPr sz="680" b="1">
-                <a:solidFill>
-                  <a:srgbClr val="4F6B00"/>
-                </a:solidFill>
-                <a:latin typeface="Inter"/>
-              </a:defRPr>
-            </a:pPr>
-            <a:r>
-              <a:rPr>
-                <a:latin typeface="Inter"/>
-              </a:rPr>
-              <a:t>Illustrative, Gradient Maintained — demo data, not the client's holdings or managers</a:t>
-            </a:r>
-          </a:p>
-        </p:txBody>
-      </p:sp>
-      <p:sp>
-        <p:nvSpPr>
-          <p:cNvPr id="5" name="TextBox 4"/>
-          <p:cNvSpPr txBox="1"/>
-          <p:nvPr/>
-        </p:nvSpPr>
-        <p:spPr>
-          <a:xfrm>
             <a:off x="640080" y="566928"/>
             <a:ext cx="10058400" cy="530352"/>
           </a:xfrm>
@@ -29365,7 +28274,7 @@
       </p:sp>
       <p:sp>
         <p:nvSpPr>
-          <p:cNvPr id="6" name="Rectangle 5"/>
+          <p:cNvPr id="5" name="Rectangle 4"/>
           <p:cNvSpPr/>
           <p:nvPr/>
         </p:nvSpPr>
@@ -29414,7 +28323,7 @@
       </p:sp>
       <p:sp>
         <p:nvSpPr>
-          <p:cNvPr id="7" name="Rectangle 6"/>
+          <p:cNvPr id="6" name="Rectangle 5"/>
           <p:cNvSpPr/>
           <p:nvPr/>
         </p:nvSpPr>
@@ -29463,7 +28372,7 @@
       </p:sp>
       <p:sp>
         <p:nvSpPr>
-          <p:cNvPr id="8" name="TextBox 7"/>
+          <p:cNvPr id="7" name="TextBox 6"/>
           <p:cNvSpPr txBox="1"/>
           <p:nvPr/>
         </p:nvSpPr>
@@ -29505,7 +28414,7 @@
       </p:sp>
       <p:sp>
         <p:nvSpPr>
-          <p:cNvPr id="9" name="TextBox 8"/>
+          <p:cNvPr id="8" name="TextBox 7"/>
           <p:cNvSpPr txBox="1"/>
           <p:nvPr/>
         </p:nvSpPr>
@@ -29547,7 +28456,7 @@
       </p:sp>
       <p:graphicFrame>
         <p:nvGraphicFramePr>
-          <p:cNvPr id="10" name="Table 9"/>
+          <p:cNvPr id="9" name="Table 8"/>
           <p:cNvGraphicFramePr>
             <a:graphicFrameLocks noGrp="1"/>
           </p:cNvGraphicFramePr>
@@ -30124,7 +29033,7 @@
       </p:graphicFrame>
       <p:sp>
         <p:nvSpPr>
-          <p:cNvPr id="11" name="TextBox 10"/>
+          <p:cNvPr id="10" name="TextBox 9"/>
           <p:cNvSpPr txBox="1"/>
           <p:nvPr/>
         </p:nvSpPr>
@@ -30166,7 +29075,7 @@
       </p:sp>
       <p:graphicFrame>
         <p:nvGraphicFramePr>
-          <p:cNvPr id="12" name="Table 11"/>
+          <p:cNvPr id="11" name="Table 10"/>
           <p:cNvGraphicFramePr>
             <a:graphicFrameLocks noGrp="1"/>
           </p:cNvGraphicFramePr>
@@ -30743,7 +29652,7 @@
       </p:graphicFrame>
       <p:sp>
         <p:nvSpPr>
-          <p:cNvPr id="13" name="Rectangle 12"/>
+          <p:cNvPr id="12" name="Rectangle 11"/>
           <p:cNvSpPr/>
           <p:nvPr/>
         </p:nvSpPr>
@@ -30792,7 +29701,7 @@
       </p:sp>
       <p:sp>
         <p:nvSpPr>
-          <p:cNvPr id="14" name="TextBox 13"/>
+          <p:cNvPr id="13" name="TextBox 12"/>
           <p:cNvSpPr txBox="1"/>
           <p:nvPr/>
         </p:nvSpPr>
@@ -30834,7 +29743,7 @@
       </p:sp>
       <p:sp>
         <p:nvSpPr>
-          <p:cNvPr id="15" name="TextBox 14"/>
+          <p:cNvPr id="14" name="TextBox 13"/>
           <p:cNvSpPr txBox="1"/>
           <p:nvPr/>
         </p:nvSpPr>
@@ -30876,7 +29785,7 @@
       </p:sp>
       <p:sp>
         <p:nvSpPr>
-          <p:cNvPr id="16" name="TextBox 15"/>
+          <p:cNvPr id="15" name="TextBox 14"/>
           <p:cNvSpPr txBox="1"/>
           <p:nvPr/>
         </p:nvSpPr>
@@ -30991,48 +29900,6 @@
         </p:nvSpPr>
         <p:spPr>
           <a:xfrm>
-            <a:off x="5897880" y="310896"/>
-            <a:ext cx="4800600" cy="256032"/>
-          </a:xfrm>
-          <a:prstGeom prst="rect">
-            <a:avLst/>
-          </a:prstGeom>
-          <a:noFill/>
-        </p:spPr>
-        <p:txBody>
-          <a:bodyPr wrap="none" lIns="9144" rIns="9144" tIns="9144" bIns="9144" anchor="t">
-            <a:spAutoFit/>
-          </a:bodyPr>
-          <a:lstStyle/>
-          <a:p>
-            <a:pPr algn="r">
-              <a:spcAft>
-                <a:spcPts val="0"/>
-              </a:spcAft>
-              <a:defRPr sz="680" b="1">
-                <a:solidFill>
-                  <a:srgbClr val="4F6B00"/>
-                </a:solidFill>
-                <a:latin typeface="Inter"/>
-              </a:defRPr>
-            </a:pPr>
-            <a:r>
-              <a:rPr>
-                <a:latin typeface="Inter"/>
-              </a:rPr>
-              <a:t>Illustrative, Gradient Maintained — demo data, not the client's holdings or managers</a:t>
-            </a:r>
-          </a:p>
-        </p:txBody>
-      </p:sp>
-      <p:sp>
-        <p:nvSpPr>
-          <p:cNvPr id="4" name="TextBox 3"/>
-          <p:cNvSpPr txBox="1"/>
-          <p:nvPr/>
-        </p:nvSpPr>
-        <p:spPr>
-          <a:xfrm>
             <a:off x="640080" y="566928"/>
             <a:ext cx="10058400" cy="530352"/>
           </a:xfrm>
@@ -31069,7 +29936,7 @@
       </p:sp>
       <p:sp>
         <p:nvSpPr>
-          <p:cNvPr id="5" name="Rectangle 4"/>
+          <p:cNvPr id="4" name="Rectangle 3"/>
           <p:cNvSpPr/>
           <p:nvPr/>
         </p:nvSpPr>
@@ -31118,7 +29985,7 @@
       </p:sp>
       <p:sp>
         <p:nvSpPr>
-          <p:cNvPr id="6" name="Rectangle 5"/>
+          <p:cNvPr id="5" name="Rectangle 4"/>
           <p:cNvSpPr/>
           <p:nvPr/>
         </p:nvSpPr>
@@ -31167,7 +30034,7 @@
       </p:sp>
       <p:sp>
         <p:nvSpPr>
-          <p:cNvPr id="7" name="TextBox 6"/>
+          <p:cNvPr id="6" name="TextBox 5"/>
           <p:cNvSpPr txBox="1"/>
           <p:nvPr/>
         </p:nvSpPr>
@@ -31209,7 +30076,7 @@
       </p:sp>
       <p:graphicFrame>
         <p:nvGraphicFramePr>
-          <p:cNvPr id="8" name="Table 7"/>
+          <p:cNvPr id="7" name="Table 6"/>
           <p:cNvGraphicFramePr>
             <a:graphicFrameLocks noGrp="1"/>
           </p:cNvGraphicFramePr>
@@ -31358,7 +30225,7 @@
                         <a:rPr>
                           <a:latin typeface="Inter"/>
                         </a:rPr>
-                        <a:t>● available</a:t>
+                        <a:t>● Available</a:t>
                       </a:r>
                     </a:p>
                   </a:txBody>
@@ -31441,7 +30308,7 @@
                         <a:rPr>
                           <a:latin typeface="Inter"/>
                         </a:rPr>
-                        <a:t>● available</a:t>
+                        <a:t>● Available</a:t>
                       </a:r>
                     </a:p>
                   </a:txBody>
@@ -31524,7 +30391,7 @@
                         <a:rPr>
                           <a:latin typeface="Inter"/>
                         </a:rPr>
-                        <a:t>● available</a:t>
+                        <a:t>● Available</a:t>
                       </a:r>
                     </a:p>
                   </a:txBody>
@@ -31607,7 +30474,7 @@
                         <a:rPr>
                           <a:latin typeface="Inter"/>
                         </a:rPr>
-                        <a:t>● degraded</a:t>
+                        <a:t>● Incomplete</a:t>
                       </a:r>
                     </a:p>
                   </a:txBody>
@@ -31634,7 +30501,7 @@
                         <a:rPr>
                           <a:latin typeface="Inter"/>
                         </a:rPr>
-                        <a:t>Partial — 2 of 3 holdings assessed; one unknown grain; Draft — July 22, 2026 [S9]</a:t>
+                        <a:t>2 of 3 holdings assessed; one unknown grain; Draft — July 22, 2026 [S9]</a:t>
                       </a:r>
                     </a:p>
                   </a:txBody>
@@ -31690,7 +30557,7 @@
                         <a:rPr>
                           <a:latin typeface="Inter"/>
                         </a:rPr>
-                        <a:t>● available</a:t>
+                        <a:t>● Available</a:t>
                       </a:r>
                     </a:p>
                   </a:txBody>
@@ -31773,7 +30640,7 @@
                         <a:rPr>
                           <a:latin typeface="Inter"/>
                         </a:rPr>
-                        <a:t>● available</a:t>
+                        <a:t>● Available</a:t>
                       </a:r>
                     </a:p>
                   </a:txBody>
@@ -31856,7 +30723,7 @@
                         <a:rPr>
                           <a:latin typeface="Inter"/>
                         </a:rPr>
-                        <a:t>● degraded</a:t>
+                        <a:t>● Incomplete</a:t>
                       </a:r>
                     </a:p>
                   </a:txBody>
@@ -31939,7 +30806,7 @@
                         <a:rPr>
                           <a:latin typeface="Inter"/>
                         </a:rPr>
-                        <a:t>● degraded</a:t>
+                        <a:t>● Incomplete</a:t>
                       </a:r>
                     </a:p>
                   </a:txBody>
@@ -32022,7 +30889,7 @@
                         <a:rPr>
                           <a:latin typeface="Inter"/>
                         </a:rPr>
-                        <a:t>● unavailable</a:t>
+                        <a:t>● Not available</a:t>
                       </a:r>
                     </a:p>
                   </a:txBody>
@@ -32105,7 +30972,7 @@
                         <a:rPr>
                           <a:latin typeface="Inter"/>
                         </a:rPr>
-                        <a:t>● unavailable</a:t>
+                        <a:t>● Not available</a:t>
                       </a:r>
                     </a:p>
                   </a:txBody>
@@ -32188,7 +31055,7 @@
                         <a:rPr>
                           <a:latin typeface="Inter"/>
                         </a:rPr>
-                        <a:t>● unavailable</a:t>
+                        <a:t>● Not available</a:t>
                       </a:r>
                     </a:p>
                   </a:txBody>
@@ -32271,7 +31138,7 @@
                         <a:rPr>
                           <a:latin typeface="Inter"/>
                         </a:rPr>
-                        <a:t>● unavailable</a:t>
+                        <a:t>● Not available</a:t>
                       </a:r>
                     </a:p>
                   </a:txBody>
@@ -32354,7 +31221,7 @@
                         <a:rPr>
                           <a:latin typeface="Inter"/>
                         </a:rPr>
-                        <a:t>● unavailable</a:t>
+                        <a:t>● Not available</a:t>
                       </a:r>
                     </a:p>
                   </a:txBody>
@@ -32398,7 +31265,7 @@
       </p:graphicFrame>
       <p:sp>
         <p:nvSpPr>
-          <p:cNvPr id="9" name="Rectangle 8"/>
+          <p:cNvPr id="8" name="Rectangle 7"/>
           <p:cNvSpPr/>
           <p:nvPr/>
         </p:nvSpPr>
@@ -32447,7 +31314,7 @@
       </p:sp>
       <p:sp>
         <p:nvSpPr>
-          <p:cNvPr id="10" name="TextBox 9"/>
+          <p:cNvPr id="9" name="TextBox 8"/>
           <p:cNvSpPr txBox="1"/>
           <p:nvPr/>
         </p:nvSpPr>
@@ -32489,7 +31356,7 @@
       </p:sp>
       <p:sp>
         <p:nvSpPr>
-          <p:cNvPr id="11" name="TextBox 10"/>
+          <p:cNvPr id="10" name="TextBox 9"/>
           <p:cNvSpPr txBox="1"/>
           <p:nvPr/>
         </p:nvSpPr>
@@ -32531,7 +31398,7 @@
       </p:sp>
       <p:sp>
         <p:nvSpPr>
-          <p:cNvPr id="12" name="TextBox 11"/>
+          <p:cNvPr id="11" name="TextBox 10"/>
           <p:cNvSpPr txBox="1"/>
           <p:nvPr/>
         </p:nvSpPr>
@@ -32646,48 +31513,6 @@
         </p:nvSpPr>
         <p:spPr>
           <a:xfrm>
-            <a:off x="5897880" y="310896"/>
-            <a:ext cx="4800600" cy="256032"/>
-          </a:xfrm>
-          <a:prstGeom prst="rect">
-            <a:avLst/>
-          </a:prstGeom>
-          <a:noFill/>
-        </p:spPr>
-        <p:txBody>
-          <a:bodyPr wrap="none" lIns="9144" rIns="9144" tIns="9144" bIns="9144" anchor="t">
-            <a:spAutoFit/>
-          </a:bodyPr>
-          <a:lstStyle/>
-          <a:p>
-            <a:pPr algn="r">
-              <a:spcAft>
-                <a:spcPts val="0"/>
-              </a:spcAft>
-              <a:defRPr sz="680" b="1">
-                <a:solidFill>
-                  <a:srgbClr val="4F6B00"/>
-                </a:solidFill>
-                <a:latin typeface="Inter"/>
-              </a:defRPr>
-            </a:pPr>
-            <a:r>
-              <a:rPr>
-                <a:latin typeface="Inter"/>
-              </a:rPr>
-              <a:t>Illustrative, Gradient Maintained — demo data, not the client's holdings or managers</a:t>
-            </a:r>
-          </a:p>
-        </p:txBody>
-      </p:sp>
-      <p:sp>
-        <p:nvSpPr>
-          <p:cNvPr id="4" name="TextBox 3"/>
-          <p:cNvSpPr txBox="1"/>
-          <p:nvPr/>
-        </p:nvSpPr>
-        <p:spPr>
-          <a:xfrm>
             <a:off x="640080" y="566928"/>
             <a:ext cx="10058400" cy="530352"/>
           </a:xfrm>
@@ -32724,7 +31549,7 @@
       </p:sp>
       <p:sp>
         <p:nvSpPr>
-          <p:cNvPr id="5" name="Rectangle 4"/>
+          <p:cNvPr id="4" name="Rectangle 3"/>
           <p:cNvSpPr/>
           <p:nvPr/>
         </p:nvSpPr>
@@ -32773,7 +31598,7 @@
       </p:sp>
       <p:sp>
         <p:nvSpPr>
-          <p:cNvPr id="6" name="Rectangle 5"/>
+          <p:cNvPr id="5" name="Rectangle 4"/>
           <p:cNvSpPr/>
           <p:nvPr/>
         </p:nvSpPr>
@@ -32822,7 +31647,7 @@
       </p:sp>
       <p:sp>
         <p:nvSpPr>
-          <p:cNvPr id="7" name="TextBox 6"/>
+          <p:cNvPr id="6" name="TextBox 5"/>
           <p:cNvSpPr txBox="1"/>
           <p:nvPr/>
         </p:nvSpPr>
@@ -32864,7 +31689,7 @@
       </p:sp>
       <p:graphicFrame>
         <p:nvGraphicFramePr>
-          <p:cNvPr id="8" name="Table 7"/>
+          <p:cNvPr id="7" name="Table 6"/>
           <p:cNvGraphicFramePr>
             <a:graphicFrameLocks noGrp="1"/>
           </p:cNvGraphicFramePr>
@@ -32882,14 +31707,10 @@
               </a:tblPr>
               <a:tblGrid>
                 <a:gridCol w="2011680"/>
-                <a:gridCol w="1112139"/>
-                <a:gridCol w="1112139"/>
-                <a:gridCol w="1112139"/>
-                <a:gridCol w="1112139"/>
-                <a:gridCol w="1112139"/>
-                <a:gridCol w="1112139"/>
-                <a:gridCol w="1112139"/>
-                <a:gridCol w="1112139"/>
+                <a:gridCol w="2224278"/>
+                <a:gridCol w="2224278"/>
+                <a:gridCol w="2224278"/>
+                <a:gridCol w="2224278"/>
               </a:tblGrid>
               <a:tr h="469087">
                 <a:tc>
@@ -32963,7 +31784,7 @@
                         <a:rPr>
                           <a:latin typeface="Inter"/>
                         </a:rPr>
-                        <a:t>Basis</a:t>
+                        <a:t>Source</a:t>
                       </a:r>
                     </a:p>
                   </a:txBody>
@@ -32990,7 +31811,7 @@
                         <a:rPr>
                           <a:latin typeface="Inter"/>
                         </a:rPr>
-                        <a:t>Tool / view</a:t>
+                        <a:t>As of</a:t>
                       </a:r>
                     </a:p>
                   </a:txBody>
@@ -33017,115 +31838,7 @@
                         <a:rPr>
                           <a:latin typeface="Inter"/>
                         </a:rPr>
-                        <a:t>Key parameters</a:t>
-                      </a:r>
-                    </a:p>
-                  </a:txBody>
-                  <a:tcPr marL="54864" marR="54864" marT="27432" marB="27432" anchor="ctr">
-                    <a:solidFill>
-                      <a:srgbClr val="0D1117"/>
-                    </a:solidFill>
-                  </a:tcPr>
-                </a:tc>
-                <a:tc>
-                  <a:txBody>
-                    <a:bodyPr/>
-                    <a:lstStyle/>
-                    <a:p>
-                      <a:pPr>
-                        <a:defRPr sz="750" b="1">
-                          <a:solidFill>
-                            <a:srgbClr val="FFFFFF"/>
-                          </a:solidFill>
-                          <a:latin typeface="Inter"/>
-                        </a:defRPr>
-                      </a:pPr>
-                      <a:r>
-                        <a:rPr>
-                          <a:latin typeface="Inter"/>
-                        </a:rPr>
-                        <a:t>As of</a:t>
-                      </a:r>
-                    </a:p>
-                  </a:txBody>
-                  <a:tcPr marL="54864" marR="54864" marT="27432" marB="27432" anchor="ctr">
-                    <a:solidFill>
-                      <a:srgbClr val="0D1117"/>
-                    </a:solidFill>
-                  </a:tcPr>
-                </a:tc>
-                <a:tc>
-                  <a:txBody>
-                    <a:bodyPr/>
-                    <a:lstStyle/>
-                    <a:p>
-                      <a:pPr>
-                        <a:defRPr sz="750" b="1">
-                          <a:solidFill>
-                            <a:srgbClr val="FFFFFF"/>
-                          </a:solidFill>
-                          <a:latin typeface="Inter"/>
-                        </a:defRPr>
-                      </a:pPr>
-                      <a:r>
-                        <a:rPr>
-                          <a:latin typeface="Inter"/>
-                        </a:rPr>
-                        <a:t>Data scope</a:t>
-                      </a:r>
-                    </a:p>
-                  </a:txBody>
-                  <a:tcPr marL="54864" marR="54864" marT="27432" marB="27432" anchor="ctr">
-                    <a:solidFill>
-                      <a:srgbClr val="0D1117"/>
-                    </a:solidFill>
-                  </a:tcPr>
-                </a:tc>
-                <a:tc>
-                  <a:txBody>
-                    <a:bodyPr/>
-                    <a:lstStyle/>
-                    <a:p>
-                      <a:pPr>
-                        <a:defRPr sz="750" b="1">
-                          <a:solidFill>
-                            <a:srgbClr val="FFFFFF"/>
-                          </a:solidFill>
-                          <a:latin typeface="Inter"/>
-                        </a:defRPr>
-                      </a:pPr>
-                      <a:r>
-                        <a:rPr>
-                          <a:latin typeface="Inter"/>
-                        </a:rPr>
-                        <a:t>Validation</a:t>
-                      </a:r>
-                    </a:p>
-                  </a:txBody>
-                  <a:tcPr marL="54864" marR="54864" marT="27432" marB="27432" anchor="ctr">
-                    <a:solidFill>
-                      <a:srgbClr val="0D1117"/>
-                    </a:solidFill>
-                  </a:tcPr>
-                </a:tc>
-                <a:tc>
-                  <a:txBody>
-                    <a:bodyPr/>
-                    <a:lstStyle/>
-                    <a:p>
-                      <a:pPr>
-                        <a:defRPr sz="750" b="1">
-                          <a:solidFill>
-                            <a:srgbClr val="FFFFFF"/>
-                          </a:solidFill>
-                          <a:latin typeface="Inter"/>
-                        </a:defRPr>
-                      </a:pPr>
-                      <a:r>
-                        <a:rPr>
-                          <a:latin typeface="Inter"/>
-                        </a:rPr>
-                        <a:t>Digest</a:t>
+                        <a:t>Check</a:t>
                       </a:r>
                     </a:p>
                   </a:txBody>
@@ -33143,7 +31856,7 @@
                     <a:lstStyle/>
                     <a:p>
                       <a:pPr>
-                        <a:defRPr sz="650" b="1">
+                        <a:defRPr sz="720" b="1">
                           <a:solidFill>
                             <a:srgbClr val="0D1117"/>
                           </a:solidFill>
@@ -33170,7 +31883,7 @@
                     <a:lstStyle/>
                     <a:p>
                       <a:pPr>
-                        <a:defRPr sz="650" b="0">
+                        <a:defRPr sz="720" b="0">
                           <a:solidFill>
                             <a:srgbClr val="0D1117"/>
                           </a:solidFill>
@@ -33197,7 +31910,7 @@
                     <a:lstStyle/>
                     <a:p>
                       <a:pPr>
-                        <a:defRPr sz="650" b="0">
+                        <a:defRPr sz="720" b="0">
                           <a:solidFill>
                             <a:srgbClr val="0D1117"/>
                           </a:solidFill>
@@ -33208,7 +31921,7 @@
                         <a:rPr>
                           <a:latin typeface="Inter"/>
                         </a:rPr>
-                        <a:t>gradient_tool</a:t>
+                        <a:t>list_organizations; get_gradient_capabilities</a:t>
                       </a:r>
                     </a:p>
                   </a:txBody>
@@ -33224,7 +31937,7 @@
                     <a:lstStyle/>
                     <a:p>
                       <a:pPr>
-                        <a:defRPr sz="650" b="0">
+                        <a:defRPr sz="720" b="0">
                           <a:solidFill>
                             <a:srgbClr val="0D1117"/>
                           </a:solidFill>
@@ -33235,7 +31948,7 @@
                         <a:rPr>
                           <a:latin typeface="Inter"/>
                         </a:rPr>
-                        <a:t>list_organizations; get_gradient_capabilities</a:t>
+                        <a:t>2026-06-30</a:t>
                       </a:r>
                     </a:p>
                   </a:txBody>
@@ -33251,132 +31964,24 @@
                     <a:lstStyle/>
                     <a:p>
                       <a:pPr>
-                        <a:defRPr sz="650" b="0">
-                          <a:solidFill>
-                            <a:srgbClr val="0D1117"/>
-                          </a:solidFill>
-                          <a:latin typeface="Inter"/>
-                        </a:defRPr>
-                      </a:pPr>
-                      <a:r>
-                        <a:rPr>
-                          <a:latin typeface="Inter"/>
-                        </a:rPr>
-                        <a:t>org=test</a:t>
-                      </a:r>
-                    </a:p>
-                  </a:txBody>
-                  <a:tcPr marL="54864" marR="54864" marT="27432" marB="27432" anchor="ctr">
-                    <a:solidFill>
-                      <a:srgbClr val="FFFFFF"/>
-                    </a:solidFill>
-                  </a:tcPr>
-                </a:tc>
-                <a:tc>
-                  <a:txBody>
-                    <a:bodyPr/>
-                    <a:lstStyle/>
-                    <a:p>
-                      <a:pPr>
-                        <a:defRPr sz="650" b="0">
-                          <a:solidFill>
-                            <a:srgbClr val="0D1117"/>
-                          </a:solidFill>
-                          <a:latin typeface="Inter"/>
-                        </a:defRPr>
-                      </a:pPr>
-                      <a:r>
-                        <a:rPr>
-                          <a:latin typeface="Inter"/>
-                        </a:rPr>
-                        <a:t>2026-06-30</a:t>
-                      </a:r>
-                    </a:p>
-                  </a:txBody>
-                  <a:tcPr marL="54864" marR="54864" marT="27432" marB="27432" anchor="ctr">
-                    <a:solidFill>
-                      <a:srgbClr val="FFFFFF"/>
-                    </a:solidFill>
-                  </a:tcPr>
-                </a:tc>
-                <a:tc>
-                  <a:txBody>
-                    <a:bodyPr/>
-                    <a:lstStyle/>
-                    <a:p>
-                      <a:pPr>
-                        <a:defRPr sz="650" b="0">
-                          <a:solidFill>
-                            <a:srgbClr val="0D1117"/>
-                          </a:solidFill>
-                          <a:latin typeface="Inter"/>
-                        </a:defRPr>
-                      </a:pPr>
-                      <a:r>
-                        <a:rPr>
-                          <a:latin typeface="Inter"/>
-                        </a:rPr>
-                        <a:t>Illustrative sample data</a:t>
-                      </a:r>
-                    </a:p>
-                  </a:txBody>
-                  <a:tcPr marL="54864" marR="54864" marT="27432" marB="27432" anchor="ctr">
-                    <a:solidFill>
-                      <a:srgbClr val="FFFFFF"/>
-                    </a:solidFill>
-                  </a:tcPr>
-                </a:tc>
-                <a:tc>
-                  <a:txBody>
-                    <a:bodyPr/>
-                    <a:lstStyle/>
-                    <a:p>
-                      <a:pPr>
-                        <a:defRPr sz="650" b="0">
-                          <a:solidFill>
-                            <a:srgbClr val="0D1117"/>
-                          </a:solidFill>
-                          <a:latin typeface="Inter"/>
-                        </a:defRPr>
-                      </a:pPr>
-                      <a:r>
-                        <a:rPr>
-                          <a:latin typeface="Inter"/>
-                        </a:rPr>
-                        <a:t>passed</a:t>
-                      </a:r>
-                    </a:p>
-                  </a:txBody>
-                  <a:tcPr marL="54864" marR="54864" marT="27432" marB="27432" anchor="ctr">
-                    <a:solidFill>
-                      <a:srgbClr val="FFFFFF"/>
-                    </a:solidFill>
-                  </a:tcPr>
-                </a:tc>
-                <a:tc>
-                  <a:txBody>
-                    <a:bodyPr/>
-                    <a:lstStyle/>
-                    <a:p>
-                      <a:pPr>
-                        <a:defRPr sz="650" b="0">
-                          <a:solidFill>
-                            <a:srgbClr val="0D1117"/>
-                          </a:solidFill>
-                          <a:latin typeface="Inter"/>
-                        </a:defRPr>
-                      </a:pPr>
-                      <a:r>
-                        <a:rPr>
-                          <a:latin typeface="Inter"/>
-                        </a:rPr>
-                        <a:t>sha256:aaaaaaaaaaaaaaaaaaaaaaaaaaaaaaaaaaaaaaaaaaaaaaaaaaaaaaaaaaaaaaaa</a:t>
-                      </a:r>
-                    </a:p>
-                  </a:txBody>
-                  <a:tcPr marL="54864" marR="54864" marT="27432" marB="27432" anchor="ctr">
-                    <a:solidFill>
-                      <a:srgbClr val="FFFFFF"/>
+                        <a:defRPr sz="720" b="1">
+                          <a:solidFill>
+                            <a:srgbClr val="C6F432"/>
+                          </a:solidFill>
+                          <a:latin typeface="Inter"/>
+                        </a:defRPr>
+                      </a:pPr>
+                      <a:r>
+                        <a:rPr>
+                          <a:latin typeface="Inter"/>
+                        </a:rPr>
+                        <a:t>● Passed</a:t>
+                      </a:r>
+                    </a:p>
+                  </a:txBody>
+                  <a:tcPr marL="54864" marR="54864" marT="27432" marB="27432" anchor="ctr">
+                    <a:solidFill>
+                      <a:srgbClr val="F5F7F9"/>
                     </a:solidFill>
                   </a:tcPr>
                 </a:tc>
@@ -33388,7 +31993,7 @@
                     <a:lstStyle/>
                     <a:p>
                       <a:pPr>
-                        <a:defRPr sz="650" b="1">
+                        <a:defRPr sz="720" b="1">
                           <a:solidFill>
                             <a:srgbClr val="0D1117"/>
                           </a:solidFill>
@@ -33415,7 +32020,7 @@
                     <a:lstStyle/>
                     <a:p>
                       <a:pPr>
-                        <a:defRPr sz="650" b="0">
+                        <a:defRPr sz="720" b="0">
                           <a:solidFill>
                             <a:srgbClr val="0D1117"/>
                           </a:solidFill>
@@ -33442,7 +32047,7 @@
                     <a:lstStyle/>
                     <a:p>
                       <a:pPr>
-                        <a:defRPr sz="650" b="0">
+                        <a:defRPr sz="720" b="0">
                           <a:solidFill>
                             <a:srgbClr val="0D1117"/>
                           </a:solidFill>
@@ -33453,7 +32058,7 @@
                         <a:rPr>
                           <a:latin typeface="Inter"/>
                         </a:rPr>
-                        <a:t>gradient_tool</a:t>
+                        <a:t>list_portfolios; get_portfolio_structure</a:t>
                       </a:r>
                     </a:p>
                   </a:txBody>
@@ -33469,7 +32074,7 @@
                     <a:lstStyle/>
                     <a:p>
                       <a:pPr>
-                        <a:defRPr sz="650" b="0">
+                        <a:defRPr sz="720" b="0">
                           <a:solidFill>
                             <a:srgbClr val="0D1117"/>
                           </a:solidFill>
@@ -33480,7 +32085,7 @@
                         <a:rPr>
                           <a:latin typeface="Inter"/>
                         </a:rPr>
-                        <a:t>list_portfolios; get_portfolio_structure</a:t>
+                        <a:t>2026-06-30</a:t>
                       </a:r>
                     </a:p>
                   </a:txBody>
@@ -33496,126 +32101,18 @@
                     <a:lstStyle/>
                     <a:p>
                       <a:pPr>
-                        <a:defRPr sz="650" b="0">
-                          <a:solidFill>
-                            <a:srgbClr val="0D1117"/>
-                          </a:solidFill>
-                          <a:latin typeface="Inter"/>
-                        </a:defRPr>
-                      </a:pPr>
-                      <a:r>
-                        <a:rPr>
-                          <a:latin typeface="Inter"/>
-                        </a:rPr>
-                        <a:t>allocation_tree</a:t>
-                      </a:r>
-                    </a:p>
-                  </a:txBody>
-                  <a:tcPr marL="54864" marR="54864" marT="27432" marB="27432" anchor="ctr">
-                    <a:solidFill>
-                      <a:srgbClr val="F5F7F9"/>
-                    </a:solidFill>
-                  </a:tcPr>
-                </a:tc>
-                <a:tc>
-                  <a:txBody>
-                    <a:bodyPr/>
-                    <a:lstStyle/>
-                    <a:p>
-                      <a:pPr>
-                        <a:defRPr sz="650" b="0">
-                          <a:solidFill>
-                            <a:srgbClr val="0D1117"/>
-                          </a:solidFill>
-                          <a:latin typeface="Inter"/>
-                        </a:defRPr>
-                      </a:pPr>
-                      <a:r>
-                        <a:rPr>
-                          <a:latin typeface="Inter"/>
-                        </a:rPr>
-                        <a:t>2026-06-30</a:t>
-                      </a:r>
-                    </a:p>
-                  </a:txBody>
-                  <a:tcPr marL="54864" marR="54864" marT="27432" marB="27432" anchor="ctr">
-                    <a:solidFill>
-                      <a:srgbClr val="F5F7F9"/>
-                    </a:solidFill>
-                  </a:tcPr>
-                </a:tc>
-                <a:tc>
-                  <a:txBody>
-                    <a:bodyPr/>
-                    <a:lstStyle/>
-                    <a:p>
-                      <a:pPr>
-                        <a:defRPr sz="650" b="0">
-                          <a:solidFill>
-                            <a:srgbClr val="0D1117"/>
-                          </a:solidFill>
-                          <a:latin typeface="Inter"/>
-                        </a:defRPr>
-                      </a:pPr>
-                      <a:r>
-                        <a:rPr>
-                          <a:latin typeface="Inter"/>
-                        </a:rPr>
-                        <a:t>Illustrative sample data</a:t>
-                      </a:r>
-                    </a:p>
-                  </a:txBody>
-                  <a:tcPr marL="54864" marR="54864" marT="27432" marB="27432" anchor="ctr">
-                    <a:solidFill>
-                      <a:srgbClr val="F5F7F9"/>
-                    </a:solidFill>
-                  </a:tcPr>
-                </a:tc>
-                <a:tc>
-                  <a:txBody>
-                    <a:bodyPr/>
-                    <a:lstStyle/>
-                    <a:p>
-                      <a:pPr>
-                        <a:defRPr sz="650" b="0">
-                          <a:solidFill>
-                            <a:srgbClr val="0D1117"/>
-                          </a:solidFill>
-                          <a:latin typeface="Inter"/>
-                        </a:defRPr>
-                      </a:pPr>
-                      <a:r>
-                        <a:rPr>
-                          <a:latin typeface="Inter"/>
-                        </a:rPr>
-                        <a:t>passed</a:t>
-                      </a:r>
-                    </a:p>
-                  </a:txBody>
-                  <a:tcPr marL="54864" marR="54864" marT="27432" marB="27432" anchor="ctr">
-                    <a:solidFill>
-                      <a:srgbClr val="F5F7F9"/>
-                    </a:solidFill>
-                  </a:tcPr>
-                </a:tc>
-                <a:tc>
-                  <a:txBody>
-                    <a:bodyPr/>
-                    <a:lstStyle/>
-                    <a:p>
-                      <a:pPr>
-                        <a:defRPr sz="650" b="0">
-                          <a:solidFill>
-                            <a:srgbClr val="0D1117"/>
-                          </a:solidFill>
-                          <a:latin typeface="Inter"/>
-                        </a:defRPr>
-                      </a:pPr>
-                      <a:r>
-                        <a:rPr>
-                          <a:latin typeface="Inter"/>
-                        </a:rPr>
-                        <a:t>sha256:aaaaaaaaaaaaaaaaaaaaaaaaaaaaaaaaaaaaaaaaaaaaaaaaaaaaaaaaaaaaaaaa</a:t>
+                        <a:defRPr sz="720" b="1">
+                          <a:solidFill>
+                            <a:srgbClr val="C6F432"/>
+                          </a:solidFill>
+                          <a:latin typeface="Inter"/>
+                        </a:defRPr>
+                      </a:pPr>
+                      <a:r>
+                        <a:rPr>
+                          <a:latin typeface="Inter"/>
+                        </a:rPr>
+                        <a:t>● Passed</a:t>
                       </a:r>
                     </a:p>
                   </a:txBody>
@@ -33633,7 +32130,7 @@
                     <a:lstStyle/>
                     <a:p>
                       <a:pPr>
-                        <a:defRPr sz="650" b="1">
+                        <a:defRPr sz="720" b="1">
                           <a:solidFill>
                             <a:srgbClr val="0D1117"/>
                           </a:solidFill>
@@ -33660,7 +32157,7 @@
                     <a:lstStyle/>
                     <a:p>
                       <a:pPr>
-                        <a:defRPr sz="650" b="0">
+                        <a:defRPr sz="720" b="0">
                           <a:solidFill>
                             <a:srgbClr val="0D1117"/>
                           </a:solidFill>
@@ -33687,7 +32184,7 @@
                     <a:lstStyle/>
                     <a:p>
                       <a:pPr>
-                        <a:defRPr sz="650" b="0">
+                        <a:defRPr sz="720" b="0">
                           <a:solidFill>
                             <a:srgbClr val="0D1117"/>
                           </a:solidFill>
@@ -33698,7 +32195,7 @@
                         <a:rPr>
                           <a:latin typeface="Inter"/>
                         </a:rPr>
-                        <a:t>gradient_tool</a:t>
+                        <a:t>check_portfolio_policy</a:t>
                       </a:r>
                     </a:p>
                   </a:txBody>
@@ -33714,7 +32211,7 @@
                     <a:lstStyle/>
                     <a:p>
                       <a:pPr>
-                        <a:defRPr sz="650" b="0">
+                        <a:defRPr sz="720" b="0">
                           <a:solidFill>
                             <a:srgbClr val="0D1117"/>
                           </a:solidFill>
@@ -33725,7 +32222,7 @@
                         <a:rPr>
                           <a:latin typeface="Inter"/>
                         </a:rPr>
-                        <a:t>check_portfolio_policy</a:t>
+                        <a:t>2026-06-30</a:t>
                       </a:r>
                     </a:p>
                   </a:txBody>
@@ -33741,132 +32238,24 @@
                     <a:lstStyle/>
                     <a:p>
                       <a:pPr>
-                        <a:defRPr sz="650" b="0">
-                          <a:solidFill>
-                            <a:srgbClr val="0D1117"/>
-                          </a:solidFill>
-                          <a:latin typeface="Inter"/>
-                        </a:defRPr>
-                      </a:pPr>
-                      <a:r>
-                        <a:rPr>
-                          <a:latin typeface="Inter"/>
-                        </a:rPr>
-                        <a:t>portfolio=test</a:t>
-                      </a:r>
-                    </a:p>
-                  </a:txBody>
-                  <a:tcPr marL="54864" marR="54864" marT="27432" marB="27432" anchor="ctr">
-                    <a:solidFill>
-                      <a:srgbClr val="FFFFFF"/>
-                    </a:solidFill>
-                  </a:tcPr>
-                </a:tc>
-                <a:tc>
-                  <a:txBody>
-                    <a:bodyPr/>
-                    <a:lstStyle/>
-                    <a:p>
-                      <a:pPr>
-                        <a:defRPr sz="650" b="0">
-                          <a:solidFill>
-                            <a:srgbClr val="0D1117"/>
-                          </a:solidFill>
-                          <a:latin typeface="Inter"/>
-                        </a:defRPr>
-                      </a:pPr>
-                      <a:r>
-                        <a:rPr>
-                          <a:latin typeface="Inter"/>
-                        </a:rPr>
-                        <a:t>2026-06-30</a:t>
-                      </a:r>
-                    </a:p>
-                  </a:txBody>
-                  <a:tcPr marL="54864" marR="54864" marT="27432" marB="27432" anchor="ctr">
-                    <a:solidFill>
-                      <a:srgbClr val="FFFFFF"/>
-                    </a:solidFill>
-                  </a:tcPr>
-                </a:tc>
-                <a:tc>
-                  <a:txBody>
-                    <a:bodyPr/>
-                    <a:lstStyle/>
-                    <a:p>
-                      <a:pPr>
-                        <a:defRPr sz="650" b="0">
-                          <a:solidFill>
-                            <a:srgbClr val="0D1117"/>
-                          </a:solidFill>
-                          <a:latin typeface="Inter"/>
-                        </a:defRPr>
-                      </a:pPr>
-                      <a:r>
-                        <a:rPr>
-                          <a:latin typeface="Inter"/>
-                        </a:rPr>
-                        <a:t>Illustrative sample data</a:t>
-                      </a:r>
-                    </a:p>
-                  </a:txBody>
-                  <a:tcPr marL="54864" marR="54864" marT="27432" marB="27432" anchor="ctr">
-                    <a:solidFill>
-                      <a:srgbClr val="FFFFFF"/>
-                    </a:solidFill>
-                  </a:tcPr>
-                </a:tc>
-                <a:tc>
-                  <a:txBody>
-                    <a:bodyPr/>
-                    <a:lstStyle/>
-                    <a:p>
-                      <a:pPr>
-                        <a:defRPr sz="650" b="0">
-                          <a:solidFill>
-                            <a:srgbClr val="0D1117"/>
-                          </a:solidFill>
-                          <a:latin typeface="Inter"/>
-                        </a:defRPr>
-                      </a:pPr>
-                      <a:r>
-                        <a:rPr>
-                          <a:latin typeface="Inter"/>
-                        </a:rPr>
-                        <a:t>passed</a:t>
-                      </a:r>
-                    </a:p>
-                  </a:txBody>
-                  <a:tcPr marL="54864" marR="54864" marT="27432" marB="27432" anchor="ctr">
-                    <a:solidFill>
-                      <a:srgbClr val="FFFFFF"/>
-                    </a:solidFill>
-                  </a:tcPr>
-                </a:tc>
-                <a:tc>
-                  <a:txBody>
-                    <a:bodyPr/>
-                    <a:lstStyle/>
-                    <a:p>
-                      <a:pPr>
-                        <a:defRPr sz="650" b="0">
-                          <a:solidFill>
-                            <a:srgbClr val="0D1117"/>
-                          </a:solidFill>
-                          <a:latin typeface="Inter"/>
-                        </a:defRPr>
-                      </a:pPr>
-                      <a:r>
-                        <a:rPr>
-                          <a:latin typeface="Inter"/>
-                        </a:rPr>
-                        <a:t>sha256:aaaaaaaaaaaaaaaaaaaaaaaaaaaaaaaaaaaaaaaaaaaaaaaaaaaaaaaaaaaaaaaa</a:t>
-                      </a:r>
-                    </a:p>
-                  </a:txBody>
-                  <a:tcPr marL="54864" marR="54864" marT="27432" marB="27432" anchor="ctr">
-                    <a:solidFill>
-                      <a:srgbClr val="FFFFFF"/>
+                        <a:defRPr sz="720" b="1">
+                          <a:solidFill>
+                            <a:srgbClr val="C6F432"/>
+                          </a:solidFill>
+                          <a:latin typeface="Inter"/>
+                        </a:defRPr>
+                      </a:pPr>
+                      <a:r>
+                        <a:rPr>
+                          <a:latin typeface="Inter"/>
+                        </a:rPr>
+                        <a:t>● Passed</a:t>
+                      </a:r>
+                    </a:p>
+                  </a:txBody>
+                  <a:tcPr marL="54864" marR="54864" marT="27432" marB="27432" anchor="ctr">
+                    <a:solidFill>
+                      <a:srgbClr val="F5F7F9"/>
                     </a:solidFill>
                   </a:tcPr>
                 </a:tc>
@@ -33878,7 +32267,7 @@
                     <a:lstStyle/>
                     <a:p>
                       <a:pPr>
-                        <a:defRPr sz="650" b="1">
+                        <a:defRPr sz="720" b="1">
                           <a:solidFill>
                             <a:srgbClr val="0D1117"/>
                           </a:solidFill>
@@ -33905,7 +32294,7 @@
                     <a:lstStyle/>
                     <a:p>
                       <a:pPr>
-                        <a:defRPr sz="650" b="0">
+                        <a:defRPr sz="720" b="0">
                           <a:solidFill>
                             <a:srgbClr val="0D1117"/>
                           </a:solidFill>
@@ -33932,7 +32321,7 @@
                     <a:lstStyle/>
                     <a:p>
                       <a:pPr>
-                        <a:defRPr sz="650" b="0">
+                        <a:defRPr sz="720" b="0">
                           <a:solidFill>
                             <a:srgbClr val="0D1117"/>
                           </a:solidFill>
@@ -33943,7 +32332,7 @@
                         <a:rPr>
                           <a:latin typeface="Inter"/>
                         </a:rPr>
-                        <a:t>gradient_tool</a:t>
+                        <a:t>get_portfolio_exposure</a:t>
                       </a:r>
                     </a:p>
                   </a:txBody>
@@ -33959,7 +32348,7 @@
                     <a:lstStyle/>
                     <a:p>
                       <a:pPr>
-                        <a:defRPr sz="650" b="0">
+                        <a:defRPr sz="720" b="0">
                           <a:solidFill>
                             <a:srgbClr val="0D1117"/>
                           </a:solidFill>
@@ -33970,7 +32359,7 @@
                         <a:rPr>
                           <a:latin typeface="Inter"/>
                         </a:rPr>
-                        <a:t>get_portfolio_exposure</a:t>
+                        <a:t>2026-03-31</a:t>
                       </a:r>
                     </a:p>
                   </a:txBody>
@@ -33986,126 +32375,18 @@
                     <a:lstStyle/>
                     <a:p>
                       <a:pPr>
-                        <a:defRPr sz="650" b="0">
-                          <a:solidFill>
-                            <a:srgbClr val="0D1117"/>
-                          </a:solidFill>
-                          <a:latin typeface="Inter"/>
-                        </a:defRPr>
-                      </a:pPr>
-                      <a:r>
-                        <a:rPr>
-                          <a:latin typeface="Inter"/>
-                        </a:rPr>
-                        <a:t>all pages</a:t>
-                      </a:r>
-                    </a:p>
-                  </a:txBody>
-                  <a:tcPr marL="54864" marR="54864" marT="27432" marB="27432" anchor="ctr">
-                    <a:solidFill>
-                      <a:srgbClr val="F5F7F9"/>
-                    </a:solidFill>
-                  </a:tcPr>
-                </a:tc>
-                <a:tc>
-                  <a:txBody>
-                    <a:bodyPr/>
-                    <a:lstStyle/>
-                    <a:p>
-                      <a:pPr>
-                        <a:defRPr sz="650" b="0">
-                          <a:solidFill>
-                            <a:srgbClr val="0D1117"/>
-                          </a:solidFill>
-                          <a:latin typeface="Inter"/>
-                        </a:defRPr>
-                      </a:pPr>
-                      <a:r>
-                        <a:rPr>
-                          <a:latin typeface="Inter"/>
-                        </a:rPr>
-                        <a:t>2026-03-31</a:t>
-                      </a:r>
-                    </a:p>
-                  </a:txBody>
-                  <a:tcPr marL="54864" marR="54864" marT="27432" marB="27432" anchor="ctr">
-                    <a:solidFill>
-                      <a:srgbClr val="F5F7F9"/>
-                    </a:solidFill>
-                  </a:tcPr>
-                </a:tc>
-                <a:tc>
-                  <a:txBody>
-                    <a:bodyPr/>
-                    <a:lstStyle/>
-                    <a:p>
-                      <a:pPr>
-                        <a:defRPr sz="650" b="0">
-                          <a:solidFill>
-                            <a:srgbClr val="0D1117"/>
-                          </a:solidFill>
-                          <a:latin typeface="Inter"/>
-                        </a:defRPr>
-                      </a:pPr>
-                      <a:r>
-                        <a:rPr>
-                          <a:latin typeface="Inter"/>
-                        </a:rPr>
-                        <a:t>Illustrative sample data</a:t>
-                      </a:r>
-                    </a:p>
-                  </a:txBody>
-                  <a:tcPr marL="54864" marR="54864" marT="27432" marB="27432" anchor="ctr">
-                    <a:solidFill>
-                      <a:srgbClr val="F5F7F9"/>
-                    </a:solidFill>
-                  </a:tcPr>
-                </a:tc>
-                <a:tc>
-                  <a:txBody>
-                    <a:bodyPr/>
-                    <a:lstStyle/>
-                    <a:p>
-                      <a:pPr>
-                        <a:defRPr sz="650" b="0">
-                          <a:solidFill>
-                            <a:srgbClr val="0D1117"/>
-                          </a:solidFill>
-                          <a:latin typeface="Inter"/>
-                        </a:defRPr>
-                      </a:pPr>
-                      <a:r>
-                        <a:rPr>
-                          <a:latin typeface="Inter"/>
-                        </a:rPr>
-                        <a:t>passed</a:t>
-                      </a:r>
-                    </a:p>
-                  </a:txBody>
-                  <a:tcPr marL="54864" marR="54864" marT="27432" marB="27432" anchor="ctr">
-                    <a:solidFill>
-                      <a:srgbClr val="F5F7F9"/>
-                    </a:solidFill>
-                  </a:tcPr>
-                </a:tc>
-                <a:tc>
-                  <a:txBody>
-                    <a:bodyPr/>
-                    <a:lstStyle/>
-                    <a:p>
-                      <a:pPr>
-                        <a:defRPr sz="650" b="0">
-                          <a:solidFill>
-                            <a:srgbClr val="0D1117"/>
-                          </a:solidFill>
-                          <a:latin typeface="Inter"/>
-                        </a:defRPr>
-                      </a:pPr>
-                      <a:r>
-                        <a:rPr>
-                          <a:latin typeface="Inter"/>
-                        </a:rPr>
-                        <a:t>sha256:aaaaaaaaaaaaaaaaaaaaaaaaaaaaaaaaaaaaaaaaaaaaaaaaaaaaaaaaaaaaaaaa</a:t>
+                        <a:defRPr sz="720" b="1">
+                          <a:solidFill>
+                            <a:srgbClr val="C6F432"/>
+                          </a:solidFill>
+                          <a:latin typeface="Inter"/>
+                        </a:defRPr>
+                      </a:pPr>
+                      <a:r>
+                        <a:rPr>
+                          <a:latin typeface="Inter"/>
+                        </a:rPr>
+                        <a:t>● Passed</a:t>
                       </a:r>
                     </a:p>
                   </a:txBody>
@@ -34123,7 +32404,7 @@
                     <a:lstStyle/>
                     <a:p>
                       <a:pPr>
-                        <a:defRPr sz="650" b="1">
+                        <a:defRPr sz="720" b="1">
                           <a:solidFill>
                             <a:srgbClr val="0D1117"/>
                           </a:solidFill>
@@ -34150,7 +32431,7 @@
                     <a:lstStyle/>
                     <a:p>
                       <a:pPr>
-                        <a:defRPr sz="650" b="0">
+                        <a:defRPr sz="720" b="0">
                           <a:solidFill>
                             <a:srgbClr val="0D1117"/>
                           </a:solidFill>
@@ -34177,7 +32458,7 @@
                     <a:lstStyle/>
                     <a:p>
                       <a:pPr>
-                        <a:defRPr sz="650" b="0">
+                        <a:defRPr sz="720" b="0">
                           <a:solidFill>
                             <a:srgbClr val="0D1117"/>
                           </a:solidFill>
@@ -34188,7 +32469,7 @@
                         <a:rPr>
                           <a:latin typeface="Inter"/>
                         </a:rPr>
-                        <a:t>gradient_tool</a:t>
+                        <a:t>get_capital_market_assumptions</a:t>
                       </a:r>
                     </a:p>
                   </a:txBody>
@@ -34204,7 +32485,7 @@
                     <a:lstStyle/>
                     <a:p>
                       <a:pPr>
-                        <a:defRPr sz="650" b="0">
+                        <a:defRPr sz="720" b="0">
                           <a:solidFill>
                             <a:srgbClr val="0D1117"/>
                           </a:solidFill>
@@ -34215,7 +32496,7 @@
                         <a:rPr>
                           <a:latin typeface="Inter"/>
                         </a:rPr>
-                        <a:t>get_capital_market_assumptions</a:t>
+                        <a:t>2026-06-15</a:t>
                       </a:r>
                     </a:p>
                   </a:txBody>
@@ -34231,132 +32512,24 @@
                     <a:lstStyle/>
                     <a:p>
                       <a:pPr>
-                        <a:defRPr sz="650" b="0">
-                          <a:solidFill>
-                            <a:srgbClr val="0D1117"/>
-                          </a:solidFill>
-                          <a:latin typeface="Inter"/>
-                        </a:defRPr>
-                      </a:pPr>
-                      <a:r>
-                        <a:rPr>
-                          <a:latin typeface="Inter"/>
-                        </a:rPr>
-                        <a:t>baseline</a:t>
-                      </a:r>
-                    </a:p>
-                  </a:txBody>
-                  <a:tcPr marL="54864" marR="54864" marT="27432" marB="27432" anchor="ctr">
-                    <a:solidFill>
-                      <a:srgbClr val="FFFFFF"/>
-                    </a:solidFill>
-                  </a:tcPr>
-                </a:tc>
-                <a:tc>
-                  <a:txBody>
-                    <a:bodyPr/>
-                    <a:lstStyle/>
-                    <a:p>
-                      <a:pPr>
-                        <a:defRPr sz="650" b="0">
-                          <a:solidFill>
-                            <a:srgbClr val="0D1117"/>
-                          </a:solidFill>
-                          <a:latin typeface="Inter"/>
-                        </a:defRPr>
-                      </a:pPr>
-                      <a:r>
-                        <a:rPr>
-                          <a:latin typeface="Inter"/>
-                        </a:rPr>
-                        <a:t>2026-06-15</a:t>
-                      </a:r>
-                    </a:p>
-                  </a:txBody>
-                  <a:tcPr marL="54864" marR="54864" marT="27432" marB="27432" anchor="ctr">
-                    <a:solidFill>
-                      <a:srgbClr val="FFFFFF"/>
-                    </a:solidFill>
-                  </a:tcPr>
-                </a:tc>
-                <a:tc>
-                  <a:txBody>
-                    <a:bodyPr/>
-                    <a:lstStyle/>
-                    <a:p>
-                      <a:pPr>
-                        <a:defRPr sz="650" b="0">
-                          <a:solidFill>
-                            <a:srgbClr val="0D1117"/>
-                          </a:solidFill>
-                          <a:latin typeface="Inter"/>
-                        </a:defRPr>
-                      </a:pPr>
-                      <a:r>
-                        <a:rPr>
-                          <a:latin typeface="Inter"/>
-                        </a:rPr>
-                        <a:t>Illustrative sample data</a:t>
-                      </a:r>
-                    </a:p>
-                  </a:txBody>
-                  <a:tcPr marL="54864" marR="54864" marT="27432" marB="27432" anchor="ctr">
-                    <a:solidFill>
-                      <a:srgbClr val="FFFFFF"/>
-                    </a:solidFill>
-                  </a:tcPr>
-                </a:tc>
-                <a:tc>
-                  <a:txBody>
-                    <a:bodyPr/>
-                    <a:lstStyle/>
-                    <a:p>
-                      <a:pPr>
-                        <a:defRPr sz="650" b="0">
-                          <a:solidFill>
-                            <a:srgbClr val="0D1117"/>
-                          </a:solidFill>
-                          <a:latin typeface="Inter"/>
-                        </a:defRPr>
-                      </a:pPr>
-                      <a:r>
-                        <a:rPr>
-                          <a:latin typeface="Inter"/>
-                        </a:rPr>
-                        <a:t>passed</a:t>
-                      </a:r>
-                    </a:p>
-                  </a:txBody>
-                  <a:tcPr marL="54864" marR="54864" marT="27432" marB="27432" anchor="ctr">
-                    <a:solidFill>
-                      <a:srgbClr val="FFFFFF"/>
-                    </a:solidFill>
-                  </a:tcPr>
-                </a:tc>
-                <a:tc>
-                  <a:txBody>
-                    <a:bodyPr/>
-                    <a:lstStyle/>
-                    <a:p>
-                      <a:pPr>
-                        <a:defRPr sz="650" b="0">
-                          <a:solidFill>
-                            <a:srgbClr val="0D1117"/>
-                          </a:solidFill>
-                          <a:latin typeface="Inter"/>
-                        </a:defRPr>
-                      </a:pPr>
-                      <a:r>
-                        <a:rPr>
-                          <a:latin typeface="Inter"/>
-                        </a:rPr>
-                        <a:t>sha256:aaaaaaaaaaaaaaaaaaaaaaaaaaaaaaaaaaaaaaaaaaaaaaaaaaaaaaaaaaaaaaaa</a:t>
-                      </a:r>
-                    </a:p>
-                  </a:txBody>
-                  <a:tcPr marL="54864" marR="54864" marT="27432" marB="27432" anchor="ctr">
-                    <a:solidFill>
-                      <a:srgbClr val="FFFFFF"/>
+                        <a:defRPr sz="720" b="1">
+                          <a:solidFill>
+                            <a:srgbClr val="C6F432"/>
+                          </a:solidFill>
+                          <a:latin typeface="Inter"/>
+                        </a:defRPr>
+                      </a:pPr>
+                      <a:r>
+                        <a:rPr>
+                          <a:latin typeface="Inter"/>
+                        </a:rPr>
+                        <a:t>● Passed</a:t>
+                      </a:r>
+                    </a:p>
+                  </a:txBody>
+                  <a:tcPr marL="54864" marR="54864" marT="27432" marB="27432" anchor="ctr">
+                    <a:solidFill>
+                      <a:srgbClr val="F5F7F9"/>
                     </a:solidFill>
                   </a:tcPr>
                 </a:tc>
@@ -34368,7 +32541,7 @@
                     <a:lstStyle/>
                     <a:p>
                       <a:pPr>
-                        <a:defRPr sz="650" b="1">
+                        <a:defRPr sz="720" b="1">
                           <a:solidFill>
                             <a:srgbClr val="0D1117"/>
                           </a:solidFill>
@@ -34395,7 +32568,7 @@
                     <a:lstStyle/>
                     <a:p>
                       <a:pPr>
-                        <a:defRPr sz="650" b="0">
+                        <a:defRPr sz="720" b="0">
                           <a:solidFill>
                             <a:srgbClr val="0D1117"/>
                           </a:solidFill>
@@ -34422,7 +32595,7 @@
                     <a:lstStyle/>
                     <a:p>
                       <a:pPr>
-                        <a:defRPr sz="650" b="0">
+                        <a:defRPr sz="720" b="0">
                           <a:solidFill>
                             <a:srgbClr val="0D1117"/>
                           </a:solidFill>
@@ -34433,7 +32606,7 @@
                         <a:rPr>
                           <a:latin typeface="Inter"/>
                         </a:rPr>
-                        <a:t>gradient_tool</a:t>
+                        <a:t>get_portfolio_exposure</a:t>
                       </a:r>
                     </a:p>
                   </a:txBody>
@@ -34449,7 +32622,7 @@
                     <a:lstStyle/>
                     <a:p>
                       <a:pPr>
-                        <a:defRPr sz="650" b="0">
+                        <a:defRPr sz="720" b="0">
                           <a:solidFill>
                             <a:srgbClr val="0D1117"/>
                           </a:solidFill>
@@ -34460,7 +32633,7 @@
                         <a:rPr>
                           <a:latin typeface="Inter"/>
                         </a:rPr>
-                        <a:t>get_chart_data</a:t>
+                        <a:t>2026-06-30</a:t>
                       </a:r>
                     </a:p>
                   </a:txBody>
@@ -34476,126 +32649,18 @@
                     <a:lstStyle/>
                     <a:p>
                       <a:pPr>
-                        <a:defRPr sz="650" b="0">
-                          <a:solidFill>
-                            <a:srgbClr val="0D1117"/>
-                          </a:solidFill>
-                          <a:latin typeface="Inter"/>
-                        </a:defRPr>
-                      </a:pPr>
-                      <a:r>
-                        <a:rPr>
-                          <a:latin typeface="Inter"/>
-                        </a:rPr>
-                        <a:t>commitments</a:t>
-                      </a:r>
-                    </a:p>
-                  </a:txBody>
-                  <a:tcPr marL="54864" marR="54864" marT="27432" marB="27432" anchor="ctr">
-                    <a:solidFill>
-                      <a:srgbClr val="F5F7F9"/>
-                    </a:solidFill>
-                  </a:tcPr>
-                </a:tc>
-                <a:tc>
-                  <a:txBody>
-                    <a:bodyPr/>
-                    <a:lstStyle/>
-                    <a:p>
-                      <a:pPr>
-                        <a:defRPr sz="650" b="0">
-                          <a:solidFill>
-                            <a:srgbClr val="0D1117"/>
-                          </a:solidFill>
-                          <a:latin typeface="Inter"/>
-                        </a:defRPr>
-                      </a:pPr>
-                      <a:r>
-                        <a:rPr>
-                          <a:latin typeface="Inter"/>
-                        </a:rPr>
-                        <a:t>2026-06-30</a:t>
-                      </a:r>
-                    </a:p>
-                  </a:txBody>
-                  <a:tcPr marL="54864" marR="54864" marT="27432" marB="27432" anchor="ctr">
-                    <a:solidFill>
-                      <a:srgbClr val="F5F7F9"/>
-                    </a:solidFill>
-                  </a:tcPr>
-                </a:tc>
-                <a:tc>
-                  <a:txBody>
-                    <a:bodyPr/>
-                    <a:lstStyle/>
-                    <a:p>
-                      <a:pPr>
-                        <a:defRPr sz="650" b="0">
-                          <a:solidFill>
-                            <a:srgbClr val="0D1117"/>
-                          </a:solidFill>
-                          <a:latin typeface="Inter"/>
-                        </a:defRPr>
-                      </a:pPr>
-                      <a:r>
-                        <a:rPr>
-                          <a:latin typeface="Inter"/>
-                        </a:rPr>
-                        <a:t>Illustrative sample data</a:t>
-                      </a:r>
-                    </a:p>
-                  </a:txBody>
-                  <a:tcPr marL="54864" marR="54864" marT="27432" marB="27432" anchor="ctr">
-                    <a:solidFill>
-                      <a:srgbClr val="F5F7F9"/>
-                    </a:solidFill>
-                  </a:tcPr>
-                </a:tc>
-                <a:tc>
-                  <a:txBody>
-                    <a:bodyPr/>
-                    <a:lstStyle/>
-                    <a:p>
-                      <a:pPr>
-                        <a:defRPr sz="650" b="0">
-                          <a:solidFill>
-                            <a:srgbClr val="0D1117"/>
-                          </a:solidFill>
-                          <a:latin typeface="Inter"/>
-                        </a:defRPr>
-                      </a:pPr>
-                      <a:r>
-                        <a:rPr>
-                          <a:latin typeface="Inter"/>
-                        </a:rPr>
-                        <a:t>passed</a:t>
-                      </a:r>
-                    </a:p>
-                  </a:txBody>
-                  <a:tcPr marL="54864" marR="54864" marT="27432" marB="27432" anchor="ctr">
-                    <a:solidFill>
-                      <a:srgbClr val="F5F7F9"/>
-                    </a:solidFill>
-                  </a:tcPr>
-                </a:tc>
-                <a:tc>
-                  <a:txBody>
-                    <a:bodyPr/>
-                    <a:lstStyle/>
-                    <a:p>
-                      <a:pPr>
-                        <a:defRPr sz="650" b="0">
-                          <a:solidFill>
-                            <a:srgbClr val="0D1117"/>
-                          </a:solidFill>
-                          <a:latin typeface="Inter"/>
-                        </a:defRPr>
-                      </a:pPr>
-                      <a:r>
-                        <a:rPr>
-                          <a:latin typeface="Inter"/>
-                        </a:rPr>
-                        <a:t>sha256:aaaaaaaaaaaaaaaaaaaaaaaaaaaaaaaaaaaaaaaaaaaaaaaaaaaaaaaaaaaaaaaa</a:t>
+                        <a:defRPr sz="720" b="1">
+                          <a:solidFill>
+                            <a:srgbClr val="C6F432"/>
+                          </a:solidFill>
+                          <a:latin typeface="Inter"/>
+                        </a:defRPr>
+                      </a:pPr>
+                      <a:r>
+                        <a:rPr>
+                          <a:latin typeface="Inter"/>
+                        </a:rPr>
+                        <a:t>● Passed</a:t>
                       </a:r>
                     </a:p>
                   </a:txBody>
@@ -34613,7 +32678,7 @@
                     <a:lstStyle/>
                     <a:p>
                       <a:pPr>
-                        <a:defRPr sz="650" b="1">
+                        <a:defRPr sz="720" b="1">
                           <a:solidFill>
                             <a:srgbClr val="0D1117"/>
                           </a:solidFill>
@@ -34640,7 +32705,7 @@
                     <a:lstStyle/>
                     <a:p>
                       <a:pPr>
-                        <a:defRPr sz="650" b="0">
+                        <a:defRPr sz="720" b="0">
                           <a:solidFill>
                             <a:srgbClr val="0D1117"/>
                           </a:solidFill>
@@ -34667,7 +32732,7 @@
                     <a:lstStyle/>
                     <a:p>
                       <a:pPr>
-                        <a:defRPr sz="650" b="0">
+                        <a:defRPr sz="720" b="0">
                           <a:solidFill>
                             <a:srgbClr val="0D1117"/>
                           </a:solidFill>
@@ -34678,7 +32743,7 @@
                         <a:rPr>
                           <a:latin typeface="Inter"/>
                         </a:rPr>
-                        <a:t>gradient_tool</a:t>
+                        <a:t>get_gradient_capabilities</a:t>
                       </a:r>
                     </a:p>
                   </a:txBody>
@@ -34694,7 +32759,7 @@
                     <a:lstStyle/>
                     <a:p>
                       <a:pPr>
-                        <a:defRPr sz="650" b="0">
+                        <a:defRPr sz="720" b="0">
                           <a:solidFill>
                             <a:srgbClr val="0D1117"/>
                           </a:solidFill>
@@ -34705,7 +32770,7 @@
                         <a:rPr>
                           <a:latin typeface="Inter"/>
                         </a:rPr>
-                        <a:t>get_gradient_capabilities</a:t>
+                        <a:t>2026-06-30</a:t>
                       </a:r>
                     </a:p>
                   </a:txBody>
@@ -34721,132 +32786,24 @@
                     <a:lstStyle/>
                     <a:p>
                       <a:pPr>
-                        <a:defRPr sz="650" b="0">
-                          <a:solidFill>
-                            <a:srgbClr val="0D1117"/>
-                          </a:solidFill>
-                          <a:latin typeface="Inter"/>
-                        </a:defRPr>
-                      </a:pPr>
-                      <a:r>
-                        <a:rPr>
-                          <a:latin typeface="Inter"/>
-                        </a:rPr>
-                        <a:t>illustrative</a:t>
-                      </a:r>
-                    </a:p>
-                  </a:txBody>
-                  <a:tcPr marL="54864" marR="54864" marT="27432" marB="27432" anchor="ctr">
-                    <a:solidFill>
-                      <a:srgbClr val="FFFFFF"/>
-                    </a:solidFill>
-                  </a:tcPr>
-                </a:tc>
-                <a:tc>
-                  <a:txBody>
-                    <a:bodyPr/>
-                    <a:lstStyle/>
-                    <a:p>
-                      <a:pPr>
-                        <a:defRPr sz="650" b="0">
-                          <a:solidFill>
-                            <a:srgbClr val="0D1117"/>
-                          </a:solidFill>
-                          <a:latin typeface="Inter"/>
-                        </a:defRPr>
-                      </a:pPr>
-                      <a:r>
-                        <a:rPr>
-                          <a:latin typeface="Inter"/>
-                        </a:rPr>
-                        <a:t>2026-06-30</a:t>
-                      </a:r>
-                    </a:p>
-                  </a:txBody>
-                  <a:tcPr marL="54864" marR="54864" marT="27432" marB="27432" anchor="ctr">
-                    <a:solidFill>
-                      <a:srgbClr val="FFFFFF"/>
-                    </a:solidFill>
-                  </a:tcPr>
-                </a:tc>
-                <a:tc>
-                  <a:txBody>
-                    <a:bodyPr/>
-                    <a:lstStyle/>
-                    <a:p>
-                      <a:pPr>
-                        <a:defRPr sz="650" b="0">
-                          <a:solidFill>
-                            <a:srgbClr val="0D1117"/>
-                          </a:solidFill>
-                          <a:latin typeface="Inter"/>
-                        </a:defRPr>
-                      </a:pPr>
-                      <a:r>
-                        <a:rPr>
-                          <a:latin typeface="Inter"/>
-                        </a:rPr>
-                        <a:t>Illustrative sample data</a:t>
-                      </a:r>
-                    </a:p>
-                  </a:txBody>
-                  <a:tcPr marL="54864" marR="54864" marT="27432" marB="27432" anchor="ctr">
-                    <a:solidFill>
-                      <a:srgbClr val="FFFFFF"/>
-                    </a:solidFill>
-                  </a:tcPr>
-                </a:tc>
-                <a:tc>
-                  <a:txBody>
-                    <a:bodyPr/>
-                    <a:lstStyle/>
-                    <a:p>
-                      <a:pPr>
-                        <a:defRPr sz="650" b="0">
-                          <a:solidFill>
-                            <a:srgbClr val="0D1117"/>
-                          </a:solidFill>
-                          <a:latin typeface="Inter"/>
-                        </a:defRPr>
-                      </a:pPr>
-                      <a:r>
-                        <a:rPr>
-                          <a:latin typeface="Inter"/>
-                        </a:rPr>
-                        <a:t>advisory</a:t>
-                      </a:r>
-                    </a:p>
-                  </a:txBody>
-                  <a:tcPr marL="54864" marR="54864" marT="27432" marB="27432" anchor="ctr">
-                    <a:solidFill>
-                      <a:srgbClr val="FFFFFF"/>
-                    </a:solidFill>
-                  </a:tcPr>
-                </a:tc>
-                <a:tc>
-                  <a:txBody>
-                    <a:bodyPr/>
-                    <a:lstStyle/>
-                    <a:p>
-                      <a:pPr>
-                        <a:defRPr sz="650" b="0">
-                          <a:solidFill>
-                            <a:srgbClr val="0D1117"/>
-                          </a:solidFill>
-                          <a:latin typeface="Inter"/>
-                        </a:defRPr>
-                      </a:pPr>
-                      <a:r>
-                        <a:rPr>
-                          <a:latin typeface="Inter"/>
-                        </a:rPr>
-                        <a:t>sha256:aaaaaaaaaaaaaaaaaaaaaaaaaaaaaaaaaaaaaaaaaaaaaaaaaaaaaaaaaaaaaaaa</a:t>
-                      </a:r>
-                    </a:p>
-                  </a:txBody>
-                  <a:tcPr marL="54864" marR="54864" marT="27432" marB="27432" anchor="ctr">
-                    <a:solidFill>
-                      <a:srgbClr val="FFFFFF"/>
+                        <a:defRPr sz="720" b="1">
+                          <a:solidFill>
+                            <a:srgbClr val="F2A93B"/>
+                          </a:solidFill>
+                          <a:latin typeface="Inter"/>
+                        </a:defRPr>
+                      </a:pPr>
+                      <a:r>
+                        <a:rPr>
+                          <a:latin typeface="Inter"/>
+                        </a:rPr>
+                        <a:t>● Advisory</a:t>
+                      </a:r>
+                    </a:p>
+                  </a:txBody>
+                  <a:tcPr marL="54864" marR="54864" marT="27432" marB="27432" anchor="ctr">
+                    <a:solidFill>
+                      <a:srgbClr val="F5F7F9"/>
                     </a:solidFill>
                   </a:tcPr>
                 </a:tc>
@@ -34858,7 +32815,7 @@
                     <a:lstStyle/>
                     <a:p>
                       <a:pPr>
-                        <a:defRPr sz="650" b="1">
+                        <a:defRPr sz="720" b="1">
                           <a:solidFill>
                             <a:srgbClr val="0D1117"/>
                           </a:solidFill>
@@ -34885,7 +32842,7 @@
                     <a:lstStyle/>
                     <a:p>
                       <a:pPr>
-                        <a:defRPr sz="650" b="0">
+                        <a:defRPr sz="720" b="0">
                           <a:solidFill>
                             <a:srgbClr val="0D1117"/>
                           </a:solidFill>
@@ -34912,7 +32869,7 @@
                     <a:lstStyle/>
                     <a:p>
                       <a:pPr>
-                        <a:defRPr sz="650" b="0">
+                        <a:defRPr sz="720" b="0">
                           <a:solidFill>
                             <a:srgbClr val="0D1117"/>
                           </a:solidFill>
@@ -34923,7 +32880,7 @@
                         <a:rPr>
                           <a:latin typeface="Inter"/>
                         </a:rPr>
-                        <a:t>gradient_tool</a:t>
+                        <a:t>get_portfolio_historical_returns; get_portfolio_attribution</a:t>
                       </a:r>
                     </a:p>
                   </a:txBody>
@@ -34939,7 +32896,7 @@
                     <a:lstStyle/>
                     <a:p>
                       <a:pPr>
-                        <a:defRPr sz="650" b="0">
+                        <a:defRPr sz="720" b="0">
                           <a:solidFill>
                             <a:srgbClr val="0D1117"/>
                           </a:solidFill>
@@ -34950,7 +32907,7 @@
                         <a:rPr>
                           <a:latin typeface="Inter"/>
                         </a:rPr>
-                        <a:t>get_portfolio_historical_returns; get_portfolio_attribution</a:t>
+                        <a:t>2026-06-30</a:t>
                       </a:r>
                     </a:p>
                   </a:txBody>
@@ -34966,126 +32923,18 @@
                     <a:lstStyle/>
                     <a:p>
                       <a:pPr>
-                        <a:defRPr sz="650" b="0">
-                          <a:solidFill>
-                            <a:srgbClr val="0D1117"/>
-                          </a:solidFill>
-                          <a:latin typeface="Inter"/>
-                        </a:defRPr>
-                      </a:pPr>
-                      <a:r>
-                        <a:rPr>
-                          <a:latin typeface="Inter"/>
-                        </a:rPr>
-                        <a:t>all sections</a:t>
-                      </a:r>
-                    </a:p>
-                  </a:txBody>
-                  <a:tcPr marL="54864" marR="54864" marT="27432" marB="27432" anchor="ctr">
-                    <a:solidFill>
-                      <a:srgbClr val="F5F7F9"/>
-                    </a:solidFill>
-                  </a:tcPr>
-                </a:tc>
-                <a:tc>
-                  <a:txBody>
-                    <a:bodyPr/>
-                    <a:lstStyle/>
-                    <a:p>
-                      <a:pPr>
-                        <a:defRPr sz="650" b="0">
-                          <a:solidFill>
-                            <a:srgbClr val="0D1117"/>
-                          </a:solidFill>
-                          <a:latin typeface="Inter"/>
-                        </a:defRPr>
-                      </a:pPr>
-                      <a:r>
-                        <a:rPr>
-                          <a:latin typeface="Inter"/>
-                        </a:rPr>
-                        <a:t>2026-06-30</a:t>
-                      </a:r>
-                    </a:p>
-                  </a:txBody>
-                  <a:tcPr marL="54864" marR="54864" marT="27432" marB="27432" anchor="ctr">
-                    <a:solidFill>
-                      <a:srgbClr val="F5F7F9"/>
-                    </a:solidFill>
-                  </a:tcPr>
-                </a:tc>
-                <a:tc>
-                  <a:txBody>
-                    <a:bodyPr/>
-                    <a:lstStyle/>
-                    <a:p>
-                      <a:pPr>
-                        <a:defRPr sz="650" b="0">
-                          <a:solidFill>
-                            <a:srgbClr val="0D1117"/>
-                          </a:solidFill>
-                          <a:latin typeface="Inter"/>
-                        </a:defRPr>
-                      </a:pPr>
-                      <a:r>
-                        <a:rPr>
-                          <a:latin typeface="Inter"/>
-                        </a:rPr>
-                        <a:t>Illustrative sample data</a:t>
-                      </a:r>
-                    </a:p>
-                  </a:txBody>
-                  <a:tcPr marL="54864" marR="54864" marT="27432" marB="27432" anchor="ctr">
-                    <a:solidFill>
-                      <a:srgbClr val="F5F7F9"/>
-                    </a:solidFill>
-                  </a:tcPr>
-                </a:tc>
-                <a:tc>
-                  <a:txBody>
-                    <a:bodyPr/>
-                    <a:lstStyle/>
-                    <a:p>
-                      <a:pPr>
-                        <a:defRPr sz="650" b="0">
-                          <a:solidFill>
-                            <a:srgbClr val="0D1117"/>
-                          </a:solidFill>
-                          <a:latin typeface="Inter"/>
-                        </a:defRPr>
-                      </a:pPr>
-                      <a:r>
-                        <a:rPr>
-                          <a:latin typeface="Inter"/>
-                        </a:rPr>
-                        <a:t>degraded</a:t>
-                      </a:r>
-                    </a:p>
-                  </a:txBody>
-                  <a:tcPr marL="54864" marR="54864" marT="27432" marB="27432" anchor="ctr">
-                    <a:solidFill>
-                      <a:srgbClr val="F5F7F9"/>
-                    </a:solidFill>
-                  </a:tcPr>
-                </a:tc>
-                <a:tc>
-                  <a:txBody>
-                    <a:bodyPr/>
-                    <a:lstStyle/>
-                    <a:p>
-                      <a:pPr>
-                        <a:defRPr sz="650" b="0">
-                          <a:solidFill>
-                            <a:srgbClr val="0D1117"/>
-                          </a:solidFill>
-                          <a:latin typeface="Inter"/>
-                        </a:defRPr>
-                      </a:pPr>
-                      <a:r>
-                        <a:rPr>
-                          <a:latin typeface="Inter"/>
-                        </a:rPr>
-                        <a:t>sha256:aaaaaaaaaaaaaaaaaaaaaaaaaaaaaaaaaaaaaaaaaaaaaaaaaaaaaaaaaaaaaaaa</a:t>
+                        <a:defRPr sz="720" b="1">
+                          <a:solidFill>
+                            <a:srgbClr val="F2A93B"/>
+                          </a:solidFill>
+                          <a:latin typeface="Inter"/>
+                        </a:defRPr>
+                      </a:pPr>
+                      <a:r>
+                        <a:rPr>
+                          <a:latin typeface="Inter"/>
+                        </a:rPr>
+                        <a:t>● Incomplete</a:t>
                       </a:r>
                     </a:p>
                   </a:txBody>
@@ -35103,7 +32952,7 @@
                     <a:lstStyle/>
                     <a:p>
                       <a:pPr>
-                        <a:defRPr sz="650" b="1">
+                        <a:defRPr sz="720" b="1">
                           <a:solidFill>
                             <a:srgbClr val="0D1117"/>
                           </a:solidFill>
@@ -35130,7 +32979,7 @@
                     <a:lstStyle/>
                     <a:p>
                       <a:pPr>
-                        <a:defRPr sz="650" b="0">
+                        <a:defRPr sz="720" b="0">
                           <a:solidFill>
                             <a:srgbClr val="0D1117"/>
                           </a:solidFill>
@@ -35157,7 +33006,7 @@
                     <a:lstStyle/>
                     <a:p>
                       <a:pPr>
-                        <a:defRPr sz="650" b="0">
+                        <a:defRPr sz="720" b="0">
                           <a:solidFill>
                             <a:srgbClr val="0D1117"/>
                           </a:solidFill>
@@ -35168,7 +33017,7 @@
                         <a:rPr>
                           <a:latin typeface="Inter"/>
                         </a:rPr>
-                        <a:t>gradient_tool</a:t>
+                        <a:t>get_private_markets_holdings</a:t>
                       </a:r>
                     </a:p>
                   </a:txBody>
@@ -35184,7 +33033,7 @@
                     <a:lstStyle/>
                     <a:p>
                       <a:pPr>
-                        <a:defRPr sz="650" b="0">
+                        <a:defRPr sz="720" b="0">
                           <a:solidFill>
                             <a:srgbClr val="0D1117"/>
                           </a:solidFill>
@@ -35195,7 +33044,7 @@
                         <a:rPr>
                           <a:latin typeface="Inter"/>
                         </a:rPr>
-                        <a:t>get_private_markets_holdings</a:t>
+                        <a:t>2026-06-30</a:t>
                       </a:r>
                     </a:p>
                   </a:txBody>
@@ -35211,132 +33060,24 @@
                     <a:lstStyle/>
                     <a:p>
                       <a:pPr>
-                        <a:defRPr sz="650" b="0">
-                          <a:solidFill>
-                            <a:srgbClr val="0D1117"/>
-                          </a:solidFill>
-                          <a:latin typeface="Inter"/>
-                        </a:defRPr>
-                      </a:pPr>
-                      <a:r>
-                        <a:rPr>
-                          <a:latin typeface="Inter"/>
-                        </a:rPr>
-                        <a:t>paged; server aggregates</a:t>
-                      </a:r>
-                    </a:p>
-                  </a:txBody>
-                  <a:tcPr marL="54864" marR="54864" marT="27432" marB="27432" anchor="ctr">
-                    <a:solidFill>
-                      <a:srgbClr val="FFFFFF"/>
-                    </a:solidFill>
-                  </a:tcPr>
-                </a:tc>
-                <a:tc>
-                  <a:txBody>
-                    <a:bodyPr/>
-                    <a:lstStyle/>
-                    <a:p>
-                      <a:pPr>
-                        <a:defRPr sz="650" b="0">
-                          <a:solidFill>
-                            <a:srgbClr val="0D1117"/>
-                          </a:solidFill>
-                          <a:latin typeface="Inter"/>
-                        </a:defRPr>
-                      </a:pPr>
-                      <a:r>
-                        <a:rPr>
-                          <a:latin typeface="Inter"/>
-                        </a:rPr>
-                        <a:t>2026-06-30</a:t>
-                      </a:r>
-                    </a:p>
-                  </a:txBody>
-                  <a:tcPr marL="54864" marR="54864" marT="27432" marB="27432" anchor="ctr">
-                    <a:solidFill>
-                      <a:srgbClr val="FFFFFF"/>
-                    </a:solidFill>
-                  </a:tcPr>
-                </a:tc>
-                <a:tc>
-                  <a:txBody>
-                    <a:bodyPr/>
-                    <a:lstStyle/>
-                    <a:p>
-                      <a:pPr>
-                        <a:defRPr sz="650" b="0">
-                          <a:solidFill>
-                            <a:srgbClr val="0D1117"/>
-                          </a:solidFill>
-                          <a:latin typeface="Inter"/>
-                        </a:defRPr>
-                      </a:pPr>
-                      <a:r>
-                        <a:rPr>
-                          <a:latin typeface="Inter"/>
-                        </a:rPr>
-                        <a:t>Illustrative sample data</a:t>
-                      </a:r>
-                    </a:p>
-                  </a:txBody>
-                  <a:tcPr marL="54864" marR="54864" marT="27432" marB="27432" anchor="ctr">
-                    <a:solidFill>
-                      <a:srgbClr val="FFFFFF"/>
-                    </a:solidFill>
-                  </a:tcPr>
-                </a:tc>
-                <a:tc>
-                  <a:txBody>
-                    <a:bodyPr/>
-                    <a:lstStyle/>
-                    <a:p>
-                      <a:pPr>
-                        <a:defRPr sz="650" b="0">
-                          <a:solidFill>
-                            <a:srgbClr val="0D1117"/>
-                          </a:solidFill>
-                          <a:latin typeface="Inter"/>
-                        </a:defRPr>
-                      </a:pPr>
-                      <a:r>
-                        <a:rPr>
-                          <a:latin typeface="Inter"/>
-                        </a:rPr>
-                        <a:t>partial</a:t>
-                      </a:r>
-                    </a:p>
-                  </a:txBody>
-                  <a:tcPr marL="54864" marR="54864" marT="27432" marB="27432" anchor="ctr">
-                    <a:solidFill>
-                      <a:srgbClr val="FFFFFF"/>
-                    </a:solidFill>
-                  </a:tcPr>
-                </a:tc>
-                <a:tc>
-                  <a:txBody>
-                    <a:bodyPr/>
-                    <a:lstStyle/>
-                    <a:p>
-                      <a:pPr>
-                        <a:defRPr sz="650" b="0">
-                          <a:solidFill>
-                            <a:srgbClr val="0D1117"/>
-                          </a:solidFill>
-                          <a:latin typeface="Inter"/>
-                        </a:defRPr>
-                      </a:pPr>
-                      <a:r>
-                        <a:rPr>
-                          <a:latin typeface="Inter"/>
-                        </a:rPr>
-                        <a:t>sha256:aaaaaaaaaaaaaaaaaaaaaaaaaaaaaaaaaaaaaaaaaaaaaaaaaaaaaaaaaaaaaaaa</a:t>
-                      </a:r>
-                    </a:p>
-                  </a:txBody>
-                  <a:tcPr marL="54864" marR="54864" marT="27432" marB="27432" anchor="ctr">
-                    <a:solidFill>
-                      <a:srgbClr val="FFFFFF"/>
+                        <a:defRPr sz="720" b="1">
+                          <a:solidFill>
+                            <a:srgbClr val="F2A93B"/>
+                          </a:solidFill>
+                          <a:latin typeface="Inter"/>
+                        </a:defRPr>
+                      </a:pPr>
+                      <a:r>
+                        <a:rPr>
+                          <a:latin typeface="Inter"/>
+                        </a:rPr>
+                        <a:t>● Partly available</a:t>
+                      </a:r>
+                    </a:p>
+                  </a:txBody>
+                  <a:tcPr marL="54864" marR="54864" marT="27432" marB="27432" anchor="ctr">
+                    <a:solidFill>
+                      <a:srgbClr val="F5F7F9"/>
                     </a:solidFill>
                   </a:tcPr>
                 </a:tc>
@@ -35347,7 +33088,7 @@
       </p:graphicFrame>
       <p:sp>
         <p:nvSpPr>
-          <p:cNvPr id="9" name="TextBox 8"/>
+          <p:cNvPr id="8" name="TextBox 7"/>
           <p:cNvSpPr txBox="1"/>
           <p:nvPr/>
         </p:nvSpPr>
@@ -35389,7 +33130,7 @@
       </p:sp>
       <p:sp>
         <p:nvSpPr>
-          <p:cNvPr id="10" name="Rectangle 9"/>
+          <p:cNvPr id="9" name="Rectangle 8"/>
           <p:cNvSpPr/>
           <p:nvPr/>
         </p:nvSpPr>
@@ -35438,7 +33179,7 @@
       </p:sp>
       <p:sp>
         <p:nvSpPr>
-          <p:cNvPr id="11" name="TextBox 10"/>
+          <p:cNvPr id="10" name="TextBox 9"/>
           <p:cNvSpPr txBox="1"/>
           <p:nvPr/>
         </p:nvSpPr>
@@ -35480,7 +33221,7 @@
       </p:sp>
       <p:sp>
         <p:nvSpPr>
-          <p:cNvPr id="12" name="TextBox 11"/>
+          <p:cNvPr id="11" name="TextBox 10"/>
           <p:cNvSpPr txBox="1"/>
           <p:nvPr/>
         </p:nvSpPr>
@@ -35522,7 +33263,7 @@
       </p:sp>
       <p:sp>
         <p:nvSpPr>
-          <p:cNvPr id="13" name="TextBox 12"/>
+          <p:cNvPr id="12" name="TextBox 11"/>
           <p:cNvSpPr txBox="1"/>
           <p:nvPr/>
         </p:nvSpPr>
@@ -35637,48 +33378,6 @@
         </p:nvSpPr>
         <p:spPr>
           <a:xfrm>
-            <a:off x="5897880" y="310896"/>
-            <a:ext cx="4800600" cy="256032"/>
-          </a:xfrm>
-          <a:prstGeom prst="rect">
-            <a:avLst/>
-          </a:prstGeom>
-          <a:noFill/>
-        </p:spPr>
-        <p:txBody>
-          <a:bodyPr wrap="none" lIns="9144" rIns="9144" tIns="9144" bIns="9144" anchor="t">
-            <a:spAutoFit/>
-          </a:bodyPr>
-          <a:lstStyle/>
-          <a:p>
-            <a:pPr algn="r">
-              <a:spcAft>
-                <a:spcPts val="0"/>
-              </a:spcAft>
-              <a:defRPr sz="680" b="1">
-                <a:solidFill>
-                  <a:srgbClr val="4F6B00"/>
-                </a:solidFill>
-                <a:latin typeface="Inter"/>
-              </a:defRPr>
-            </a:pPr>
-            <a:r>
-              <a:rPr>
-                <a:latin typeface="Inter"/>
-              </a:rPr>
-              <a:t>Illustrative, Gradient Maintained — demo data, not the client's holdings or managers</a:t>
-            </a:r>
-          </a:p>
-        </p:txBody>
-      </p:sp>
-      <p:sp>
-        <p:nvSpPr>
-          <p:cNvPr id="4" name="TextBox 3"/>
-          <p:cNvSpPr txBox="1"/>
-          <p:nvPr/>
-        </p:nvSpPr>
-        <p:spPr>
-          <a:xfrm>
             <a:off x="640080" y="566928"/>
             <a:ext cx="10058400" cy="530352"/>
           </a:xfrm>
@@ -35708,14 +33407,14 @@
               <a:rPr>
                 <a:latin typeface="Inter"/>
               </a:rPr>
-              <a:t>Appendix — Server Metric Methods and Disclosures</a:t>
+              <a:t>Appendix — Sources and methods — continued</a:t>
             </a:r>
           </a:p>
         </p:txBody>
       </p:sp>
       <p:sp>
         <p:nvSpPr>
-          <p:cNvPr id="5" name="Rectangle 4"/>
+          <p:cNvPr id="4" name="Rectangle 3"/>
           <p:cNvSpPr/>
           <p:nvPr/>
         </p:nvSpPr>
@@ -35764,7 +33463,7 @@
       </p:sp>
       <p:sp>
         <p:nvSpPr>
-          <p:cNvPr id="6" name="Rectangle 5"/>
+          <p:cNvPr id="5" name="Rectangle 4"/>
           <p:cNvSpPr/>
           <p:nvPr/>
         </p:nvSpPr>
@@ -35813,7 +33512,7 @@
       </p:sp>
       <p:sp>
         <p:nvSpPr>
-          <p:cNvPr id="7" name="TextBox 6"/>
+          <p:cNvPr id="6" name="TextBox 5"/>
           <p:cNvSpPr txBox="1"/>
           <p:nvPr/>
         </p:nvSpPr>
@@ -35848,14 +33547,14 @@
               <a:rPr>
                 <a:latin typeface="Inter"/>
               </a:rPr>
-              <a:t>B</a:t>
+              <a:t>A</a:t>
             </a:r>
           </a:p>
         </p:txBody>
       </p:sp>
       <p:sp>
         <p:nvSpPr>
-          <p:cNvPr id="8" name="TextBox 7"/>
+          <p:cNvPr id="7" name="TextBox 6"/>
           <p:cNvSpPr txBox="1"/>
           <p:nvPr/>
         </p:nvSpPr>
@@ -35890,6 +33589,1371 @@
               <a:rPr>
                 <a:latin typeface="Inter"/>
               </a:rPr>
+              <a:t>SOURCE AUDIT TRAIL</a:t>
+            </a:r>
+          </a:p>
+        </p:txBody>
+      </p:sp>
+      <p:graphicFrame>
+        <p:nvGraphicFramePr>
+          <p:cNvPr id="8" name="Table 7"/>
+          <p:cNvGraphicFramePr>
+            <a:graphicFrameLocks noGrp="1"/>
+          </p:cNvGraphicFramePr>
+          <p:nvPr/>
+        </p:nvGraphicFramePr>
+        <p:xfrm>
+          <a:off x="640080" y="1600200"/>
+          <a:ext cx="10908792" cy="4416552"/>
+        </p:xfrm>
+        <a:graphic>
+          <a:graphicData uri="http://schemas.openxmlformats.org/drawingml/2006/table">
+            <a:tbl>
+              <a:tblPr firstRow="1" bandRow="1">
+                <a:tableStyleId>{5C22544A-7EE6-4342-B048-85BDC9FD1C3A}</a:tableStyleId>
+              </a:tblPr>
+              <a:tblGrid>
+                <a:gridCol w="2011680"/>
+                <a:gridCol w="4448556"/>
+                <a:gridCol w="4448556"/>
+              </a:tblGrid>
+              <a:tr h="441655">
+                <a:tc>
+                  <a:txBody>
+                    <a:bodyPr/>
+                    <a:lstStyle/>
+                    <a:p>
+                      <a:pPr>
+                        <a:defRPr sz="750" b="1">
+                          <a:solidFill>
+                            <a:srgbClr val="FFFFFF"/>
+                          </a:solidFill>
+                          <a:latin typeface="Inter"/>
+                        </a:defRPr>
+                      </a:pPr>
+                      <a:r>
+                        <a:rPr>
+                          <a:latin typeface="Inter"/>
+                        </a:rPr>
+                        <a:t>Tag</a:t>
+                      </a:r>
+                    </a:p>
+                  </a:txBody>
+                  <a:tcPr marL="54864" marR="54864" marT="27432" marB="27432" anchor="ctr">
+                    <a:solidFill>
+                      <a:srgbClr val="0D1117"/>
+                    </a:solidFill>
+                  </a:tcPr>
+                </a:tc>
+                <a:tc>
+                  <a:txBody>
+                    <a:bodyPr/>
+                    <a:lstStyle/>
+                    <a:p>
+                      <a:pPr>
+                        <a:defRPr sz="750" b="1">
+                          <a:solidFill>
+                            <a:srgbClr val="FFFFFF"/>
+                          </a:solidFill>
+                          <a:latin typeface="Inter"/>
+                        </a:defRPr>
+                      </a:pPr>
+                      <a:r>
+                        <a:rPr>
+                          <a:latin typeface="Inter"/>
+                        </a:rPr>
+                        <a:t>Key parameters</a:t>
+                      </a:r>
+                    </a:p>
+                  </a:txBody>
+                  <a:tcPr marL="54864" marR="54864" marT="27432" marB="27432" anchor="ctr">
+                    <a:solidFill>
+                      <a:srgbClr val="0D1117"/>
+                    </a:solidFill>
+                  </a:tcPr>
+                </a:tc>
+                <a:tc>
+                  <a:txBody>
+                    <a:bodyPr/>
+                    <a:lstStyle/>
+                    <a:p>
+                      <a:pPr>
+                        <a:defRPr sz="750" b="1">
+                          <a:solidFill>
+                            <a:srgbClr val="FFFFFF"/>
+                          </a:solidFill>
+                          <a:latin typeface="Inter"/>
+                        </a:defRPr>
+                      </a:pPr>
+                      <a:r>
+                        <a:rPr>
+                          <a:latin typeface="Inter"/>
+                        </a:rPr>
+                        <a:t>Digest</a:t>
+                      </a:r>
+                    </a:p>
+                  </a:txBody>
+                  <a:tcPr marL="54864" marR="54864" marT="27432" marB="27432" anchor="ctr">
+                    <a:solidFill>
+                      <a:srgbClr val="0D1117"/>
+                    </a:solidFill>
+                  </a:tcPr>
+                </a:tc>
+              </a:tr>
+              <a:tr h="441655">
+                <a:tc>
+                  <a:txBody>
+                    <a:bodyPr/>
+                    <a:lstStyle/>
+                    <a:p>
+                      <a:pPr>
+                        <a:defRPr sz="800" b="1">
+                          <a:solidFill>
+                            <a:srgbClr val="0D1117"/>
+                          </a:solidFill>
+                          <a:latin typeface="Inter"/>
+                        </a:defRPr>
+                      </a:pPr>
+                      <a:r>
+                        <a:rPr>
+                          <a:latin typeface="Inter"/>
+                        </a:rPr>
+                        <a:t>S1</a:t>
+                      </a:r>
+                    </a:p>
+                  </a:txBody>
+                  <a:tcPr marL="54864" marR="54864" marT="27432" marB="27432" anchor="ctr">
+                    <a:solidFill>
+                      <a:srgbClr val="FFFFFF"/>
+                    </a:solidFill>
+                  </a:tcPr>
+                </a:tc>
+                <a:tc>
+                  <a:txBody>
+                    <a:bodyPr/>
+                    <a:lstStyle/>
+                    <a:p>
+                      <a:pPr>
+                        <a:defRPr sz="800" b="0">
+                          <a:solidFill>
+                            <a:srgbClr val="0D1117"/>
+                          </a:solidFill>
+                          <a:latin typeface="Inter"/>
+                        </a:defRPr>
+                      </a:pPr>
+                      <a:r>
+                        <a:rPr>
+                          <a:latin typeface="Inter"/>
+                        </a:rPr>
+                        <a:t>org=test</a:t>
+                      </a:r>
+                    </a:p>
+                  </a:txBody>
+                  <a:tcPr marL="54864" marR="54864" marT="27432" marB="27432" anchor="ctr">
+                    <a:solidFill>
+                      <a:srgbClr val="FFFFFF"/>
+                    </a:solidFill>
+                  </a:tcPr>
+                </a:tc>
+                <a:tc>
+                  <a:txBody>
+                    <a:bodyPr/>
+                    <a:lstStyle/>
+                    <a:p>
+                      <a:pPr>
+                        <a:defRPr sz="800" b="0">
+                          <a:solidFill>
+                            <a:srgbClr val="0D1117"/>
+                          </a:solidFill>
+                          <a:latin typeface="Inter"/>
+                        </a:defRPr>
+                      </a:pPr>
+                      <a:r>
+                        <a:rPr>
+                          <a:latin typeface="Inter"/>
+                        </a:rPr>
+                        <a:t>sha256:aaaaaaaaaaaaaaaaaaaaaaaaaaaaaaaaaaaaaaaaaaaaaaaaaaaaaaaaaaaaaaaa</a:t>
+                      </a:r>
+                    </a:p>
+                  </a:txBody>
+                  <a:tcPr marL="54864" marR="54864" marT="27432" marB="27432" anchor="ctr">
+                    <a:solidFill>
+                      <a:srgbClr val="FFFFFF"/>
+                    </a:solidFill>
+                  </a:tcPr>
+                </a:tc>
+              </a:tr>
+              <a:tr h="441655">
+                <a:tc>
+                  <a:txBody>
+                    <a:bodyPr/>
+                    <a:lstStyle/>
+                    <a:p>
+                      <a:pPr>
+                        <a:defRPr sz="800" b="1">
+                          <a:solidFill>
+                            <a:srgbClr val="0D1117"/>
+                          </a:solidFill>
+                          <a:latin typeface="Inter"/>
+                        </a:defRPr>
+                      </a:pPr>
+                      <a:r>
+                        <a:rPr>
+                          <a:latin typeface="Inter"/>
+                        </a:rPr>
+                        <a:t>S2</a:t>
+                      </a:r>
+                    </a:p>
+                  </a:txBody>
+                  <a:tcPr marL="54864" marR="54864" marT="27432" marB="27432" anchor="ctr">
+                    <a:solidFill>
+                      <a:srgbClr val="F5F7F9"/>
+                    </a:solidFill>
+                  </a:tcPr>
+                </a:tc>
+                <a:tc>
+                  <a:txBody>
+                    <a:bodyPr/>
+                    <a:lstStyle/>
+                    <a:p>
+                      <a:pPr>
+                        <a:defRPr sz="800" b="0">
+                          <a:solidFill>
+                            <a:srgbClr val="0D1117"/>
+                          </a:solidFill>
+                          <a:latin typeface="Inter"/>
+                        </a:defRPr>
+                      </a:pPr>
+                      <a:r>
+                        <a:rPr>
+                          <a:latin typeface="Inter"/>
+                        </a:rPr>
+                        <a:t>allocation_tree</a:t>
+                      </a:r>
+                    </a:p>
+                  </a:txBody>
+                  <a:tcPr marL="54864" marR="54864" marT="27432" marB="27432" anchor="ctr">
+                    <a:solidFill>
+                      <a:srgbClr val="F5F7F9"/>
+                    </a:solidFill>
+                  </a:tcPr>
+                </a:tc>
+                <a:tc>
+                  <a:txBody>
+                    <a:bodyPr/>
+                    <a:lstStyle/>
+                    <a:p>
+                      <a:pPr>
+                        <a:defRPr sz="800" b="0">
+                          <a:solidFill>
+                            <a:srgbClr val="0D1117"/>
+                          </a:solidFill>
+                          <a:latin typeface="Inter"/>
+                        </a:defRPr>
+                      </a:pPr>
+                      <a:r>
+                        <a:rPr>
+                          <a:latin typeface="Inter"/>
+                        </a:rPr>
+                        <a:t>sha256:aaaaaaaaaaaaaaaaaaaaaaaaaaaaaaaaaaaaaaaaaaaaaaaaaaaaaaaaaaaaaaaa</a:t>
+                      </a:r>
+                    </a:p>
+                  </a:txBody>
+                  <a:tcPr marL="54864" marR="54864" marT="27432" marB="27432" anchor="ctr">
+                    <a:solidFill>
+                      <a:srgbClr val="F5F7F9"/>
+                    </a:solidFill>
+                  </a:tcPr>
+                </a:tc>
+              </a:tr>
+              <a:tr h="441655">
+                <a:tc>
+                  <a:txBody>
+                    <a:bodyPr/>
+                    <a:lstStyle/>
+                    <a:p>
+                      <a:pPr>
+                        <a:defRPr sz="800" b="1">
+                          <a:solidFill>
+                            <a:srgbClr val="0D1117"/>
+                          </a:solidFill>
+                          <a:latin typeface="Inter"/>
+                        </a:defRPr>
+                      </a:pPr>
+                      <a:r>
+                        <a:rPr>
+                          <a:latin typeface="Inter"/>
+                        </a:rPr>
+                        <a:t>S3</a:t>
+                      </a:r>
+                    </a:p>
+                  </a:txBody>
+                  <a:tcPr marL="54864" marR="54864" marT="27432" marB="27432" anchor="ctr">
+                    <a:solidFill>
+                      <a:srgbClr val="FFFFFF"/>
+                    </a:solidFill>
+                  </a:tcPr>
+                </a:tc>
+                <a:tc>
+                  <a:txBody>
+                    <a:bodyPr/>
+                    <a:lstStyle/>
+                    <a:p>
+                      <a:pPr>
+                        <a:defRPr sz="800" b="0">
+                          <a:solidFill>
+                            <a:srgbClr val="0D1117"/>
+                          </a:solidFill>
+                          <a:latin typeface="Inter"/>
+                        </a:defRPr>
+                      </a:pPr>
+                      <a:r>
+                        <a:rPr>
+                          <a:latin typeface="Inter"/>
+                        </a:rPr>
+                        <a:t>portfolio=test</a:t>
+                      </a:r>
+                    </a:p>
+                  </a:txBody>
+                  <a:tcPr marL="54864" marR="54864" marT="27432" marB="27432" anchor="ctr">
+                    <a:solidFill>
+                      <a:srgbClr val="FFFFFF"/>
+                    </a:solidFill>
+                  </a:tcPr>
+                </a:tc>
+                <a:tc>
+                  <a:txBody>
+                    <a:bodyPr/>
+                    <a:lstStyle/>
+                    <a:p>
+                      <a:pPr>
+                        <a:defRPr sz="800" b="0">
+                          <a:solidFill>
+                            <a:srgbClr val="0D1117"/>
+                          </a:solidFill>
+                          <a:latin typeface="Inter"/>
+                        </a:defRPr>
+                      </a:pPr>
+                      <a:r>
+                        <a:rPr>
+                          <a:latin typeface="Inter"/>
+                        </a:rPr>
+                        <a:t>sha256:aaaaaaaaaaaaaaaaaaaaaaaaaaaaaaaaaaaaaaaaaaaaaaaaaaaaaaaaaaaaaaaa</a:t>
+                      </a:r>
+                    </a:p>
+                  </a:txBody>
+                  <a:tcPr marL="54864" marR="54864" marT="27432" marB="27432" anchor="ctr">
+                    <a:solidFill>
+                      <a:srgbClr val="FFFFFF"/>
+                    </a:solidFill>
+                  </a:tcPr>
+                </a:tc>
+              </a:tr>
+              <a:tr h="441655">
+                <a:tc>
+                  <a:txBody>
+                    <a:bodyPr/>
+                    <a:lstStyle/>
+                    <a:p>
+                      <a:pPr>
+                        <a:defRPr sz="800" b="1">
+                          <a:solidFill>
+                            <a:srgbClr val="0D1117"/>
+                          </a:solidFill>
+                          <a:latin typeface="Inter"/>
+                        </a:defRPr>
+                      </a:pPr>
+                      <a:r>
+                        <a:rPr>
+                          <a:latin typeface="Inter"/>
+                        </a:rPr>
+                        <a:t>S4</a:t>
+                      </a:r>
+                    </a:p>
+                  </a:txBody>
+                  <a:tcPr marL="54864" marR="54864" marT="27432" marB="27432" anchor="ctr">
+                    <a:solidFill>
+                      <a:srgbClr val="F5F7F9"/>
+                    </a:solidFill>
+                  </a:tcPr>
+                </a:tc>
+                <a:tc>
+                  <a:txBody>
+                    <a:bodyPr/>
+                    <a:lstStyle/>
+                    <a:p>
+                      <a:pPr>
+                        <a:defRPr sz="800" b="0">
+                          <a:solidFill>
+                            <a:srgbClr val="0D1117"/>
+                          </a:solidFill>
+                          <a:latin typeface="Inter"/>
+                        </a:defRPr>
+                      </a:pPr>
+                      <a:r>
+                        <a:rPr>
+                          <a:latin typeface="Inter"/>
+                        </a:rPr>
+                        <a:t>all pages</a:t>
+                      </a:r>
+                    </a:p>
+                  </a:txBody>
+                  <a:tcPr marL="54864" marR="54864" marT="27432" marB="27432" anchor="ctr">
+                    <a:solidFill>
+                      <a:srgbClr val="F5F7F9"/>
+                    </a:solidFill>
+                  </a:tcPr>
+                </a:tc>
+                <a:tc>
+                  <a:txBody>
+                    <a:bodyPr/>
+                    <a:lstStyle/>
+                    <a:p>
+                      <a:pPr>
+                        <a:defRPr sz="800" b="0">
+                          <a:solidFill>
+                            <a:srgbClr val="0D1117"/>
+                          </a:solidFill>
+                          <a:latin typeface="Inter"/>
+                        </a:defRPr>
+                      </a:pPr>
+                      <a:r>
+                        <a:rPr>
+                          <a:latin typeface="Inter"/>
+                        </a:rPr>
+                        <a:t>sha256:aaaaaaaaaaaaaaaaaaaaaaaaaaaaaaaaaaaaaaaaaaaaaaaaaaaaaaaaaaaaaaaa</a:t>
+                      </a:r>
+                    </a:p>
+                  </a:txBody>
+                  <a:tcPr marL="54864" marR="54864" marT="27432" marB="27432" anchor="ctr">
+                    <a:solidFill>
+                      <a:srgbClr val="F5F7F9"/>
+                    </a:solidFill>
+                  </a:tcPr>
+                </a:tc>
+              </a:tr>
+              <a:tr h="441655">
+                <a:tc>
+                  <a:txBody>
+                    <a:bodyPr/>
+                    <a:lstStyle/>
+                    <a:p>
+                      <a:pPr>
+                        <a:defRPr sz="800" b="1">
+                          <a:solidFill>
+                            <a:srgbClr val="0D1117"/>
+                          </a:solidFill>
+                          <a:latin typeface="Inter"/>
+                        </a:defRPr>
+                      </a:pPr>
+                      <a:r>
+                        <a:rPr>
+                          <a:latin typeface="Inter"/>
+                        </a:rPr>
+                        <a:t>S5</a:t>
+                      </a:r>
+                    </a:p>
+                  </a:txBody>
+                  <a:tcPr marL="54864" marR="54864" marT="27432" marB="27432" anchor="ctr">
+                    <a:solidFill>
+                      <a:srgbClr val="FFFFFF"/>
+                    </a:solidFill>
+                  </a:tcPr>
+                </a:tc>
+                <a:tc>
+                  <a:txBody>
+                    <a:bodyPr/>
+                    <a:lstStyle/>
+                    <a:p>
+                      <a:pPr>
+                        <a:defRPr sz="800" b="0">
+                          <a:solidFill>
+                            <a:srgbClr val="0D1117"/>
+                          </a:solidFill>
+                          <a:latin typeface="Inter"/>
+                        </a:defRPr>
+                      </a:pPr>
+                      <a:r>
+                        <a:rPr>
+                          <a:latin typeface="Inter"/>
+                        </a:rPr>
+                        <a:t>baseline</a:t>
+                      </a:r>
+                    </a:p>
+                  </a:txBody>
+                  <a:tcPr marL="54864" marR="54864" marT="27432" marB="27432" anchor="ctr">
+                    <a:solidFill>
+                      <a:srgbClr val="FFFFFF"/>
+                    </a:solidFill>
+                  </a:tcPr>
+                </a:tc>
+                <a:tc>
+                  <a:txBody>
+                    <a:bodyPr/>
+                    <a:lstStyle/>
+                    <a:p>
+                      <a:pPr>
+                        <a:defRPr sz="800" b="0">
+                          <a:solidFill>
+                            <a:srgbClr val="0D1117"/>
+                          </a:solidFill>
+                          <a:latin typeface="Inter"/>
+                        </a:defRPr>
+                      </a:pPr>
+                      <a:r>
+                        <a:rPr>
+                          <a:latin typeface="Inter"/>
+                        </a:rPr>
+                        <a:t>sha256:aaaaaaaaaaaaaaaaaaaaaaaaaaaaaaaaaaaaaaaaaaaaaaaaaaaaaaaaaaaaaaaa</a:t>
+                      </a:r>
+                    </a:p>
+                  </a:txBody>
+                  <a:tcPr marL="54864" marR="54864" marT="27432" marB="27432" anchor="ctr">
+                    <a:solidFill>
+                      <a:srgbClr val="FFFFFF"/>
+                    </a:solidFill>
+                  </a:tcPr>
+                </a:tc>
+              </a:tr>
+              <a:tr h="441655">
+                <a:tc>
+                  <a:txBody>
+                    <a:bodyPr/>
+                    <a:lstStyle/>
+                    <a:p>
+                      <a:pPr>
+                        <a:defRPr sz="800" b="1">
+                          <a:solidFill>
+                            <a:srgbClr val="0D1117"/>
+                          </a:solidFill>
+                          <a:latin typeface="Inter"/>
+                        </a:defRPr>
+                      </a:pPr>
+                      <a:r>
+                        <a:rPr>
+                          <a:latin typeface="Inter"/>
+                        </a:rPr>
+                        <a:t>S6</a:t>
+                      </a:r>
+                    </a:p>
+                  </a:txBody>
+                  <a:tcPr marL="54864" marR="54864" marT="27432" marB="27432" anchor="ctr">
+                    <a:solidFill>
+                      <a:srgbClr val="F5F7F9"/>
+                    </a:solidFill>
+                  </a:tcPr>
+                </a:tc>
+                <a:tc>
+                  <a:txBody>
+                    <a:bodyPr/>
+                    <a:lstStyle/>
+                    <a:p>
+                      <a:pPr>
+                        <a:defRPr sz="800" b="0">
+                          <a:solidFill>
+                            <a:srgbClr val="0D1117"/>
+                          </a:solidFill>
+                          <a:latin typeface="Inter"/>
+                        </a:defRPr>
+                      </a:pPr>
+                      <a:r>
+                        <a:rPr>
+                          <a:latin typeface="Inter"/>
+                        </a:rPr>
+                        <a:t>commitments</a:t>
+                      </a:r>
+                    </a:p>
+                  </a:txBody>
+                  <a:tcPr marL="54864" marR="54864" marT="27432" marB="27432" anchor="ctr">
+                    <a:solidFill>
+                      <a:srgbClr val="F5F7F9"/>
+                    </a:solidFill>
+                  </a:tcPr>
+                </a:tc>
+                <a:tc>
+                  <a:txBody>
+                    <a:bodyPr/>
+                    <a:lstStyle/>
+                    <a:p>
+                      <a:pPr>
+                        <a:defRPr sz="800" b="0">
+                          <a:solidFill>
+                            <a:srgbClr val="0D1117"/>
+                          </a:solidFill>
+                          <a:latin typeface="Inter"/>
+                        </a:defRPr>
+                      </a:pPr>
+                      <a:r>
+                        <a:rPr>
+                          <a:latin typeface="Inter"/>
+                        </a:rPr>
+                        <a:t>sha256:aaaaaaaaaaaaaaaaaaaaaaaaaaaaaaaaaaaaaaaaaaaaaaaaaaaaaaaaaaaaaaaa</a:t>
+                      </a:r>
+                    </a:p>
+                  </a:txBody>
+                  <a:tcPr marL="54864" marR="54864" marT="27432" marB="27432" anchor="ctr">
+                    <a:solidFill>
+                      <a:srgbClr val="F5F7F9"/>
+                    </a:solidFill>
+                  </a:tcPr>
+                </a:tc>
+              </a:tr>
+              <a:tr h="441655">
+                <a:tc>
+                  <a:txBody>
+                    <a:bodyPr/>
+                    <a:lstStyle/>
+                    <a:p>
+                      <a:pPr>
+                        <a:defRPr sz="800" b="1">
+                          <a:solidFill>
+                            <a:srgbClr val="0D1117"/>
+                          </a:solidFill>
+                          <a:latin typeface="Inter"/>
+                        </a:defRPr>
+                      </a:pPr>
+                      <a:r>
+                        <a:rPr>
+                          <a:latin typeface="Inter"/>
+                        </a:rPr>
+                        <a:t>S7</a:t>
+                      </a:r>
+                    </a:p>
+                  </a:txBody>
+                  <a:tcPr marL="54864" marR="54864" marT="27432" marB="27432" anchor="ctr">
+                    <a:solidFill>
+                      <a:srgbClr val="FFFFFF"/>
+                    </a:solidFill>
+                  </a:tcPr>
+                </a:tc>
+                <a:tc>
+                  <a:txBody>
+                    <a:bodyPr/>
+                    <a:lstStyle/>
+                    <a:p>
+                      <a:pPr>
+                        <a:defRPr sz="800" b="0">
+                          <a:solidFill>
+                            <a:srgbClr val="0D1117"/>
+                          </a:solidFill>
+                          <a:latin typeface="Inter"/>
+                        </a:defRPr>
+                      </a:pPr>
+                      <a:r>
+                        <a:rPr>
+                          <a:latin typeface="Inter"/>
+                        </a:rPr>
+                        <a:t>illustrative</a:t>
+                      </a:r>
+                    </a:p>
+                  </a:txBody>
+                  <a:tcPr marL="54864" marR="54864" marT="27432" marB="27432" anchor="ctr">
+                    <a:solidFill>
+                      <a:srgbClr val="FFFFFF"/>
+                    </a:solidFill>
+                  </a:tcPr>
+                </a:tc>
+                <a:tc>
+                  <a:txBody>
+                    <a:bodyPr/>
+                    <a:lstStyle/>
+                    <a:p>
+                      <a:pPr>
+                        <a:defRPr sz="800" b="0">
+                          <a:solidFill>
+                            <a:srgbClr val="0D1117"/>
+                          </a:solidFill>
+                          <a:latin typeface="Inter"/>
+                        </a:defRPr>
+                      </a:pPr>
+                      <a:r>
+                        <a:rPr>
+                          <a:latin typeface="Inter"/>
+                        </a:rPr>
+                        <a:t>sha256:aaaaaaaaaaaaaaaaaaaaaaaaaaaaaaaaaaaaaaaaaaaaaaaaaaaaaaaaaaaaaaaa</a:t>
+                      </a:r>
+                    </a:p>
+                  </a:txBody>
+                  <a:tcPr marL="54864" marR="54864" marT="27432" marB="27432" anchor="ctr">
+                    <a:solidFill>
+                      <a:srgbClr val="FFFFFF"/>
+                    </a:solidFill>
+                  </a:tcPr>
+                </a:tc>
+              </a:tr>
+              <a:tr h="441655">
+                <a:tc>
+                  <a:txBody>
+                    <a:bodyPr/>
+                    <a:lstStyle/>
+                    <a:p>
+                      <a:pPr>
+                        <a:defRPr sz="800" b="1">
+                          <a:solidFill>
+                            <a:srgbClr val="0D1117"/>
+                          </a:solidFill>
+                          <a:latin typeface="Inter"/>
+                        </a:defRPr>
+                      </a:pPr>
+                      <a:r>
+                        <a:rPr>
+                          <a:latin typeface="Inter"/>
+                        </a:rPr>
+                        <a:t>S8</a:t>
+                      </a:r>
+                    </a:p>
+                  </a:txBody>
+                  <a:tcPr marL="54864" marR="54864" marT="27432" marB="27432" anchor="ctr">
+                    <a:solidFill>
+                      <a:srgbClr val="F5F7F9"/>
+                    </a:solidFill>
+                  </a:tcPr>
+                </a:tc>
+                <a:tc>
+                  <a:txBody>
+                    <a:bodyPr/>
+                    <a:lstStyle/>
+                    <a:p>
+                      <a:pPr>
+                        <a:defRPr sz="800" b="0">
+                          <a:solidFill>
+                            <a:srgbClr val="0D1117"/>
+                          </a:solidFill>
+                          <a:latin typeface="Inter"/>
+                        </a:defRPr>
+                      </a:pPr>
+                      <a:r>
+                        <a:rPr>
+                          <a:latin typeface="Inter"/>
+                        </a:rPr>
+                        <a:t>all sections</a:t>
+                      </a:r>
+                    </a:p>
+                  </a:txBody>
+                  <a:tcPr marL="54864" marR="54864" marT="27432" marB="27432" anchor="ctr">
+                    <a:solidFill>
+                      <a:srgbClr val="F5F7F9"/>
+                    </a:solidFill>
+                  </a:tcPr>
+                </a:tc>
+                <a:tc>
+                  <a:txBody>
+                    <a:bodyPr/>
+                    <a:lstStyle/>
+                    <a:p>
+                      <a:pPr>
+                        <a:defRPr sz="800" b="0">
+                          <a:solidFill>
+                            <a:srgbClr val="0D1117"/>
+                          </a:solidFill>
+                          <a:latin typeface="Inter"/>
+                        </a:defRPr>
+                      </a:pPr>
+                      <a:r>
+                        <a:rPr>
+                          <a:latin typeface="Inter"/>
+                        </a:rPr>
+                        <a:t>sha256:aaaaaaaaaaaaaaaaaaaaaaaaaaaaaaaaaaaaaaaaaaaaaaaaaaaaaaaaaaaaaaaa</a:t>
+                      </a:r>
+                    </a:p>
+                  </a:txBody>
+                  <a:tcPr marL="54864" marR="54864" marT="27432" marB="27432" anchor="ctr">
+                    <a:solidFill>
+                      <a:srgbClr val="F5F7F9"/>
+                    </a:solidFill>
+                  </a:tcPr>
+                </a:tc>
+              </a:tr>
+              <a:tr h="441657">
+                <a:tc>
+                  <a:txBody>
+                    <a:bodyPr/>
+                    <a:lstStyle/>
+                    <a:p>
+                      <a:pPr>
+                        <a:defRPr sz="800" b="1">
+                          <a:solidFill>
+                            <a:srgbClr val="0D1117"/>
+                          </a:solidFill>
+                          <a:latin typeface="Inter"/>
+                        </a:defRPr>
+                      </a:pPr>
+                      <a:r>
+                        <a:rPr>
+                          <a:latin typeface="Inter"/>
+                        </a:rPr>
+                        <a:t>S9</a:t>
+                      </a:r>
+                    </a:p>
+                  </a:txBody>
+                  <a:tcPr marL="54864" marR="54864" marT="27432" marB="27432" anchor="ctr">
+                    <a:solidFill>
+                      <a:srgbClr val="FFFFFF"/>
+                    </a:solidFill>
+                  </a:tcPr>
+                </a:tc>
+                <a:tc>
+                  <a:txBody>
+                    <a:bodyPr/>
+                    <a:lstStyle/>
+                    <a:p>
+                      <a:pPr>
+                        <a:defRPr sz="800" b="0">
+                          <a:solidFill>
+                            <a:srgbClr val="0D1117"/>
+                          </a:solidFill>
+                          <a:latin typeface="Inter"/>
+                        </a:defRPr>
+                      </a:pPr>
+                      <a:r>
+                        <a:rPr>
+                          <a:latin typeface="Inter"/>
+                        </a:rPr>
+                        <a:t>paged; server aggregates</a:t>
+                      </a:r>
+                    </a:p>
+                  </a:txBody>
+                  <a:tcPr marL="54864" marR="54864" marT="27432" marB="27432" anchor="ctr">
+                    <a:solidFill>
+                      <a:srgbClr val="FFFFFF"/>
+                    </a:solidFill>
+                  </a:tcPr>
+                </a:tc>
+                <a:tc>
+                  <a:txBody>
+                    <a:bodyPr/>
+                    <a:lstStyle/>
+                    <a:p>
+                      <a:pPr>
+                        <a:defRPr sz="800" b="0">
+                          <a:solidFill>
+                            <a:srgbClr val="0D1117"/>
+                          </a:solidFill>
+                          <a:latin typeface="Inter"/>
+                        </a:defRPr>
+                      </a:pPr>
+                      <a:r>
+                        <a:rPr>
+                          <a:latin typeface="Inter"/>
+                        </a:rPr>
+                        <a:t>sha256:aaaaaaaaaaaaaaaaaaaaaaaaaaaaaaaaaaaaaaaaaaaaaaaaaaaaaaaaaaaaaaaa</a:t>
+                      </a:r>
+                    </a:p>
+                  </a:txBody>
+                  <a:tcPr marL="54864" marR="54864" marT="27432" marB="27432" anchor="ctr">
+                    <a:solidFill>
+                      <a:srgbClr val="FFFFFF"/>
+                    </a:solidFill>
+                  </a:tcPr>
+                </a:tc>
+              </a:tr>
+            </a:tbl>
+          </a:graphicData>
+        </a:graphic>
+      </p:graphicFrame>
+      <p:sp>
+        <p:nvSpPr>
+          <p:cNvPr id="9" name="TextBox 8"/>
+          <p:cNvSpPr txBox="1"/>
+          <p:nvPr/>
+        </p:nvSpPr>
+        <p:spPr>
+          <a:xfrm>
+            <a:off x="640080" y="6035040"/>
+            <a:ext cx="10908792" cy="164592"/>
+          </a:xfrm>
+          <a:prstGeom prst="rect">
+            <a:avLst/>
+          </a:prstGeom>
+          <a:noFill/>
+        </p:spPr>
+        <p:txBody>
+          <a:bodyPr wrap="none" lIns="9144" rIns="9144" tIns="9144" bIns="9144" anchor="t">
+            <a:spAutoFit/>
+          </a:bodyPr>
+          <a:lstStyle/>
+          <a:p>
+            <a:pPr algn="l">
+              <a:spcAft>
+                <a:spcPts val="0"/>
+              </a:spcAft>
+              <a:defRPr sz="680" b="0">
+                <a:solidFill>
+                  <a:srgbClr val="8A94A1"/>
+                </a:solidFill>
+                <a:latin typeface="Inter"/>
+              </a:defRPr>
+            </a:pPr>
+            <a:r>
+              <a:rPr>
+                <a:latin typeface="Inter"/>
+              </a:rPr>
+              <a:t>Data scope for every source: Illustrative sample data. Each digest is the SHA-256 fingerprint of the exact data the report used.</a:t>
+            </a:r>
+          </a:p>
+        </p:txBody>
+      </p:sp>
+      <p:sp>
+        <p:nvSpPr>
+          <p:cNvPr id="10" name="Rectangle 9"/>
+          <p:cNvSpPr/>
+          <p:nvPr/>
+        </p:nvSpPr>
+        <p:spPr>
+          <a:xfrm>
+            <a:off x="640080" y="6446520"/>
+            <a:ext cx="10908792" cy="9144"/>
+          </a:xfrm>
+          <a:prstGeom prst="rect">
+            <a:avLst/>
+          </a:prstGeom>
+          <a:solidFill>
+            <a:srgbClr val="E3E7EC"/>
+          </a:solidFill>
+          <a:ln>
+            <a:solidFill>
+              <a:srgbClr val="E3E7EC"/>
+            </a:solidFill>
+          </a:ln>
+        </p:spPr>
+        <p:style>
+          <a:lnRef idx="1">
+            <a:schemeClr val="accent1"/>
+          </a:lnRef>
+          <a:fillRef idx="3">
+            <a:schemeClr val="accent1"/>
+          </a:fillRef>
+          <a:effectRef idx="2">
+            <a:schemeClr val="accent1"/>
+          </a:effectRef>
+          <a:fontRef idx="minor">
+            <a:schemeClr val="lt1"/>
+          </a:fontRef>
+        </p:style>
+        <p:txBody>
+          <a:bodyPr rtlCol="0" anchor="ctr"/>
+          <a:lstStyle/>
+          <a:p>
+            <a:pPr algn="ctr">
+              <a:defRPr>
+                <a:latin typeface="Inter"/>
+              </a:defRPr>
+            </a:pPr>
+          </a:p>
+        </p:txBody>
+      </p:sp>
+      <p:sp>
+        <p:nvSpPr>
+          <p:cNvPr id="11" name="TextBox 10"/>
+          <p:cNvSpPr txBox="1"/>
+          <p:nvPr/>
+        </p:nvSpPr>
+        <p:spPr>
+          <a:xfrm>
+            <a:off x="640080" y="6501384"/>
+            <a:ext cx="4297680" cy="146304"/>
+          </a:xfrm>
+          <a:prstGeom prst="rect">
+            <a:avLst/>
+          </a:prstGeom>
+          <a:noFill/>
+        </p:spPr>
+        <p:txBody>
+          <a:bodyPr wrap="none" lIns="9144" rIns="9144" tIns="9144" bIns="9144" anchor="t">
+            <a:spAutoFit/>
+          </a:bodyPr>
+          <a:lstStyle/>
+          <a:p>
+            <a:pPr algn="l">
+              <a:spcAft>
+                <a:spcPts val="0"/>
+              </a:spcAft>
+              <a:defRPr sz="650" b="0">
+                <a:solidFill>
+                  <a:srgbClr val="8A94A1"/>
+                </a:solidFill>
+                <a:latin typeface="Inter"/>
+              </a:defRPr>
+            </a:pPr>
+            <a:r>
+              <a:rPr>
+                <a:latin typeface="Inter"/>
+              </a:rPr>
+              <a:t>Sources: S1 · S2 · S3 · S4 · S5 · S6 · S7 · S8 · S9</a:t>
+            </a:r>
+          </a:p>
+        </p:txBody>
+      </p:sp>
+      <p:sp>
+        <p:nvSpPr>
+          <p:cNvPr id="12" name="TextBox 11"/>
+          <p:cNvSpPr txBox="1"/>
+          <p:nvPr/>
+        </p:nvSpPr>
+        <p:spPr>
+          <a:xfrm>
+            <a:off x="4480560" y="6501384"/>
+            <a:ext cx="5303520" cy="146304"/>
+          </a:xfrm>
+          <a:prstGeom prst="rect">
+            <a:avLst/>
+          </a:prstGeom>
+          <a:noFill/>
+        </p:spPr>
+        <p:txBody>
+          <a:bodyPr wrap="none" lIns="9144" rIns="9144" tIns="9144" bIns="9144" anchor="t">
+            <a:spAutoFit/>
+          </a:bodyPr>
+          <a:lstStyle/>
+          <a:p>
+            <a:pPr algn="ctr">
+              <a:spcAft>
+                <a:spcPts val="0"/>
+              </a:spcAft>
+              <a:defRPr sz="650" b="0">
+                <a:solidFill>
+                  <a:srgbClr val="8A94A1"/>
+                </a:solidFill>
+                <a:latin typeface="Inter"/>
+              </a:defRPr>
+            </a:pPr>
+            <a:r>
+              <a:rPr>
+                <a:latin typeface="Inter"/>
+              </a:rPr>
+              <a:t>Confidential — Investment Committee · Data as of 2026-06-30</a:t>
+            </a:r>
+          </a:p>
+        </p:txBody>
+      </p:sp>
+      <p:sp>
+        <p:nvSpPr>
+          <p:cNvPr id="13" name="TextBox 12"/>
+          <p:cNvSpPr txBox="1"/>
+          <p:nvPr/>
+        </p:nvSpPr>
+        <p:spPr>
+          <a:xfrm>
+            <a:off x="10287000" y="6501384"/>
+            <a:ext cx="1261872" cy="146304"/>
+          </a:xfrm>
+          <a:prstGeom prst="rect">
+            <a:avLst/>
+          </a:prstGeom>
+          <a:noFill/>
+        </p:spPr>
+        <p:txBody>
+          <a:bodyPr wrap="none" lIns="9144" rIns="9144" tIns="9144" bIns="9144" anchor="t">
+            <a:spAutoFit/>
+          </a:bodyPr>
+          <a:lstStyle/>
+          <a:p>
+            <a:pPr algn="r">
+              <a:spcAft>
+                <a:spcPts val="0"/>
+              </a:spcAft>
+              <a:defRPr sz="650" b="0">
+                <a:solidFill>
+                  <a:srgbClr val="8A94A1"/>
+                </a:solidFill>
+                <a:latin typeface="Inter"/>
+              </a:defRPr>
+            </a:pPr>
+            <a:r>
+              <a:rPr>
+                <a:latin typeface="Inter"/>
+              </a:rPr>
+              <a:t>33</a:t>
+            </a:r>
+          </a:p>
+        </p:txBody>
+      </p:sp>
+    </p:spTree>
+  </p:cSld>
+  <p:clrMapOvr>
+    <a:masterClrMapping/>
+  </p:clrMapOvr>
+</p:sld>
+</file>
+
+<file path=ppt/slides/slide34.xml><?xml version="1.0" encoding="utf-8"?>
+<p:sld xmlns:a="http://schemas.openxmlformats.org/drawingml/2006/main" xmlns:p="http://schemas.openxmlformats.org/presentationml/2006/main" xmlns:r="http://schemas.openxmlformats.org/officeDocument/2006/relationships">
+  <p:cSld>
+    <p:spTree>
+      <p:nvGrpSpPr>
+        <p:cNvPr id="1" name=""/>
+        <p:cNvGrpSpPr/>
+        <p:nvPr/>
+      </p:nvGrpSpPr>
+      <p:grpSpPr/>
+      <p:sp>
+        <p:nvSpPr>
+          <p:cNvPr id="2" name="Rectangle 1"/>
+          <p:cNvSpPr/>
+          <p:nvPr/>
+        </p:nvSpPr>
+        <p:spPr>
+          <a:xfrm>
+            <a:off x="0" y="0"/>
+            <a:ext cx="12191695" cy="6858000"/>
+          </a:xfrm>
+          <a:prstGeom prst="rect">
+            <a:avLst/>
+          </a:prstGeom>
+          <a:solidFill>
+            <a:srgbClr val="FFFFFF"/>
+          </a:solidFill>
+          <a:ln>
+            <a:solidFill>
+              <a:srgbClr val="FFFFFF"/>
+            </a:solidFill>
+          </a:ln>
+        </p:spPr>
+        <p:style>
+          <a:lnRef idx="1">
+            <a:schemeClr val="accent1"/>
+          </a:lnRef>
+          <a:fillRef idx="3">
+            <a:schemeClr val="accent1"/>
+          </a:fillRef>
+          <a:effectRef idx="2">
+            <a:schemeClr val="accent1"/>
+          </a:effectRef>
+          <a:fontRef idx="minor">
+            <a:schemeClr val="lt1"/>
+          </a:fontRef>
+        </p:style>
+        <p:txBody>
+          <a:bodyPr rtlCol="0" anchor="ctr"/>
+          <a:lstStyle/>
+          <a:p>
+            <a:pPr algn="ctr">
+              <a:defRPr>
+                <a:latin typeface="Inter"/>
+              </a:defRPr>
+            </a:pPr>
+          </a:p>
+        </p:txBody>
+      </p:sp>
+      <p:sp>
+        <p:nvSpPr>
+          <p:cNvPr id="3" name="TextBox 2"/>
+          <p:cNvSpPr txBox="1"/>
+          <p:nvPr/>
+        </p:nvSpPr>
+        <p:spPr>
+          <a:xfrm>
+            <a:off x="640080" y="566928"/>
+            <a:ext cx="10058400" cy="530352"/>
+          </a:xfrm>
+          <a:prstGeom prst="rect">
+            <a:avLst/>
+          </a:prstGeom>
+          <a:noFill/>
+        </p:spPr>
+        <p:txBody>
+          <a:bodyPr wrap="none" lIns="9144" rIns="9144" tIns="9144" bIns="9144" anchor="t">
+            <a:spAutoFit/>
+          </a:bodyPr>
+          <a:lstStyle/>
+          <a:p>
+            <a:pPr algn="l">
+              <a:spcAft>
+                <a:spcPts val="0"/>
+              </a:spcAft>
+              <a:defRPr sz="2300" b="1">
+                <a:solidFill>
+                  <a:srgbClr val="0D1117"/>
+                </a:solidFill>
+                <a:latin typeface="Inter"/>
+              </a:defRPr>
+            </a:pPr>
+            <a:r>
+              <a:rPr>
+                <a:latin typeface="Inter"/>
+              </a:rPr>
+              <a:t>Appendix — Server Metric Methods and Disclosures</a:t>
+            </a:r>
+          </a:p>
+        </p:txBody>
+      </p:sp>
+      <p:sp>
+        <p:nvSpPr>
+          <p:cNvPr id="4" name="Rectangle 3"/>
+          <p:cNvSpPr/>
+          <p:nvPr/>
+        </p:nvSpPr>
+        <p:spPr>
+          <a:xfrm>
+            <a:off x="640080" y="1115568"/>
+            <a:ext cx="10908792" cy="18288"/>
+          </a:xfrm>
+          <a:prstGeom prst="rect">
+            <a:avLst/>
+          </a:prstGeom>
+          <a:solidFill>
+            <a:srgbClr val="0D1117"/>
+          </a:solidFill>
+          <a:ln>
+            <a:solidFill>
+              <a:srgbClr val="0D1117"/>
+            </a:solidFill>
+          </a:ln>
+        </p:spPr>
+        <p:style>
+          <a:lnRef idx="1">
+            <a:schemeClr val="accent1"/>
+          </a:lnRef>
+          <a:fillRef idx="3">
+            <a:schemeClr val="accent1"/>
+          </a:fillRef>
+          <a:effectRef idx="2">
+            <a:schemeClr val="accent1"/>
+          </a:effectRef>
+          <a:fontRef idx="minor">
+            <a:schemeClr val="lt1"/>
+          </a:fontRef>
+        </p:style>
+        <p:txBody>
+          <a:bodyPr rtlCol="0" anchor="ctr"/>
+          <a:lstStyle/>
+          <a:p>
+            <a:pPr algn="ctr">
+              <a:defRPr>
+                <a:latin typeface="Inter"/>
+              </a:defRPr>
+            </a:pPr>
+          </a:p>
+        </p:txBody>
+      </p:sp>
+      <p:sp>
+        <p:nvSpPr>
+          <p:cNvPr id="5" name="Rectangle 4"/>
+          <p:cNvSpPr/>
+          <p:nvPr/>
+        </p:nvSpPr>
+        <p:spPr>
+          <a:xfrm>
+            <a:off x="11018520" y="502920"/>
+            <a:ext cx="530352" cy="393192"/>
+          </a:xfrm>
+          <a:prstGeom prst="rect">
+            <a:avLst/>
+          </a:prstGeom>
+          <a:solidFill>
+            <a:srgbClr val="9AA5B1"/>
+          </a:solidFill>
+          <a:ln>
+            <a:solidFill>
+              <a:srgbClr val="9AA5B1"/>
+            </a:solidFill>
+          </a:ln>
+        </p:spPr>
+        <p:style>
+          <a:lnRef idx="1">
+            <a:schemeClr val="accent1"/>
+          </a:lnRef>
+          <a:fillRef idx="3">
+            <a:schemeClr val="accent1"/>
+          </a:fillRef>
+          <a:effectRef idx="2">
+            <a:schemeClr val="accent1"/>
+          </a:effectRef>
+          <a:fontRef idx="minor">
+            <a:schemeClr val="lt1"/>
+          </a:fontRef>
+        </p:style>
+        <p:txBody>
+          <a:bodyPr rtlCol="0" anchor="ctr"/>
+          <a:lstStyle/>
+          <a:p>
+            <a:pPr algn="ctr">
+              <a:defRPr>
+                <a:latin typeface="Inter"/>
+              </a:defRPr>
+            </a:pPr>
+          </a:p>
+        </p:txBody>
+      </p:sp>
+      <p:sp>
+        <p:nvSpPr>
+          <p:cNvPr id="6" name="TextBox 5"/>
+          <p:cNvSpPr txBox="1"/>
+          <p:nvPr/>
+        </p:nvSpPr>
+        <p:spPr>
+          <a:xfrm>
+            <a:off x="11045952" y="557784"/>
+            <a:ext cx="475488" cy="182880"/>
+          </a:xfrm>
+          <a:prstGeom prst="rect">
+            <a:avLst/>
+          </a:prstGeom>
+          <a:noFill/>
+        </p:spPr>
+        <p:txBody>
+          <a:bodyPr wrap="none" lIns="9144" rIns="9144" tIns="9144" bIns="9144" anchor="t">
+            <a:spAutoFit/>
+          </a:bodyPr>
+          <a:lstStyle/>
+          <a:p>
+            <a:pPr algn="ctr">
+              <a:spcAft>
+                <a:spcPts val="0"/>
+              </a:spcAft>
+              <a:defRPr sz="1000" b="1">
+                <a:solidFill>
+                  <a:srgbClr val="0D1117"/>
+                </a:solidFill>
+                <a:latin typeface="Inter"/>
+              </a:defRPr>
+            </a:pPr>
+            <a:r>
+              <a:rPr>
+                <a:latin typeface="Inter"/>
+              </a:rPr>
+              <a:t>B</a:t>
+            </a:r>
+          </a:p>
+        </p:txBody>
+      </p:sp>
+      <p:sp>
+        <p:nvSpPr>
+          <p:cNvPr id="7" name="TextBox 6"/>
+          <p:cNvSpPr txBox="1"/>
+          <p:nvPr/>
+        </p:nvSpPr>
+        <p:spPr>
+          <a:xfrm>
+            <a:off x="640080" y="1325880"/>
+            <a:ext cx="10908792" cy="201168"/>
+          </a:xfrm>
+          <a:prstGeom prst="rect">
+            <a:avLst/>
+          </a:prstGeom>
+          <a:noFill/>
+        </p:spPr>
+        <p:txBody>
+          <a:bodyPr wrap="none" lIns="9144" rIns="9144" tIns="9144" bIns="9144" anchor="t">
+            <a:spAutoFit/>
+          </a:bodyPr>
+          <a:lstStyle/>
+          <a:p>
+            <a:pPr algn="l">
+              <a:spcAft>
+                <a:spcPts val="0"/>
+              </a:spcAft>
+              <a:defRPr sz="720" b="1">
+                <a:solidFill>
+                  <a:srgbClr val="4A5563"/>
+                </a:solidFill>
+                <a:latin typeface="Inter"/>
+              </a:defRPr>
+            </a:pPr>
+            <a:r>
+              <a:rPr>
+                <a:latin typeface="Inter"/>
+              </a:rPr>
               <a:t>SERVER METRIC METHODS</a:t>
             </a:r>
           </a:p>
@@ -35897,7 +34961,7 @@
       </p:sp>
       <p:graphicFrame>
         <p:nvGraphicFramePr>
-          <p:cNvPr id="9" name="Table 8"/>
+          <p:cNvPr id="8" name="Table 7"/>
           <p:cNvGraphicFramePr>
             <a:graphicFrameLocks noGrp="1"/>
           </p:cNvGraphicFramePr>
@@ -36611,7 +35675,7 @@
       </p:graphicFrame>
       <p:sp>
         <p:nvSpPr>
-          <p:cNvPr id="10" name="TextBox 9"/>
+          <p:cNvPr id="9" name="TextBox 8"/>
           <p:cNvSpPr txBox="1"/>
           <p:nvPr/>
         </p:nvSpPr>
@@ -36653,7 +35717,7 @@
       </p:sp>
       <p:sp>
         <p:nvSpPr>
-          <p:cNvPr id="11" name="Rectangle 10"/>
+          <p:cNvPr id="10" name="Rectangle 9"/>
           <p:cNvSpPr/>
           <p:nvPr/>
         </p:nvSpPr>
@@ -36702,7 +35766,7 @@
       </p:sp>
       <p:sp>
         <p:nvSpPr>
-          <p:cNvPr id="12" name="TextBox 11"/>
+          <p:cNvPr id="11" name="TextBox 10"/>
           <p:cNvSpPr txBox="1"/>
           <p:nvPr/>
         </p:nvSpPr>
@@ -36744,7 +35808,7 @@
       </p:sp>
       <p:sp>
         <p:nvSpPr>
-          <p:cNvPr id="13" name="TextBox 12"/>
+          <p:cNvPr id="12" name="TextBox 11"/>
           <p:cNvSpPr txBox="1"/>
           <p:nvPr/>
         </p:nvSpPr>
@@ -36786,7 +35850,7 @@
       </p:sp>
       <p:sp>
         <p:nvSpPr>
-          <p:cNvPr id="14" name="TextBox 13"/>
+          <p:cNvPr id="13" name="TextBox 12"/>
           <p:cNvSpPr txBox="1"/>
           <p:nvPr/>
         </p:nvSpPr>
@@ -36821,7 +35885,7 @@
               <a:rPr>
                 <a:latin typeface="Inter"/>
               </a:rPr>
-              <a:t>33</a:t>
+              <a:t>34</a:t>
             </a:r>
           </a:p>
         </p:txBody>
@@ -36902,7 +35966,7 @@
         <p:spPr>
           <a:xfrm>
             <a:off x="640080" y="329184"/>
-            <a:ext cx="5303520" cy="182880"/>
+            <a:ext cx="9875520" cy="182880"/>
           </a:xfrm>
           <a:prstGeom prst="rect">
             <a:avLst/>
@@ -36943,48 +36007,6 @@
         </p:nvSpPr>
         <p:spPr>
           <a:xfrm>
-            <a:off x="5897880" y="310896"/>
-            <a:ext cx="4800600" cy="256032"/>
-          </a:xfrm>
-          <a:prstGeom prst="rect">
-            <a:avLst/>
-          </a:prstGeom>
-          <a:noFill/>
-        </p:spPr>
-        <p:txBody>
-          <a:bodyPr wrap="none" lIns="9144" rIns="9144" tIns="9144" bIns="9144" anchor="t">
-            <a:spAutoFit/>
-          </a:bodyPr>
-          <a:lstStyle/>
-          <a:p>
-            <a:pPr algn="r">
-              <a:spcAft>
-                <a:spcPts val="0"/>
-              </a:spcAft>
-              <a:defRPr sz="680" b="1">
-                <a:solidFill>
-                  <a:srgbClr val="4F6B00"/>
-                </a:solidFill>
-                <a:latin typeface="Inter"/>
-              </a:defRPr>
-            </a:pPr>
-            <a:r>
-              <a:rPr>
-                <a:latin typeface="Inter"/>
-              </a:rPr>
-              <a:t>Illustrative, Gradient Maintained — demo data, not the client's holdings or managers</a:t>
-            </a:r>
-          </a:p>
-        </p:txBody>
-      </p:sp>
-      <p:sp>
-        <p:nvSpPr>
-          <p:cNvPr id="5" name="TextBox 4"/>
-          <p:cNvSpPr txBox="1"/>
-          <p:nvPr/>
-        </p:nvSpPr>
-        <p:spPr>
-          <a:xfrm>
             <a:off x="640080" y="566928"/>
             <a:ext cx="10058400" cy="530352"/>
           </a:xfrm>
@@ -37021,7 +36043,7 @@
       </p:sp>
       <p:sp>
         <p:nvSpPr>
-          <p:cNvPr id="6" name="Rectangle 5"/>
+          <p:cNvPr id="5" name="Rectangle 4"/>
           <p:cNvSpPr/>
           <p:nvPr/>
         </p:nvSpPr>
@@ -37070,7 +36092,7 @@
       </p:sp>
       <p:sp>
         <p:nvSpPr>
-          <p:cNvPr id="7" name="Rectangle 6"/>
+          <p:cNvPr id="6" name="Rectangle 5"/>
           <p:cNvSpPr/>
           <p:nvPr/>
         </p:nvSpPr>
@@ -37119,7 +36141,7 @@
       </p:sp>
       <p:sp>
         <p:nvSpPr>
-          <p:cNvPr id="8" name="TextBox 7"/>
+          <p:cNvPr id="7" name="TextBox 6"/>
           <p:cNvSpPr txBox="1"/>
           <p:nvPr/>
         </p:nvSpPr>
@@ -37161,14 +36183,14 @@
       </p:sp>
       <p:sp>
         <p:nvSpPr>
-          <p:cNvPr id="9" name="Rectangle 8"/>
+          <p:cNvPr id="8" name="Rectangle 7"/>
           <p:cNvSpPr/>
           <p:nvPr/>
         </p:nvSpPr>
         <p:spPr>
           <a:xfrm>
             <a:off x="640080" y="1325880"/>
-            <a:ext cx="10908792" cy="2318487"/>
+            <a:ext cx="10908792" cy="2341683"/>
           </a:xfrm>
           <a:prstGeom prst="rect">
             <a:avLst/>
@@ -37210,14 +36232,14 @@
       </p:sp>
       <p:sp>
         <p:nvSpPr>
-          <p:cNvPr id="10" name="Rectangle 9"/>
+          <p:cNvPr id="9" name="Rectangle 8"/>
           <p:cNvSpPr/>
           <p:nvPr/>
         </p:nvSpPr>
         <p:spPr>
           <a:xfrm>
             <a:off x="640080" y="1325880"/>
-            <a:ext cx="54864" cy="2318487"/>
+            <a:ext cx="54864" cy="2341683"/>
           </a:xfrm>
           <a:prstGeom prst="rect">
             <a:avLst/>
@@ -37259,7 +36281,7 @@
       </p:sp>
       <p:sp>
         <p:nvSpPr>
-          <p:cNvPr id="11" name="TextBox 10"/>
+          <p:cNvPr id="10" name="TextBox 9"/>
           <p:cNvSpPr txBox="1"/>
           <p:nvPr/>
         </p:nvSpPr>
@@ -37294,21 +36316,21 @@
               <a:rPr>
                 <a:latin typeface="Inter"/>
               </a:rPr>
-              <a:t>Key judgment — primary measure</a:t>
+              <a:t>Key judgment — Sleeve size</a:t>
             </a:r>
           </a:p>
         </p:txBody>
       </p:sp>
       <p:sp>
         <p:nvSpPr>
-          <p:cNvPr id="12" name="TextBox 11"/>
+          <p:cNvPr id="11" name="TextBox 10"/>
           <p:cNvSpPr txBox="1"/>
           <p:nvPr/>
         </p:nvSpPr>
         <p:spPr>
           <a:xfrm>
             <a:off x="804671" y="1719072"/>
-            <a:ext cx="10616184" cy="1833855"/>
+            <a:ext cx="10616184" cy="1857051"/>
           </a:xfrm>
           <a:prstGeom prst="rect">
             <a:avLst/>
@@ -37336,21 +36358,21 @@
               <a:rPr>
                 <a:latin typeface="Inter"/>
               </a:rPr>
-              <a:t>Observation: Private-markets weight is 23.0% in the review evidence [S2]. Why it matters: This measure establishes the baseline for comparing later governed results. Uncertainty: The source basis may omit newer observations outside the reviewed evidence. What would change the view: A refreshed source report showing a change above 1%.</a:t>
+              <a:t>Observation: Private markets are 23.0% of total NAV [S2]. Why it matters: New commitments are sized against this weight and the unfunded balance. Uncertainty: Private valuations lag public markets. What would change the view: A valuation update that moves the weight by more than 2pp.</a:t>
             </a:r>
           </a:p>
         </p:txBody>
       </p:sp>
       <p:sp>
         <p:nvSpPr>
-          <p:cNvPr id="13" name="Rectangle 12"/>
+          <p:cNvPr id="12" name="Rectangle 11"/>
           <p:cNvSpPr/>
           <p:nvPr/>
         </p:nvSpPr>
         <p:spPr>
           <a:xfrm>
-            <a:off x="640080" y="3754095"/>
-            <a:ext cx="10908792" cy="2463824"/>
+            <a:off x="640080" y="3777291"/>
+            <a:ext cx="10908792" cy="2440628"/>
           </a:xfrm>
           <a:prstGeom prst="rect">
             <a:avLst/>
@@ -37392,14 +36414,14 @@
       </p:sp>
       <p:sp>
         <p:nvSpPr>
-          <p:cNvPr id="14" name="Rectangle 13"/>
+          <p:cNvPr id="13" name="Rectangle 12"/>
           <p:cNvSpPr/>
           <p:nvPr/>
         </p:nvSpPr>
         <p:spPr>
           <a:xfrm>
-            <a:off x="640080" y="3754095"/>
-            <a:ext cx="54864" cy="2463824"/>
+            <a:off x="640080" y="3777291"/>
+            <a:ext cx="54864" cy="2440628"/>
           </a:xfrm>
           <a:prstGeom prst="rect">
             <a:avLst/>
@@ -37441,13 +36463,13 @@
       </p:sp>
       <p:sp>
         <p:nvSpPr>
-          <p:cNvPr id="15" name="TextBox 14"/>
+          <p:cNvPr id="14" name="TextBox 13"/>
           <p:cNvSpPr txBox="1"/>
           <p:nvPr/>
         </p:nvSpPr>
         <p:spPr>
           <a:xfrm>
-            <a:off x="804671" y="3863823"/>
+            <a:off x="804671" y="3887019"/>
             <a:ext cx="10616184" cy="228600"/>
           </a:xfrm>
           <a:prstGeom prst="rect">
@@ -37476,21 +36498,21 @@
               <a:rPr>
                 <a:latin typeface="Inter"/>
               </a:rPr>
-              <a:t>Key judgment — monitoring priority</a:t>
+              <a:t>Key judgment — Policy limit</a:t>
             </a:r>
           </a:p>
         </p:txBody>
       </p:sp>
       <p:sp>
         <p:nvSpPr>
-          <p:cNvPr id="16" name="TextBox 15"/>
+          <p:cNvPr id="15" name="TextBox 14"/>
           <p:cNvSpPr txBox="1"/>
           <p:nvPr/>
         </p:nvSpPr>
         <p:spPr>
           <a:xfrm>
-            <a:off x="804671" y="4147287"/>
-            <a:ext cx="10616184" cy="1979192"/>
+            <a:off x="804671" y="4170483"/>
+            <a:ext cx="10616184" cy="1955996"/>
           </a:xfrm>
           <a:prstGeom prst="rect">
             <a:avLst/>
@@ -37518,14 +36540,14 @@
               <a:rPr>
                 <a:latin typeface="Inter"/>
               </a:rPr>
-              <a:t>Observation: Policy status is Watch rather than Clear in the review evidence [S3]. Why it matters: This result determines which item receives priority in the next monitoring cycle. Uncertainty: Supporting coverage may omit later filings or corroborating detail. What would change the view: A new filing or report that resolves the item or changes it by 1%.</a:t>
+              <a:t>Observation: The private-markets allocation is near its policy limit [S3]. Why it matters: Each new commitment must be checked against the limit before signing. Uncertainty: The limit test uses lagged valuations. What would change the view: Distributions that bring the weight back toward target.</a:t>
             </a:r>
           </a:p>
         </p:txBody>
       </p:sp>
       <p:sp>
         <p:nvSpPr>
-          <p:cNvPr id="17" name="Rectangle 16"/>
+          <p:cNvPr id="16" name="Rectangle 15"/>
           <p:cNvSpPr/>
           <p:nvPr/>
         </p:nvSpPr>
@@ -37574,7 +36596,7 @@
       </p:sp>
       <p:sp>
         <p:nvSpPr>
-          <p:cNvPr id="18" name="TextBox 17"/>
+          <p:cNvPr id="17" name="TextBox 16"/>
           <p:cNvSpPr txBox="1"/>
           <p:nvPr/>
         </p:nvSpPr>
@@ -37616,7 +36638,7 @@
       </p:sp>
       <p:sp>
         <p:nvSpPr>
-          <p:cNvPr id="19" name="TextBox 18"/>
+          <p:cNvPr id="18" name="TextBox 17"/>
           <p:cNvSpPr txBox="1"/>
           <p:nvPr/>
         </p:nvSpPr>
@@ -37658,7 +36680,7 @@
       </p:sp>
       <p:sp>
         <p:nvSpPr>
-          <p:cNvPr id="20" name="TextBox 19"/>
+          <p:cNvPr id="19" name="TextBox 18"/>
           <p:cNvSpPr txBox="1"/>
           <p:nvPr/>
         </p:nvSpPr>
@@ -37774,7 +36796,7 @@
         <p:spPr>
           <a:xfrm>
             <a:off x="640080" y="329184"/>
-            <a:ext cx="5303520" cy="182880"/>
+            <a:ext cx="9875520" cy="182880"/>
           </a:xfrm>
           <a:prstGeom prst="rect">
             <a:avLst/>
@@ -37815,48 +36837,6 @@
         </p:nvSpPr>
         <p:spPr>
           <a:xfrm>
-            <a:off x="5897880" y="310896"/>
-            <a:ext cx="4800600" cy="256032"/>
-          </a:xfrm>
-          <a:prstGeom prst="rect">
-            <a:avLst/>
-          </a:prstGeom>
-          <a:noFill/>
-        </p:spPr>
-        <p:txBody>
-          <a:bodyPr wrap="none" lIns="9144" rIns="9144" tIns="9144" bIns="9144" anchor="t">
-            <a:spAutoFit/>
-          </a:bodyPr>
-          <a:lstStyle/>
-          <a:p>
-            <a:pPr algn="r">
-              <a:spcAft>
-                <a:spcPts val="0"/>
-              </a:spcAft>
-              <a:defRPr sz="680" b="1">
-                <a:solidFill>
-                  <a:srgbClr val="4F6B00"/>
-                </a:solidFill>
-                <a:latin typeface="Inter"/>
-              </a:defRPr>
-            </a:pPr>
-            <a:r>
-              <a:rPr>
-                <a:latin typeface="Inter"/>
-              </a:rPr>
-              <a:t>Illustrative, Gradient Maintained — demo data, not the client's holdings or managers</a:t>
-            </a:r>
-          </a:p>
-        </p:txBody>
-      </p:sp>
-      <p:sp>
-        <p:nvSpPr>
-          <p:cNvPr id="5" name="TextBox 4"/>
-          <p:cNvSpPr txBox="1"/>
-          <p:nvPr/>
-        </p:nvSpPr>
-        <p:spPr>
-          <a:xfrm>
             <a:off x="640080" y="566928"/>
             <a:ext cx="10058400" cy="530352"/>
           </a:xfrm>
@@ -37893,7 +36873,7 @@
       </p:sp>
       <p:sp>
         <p:nvSpPr>
-          <p:cNvPr id="6" name="Rectangle 5"/>
+          <p:cNvPr id="5" name="Rectangle 4"/>
           <p:cNvSpPr/>
           <p:nvPr/>
         </p:nvSpPr>
@@ -37942,7 +36922,7 @@
       </p:sp>
       <p:sp>
         <p:nvSpPr>
-          <p:cNvPr id="7" name="Rectangle 6"/>
+          <p:cNvPr id="6" name="Rectangle 5"/>
           <p:cNvSpPr/>
           <p:nvPr/>
         </p:nvSpPr>
@@ -37991,7 +36971,7 @@
       </p:sp>
       <p:sp>
         <p:nvSpPr>
-          <p:cNvPr id="8" name="TextBox 7"/>
+          <p:cNvPr id="7" name="TextBox 6"/>
           <p:cNvSpPr txBox="1"/>
           <p:nvPr/>
         </p:nvSpPr>
@@ -38033,7 +37013,7 @@
       </p:sp>
       <p:graphicFrame>
         <p:nvGraphicFramePr>
-          <p:cNvPr id="9" name="Table 8"/>
+          <p:cNvPr id="8" name="Table 7"/>
           <p:cNvGraphicFramePr>
             <a:graphicFrameLocks noGrp="1"/>
           </p:cNvGraphicFramePr>
@@ -38395,7 +37375,7 @@
       </p:graphicFrame>
       <p:sp>
         <p:nvSpPr>
-          <p:cNvPr id="10" name="TextBox 9"/>
+          <p:cNvPr id="9" name="TextBox 8"/>
           <p:cNvSpPr txBox="1"/>
           <p:nvPr/>
         </p:nvSpPr>
@@ -38437,7 +37417,7 @@
       </p:sp>
       <p:graphicFrame>
         <p:nvGraphicFramePr>
-          <p:cNvPr id="11" name="Table 10"/>
+          <p:cNvPr id="10" name="Table 9"/>
           <p:cNvGraphicFramePr>
             <a:graphicFrameLocks noGrp="1"/>
           </p:cNvGraphicFramePr>
@@ -38833,7 +37813,7 @@
                         <a:rPr>
                           <a:latin typeface="Inter"/>
                         </a:rPr>
-                        <a:t>● Watch</a:t>
+                        <a:t>● Near limit</a:t>
                       </a:r>
                     </a:p>
                   </a:txBody>
@@ -39014,7 +37994,7 @@
       </p:graphicFrame>
       <p:sp>
         <p:nvSpPr>
-          <p:cNvPr id="12" name="Rectangle 11"/>
+          <p:cNvPr id="11" name="Rectangle 10"/>
           <p:cNvSpPr/>
           <p:nvPr/>
         </p:nvSpPr>
@@ -39063,7 +38043,7 @@
       </p:sp>
       <p:sp>
         <p:nvSpPr>
-          <p:cNvPr id="13" name="TextBox 12"/>
+          <p:cNvPr id="12" name="TextBox 11"/>
           <p:cNvSpPr txBox="1"/>
           <p:nvPr/>
         </p:nvSpPr>
@@ -39105,7 +38085,7 @@
       </p:sp>
       <p:sp>
         <p:nvSpPr>
-          <p:cNvPr id="14" name="TextBox 13"/>
+          <p:cNvPr id="13" name="TextBox 12"/>
           <p:cNvSpPr txBox="1"/>
           <p:nvPr/>
         </p:nvSpPr>
@@ -39147,7 +38127,7 @@
       </p:sp>
       <p:sp>
         <p:nvSpPr>
-          <p:cNvPr id="15" name="TextBox 14"/>
+          <p:cNvPr id="14" name="TextBox 13"/>
           <p:cNvSpPr txBox="1"/>
           <p:nvPr/>
         </p:nvSpPr>
@@ -39263,7 +38243,7 @@
         <p:spPr>
           <a:xfrm>
             <a:off x="640080" y="329184"/>
-            <a:ext cx="5303520" cy="182880"/>
+            <a:ext cx="9875520" cy="182880"/>
           </a:xfrm>
           <a:prstGeom prst="rect">
             <a:avLst/>
@@ -39304,48 +38284,6 @@
         </p:nvSpPr>
         <p:spPr>
           <a:xfrm>
-            <a:off x="5897880" y="310896"/>
-            <a:ext cx="4800600" cy="256032"/>
-          </a:xfrm>
-          <a:prstGeom prst="rect">
-            <a:avLst/>
-          </a:prstGeom>
-          <a:noFill/>
-        </p:spPr>
-        <p:txBody>
-          <a:bodyPr wrap="none" lIns="9144" rIns="9144" tIns="9144" bIns="9144" anchor="t">
-            <a:spAutoFit/>
-          </a:bodyPr>
-          <a:lstStyle/>
-          <a:p>
-            <a:pPr algn="r">
-              <a:spcAft>
-                <a:spcPts val="0"/>
-              </a:spcAft>
-              <a:defRPr sz="680" b="1">
-                <a:solidFill>
-                  <a:srgbClr val="4F6B00"/>
-                </a:solidFill>
-                <a:latin typeface="Inter"/>
-              </a:defRPr>
-            </a:pPr>
-            <a:r>
-              <a:rPr>
-                <a:latin typeface="Inter"/>
-              </a:rPr>
-              <a:t>Illustrative, Gradient Maintained — demo data, not the client's holdings or managers</a:t>
-            </a:r>
-          </a:p>
-        </p:txBody>
-      </p:sp>
-      <p:sp>
-        <p:nvSpPr>
-          <p:cNvPr id="5" name="TextBox 4"/>
-          <p:cNvSpPr txBox="1"/>
-          <p:nvPr/>
-        </p:nvSpPr>
-        <p:spPr>
-          <a:xfrm>
             <a:off x="640080" y="566928"/>
             <a:ext cx="10058400" cy="530352"/>
           </a:xfrm>
@@ -39382,7 +38320,7 @@
       </p:sp>
       <p:sp>
         <p:nvSpPr>
-          <p:cNvPr id="6" name="Rectangle 5"/>
+          <p:cNvPr id="5" name="Rectangle 4"/>
           <p:cNvSpPr/>
           <p:nvPr/>
         </p:nvSpPr>
@@ -39431,7 +38369,7 @@
       </p:sp>
       <p:sp>
         <p:nvSpPr>
-          <p:cNvPr id="7" name="Rectangle 6"/>
+          <p:cNvPr id="6" name="Rectangle 5"/>
           <p:cNvSpPr/>
           <p:nvPr/>
         </p:nvSpPr>
@@ -39480,7 +38418,7 @@
       </p:sp>
       <p:sp>
         <p:nvSpPr>
-          <p:cNvPr id="8" name="TextBox 7"/>
+          <p:cNvPr id="7" name="TextBox 6"/>
           <p:cNvSpPr txBox="1"/>
           <p:nvPr/>
         </p:nvSpPr>
@@ -39522,7 +38460,7 @@
       </p:sp>
       <p:sp>
         <p:nvSpPr>
-          <p:cNvPr id="9" name="TextBox 8"/>
+          <p:cNvPr id="8" name="TextBox 7"/>
           <p:cNvSpPr txBox="1"/>
           <p:nvPr/>
         </p:nvSpPr>
@@ -39564,7 +38502,7 @@
       </p:sp>
       <p:graphicFrame>
         <p:nvGraphicFramePr>
-          <p:cNvPr id="10" name="Chart 9"/>
+          <p:cNvPr id="9" name="Chart 8"/>
           <p:cNvGraphicFramePr>
             <a:graphicFrameLocks noGrp="1"/>
           </p:cNvGraphicFramePr>
@@ -39582,7 +38520,7 @@
       </p:graphicFrame>
       <p:sp>
         <p:nvSpPr>
-          <p:cNvPr id="11" name="Rectangle 10"/>
+          <p:cNvPr id="10" name="Rectangle 9"/>
           <p:cNvSpPr/>
           <p:nvPr/>
         </p:nvSpPr>
@@ -39631,7 +38569,7 @@
       </p:sp>
       <p:sp>
         <p:nvSpPr>
-          <p:cNvPr id="12" name="TextBox 11"/>
+          <p:cNvPr id="11" name="TextBox 10"/>
           <p:cNvSpPr txBox="1"/>
           <p:nvPr/>
         </p:nvSpPr>
@@ -39673,7 +38611,7 @@
       </p:sp>
       <p:sp>
         <p:nvSpPr>
-          <p:cNvPr id="13" name="TextBox 12"/>
+          <p:cNvPr id="12" name="TextBox 11"/>
           <p:cNvSpPr txBox="1"/>
           <p:nvPr/>
         </p:nvSpPr>
@@ -39715,7 +38653,7 @@
       </p:sp>
       <p:sp>
         <p:nvSpPr>
-          <p:cNvPr id="14" name="TextBox 13"/>
+          <p:cNvPr id="13" name="TextBox 12"/>
           <p:cNvSpPr txBox="1"/>
           <p:nvPr/>
         </p:nvSpPr>
@@ -39831,7 +38769,7 @@
         <p:spPr>
           <a:xfrm>
             <a:off x="640080" y="329184"/>
-            <a:ext cx="5303520" cy="182880"/>
+            <a:ext cx="9875520" cy="182880"/>
           </a:xfrm>
           <a:prstGeom prst="rect">
             <a:avLst/>
@@ -39872,48 +38810,6 @@
         </p:nvSpPr>
         <p:spPr>
           <a:xfrm>
-            <a:off x="5897880" y="310896"/>
-            <a:ext cx="4800600" cy="256032"/>
-          </a:xfrm>
-          <a:prstGeom prst="rect">
-            <a:avLst/>
-          </a:prstGeom>
-          <a:noFill/>
-        </p:spPr>
-        <p:txBody>
-          <a:bodyPr wrap="none" lIns="9144" rIns="9144" tIns="9144" bIns="9144" anchor="t">
-            <a:spAutoFit/>
-          </a:bodyPr>
-          <a:lstStyle/>
-          <a:p>
-            <a:pPr algn="r">
-              <a:spcAft>
-                <a:spcPts val="0"/>
-              </a:spcAft>
-              <a:defRPr sz="680" b="1">
-                <a:solidFill>
-                  <a:srgbClr val="4F6B00"/>
-                </a:solidFill>
-                <a:latin typeface="Inter"/>
-              </a:defRPr>
-            </a:pPr>
-            <a:r>
-              <a:rPr>
-                <a:latin typeface="Inter"/>
-              </a:rPr>
-              <a:t>Illustrative, Gradient Maintained — demo data, not the client's holdings or managers</a:t>
-            </a:r>
-          </a:p>
-        </p:txBody>
-      </p:sp>
-      <p:sp>
-        <p:nvSpPr>
-          <p:cNvPr id="5" name="TextBox 4"/>
-          <p:cNvSpPr txBox="1"/>
-          <p:nvPr/>
-        </p:nvSpPr>
-        <p:spPr>
-          <a:xfrm>
             <a:off x="640080" y="566928"/>
             <a:ext cx="10058400" cy="530352"/>
           </a:xfrm>
@@ -39950,7 +38846,7 @@
       </p:sp>
       <p:sp>
         <p:nvSpPr>
-          <p:cNvPr id="6" name="Rectangle 5"/>
+          <p:cNvPr id="5" name="Rectangle 4"/>
           <p:cNvSpPr/>
           <p:nvPr/>
         </p:nvSpPr>
@@ -39999,7 +38895,7 @@
       </p:sp>
       <p:sp>
         <p:nvSpPr>
-          <p:cNvPr id="7" name="Rectangle 6"/>
+          <p:cNvPr id="6" name="Rectangle 5"/>
           <p:cNvSpPr/>
           <p:nvPr/>
         </p:nvSpPr>
@@ -40048,7 +38944,7 @@
       </p:sp>
       <p:sp>
         <p:nvSpPr>
-          <p:cNvPr id="8" name="TextBox 7"/>
+          <p:cNvPr id="7" name="TextBox 6"/>
           <p:cNvSpPr txBox="1"/>
           <p:nvPr/>
         </p:nvSpPr>
@@ -40090,7 +38986,7 @@
       </p:sp>
       <p:sp>
         <p:nvSpPr>
-          <p:cNvPr id="9" name="TextBox 8"/>
+          <p:cNvPr id="8" name="TextBox 7"/>
           <p:cNvSpPr txBox="1"/>
           <p:nvPr/>
         </p:nvSpPr>
@@ -40132,7 +39028,7 @@
       </p:sp>
       <p:graphicFrame>
         <p:nvGraphicFramePr>
-          <p:cNvPr id="10" name="Table 9"/>
+          <p:cNvPr id="9" name="Table 8"/>
           <p:cNvGraphicFramePr>
             <a:graphicFrameLocks noGrp="1"/>
           </p:cNvGraphicFramePr>
@@ -40818,7 +39714,7 @@
       </p:graphicFrame>
       <p:sp>
         <p:nvSpPr>
-          <p:cNvPr id="11" name="TextBox 10"/>
+          <p:cNvPr id="10" name="TextBox 9"/>
           <p:cNvSpPr txBox="1"/>
           <p:nvPr/>
         </p:nvSpPr>
@@ -40860,7 +39756,7 @@
       </p:sp>
       <p:graphicFrame>
         <p:nvGraphicFramePr>
-          <p:cNvPr id="12" name="Table 11"/>
+          <p:cNvPr id="11" name="Table 10"/>
           <p:cNvGraphicFramePr>
             <a:graphicFrameLocks noGrp="1"/>
           </p:cNvGraphicFramePr>
@@ -41122,7 +40018,7 @@
                         <a:rPr>
                           <a:latin typeface="Inter"/>
                         </a:rPr>
-                        <a:t>Partial</a:t>
+                        <a:t>Incomplete</a:t>
                       </a:r>
                     </a:p>
                   </a:txBody>
@@ -41230,7 +40126,7 @@
                         <a:rPr>
                           <a:latin typeface="Inter"/>
                         </a:rPr>
-                        <a:t>Partial — one unknown-grain holding excluded</a:t>
+                        <a:t>Incomplete — one unknown-grain holding excluded</a:t>
                       </a:r>
                     </a:p>
                   </a:txBody>
@@ -41328,7 +40224,7 @@
       </p:graphicFrame>
       <p:sp>
         <p:nvSpPr>
-          <p:cNvPr id="13" name="TextBox 12"/>
+          <p:cNvPr id="12" name="TextBox 11"/>
           <p:cNvSpPr txBox="1"/>
           <p:nvPr/>
         </p:nvSpPr>
@@ -41370,7 +40266,7 @@
       </p:sp>
       <p:sp>
         <p:nvSpPr>
-          <p:cNvPr id="14" name="Rectangle 13"/>
+          <p:cNvPr id="13" name="Rectangle 12"/>
           <p:cNvSpPr/>
           <p:nvPr/>
         </p:nvSpPr>
@@ -41419,7 +40315,7 @@
       </p:sp>
       <p:sp>
         <p:nvSpPr>
-          <p:cNvPr id="15" name="TextBox 14"/>
+          <p:cNvPr id="14" name="TextBox 13"/>
           <p:cNvSpPr txBox="1"/>
           <p:nvPr/>
         </p:nvSpPr>
@@ -41461,7 +40357,7 @@
       </p:sp>
       <p:sp>
         <p:nvSpPr>
-          <p:cNvPr id="16" name="TextBox 15"/>
+          <p:cNvPr id="15" name="TextBox 14"/>
           <p:cNvSpPr txBox="1"/>
           <p:nvPr/>
         </p:nvSpPr>
@@ -41503,7 +40399,7 @@
       </p:sp>
       <p:sp>
         <p:nvSpPr>
-          <p:cNvPr id="17" name="TextBox 16"/>
+          <p:cNvPr id="16" name="TextBox 15"/>
           <p:cNvSpPr txBox="1"/>
           <p:nvPr/>
         </p:nvSpPr>
@@ -41619,7 +40515,7 @@
         <p:spPr>
           <a:xfrm>
             <a:off x="640080" y="329184"/>
-            <a:ext cx="5303520" cy="182880"/>
+            <a:ext cx="9875520" cy="182880"/>
           </a:xfrm>
           <a:prstGeom prst="rect">
             <a:avLst/>
@@ -41660,48 +40556,6 @@
         </p:nvSpPr>
         <p:spPr>
           <a:xfrm>
-            <a:off x="5897880" y="310896"/>
-            <a:ext cx="4800600" cy="256032"/>
-          </a:xfrm>
-          <a:prstGeom prst="rect">
-            <a:avLst/>
-          </a:prstGeom>
-          <a:noFill/>
-        </p:spPr>
-        <p:txBody>
-          <a:bodyPr wrap="none" lIns="9144" rIns="9144" tIns="9144" bIns="9144" anchor="t">
-            <a:spAutoFit/>
-          </a:bodyPr>
-          <a:lstStyle/>
-          <a:p>
-            <a:pPr algn="r">
-              <a:spcAft>
-                <a:spcPts val="0"/>
-              </a:spcAft>
-              <a:defRPr sz="680" b="1">
-                <a:solidFill>
-                  <a:srgbClr val="4F6B00"/>
-                </a:solidFill>
-                <a:latin typeface="Inter"/>
-              </a:defRPr>
-            </a:pPr>
-            <a:r>
-              <a:rPr>
-                <a:latin typeface="Inter"/>
-              </a:rPr>
-              <a:t>Illustrative, Gradient Maintained — demo data, not the client's holdings or managers</a:t>
-            </a:r>
-          </a:p>
-        </p:txBody>
-      </p:sp>
-      <p:sp>
-        <p:nvSpPr>
-          <p:cNvPr id="5" name="TextBox 4"/>
-          <p:cNvSpPr txBox="1"/>
-          <p:nvPr/>
-        </p:nvSpPr>
-        <p:spPr>
-          <a:xfrm>
             <a:off x="640080" y="566928"/>
             <a:ext cx="10058400" cy="530352"/>
           </a:xfrm>
@@ -41738,7 +40592,7 @@
       </p:sp>
       <p:sp>
         <p:nvSpPr>
-          <p:cNvPr id="6" name="Rectangle 5"/>
+          <p:cNvPr id="5" name="Rectangle 4"/>
           <p:cNvSpPr/>
           <p:nvPr/>
         </p:nvSpPr>
@@ -41787,7 +40641,7 @@
       </p:sp>
       <p:sp>
         <p:nvSpPr>
-          <p:cNvPr id="7" name="Rectangle 6"/>
+          <p:cNvPr id="6" name="Rectangle 5"/>
           <p:cNvSpPr/>
           <p:nvPr/>
         </p:nvSpPr>
@@ -41836,7 +40690,7 @@
       </p:sp>
       <p:sp>
         <p:nvSpPr>
-          <p:cNvPr id="8" name="TextBox 7"/>
+          <p:cNvPr id="7" name="TextBox 6"/>
           <p:cNvSpPr txBox="1"/>
           <p:nvPr/>
         </p:nvSpPr>
@@ -41878,7 +40732,7 @@
       </p:sp>
       <p:sp>
         <p:nvSpPr>
-          <p:cNvPr id="9" name="TextBox 8"/>
+          <p:cNvPr id="8" name="TextBox 7"/>
           <p:cNvSpPr txBox="1"/>
           <p:nvPr/>
         </p:nvSpPr>
@@ -41920,7 +40774,7 @@
       </p:sp>
       <p:sp>
         <p:nvSpPr>
-          <p:cNvPr id="10" name="TextBox 9"/>
+          <p:cNvPr id="9" name="TextBox 8"/>
           <p:cNvSpPr txBox="1"/>
           <p:nvPr/>
         </p:nvSpPr>
@@ -41962,7 +40816,7 @@
       </p:sp>
       <p:sp>
         <p:nvSpPr>
-          <p:cNvPr id="11" name="Rectangle 10"/>
+          <p:cNvPr id="10" name="Rectangle 9"/>
           <p:cNvSpPr/>
           <p:nvPr/>
         </p:nvSpPr>
@@ -42011,7 +40865,7 @@
       </p:sp>
       <p:sp>
         <p:nvSpPr>
-          <p:cNvPr id="12" name="Oval 11"/>
+          <p:cNvPr id="11" name="Oval 10"/>
           <p:cNvSpPr/>
           <p:nvPr/>
         </p:nvSpPr>
@@ -42060,7 +40914,7 @@
       </p:sp>
       <p:sp>
         <p:nvSpPr>
-          <p:cNvPr id="13" name="Rectangle 12"/>
+          <p:cNvPr id="12" name="Rectangle 11"/>
           <p:cNvSpPr/>
           <p:nvPr/>
         </p:nvSpPr>
@@ -42109,7 +40963,7 @@
       </p:sp>
       <p:sp>
         <p:nvSpPr>
-          <p:cNvPr id="14" name="TextBox 13"/>
+          <p:cNvPr id="13" name="TextBox 12"/>
           <p:cNvSpPr txBox="1"/>
           <p:nvPr/>
         </p:nvSpPr>
@@ -42151,7 +41005,7 @@
       </p:sp>
       <p:sp>
         <p:nvSpPr>
-          <p:cNvPr id="15" name="Rectangle 14"/>
+          <p:cNvPr id="14" name="Rectangle 13"/>
           <p:cNvSpPr/>
           <p:nvPr/>
         </p:nvSpPr>
@@ -42200,7 +41054,7 @@
       </p:sp>
       <p:sp>
         <p:nvSpPr>
-          <p:cNvPr id="16" name="Oval 15"/>
+          <p:cNvPr id="15" name="Oval 14"/>
           <p:cNvSpPr/>
           <p:nvPr/>
         </p:nvSpPr>
@@ -42249,7 +41103,7 @@
       </p:sp>
       <p:sp>
         <p:nvSpPr>
-          <p:cNvPr id="17" name="Rectangle 16"/>
+          <p:cNvPr id="16" name="Rectangle 15"/>
           <p:cNvSpPr/>
           <p:nvPr/>
         </p:nvSpPr>
@@ -42298,7 +41152,7 @@
       </p:sp>
       <p:sp>
         <p:nvSpPr>
-          <p:cNvPr id="18" name="TextBox 17"/>
+          <p:cNvPr id="17" name="TextBox 16"/>
           <p:cNvSpPr txBox="1"/>
           <p:nvPr/>
         </p:nvSpPr>
@@ -42340,7 +41194,7 @@
       </p:sp>
       <p:sp>
         <p:nvSpPr>
-          <p:cNvPr id="19" name="Rectangle 18"/>
+          <p:cNvPr id="18" name="Rectangle 17"/>
           <p:cNvSpPr/>
           <p:nvPr/>
         </p:nvSpPr>
@@ -42389,7 +41243,7 @@
       </p:sp>
       <p:sp>
         <p:nvSpPr>
-          <p:cNvPr id="20" name="Oval 19"/>
+          <p:cNvPr id="19" name="Oval 18"/>
           <p:cNvSpPr/>
           <p:nvPr/>
         </p:nvSpPr>
@@ -42438,7 +41292,7 @@
       </p:sp>
       <p:sp>
         <p:nvSpPr>
-          <p:cNvPr id="21" name="Rectangle 20"/>
+          <p:cNvPr id="20" name="Rectangle 19"/>
           <p:cNvSpPr/>
           <p:nvPr/>
         </p:nvSpPr>
@@ -42487,7 +41341,7 @@
       </p:sp>
       <p:sp>
         <p:nvSpPr>
-          <p:cNvPr id="22" name="TextBox 21"/>
+          <p:cNvPr id="21" name="TextBox 20"/>
           <p:cNvSpPr txBox="1"/>
           <p:nvPr/>
         </p:nvSpPr>
@@ -42529,7 +41383,7 @@
       </p:sp>
       <p:sp>
         <p:nvSpPr>
-          <p:cNvPr id="23" name="Rectangle 22"/>
+          <p:cNvPr id="22" name="Rectangle 21"/>
           <p:cNvSpPr/>
           <p:nvPr/>
         </p:nvSpPr>
@@ -42578,7 +41432,7 @@
       </p:sp>
       <p:sp>
         <p:nvSpPr>
-          <p:cNvPr id="24" name="Oval 23"/>
+          <p:cNvPr id="23" name="Oval 22"/>
           <p:cNvSpPr/>
           <p:nvPr/>
         </p:nvSpPr>
@@ -42627,7 +41481,7 @@
       </p:sp>
       <p:sp>
         <p:nvSpPr>
-          <p:cNvPr id="25" name="Rectangle 24"/>
+          <p:cNvPr id="24" name="Rectangle 23"/>
           <p:cNvSpPr/>
           <p:nvPr/>
         </p:nvSpPr>
@@ -42676,7 +41530,7 @@
       </p:sp>
       <p:sp>
         <p:nvSpPr>
-          <p:cNvPr id="26" name="Rectangle 25"/>
+          <p:cNvPr id="25" name="Rectangle 24"/>
           <p:cNvSpPr/>
           <p:nvPr/>
         </p:nvSpPr>
@@ -42725,7 +41579,7 @@
       </p:sp>
       <p:sp>
         <p:nvSpPr>
-          <p:cNvPr id="27" name="TextBox 26"/>
+          <p:cNvPr id="26" name="TextBox 25"/>
           <p:cNvSpPr txBox="1"/>
           <p:nvPr/>
         </p:nvSpPr>
@@ -42767,7 +41621,7 @@
       </p:sp>
       <p:sp>
         <p:nvSpPr>
-          <p:cNvPr id="28" name="TextBox 27"/>
+          <p:cNvPr id="27" name="TextBox 26"/>
           <p:cNvSpPr txBox="1"/>
           <p:nvPr/>
         </p:nvSpPr>
@@ -42809,7 +41663,7 @@
       </p:sp>
       <p:sp>
         <p:nvSpPr>
-          <p:cNvPr id="29" name="TextBox 28"/>
+          <p:cNvPr id="28" name="TextBox 27"/>
           <p:cNvSpPr txBox="1"/>
           <p:nvPr/>
         </p:nvSpPr>
@@ -42925,7 +41779,7 @@
         <p:spPr>
           <a:xfrm>
             <a:off x="640080" y="329184"/>
-            <a:ext cx="5303520" cy="182880"/>
+            <a:ext cx="9875520" cy="182880"/>
           </a:xfrm>
           <a:prstGeom prst="rect">
             <a:avLst/>
@@ -42966,48 +41820,6 @@
         </p:nvSpPr>
         <p:spPr>
           <a:xfrm>
-            <a:off x="5897880" y="310896"/>
-            <a:ext cx="4800600" cy="256032"/>
-          </a:xfrm>
-          <a:prstGeom prst="rect">
-            <a:avLst/>
-          </a:prstGeom>
-          <a:noFill/>
-        </p:spPr>
-        <p:txBody>
-          <a:bodyPr wrap="none" lIns="9144" rIns="9144" tIns="9144" bIns="9144" anchor="t">
-            <a:spAutoFit/>
-          </a:bodyPr>
-          <a:lstStyle/>
-          <a:p>
-            <a:pPr algn="r">
-              <a:spcAft>
-                <a:spcPts val="0"/>
-              </a:spcAft>
-              <a:defRPr sz="680" b="1">
-                <a:solidFill>
-                  <a:srgbClr val="4F6B00"/>
-                </a:solidFill>
-                <a:latin typeface="Inter"/>
-              </a:defRPr>
-            </a:pPr>
-            <a:r>
-              <a:rPr>
-                <a:latin typeface="Inter"/>
-              </a:rPr>
-              <a:t>Illustrative, Gradient Maintained — demo data, not the client's holdings or managers</a:t>
-            </a:r>
-          </a:p>
-        </p:txBody>
-      </p:sp>
-      <p:sp>
-        <p:nvSpPr>
-          <p:cNvPr id="5" name="TextBox 4"/>
-          <p:cNvSpPr txBox="1"/>
-          <p:nvPr/>
-        </p:nvSpPr>
-        <p:spPr>
-          <a:xfrm>
             <a:off x="640080" y="566928"/>
             <a:ext cx="10058400" cy="530352"/>
           </a:xfrm>
@@ -43044,7 +41856,7 @@
       </p:sp>
       <p:sp>
         <p:nvSpPr>
-          <p:cNvPr id="6" name="Rectangle 5"/>
+          <p:cNvPr id="5" name="Rectangle 4"/>
           <p:cNvSpPr/>
           <p:nvPr/>
         </p:nvSpPr>
@@ -43093,7 +41905,7 @@
       </p:sp>
       <p:sp>
         <p:nvSpPr>
-          <p:cNvPr id="7" name="Rectangle 6"/>
+          <p:cNvPr id="6" name="Rectangle 5"/>
           <p:cNvSpPr/>
           <p:nvPr/>
         </p:nvSpPr>
@@ -43142,7 +41954,7 @@
       </p:sp>
       <p:sp>
         <p:nvSpPr>
-          <p:cNvPr id="8" name="TextBox 7"/>
+          <p:cNvPr id="7" name="TextBox 6"/>
           <p:cNvSpPr txBox="1"/>
           <p:nvPr/>
         </p:nvSpPr>
@@ -43184,7 +41996,7 @@
       </p:sp>
       <p:sp>
         <p:nvSpPr>
-          <p:cNvPr id="9" name="TextBox 8"/>
+          <p:cNvPr id="8" name="TextBox 7"/>
           <p:cNvSpPr txBox="1"/>
           <p:nvPr/>
         </p:nvSpPr>
@@ -43226,7 +42038,7 @@
       </p:sp>
       <p:graphicFrame>
         <p:nvGraphicFramePr>
-          <p:cNvPr id="10" name="Chart 9"/>
+          <p:cNvPr id="9" name="Chart 8"/>
           <p:cNvGraphicFramePr>
             <a:graphicFrameLocks noGrp="1"/>
           </p:cNvGraphicFramePr>
@@ -43244,7 +42056,7 @@
       </p:graphicFrame>
       <p:sp>
         <p:nvSpPr>
-          <p:cNvPr id="11" name="Rectangle 10"/>
+          <p:cNvPr id="10" name="Rectangle 9"/>
           <p:cNvSpPr/>
           <p:nvPr/>
         </p:nvSpPr>
@@ -43293,7 +42105,7 @@
       </p:sp>
       <p:sp>
         <p:nvSpPr>
-          <p:cNvPr id="12" name="TextBox 11"/>
+          <p:cNvPr id="11" name="TextBox 10"/>
           <p:cNvSpPr txBox="1"/>
           <p:nvPr/>
         </p:nvSpPr>
@@ -43335,7 +42147,7 @@
       </p:sp>
       <p:sp>
         <p:nvSpPr>
-          <p:cNvPr id="13" name="TextBox 12"/>
+          <p:cNvPr id="12" name="TextBox 11"/>
           <p:cNvSpPr txBox="1"/>
           <p:nvPr/>
         </p:nvSpPr>
@@ -43377,7 +42189,7 @@
       </p:sp>
       <p:sp>
         <p:nvSpPr>
-          <p:cNvPr id="14" name="TextBox 13"/>
+          <p:cNvPr id="13" name="TextBox 12"/>
           <p:cNvSpPr txBox="1"/>
           <p:nvPr/>
         </p:nvSpPr>

--- a/plugins/gradient-cio/assets/examples/gradient-portfolio-construction-private-markets.pptx
+++ b/plugins/gradient-cio/assets/examples/gradient-portfolio-construction-private-markets.pptx
@@ -23500,7 +23500,7 @@
                         <a:rPr>
                           <a:latin typeface="Inter"/>
                         </a:rPr>
-                        <a:t>Watch</a:t>
+                        <a:t>On watch list</a:t>
                       </a:r>
                     </a:p>
                   </a:txBody>

--- a/plugins/gradient-cio/assets/examples/gradient-portfolio-construction-private-markets.pptx
+++ b/plugins/gradient-cio/assets/examples/gradient-portfolio-construction-private-markets.pptx
@@ -34460,7 +34460,7 @@
                         <a:rPr>
                           <a:latin typeface="Inter"/>
                         </a:rPr>
-                        <a:t>get_chart_data</a:t>
+                        <a:t>get_portfolio_exposure</a:t>
                       </a:r>
                     </a:p>
                   </a:txBody>

--- a/plugins/gradient-cio/assets/examples/gradient-portfolio-construction-private-markets.pptx
+++ b/plugins/gradient-cio/assets/examples/gradient-portfolio-construction-private-markets.pptx
@@ -33,6 +33,7 @@
     <ns0:sldId id="281" ns1:id="rId32"/>
     <ns0:sldId id="282" ns1:id="rId33"/>
     <ns0:sldId id="283" ns1:id="rId34"/>
+    <ns0:sldId id="284" ns1:id="rId35"/>
   </ns0:sldIdLst>
   <ns0:sldSz cx="12191695" cy="6858000" type="screen16x9"/>
   <ns0:notesSz cx="6858000" cy="9144000"/>
@@ -5542,224 +5543,7 @@
       </p:sp>
       <p:sp>
         <p:nvSpPr>
-          <p:cNvPr id="17" name="Rectangle 16"/>
-          <p:cNvSpPr/>
-          <p:nvPr/>
-        </p:nvSpPr>
-        <p:spPr>
-          <a:xfrm>
-            <a:off x="685800" y="5687568"/>
-            <a:ext cx="3337560" cy="530352"/>
-          </a:xfrm>
-          <a:prstGeom prst="rect">
-            <a:avLst/>
-          </a:prstGeom>
-          <a:solidFill>
-            <a:srgbClr val="F2A93B"/>
-          </a:solidFill>
-          <a:ln>
-            <a:solidFill>
-              <a:srgbClr val="F2A93B"/>
-            </a:solidFill>
-          </a:ln>
-        </p:spPr>
-        <p:style>
-          <a:lnRef idx="1">
-            <a:schemeClr val="accent1"/>
-          </a:lnRef>
-          <a:fillRef idx="3">
-            <a:schemeClr val="accent1"/>
-          </a:fillRef>
-          <a:effectRef idx="2">
-            <a:schemeClr val="accent1"/>
-          </a:effectRef>
-          <a:fontRef idx="minor">
-            <a:schemeClr val="lt1"/>
-          </a:fontRef>
-        </p:style>
-        <p:txBody>
-          <a:bodyPr rtlCol="0" anchor="ctr"/>
-          <a:lstStyle/>
-          <a:p>
-            <a:pPr algn="ctr">
-              <a:defRPr>
-                <a:latin typeface="Inter"/>
-              </a:defRPr>
-            </a:pPr>
-          </a:p>
-        </p:txBody>
-      </p:sp>
-      <p:sp>
-        <p:nvSpPr>
-          <p:cNvPr id="18" name="TextBox 17"/>
-          <p:cNvSpPr txBox="1"/>
-          <p:nvPr/>
-        </p:nvSpPr>
-        <p:spPr>
-          <a:xfrm>
-            <a:off x="822960" y="5760720"/>
-            <a:ext cx="3063240" cy="128016"/>
-          </a:xfrm>
-          <a:prstGeom prst="rect">
-            <a:avLst/>
-          </a:prstGeom>
-          <a:noFill/>
-        </p:spPr>
-        <p:txBody>
-          <a:bodyPr wrap="none" lIns="9144" rIns="9144" tIns="9144" bIns="9144" anchor="t">
-            <a:spAutoFit/>
-          </a:bodyPr>
-          <a:lstStyle/>
-          <a:p>
-            <a:pPr algn="l">
-              <a:spcAft>
-                <a:spcPts val="0"/>
-              </a:spcAft>
-              <a:defRPr sz="620" b="1">
-                <a:solidFill>
-                  <a:srgbClr val="0D1117"/>
-                </a:solidFill>
-                <a:latin typeface="Inter"/>
-              </a:defRPr>
-            </a:pPr>
-            <a:r>
-              <a:rPr>
-                <a:latin typeface="Inter"/>
-              </a:rPr>
-              <a:t>OVERALL VIEW</a:t>
-            </a:r>
-          </a:p>
-        </p:txBody>
-      </p:sp>
-      <p:sp>
-        <p:nvSpPr>
-          <p:cNvPr id="19" name="TextBox 18"/>
-          <p:cNvSpPr txBox="1"/>
-          <p:nvPr/>
-        </p:nvSpPr>
-        <p:spPr>
-          <a:xfrm>
-            <a:off x="822960" y="5916168"/>
-            <a:ext cx="3063240" cy="182880"/>
-          </a:xfrm>
-          <a:prstGeom prst="rect">
-            <a:avLst/>
-          </a:prstGeom>
-          <a:noFill/>
-        </p:spPr>
-        <p:txBody>
-          <a:bodyPr wrap="none" lIns="9144" rIns="9144" tIns="9144" bIns="9144" anchor="t">
-            <a:spAutoFit/>
-          </a:bodyPr>
-          <a:lstStyle/>
-          <a:p>
-            <a:pPr algn="l">
-              <a:spcAft>
-                <a:spcPts val="0"/>
-              </a:spcAft>
-              <a:defRPr sz="900" b="1">
-                <a:solidFill>
-                  <a:srgbClr val="0D1117"/>
-                </a:solidFill>
-                <a:latin typeface="Inter"/>
-              </a:defRPr>
-            </a:pPr>
-            <a:r>
-              <a:rPr>
-                <a:latin typeface="Inter"/>
-              </a:rPr>
-              <a:t>Pacing and concentration on watch</a:t>
-            </a:r>
-          </a:p>
-        </p:txBody>
-      </p:sp>
-      <p:sp>
-        <p:nvSpPr>
-          <p:cNvPr id="20" name="TextBox 19"/>
-          <p:cNvSpPr txBox="1"/>
-          <p:nvPr/>
-        </p:nvSpPr>
-        <p:spPr>
-          <a:xfrm>
-            <a:off x="4297680" y="5733288"/>
-            <a:ext cx="3108960" cy="164592"/>
-          </a:xfrm>
-          <a:prstGeom prst="rect">
-            <a:avLst/>
-          </a:prstGeom>
-          <a:noFill/>
-        </p:spPr>
-        <p:txBody>
-          <a:bodyPr wrap="none" lIns="9144" rIns="9144" tIns="9144" bIns="9144" anchor="t">
-            <a:spAutoFit/>
-          </a:bodyPr>
-          <a:lstStyle/>
-          <a:p>
-            <a:pPr algn="l">
-              <a:spcAft>
-                <a:spcPts val="0"/>
-              </a:spcAft>
-              <a:defRPr sz="650" b="1">
-                <a:solidFill>
-                  <a:srgbClr val="8A94A1"/>
-                </a:solidFill>
-                <a:latin typeface="Inter"/>
-              </a:defRPr>
-            </a:pPr>
-            <a:r>
-              <a:rPr>
-                <a:latin typeface="Inter"/>
-              </a:rPr>
-              <a:t>SCOPE REVIEWED</a:t>
-            </a:r>
-          </a:p>
-        </p:txBody>
-      </p:sp>
-      <p:sp>
-        <p:nvSpPr>
-          <p:cNvPr id="21" name="TextBox 20"/>
-          <p:cNvSpPr txBox="1"/>
-          <p:nvPr/>
-        </p:nvSpPr>
-        <p:spPr>
-          <a:xfrm>
-            <a:off x="4297680" y="5934456"/>
-            <a:ext cx="3108960" cy="201168"/>
-          </a:xfrm>
-          <a:prstGeom prst="rect">
-            <a:avLst/>
-          </a:prstGeom>
-          <a:noFill/>
-        </p:spPr>
-        <p:txBody>
-          <a:bodyPr wrap="none" lIns="9144" rIns="9144" tIns="9144" bIns="9144" anchor="t">
-            <a:spAutoFit/>
-          </a:bodyPr>
-          <a:lstStyle/>
-          <a:p>
-            <a:pPr algn="l">
-              <a:spcAft>
-                <a:spcPts val="0"/>
-              </a:spcAft>
-              <a:defRPr sz="800" b="1">
-                <a:solidFill>
-                  <a:srgbClr val="FFFFFF"/>
-                </a:solidFill>
-                <a:latin typeface="Inter"/>
-              </a:defRPr>
-            </a:pPr>
-            <a:r>
-              <a:rPr>
-                <a:latin typeface="Inter"/>
-              </a:rPr>
-              <a:t>9 of 10 · Partial</a:t>
-            </a:r>
-          </a:p>
-        </p:txBody>
-      </p:sp>
-      <p:sp>
-        <p:nvSpPr>
-          <p:cNvPr id="22" name="TextBox 21"/>
+          <p:cNvPr id="17" name="TextBox 16"/>
           <p:cNvSpPr txBox="1"/>
           <p:nvPr/>
         </p:nvSpPr>
@@ -5801,7 +5585,7 @@
       </p:sp>
       <p:sp>
         <p:nvSpPr>
-          <p:cNvPr id="23" name="TextBox 22"/>
+          <p:cNvPr id="18" name="TextBox 17"/>
           <p:cNvSpPr txBox="1"/>
           <p:nvPr/>
         </p:nvSpPr>
@@ -5843,7 +5627,7 @@
       </p:sp>
       <p:sp>
         <p:nvSpPr>
-          <p:cNvPr id="24" name="TextBox 23"/>
+          <p:cNvPr id="19" name="TextBox 18"/>
           <p:cNvSpPr txBox="1"/>
           <p:nvPr/>
         </p:nvSpPr>
@@ -5959,7 +5743,7 @@
         <p:spPr>
           <a:xfrm>
             <a:off x="640080" y="329184"/>
-            <a:ext cx="5303520" cy="182880"/>
+            <a:ext cx="9875520" cy="182880"/>
           </a:xfrm>
           <a:prstGeom prst="rect">
             <a:avLst/>
@@ -6000,48 +5784,6 @@
         </p:nvSpPr>
         <p:spPr>
           <a:xfrm>
-            <a:off x="5897880" y="310896"/>
-            <a:ext cx="4800600" cy="256032"/>
-          </a:xfrm>
-          <a:prstGeom prst="rect">
-            <a:avLst/>
-          </a:prstGeom>
-          <a:noFill/>
-        </p:spPr>
-        <p:txBody>
-          <a:bodyPr wrap="none" lIns="9144" rIns="9144" tIns="9144" bIns="9144" anchor="t">
-            <a:spAutoFit/>
-          </a:bodyPr>
-          <a:lstStyle/>
-          <a:p>
-            <a:pPr algn="r">
-              <a:spcAft>
-                <a:spcPts val="0"/>
-              </a:spcAft>
-              <a:defRPr sz="680" b="1">
-                <a:solidFill>
-                  <a:srgbClr val="4F6B00"/>
-                </a:solidFill>
-                <a:latin typeface="Inter"/>
-              </a:defRPr>
-            </a:pPr>
-            <a:r>
-              <a:rPr>
-                <a:latin typeface="Inter"/>
-              </a:rPr>
-              <a:t>Illustrative, Gradient Maintained — demo data, not the client's holdings or managers</a:t>
-            </a:r>
-          </a:p>
-        </p:txBody>
-      </p:sp>
-      <p:sp>
-        <p:nvSpPr>
-          <p:cNvPr id="5" name="TextBox 4"/>
-          <p:cNvSpPr txBox="1"/>
-          <p:nvPr/>
-        </p:nvSpPr>
-        <p:spPr>
-          <a:xfrm>
             <a:off x="640080" y="566928"/>
             <a:ext cx="10058400" cy="530352"/>
           </a:xfrm>
@@ -6078,7 +5820,7 @@
       </p:sp>
       <p:sp>
         <p:nvSpPr>
-          <p:cNvPr id="6" name="Rectangle 5"/>
+          <p:cNvPr id="5" name="Rectangle 4"/>
           <p:cNvSpPr/>
           <p:nvPr/>
         </p:nvSpPr>
@@ -6127,7 +5869,7 @@
       </p:sp>
       <p:sp>
         <p:nvSpPr>
-          <p:cNvPr id="7" name="Rectangle 6"/>
+          <p:cNvPr id="6" name="Rectangle 5"/>
           <p:cNvSpPr/>
           <p:nvPr/>
         </p:nvSpPr>
@@ -6176,7 +5918,7 @@
       </p:sp>
       <p:sp>
         <p:nvSpPr>
-          <p:cNvPr id="8" name="TextBox 7"/>
+          <p:cNvPr id="7" name="TextBox 6"/>
           <p:cNvSpPr txBox="1"/>
           <p:nvPr/>
         </p:nvSpPr>
@@ -6218,7 +5960,7 @@
       </p:sp>
       <p:sp>
         <p:nvSpPr>
-          <p:cNvPr id="9" name="TextBox 8"/>
+          <p:cNvPr id="8" name="TextBox 7"/>
           <p:cNvSpPr txBox="1"/>
           <p:nvPr/>
         </p:nvSpPr>
@@ -6260,7 +6002,7 @@
       </p:sp>
       <p:graphicFrame>
         <p:nvGraphicFramePr>
-          <p:cNvPr id="10" name="Table 9"/>
+          <p:cNvPr id="9" name="Table 8"/>
           <p:cNvGraphicFramePr>
             <a:graphicFrameLocks noGrp="1"/>
           </p:cNvGraphicFramePr>
@@ -7110,7 +6852,7 @@
       </p:graphicFrame>
       <p:sp>
         <p:nvSpPr>
-          <p:cNvPr id="11" name="Rectangle 10"/>
+          <p:cNvPr id="10" name="Rectangle 9"/>
           <p:cNvSpPr/>
           <p:nvPr/>
         </p:nvSpPr>
@@ -7159,7 +6901,7 @@
       </p:sp>
       <p:sp>
         <p:nvSpPr>
-          <p:cNvPr id="12" name="Rectangle 11"/>
+          <p:cNvPr id="11" name="Rectangle 10"/>
           <p:cNvSpPr/>
           <p:nvPr/>
         </p:nvSpPr>
@@ -7208,7 +6950,7 @@
       </p:sp>
       <p:sp>
         <p:nvSpPr>
-          <p:cNvPr id="13" name="TextBox 12"/>
+          <p:cNvPr id="12" name="TextBox 11"/>
           <p:cNvSpPr txBox="1"/>
           <p:nvPr/>
         </p:nvSpPr>
@@ -7250,7 +6992,7 @@
       </p:sp>
       <p:sp>
         <p:nvSpPr>
-          <p:cNvPr id="14" name="TextBox 13"/>
+          <p:cNvPr id="13" name="TextBox 12"/>
           <p:cNvSpPr txBox="1"/>
           <p:nvPr/>
         </p:nvSpPr>
@@ -7292,7 +7034,7 @@
       </p:sp>
       <p:sp>
         <p:nvSpPr>
-          <p:cNvPr id="15" name="TextBox 14"/>
+          <p:cNvPr id="14" name="TextBox 13"/>
           <p:cNvSpPr txBox="1"/>
           <p:nvPr/>
         </p:nvSpPr>
@@ -7334,7 +7076,7 @@
       </p:sp>
       <p:sp>
         <p:nvSpPr>
-          <p:cNvPr id="16" name="Rectangle 15"/>
+          <p:cNvPr id="15" name="Rectangle 14"/>
           <p:cNvSpPr/>
           <p:nvPr/>
         </p:nvSpPr>
@@ -7383,7 +7125,7 @@
       </p:sp>
       <p:sp>
         <p:nvSpPr>
-          <p:cNvPr id="17" name="TextBox 16"/>
+          <p:cNvPr id="16" name="TextBox 15"/>
           <p:cNvSpPr txBox="1"/>
           <p:nvPr/>
         </p:nvSpPr>
@@ -7425,7 +7167,7 @@
       </p:sp>
       <p:sp>
         <p:nvSpPr>
-          <p:cNvPr id="18" name="TextBox 17"/>
+          <p:cNvPr id="17" name="TextBox 16"/>
           <p:cNvSpPr txBox="1"/>
           <p:nvPr/>
         </p:nvSpPr>
@@ -7467,7 +7209,7 @@
       </p:sp>
       <p:sp>
         <p:nvSpPr>
-          <p:cNvPr id="19" name="TextBox 18"/>
+          <p:cNvPr id="18" name="TextBox 17"/>
           <p:cNvSpPr txBox="1"/>
           <p:nvPr/>
         </p:nvSpPr>
@@ -7583,7 +7325,7 @@
         <p:spPr>
           <a:xfrm>
             <a:off x="640080" y="329184"/>
-            <a:ext cx="5303520" cy="182880"/>
+            <a:ext cx="9875520" cy="182880"/>
           </a:xfrm>
           <a:prstGeom prst="rect">
             <a:avLst/>
@@ -7624,48 +7366,6 @@
         </p:nvSpPr>
         <p:spPr>
           <a:xfrm>
-            <a:off x="5897880" y="310896"/>
-            <a:ext cx="4800600" cy="256032"/>
-          </a:xfrm>
-          <a:prstGeom prst="rect">
-            <a:avLst/>
-          </a:prstGeom>
-          <a:noFill/>
-        </p:spPr>
-        <p:txBody>
-          <a:bodyPr wrap="none" lIns="9144" rIns="9144" tIns="9144" bIns="9144" anchor="t">
-            <a:spAutoFit/>
-          </a:bodyPr>
-          <a:lstStyle/>
-          <a:p>
-            <a:pPr algn="r">
-              <a:spcAft>
-                <a:spcPts val="0"/>
-              </a:spcAft>
-              <a:defRPr sz="680" b="1">
-                <a:solidFill>
-                  <a:srgbClr val="4F6B00"/>
-                </a:solidFill>
-                <a:latin typeface="Inter"/>
-              </a:defRPr>
-            </a:pPr>
-            <a:r>
-              <a:rPr>
-                <a:latin typeface="Inter"/>
-              </a:rPr>
-              <a:t>Illustrative, Gradient Maintained — demo data, not the client's holdings or managers</a:t>
-            </a:r>
-          </a:p>
-        </p:txBody>
-      </p:sp>
-      <p:sp>
-        <p:nvSpPr>
-          <p:cNvPr id="5" name="TextBox 4"/>
-          <p:cNvSpPr txBox="1"/>
-          <p:nvPr/>
-        </p:nvSpPr>
-        <p:spPr>
-          <a:xfrm>
             <a:off x="640080" y="566928"/>
             <a:ext cx="10058400" cy="530352"/>
           </a:xfrm>
@@ -7702,7 +7402,7 @@
       </p:sp>
       <p:sp>
         <p:nvSpPr>
-          <p:cNvPr id="6" name="Rectangle 5"/>
+          <p:cNvPr id="5" name="Rectangle 4"/>
           <p:cNvSpPr/>
           <p:nvPr/>
         </p:nvSpPr>
@@ -7751,7 +7451,7 @@
       </p:sp>
       <p:sp>
         <p:nvSpPr>
-          <p:cNvPr id="7" name="Rectangle 6"/>
+          <p:cNvPr id="6" name="Rectangle 5"/>
           <p:cNvSpPr/>
           <p:nvPr/>
         </p:nvSpPr>
@@ -7800,7 +7500,7 @@
       </p:sp>
       <p:sp>
         <p:nvSpPr>
-          <p:cNvPr id="8" name="TextBox 7"/>
+          <p:cNvPr id="7" name="TextBox 6"/>
           <p:cNvSpPr txBox="1"/>
           <p:nvPr/>
         </p:nvSpPr>
@@ -7842,7 +7542,7 @@
       </p:sp>
       <p:sp>
         <p:nvSpPr>
-          <p:cNvPr id="9" name="TextBox 8"/>
+          <p:cNvPr id="8" name="TextBox 7"/>
           <p:cNvSpPr txBox="1"/>
           <p:nvPr/>
         </p:nvSpPr>
@@ -7884,7 +7584,7 @@
       </p:sp>
       <p:graphicFrame>
         <p:nvGraphicFramePr>
-          <p:cNvPr id="10" name="Chart 9"/>
+          <p:cNvPr id="9" name="Chart 8"/>
           <p:cNvGraphicFramePr>
             <a:graphicFrameLocks noGrp="1"/>
           </p:cNvGraphicFramePr>
@@ -7902,7 +7602,7 @@
       </p:graphicFrame>
       <p:sp>
         <p:nvSpPr>
-          <p:cNvPr id="11" name="Rectangle 10"/>
+          <p:cNvPr id="10" name="Rectangle 9"/>
           <p:cNvSpPr/>
           <p:nvPr/>
         </p:nvSpPr>
@@ -7951,7 +7651,7 @@
       </p:sp>
       <p:sp>
         <p:nvSpPr>
-          <p:cNvPr id="12" name="TextBox 11"/>
+          <p:cNvPr id="11" name="TextBox 10"/>
           <p:cNvSpPr txBox="1"/>
           <p:nvPr/>
         </p:nvSpPr>
@@ -7993,7 +7693,7 @@
       </p:sp>
       <p:sp>
         <p:nvSpPr>
-          <p:cNvPr id="13" name="TextBox 12"/>
+          <p:cNvPr id="12" name="TextBox 11"/>
           <p:cNvSpPr txBox="1"/>
           <p:nvPr/>
         </p:nvSpPr>
@@ -8035,7 +7735,7 @@
       </p:sp>
       <p:sp>
         <p:nvSpPr>
-          <p:cNvPr id="14" name="TextBox 13"/>
+          <p:cNvPr id="13" name="TextBox 12"/>
           <p:cNvSpPr txBox="1"/>
           <p:nvPr/>
         </p:nvSpPr>
@@ -8151,7 +7851,7 @@
         <p:spPr>
           <a:xfrm>
             <a:off x="640080" y="329184"/>
-            <a:ext cx="5303520" cy="182880"/>
+            <a:ext cx="9875520" cy="182880"/>
           </a:xfrm>
           <a:prstGeom prst="rect">
             <a:avLst/>
@@ -8192,48 +7892,6 @@
         </p:nvSpPr>
         <p:spPr>
           <a:xfrm>
-            <a:off x="5897880" y="310896"/>
-            <a:ext cx="4800600" cy="256032"/>
-          </a:xfrm>
-          <a:prstGeom prst="rect">
-            <a:avLst/>
-          </a:prstGeom>
-          <a:noFill/>
-        </p:spPr>
-        <p:txBody>
-          <a:bodyPr wrap="none" lIns="9144" rIns="9144" tIns="9144" bIns="9144" anchor="t">
-            <a:spAutoFit/>
-          </a:bodyPr>
-          <a:lstStyle/>
-          <a:p>
-            <a:pPr algn="r">
-              <a:spcAft>
-                <a:spcPts val="0"/>
-              </a:spcAft>
-              <a:defRPr sz="680" b="1">
-                <a:solidFill>
-                  <a:srgbClr val="4F6B00"/>
-                </a:solidFill>
-                <a:latin typeface="Inter"/>
-              </a:defRPr>
-            </a:pPr>
-            <a:r>
-              <a:rPr>
-                <a:latin typeface="Inter"/>
-              </a:rPr>
-              <a:t>Illustrative, Gradient Maintained — demo data, not the client's holdings or managers</a:t>
-            </a:r>
-          </a:p>
-        </p:txBody>
-      </p:sp>
-      <p:sp>
-        <p:nvSpPr>
-          <p:cNvPr id="5" name="TextBox 4"/>
-          <p:cNvSpPr txBox="1"/>
-          <p:nvPr/>
-        </p:nvSpPr>
-        <p:spPr>
-          <a:xfrm>
             <a:off x="640080" y="566928"/>
             <a:ext cx="10058400" cy="530352"/>
           </a:xfrm>
@@ -8270,7 +7928,7 @@
       </p:sp>
       <p:sp>
         <p:nvSpPr>
-          <p:cNvPr id="6" name="Rectangle 5"/>
+          <p:cNvPr id="5" name="Rectangle 4"/>
           <p:cNvSpPr/>
           <p:nvPr/>
         </p:nvSpPr>
@@ -8319,7 +7977,7 @@
       </p:sp>
       <p:sp>
         <p:nvSpPr>
-          <p:cNvPr id="7" name="Rectangle 6"/>
+          <p:cNvPr id="6" name="Rectangle 5"/>
           <p:cNvSpPr/>
           <p:nvPr/>
         </p:nvSpPr>
@@ -8368,7 +8026,7 @@
       </p:sp>
       <p:sp>
         <p:nvSpPr>
-          <p:cNvPr id="8" name="TextBox 7"/>
+          <p:cNvPr id="7" name="TextBox 6"/>
           <p:cNvSpPr txBox="1"/>
           <p:nvPr/>
         </p:nvSpPr>
@@ -8410,7 +8068,7 @@
       </p:sp>
       <p:sp>
         <p:nvSpPr>
-          <p:cNvPr id="9" name="TextBox 8"/>
+          <p:cNvPr id="8" name="TextBox 7"/>
           <p:cNvSpPr txBox="1"/>
           <p:nvPr/>
         </p:nvSpPr>
@@ -8452,7 +8110,7 @@
       </p:sp>
       <p:graphicFrame>
         <p:nvGraphicFramePr>
-          <p:cNvPr id="10" name="Table 9"/>
+          <p:cNvPr id="9" name="Table 8"/>
           <p:cNvGraphicFramePr>
             <a:graphicFrameLocks noGrp="1"/>
           </p:cNvGraphicFramePr>
@@ -8892,7 +8550,7 @@
       </p:graphicFrame>
       <p:sp>
         <p:nvSpPr>
-          <p:cNvPr id="11" name="TextBox 10"/>
+          <p:cNvPr id="10" name="TextBox 9"/>
           <p:cNvSpPr txBox="1"/>
           <p:nvPr/>
         </p:nvSpPr>
@@ -8934,7 +8592,7 @@
       </p:sp>
       <p:graphicFrame>
         <p:nvGraphicFramePr>
-          <p:cNvPr id="12" name="Table 11"/>
+          <p:cNvPr id="11" name="Table 10"/>
           <p:cNvGraphicFramePr>
             <a:graphicFrameLocks noGrp="1"/>
           </p:cNvGraphicFramePr>
@@ -9293,7 +8951,7 @@
       </p:graphicFrame>
       <p:sp>
         <p:nvSpPr>
-          <p:cNvPr id="13" name="TextBox 12"/>
+          <p:cNvPr id="12" name="TextBox 11"/>
           <p:cNvSpPr txBox="1"/>
           <p:nvPr/>
         </p:nvSpPr>
@@ -9335,7 +8993,7 @@
       </p:sp>
       <p:sp>
         <p:nvSpPr>
-          <p:cNvPr id="14" name="Rectangle 13"/>
+          <p:cNvPr id="13" name="Rectangle 12"/>
           <p:cNvSpPr/>
           <p:nvPr/>
         </p:nvSpPr>
@@ -9384,7 +9042,7 @@
       </p:sp>
       <p:sp>
         <p:nvSpPr>
-          <p:cNvPr id="15" name="TextBox 14"/>
+          <p:cNvPr id="14" name="TextBox 13"/>
           <p:cNvSpPr txBox="1"/>
           <p:nvPr/>
         </p:nvSpPr>
@@ -9426,7 +9084,7 @@
       </p:sp>
       <p:sp>
         <p:nvSpPr>
-          <p:cNvPr id="16" name="TextBox 15"/>
+          <p:cNvPr id="15" name="TextBox 14"/>
           <p:cNvSpPr txBox="1"/>
           <p:nvPr/>
         </p:nvSpPr>
@@ -9468,7 +9126,7 @@
       </p:sp>
       <p:sp>
         <p:nvSpPr>
-          <p:cNvPr id="17" name="TextBox 16"/>
+          <p:cNvPr id="16" name="TextBox 15"/>
           <p:cNvSpPr txBox="1"/>
           <p:nvPr/>
         </p:nvSpPr>
@@ -9584,7 +9242,7 @@
         <p:spPr>
           <a:xfrm>
             <a:off x="640080" y="329184"/>
-            <a:ext cx="5303520" cy="182880"/>
+            <a:ext cx="9875520" cy="182880"/>
           </a:xfrm>
           <a:prstGeom prst="rect">
             <a:avLst/>
@@ -9625,48 +9283,6 @@
         </p:nvSpPr>
         <p:spPr>
           <a:xfrm>
-            <a:off x="5897880" y="310896"/>
-            <a:ext cx="4800600" cy="256032"/>
-          </a:xfrm>
-          <a:prstGeom prst="rect">
-            <a:avLst/>
-          </a:prstGeom>
-          <a:noFill/>
-        </p:spPr>
-        <p:txBody>
-          <a:bodyPr wrap="none" lIns="9144" rIns="9144" tIns="9144" bIns="9144" anchor="t">
-            <a:spAutoFit/>
-          </a:bodyPr>
-          <a:lstStyle/>
-          <a:p>
-            <a:pPr algn="r">
-              <a:spcAft>
-                <a:spcPts val="0"/>
-              </a:spcAft>
-              <a:defRPr sz="680" b="1">
-                <a:solidFill>
-                  <a:srgbClr val="4F6B00"/>
-                </a:solidFill>
-                <a:latin typeface="Inter"/>
-              </a:defRPr>
-            </a:pPr>
-            <a:r>
-              <a:rPr>
-                <a:latin typeface="Inter"/>
-              </a:rPr>
-              <a:t>Illustrative, Gradient Maintained — demo data, not the client's holdings or managers</a:t>
-            </a:r>
-          </a:p>
-        </p:txBody>
-      </p:sp>
-      <p:sp>
-        <p:nvSpPr>
-          <p:cNvPr id="5" name="TextBox 4"/>
-          <p:cNvSpPr txBox="1"/>
-          <p:nvPr/>
-        </p:nvSpPr>
-        <p:spPr>
-          <a:xfrm>
             <a:off x="640080" y="566928"/>
             <a:ext cx="10058400" cy="530352"/>
           </a:xfrm>
@@ -9703,7 +9319,7 @@
       </p:sp>
       <p:sp>
         <p:nvSpPr>
-          <p:cNvPr id="6" name="Rectangle 5"/>
+          <p:cNvPr id="5" name="Rectangle 4"/>
           <p:cNvSpPr/>
           <p:nvPr/>
         </p:nvSpPr>
@@ -9752,7 +9368,7 @@
       </p:sp>
       <p:sp>
         <p:nvSpPr>
-          <p:cNvPr id="7" name="Rectangle 6"/>
+          <p:cNvPr id="6" name="Rectangle 5"/>
           <p:cNvSpPr/>
           <p:nvPr/>
         </p:nvSpPr>
@@ -9801,7 +9417,7 @@
       </p:sp>
       <p:sp>
         <p:nvSpPr>
-          <p:cNvPr id="8" name="TextBox 7"/>
+          <p:cNvPr id="7" name="TextBox 6"/>
           <p:cNvSpPr txBox="1"/>
           <p:nvPr/>
         </p:nvSpPr>
@@ -9843,7 +9459,7 @@
       </p:sp>
       <p:sp>
         <p:nvSpPr>
-          <p:cNvPr id="9" name="TextBox 8"/>
+          <p:cNvPr id="8" name="TextBox 7"/>
           <p:cNvSpPr txBox="1"/>
           <p:nvPr/>
         </p:nvSpPr>
@@ -9885,7 +9501,7 @@
       </p:sp>
       <p:graphicFrame>
         <p:nvGraphicFramePr>
-          <p:cNvPr id="10" name="Table 9"/>
+          <p:cNvPr id="9" name="Table 8"/>
           <p:cNvGraphicFramePr>
             <a:graphicFrameLocks noGrp="1"/>
           </p:cNvGraphicFramePr>
@@ -10135,7 +9751,7 @@
       </p:graphicFrame>
       <p:sp>
         <p:nvSpPr>
-          <p:cNvPr id="11" name="Rectangle 10"/>
+          <p:cNvPr id="10" name="Rectangle 9"/>
           <p:cNvSpPr/>
           <p:nvPr/>
         </p:nvSpPr>
@@ -10184,7 +9800,7 @@
       </p:sp>
       <p:sp>
         <p:nvSpPr>
-          <p:cNvPr id="12" name="TextBox 11"/>
+          <p:cNvPr id="11" name="TextBox 10"/>
           <p:cNvSpPr txBox="1"/>
           <p:nvPr/>
         </p:nvSpPr>
@@ -10226,7 +9842,7 @@
       </p:sp>
       <p:sp>
         <p:nvSpPr>
-          <p:cNvPr id="13" name="TextBox 12"/>
+          <p:cNvPr id="12" name="TextBox 11"/>
           <p:cNvSpPr txBox="1"/>
           <p:nvPr/>
         </p:nvSpPr>
@@ -10268,7 +9884,7 @@
       </p:sp>
       <p:sp>
         <p:nvSpPr>
-          <p:cNvPr id="14" name="TextBox 13"/>
+          <p:cNvPr id="13" name="TextBox 12"/>
           <p:cNvSpPr txBox="1"/>
           <p:nvPr/>
         </p:nvSpPr>
@@ -10384,7 +10000,7 @@
         <p:spPr>
           <a:xfrm>
             <a:off x="640080" y="329184"/>
-            <a:ext cx="5303520" cy="182880"/>
+            <a:ext cx="9875520" cy="182880"/>
           </a:xfrm>
           <a:prstGeom prst="rect">
             <a:avLst/>
@@ -10425,48 +10041,6 @@
         </p:nvSpPr>
         <p:spPr>
           <a:xfrm>
-            <a:off x="5897880" y="310896"/>
-            <a:ext cx="4800600" cy="256032"/>
-          </a:xfrm>
-          <a:prstGeom prst="rect">
-            <a:avLst/>
-          </a:prstGeom>
-          <a:noFill/>
-        </p:spPr>
-        <p:txBody>
-          <a:bodyPr wrap="none" lIns="9144" rIns="9144" tIns="9144" bIns="9144" anchor="t">
-            <a:spAutoFit/>
-          </a:bodyPr>
-          <a:lstStyle/>
-          <a:p>
-            <a:pPr algn="r">
-              <a:spcAft>
-                <a:spcPts val="0"/>
-              </a:spcAft>
-              <a:defRPr sz="680" b="1">
-                <a:solidFill>
-                  <a:srgbClr val="4F6B00"/>
-                </a:solidFill>
-                <a:latin typeface="Inter"/>
-              </a:defRPr>
-            </a:pPr>
-            <a:r>
-              <a:rPr>
-                <a:latin typeface="Inter"/>
-              </a:rPr>
-              <a:t>Illustrative, Gradient Maintained — demo data, not the client's holdings or managers</a:t>
-            </a:r>
-          </a:p>
-        </p:txBody>
-      </p:sp>
-      <p:sp>
-        <p:nvSpPr>
-          <p:cNvPr id="5" name="TextBox 4"/>
-          <p:cNvSpPr txBox="1"/>
-          <p:nvPr/>
-        </p:nvSpPr>
-        <p:spPr>
-          <a:xfrm>
             <a:off x="640080" y="566928"/>
             <a:ext cx="10058400" cy="530352"/>
           </a:xfrm>
@@ -10503,7 +10077,7 @@
       </p:sp>
       <p:sp>
         <p:nvSpPr>
-          <p:cNvPr id="6" name="Rectangle 5"/>
+          <p:cNvPr id="5" name="Rectangle 4"/>
           <p:cNvSpPr/>
           <p:nvPr/>
         </p:nvSpPr>
@@ -10552,7 +10126,7 @@
       </p:sp>
       <p:sp>
         <p:nvSpPr>
-          <p:cNvPr id="7" name="Rectangle 6"/>
+          <p:cNvPr id="6" name="Rectangle 5"/>
           <p:cNvSpPr/>
           <p:nvPr/>
         </p:nvSpPr>
@@ -10601,7 +10175,7 @@
       </p:sp>
       <p:sp>
         <p:nvSpPr>
-          <p:cNvPr id="8" name="TextBox 7"/>
+          <p:cNvPr id="7" name="TextBox 6"/>
           <p:cNvSpPr txBox="1"/>
           <p:nvPr/>
         </p:nvSpPr>
@@ -10643,7 +10217,7 @@
       </p:sp>
       <p:sp>
         <p:nvSpPr>
-          <p:cNvPr id="9" name="TextBox 8"/>
+          <p:cNvPr id="8" name="TextBox 7"/>
           <p:cNvSpPr txBox="1"/>
           <p:nvPr/>
         </p:nvSpPr>
@@ -10685,7 +10259,7 @@
       </p:sp>
       <p:graphicFrame>
         <p:nvGraphicFramePr>
-          <p:cNvPr id="10" name="Chart 9"/>
+          <p:cNvPr id="9" name="Chart 8"/>
           <p:cNvGraphicFramePr>
             <a:graphicFrameLocks noGrp="1"/>
           </p:cNvGraphicFramePr>
@@ -10703,7 +10277,7 @@
       </p:graphicFrame>
       <p:sp>
         <p:nvSpPr>
-          <p:cNvPr id="11" name="Rectangle 10"/>
+          <p:cNvPr id="10" name="Rectangle 9"/>
           <p:cNvSpPr/>
           <p:nvPr/>
         </p:nvSpPr>
@@ -10752,7 +10326,7 @@
       </p:sp>
       <p:sp>
         <p:nvSpPr>
-          <p:cNvPr id="12" name="TextBox 11"/>
+          <p:cNvPr id="11" name="TextBox 10"/>
           <p:cNvSpPr txBox="1"/>
           <p:nvPr/>
         </p:nvSpPr>
@@ -10794,7 +10368,7 @@
       </p:sp>
       <p:sp>
         <p:nvSpPr>
-          <p:cNvPr id="13" name="TextBox 12"/>
+          <p:cNvPr id="12" name="TextBox 11"/>
           <p:cNvSpPr txBox="1"/>
           <p:nvPr/>
         </p:nvSpPr>
@@ -10836,7 +10410,7 @@
       </p:sp>
       <p:sp>
         <p:nvSpPr>
-          <p:cNvPr id="14" name="TextBox 13"/>
+          <p:cNvPr id="13" name="TextBox 12"/>
           <p:cNvSpPr txBox="1"/>
           <p:nvPr/>
         </p:nvSpPr>
@@ -10952,7 +10526,7 @@
         <p:spPr>
           <a:xfrm>
             <a:off x="640080" y="329184"/>
-            <a:ext cx="5303520" cy="182880"/>
+            <a:ext cx="9875520" cy="182880"/>
           </a:xfrm>
           <a:prstGeom prst="rect">
             <a:avLst/>
@@ -10993,48 +10567,6 @@
         </p:nvSpPr>
         <p:spPr>
           <a:xfrm>
-            <a:off x="5897880" y="310896"/>
-            <a:ext cx="4800600" cy="256032"/>
-          </a:xfrm>
-          <a:prstGeom prst="rect">
-            <a:avLst/>
-          </a:prstGeom>
-          <a:noFill/>
-        </p:spPr>
-        <p:txBody>
-          <a:bodyPr wrap="none" lIns="9144" rIns="9144" tIns="9144" bIns="9144" anchor="t">
-            <a:spAutoFit/>
-          </a:bodyPr>
-          <a:lstStyle/>
-          <a:p>
-            <a:pPr algn="r">
-              <a:spcAft>
-                <a:spcPts val="0"/>
-              </a:spcAft>
-              <a:defRPr sz="680" b="1">
-                <a:solidFill>
-                  <a:srgbClr val="4F6B00"/>
-                </a:solidFill>
-                <a:latin typeface="Inter"/>
-              </a:defRPr>
-            </a:pPr>
-            <a:r>
-              <a:rPr>
-                <a:latin typeface="Inter"/>
-              </a:rPr>
-              <a:t>Illustrative, Gradient Maintained — demo data, not the client's holdings or managers</a:t>
-            </a:r>
-          </a:p>
-        </p:txBody>
-      </p:sp>
-      <p:sp>
-        <p:nvSpPr>
-          <p:cNvPr id="5" name="TextBox 4"/>
-          <p:cNvSpPr txBox="1"/>
-          <p:nvPr/>
-        </p:nvSpPr>
-        <p:spPr>
-          <a:xfrm>
             <a:off x="640080" y="566928"/>
             <a:ext cx="10058400" cy="530352"/>
           </a:xfrm>
@@ -11071,7 +10603,7 @@
       </p:sp>
       <p:sp>
         <p:nvSpPr>
-          <p:cNvPr id="6" name="Rectangle 5"/>
+          <p:cNvPr id="5" name="Rectangle 4"/>
           <p:cNvSpPr/>
           <p:nvPr/>
         </p:nvSpPr>
@@ -11120,7 +10652,7 @@
       </p:sp>
       <p:sp>
         <p:nvSpPr>
-          <p:cNvPr id="7" name="Rectangle 6"/>
+          <p:cNvPr id="6" name="Rectangle 5"/>
           <p:cNvSpPr/>
           <p:nvPr/>
         </p:nvSpPr>
@@ -11169,7 +10701,7 @@
       </p:sp>
       <p:sp>
         <p:nvSpPr>
-          <p:cNvPr id="8" name="TextBox 7"/>
+          <p:cNvPr id="7" name="TextBox 6"/>
           <p:cNvSpPr txBox="1"/>
           <p:nvPr/>
         </p:nvSpPr>
@@ -11211,7 +10743,7 @@
       </p:sp>
       <p:graphicFrame>
         <p:nvGraphicFramePr>
-          <p:cNvPr id="9" name="Table 8"/>
+          <p:cNvPr id="8" name="Table 7"/>
           <p:cNvGraphicFramePr>
             <a:graphicFrameLocks noGrp="1"/>
           </p:cNvGraphicFramePr>
@@ -11517,7 +11049,7 @@
       </p:graphicFrame>
       <p:sp>
         <p:nvSpPr>
-          <p:cNvPr id="10" name="Rectangle 9"/>
+          <p:cNvPr id="9" name="Rectangle 8"/>
           <p:cNvSpPr/>
           <p:nvPr/>
         </p:nvSpPr>
@@ -11566,7 +11098,7 @@
       </p:sp>
       <p:sp>
         <p:nvSpPr>
-          <p:cNvPr id="11" name="TextBox 10"/>
+          <p:cNvPr id="10" name="TextBox 9"/>
           <p:cNvSpPr txBox="1"/>
           <p:nvPr/>
         </p:nvSpPr>
@@ -11608,7 +11140,7 @@
       </p:sp>
       <p:sp>
         <p:nvSpPr>
-          <p:cNvPr id="12" name="TextBox 11"/>
+          <p:cNvPr id="11" name="TextBox 10"/>
           <p:cNvSpPr txBox="1"/>
           <p:nvPr/>
         </p:nvSpPr>
@@ -11650,7 +11182,7 @@
       </p:sp>
       <p:sp>
         <p:nvSpPr>
-          <p:cNvPr id="13" name="TextBox 12"/>
+          <p:cNvPr id="12" name="TextBox 11"/>
           <p:cNvSpPr txBox="1"/>
           <p:nvPr/>
         </p:nvSpPr>
@@ -11766,7 +11298,7 @@
         <p:spPr>
           <a:xfrm>
             <a:off x="640080" y="329184"/>
-            <a:ext cx="5303520" cy="182880"/>
+            <a:ext cx="9875520" cy="182880"/>
           </a:xfrm>
           <a:prstGeom prst="rect">
             <a:avLst/>
@@ -11807,48 +11339,6 @@
         </p:nvSpPr>
         <p:spPr>
           <a:xfrm>
-            <a:off x="5897880" y="310896"/>
-            <a:ext cx="4800600" cy="256032"/>
-          </a:xfrm>
-          <a:prstGeom prst="rect">
-            <a:avLst/>
-          </a:prstGeom>
-          <a:noFill/>
-        </p:spPr>
-        <p:txBody>
-          <a:bodyPr wrap="none" lIns="9144" rIns="9144" tIns="9144" bIns="9144" anchor="t">
-            <a:spAutoFit/>
-          </a:bodyPr>
-          <a:lstStyle/>
-          <a:p>
-            <a:pPr algn="r">
-              <a:spcAft>
-                <a:spcPts val="0"/>
-              </a:spcAft>
-              <a:defRPr sz="680" b="1">
-                <a:solidFill>
-                  <a:srgbClr val="4F6B00"/>
-                </a:solidFill>
-                <a:latin typeface="Inter"/>
-              </a:defRPr>
-            </a:pPr>
-            <a:r>
-              <a:rPr>
-                <a:latin typeface="Inter"/>
-              </a:rPr>
-              <a:t>Illustrative, Gradient Maintained — demo data, not the client's holdings or managers</a:t>
-            </a:r>
-          </a:p>
-        </p:txBody>
-      </p:sp>
-      <p:sp>
-        <p:nvSpPr>
-          <p:cNvPr id="5" name="TextBox 4"/>
-          <p:cNvSpPr txBox="1"/>
-          <p:nvPr/>
-        </p:nvSpPr>
-        <p:spPr>
-          <a:xfrm>
             <a:off x="640080" y="566928"/>
             <a:ext cx="10058400" cy="530352"/>
           </a:xfrm>
@@ -11885,7 +11375,7 @@
       </p:sp>
       <p:sp>
         <p:nvSpPr>
-          <p:cNvPr id="6" name="Rectangle 5"/>
+          <p:cNvPr id="5" name="Rectangle 4"/>
           <p:cNvSpPr/>
           <p:nvPr/>
         </p:nvSpPr>
@@ -11934,7 +11424,7 @@
       </p:sp>
       <p:sp>
         <p:nvSpPr>
-          <p:cNvPr id="7" name="Rectangle 6"/>
+          <p:cNvPr id="6" name="Rectangle 5"/>
           <p:cNvSpPr/>
           <p:nvPr/>
         </p:nvSpPr>
@@ -11983,7 +11473,7 @@
       </p:sp>
       <p:sp>
         <p:nvSpPr>
-          <p:cNvPr id="8" name="TextBox 7"/>
+          <p:cNvPr id="7" name="TextBox 6"/>
           <p:cNvSpPr txBox="1"/>
           <p:nvPr/>
         </p:nvSpPr>
@@ -12025,7 +11515,7 @@
       </p:sp>
       <p:sp>
         <p:nvSpPr>
-          <p:cNvPr id="9" name="TextBox 8"/>
+          <p:cNvPr id="8" name="TextBox 7"/>
           <p:cNvSpPr txBox="1"/>
           <p:nvPr/>
         </p:nvSpPr>
@@ -12067,7 +11557,7 @@
       </p:sp>
       <p:graphicFrame>
         <p:nvGraphicFramePr>
-          <p:cNvPr id="10" name="Table 9"/>
+          <p:cNvPr id="9" name="Table 8"/>
           <p:cNvGraphicFramePr>
             <a:graphicFrameLocks noGrp="1"/>
           </p:cNvGraphicFramePr>
@@ -12426,7 +11916,7 @@
       </p:graphicFrame>
       <p:sp>
         <p:nvSpPr>
-          <p:cNvPr id="11" name="Rectangle 10"/>
+          <p:cNvPr id="10" name="Rectangle 9"/>
           <p:cNvSpPr/>
           <p:nvPr/>
         </p:nvSpPr>
@@ -12475,7 +11965,7 @@
       </p:sp>
       <p:sp>
         <p:nvSpPr>
-          <p:cNvPr id="12" name="Rectangle 11"/>
+          <p:cNvPr id="11" name="Rectangle 10"/>
           <p:cNvSpPr/>
           <p:nvPr/>
         </p:nvSpPr>
@@ -12524,7 +12014,7 @@
       </p:sp>
       <p:sp>
         <p:nvSpPr>
-          <p:cNvPr id="13" name="TextBox 12"/>
+          <p:cNvPr id="12" name="TextBox 11"/>
           <p:cNvSpPr txBox="1"/>
           <p:nvPr/>
         </p:nvSpPr>
@@ -12566,7 +12056,7 @@
       </p:sp>
       <p:sp>
         <p:nvSpPr>
-          <p:cNvPr id="14" name="TextBox 13"/>
+          <p:cNvPr id="13" name="TextBox 12"/>
           <p:cNvSpPr txBox="1"/>
           <p:nvPr/>
         </p:nvSpPr>
@@ -12608,7 +12098,7 @@
       </p:sp>
       <p:sp>
         <p:nvSpPr>
-          <p:cNvPr id="15" name="TextBox 14"/>
+          <p:cNvPr id="14" name="TextBox 13"/>
           <p:cNvSpPr txBox="1"/>
           <p:nvPr/>
         </p:nvSpPr>
@@ -12650,7 +12140,7 @@
       </p:sp>
       <p:sp>
         <p:nvSpPr>
-          <p:cNvPr id="16" name="Rectangle 15"/>
+          <p:cNvPr id="15" name="Rectangle 14"/>
           <p:cNvSpPr/>
           <p:nvPr/>
         </p:nvSpPr>
@@ -12699,7 +12189,7 @@
       </p:sp>
       <p:sp>
         <p:nvSpPr>
-          <p:cNvPr id="17" name="TextBox 16"/>
+          <p:cNvPr id="16" name="TextBox 15"/>
           <p:cNvSpPr txBox="1"/>
           <p:nvPr/>
         </p:nvSpPr>
@@ -12741,7 +12231,7 @@
       </p:sp>
       <p:sp>
         <p:nvSpPr>
-          <p:cNvPr id="18" name="TextBox 17"/>
+          <p:cNvPr id="17" name="TextBox 16"/>
           <p:cNvSpPr txBox="1"/>
           <p:nvPr/>
         </p:nvSpPr>
@@ -12783,7 +12273,7 @@
       </p:sp>
       <p:sp>
         <p:nvSpPr>
-          <p:cNvPr id="19" name="TextBox 18"/>
+          <p:cNvPr id="18" name="TextBox 17"/>
           <p:cNvSpPr txBox="1"/>
           <p:nvPr/>
         </p:nvSpPr>
@@ -12899,7 +12389,7 @@
         <p:spPr>
           <a:xfrm>
             <a:off x="640080" y="329184"/>
-            <a:ext cx="5303520" cy="182880"/>
+            <a:ext cx="9875520" cy="182880"/>
           </a:xfrm>
           <a:prstGeom prst="rect">
             <a:avLst/>
@@ -12940,48 +12430,6 @@
         </p:nvSpPr>
         <p:spPr>
           <a:xfrm>
-            <a:off x="5897880" y="310896"/>
-            <a:ext cx="4800600" cy="256032"/>
-          </a:xfrm>
-          <a:prstGeom prst="rect">
-            <a:avLst/>
-          </a:prstGeom>
-          <a:noFill/>
-        </p:spPr>
-        <p:txBody>
-          <a:bodyPr wrap="none" lIns="9144" rIns="9144" tIns="9144" bIns="9144" anchor="t">
-            <a:spAutoFit/>
-          </a:bodyPr>
-          <a:lstStyle/>
-          <a:p>
-            <a:pPr algn="r">
-              <a:spcAft>
-                <a:spcPts val="0"/>
-              </a:spcAft>
-              <a:defRPr sz="680" b="1">
-                <a:solidFill>
-                  <a:srgbClr val="4F6B00"/>
-                </a:solidFill>
-                <a:latin typeface="Inter"/>
-              </a:defRPr>
-            </a:pPr>
-            <a:r>
-              <a:rPr>
-                <a:latin typeface="Inter"/>
-              </a:rPr>
-              <a:t>Illustrative, Gradient Maintained — demo data, not the client's holdings or managers</a:t>
-            </a:r>
-          </a:p>
-        </p:txBody>
-      </p:sp>
-      <p:sp>
-        <p:nvSpPr>
-          <p:cNvPr id="5" name="TextBox 4"/>
-          <p:cNvSpPr txBox="1"/>
-          <p:nvPr/>
-        </p:nvSpPr>
-        <p:spPr>
-          <a:xfrm>
             <a:off x="640080" y="566928"/>
             <a:ext cx="10058400" cy="530352"/>
           </a:xfrm>
@@ -13018,7 +12466,7 @@
       </p:sp>
       <p:sp>
         <p:nvSpPr>
-          <p:cNvPr id="6" name="Rectangle 5"/>
+          <p:cNvPr id="5" name="Rectangle 4"/>
           <p:cNvSpPr/>
           <p:nvPr/>
         </p:nvSpPr>
@@ -13067,7 +12515,7 @@
       </p:sp>
       <p:sp>
         <p:nvSpPr>
-          <p:cNvPr id="7" name="Rectangle 6"/>
+          <p:cNvPr id="6" name="Rectangle 5"/>
           <p:cNvSpPr/>
           <p:nvPr/>
         </p:nvSpPr>
@@ -13116,7 +12564,7 @@
       </p:sp>
       <p:sp>
         <p:nvSpPr>
-          <p:cNvPr id="8" name="TextBox 7"/>
+          <p:cNvPr id="7" name="TextBox 6"/>
           <p:cNvSpPr txBox="1"/>
           <p:nvPr/>
         </p:nvSpPr>
@@ -13158,7 +12606,7 @@
       </p:sp>
       <p:sp>
         <p:nvSpPr>
-          <p:cNvPr id="9" name="TextBox 8"/>
+          <p:cNvPr id="8" name="TextBox 7"/>
           <p:cNvSpPr txBox="1"/>
           <p:nvPr/>
         </p:nvSpPr>
@@ -13200,7 +12648,7 @@
       </p:sp>
       <p:graphicFrame>
         <p:nvGraphicFramePr>
-          <p:cNvPr id="10" name="Chart 9"/>
+          <p:cNvPr id="9" name="Chart 8"/>
           <p:cNvGraphicFramePr>
             <a:graphicFrameLocks noGrp="1"/>
           </p:cNvGraphicFramePr>
@@ -13218,7 +12666,7 @@
       </p:graphicFrame>
       <p:sp>
         <p:nvSpPr>
-          <p:cNvPr id="11" name="Rectangle 10"/>
+          <p:cNvPr id="10" name="Rectangle 9"/>
           <p:cNvSpPr/>
           <p:nvPr/>
         </p:nvSpPr>
@@ -13267,7 +12715,7 @@
       </p:sp>
       <p:sp>
         <p:nvSpPr>
-          <p:cNvPr id="12" name="TextBox 11"/>
+          <p:cNvPr id="11" name="TextBox 10"/>
           <p:cNvSpPr txBox="1"/>
           <p:nvPr/>
         </p:nvSpPr>
@@ -13309,7 +12757,7 @@
       </p:sp>
       <p:sp>
         <p:nvSpPr>
-          <p:cNvPr id="13" name="TextBox 12"/>
+          <p:cNvPr id="12" name="TextBox 11"/>
           <p:cNvSpPr txBox="1"/>
           <p:nvPr/>
         </p:nvSpPr>
@@ -13351,7 +12799,7 @@
       </p:sp>
       <p:sp>
         <p:nvSpPr>
-          <p:cNvPr id="14" name="TextBox 13"/>
+          <p:cNvPr id="13" name="TextBox 12"/>
           <p:cNvSpPr txBox="1"/>
           <p:nvPr/>
         </p:nvSpPr>
@@ -13467,7 +12915,7 @@
         <p:spPr>
           <a:xfrm>
             <a:off x="640080" y="329184"/>
-            <a:ext cx="5303520" cy="182880"/>
+            <a:ext cx="9875520" cy="182880"/>
           </a:xfrm>
           <a:prstGeom prst="rect">
             <a:avLst/>
@@ -13508,48 +12956,6 @@
         </p:nvSpPr>
         <p:spPr>
           <a:xfrm>
-            <a:off x="5897880" y="310896"/>
-            <a:ext cx="4800600" cy="256032"/>
-          </a:xfrm>
-          <a:prstGeom prst="rect">
-            <a:avLst/>
-          </a:prstGeom>
-          <a:noFill/>
-        </p:spPr>
-        <p:txBody>
-          <a:bodyPr wrap="none" lIns="9144" rIns="9144" tIns="9144" bIns="9144" anchor="t">
-            <a:spAutoFit/>
-          </a:bodyPr>
-          <a:lstStyle/>
-          <a:p>
-            <a:pPr algn="r">
-              <a:spcAft>
-                <a:spcPts val="0"/>
-              </a:spcAft>
-              <a:defRPr sz="680" b="1">
-                <a:solidFill>
-                  <a:srgbClr val="4F6B00"/>
-                </a:solidFill>
-                <a:latin typeface="Inter"/>
-              </a:defRPr>
-            </a:pPr>
-            <a:r>
-              <a:rPr>
-                <a:latin typeface="Inter"/>
-              </a:rPr>
-              <a:t>Illustrative, Gradient Maintained — demo data, not the client's holdings or managers</a:t>
-            </a:r>
-          </a:p>
-        </p:txBody>
-      </p:sp>
-      <p:sp>
-        <p:nvSpPr>
-          <p:cNvPr id="5" name="TextBox 4"/>
-          <p:cNvSpPr txBox="1"/>
-          <p:nvPr/>
-        </p:nvSpPr>
-        <p:spPr>
-          <a:xfrm>
             <a:off x="640080" y="566928"/>
             <a:ext cx="10058400" cy="530352"/>
           </a:xfrm>
@@ -13586,7 +12992,7 @@
       </p:sp>
       <p:sp>
         <p:nvSpPr>
-          <p:cNvPr id="6" name="Rectangle 5"/>
+          <p:cNvPr id="5" name="Rectangle 4"/>
           <p:cNvSpPr/>
           <p:nvPr/>
         </p:nvSpPr>
@@ -13635,7 +13041,7 @@
       </p:sp>
       <p:sp>
         <p:nvSpPr>
-          <p:cNvPr id="7" name="Rectangle 6"/>
+          <p:cNvPr id="6" name="Rectangle 5"/>
           <p:cNvSpPr/>
           <p:nvPr/>
         </p:nvSpPr>
@@ -13684,7 +13090,7 @@
       </p:sp>
       <p:sp>
         <p:nvSpPr>
-          <p:cNvPr id="8" name="TextBox 7"/>
+          <p:cNvPr id="7" name="TextBox 6"/>
           <p:cNvSpPr txBox="1"/>
           <p:nvPr/>
         </p:nvSpPr>
@@ -13726,7 +13132,7 @@
       </p:sp>
       <p:sp>
         <p:nvSpPr>
-          <p:cNvPr id="9" name="TextBox 8"/>
+          <p:cNvPr id="8" name="TextBox 7"/>
           <p:cNvSpPr txBox="1"/>
           <p:nvPr/>
         </p:nvSpPr>
@@ -13768,7 +13174,7 @@
       </p:sp>
       <p:graphicFrame>
         <p:nvGraphicFramePr>
-          <p:cNvPr id="10" name="Table 9"/>
+          <p:cNvPr id="9" name="Table 8"/>
           <p:cNvGraphicFramePr>
             <a:graphicFrameLocks noGrp="1"/>
           </p:cNvGraphicFramePr>
@@ -14210,7 +13616,7 @@
       </p:graphicFrame>
       <p:sp>
         <p:nvSpPr>
-          <p:cNvPr id="11" name="Rectangle 10"/>
+          <p:cNvPr id="10" name="Rectangle 9"/>
           <p:cNvSpPr/>
           <p:nvPr/>
         </p:nvSpPr>
@@ -14259,7 +13665,7 @@
       </p:sp>
       <p:sp>
         <p:nvSpPr>
-          <p:cNvPr id="12" name="TextBox 11"/>
+          <p:cNvPr id="11" name="TextBox 10"/>
           <p:cNvSpPr txBox="1"/>
           <p:nvPr/>
         </p:nvSpPr>
@@ -14301,7 +13707,7 @@
       </p:sp>
       <p:sp>
         <p:nvSpPr>
-          <p:cNvPr id="13" name="TextBox 12"/>
+          <p:cNvPr id="12" name="TextBox 11"/>
           <p:cNvSpPr txBox="1"/>
           <p:nvPr/>
         </p:nvSpPr>
@@ -14343,7 +13749,7 @@
       </p:sp>
       <p:sp>
         <p:nvSpPr>
-          <p:cNvPr id="14" name="TextBox 13"/>
+          <p:cNvPr id="13" name="TextBox 12"/>
           <p:cNvSpPr txBox="1"/>
           <p:nvPr/>
         </p:nvSpPr>
@@ -14459,7 +13865,7 @@
         <p:spPr>
           <a:xfrm>
             <a:off x="640080" y="329184"/>
-            <a:ext cx="5303520" cy="182880"/>
+            <a:ext cx="9875520" cy="182880"/>
           </a:xfrm>
           <a:prstGeom prst="rect">
             <a:avLst/>
@@ -14500,48 +13906,6 @@
         </p:nvSpPr>
         <p:spPr>
           <a:xfrm>
-            <a:off x="5897880" y="310896"/>
-            <a:ext cx="4800600" cy="256032"/>
-          </a:xfrm>
-          <a:prstGeom prst="rect">
-            <a:avLst/>
-          </a:prstGeom>
-          <a:noFill/>
-        </p:spPr>
-        <p:txBody>
-          <a:bodyPr wrap="none" lIns="9144" rIns="9144" tIns="9144" bIns="9144" anchor="t">
-            <a:spAutoFit/>
-          </a:bodyPr>
-          <a:lstStyle/>
-          <a:p>
-            <a:pPr algn="r">
-              <a:spcAft>
-                <a:spcPts val="0"/>
-              </a:spcAft>
-              <a:defRPr sz="680" b="1">
-                <a:solidFill>
-                  <a:srgbClr val="4F6B00"/>
-                </a:solidFill>
-                <a:latin typeface="Inter"/>
-              </a:defRPr>
-            </a:pPr>
-            <a:r>
-              <a:rPr>
-                <a:latin typeface="Inter"/>
-              </a:rPr>
-              <a:t>Illustrative, Gradient Maintained — demo data, not the client's holdings or managers</a:t>
-            </a:r>
-          </a:p>
-        </p:txBody>
-      </p:sp>
-      <p:sp>
-        <p:nvSpPr>
-          <p:cNvPr id="5" name="TextBox 4"/>
-          <p:cNvSpPr txBox="1"/>
-          <p:nvPr/>
-        </p:nvSpPr>
-        <p:spPr>
-          <a:xfrm>
             <a:off x="640080" y="566928"/>
             <a:ext cx="10058400" cy="530352"/>
           </a:xfrm>
@@ -14578,7 +13942,7 @@
       </p:sp>
       <p:sp>
         <p:nvSpPr>
-          <p:cNvPr id="6" name="Rectangle 5"/>
+          <p:cNvPr id="5" name="Rectangle 4"/>
           <p:cNvSpPr/>
           <p:nvPr/>
         </p:nvSpPr>
@@ -14627,7 +13991,7 @@
       </p:sp>
       <p:sp>
         <p:nvSpPr>
-          <p:cNvPr id="7" name="Rectangle 6"/>
+          <p:cNvPr id="6" name="Rectangle 5"/>
           <p:cNvSpPr/>
           <p:nvPr/>
         </p:nvSpPr>
@@ -14676,7 +14040,7 @@
       </p:sp>
       <p:sp>
         <p:nvSpPr>
-          <p:cNvPr id="8" name="TextBox 7"/>
+          <p:cNvPr id="7" name="TextBox 6"/>
           <p:cNvSpPr txBox="1"/>
           <p:nvPr/>
         </p:nvSpPr>
@@ -14718,7 +14082,7 @@
       </p:sp>
       <p:sp>
         <p:nvSpPr>
-          <p:cNvPr id="9" name="TextBox 8"/>
+          <p:cNvPr id="8" name="TextBox 7"/>
           <p:cNvSpPr txBox="1"/>
           <p:nvPr/>
         </p:nvSpPr>
@@ -14760,7 +14124,7 @@
       </p:sp>
       <p:graphicFrame>
         <p:nvGraphicFramePr>
-          <p:cNvPr id="10" name="Table 9"/>
+          <p:cNvPr id="9" name="Table 8"/>
           <p:cNvGraphicFramePr>
             <a:graphicFrameLocks noGrp="1"/>
           </p:cNvGraphicFramePr>
@@ -15446,7 +14810,7 @@
       </p:graphicFrame>
       <p:sp>
         <p:nvSpPr>
-          <p:cNvPr id="11" name="Rectangle 10"/>
+          <p:cNvPr id="10" name="Rectangle 9"/>
           <p:cNvSpPr/>
           <p:nvPr/>
         </p:nvSpPr>
@@ -15495,7 +14859,7 @@
       </p:sp>
       <p:sp>
         <p:nvSpPr>
-          <p:cNvPr id="12" name="TextBox 11"/>
+          <p:cNvPr id="11" name="TextBox 10"/>
           <p:cNvSpPr txBox="1"/>
           <p:nvPr/>
         </p:nvSpPr>
@@ -15537,7 +14901,7 @@
       </p:sp>
       <p:sp>
         <p:nvSpPr>
-          <p:cNvPr id="13" name="TextBox 12"/>
+          <p:cNvPr id="12" name="TextBox 11"/>
           <p:cNvSpPr txBox="1"/>
           <p:nvPr/>
         </p:nvSpPr>
@@ -15579,7 +14943,7 @@
       </p:sp>
       <p:sp>
         <p:nvSpPr>
-          <p:cNvPr id="14" name="TextBox 13"/>
+          <p:cNvPr id="13" name="TextBox 12"/>
           <p:cNvSpPr txBox="1"/>
           <p:nvPr/>
         </p:nvSpPr>
@@ -15695,7 +15059,7 @@
         <p:spPr>
           <a:xfrm>
             <a:off x="640080" y="329184"/>
-            <a:ext cx="5303520" cy="182880"/>
+            <a:ext cx="9875520" cy="182880"/>
           </a:xfrm>
           <a:prstGeom prst="rect">
             <a:avLst/>
@@ -15736,48 +15100,6 @@
         </p:nvSpPr>
         <p:spPr>
           <a:xfrm>
-            <a:off x="5897880" y="310896"/>
-            <a:ext cx="4800600" cy="256032"/>
-          </a:xfrm>
-          <a:prstGeom prst="rect">
-            <a:avLst/>
-          </a:prstGeom>
-          <a:noFill/>
-        </p:spPr>
-        <p:txBody>
-          <a:bodyPr wrap="none" lIns="9144" rIns="9144" tIns="9144" bIns="9144" anchor="t">
-            <a:spAutoFit/>
-          </a:bodyPr>
-          <a:lstStyle/>
-          <a:p>
-            <a:pPr algn="r">
-              <a:spcAft>
-                <a:spcPts val="0"/>
-              </a:spcAft>
-              <a:defRPr sz="680" b="1">
-                <a:solidFill>
-                  <a:srgbClr val="4F6B00"/>
-                </a:solidFill>
-                <a:latin typeface="Inter"/>
-              </a:defRPr>
-            </a:pPr>
-            <a:r>
-              <a:rPr>
-                <a:latin typeface="Inter"/>
-              </a:rPr>
-              <a:t>Illustrative, Gradient Maintained — demo data, not the client's holdings or managers</a:t>
-            </a:r>
-          </a:p>
-        </p:txBody>
-      </p:sp>
-      <p:sp>
-        <p:nvSpPr>
-          <p:cNvPr id="5" name="TextBox 4"/>
-          <p:cNvSpPr txBox="1"/>
-          <p:nvPr/>
-        </p:nvSpPr>
-        <p:spPr>
-          <a:xfrm>
             <a:off x="640080" y="566928"/>
             <a:ext cx="10058400" cy="530352"/>
           </a:xfrm>
@@ -15814,7 +15136,7 @@
       </p:sp>
       <p:sp>
         <p:nvSpPr>
-          <p:cNvPr id="6" name="Rectangle 5"/>
+          <p:cNvPr id="5" name="Rectangle 4"/>
           <p:cNvSpPr/>
           <p:nvPr/>
         </p:nvSpPr>
@@ -15863,7 +15185,7 @@
       </p:sp>
       <p:sp>
         <p:nvSpPr>
-          <p:cNvPr id="7" name="Rectangle 6"/>
+          <p:cNvPr id="6" name="Rectangle 5"/>
           <p:cNvSpPr/>
           <p:nvPr/>
         </p:nvSpPr>
@@ -15912,7 +15234,7 @@
       </p:sp>
       <p:sp>
         <p:nvSpPr>
-          <p:cNvPr id="8" name="TextBox 7"/>
+          <p:cNvPr id="7" name="TextBox 6"/>
           <p:cNvSpPr txBox="1"/>
           <p:nvPr/>
         </p:nvSpPr>
@@ -15954,14 +15276,105 @@
       </p:sp>
       <p:sp>
         <p:nvSpPr>
-          <p:cNvPr id="9" name="Rectangle 8"/>
+          <p:cNvPr id="8" name="Rectangle 7"/>
           <p:cNvSpPr/>
           <p:nvPr/>
         </p:nvSpPr>
         <p:spPr>
           <a:xfrm>
-            <a:off x="640080" y="1325880"/>
-            <a:ext cx="10908792" cy="2263980"/>
+            <a:off x="640080" y="1399032"/>
+            <a:ext cx="73152" cy="1031503"/>
+          </a:xfrm>
+          <a:prstGeom prst="rect">
+            <a:avLst/>
+          </a:prstGeom>
+          <a:solidFill>
+            <a:srgbClr val="F2A93B"/>
+          </a:solidFill>
+          <a:ln>
+            <a:solidFill>
+              <a:srgbClr val="F2A93B"/>
+            </a:solidFill>
+          </a:ln>
+        </p:spPr>
+        <p:style>
+          <a:lnRef idx="1">
+            <a:schemeClr val="accent1"/>
+          </a:lnRef>
+          <a:fillRef idx="3">
+            <a:schemeClr val="accent1"/>
+          </a:fillRef>
+          <a:effectRef idx="2">
+            <a:schemeClr val="accent1"/>
+          </a:effectRef>
+          <a:fontRef idx="minor">
+            <a:schemeClr val="lt1"/>
+          </a:fontRef>
+        </p:style>
+        <p:txBody>
+          <a:bodyPr rtlCol="0" anchor="ctr"/>
+          <a:lstStyle/>
+          <a:p>
+            <a:pPr algn="ctr">
+              <a:defRPr>
+                <a:latin typeface="Inter"/>
+              </a:defRPr>
+            </a:pPr>
+          </a:p>
+        </p:txBody>
+      </p:sp>
+      <p:sp>
+        <p:nvSpPr>
+          <p:cNvPr id="9" name="TextBox 8"/>
+          <p:cNvSpPr txBox="1"/>
+          <p:nvPr/>
+        </p:nvSpPr>
+        <p:spPr>
+          <a:xfrm>
+            <a:off x="896112" y="1371600"/>
+            <a:ext cx="10588752" cy="683128"/>
+          </a:xfrm>
+          <a:prstGeom prst="rect">
+            <a:avLst/>
+          </a:prstGeom>
+          <a:noFill/>
+        </p:spPr>
+        <p:txBody>
+          <a:bodyPr wrap="none" lIns="9144" rIns="9144" tIns="9144" bIns="9144" anchor="t">
+            <a:spAutoFit/>
+          </a:bodyPr>
+          <a:lstStyle/>
+          <a:p>
+            <a:pPr algn="l">
+              <a:spcAft>
+                <a:spcPts val="0"/>
+              </a:spcAft>
+              <a:defRPr sz="1800" b="1">
+                <a:solidFill>
+                  <a:srgbClr val="0D1117"/>
+                </a:solidFill>
+                <a:latin typeface="Inter"/>
+              </a:defRPr>
+            </a:pPr>
+            <a:r>
+              <a:rPr>
+                <a:latin typeface="Inter"/>
+              </a:rPr>
+              <a:t>Pacing and concentration need monitoring</a:t>
+            </a:r>
+          </a:p>
+        </p:txBody>
+      </p:sp>
+      <p:sp>
+        <p:nvSpPr>
+          <p:cNvPr id="10" name="Rectangle 9"/>
+          <p:cNvSpPr/>
+          <p:nvPr/>
+        </p:nvSpPr>
+        <p:spPr>
+          <a:xfrm>
+            <a:off x="640080" y="2613415"/>
+            <a:ext cx="10908792" cy="1654451"/>
           </a:xfrm>
           <a:prstGeom prst="rect">
             <a:avLst/>
@@ -16003,14 +15416,14 @@
       </p:sp>
       <p:sp>
         <p:nvSpPr>
-          <p:cNvPr id="10" name="Rectangle 9"/>
+          <p:cNvPr id="11" name="Rectangle 10"/>
           <p:cNvSpPr/>
           <p:nvPr/>
         </p:nvSpPr>
         <p:spPr>
           <a:xfrm>
-            <a:off x="640080" y="1325880"/>
-            <a:ext cx="54864" cy="2263980"/>
+            <a:off x="640080" y="2613415"/>
+            <a:ext cx="54864" cy="1654451"/>
           </a:xfrm>
           <a:prstGeom prst="rect">
             <a:avLst/>
@@ -16052,13 +15465,13 @@
       </p:sp>
       <p:sp>
         <p:nvSpPr>
-          <p:cNvPr id="11" name="TextBox 10"/>
+          <p:cNvPr id="12" name="TextBox 11"/>
           <p:cNvSpPr txBox="1"/>
           <p:nvPr/>
         </p:nvSpPr>
         <p:spPr>
           <a:xfrm>
-            <a:off x="804671" y="1435607"/>
+            <a:off x="804671" y="2723143"/>
             <a:ext cx="10616184" cy="228600"/>
           </a:xfrm>
           <a:prstGeom prst="rect">
@@ -16094,14 +15507,14 @@
       </p:sp>
       <p:sp>
         <p:nvSpPr>
-          <p:cNvPr id="12" name="TextBox 11"/>
+          <p:cNvPr id="13" name="TextBox 12"/>
           <p:cNvSpPr txBox="1"/>
           <p:nvPr/>
         </p:nvSpPr>
         <p:spPr>
           <a:xfrm>
-            <a:off x="804671" y="1719072"/>
-            <a:ext cx="10616184" cy="1779348"/>
+            <a:off x="804671" y="3006607"/>
+            <a:ext cx="10616184" cy="1169819"/>
           </a:xfrm>
           <a:prstGeom prst="rect">
             <a:avLst/>
@@ -16136,14 +15549,14 @@
       </p:sp>
       <p:sp>
         <p:nvSpPr>
-          <p:cNvPr id="13" name="Rectangle 12"/>
+          <p:cNvPr id="14" name="Rectangle 13"/>
           <p:cNvSpPr/>
           <p:nvPr/>
         </p:nvSpPr>
         <p:spPr>
           <a:xfrm>
-            <a:off x="640080" y="3699588"/>
-            <a:ext cx="2644902" cy="2518331"/>
+            <a:off x="640080" y="4377595"/>
+            <a:ext cx="2644902" cy="1840324"/>
           </a:xfrm>
           <a:prstGeom prst="rect">
             <a:avLst/>
@@ -16185,13 +15598,13 @@
       </p:sp>
       <p:sp>
         <p:nvSpPr>
-          <p:cNvPr id="14" name="Rectangle 13"/>
+          <p:cNvPr id="15" name="Rectangle 14"/>
           <p:cNvSpPr/>
           <p:nvPr/>
         </p:nvSpPr>
         <p:spPr>
           <a:xfrm>
-            <a:off x="640080" y="3699588"/>
+            <a:off x="640080" y="4377595"/>
             <a:ext cx="2644902" cy="45720"/>
           </a:xfrm>
           <a:prstGeom prst="rect">
@@ -16234,13 +15647,13 @@
       </p:sp>
       <p:sp>
         <p:nvSpPr>
-          <p:cNvPr id="15" name="TextBox 14"/>
+          <p:cNvPr id="16" name="TextBox 15"/>
           <p:cNvSpPr txBox="1"/>
           <p:nvPr/>
         </p:nvSpPr>
         <p:spPr>
           <a:xfrm>
-            <a:off x="749808" y="3827604"/>
+            <a:off x="749808" y="4505611"/>
             <a:ext cx="2425446" cy="201168"/>
           </a:xfrm>
           <a:prstGeom prst="rect">
@@ -16276,13 +15689,13 @@
       </p:sp>
       <p:sp>
         <p:nvSpPr>
-          <p:cNvPr id="16" name="TextBox 15"/>
+          <p:cNvPr id="17" name="TextBox 16"/>
           <p:cNvSpPr txBox="1"/>
           <p:nvPr/>
         </p:nvSpPr>
         <p:spPr>
           <a:xfrm>
-            <a:off x="749808" y="4083636"/>
+            <a:off x="749808" y="4761643"/>
             <a:ext cx="2425446" cy="475488"/>
           </a:xfrm>
           <a:prstGeom prst="rect">
@@ -16318,13 +15731,13 @@
       </p:sp>
       <p:sp>
         <p:nvSpPr>
-          <p:cNvPr id="17" name="TextBox 16"/>
+          <p:cNvPr id="18" name="TextBox 17"/>
           <p:cNvSpPr txBox="1"/>
           <p:nvPr/>
         </p:nvSpPr>
         <p:spPr>
           <a:xfrm>
-            <a:off x="749808" y="5888736"/>
+            <a:off x="749808" y="5888735"/>
             <a:ext cx="2425446" cy="228600"/>
           </a:xfrm>
           <a:prstGeom prst="rect">
@@ -16360,14 +15773,14 @@
       </p:sp>
       <p:sp>
         <p:nvSpPr>
-          <p:cNvPr id="18" name="Rectangle 17"/>
+          <p:cNvPr id="19" name="Rectangle 18"/>
           <p:cNvSpPr/>
           <p:nvPr/>
         </p:nvSpPr>
         <p:spPr>
           <a:xfrm>
-            <a:off x="3394710" y="3699588"/>
-            <a:ext cx="2644902" cy="2518331"/>
+            <a:off x="3394710" y="4377595"/>
+            <a:ext cx="2644902" cy="1840324"/>
           </a:xfrm>
           <a:prstGeom prst="rect">
             <a:avLst/>
@@ -16409,13 +15822,13 @@
       </p:sp>
       <p:sp>
         <p:nvSpPr>
-          <p:cNvPr id="19" name="Rectangle 18"/>
+          <p:cNvPr id="20" name="Rectangle 19"/>
           <p:cNvSpPr/>
           <p:nvPr/>
         </p:nvSpPr>
         <p:spPr>
           <a:xfrm>
-            <a:off x="3394710" y="3699588"/>
+            <a:off x="3394710" y="4377595"/>
             <a:ext cx="2644902" cy="45720"/>
           </a:xfrm>
           <a:prstGeom prst="rect">
@@ -16458,13 +15871,13 @@
       </p:sp>
       <p:sp>
         <p:nvSpPr>
-          <p:cNvPr id="20" name="TextBox 19"/>
+          <p:cNvPr id="21" name="TextBox 20"/>
           <p:cNvSpPr txBox="1"/>
           <p:nvPr/>
         </p:nvSpPr>
         <p:spPr>
           <a:xfrm>
-            <a:off x="3504438" y="3827604"/>
+            <a:off x="3504438" y="4505611"/>
             <a:ext cx="2425446" cy="201168"/>
           </a:xfrm>
           <a:prstGeom prst="rect">
@@ -16500,13 +15913,13 @@
       </p:sp>
       <p:sp>
         <p:nvSpPr>
-          <p:cNvPr id="21" name="TextBox 20"/>
+          <p:cNvPr id="22" name="TextBox 21"/>
           <p:cNvSpPr txBox="1"/>
           <p:nvPr/>
         </p:nvSpPr>
         <p:spPr>
           <a:xfrm>
-            <a:off x="3504438" y="4083636"/>
+            <a:off x="3504438" y="4761643"/>
             <a:ext cx="2425446" cy="475488"/>
           </a:xfrm>
           <a:prstGeom prst="rect">
@@ -16542,13 +15955,13 @@
       </p:sp>
       <p:sp>
         <p:nvSpPr>
-          <p:cNvPr id="22" name="TextBox 21"/>
+          <p:cNvPr id="23" name="TextBox 22"/>
           <p:cNvSpPr txBox="1"/>
           <p:nvPr/>
         </p:nvSpPr>
         <p:spPr>
           <a:xfrm>
-            <a:off x="3504438" y="5888736"/>
+            <a:off x="3504438" y="5888735"/>
             <a:ext cx="2425446" cy="228600"/>
           </a:xfrm>
           <a:prstGeom prst="rect">
@@ -16584,14 +15997,14 @@
       </p:sp>
       <p:sp>
         <p:nvSpPr>
-          <p:cNvPr id="23" name="Rectangle 22"/>
+          <p:cNvPr id="24" name="Rectangle 23"/>
           <p:cNvSpPr/>
           <p:nvPr/>
         </p:nvSpPr>
         <p:spPr>
           <a:xfrm>
-            <a:off x="6149340" y="3699588"/>
-            <a:ext cx="2644902" cy="2518331"/>
+            <a:off x="6149340" y="4377595"/>
+            <a:ext cx="2644902" cy="1840324"/>
           </a:xfrm>
           <a:prstGeom prst="rect">
             <a:avLst/>
@@ -16633,13 +16046,13 @@
       </p:sp>
       <p:sp>
         <p:nvSpPr>
-          <p:cNvPr id="24" name="Rectangle 23"/>
+          <p:cNvPr id="25" name="Rectangle 24"/>
           <p:cNvSpPr/>
           <p:nvPr/>
         </p:nvSpPr>
         <p:spPr>
           <a:xfrm>
-            <a:off x="6149340" y="3699588"/>
+            <a:off x="6149340" y="4377595"/>
             <a:ext cx="2644902" cy="45720"/>
           </a:xfrm>
           <a:prstGeom prst="rect">
@@ -16682,13 +16095,13 @@
       </p:sp>
       <p:sp>
         <p:nvSpPr>
-          <p:cNvPr id="25" name="TextBox 24"/>
+          <p:cNvPr id="26" name="TextBox 25"/>
           <p:cNvSpPr txBox="1"/>
           <p:nvPr/>
         </p:nvSpPr>
         <p:spPr>
           <a:xfrm>
-            <a:off x="6259068" y="3827604"/>
+            <a:off x="6259068" y="4505611"/>
             <a:ext cx="2425446" cy="201168"/>
           </a:xfrm>
           <a:prstGeom prst="rect">
@@ -16724,13 +16137,13 @@
       </p:sp>
       <p:sp>
         <p:nvSpPr>
-          <p:cNvPr id="26" name="TextBox 25"/>
+          <p:cNvPr id="27" name="TextBox 26"/>
           <p:cNvSpPr txBox="1"/>
           <p:nvPr/>
         </p:nvSpPr>
         <p:spPr>
           <a:xfrm>
-            <a:off x="6259068" y="4083636"/>
+            <a:off x="6259068" y="4761643"/>
             <a:ext cx="2425446" cy="475488"/>
           </a:xfrm>
           <a:prstGeom prst="rect">
@@ -16766,13 +16179,13 @@
       </p:sp>
       <p:sp>
         <p:nvSpPr>
-          <p:cNvPr id="27" name="TextBox 26"/>
+          <p:cNvPr id="28" name="TextBox 27"/>
           <p:cNvSpPr txBox="1"/>
           <p:nvPr/>
         </p:nvSpPr>
         <p:spPr>
           <a:xfrm>
-            <a:off x="6259068" y="5888736"/>
+            <a:off x="6259068" y="5888735"/>
             <a:ext cx="2425446" cy="228600"/>
           </a:xfrm>
           <a:prstGeom prst="rect">
@@ -16808,14 +16221,14 @@
       </p:sp>
       <p:sp>
         <p:nvSpPr>
-          <p:cNvPr id="28" name="Rectangle 27"/>
+          <p:cNvPr id="29" name="Rectangle 28"/>
           <p:cNvSpPr/>
           <p:nvPr/>
         </p:nvSpPr>
         <p:spPr>
           <a:xfrm>
-            <a:off x="8903970" y="3699588"/>
-            <a:ext cx="2644902" cy="2518331"/>
+            <a:off x="8903970" y="4377595"/>
+            <a:ext cx="2644902" cy="1840324"/>
           </a:xfrm>
           <a:prstGeom prst="rect">
             <a:avLst/>
@@ -16857,13 +16270,13 @@
       </p:sp>
       <p:sp>
         <p:nvSpPr>
-          <p:cNvPr id="29" name="Rectangle 28"/>
+          <p:cNvPr id="30" name="Rectangle 29"/>
           <p:cNvSpPr/>
           <p:nvPr/>
         </p:nvSpPr>
         <p:spPr>
           <a:xfrm>
-            <a:off x="8903970" y="3699588"/>
+            <a:off x="8903970" y="4377595"/>
             <a:ext cx="2644902" cy="45720"/>
           </a:xfrm>
           <a:prstGeom prst="rect">
@@ -16906,13 +16319,13 @@
       </p:sp>
       <p:sp>
         <p:nvSpPr>
-          <p:cNvPr id="30" name="TextBox 29"/>
+          <p:cNvPr id="31" name="TextBox 30"/>
           <p:cNvSpPr txBox="1"/>
           <p:nvPr/>
         </p:nvSpPr>
         <p:spPr>
           <a:xfrm>
-            <a:off x="9013698" y="3827604"/>
+            <a:off x="9013698" y="4505611"/>
             <a:ext cx="2425446" cy="201168"/>
           </a:xfrm>
           <a:prstGeom prst="rect">
@@ -16948,13 +16361,13 @@
       </p:sp>
       <p:sp>
         <p:nvSpPr>
-          <p:cNvPr id="31" name="TextBox 30"/>
+          <p:cNvPr id="32" name="TextBox 31"/>
           <p:cNvSpPr txBox="1"/>
           <p:nvPr/>
         </p:nvSpPr>
         <p:spPr>
           <a:xfrm>
-            <a:off x="9013698" y="4083636"/>
+            <a:off x="9013698" y="4761643"/>
             <a:ext cx="2425446" cy="475488"/>
           </a:xfrm>
           <a:prstGeom prst="rect">
@@ -16983,20 +16396,20 @@
               <a:rPr>
                 <a:latin typeface="Inter"/>
               </a:rPr>
-              <a:t>Watch</a:t>
+              <a:t>Near limit</a:t>
             </a:r>
           </a:p>
         </p:txBody>
       </p:sp>
       <p:sp>
         <p:nvSpPr>
-          <p:cNvPr id="32" name="TextBox 31"/>
+          <p:cNvPr id="33" name="TextBox 32"/>
           <p:cNvSpPr txBox="1"/>
           <p:nvPr/>
         </p:nvSpPr>
         <p:spPr>
           <a:xfrm>
-            <a:off x="9013698" y="5888736"/>
+            <a:off x="9013698" y="5888735"/>
             <a:ext cx="2425446" cy="228600"/>
           </a:xfrm>
           <a:prstGeom prst="rect">
@@ -17032,7 +16445,7 @@
       </p:sp>
       <p:sp>
         <p:nvSpPr>
-          <p:cNvPr id="33" name="Rectangle 32"/>
+          <p:cNvPr id="34" name="Rectangle 33"/>
           <p:cNvSpPr/>
           <p:nvPr/>
         </p:nvSpPr>
@@ -17081,7 +16494,7 @@
       </p:sp>
       <p:sp>
         <p:nvSpPr>
-          <p:cNvPr id="34" name="TextBox 33"/>
+          <p:cNvPr id="35" name="TextBox 34"/>
           <p:cNvSpPr txBox="1"/>
           <p:nvPr/>
         </p:nvSpPr>
@@ -17123,7 +16536,7 @@
       </p:sp>
       <p:sp>
         <p:nvSpPr>
-          <p:cNvPr id="35" name="TextBox 34"/>
+          <p:cNvPr id="36" name="TextBox 35"/>
           <p:cNvSpPr txBox="1"/>
           <p:nvPr/>
         </p:nvSpPr>
@@ -17165,7 +16578,7 @@
       </p:sp>
       <p:sp>
         <p:nvSpPr>
-          <p:cNvPr id="36" name="TextBox 35"/>
+          <p:cNvPr id="37" name="TextBox 36"/>
           <p:cNvSpPr txBox="1"/>
           <p:nvPr/>
         </p:nvSpPr>
@@ -17281,7 +16694,7 @@
         <p:spPr>
           <a:xfrm>
             <a:off x="640080" y="329184"/>
-            <a:ext cx="5303520" cy="182880"/>
+            <a:ext cx="9875520" cy="182880"/>
           </a:xfrm>
           <a:prstGeom prst="rect">
             <a:avLst/>
@@ -17322,48 +16735,6 @@
         </p:nvSpPr>
         <p:spPr>
           <a:xfrm>
-            <a:off x="5897880" y="310896"/>
-            <a:ext cx="4800600" cy="256032"/>
-          </a:xfrm>
-          <a:prstGeom prst="rect">
-            <a:avLst/>
-          </a:prstGeom>
-          <a:noFill/>
-        </p:spPr>
-        <p:txBody>
-          <a:bodyPr wrap="none" lIns="9144" rIns="9144" tIns="9144" bIns="9144" anchor="t">
-            <a:spAutoFit/>
-          </a:bodyPr>
-          <a:lstStyle/>
-          <a:p>
-            <a:pPr algn="r">
-              <a:spcAft>
-                <a:spcPts val="0"/>
-              </a:spcAft>
-              <a:defRPr sz="680" b="1">
-                <a:solidFill>
-                  <a:srgbClr val="4F6B00"/>
-                </a:solidFill>
-                <a:latin typeface="Inter"/>
-              </a:defRPr>
-            </a:pPr>
-            <a:r>
-              <a:rPr>
-                <a:latin typeface="Inter"/>
-              </a:rPr>
-              <a:t>Illustrative, Gradient Maintained — demo data, not the client's holdings or managers</a:t>
-            </a:r>
-          </a:p>
-        </p:txBody>
-      </p:sp>
-      <p:sp>
-        <p:nvSpPr>
-          <p:cNvPr id="5" name="TextBox 4"/>
-          <p:cNvSpPr txBox="1"/>
-          <p:nvPr/>
-        </p:nvSpPr>
-        <p:spPr>
-          <a:xfrm>
             <a:off x="640080" y="566928"/>
             <a:ext cx="10058400" cy="530352"/>
           </a:xfrm>
@@ -17400,7 +16771,7 @@
       </p:sp>
       <p:sp>
         <p:nvSpPr>
-          <p:cNvPr id="6" name="Rectangle 5"/>
+          <p:cNvPr id="5" name="Rectangle 4"/>
           <p:cNvSpPr/>
           <p:nvPr/>
         </p:nvSpPr>
@@ -17449,7 +16820,7 @@
       </p:sp>
       <p:sp>
         <p:nvSpPr>
-          <p:cNvPr id="7" name="Rectangle 6"/>
+          <p:cNvPr id="6" name="Rectangle 5"/>
           <p:cNvSpPr/>
           <p:nvPr/>
         </p:nvSpPr>
@@ -17498,7 +16869,7 @@
       </p:sp>
       <p:sp>
         <p:nvSpPr>
-          <p:cNvPr id="8" name="TextBox 7"/>
+          <p:cNvPr id="7" name="TextBox 6"/>
           <p:cNvSpPr txBox="1"/>
           <p:nvPr/>
         </p:nvSpPr>
@@ -17540,7 +16911,7 @@
       </p:sp>
       <p:sp>
         <p:nvSpPr>
-          <p:cNvPr id="9" name="TextBox 8"/>
+          <p:cNvPr id="8" name="TextBox 7"/>
           <p:cNvSpPr txBox="1"/>
           <p:nvPr/>
         </p:nvSpPr>
@@ -17582,7 +16953,7 @@
       </p:sp>
       <p:graphicFrame>
         <p:nvGraphicFramePr>
-          <p:cNvPr id="10" name="Chart 9"/>
+          <p:cNvPr id="9" name="Chart 8"/>
           <p:cNvGraphicFramePr>
             <a:graphicFrameLocks noGrp="1"/>
           </p:cNvGraphicFramePr>
@@ -17600,7 +16971,7 @@
       </p:graphicFrame>
       <p:sp>
         <p:nvSpPr>
-          <p:cNvPr id="11" name="Rectangle 10"/>
+          <p:cNvPr id="10" name="Rectangle 9"/>
           <p:cNvSpPr/>
           <p:nvPr/>
         </p:nvSpPr>
@@ -17649,7 +17020,7 @@
       </p:sp>
       <p:sp>
         <p:nvSpPr>
-          <p:cNvPr id="12" name="TextBox 11"/>
+          <p:cNvPr id="11" name="TextBox 10"/>
           <p:cNvSpPr txBox="1"/>
           <p:nvPr/>
         </p:nvSpPr>
@@ -17691,7 +17062,7 @@
       </p:sp>
       <p:graphicFrame>
         <p:nvGraphicFramePr>
-          <p:cNvPr id="13" name="Chart 12"/>
+          <p:cNvPr id="12" name="Chart 11"/>
           <p:cNvGraphicFramePr>
             <a:graphicFrameLocks noGrp="1"/>
           </p:cNvGraphicFramePr>
@@ -17709,7 +17080,7 @@
       </p:graphicFrame>
       <p:sp>
         <p:nvSpPr>
-          <p:cNvPr id="14" name="Rectangle 13"/>
+          <p:cNvPr id="13" name="Rectangle 12"/>
           <p:cNvSpPr/>
           <p:nvPr/>
         </p:nvSpPr>
@@ -17758,7 +17129,7 @@
       </p:sp>
       <p:sp>
         <p:nvSpPr>
-          <p:cNvPr id="15" name="TextBox 14"/>
+          <p:cNvPr id="14" name="TextBox 13"/>
           <p:cNvSpPr txBox="1"/>
           <p:nvPr/>
         </p:nvSpPr>
@@ -17800,7 +17171,7 @@
       </p:sp>
       <p:sp>
         <p:nvSpPr>
-          <p:cNvPr id="16" name="TextBox 15"/>
+          <p:cNvPr id="15" name="TextBox 14"/>
           <p:cNvSpPr txBox="1"/>
           <p:nvPr/>
         </p:nvSpPr>
@@ -17842,7 +17213,7 @@
       </p:sp>
       <p:sp>
         <p:nvSpPr>
-          <p:cNvPr id="17" name="TextBox 16"/>
+          <p:cNvPr id="16" name="TextBox 15"/>
           <p:cNvSpPr txBox="1"/>
           <p:nvPr/>
         </p:nvSpPr>
@@ -17958,7 +17329,7 @@
         <p:spPr>
           <a:xfrm>
             <a:off x="640080" y="329184"/>
-            <a:ext cx="5303520" cy="182880"/>
+            <a:ext cx="9875520" cy="182880"/>
           </a:xfrm>
           <a:prstGeom prst="rect">
             <a:avLst/>
@@ -17999,48 +17370,6 @@
         </p:nvSpPr>
         <p:spPr>
           <a:xfrm>
-            <a:off x="5897880" y="310896"/>
-            <a:ext cx="4800600" cy="256032"/>
-          </a:xfrm>
-          <a:prstGeom prst="rect">
-            <a:avLst/>
-          </a:prstGeom>
-          <a:noFill/>
-        </p:spPr>
-        <p:txBody>
-          <a:bodyPr wrap="none" lIns="9144" rIns="9144" tIns="9144" bIns="9144" anchor="t">
-            <a:spAutoFit/>
-          </a:bodyPr>
-          <a:lstStyle/>
-          <a:p>
-            <a:pPr algn="r">
-              <a:spcAft>
-                <a:spcPts val="0"/>
-              </a:spcAft>
-              <a:defRPr sz="680" b="1">
-                <a:solidFill>
-                  <a:srgbClr val="4F6B00"/>
-                </a:solidFill>
-                <a:latin typeface="Inter"/>
-              </a:defRPr>
-            </a:pPr>
-            <a:r>
-              <a:rPr>
-                <a:latin typeface="Inter"/>
-              </a:rPr>
-              <a:t>Illustrative, Gradient Maintained — demo data, not the client's holdings or managers</a:t>
-            </a:r>
-          </a:p>
-        </p:txBody>
-      </p:sp>
-      <p:sp>
-        <p:nvSpPr>
-          <p:cNvPr id="5" name="TextBox 4"/>
-          <p:cNvSpPr txBox="1"/>
-          <p:nvPr/>
-        </p:nvSpPr>
-        <p:spPr>
-          <a:xfrm>
             <a:off x="640080" y="566928"/>
             <a:ext cx="10058400" cy="530352"/>
           </a:xfrm>
@@ -18077,7 +17406,7 @@
       </p:sp>
       <p:sp>
         <p:nvSpPr>
-          <p:cNvPr id="6" name="Rectangle 5"/>
+          <p:cNvPr id="5" name="Rectangle 4"/>
           <p:cNvSpPr/>
           <p:nvPr/>
         </p:nvSpPr>
@@ -18126,7 +17455,7 @@
       </p:sp>
       <p:sp>
         <p:nvSpPr>
-          <p:cNvPr id="7" name="Rectangle 6"/>
+          <p:cNvPr id="6" name="Rectangle 5"/>
           <p:cNvSpPr/>
           <p:nvPr/>
         </p:nvSpPr>
@@ -18175,7 +17504,7 @@
       </p:sp>
       <p:sp>
         <p:nvSpPr>
-          <p:cNvPr id="8" name="TextBox 7"/>
+          <p:cNvPr id="7" name="TextBox 6"/>
           <p:cNvSpPr txBox="1"/>
           <p:nvPr/>
         </p:nvSpPr>
@@ -18217,7 +17546,7 @@
       </p:sp>
       <p:sp>
         <p:nvSpPr>
-          <p:cNvPr id="9" name="TextBox 8"/>
+          <p:cNvPr id="8" name="TextBox 7"/>
           <p:cNvSpPr txBox="1"/>
           <p:nvPr/>
         </p:nvSpPr>
@@ -18259,7 +17588,7 @@
       </p:sp>
       <p:graphicFrame>
         <p:nvGraphicFramePr>
-          <p:cNvPr id="10" name="Table 9"/>
+          <p:cNvPr id="9" name="Table 8"/>
           <p:cNvGraphicFramePr>
             <a:graphicFrameLocks noGrp="1"/>
           </p:cNvGraphicFramePr>
@@ -18699,7 +18028,7 @@
       </p:graphicFrame>
       <p:graphicFrame>
         <p:nvGraphicFramePr>
-          <p:cNvPr id="11" name="Table 10"/>
+          <p:cNvPr id="10" name="Table 9"/>
           <p:cNvGraphicFramePr>
             <a:graphicFrameLocks noGrp="1"/>
           </p:cNvGraphicFramePr>
@@ -18949,7 +18278,7 @@
       </p:graphicFrame>
       <p:sp>
         <p:nvSpPr>
-          <p:cNvPr id="12" name="Rectangle 11"/>
+          <p:cNvPr id="11" name="Rectangle 10"/>
           <p:cNvSpPr/>
           <p:nvPr/>
         </p:nvSpPr>
@@ -18998,7 +18327,7 @@
       </p:sp>
       <p:sp>
         <p:nvSpPr>
-          <p:cNvPr id="13" name="Rectangle 12"/>
+          <p:cNvPr id="12" name="Rectangle 11"/>
           <p:cNvSpPr/>
           <p:nvPr/>
         </p:nvSpPr>
@@ -19047,7 +18376,7 @@
       </p:sp>
       <p:sp>
         <p:nvSpPr>
-          <p:cNvPr id="14" name="TextBox 13"/>
+          <p:cNvPr id="13" name="TextBox 12"/>
           <p:cNvSpPr txBox="1"/>
           <p:nvPr/>
         </p:nvSpPr>
@@ -19089,7 +18418,7 @@
       </p:sp>
       <p:sp>
         <p:nvSpPr>
-          <p:cNvPr id="15" name="TextBox 14"/>
+          <p:cNvPr id="14" name="TextBox 13"/>
           <p:cNvSpPr txBox="1"/>
           <p:nvPr/>
         </p:nvSpPr>
@@ -19131,7 +18460,7 @@
       </p:sp>
       <p:sp>
         <p:nvSpPr>
-          <p:cNvPr id="16" name="Rectangle 15"/>
+          <p:cNvPr id="15" name="Rectangle 14"/>
           <p:cNvSpPr/>
           <p:nvPr/>
         </p:nvSpPr>
@@ -19180,7 +18509,7 @@
       </p:sp>
       <p:sp>
         <p:nvSpPr>
-          <p:cNvPr id="17" name="TextBox 16"/>
+          <p:cNvPr id="16" name="TextBox 15"/>
           <p:cNvSpPr txBox="1"/>
           <p:nvPr/>
         </p:nvSpPr>
@@ -19222,7 +18551,7 @@
       </p:sp>
       <p:sp>
         <p:nvSpPr>
-          <p:cNvPr id="18" name="TextBox 17"/>
+          <p:cNvPr id="17" name="TextBox 16"/>
           <p:cNvSpPr txBox="1"/>
           <p:nvPr/>
         </p:nvSpPr>
@@ -19264,7 +18593,7 @@
       </p:sp>
       <p:sp>
         <p:nvSpPr>
-          <p:cNvPr id="19" name="TextBox 18"/>
+          <p:cNvPr id="18" name="TextBox 17"/>
           <p:cNvSpPr txBox="1"/>
           <p:nvPr/>
         </p:nvSpPr>
@@ -19380,7 +18709,7 @@
         <p:spPr>
           <a:xfrm>
             <a:off x="640080" y="329184"/>
-            <a:ext cx="5303520" cy="182880"/>
+            <a:ext cx="9875520" cy="182880"/>
           </a:xfrm>
           <a:prstGeom prst="rect">
             <a:avLst/>
@@ -19421,48 +18750,6 @@
         </p:nvSpPr>
         <p:spPr>
           <a:xfrm>
-            <a:off x="5897880" y="310896"/>
-            <a:ext cx="4800600" cy="256032"/>
-          </a:xfrm>
-          <a:prstGeom prst="rect">
-            <a:avLst/>
-          </a:prstGeom>
-          <a:noFill/>
-        </p:spPr>
-        <p:txBody>
-          <a:bodyPr wrap="none" lIns="9144" rIns="9144" tIns="9144" bIns="9144" anchor="t">
-            <a:spAutoFit/>
-          </a:bodyPr>
-          <a:lstStyle/>
-          <a:p>
-            <a:pPr algn="r">
-              <a:spcAft>
-                <a:spcPts val="0"/>
-              </a:spcAft>
-              <a:defRPr sz="680" b="1">
-                <a:solidFill>
-                  <a:srgbClr val="4F6B00"/>
-                </a:solidFill>
-                <a:latin typeface="Inter"/>
-              </a:defRPr>
-            </a:pPr>
-            <a:r>
-              <a:rPr>
-                <a:latin typeface="Inter"/>
-              </a:rPr>
-              <a:t>Illustrative, Gradient Maintained — demo data, not the client's holdings or managers</a:t>
-            </a:r>
-          </a:p>
-        </p:txBody>
-      </p:sp>
-      <p:sp>
-        <p:nvSpPr>
-          <p:cNvPr id="5" name="TextBox 4"/>
-          <p:cNvSpPr txBox="1"/>
-          <p:nvPr/>
-        </p:nvSpPr>
-        <p:spPr>
-          <a:xfrm>
             <a:off x="640080" y="566928"/>
             <a:ext cx="10058400" cy="530352"/>
           </a:xfrm>
@@ -19499,7 +18786,7 @@
       </p:sp>
       <p:sp>
         <p:nvSpPr>
-          <p:cNvPr id="6" name="Rectangle 5"/>
+          <p:cNvPr id="5" name="Rectangle 4"/>
           <p:cNvSpPr/>
           <p:nvPr/>
         </p:nvSpPr>
@@ -19548,7 +18835,7 @@
       </p:sp>
       <p:sp>
         <p:nvSpPr>
-          <p:cNvPr id="7" name="Rectangle 6"/>
+          <p:cNvPr id="6" name="Rectangle 5"/>
           <p:cNvSpPr/>
           <p:nvPr/>
         </p:nvSpPr>
@@ -19597,7 +18884,7 @@
       </p:sp>
       <p:sp>
         <p:nvSpPr>
-          <p:cNvPr id="8" name="TextBox 7"/>
+          <p:cNvPr id="7" name="TextBox 6"/>
           <p:cNvSpPr txBox="1"/>
           <p:nvPr/>
         </p:nvSpPr>
@@ -19639,7 +18926,7 @@
       </p:sp>
       <p:sp>
         <p:nvSpPr>
-          <p:cNvPr id="9" name="TextBox 8"/>
+          <p:cNvPr id="8" name="TextBox 7"/>
           <p:cNvSpPr txBox="1"/>
           <p:nvPr/>
         </p:nvSpPr>
@@ -19681,7 +18968,7 @@
       </p:sp>
       <p:graphicFrame>
         <p:nvGraphicFramePr>
-          <p:cNvPr id="10" name="Table 9"/>
+          <p:cNvPr id="9" name="Table 8"/>
           <p:cNvGraphicFramePr>
             <a:graphicFrameLocks noGrp="1"/>
           </p:cNvGraphicFramePr>
@@ -20104,7 +19391,7 @@
                         <a:rPr>
                           <a:latin typeface="Inter"/>
                         </a:rPr>
-                        <a:t>● not assessed</a:t>
+                        <a:t>● Not assessed</a:t>
                       </a:r>
                     </a:p>
                   </a:txBody>
@@ -20121,7 +19408,7 @@
       </p:graphicFrame>
       <p:sp>
         <p:nvSpPr>
-          <p:cNvPr id="11" name="Rectangle 10"/>
+          <p:cNvPr id="10" name="Rectangle 9"/>
           <p:cNvSpPr/>
           <p:nvPr/>
         </p:nvSpPr>
@@ -20170,7 +19457,7 @@
       </p:sp>
       <p:sp>
         <p:nvSpPr>
-          <p:cNvPr id="12" name="TextBox 11"/>
+          <p:cNvPr id="11" name="TextBox 10"/>
           <p:cNvSpPr txBox="1"/>
           <p:nvPr/>
         </p:nvSpPr>
@@ -20212,7 +19499,7 @@
       </p:sp>
       <p:sp>
         <p:nvSpPr>
-          <p:cNvPr id="13" name="TextBox 12"/>
+          <p:cNvPr id="12" name="TextBox 11"/>
           <p:cNvSpPr txBox="1"/>
           <p:nvPr/>
         </p:nvSpPr>
@@ -20254,7 +19541,7 @@
       </p:sp>
       <p:sp>
         <p:nvSpPr>
-          <p:cNvPr id="14" name="TextBox 13"/>
+          <p:cNvPr id="13" name="TextBox 12"/>
           <p:cNvSpPr txBox="1"/>
           <p:nvPr/>
         </p:nvSpPr>
@@ -20370,7 +19657,7 @@
         <p:spPr>
           <a:xfrm>
             <a:off x="640080" y="329184"/>
-            <a:ext cx="5303520" cy="182880"/>
+            <a:ext cx="9875520" cy="182880"/>
           </a:xfrm>
           <a:prstGeom prst="rect">
             <a:avLst/>
@@ -20411,48 +19698,6 @@
         </p:nvSpPr>
         <p:spPr>
           <a:xfrm>
-            <a:off x="5897880" y="310896"/>
-            <a:ext cx="4800600" cy="256032"/>
-          </a:xfrm>
-          <a:prstGeom prst="rect">
-            <a:avLst/>
-          </a:prstGeom>
-          <a:noFill/>
-        </p:spPr>
-        <p:txBody>
-          <a:bodyPr wrap="none" lIns="9144" rIns="9144" tIns="9144" bIns="9144" anchor="t">
-            <a:spAutoFit/>
-          </a:bodyPr>
-          <a:lstStyle/>
-          <a:p>
-            <a:pPr algn="r">
-              <a:spcAft>
-                <a:spcPts val="0"/>
-              </a:spcAft>
-              <a:defRPr sz="680" b="1">
-                <a:solidFill>
-                  <a:srgbClr val="4F6B00"/>
-                </a:solidFill>
-                <a:latin typeface="Inter"/>
-              </a:defRPr>
-            </a:pPr>
-            <a:r>
-              <a:rPr>
-                <a:latin typeface="Inter"/>
-              </a:rPr>
-              <a:t>Illustrative, Gradient Maintained — demo data, not the client's holdings or managers</a:t>
-            </a:r>
-          </a:p>
-        </p:txBody>
-      </p:sp>
-      <p:sp>
-        <p:nvSpPr>
-          <p:cNvPr id="5" name="TextBox 4"/>
-          <p:cNvSpPr txBox="1"/>
-          <p:nvPr/>
-        </p:nvSpPr>
-        <p:spPr>
-          <a:xfrm>
             <a:off x="640080" y="566928"/>
             <a:ext cx="10058400" cy="530352"/>
           </a:xfrm>
@@ -20489,7 +19734,7 @@
       </p:sp>
       <p:sp>
         <p:nvSpPr>
-          <p:cNvPr id="6" name="Rectangle 5"/>
+          <p:cNvPr id="5" name="Rectangle 4"/>
           <p:cNvSpPr/>
           <p:nvPr/>
         </p:nvSpPr>
@@ -20538,7 +19783,7 @@
       </p:sp>
       <p:sp>
         <p:nvSpPr>
-          <p:cNvPr id="7" name="Rectangle 6"/>
+          <p:cNvPr id="6" name="Rectangle 5"/>
           <p:cNvSpPr/>
           <p:nvPr/>
         </p:nvSpPr>
@@ -20587,7 +19832,7 @@
       </p:sp>
       <p:sp>
         <p:nvSpPr>
-          <p:cNvPr id="8" name="TextBox 7"/>
+          <p:cNvPr id="7" name="TextBox 6"/>
           <p:cNvSpPr txBox="1"/>
           <p:nvPr/>
         </p:nvSpPr>
@@ -20629,7 +19874,7 @@
       </p:sp>
       <p:sp>
         <p:nvSpPr>
-          <p:cNvPr id="9" name="TextBox 8"/>
+          <p:cNvPr id="8" name="TextBox 7"/>
           <p:cNvSpPr txBox="1"/>
           <p:nvPr/>
         </p:nvSpPr>
@@ -20671,7 +19916,7 @@
       </p:sp>
       <p:graphicFrame>
         <p:nvGraphicFramePr>
-          <p:cNvPr id="10" name="Table 9"/>
+          <p:cNvPr id="9" name="Table 8"/>
           <p:cNvGraphicFramePr>
             <a:graphicFrameLocks noGrp="1"/>
           </p:cNvGraphicFramePr>
@@ -20985,7 +20230,7 @@
                         <a:rPr>
                           <a:latin typeface="Inter"/>
                         </a:rPr>
-                        <a:t>● Watch</a:t>
+                        <a:t>● Near limit</a:t>
                       </a:r>
                     </a:p>
                   </a:txBody>
@@ -21149,7 +20394,7 @@
                         <a:rPr>
                           <a:latin typeface="Inter"/>
                         </a:rPr>
-                        <a:t>● not assessed</a:t>
+                        <a:t>● Not assessed</a:t>
                       </a:r>
                     </a:p>
                   </a:txBody>
@@ -21313,7 +20558,7 @@
                         <a:rPr>
                           <a:latin typeface="Inter"/>
                         </a:rPr>
-                        <a:t>● Partial</a:t>
+                        <a:t>● Partly available</a:t>
                       </a:r>
                     </a:p>
                   </a:txBody>
@@ -21477,7 +20722,7 @@
                         <a:rPr>
                           <a:latin typeface="Inter"/>
                         </a:rPr>
-                        <a:t>● Partial</a:t>
+                        <a:t>● Partly available</a:t>
                       </a:r>
                     </a:p>
                   </a:txBody>
@@ -21521,7 +20766,7 @@
       </p:graphicFrame>
       <p:sp>
         <p:nvSpPr>
-          <p:cNvPr id="11" name="TextBox 10"/>
+          <p:cNvPr id="10" name="TextBox 9"/>
           <p:cNvSpPr txBox="1"/>
           <p:nvPr/>
         </p:nvSpPr>
@@ -21563,7 +20808,7 @@
       </p:sp>
       <p:graphicFrame>
         <p:nvGraphicFramePr>
-          <p:cNvPr id="12" name="Table 11"/>
+          <p:cNvPr id="11" name="Table 10"/>
           <p:cNvGraphicFramePr>
             <a:graphicFrameLocks noGrp="1"/>
           </p:cNvGraphicFramePr>
@@ -22315,7 +21560,7 @@
                         <a:rPr>
                           <a:latin typeface="Inter"/>
                         </a:rPr>
-                        <a:t>Watch</a:t>
+                        <a:t>On watch list</a:t>
                       </a:r>
                     </a:p>
                   </a:txBody>
@@ -22413,7 +21658,7 @@
       </p:graphicFrame>
       <p:sp>
         <p:nvSpPr>
-          <p:cNvPr id="13" name="TextBox 12"/>
+          <p:cNvPr id="12" name="TextBox 11"/>
           <p:cNvSpPr txBox="1"/>
           <p:nvPr/>
         </p:nvSpPr>
@@ -22455,7 +21700,7 @@
       </p:sp>
       <p:sp>
         <p:nvSpPr>
-          <p:cNvPr id="14" name="TextBox 13"/>
+          <p:cNvPr id="13" name="TextBox 12"/>
           <p:cNvSpPr txBox="1"/>
           <p:nvPr/>
         </p:nvSpPr>
@@ -22497,7 +21742,7 @@
       </p:sp>
       <p:graphicFrame>
         <p:nvGraphicFramePr>
-          <p:cNvPr id="15" name="Table 14"/>
+          <p:cNvPr id="14" name="Table 13"/>
           <p:cNvGraphicFramePr>
             <a:graphicFrameLocks noGrp="1"/>
           </p:cNvGraphicFramePr>
@@ -22937,7 +22182,7 @@
       </p:graphicFrame>
       <p:sp>
         <p:nvSpPr>
-          <p:cNvPr id="16" name="Rectangle 15"/>
+          <p:cNvPr id="15" name="Rectangle 14"/>
           <p:cNvSpPr/>
           <p:nvPr/>
         </p:nvSpPr>
@@ -22986,7 +22231,7 @@
       </p:sp>
       <p:sp>
         <p:nvSpPr>
-          <p:cNvPr id="17" name="TextBox 16"/>
+          <p:cNvPr id="16" name="TextBox 15"/>
           <p:cNvSpPr txBox="1"/>
           <p:nvPr/>
         </p:nvSpPr>
@@ -23028,7 +22273,7 @@
       </p:sp>
       <p:sp>
         <p:nvSpPr>
-          <p:cNvPr id="18" name="TextBox 17"/>
+          <p:cNvPr id="17" name="TextBox 16"/>
           <p:cNvSpPr txBox="1"/>
           <p:nvPr/>
         </p:nvSpPr>
@@ -23070,7 +22315,7 @@
       </p:sp>
       <p:sp>
         <p:nvSpPr>
-          <p:cNvPr id="19" name="TextBox 18"/>
+          <p:cNvPr id="18" name="TextBox 17"/>
           <p:cNvSpPr txBox="1"/>
           <p:nvPr/>
         </p:nvSpPr>
@@ -23186,7 +22431,7 @@
         <p:spPr>
           <a:xfrm>
             <a:off x="640080" y="329184"/>
-            <a:ext cx="5303520" cy="182880"/>
+            <a:ext cx="9875520" cy="182880"/>
           </a:xfrm>
           <a:prstGeom prst="rect">
             <a:avLst/>
@@ -23227,48 +22472,6 @@
         </p:nvSpPr>
         <p:spPr>
           <a:xfrm>
-            <a:off x="5897880" y="310896"/>
-            <a:ext cx="4800600" cy="256032"/>
-          </a:xfrm>
-          <a:prstGeom prst="rect">
-            <a:avLst/>
-          </a:prstGeom>
-          <a:noFill/>
-        </p:spPr>
-        <p:txBody>
-          <a:bodyPr wrap="none" lIns="9144" rIns="9144" tIns="9144" bIns="9144" anchor="t">
-            <a:spAutoFit/>
-          </a:bodyPr>
-          <a:lstStyle/>
-          <a:p>
-            <a:pPr algn="r">
-              <a:spcAft>
-                <a:spcPts val="0"/>
-              </a:spcAft>
-              <a:defRPr sz="680" b="1">
-                <a:solidFill>
-                  <a:srgbClr val="4F6B00"/>
-                </a:solidFill>
-                <a:latin typeface="Inter"/>
-              </a:defRPr>
-            </a:pPr>
-            <a:r>
-              <a:rPr>
-                <a:latin typeface="Inter"/>
-              </a:rPr>
-              <a:t>Illustrative, Gradient Maintained — demo data, not the client's holdings or managers</a:t>
-            </a:r>
-          </a:p>
-        </p:txBody>
-      </p:sp>
-      <p:sp>
-        <p:nvSpPr>
-          <p:cNvPr id="5" name="TextBox 4"/>
-          <p:cNvSpPr txBox="1"/>
-          <p:nvPr/>
-        </p:nvSpPr>
-        <p:spPr>
-          <a:xfrm>
             <a:off x="640080" y="566928"/>
             <a:ext cx="10058400" cy="530352"/>
           </a:xfrm>
@@ -23305,7 +22508,7 @@
       </p:sp>
       <p:sp>
         <p:nvSpPr>
-          <p:cNvPr id="6" name="Rectangle 5"/>
+          <p:cNvPr id="5" name="Rectangle 4"/>
           <p:cNvSpPr/>
           <p:nvPr/>
         </p:nvSpPr>
@@ -23354,7 +22557,7 @@
       </p:sp>
       <p:sp>
         <p:nvSpPr>
-          <p:cNvPr id="7" name="Rectangle 6"/>
+          <p:cNvPr id="6" name="Rectangle 5"/>
           <p:cNvSpPr/>
           <p:nvPr/>
         </p:nvSpPr>
@@ -23403,7 +22606,7 @@
       </p:sp>
       <p:sp>
         <p:nvSpPr>
-          <p:cNvPr id="8" name="TextBox 7"/>
+          <p:cNvPr id="7" name="TextBox 6"/>
           <p:cNvSpPr txBox="1"/>
           <p:nvPr/>
         </p:nvSpPr>
@@ -23445,7 +22648,7 @@
       </p:sp>
       <p:sp>
         <p:nvSpPr>
-          <p:cNvPr id="9" name="TextBox 8"/>
+          <p:cNvPr id="8" name="TextBox 7"/>
           <p:cNvSpPr txBox="1"/>
           <p:nvPr/>
         </p:nvSpPr>
@@ -23487,7 +22690,7 @@
       </p:sp>
       <p:graphicFrame>
         <p:nvGraphicFramePr>
-          <p:cNvPr id="10" name="Table 9"/>
+          <p:cNvPr id="9" name="Table 8"/>
           <p:cNvGraphicFramePr>
             <a:graphicFrameLocks noGrp="1"/>
           </p:cNvGraphicFramePr>
@@ -24337,7 +23540,7 @@
       </p:graphicFrame>
       <p:sp>
         <p:nvSpPr>
-          <p:cNvPr id="11" name="TextBox 10"/>
+          <p:cNvPr id="10" name="TextBox 9"/>
           <p:cNvSpPr txBox="1"/>
           <p:nvPr/>
         </p:nvSpPr>
@@ -24379,7 +23582,7 @@
       </p:sp>
       <p:graphicFrame>
         <p:nvGraphicFramePr>
-          <p:cNvPr id="12" name="Table 11"/>
+          <p:cNvPr id="11" name="Table 10"/>
           <p:cNvGraphicFramePr>
             <a:graphicFrameLocks noGrp="1"/>
           </p:cNvGraphicFramePr>
@@ -24737,7 +23940,7 @@
       </p:graphicFrame>
       <p:sp>
         <p:nvSpPr>
-          <p:cNvPr id="13" name="TextBox 12"/>
+          <p:cNvPr id="12" name="TextBox 11"/>
           <p:cNvSpPr txBox="1"/>
           <p:nvPr/>
         </p:nvSpPr>
@@ -24817,7 +24020,7 @@
       </p:sp>
       <p:sp>
         <p:nvSpPr>
-          <p:cNvPr id="14" name="Rectangle 13"/>
+          <p:cNvPr id="13" name="Rectangle 12"/>
           <p:cNvSpPr/>
           <p:nvPr/>
         </p:nvSpPr>
@@ -24866,7 +24069,7 @@
       </p:sp>
       <p:sp>
         <p:nvSpPr>
-          <p:cNvPr id="15" name="TextBox 14"/>
+          <p:cNvPr id="14" name="TextBox 13"/>
           <p:cNvSpPr txBox="1"/>
           <p:nvPr/>
         </p:nvSpPr>
@@ -24908,7 +24111,7 @@
       </p:sp>
       <p:sp>
         <p:nvSpPr>
-          <p:cNvPr id="16" name="TextBox 15"/>
+          <p:cNvPr id="15" name="TextBox 14"/>
           <p:cNvSpPr txBox="1"/>
           <p:nvPr/>
         </p:nvSpPr>
@@ -24950,7 +24153,7 @@
       </p:sp>
       <p:sp>
         <p:nvSpPr>
-          <p:cNvPr id="17" name="TextBox 16"/>
+          <p:cNvPr id="16" name="TextBox 15"/>
           <p:cNvSpPr txBox="1"/>
           <p:nvPr/>
         </p:nvSpPr>
@@ -25066,7 +24269,7 @@
         <p:spPr>
           <a:xfrm>
             <a:off x="640080" y="329184"/>
-            <a:ext cx="5303520" cy="182880"/>
+            <a:ext cx="9875520" cy="182880"/>
           </a:xfrm>
           <a:prstGeom prst="rect">
             <a:avLst/>
@@ -25107,48 +24310,6 @@
         </p:nvSpPr>
         <p:spPr>
           <a:xfrm>
-            <a:off x="5897880" y="310896"/>
-            <a:ext cx="4800600" cy="256032"/>
-          </a:xfrm>
-          <a:prstGeom prst="rect">
-            <a:avLst/>
-          </a:prstGeom>
-          <a:noFill/>
-        </p:spPr>
-        <p:txBody>
-          <a:bodyPr wrap="none" lIns="9144" rIns="9144" tIns="9144" bIns="9144" anchor="t">
-            <a:spAutoFit/>
-          </a:bodyPr>
-          <a:lstStyle/>
-          <a:p>
-            <a:pPr algn="r">
-              <a:spcAft>
-                <a:spcPts val="0"/>
-              </a:spcAft>
-              <a:defRPr sz="680" b="1">
-                <a:solidFill>
-                  <a:srgbClr val="4F6B00"/>
-                </a:solidFill>
-                <a:latin typeface="Inter"/>
-              </a:defRPr>
-            </a:pPr>
-            <a:r>
-              <a:rPr>
-                <a:latin typeface="Inter"/>
-              </a:rPr>
-              <a:t>Illustrative, Gradient Maintained — demo data, not the client's holdings or managers</a:t>
-            </a:r>
-          </a:p>
-        </p:txBody>
-      </p:sp>
-      <p:sp>
-        <p:nvSpPr>
-          <p:cNvPr id="5" name="TextBox 4"/>
-          <p:cNvSpPr txBox="1"/>
-          <p:nvPr/>
-        </p:nvSpPr>
-        <p:spPr>
-          <a:xfrm>
             <a:off x="640080" y="566928"/>
             <a:ext cx="10058400" cy="530352"/>
           </a:xfrm>
@@ -25185,7 +24346,7 @@
       </p:sp>
       <p:sp>
         <p:nvSpPr>
-          <p:cNvPr id="6" name="Rectangle 5"/>
+          <p:cNvPr id="5" name="Rectangle 4"/>
           <p:cNvSpPr/>
           <p:nvPr/>
         </p:nvSpPr>
@@ -25234,7 +24395,7 @@
       </p:sp>
       <p:sp>
         <p:nvSpPr>
-          <p:cNvPr id="7" name="Rectangle 6"/>
+          <p:cNvPr id="6" name="Rectangle 5"/>
           <p:cNvSpPr/>
           <p:nvPr/>
         </p:nvSpPr>
@@ -25283,7 +24444,7 @@
       </p:sp>
       <p:sp>
         <p:nvSpPr>
-          <p:cNvPr id="8" name="TextBox 7"/>
+          <p:cNvPr id="7" name="TextBox 6"/>
           <p:cNvSpPr txBox="1"/>
           <p:nvPr/>
         </p:nvSpPr>
@@ -25325,7 +24486,7 @@
       </p:sp>
       <p:sp>
         <p:nvSpPr>
-          <p:cNvPr id="9" name="TextBox 8"/>
+          <p:cNvPr id="8" name="TextBox 7"/>
           <p:cNvSpPr txBox="1"/>
           <p:nvPr/>
         </p:nvSpPr>
@@ -25367,7 +24528,7 @@
       </p:sp>
       <p:graphicFrame>
         <p:nvGraphicFramePr>
-          <p:cNvPr id="10" name="Table 9"/>
+          <p:cNvPr id="9" name="Table 8"/>
           <p:cNvGraphicFramePr>
             <a:graphicFrameLocks noGrp="1"/>
           </p:cNvGraphicFramePr>
@@ -25944,7 +25105,7 @@
       </p:graphicFrame>
       <p:sp>
         <p:nvSpPr>
-          <p:cNvPr id="11" name="TextBox 10"/>
+          <p:cNvPr id="10" name="TextBox 9"/>
           <p:cNvSpPr txBox="1"/>
           <p:nvPr/>
         </p:nvSpPr>
@@ -25986,7 +25147,7 @@
       </p:sp>
       <p:graphicFrame>
         <p:nvGraphicFramePr>
-          <p:cNvPr id="12" name="Table 11"/>
+          <p:cNvPr id="11" name="Table 10"/>
           <p:cNvGraphicFramePr>
             <a:graphicFrameLocks noGrp="1"/>
           </p:cNvGraphicFramePr>
@@ -26563,7 +25724,7 @@
       </p:graphicFrame>
       <p:sp>
         <p:nvSpPr>
-          <p:cNvPr id="13" name="Rectangle 12"/>
+          <p:cNvPr id="12" name="Rectangle 11"/>
           <p:cNvSpPr/>
           <p:nvPr/>
         </p:nvSpPr>
@@ -26612,7 +25773,7 @@
       </p:sp>
       <p:sp>
         <p:nvSpPr>
-          <p:cNvPr id="14" name="TextBox 13"/>
+          <p:cNvPr id="13" name="TextBox 12"/>
           <p:cNvSpPr txBox="1"/>
           <p:nvPr/>
         </p:nvSpPr>
@@ -26654,7 +25815,7 @@
       </p:sp>
       <p:sp>
         <p:nvSpPr>
-          <p:cNvPr id="15" name="TextBox 14"/>
+          <p:cNvPr id="14" name="TextBox 13"/>
           <p:cNvSpPr txBox="1"/>
           <p:nvPr/>
         </p:nvSpPr>
@@ -26696,7 +25857,7 @@
       </p:sp>
       <p:sp>
         <p:nvSpPr>
-          <p:cNvPr id="16" name="TextBox 15"/>
+          <p:cNvPr id="15" name="TextBox 14"/>
           <p:cNvSpPr txBox="1"/>
           <p:nvPr/>
         </p:nvSpPr>
@@ -26811,48 +25972,6 @@
         </p:nvSpPr>
         <p:spPr>
           <a:xfrm>
-            <a:off x="5897880" y="310896"/>
-            <a:ext cx="4800600" cy="256032"/>
-          </a:xfrm>
-          <a:prstGeom prst="rect">
-            <a:avLst/>
-          </a:prstGeom>
-          <a:noFill/>
-        </p:spPr>
-        <p:txBody>
-          <a:bodyPr wrap="none" lIns="9144" rIns="9144" tIns="9144" bIns="9144" anchor="t">
-            <a:spAutoFit/>
-          </a:bodyPr>
-          <a:lstStyle/>
-          <a:p>
-            <a:pPr algn="r">
-              <a:spcAft>
-                <a:spcPts val="0"/>
-              </a:spcAft>
-              <a:defRPr sz="680" b="1">
-                <a:solidFill>
-                  <a:srgbClr val="4F6B00"/>
-                </a:solidFill>
-                <a:latin typeface="Inter"/>
-              </a:defRPr>
-            </a:pPr>
-            <a:r>
-              <a:rPr>
-                <a:latin typeface="Inter"/>
-              </a:rPr>
-              <a:t>Illustrative, Gradient Maintained — demo data, not the client's holdings or managers</a:t>
-            </a:r>
-          </a:p>
-        </p:txBody>
-      </p:sp>
-      <p:sp>
-        <p:nvSpPr>
-          <p:cNvPr id="4" name="TextBox 3"/>
-          <p:cNvSpPr txBox="1"/>
-          <p:nvPr/>
-        </p:nvSpPr>
-        <p:spPr>
-          <a:xfrm>
             <a:off x="640080" y="566928"/>
             <a:ext cx="10058400" cy="530352"/>
           </a:xfrm>
@@ -26889,7 +26008,7 @@
       </p:sp>
       <p:sp>
         <p:nvSpPr>
-          <p:cNvPr id="5" name="Rectangle 4"/>
+          <p:cNvPr id="4" name="Rectangle 3"/>
           <p:cNvSpPr/>
           <p:nvPr/>
         </p:nvSpPr>
@@ -26938,7 +26057,7 @@
       </p:sp>
       <p:sp>
         <p:nvSpPr>
-          <p:cNvPr id="6" name="Rectangle 5"/>
+          <p:cNvPr id="5" name="Rectangle 4"/>
           <p:cNvSpPr/>
           <p:nvPr/>
         </p:nvSpPr>
@@ -26987,7 +26106,7 @@
       </p:sp>
       <p:sp>
         <p:nvSpPr>
-          <p:cNvPr id="7" name="TextBox 6"/>
+          <p:cNvPr id="6" name="TextBox 5"/>
           <p:cNvSpPr txBox="1"/>
           <p:nvPr/>
         </p:nvSpPr>
@@ -27029,7 +26148,7 @@
       </p:sp>
       <p:graphicFrame>
         <p:nvGraphicFramePr>
-          <p:cNvPr id="8" name="Table 7"/>
+          <p:cNvPr id="7" name="Table 6"/>
           <p:cNvGraphicFramePr>
             <a:graphicFrameLocks noGrp="1"/>
           </p:cNvGraphicFramePr>
@@ -27178,7 +26297,7 @@
                         <a:rPr>
                           <a:latin typeface="Inter"/>
                         </a:rPr>
-                        <a:t>● available</a:t>
+                        <a:t>● Available</a:t>
                       </a:r>
                     </a:p>
                   </a:txBody>
@@ -27261,7 +26380,7 @@
                         <a:rPr>
                           <a:latin typeface="Inter"/>
                         </a:rPr>
-                        <a:t>● available</a:t>
+                        <a:t>● Available</a:t>
                       </a:r>
                     </a:p>
                   </a:txBody>
@@ -27344,7 +26463,7 @@
                         <a:rPr>
                           <a:latin typeface="Inter"/>
                         </a:rPr>
-                        <a:t>● available</a:t>
+                        <a:t>● Available</a:t>
                       </a:r>
                     </a:p>
                   </a:txBody>
@@ -27427,7 +26546,7 @@
                         <a:rPr>
                           <a:latin typeface="Inter"/>
                         </a:rPr>
-                        <a:t>● degraded</a:t>
+                        <a:t>● Incomplete</a:t>
                       </a:r>
                     </a:p>
                   </a:txBody>
@@ -27454,7 +26573,7 @@
                         <a:rPr>
                           <a:latin typeface="Inter"/>
                         </a:rPr>
-                        <a:t>Partial — 2 of 3 holdings assessed; one unknown grain; Draft — July 22, 2026 [S9]</a:t>
+                        <a:t>2 of 3 holdings assessed; one unknown grain; Draft — July 22, 2026 [S9]</a:t>
                       </a:r>
                     </a:p>
                   </a:txBody>
@@ -27510,7 +26629,7 @@
                         <a:rPr>
                           <a:latin typeface="Inter"/>
                         </a:rPr>
-                        <a:t>● available</a:t>
+                        <a:t>● Available</a:t>
                       </a:r>
                     </a:p>
                   </a:txBody>
@@ -27593,7 +26712,7 @@
                         <a:rPr>
                           <a:latin typeface="Inter"/>
                         </a:rPr>
-                        <a:t>● available</a:t>
+                        <a:t>● Available</a:t>
                       </a:r>
                     </a:p>
                   </a:txBody>
@@ -27676,7 +26795,7 @@
                         <a:rPr>
                           <a:latin typeface="Inter"/>
                         </a:rPr>
-                        <a:t>● degraded</a:t>
+                        <a:t>● Incomplete</a:t>
                       </a:r>
                     </a:p>
                   </a:txBody>
@@ -27759,7 +26878,7 @@
                         <a:rPr>
                           <a:latin typeface="Inter"/>
                         </a:rPr>
-                        <a:t>● degraded</a:t>
+                        <a:t>● Incomplete</a:t>
                       </a:r>
                     </a:p>
                   </a:txBody>
@@ -27842,7 +26961,7 @@
                         <a:rPr>
                           <a:latin typeface="Inter"/>
                         </a:rPr>
-                        <a:t>● unavailable</a:t>
+                        <a:t>● Not available</a:t>
                       </a:r>
                     </a:p>
                   </a:txBody>
@@ -27925,7 +27044,7 @@
                         <a:rPr>
                           <a:latin typeface="Inter"/>
                         </a:rPr>
-                        <a:t>● unavailable</a:t>
+                        <a:t>● Not available</a:t>
                       </a:r>
                     </a:p>
                   </a:txBody>
@@ -28008,7 +27127,7 @@
                         <a:rPr>
                           <a:latin typeface="Inter"/>
                         </a:rPr>
-                        <a:t>● unavailable</a:t>
+                        <a:t>● Not available</a:t>
                       </a:r>
                     </a:p>
                   </a:txBody>
@@ -28091,7 +27210,7 @@
                         <a:rPr>
                           <a:latin typeface="Inter"/>
                         </a:rPr>
-                        <a:t>● unavailable</a:t>
+                        <a:t>● Not available</a:t>
                       </a:r>
                     </a:p>
                   </a:txBody>
@@ -28174,7 +27293,7 @@
                         <a:rPr>
                           <a:latin typeface="Inter"/>
                         </a:rPr>
-                        <a:t>● unavailable</a:t>
+                        <a:t>● Not available</a:t>
                       </a:r>
                     </a:p>
                   </a:txBody>
@@ -28218,7 +27337,7 @@
       </p:graphicFrame>
       <p:sp>
         <p:nvSpPr>
-          <p:cNvPr id="9" name="Rectangle 8"/>
+          <p:cNvPr id="8" name="Rectangle 7"/>
           <p:cNvSpPr/>
           <p:nvPr/>
         </p:nvSpPr>
@@ -28267,7 +27386,7 @@
       </p:sp>
       <p:sp>
         <p:nvSpPr>
-          <p:cNvPr id="10" name="TextBox 9"/>
+          <p:cNvPr id="9" name="TextBox 8"/>
           <p:cNvSpPr txBox="1"/>
           <p:nvPr/>
         </p:nvSpPr>
@@ -28309,7 +27428,7 @@
       </p:sp>
       <p:sp>
         <p:nvSpPr>
-          <p:cNvPr id="11" name="TextBox 10"/>
+          <p:cNvPr id="10" name="TextBox 9"/>
           <p:cNvSpPr txBox="1"/>
           <p:nvPr/>
         </p:nvSpPr>
@@ -28351,7 +27470,7 @@
       </p:sp>
       <p:sp>
         <p:nvSpPr>
-          <p:cNvPr id="12" name="TextBox 11"/>
+          <p:cNvPr id="11" name="TextBox 10"/>
           <p:cNvSpPr txBox="1"/>
           <p:nvPr/>
         </p:nvSpPr>
@@ -28466,48 +27585,6 @@
         </p:nvSpPr>
         <p:spPr>
           <a:xfrm>
-            <a:off x="5897880" y="310896"/>
-            <a:ext cx="4800600" cy="256032"/>
-          </a:xfrm>
-          <a:prstGeom prst="rect">
-            <a:avLst/>
-          </a:prstGeom>
-          <a:noFill/>
-        </p:spPr>
-        <p:txBody>
-          <a:bodyPr wrap="none" lIns="9144" rIns="9144" tIns="9144" bIns="9144" anchor="t">
-            <a:spAutoFit/>
-          </a:bodyPr>
-          <a:lstStyle/>
-          <a:p>
-            <a:pPr algn="r">
-              <a:spcAft>
-                <a:spcPts val="0"/>
-              </a:spcAft>
-              <a:defRPr sz="680" b="1">
-                <a:solidFill>
-                  <a:srgbClr val="4F6B00"/>
-                </a:solidFill>
-                <a:latin typeface="Inter"/>
-              </a:defRPr>
-            </a:pPr>
-            <a:r>
-              <a:rPr>
-                <a:latin typeface="Inter"/>
-              </a:rPr>
-              <a:t>Illustrative, Gradient Maintained — demo data, not the client's holdings or managers</a:t>
-            </a:r>
-          </a:p>
-        </p:txBody>
-      </p:sp>
-      <p:sp>
-        <p:nvSpPr>
-          <p:cNvPr id="4" name="TextBox 3"/>
-          <p:cNvSpPr txBox="1"/>
-          <p:nvPr/>
-        </p:nvSpPr>
-        <p:spPr>
-          <a:xfrm>
             <a:off x="640080" y="566928"/>
             <a:ext cx="10058400" cy="530352"/>
           </a:xfrm>
@@ -28544,7 +27621,7 @@
       </p:sp>
       <p:sp>
         <p:nvSpPr>
-          <p:cNvPr id="5" name="Rectangle 4"/>
+          <p:cNvPr id="4" name="Rectangle 3"/>
           <p:cNvSpPr/>
           <p:nvPr/>
         </p:nvSpPr>
@@ -28593,7 +27670,7 @@
       </p:sp>
       <p:sp>
         <p:nvSpPr>
-          <p:cNvPr id="6" name="Rectangle 5"/>
+          <p:cNvPr id="5" name="Rectangle 4"/>
           <p:cNvSpPr/>
           <p:nvPr/>
         </p:nvSpPr>
@@ -28642,7 +27719,7 @@
       </p:sp>
       <p:sp>
         <p:nvSpPr>
-          <p:cNvPr id="7" name="TextBox 6"/>
+          <p:cNvPr id="6" name="TextBox 5"/>
           <p:cNvSpPr txBox="1"/>
           <p:nvPr/>
         </p:nvSpPr>
@@ -28684,7 +27761,7 @@
       </p:sp>
       <p:graphicFrame>
         <p:nvGraphicFramePr>
-          <p:cNvPr id="8" name="Table 7"/>
+          <p:cNvPr id="7" name="Table 6"/>
           <p:cNvGraphicFramePr>
             <a:graphicFrameLocks noGrp="1"/>
           </p:cNvGraphicFramePr>
@@ -28702,14 +27779,10 @@
               </a:tblPr>
               <a:tblGrid>
                 <a:gridCol w="2011680"/>
-                <a:gridCol w="1112139"/>
-                <a:gridCol w="1112139"/>
-                <a:gridCol w="1112139"/>
-                <a:gridCol w="1112139"/>
-                <a:gridCol w="1112139"/>
-                <a:gridCol w="1112139"/>
-                <a:gridCol w="1112139"/>
-                <a:gridCol w="1112139"/>
+                <a:gridCol w="2224278"/>
+                <a:gridCol w="2224278"/>
+                <a:gridCol w="2224278"/>
+                <a:gridCol w="2224278"/>
               </a:tblGrid>
               <a:tr h="469087">
                 <a:tc>
@@ -28783,7 +27856,7 @@
                         <a:rPr>
                           <a:latin typeface="Inter"/>
                         </a:rPr>
-                        <a:t>Basis</a:t>
+                        <a:t>Source</a:t>
                       </a:r>
                     </a:p>
                   </a:txBody>
@@ -28810,7 +27883,7 @@
                         <a:rPr>
                           <a:latin typeface="Inter"/>
                         </a:rPr>
-                        <a:t>Tool / view</a:t>
+                        <a:t>As of</a:t>
                       </a:r>
                     </a:p>
                   </a:txBody>
@@ -28837,115 +27910,7 @@
                         <a:rPr>
                           <a:latin typeface="Inter"/>
                         </a:rPr>
-                        <a:t>Key parameters</a:t>
-                      </a:r>
-                    </a:p>
-                  </a:txBody>
-                  <a:tcPr marL="54864" marR="54864" marT="27432" marB="27432" anchor="ctr">
-                    <a:solidFill>
-                      <a:srgbClr val="0D1117"/>
-                    </a:solidFill>
-                  </a:tcPr>
-                </a:tc>
-                <a:tc>
-                  <a:txBody>
-                    <a:bodyPr/>
-                    <a:lstStyle/>
-                    <a:p>
-                      <a:pPr>
-                        <a:defRPr sz="750" b="1">
-                          <a:solidFill>
-                            <a:srgbClr val="FFFFFF"/>
-                          </a:solidFill>
-                          <a:latin typeface="Inter"/>
-                        </a:defRPr>
-                      </a:pPr>
-                      <a:r>
-                        <a:rPr>
-                          <a:latin typeface="Inter"/>
-                        </a:rPr>
-                        <a:t>As of</a:t>
-                      </a:r>
-                    </a:p>
-                  </a:txBody>
-                  <a:tcPr marL="54864" marR="54864" marT="27432" marB="27432" anchor="ctr">
-                    <a:solidFill>
-                      <a:srgbClr val="0D1117"/>
-                    </a:solidFill>
-                  </a:tcPr>
-                </a:tc>
-                <a:tc>
-                  <a:txBody>
-                    <a:bodyPr/>
-                    <a:lstStyle/>
-                    <a:p>
-                      <a:pPr>
-                        <a:defRPr sz="750" b="1">
-                          <a:solidFill>
-                            <a:srgbClr val="FFFFFF"/>
-                          </a:solidFill>
-                          <a:latin typeface="Inter"/>
-                        </a:defRPr>
-                      </a:pPr>
-                      <a:r>
-                        <a:rPr>
-                          <a:latin typeface="Inter"/>
-                        </a:rPr>
-                        <a:t>Data scope</a:t>
-                      </a:r>
-                    </a:p>
-                  </a:txBody>
-                  <a:tcPr marL="54864" marR="54864" marT="27432" marB="27432" anchor="ctr">
-                    <a:solidFill>
-                      <a:srgbClr val="0D1117"/>
-                    </a:solidFill>
-                  </a:tcPr>
-                </a:tc>
-                <a:tc>
-                  <a:txBody>
-                    <a:bodyPr/>
-                    <a:lstStyle/>
-                    <a:p>
-                      <a:pPr>
-                        <a:defRPr sz="750" b="1">
-                          <a:solidFill>
-                            <a:srgbClr val="FFFFFF"/>
-                          </a:solidFill>
-                          <a:latin typeface="Inter"/>
-                        </a:defRPr>
-                      </a:pPr>
-                      <a:r>
-                        <a:rPr>
-                          <a:latin typeface="Inter"/>
-                        </a:rPr>
-                        <a:t>Validation</a:t>
-                      </a:r>
-                    </a:p>
-                  </a:txBody>
-                  <a:tcPr marL="54864" marR="54864" marT="27432" marB="27432" anchor="ctr">
-                    <a:solidFill>
-                      <a:srgbClr val="0D1117"/>
-                    </a:solidFill>
-                  </a:tcPr>
-                </a:tc>
-                <a:tc>
-                  <a:txBody>
-                    <a:bodyPr/>
-                    <a:lstStyle/>
-                    <a:p>
-                      <a:pPr>
-                        <a:defRPr sz="750" b="1">
-                          <a:solidFill>
-                            <a:srgbClr val="FFFFFF"/>
-                          </a:solidFill>
-                          <a:latin typeface="Inter"/>
-                        </a:defRPr>
-                      </a:pPr>
-                      <a:r>
-                        <a:rPr>
-                          <a:latin typeface="Inter"/>
-                        </a:rPr>
-                        <a:t>Digest</a:t>
+                        <a:t>Check</a:t>
                       </a:r>
                     </a:p>
                   </a:txBody>
@@ -28963,7 +27928,7 @@
                     <a:lstStyle/>
                     <a:p>
                       <a:pPr>
-                        <a:defRPr sz="650" b="1">
+                        <a:defRPr sz="720" b="1">
                           <a:solidFill>
                             <a:srgbClr val="0D1117"/>
                           </a:solidFill>
@@ -28990,7 +27955,7 @@
                     <a:lstStyle/>
                     <a:p>
                       <a:pPr>
-                        <a:defRPr sz="650" b="0">
+                        <a:defRPr sz="720" b="0">
                           <a:solidFill>
                             <a:srgbClr val="0D1117"/>
                           </a:solidFill>
@@ -29017,7 +27982,7 @@
                     <a:lstStyle/>
                     <a:p>
                       <a:pPr>
-                        <a:defRPr sz="650" b="0">
+                        <a:defRPr sz="720" b="0">
                           <a:solidFill>
                             <a:srgbClr val="0D1117"/>
                           </a:solidFill>
@@ -29028,7 +27993,7 @@
                         <a:rPr>
                           <a:latin typeface="Inter"/>
                         </a:rPr>
-                        <a:t>gradient_tool</a:t>
+                        <a:t>list_organizations; get_gradient_capabilities</a:t>
                       </a:r>
                     </a:p>
                   </a:txBody>
@@ -29044,7 +28009,7 @@
                     <a:lstStyle/>
                     <a:p>
                       <a:pPr>
-                        <a:defRPr sz="650" b="0">
+                        <a:defRPr sz="720" b="0">
                           <a:solidFill>
                             <a:srgbClr val="0D1117"/>
                           </a:solidFill>
@@ -29055,7 +28020,7 @@
                         <a:rPr>
                           <a:latin typeface="Inter"/>
                         </a:rPr>
-                        <a:t>list_organizations; get_gradient_capabilities</a:t>
+                        <a:t>2026-06-30</a:t>
                       </a:r>
                     </a:p>
                   </a:txBody>
@@ -29071,132 +28036,24 @@
                     <a:lstStyle/>
                     <a:p>
                       <a:pPr>
-                        <a:defRPr sz="650" b="0">
-                          <a:solidFill>
-                            <a:srgbClr val="0D1117"/>
-                          </a:solidFill>
-                          <a:latin typeface="Inter"/>
-                        </a:defRPr>
-                      </a:pPr>
-                      <a:r>
-                        <a:rPr>
-                          <a:latin typeface="Inter"/>
-                        </a:rPr>
-                        <a:t>org=test</a:t>
-                      </a:r>
-                    </a:p>
-                  </a:txBody>
-                  <a:tcPr marL="54864" marR="54864" marT="27432" marB="27432" anchor="ctr">
-                    <a:solidFill>
-                      <a:srgbClr val="FFFFFF"/>
-                    </a:solidFill>
-                  </a:tcPr>
-                </a:tc>
-                <a:tc>
-                  <a:txBody>
-                    <a:bodyPr/>
-                    <a:lstStyle/>
-                    <a:p>
-                      <a:pPr>
-                        <a:defRPr sz="650" b="0">
-                          <a:solidFill>
-                            <a:srgbClr val="0D1117"/>
-                          </a:solidFill>
-                          <a:latin typeface="Inter"/>
-                        </a:defRPr>
-                      </a:pPr>
-                      <a:r>
-                        <a:rPr>
-                          <a:latin typeface="Inter"/>
-                        </a:rPr>
-                        <a:t>2026-06-30</a:t>
-                      </a:r>
-                    </a:p>
-                  </a:txBody>
-                  <a:tcPr marL="54864" marR="54864" marT="27432" marB="27432" anchor="ctr">
-                    <a:solidFill>
-                      <a:srgbClr val="FFFFFF"/>
-                    </a:solidFill>
-                  </a:tcPr>
-                </a:tc>
-                <a:tc>
-                  <a:txBody>
-                    <a:bodyPr/>
-                    <a:lstStyle/>
-                    <a:p>
-                      <a:pPr>
-                        <a:defRPr sz="650" b="0">
-                          <a:solidFill>
-                            <a:srgbClr val="0D1117"/>
-                          </a:solidFill>
-                          <a:latin typeface="Inter"/>
-                        </a:defRPr>
-                      </a:pPr>
-                      <a:r>
-                        <a:rPr>
-                          <a:latin typeface="Inter"/>
-                        </a:rPr>
-                        <a:t>Illustrative sample data</a:t>
-                      </a:r>
-                    </a:p>
-                  </a:txBody>
-                  <a:tcPr marL="54864" marR="54864" marT="27432" marB="27432" anchor="ctr">
-                    <a:solidFill>
-                      <a:srgbClr val="FFFFFF"/>
-                    </a:solidFill>
-                  </a:tcPr>
-                </a:tc>
-                <a:tc>
-                  <a:txBody>
-                    <a:bodyPr/>
-                    <a:lstStyle/>
-                    <a:p>
-                      <a:pPr>
-                        <a:defRPr sz="650" b="0">
-                          <a:solidFill>
-                            <a:srgbClr val="0D1117"/>
-                          </a:solidFill>
-                          <a:latin typeface="Inter"/>
-                        </a:defRPr>
-                      </a:pPr>
-                      <a:r>
-                        <a:rPr>
-                          <a:latin typeface="Inter"/>
-                        </a:rPr>
-                        <a:t>passed</a:t>
-                      </a:r>
-                    </a:p>
-                  </a:txBody>
-                  <a:tcPr marL="54864" marR="54864" marT="27432" marB="27432" anchor="ctr">
-                    <a:solidFill>
-                      <a:srgbClr val="FFFFFF"/>
-                    </a:solidFill>
-                  </a:tcPr>
-                </a:tc>
-                <a:tc>
-                  <a:txBody>
-                    <a:bodyPr/>
-                    <a:lstStyle/>
-                    <a:p>
-                      <a:pPr>
-                        <a:defRPr sz="650" b="0">
-                          <a:solidFill>
-                            <a:srgbClr val="0D1117"/>
-                          </a:solidFill>
-                          <a:latin typeface="Inter"/>
-                        </a:defRPr>
-                      </a:pPr>
-                      <a:r>
-                        <a:rPr>
-                          <a:latin typeface="Inter"/>
-                        </a:rPr>
-                        <a:t>sha256:aaaaaaaaaaaaaaaaaaaaaaaaaaaaaaaaaaaaaaaaaaaaaaaaaaaaaaaaaaaaaaaa</a:t>
-                      </a:r>
-                    </a:p>
-                  </a:txBody>
-                  <a:tcPr marL="54864" marR="54864" marT="27432" marB="27432" anchor="ctr">
-                    <a:solidFill>
-                      <a:srgbClr val="FFFFFF"/>
+                        <a:defRPr sz="720" b="1">
+                          <a:solidFill>
+                            <a:srgbClr val="C6F432"/>
+                          </a:solidFill>
+                          <a:latin typeface="Inter"/>
+                        </a:defRPr>
+                      </a:pPr>
+                      <a:r>
+                        <a:rPr>
+                          <a:latin typeface="Inter"/>
+                        </a:rPr>
+                        <a:t>● Passed</a:t>
+                      </a:r>
+                    </a:p>
+                  </a:txBody>
+                  <a:tcPr marL="54864" marR="54864" marT="27432" marB="27432" anchor="ctr">
+                    <a:solidFill>
+                      <a:srgbClr val="F5F7F9"/>
                     </a:solidFill>
                   </a:tcPr>
                 </a:tc>
@@ -29208,7 +28065,7 @@
                     <a:lstStyle/>
                     <a:p>
                       <a:pPr>
-                        <a:defRPr sz="650" b="1">
+                        <a:defRPr sz="720" b="1">
                           <a:solidFill>
                             <a:srgbClr val="0D1117"/>
                           </a:solidFill>
@@ -29235,7 +28092,7 @@
                     <a:lstStyle/>
                     <a:p>
                       <a:pPr>
-                        <a:defRPr sz="650" b="0">
+                        <a:defRPr sz="720" b="0">
                           <a:solidFill>
                             <a:srgbClr val="0D1117"/>
                           </a:solidFill>
@@ -29262,7 +28119,7 @@
                     <a:lstStyle/>
                     <a:p>
                       <a:pPr>
-                        <a:defRPr sz="650" b="0">
+                        <a:defRPr sz="720" b="0">
                           <a:solidFill>
                             <a:srgbClr val="0D1117"/>
                           </a:solidFill>
@@ -29273,7 +28130,7 @@
                         <a:rPr>
                           <a:latin typeface="Inter"/>
                         </a:rPr>
-                        <a:t>gradient_tool</a:t>
+                        <a:t>list_portfolios; get_portfolio_structure</a:t>
                       </a:r>
                     </a:p>
                   </a:txBody>
@@ -29289,7 +28146,7 @@
                     <a:lstStyle/>
                     <a:p>
                       <a:pPr>
-                        <a:defRPr sz="650" b="0">
+                        <a:defRPr sz="720" b="0">
                           <a:solidFill>
                             <a:srgbClr val="0D1117"/>
                           </a:solidFill>
@@ -29300,7 +28157,7 @@
                         <a:rPr>
                           <a:latin typeface="Inter"/>
                         </a:rPr>
-                        <a:t>list_portfolios; get_portfolio_structure</a:t>
+                        <a:t>2026-06-30</a:t>
                       </a:r>
                     </a:p>
                   </a:txBody>
@@ -29316,126 +28173,18 @@
                     <a:lstStyle/>
                     <a:p>
                       <a:pPr>
-                        <a:defRPr sz="650" b="0">
-                          <a:solidFill>
-                            <a:srgbClr val="0D1117"/>
-                          </a:solidFill>
-                          <a:latin typeface="Inter"/>
-                        </a:defRPr>
-                      </a:pPr>
-                      <a:r>
-                        <a:rPr>
-                          <a:latin typeface="Inter"/>
-                        </a:rPr>
-                        <a:t>allocation_tree</a:t>
-                      </a:r>
-                    </a:p>
-                  </a:txBody>
-                  <a:tcPr marL="54864" marR="54864" marT="27432" marB="27432" anchor="ctr">
-                    <a:solidFill>
-                      <a:srgbClr val="F5F7F9"/>
-                    </a:solidFill>
-                  </a:tcPr>
-                </a:tc>
-                <a:tc>
-                  <a:txBody>
-                    <a:bodyPr/>
-                    <a:lstStyle/>
-                    <a:p>
-                      <a:pPr>
-                        <a:defRPr sz="650" b="0">
-                          <a:solidFill>
-                            <a:srgbClr val="0D1117"/>
-                          </a:solidFill>
-                          <a:latin typeface="Inter"/>
-                        </a:defRPr>
-                      </a:pPr>
-                      <a:r>
-                        <a:rPr>
-                          <a:latin typeface="Inter"/>
-                        </a:rPr>
-                        <a:t>2026-06-30</a:t>
-                      </a:r>
-                    </a:p>
-                  </a:txBody>
-                  <a:tcPr marL="54864" marR="54864" marT="27432" marB="27432" anchor="ctr">
-                    <a:solidFill>
-                      <a:srgbClr val="F5F7F9"/>
-                    </a:solidFill>
-                  </a:tcPr>
-                </a:tc>
-                <a:tc>
-                  <a:txBody>
-                    <a:bodyPr/>
-                    <a:lstStyle/>
-                    <a:p>
-                      <a:pPr>
-                        <a:defRPr sz="650" b="0">
-                          <a:solidFill>
-                            <a:srgbClr val="0D1117"/>
-                          </a:solidFill>
-                          <a:latin typeface="Inter"/>
-                        </a:defRPr>
-                      </a:pPr>
-                      <a:r>
-                        <a:rPr>
-                          <a:latin typeface="Inter"/>
-                        </a:rPr>
-                        <a:t>Illustrative sample data</a:t>
-                      </a:r>
-                    </a:p>
-                  </a:txBody>
-                  <a:tcPr marL="54864" marR="54864" marT="27432" marB="27432" anchor="ctr">
-                    <a:solidFill>
-                      <a:srgbClr val="F5F7F9"/>
-                    </a:solidFill>
-                  </a:tcPr>
-                </a:tc>
-                <a:tc>
-                  <a:txBody>
-                    <a:bodyPr/>
-                    <a:lstStyle/>
-                    <a:p>
-                      <a:pPr>
-                        <a:defRPr sz="650" b="0">
-                          <a:solidFill>
-                            <a:srgbClr val="0D1117"/>
-                          </a:solidFill>
-                          <a:latin typeface="Inter"/>
-                        </a:defRPr>
-                      </a:pPr>
-                      <a:r>
-                        <a:rPr>
-                          <a:latin typeface="Inter"/>
-                        </a:rPr>
-                        <a:t>passed</a:t>
-                      </a:r>
-                    </a:p>
-                  </a:txBody>
-                  <a:tcPr marL="54864" marR="54864" marT="27432" marB="27432" anchor="ctr">
-                    <a:solidFill>
-                      <a:srgbClr val="F5F7F9"/>
-                    </a:solidFill>
-                  </a:tcPr>
-                </a:tc>
-                <a:tc>
-                  <a:txBody>
-                    <a:bodyPr/>
-                    <a:lstStyle/>
-                    <a:p>
-                      <a:pPr>
-                        <a:defRPr sz="650" b="0">
-                          <a:solidFill>
-                            <a:srgbClr val="0D1117"/>
-                          </a:solidFill>
-                          <a:latin typeface="Inter"/>
-                        </a:defRPr>
-                      </a:pPr>
-                      <a:r>
-                        <a:rPr>
-                          <a:latin typeface="Inter"/>
-                        </a:rPr>
-                        <a:t>sha256:aaaaaaaaaaaaaaaaaaaaaaaaaaaaaaaaaaaaaaaaaaaaaaaaaaaaaaaaaaaaaaaa</a:t>
+                        <a:defRPr sz="720" b="1">
+                          <a:solidFill>
+                            <a:srgbClr val="C6F432"/>
+                          </a:solidFill>
+                          <a:latin typeface="Inter"/>
+                        </a:defRPr>
+                      </a:pPr>
+                      <a:r>
+                        <a:rPr>
+                          <a:latin typeface="Inter"/>
+                        </a:rPr>
+                        <a:t>● Passed</a:t>
                       </a:r>
                     </a:p>
                   </a:txBody>
@@ -29453,7 +28202,7 @@
                     <a:lstStyle/>
                     <a:p>
                       <a:pPr>
-                        <a:defRPr sz="650" b="1">
+                        <a:defRPr sz="720" b="1">
                           <a:solidFill>
                             <a:srgbClr val="0D1117"/>
                           </a:solidFill>
@@ -29480,7 +28229,7 @@
                     <a:lstStyle/>
                     <a:p>
                       <a:pPr>
-                        <a:defRPr sz="650" b="0">
+                        <a:defRPr sz="720" b="0">
                           <a:solidFill>
                             <a:srgbClr val="0D1117"/>
                           </a:solidFill>
@@ -29507,7 +28256,7 @@
                     <a:lstStyle/>
                     <a:p>
                       <a:pPr>
-                        <a:defRPr sz="650" b="0">
+                        <a:defRPr sz="720" b="0">
                           <a:solidFill>
                             <a:srgbClr val="0D1117"/>
                           </a:solidFill>
@@ -29518,7 +28267,7 @@
                         <a:rPr>
                           <a:latin typeface="Inter"/>
                         </a:rPr>
-                        <a:t>gradient_tool</a:t>
+                        <a:t>check_portfolio_policy</a:t>
                       </a:r>
                     </a:p>
                   </a:txBody>
@@ -29534,7 +28283,7 @@
                     <a:lstStyle/>
                     <a:p>
                       <a:pPr>
-                        <a:defRPr sz="650" b="0">
+                        <a:defRPr sz="720" b="0">
                           <a:solidFill>
                             <a:srgbClr val="0D1117"/>
                           </a:solidFill>
@@ -29545,7 +28294,7 @@
                         <a:rPr>
                           <a:latin typeface="Inter"/>
                         </a:rPr>
-                        <a:t>check_portfolio_policy</a:t>
+                        <a:t>2026-06-30</a:t>
                       </a:r>
                     </a:p>
                   </a:txBody>
@@ -29561,132 +28310,24 @@
                     <a:lstStyle/>
                     <a:p>
                       <a:pPr>
-                        <a:defRPr sz="650" b="0">
-                          <a:solidFill>
-                            <a:srgbClr val="0D1117"/>
-                          </a:solidFill>
-                          <a:latin typeface="Inter"/>
-                        </a:defRPr>
-                      </a:pPr>
-                      <a:r>
-                        <a:rPr>
-                          <a:latin typeface="Inter"/>
-                        </a:rPr>
-                        <a:t>portfolio=test</a:t>
-                      </a:r>
-                    </a:p>
-                  </a:txBody>
-                  <a:tcPr marL="54864" marR="54864" marT="27432" marB="27432" anchor="ctr">
-                    <a:solidFill>
-                      <a:srgbClr val="FFFFFF"/>
-                    </a:solidFill>
-                  </a:tcPr>
-                </a:tc>
-                <a:tc>
-                  <a:txBody>
-                    <a:bodyPr/>
-                    <a:lstStyle/>
-                    <a:p>
-                      <a:pPr>
-                        <a:defRPr sz="650" b="0">
-                          <a:solidFill>
-                            <a:srgbClr val="0D1117"/>
-                          </a:solidFill>
-                          <a:latin typeface="Inter"/>
-                        </a:defRPr>
-                      </a:pPr>
-                      <a:r>
-                        <a:rPr>
-                          <a:latin typeface="Inter"/>
-                        </a:rPr>
-                        <a:t>2026-06-30</a:t>
-                      </a:r>
-                    </a:p>
-                  </a:txBody>
-                  <a:tcPr marL="54864" marR="54864" marT="27432" marB="27432" anchor="ctr">
-                    <a:solidFill>
-                      <a:srgbClr val="FFFFFF"/>
-                    </a:solidFill>
-                  </a:tcPr>
-                </a:tc>
-                <a:tc>
-                  <a:txBody>
-                    <a:bodyPr/>
-                    <a:lstStyle/>
-                    <a:p>
-                      <a:pPr>
-                        <a:defRPr sz="650" b="0">
-                          <a:solidFill>
-                            <a:srgbClr val="0D1117"/>
-                          </a:solidFill>
-                          <a:latin typeface="Inter"/>
-                        </a:defRPr>
-                      </a:pPr>
-                      <a:r>
-                        <a:rPr>
-                          <a:latin typeface="Inter"/>
-                        </a:rPr>
-                        <a:t>Illustrative sample data</a:t>
-                      </a:r>
-                    </a:p>
-                  </a:txBody>
-                  <a:tcPr marL="54864" marR="54864" marT="27432" marB="27432" anchor="ctr">
-                    <a:solidFill>
-                      <a:srgbClr val="FFFFFF"/>
-                    </a:solidFill>
-                  </a:tcPr>
-                </a:tc>
-                <a:tc>
-                  <a:txBody>
-                    <a:bodyPr/>
-                    <a:lstStyle/>
-                    <a:p>
-                      <a:pPr>
-                        <a:defRPr sz="650" b="0">
-                          <a:solidFill>
-                            <a:srgbClr val="0D1117"/>
-                          </a:solidFill>
-                          <a:latin typeface="Inter"/>
-                        </a:defRPr>
-                      </a:pPr>
-                      <a:r>
-                        <a:rPr>
-                          <a:latin typeface="Inter"/>
-                        </a:rPr>
-                        <a:t>passed</a:t>
-                      </a:r>
-                    </a:p>
-                  </a:txBody>
-                  <a:tcPr marL="54864" marR="54864" marT="27432" marB="27432" anchor="ctr">
-                    <a:solidFill>
-                      <a:srgbClr val="FFFFFF"/>
-                    </a:solidFill>
-                  </a:tcPr>
-                </a:tc>
-                <a:tc>
-                  <a:txBody>
-                    <a:bodyPr/>
-                    <a:lstStyle/>
-                    <a:p>
-                      <a:pPr>
-                        <a:defRPr sz="650" b="0">
-                          <a:solidFill>
-                            <a:srgbClr val="0D1117"/>
-                          </a:solidFill>
-                          <a:latin typeface="Inter"/>
-                        </a:defRPr>
-                      </a:pPr>
-                      <a:r>
-                        <a:rPr>
-                          <a:latin typeface="Inter"/>
-                        </a:rPr>
-                        <a:t>sha256:aaaaaaaaaaaaaaaaaaaaaaaaaaaaaaaaaaaaaaaaaaaaaaaaaaaaaaaaaaaaaaaa</a:t>
-                      </a:r>
-                    </a:p>
-                  </a:txBody>
-                  <a:tcPr marL="54864" marR="54864" marT="27432" marB="27432" anchor="ctr">
-                    <a:solidFill>
-                      <a:srgbClr val="FFFFFF"/>
+                        <a:defRPr sz="720" b="1">
+                          <a:solidFill>
+                            <a:srgbClr val="C6F432"/>
+                          </a:solidFill>
+                          <a:latin typeface="Inter"/>
+                        </a:defRPr>
+                      </a:pPr>
+                      <a:r>
+                        <a:rPr>
+                          <a:latin typeface="Inter"/>
+                        </a:rPr>
+                        <a:t>● Passed</a:t>
+                      </a:r>
+                    </a:p>
+                  </a:txBody>
+                  <a:tcPr marL="54864" marR="54864" marT="27432" marB="27432" anchor="ctr">
+                    <a:solidFill>
+                      <a:srgbClr val="F5F7F9"/>
                     </a:solidFill>
                   </a:tcPr>
                 </a:tc>
@@ -29698,7 +28339,7 @@
                     <a:lstStyle/>
                     <a:p>
                       <a:pPr>
-                        <a:defRPr sz="650" b="1">
+                        <a:defRPr sz="720" b="1">
                           <a:solidFill>
                             <a:srgbClr val="0D1117"/>
                           </a:solidFill>
@@ -29725,7 +28366,7 @@
                     <a:lstStyle/>
                     <a:p>
                       <a:pPr>
-                        <a:defRPr sz="650" b="0">
+                        <a:defRPr sz="720" b="0">
                           <a:solidFill>
                             <a:srgbClr val="0D1117"/>
                           </a:solidFill>
@@ -29752,7 +28393,7 @@
                     <a:lstStyle/>
                     <a:p>
                       <a:pPr>
-                        <a:defRPr sz="650" b="0">
+                        <a:defRPr sz="720" b="0">
                           <a:solidFill>
                             <a:srgbClr val="0D1117"/>
                           </a:solidFill>
@@ -29763,7 +28404,7 @@
                         <a:rPr>
                           <a:latin typeface="Inter"/>
                         </a:rPr>
-                        <a:t>gradient_tool</a:t>
+                        <a:t>get_portfolio_exposure</a:t>
                       </a:r>
                     </a:p>
                   </a:txBody>
@@ -29779,7 +28420,7 @@
                     <a:lstStyle/>
                     <a:p>
                       <a:pPr>
-                        <a:defRPr sz="650" b="0">
+                        <a:defRPr sz="720" b="0">
                           <a:solidFill>
                             <a:srgbClr val="0D1117"/>
                           </a:solidFill>
@@ -29790,7 +28431,7 @@
                         <a:rPr>
                           <a:latin typeface="Inter"/>
                         </a:rPr>
-                        <a:t>get_portfolio_exposure</a:t>
+                        <a:t>2026-03-31</a:t>
                       </a:r>
                     </a:p>
                   </a:txBody>
@@ -29806,126 +28447,18 @@
                     <a:lstStyle/>
                     <a:p>
                       <a:pPr>
-                        <a:defRPr sz="650" b="0">
-                          <a:solidFill>
-                            <a:srgbClr val="0D1117"/>
-                          </a:solidFill>
-                          <a:latin typeface="Inter"/>
-                        </a:defRPr>
-                      </a:pPr>
-                      <a:r>
-                        <a:rPr>
-                          <a:latin typeface="Inter"/>
-                        </a:rPr>
-                        <a:t>all pages</a:t>
-                      </a:r>
-                    </a:p>
-                  </a:txBody>
-                  <a:tcPr marL="54864" marR="54864" marT="27432" marB="27432" anchor="ctr">
-                    <a:solidFill>
-                      <a:srgbClr val="F5F7F9"/>
-                    </a:solidFill>
-                  </a:tcPr>
-                </a:tc>
-                <a:tc>
-                  <a:txBody>
-                    <a:bodyPr/>
-                    <a:lstStyle/>
-                    <a:p>
-                      <a:pPr>
-                        <a:defRPr sz="650" b="0">
-                          <a:solidFill>
-                            <a:srgbClr val="0D1117"/>
-                          </a:solidFill>
-                          <a:latin typeface="Inter"/>
-                        </a:defRPr>
-                      </a:pPr>
-                      <a:r>
-                        <a:rPr>
-                          <a:latin typeface="Inter"/>
-                        </a:rPr>
-                        <a:t>2026-03-31</a:t>
-                      </a:r>
-                    </a:p>
-                  </a:txBody>
-                  <a:tcPr marL="54864" marR="54864" marT="27432" marB="27432" anchor="ctr">
-                    <a:solidFill>
-                      <a:srgbClr val="F5F7F9"/>
-                    </a:solidFill>
-                  </a:tcPr>
-                </a:tc>
-                <a:tc>
-                  <a:txBody>
-                    <a:bodyPr/>
-                    <a:lstStyle/>
-                    <a:p>
-                      <a:pPr>
-                        <a:defRPr sz="650" b="0">
-                          <a:solidFill>
-                            <a:srgbClr val="0D1117"/>
-                          </a:solidFill>
-                          <a:latin typeface="Inter"/>
-                        </a:defRPr>
-                      </a:pPr>
-                      <a:r>
-                        <a:rPr>
-                          <a:latin typeface="Inter"/>
-                        </a:rPr>
-                        <a:t>Illustrative sample data</a:t>
-                      </a:r>
-                    </a:p>
-                  </a:txBody>
-                  <a:tcPr marL="54864" marR="54864" marT="27432" marB="27432" anchor="ctr">
-                    <a:solidFill>
-                      <a:srgbClr val="F5F7F9"/>
-                    </a:solidFill>
-                  </a:tcPr>
-                </a:tc>
-                <a:tc>
-                  <a:txBody>
-                    <a:bodyPr/>
-                    <a:lstStyle/>
-                    <a:p>
-                      <a:pPr>
-                        <a:defRPr sz="650" b="0">
-                          <a:solidFill>
-                            <a:srgbClr val="0D1117"/>
-                          </a:solidFill>
-                          <a:latin typeface="Inter"/>
-                        </a:defRPr>
-                      </a:pPr>
-                      <a:r>
-                        <a:rPr>
-                          <a:latin typeface="Inter"/>
-                        </a:rPr>
-                        <a:t>passed</a:t>
-                      </a:r>
-                    </a:p>
-                  </a:txBody>
-                  <a:tcPr marL="54864" marR="54864" marT="27432" marB="27432" anchor="ctr">
-                    <a:solidFill>
-                      <a:srgbClr val="F5F7F9"/>
-                    </a:solidFill>
-                  </a:tcPr>
-                </a:tc>
-                <a:tc>
-                  <a:txBody>
-                    <a:bodyPr/>
-                    <a:lstStyle/>
-                    <a:p>
-                      <a:pPr>
-                        <a:defRPr sz="650" b="0">
-                          <a:solidFill>
-                            <a:srgbClr val="0D1117"/>
-                          </a:solidFill>
-                          <a:latin typeface="Inter"/>
-                        </a:defRPr>
-                      </a:pPr>
-                      <a:r>
-                        <a:rPr>
-                          <a:latin typeface="Inter"/>
-                        </a:rPr>
-                        <a:t>sha256:aaaaaaaaaaaaaaaaaaaaaaaaaaaaaaaaaaaaaaaaaaaaaaaaaaaaaaaaaaaaaaaa</a:t>
+                        <a:defRPr sz="720" b="1">
+                          <a:solidFill>
+                            <a:srgbClr val="C6F432"/>
+                          </a:solidFill>
+                          <a:latin typeface="Inter"/>
+                        </a:defRPr>
+                      </a:pPr>
+                      <a:r>
+                        <a:rPr>
+                          <a:latin typeface="Inter"/>
+                        </a:rPr>
+                        <a:t>● Passed</a:t>
                       </a:r>
                     </a:p>
                   </a:txBody>
@@ -29943,7 +28476,7 @@
                     <a:lstStyle/>
                     <a:p>
                       <a:pPr>
-                        <a:defRPr sz="650" b="1">
+                        <a:defRPr sz="720" b="1">
                           <a:solidFill>
                             <a:srgbClr val="0D1117"/>
                           </a:solidFill>
@@ -29970,7 +28503,7 @@
                     <a:lstStyle/>
                     <a:p>
                       <a:pPr>
-                        <a:defRPr sz="650" b="0">
+                        <a:defRPr sz="720" b="0">
                           <a:solidFill>
                             <a:srgbClr val="0D1117"/>
                           </a:solidFill>
@@ -29997,7 +28530,7 @@
                     <a:lstStyle/>
                     <a:p>
                       <a:pPr>
-                        <a:defRPr sz="650" b="0">
+                        <a:defRPr sz="720" b="0">
                           <a:solidFill>
                             <a:srgbClr val="0D1117"/>
                           </a:solidFill>
@@ -30008,7 +28541,7 @@
                         <a:rPr>
                           <a:latin typeface="Inter"/>
                         </a:rPr>
-                        <a:t>gradient_tool</a:t>
+                        <a:t>get_capital_market_assumptions</a:t>
                       </a:r>
                     </a:p>
                   </a:txBody>
@@ -30024,7 +28557,7 @@
                     <a:lstStyle/>
                     <a:p>
                       <a:pPr>
-                        <a:defRPr sz="650" b="0">
+                        <a:defRPr sz="720" b="0">
                           <a:solidFill>
                             <a:srgbClr val="0D1117"/>
                           </a:solidFill>
@@ -30035,7 +28568,7 @@
                         <a:rPr>
                           <a:latin typeface="Inter"/>
                         </a:rPr>
-                        <a:t>get_capital_market_assumptions</a:t>
+                        <a:t>2026-06-15</a:t>
                       </a:r>
                     </a:p>
                   </a:txBody>
@@ -30051,132 +28584,24 @@
                     <a:lstStyle/>
                     <a:p>
                       <a:pPr>
-                        <a:defRPr sz="650" b="0">
-                          <a:solidFill>
-                            <a:srgbClr val="0D1117"/>
-                          </a:solidFill>
-                          <a:latin typeface="Inter"/>
-                        </a:defRPr>
-                      </a:pPr>
-                      <a:r>
-                        <a:rPr>
-                          <a:latin typeface="Inter"/>
-                        </a:rPr>
-                        <a:t>baseline</a:t>
-                      </a:r>
-                    </a:p>
-                  </a:txBody>
-                  <a:tcPr marL="54864" marR="54864" marT="27432" marB="27432" anchor="ctr">
-                    <a:solidFill>
-                      <a:srgbClr val="FFFFFF"/>
-                    </a:solidFill>
-                  </a:tcPr>
-                </a:tc>
-                <a:tc>
-                  <a:txBody>
-                    <a:bodyPr/>
-                    <a:lstStyle/>
-                    <a:p>
-                      <a:pPr>
-                        <a:defRPr sz="650" b="0">
-                          <a:solidFill>
-                            <a:srgbClr val="0D1117"/>
-                          </a:solidFill>
-                          <a:latin typeface="Inter"/>
-                        </a:defRPr>
-                      </a:pPr>
-                      <a:r>
-                        <a:rPr>
-                          <a:latin typeface="Inter"/>
-                        </a:rPr>
-                        <a:t>2026-06-15</a:t>
-                      </a:r>
-                    </a:p>
-                  </a:txBody>
-                  <a:tcPr marL="54864" marR="54864" marT="27432" marB="27432" anchor="ctr">
-                    <a:solidFill>
-                      <a:srgbClr val="FFFFFF"/>
-                    </a:solidFill>
-                  </a:tcPr>
-                </a:tc>
-                <a:tc>
-                  <a:txBody>
-                    <a:bodyPr/>
-                    <a:lstStyle/>
-                    <a:p>
-                      <a:pPr>
-                        <a:defRPr sz="650" b="0">
-                          <a:solidFill>
-                            <a:srgbClr val="0D1117"/>
-                          </a:solidFill>
-                          <a:latin typeface="Inter"/>
-                        </a:defRPr>
-                      </a:pPr>
-                      <a:r>
-                        <a:rPr>
-                          <a:latin typeface="Inter"/>
-                        </a:rPr>
-                        <a:t>Illustrative sample data</a:t>
-                      </a:r>
-                    </a:p>
-                  </a:txBody>
-                  <a:tcPr marL="54864" marR="54864" marT="27432" marB="27432" anchor="ctr">
-                    <a:solidFill>
-                      <a:srgbClr val="FFFFFF"/>
-                    </a:solidFill>
-                  </a:tcPr>
-                </a:tc>
-                <a:tc>
-                  <a:txBody>
-                    <a:bodyPr/>
-                    <a:lstStyle/>
-                    <a:p>
-                      <a:pPr>
-                        <a:defRPr sz="650" b="0">
-                          <a:solidFill>
-                            <a:srgbClr val="0D1117"/>
-                          </a:solidFill>
-                          <a:latin typeface="Inter"/>
-                        </a:defRPr>
-                      </a:pPr>
-                      <a:r>
-                        <a:rPr>
-                          <a:latin typeface="Inter"/>
-                        </a:rPr>
-                        <a:t>passed</a:t>
-                      </a:r>
-                    </a:p>
-                  </a:txBody>
-                  <a:tcPr marL="54864" marR="54864" marT="27432" marB="27432" anchor="ctr">
-                    <a:solidFill>
-                      <a:srgbClr val="FFFFFF"/>
-                    </a:solidFill>
-                  </a:tcPr>
-                </a:tc>
-                <a:tc>
-                  <a:txBody>
-                    <a:bodyPr/>
-                    <a:lstStyle/>
-                    <a:p>
-                      <a:pPr>
-                        <a:defRPr sz="650" b="0">
-                          <a:solidFill>
-                            <a:srgbClr val="0D1117"/>
-                          </a:solidFill>
-                          <a:latin typeface="Inter"/>
-                        </a:defRPr>
-                      </a:pPr>
-                      <a:r>
-                        <a:rPr>
-                          <a:latin typeface="Inter"/>
-                        </a:rPr>
-                        <a:t>sha256:aaaaaaaaaaaaaaaaaaaaaaaaaaaaaaaaaaaaaaaaaaaaaaaaaaaaaaaaaaaaaaaa</a:t>
-                      </a:r>
-                    </a:p>
-                  </a:txBody>
-                  <a:tcPr marL="54864" marR="54864" marT="27432" marB="27432" anchor="ctr">
-                    <a:solidFill>
-                      <a:srgbClr val="FFFFFF"/>
+                        <a:defRPr sz="720" b="1">
+                          <a:solidFill>
+                            <a:srgbClr val="C6F432"/>
+                          </a:solidFill>
+                          <a:latin typeface="Inter"/>
+                        </a:defRPr>
+                      </a:pPr>
+                      <a:r>
+                        <a:rPr>
+                          <a:latin typeface="Inter"/>
+                        </a:rPr>
+                        <a:t>● Passed</a:t>
+                      </a:r>
+                    </a:p>
+                  </a:txBody>
+                  <a:tcPr marL="54864" marR="54864" marT="27432" marB="27432" anchor="ctr">
+                    <a:solidFill>
+                      <a:srgbClr val="F5F7F9"/>
                     </a:solidFill>
                   </a:tcPr>
                 </a:tc>
@@ -30188,7 +28613,7 @@
                     <a:lstStyle/>
                     <a:p>
                       <a:pPr>
-                        <a:defRPr sz="650" b="1">
+                        <a:defRPr sz="720" b="1">
                           <a:solidFill>
                             <a:srgbClr val="0D1117"/>
                           </a:solidFill>
@@ -30215,7 +28640,7 @@
                     <a:lstStyle/>
                     <a:p>
                       <a:pPr>
-                        <a:defRPr sz="650" b="0">
+                        <a:defRPr sz="720" b="0">
                           <a:solidFill>
                             <a:srgbClr val="0D1117"/>
                           </a:solidFill>
@@ -30242,7 +28667,7 @@
                     <a:lstStyle/>
                     <a:p>
                       <a:pPr>
-                        <a:defRPr sz="650" b="0">
+                        <a:defRPr sz="720" b="0">
                           <a:solidFill>
                             <a:srgbClr val="0D1117"/>
                           </a:solidFill>
@@ -30253,7 +28678,7 @@
                         <a:rPr>
                           <a:latin typeface="Inter"/>
                         </a:rPr>
-                        <a:t>gradient_tool</a:t>
+                        <a:t>get_portfolio_exposure</a:t>
                       </a:r>
                     </a:p>
                   </a:txBody>
@@ -30269,7 +28694,7 @@
                     <a:lstStyle/>
                     <a:p>
                       <a:pPr>
-                        <a:defRPr sz="650" b="0">
+                        <a:defRPr sz="720" b="0">
                           <a:solidFill>
                             <a:srgbClr val="0D1117"/>
                           </a:solidFill>
@@ -30280,7 +28705,7 @@
                         <a:rPr>
                           <a:latin typeface="Inter"/>
                         </a:rPr>
-                        <a:t>get_portfolio_exposure</a:t>
+                        <a:t>2026-06-30</a:t>
                       </a:r>
                     </a:p>
                   </a:txBody>
@@ -30296,126 +28721,18 @@
                     <a:lstStyle/>
                     <a:p>
                       <a:pPr>
-                        <a:defRPr sz="650" b="0">
-                          <a:solidFill>
-                            <a:srgbClr val="0D1117"/>
-                          </a:solidFill>
-                          <a:latin typeface="Inter"/>
-                        </a:defRPr>
-                      </a:pPr>
-                      <a:r>
-                        <a:rPr>
-                          <a:latin typeface="Inter"/>
-                        </a:rPr>
-                        <a:t>commitments</a:t>
-                      </a:r>
-                    </a:p>
-                  </a:txBody>
-                  <a:tcPr marL="54864" marR="54864" marT="27432" marB="27432" anchor="ctr">
-                    <a:solidFill>
-                      <a:srgbClr val="F5F7F9"/>
-                    </a:solidFill>
-                  </a:tcPr>
-                </a:tc>
-                <a:tc>
-                  <a:txBody>
-                    <a:bodyPr/>
-                    <a:lstStyle/>
-                    <a:p>
-                      <a:pPr>
-                        <a:defRPr sz="650" b="0">
-                          <a:solidFill>
-                            <a:srgbClr val="0D1117"/>
-                          </a:solidFill>
-                          <a:latin typeface="Inter"/>
-                        </a:defRPr>
-                      </a:pPr>
-                      <a:r>
-                        <a:rPr>
-                          <a:latin typeface="Inter"/>
-                        </a:rPr>
-                        <a:t>2026-06-30</a:t>
-                      </a:r>
-                    </a:p>
-                  </a:txBody>
-                  <a:tcPr marL="54864" marR="54864" marT="27432" marB="27432" anchor="ctr">
-                    <a:solidFill>
-                      <a:srgbClr val="F5F7F9"/>
-                    </a:solidFill>
-                  </a:tcPr>
-                </a:tc>
-                <a:tc>
-                  <a:txBody>
-                    <a:bodyPr/>
-                    <a:lstStyle/>
-                    <a:p>
-                      <a:pPr>
-                        <a:defRPr sz="650" b="0">
-                          <a:solidFill>
-                            <a:srgbClr val="0D1117"/>
-                          </a:solidFill>
-                          <a:latin typeface="Inter"/>
-                        </a:defRPr>
-                      </a:pPr>
-                      <a:r>
-                        <a:rPr>
-                          <a:latin typeface="Inter"/>
-                        </a:rPr>
-                        <a:t>Illustrative sample data</a:t>
-                      </a:r>
-                    </a:p>
-                  </a:txBody>
-                  <a:tcPr marL="54864" marR="54864" marT="27432" marB="27432" anchor="ctr">
-                    <a:solidFill>
-                      <a:srgbClr val="F5F7F9"/>
-                    </a:solidFill>
-                  </a:tcPr>
-                </a:tc>
-                <a:tc>
-                  <a:txBody>
-                    <a:bodyPr/>
-                    <a:lstStyle/>
-                    <a:p>
-                      <a:pPr>
-                        <a:defRPr sz="650" b="0">
-                          <a:solidFill>
-                            <a:srgbClr val="0D1117"/>
-                          </a:solidFill>
-                          <a:latin typeface="Inter"/>
-                        </a:defRPr>
-                      </a:pPr>
-                      <a:r>
-                        <a:rPr>
-                          <a:latin typeface="Inter"/>
-                        </a:rPr>
-                        <a:t>passed</a:t>
-                      </a:r>
-                    </a:p>
-                  </a:txBody>
-                  <a:tcPr marL="54864" marR="54864" marT="27432" marB="27432" anchor="ctr">
-                    <a:solidFill>
-                      <a:srgbClr val="F5F7F9"/>
-                    </a:solidFill>
-                  </a:tcPr>
-                </a:tc>
-                <a:tc>
-                  <a:txBody>
-                    <a:bodyPr/>
-                    <a:lstStyle/>
-                    <a:p>
-                      <a:pPr>
-                        <a:defRPr sz="650" b="0">
-                          <a:solidFill>
-                            <a:srgbClr val="0D1117"/>
-                          </a:solidFill>
-                          <a:latin typeface="Inter"/>
-                        </a:defRPr>
-                      </a:pPr>
-                      <a:r>
-                        <a:rPr>
-                          <a:latin typeface="Inter"/>
-                        </a:rPr>
-                        <a:t>sha256:aaaaaaaaaaaaaaaaaaaaaaaaaaaaaaaaaaaaaaaaaaaaaaaaaaaaaaaaaaaaaaaa</a:t>
+                        <a:defRPr sz="720" b="1">
+                          <a:solidFill>
+                            <a:srgbClr val="C6F432"/>
+                          </a:solidFill>
+                          <a:latin typeface="Inter"/>
+                        </a:defRPr>
+                      </a:pPr>
+                      <a:r>
+                        <a:rPr>
+                          <a:latin typeface="Inter"/>
+                        </a:rPr>
+                        <a:t>● Passed</a:t>
                       </a:r>
                     </a:p>
                   </a:txBody>
@@ -30433,7 +28750,7 @@
                     <a:lstStyle/>
                     <a:p>
                       <a:pPr>
-                        <a:defRPr sz="650" b="1">
+                        <a:defRPr sz="720" b="1">
                           <a:solidFill>
                             <a:srgbClr val="0D1117"/>
                           </a:solidFill>
@@ -30460,7 +28777,7 @@
                     <a:lstStyle/>
                     <a:p>
                       <a:pPr>
-                        <a:defRPr sz="650" b="0">
+                        <a:defRPr sz="720" b="0">
                           <a:solidFill>
                             <a:srgbClr val="0D1117"/>
                           </a:solidFill>
@@ -30487,7 +28804,7 @@
                     <a:lstStyle/>
                     <a:p>
                       <a:pPr>
-                        <a:defRPr sz="650" b="0">
+                        <a:defRPr sz="720" b="0">
                           <a:solidFill>
                             <a:srgbClr val="0D1117"/>
                           </a:solidFill>
@@ -30498,7 +28815,7 @@
                         <a:rPr>
                           <a:latin typeface="Inter"/>
                         </a:rPr>
-                        <a:t>gradient_tool</a:t>
+                        <a:t>get_gradient_capabilities</a:t>
                       </a:r>
                     </a:p>
                   </a:txBody>
@@ -30514,7 +28831,7 @@
                     <a:lstStyle/>
                     <a:p>
                       <a:pPr>
-                        <a:defRPr sz="650" b="0">
+                        <a:defRPr sz="720" b="0">
                           <a:solidFill>
                             <a:srgbClr val="0D1117"/>
                           </a:solidFill>
@@ -30525,7 +28842,7 @@
                         <a:rPr>
                           <a:latin typeface="Inter"/>
                         </a:rPr>
-                        <a:t>get_gradient_capabilities</a:t>
+                        <a:t>2026-06-30</a:t>
                       </a:r>
                     </a:p>
                   </a:txBody>
@@ -30541,132 +28858,24 @@
                     <a:lstStyle/>
                     <a:p>
                       <a:pPr>
-                        <a:defRPr sz="650" b="0">
-                          <a:solidFill>
-                            <a:srgbClr val="0D1117"/>
-                          </a:solidFill>
-                          <a:latin typeface="Inter"/>
-                        </a:defRPr>
-                      </a:pPr>
-                      <a:r>
-                        <a:rPr>
-                          <a:latin typeface="Inter"/>
-                        </a:rPr>
-                        <a:t>illustrative</a:t>
-                      </a:r>
-                    </a:p>
-                  </a:txBody>
-                  <a:tcPr marL="54864" marR="54864" marT="27432" marB="27432" anchor="ctr">
-                    <a:solidFill>
-                      <a:srgbClr val="FFFFFF"/>
-                    </a:solidFill>
-                  </a:tcPr>
-                </a:tc>
-                <a:tc>
-                  <a:txBody>
-                    <a:bodyPr/>
-                    <a:lstStyle/>
-                    <a:p>
-                      <a:pPr>
-                        <a:defRPr sz="650" b="0">
-                          <a:solidFill>
-                            <a:srgbClr val="0D1117"/>
-                          </a:solidFill>
-                          <a:latin typeface="Inter"/>
-                        </a:defRPr>
-                      </a:pPr>
-                      <a:r>
-                        <a:rPr>
-                          <a:latin typeface="Inter"/>
-                        </a:rPr>
-                        <a:t>2026-06-30</a:t>
-                      </a:r>
-                    </a:p>
-                  </a:txBody>
-                  <a:tcPr marL="54864" marR="54864" marT="27432" marB="27432" anchor="ctr">
-                    <a:solidFill>
-                      <a:srgbClr val="FFFFFF"/>
-                    </a:solidFill>
-                  </a:tcPr>
-                </a:tc>
-                <a:tc>
-                  <a:txBody>
-                    <a:bodyPr/>
-                    <a:lstStyle/>
-                    <a:p>
-                      <a:pPr>
-                        <a:defRPr sz="650" b="0">
-                          <a:solidFill>
-                            <a:srgbClr val="0D1117"/>
-                          </a:solidFill>
-                          <a:latin typeface="Inter"/>
-                        </a:defRPr>
-                      </a:pPr>
-                      <a:r>
-                        <a:rPr>
-                          <a:latin typeface="Inter"/>
-                        </a:rPr>
-                        <a:t>Illustrative sample data</a:t>
-                      </a:r>
-                    </a:p>
-                  </a:txBody>
-                  <a:tcPr marL="54864" marR="54864" marT="27432" marB="27432" anchor="ctr">
-                    <a:solidFill>
-                      <a:srgbClr val="FFFFFF"/>
-                    </a:solidFill>
-                  </a:tcPr>
-                </a:tc>
-                <a:tc>
-                  <a:txBody>
-                    <a:bodyPr/>
-                    <a:lstStyle/>
-                    <a:p>
-                      <a:pPr>
-                        <a:defRPr sz="650" b="0">
-                          <a:solidFill>
-                            <a:srgbClr val="0D1117"/>
-                          </a:solidFill>
-                          <a:latin typeface="Inter"/>
-                        </a:defRPr>
-                      </a:pPr>
-                      <a:r>
-                        <a:rPr>
-                          <a:latin typeface="Inter"/>
-                        </a:rPr>
-                        <a:t>advisory</a:t>
-                      </a:r>
-                    </a:p>
-                  </a:txBody>
-                  <a:tcPr marL="54864" marR="54864" marT="27432" marB="27432" anchor="ctr">
-                    <a:solidFill>
-                      <a:srgbClr val="FFFFFF"/>
-                    </a:solidFill>
-                  </a:tcPr>
-                </a:tc>
-                <a:tc>
-                  <a:txBody>
-                    <a:bodyPr/>
-                    <a:lstStyle/>
-                    <a:p>
-                      <a:pPr>
-                        <a:defRPr sz="650" b="0">
-                          <a:solidFill>
-                            <a:srgbClr val="0D1117"/>
-                          </a:solidFill>
-                          <a:latin typeface="Inter"/>
-                        </a:defRPr>
-                      </a:pPr>
-                      <a:r>
-                        <a:rPr>
-                          <a:latin typeface="Inter"/>
-                        </a:rPr>
-                        <a:t>sha256:aaaaaaaaaaaaaaaaaaaaaaaaaaaaaaaaaaaaaaaaaaaaaaaaaaaaaaaaaaaaaaaa</a:t>
-                      </a:r>
-                    </a:p>
-                  </a:txBody>
-                  <a:tcPr marL="54864" marR="54864" marT="27432" marB="27432" anchor="ctr">
-                    <a:solidFill>
-                      <a:srgbClr val="FFFFFF"/>
+                        <a:defRPr sz="720" b="1">
+                          <a:solidFill>
+                            <a:srgbClr val="F2A93B"/>
+                          </a:solidFill>
+                          <a:latin typeface="Inter"/>
+                        </a:defRPr>
+                      </a:pPr>
+                      <a:r>
+                        <a:rPr>
+                          <a:latin typeface="Inter"/>
+                        </a:rPr>
+                        <a:t>● Advisory</a:t>
+                      </a:r>
+                    </a:p>
+                  </a:txBody>
+                  <a:tcPr marL="54864" marR="54864" marT="27432" marB="27432" anchor="ctr">
+                    <a:solidFill>
+                      <a:srgbClr val="F5F7F9"/>
                     </a:solidFill>
                   </a:tcPr>
                 </a:tc>
@@ -30678,7 +28887,7 @@
                     <a:lstStyle/>
                     <a:p>
                       <a:pPr>
-                        <a:defRPr sz="650" b="1">
+                        <a:defRPr sz="720" b="1">
                           <a:solidFill>
                             <a:srgbClr val="0D1117"/>
                           </a:solidFill>
@@ -30705,7 +28914,7 @@
                     <a:lstStyle/>
                     <a:p>
                       <a:pPr>
-                        <a:defRPr sz="650" b="0">
+                        <a:defRPr sz="720" b="0">
                           <a:solidFill>
                             <a:srgbClr val="0D1117"/>
                           </a:solidFill>
@@ -30732,7 +28941,7 @@
                     <a:lstStyle/>
                     <a:p>
                       <a:pPr>
-                        <a:defRPr sz="650" b="0">
+                        <a:defRPr sz="720" b="0">
                           <a:solidFill>
                             <a:srgbClr val="0D1117"/>
                           </a:solidFill>
@@ -30743,7 +28952,7 @@
                         <a:rPr>
                           <a:latin typeface="Inter"/>
                         </a:rPr>
-                        <a:t>gradient_tool</a:t>
+                        <a:t>get_portfolio_historical_returns; get_portfolio_attribution</a:t>
                       </a:r>
                     </a:p>
                   </a:txBody>
@@ -30759,7 +28968,7 @@
                     <a:lstStyle/>
                     <a:p>
                       <a:pPr>
-                        <a:defRPr sz="650" b="0">
+                        <a:defRPr sz="720" b="0">
                           <a:solidFill>
                             <a:srgbClr val="0D1117"/>
                           </a:solidFill>
@@ -30770,7 +28979,7 @@
                         <a:rPr>
                           <a:latin typeface="Inter"/>
                         </a:rPr>
-                        <a:t>get_portfolio_historical_returns; get_portfolio_attribution</a:t>
+                        <a:t>2026-06-30</a:t>
                       </a:r>
                     </a:p>
                   </a:txBody>
@@ -30786,126 +28995,18 @@
                     <a:lstStyle/>
                     <a:p>
                       <a:pPr>
-                        <a:defRPr sz="650" b="0">
-                          <a:solidFill>
-                            <a:srgbClr val="0D1117"/>
-                          </a:solidFill>
-                          <a:latin typeface="Inter"/>
-                        </a:defRPr>
-                      </a:pPr>
-                      <a:r>
-                        <a:rPr>
-                          <a:latin typeface="Inter"/>
-                        </a:rPr>
-                        <a:t>all sections</a:t>
-                      </a:r>
-                    </a:p>
-                  </a:txBody>
-                  <a:tcPr marL="54864" marR="54864" marT="27432" marB="27432" anchor="ctr">
-                    <a:solidFill>
-                      <a:srgbClr val="F5F7F9"/>
-                    </a:solidFill>
-                  </a:tcPr>
-                </a:tc>
-                <a:tc>
-                  <a:txBody>
-                    <a:bodyPr/>
-                    <a:lstStyle/>
-                    <a:p>
-                      <a:pPr>
-                        <a:defRPr sz="650" b="0">
-                          <a:solidFill>
-                            <a:srgbClr val="0D1117"/>
-                          </a:solidFill>
-                          <a:latin typeface="Inter"/>
-                        </a:defRPr>
-                      </a:pPr>
-                      <a:r>
-                        <a:rPr>
-                          <a:latin typeface="Inter"/>
-                        </a:rPr>
-                        <a:t>2026-06-30</a:t>
-                      </a:r>
-                    </a:p>
-                  </a:txBody>
-                  <a:tcPr marL="54864" marR="54864" marT="27432" marB="27432" anchor="ctr">
-                    <a:solidFill>
-                      <a:srgbClr val="F5F7F9"/>
-                    </a:solidFill>
-                  </a:tcPr>
-                </a:tc>
-                <a:tc>
-                  <a:txBody>
-                    <a:bodyPr/>
-                    <a:lstStyle/>
-                    <a:p>
-                      <a:pPr>
-                        <a:defRPr sz="650" b="0">
-                          <a:solidFill>
-                            <a:srgbClr val="0D1117"/>
-                          </a:solidFill>
-                          <a:latin typeface="Inter"/>
-                        </a:defRPr>
-                      </a:pPr>
-                      <a:r>
-                        <a:rPr>
-                          <a:latin typeface="Inter"/>
-                        </a:rPr>
-                        <a:t>Illustrative sample data</a:t>
-                      </a:r>
-                    </a:p>
-                  </a:txBody>
-                  <a:tcPr marL="54864" marR="54864" marT="27432" marB="27432" anchor="ctr">
-                    <a:solidFill>
-                      <a:srgbClr val="F5F7F9"/>
-                    </a:solidFill>
-                  </a:tcPr>
-                </a:tc>
-                <a:tc>
-                  <a:txBody>
-                    <a:bodyPr/>
-                    <a:lstStyle/>
-                    <a:p>
-                      <a:pPr>
-                        <a:defRPr sz="650" b="0">
-                          <a:solidFill>
-                            <a:srgbClr val="0D1117"/>
-                          </a:solidFill>
-                          <a:latin typeface="Inter"/>
-                        </a:defRPr>
-                      </a:pPr>
-                      <a:r>
-                        <a:rPr>
-                          <a:latin typeface="Inter"/>
-                        </a:rPr>
-                        <a:t>degraded</a:t>
-                      </a:r>
-                    </a:p>
-                  </a:txBody>
-                  <a:tcPr marL="54864" marR="54864" marT="27432" marB="27432" anchor="ctr">
-                    <a:solidFill>
-                      <a:srgbClr val="F5F7F9"/>
-                    </a:solidFill>
-                  </a:tcPr>
-                </a:tc>
-                <a:tc>
-                  <a:txBody>
-                    <a:bodyPr/>
-                    <a:lstStyle/>
-                    <a:p>
-                      <a:pPr>
-                        <a:defRPr sz="650" b="0">
-                          <a:solidFill>
-                            <a:srgbClr val="0D1117"/>
-                          </a:solidFill>
-                          <a:latin typeface="Inter"/>
-                        </a:defRPr>
-                      </a:pPr>
-                      <a:r>
-                        <a:rPr>
-                          <a:latin typeface="Inter"/>
-                        </a:rPr>
-                        <a:t>sha256:aaaaaaaaaaaaaaaaaaaaaaaaaaaaaaaaaaaaaaaaaaaaaaaaaaaaaaaaaaaaaaaa</a:t>
+                        <a:defRPr sz="720" b="1">
+                          <a:solidFill>
+                            <a:srgbClr val="F2A93B"/>
+                          </a:solidFill>
+                          <a:latin typeface="Inter"/>
+                        </a:defRPr>
+                      </a:pPr>
+                      <a:r>
+                        <a:rPr>
+                          <a:latin typeface="Inter"/>
+                        </a:rPr>
+                        <a:t>● Incomplete</a:t>
                       </a:r>
                     </a:p>
                   </a:txBody>
@@ -30923,7 +29024,7 @@
                     <a:lstStyle/>
                     <a:p>
                       <a:pPr>
-                        <a:defRPr sz="650" b="1">
+                        <a:defRPr sz="720" b="1">
                           <a:solidFill>
                             <a:srgbClr val="0D1117"/>
                           </a:solidFill>
@@ -30950,7 +29051,7 @@
                     <a:lstStyle/>
                     <a:p>
                       <a:pPr>
-                        <a:defRPr sz="650" b="0">
+                        <a:defRPr sz="720" b="0">
                           <a:solidFill>
                             <a:srgbClr val="0D1117"/>
                           </a:solidFill>
@@ -30977,7 +29078,7 @@
                     <a:lstStyle/>
                     <a:p>
                       <a:pPr>
-                        <a:defRPr sz="650" b="0">
+                        <a:defRPr sz="720" b="0">
                           <a:solidFill>
                             <a:srgbClr val="0D1117"/>
                           </a:solidFill>
@@ -30988,7 +29089,7 @@
                         <a:rPr>
                           <a:latin typeface="Inter"/>
                         </a:rPr>
-                        <a:t>gradient_tool</a:t>
+                        <a:t>get_private_markets_holdings</a:t>
                       </a:r>
                     </a:p>
                   </a:txBody>
@@ -31004,7 +29105,7 @@
                     <a:lstStyle/>
                     <a:p>
                       <a:pPr>
-                        <a:defRPr sz="650" b="0">
+                        <a:defRPr sz="720" b="0">
                           <a:solidFill>
                             <a:srgbClr val="0D1117"/>
                           </a:solidFill>
@@ -31015,7 +29116,7 @@
                         <a:rPr>
                           <a:latin typeface="Inter"/>
                         </a:rPr>
-                        <a:t>get_private_markets_holdings</a:t>
+                        <a:t>2026-06-30</a:t>
                       </a:r>
                     </a:p>
                   </a:txBody>
@@ -31031,132 +29132,24 @@
                     <a:lstStyle/>
                     <a:p>
                       <a:pPr>
-                        <a:defRPr sz="650" b="0">
-                          <a:solidFill>
-                            <a:srgbClr val="0D1117"/>
-                          </a:solidFill>
-                          <a:latin typeface="Inter"/>
-                        </a:defRPr>
-                      </a:pPr>
-                      <a:r>
-                        <a:rPr>
-                          <a:latin typeface="Inter"/>
-                        </a:rPr>
-                        <a:t>paged; server aggregates</a:t>
-                      </a:r>
-                    </a:p>
-                  </a:txBody>
-                  <a:tcPr marL="54864" marR="54864" marT="27432" marB="27432" anchor="ctr">
-                    <a:solidFill>
-                      <a:srgbClr val="FFFFFF"/>
-                    </a:solidFill>
-                  </a:tcPr>
-                </a:tc>
-                <a:tc>
-                  <a:txBody>
-                    <a:bodyPr/>
-                    <a:lstStyle/>
-                    <a:p>
-                      <a:pPr>
-                        <a:defRPr sz="650" b="0">
-                          <a:solidFill>
-                            <a:srgbClr val="0D1117"/>
-                          </a:solidFill>
-                          <a:latin typeface="Inter"/>
-                        </a:defRPr>
-                      </a:pPr>
-                      <a:r>
-                        <a:rPr>
-                          <a:latin typeface="Inter"/>
-                        </a:rPr>
-                        <a:t>2026-06-30</a:t>
-                      </a:r>
-                    </a:p>
-                  </a:txBody>
-                  <a:tcPr marL="54864" marR="54864" marT="27432" marB="27432" anchor="ctr">
-                    <a:solidFill>
-                      <a:srgbClr val="FFFFFF"/>
-                    </a:solidFill>
-                  </a:tcPr>
-                </a:tc>
-                <a:tc>
-                  <a:txBody>
-                    <a:bodyPr/>
-                    <a:lstStyle/>
-                    <a:p>
-                      <a:pPr>
-                        <a:defRPr sz="650" b="0">
-                          <a:solidFill>
-                            <a:srgbClr val="0D1117"/>
-                          </a:solidFill>
-                          <a:latin typeface="Inter"/>
-                        </a:defRPr>
-                      </a:pPr>
-                      <a:r>
-                        <a:rPr>
-                          <a:latin typeface="Inter"/>
-                        </a:rPr>
-                        <a:t>Illustrative sample data</a:t>
-                      </a:r>
-                    </a:p>
-                  </a:txBody>
-                  <a:tcPr marL="54864" marR="54864" marT="27432" marB="27432" anchor="ctr">
-                    <a:solidFill>
-                      <a:srgbClr val="FFFFFF"/>
-                    </a:solidFill>
-                  </a:tcPr>
-                </a:tc>
-                <a:tc>
-                  <a:txBody>
-                    <a:bodyPr/>
-                    <a:lstStyle/>
-                    <a:p>
-                      <a:pPr>
-                        <a:defRPr sz="650" b="0">
-                          <a:solidFill>
-                            <a:srgbClr val="0D1117"/>
-                          </a:solidFill>
-                          <a:latin typeface="Inter"/>
-                        </a:defRPr>
-                      </a:pPr>
-                      <a:r>
-                        <a:rPr>
-                          <a:latin typeface="Inter"/>
-                        </a:rPr>
-                        <a:t>partial</a:t>
-                      </a:r>
-                    </a:p>
-                  </a:txBody>
-                  <a:tcPr marL="54864" marR="54864" marT="27432" marB="27432" anchor="ctr">
-                    <a:solidFill>
-                      <a:srgbClr val="FFFFFF"/>
-                    </a:solidFill>
-                  </a:tcPr>
-                </a:tc>
-                <a:tc>
-                  <a:txBody>
-                    <a:bodyPr/>
-                    <a:lstStyle/>
-                    <a:p>
-                      <a:pPr>
-                        <a:defRPr sz="650" b="0">
-                          <a:solidFill>
-                            <a:srgbClr val="0D1117"/>
-                          </a:solidFill>
-                          <a:latin typeface="Inter"/>
-                        </a:defRPr>
-                      </a:pPr>
-                      <a:r>
-                        <a:rPr>
-                          <a:latin typeface="Inter"/>
-                        </a:rPr>
-                        <a:t>sha256:aaaaaaaaaaaaaaaaaaaaaaaaaaaaaaaaaaaaaaaaaaaaaaaaaaaaaaaaaaaaaaaa</a:t>
-                      </a:r>
-                    </a:p>
-                  </a:txBody>
-                  <a:tcPr marL="54864" marR="54864" marT="27432" marB="27432" anchor="ctr">
-                    <a:solidFill>
-                      <a:srgbClr val="FFFFFF"/>
+                        <a:defRPr sz="720" b="1">
+                          <a:solidFill>
+                            <a:srgbClr val="F2A93B"/>
+                          </a:solidFill>
+                          <a:latin typeface="Inter"/>
+                        </a:defRPr>
+                      </a:pPr>
+                      <a:r>
+                        <a:rPr>
+                          <a:latin typeface="Inter"/>
+                        </a:rPr>
+                        <a:t>● Partly available</a:t>
+                      </a:r>
+                    </a:p>
+                  </a:txBody>
+                  <a:tcPr marL="54864" marR="54864" marT="27432" marB="27432" anchor="ctr">
+                    <a:solidFill>
+                      <a:srgbClr val="F5F7F9"/>
                     </a:solidFill>
                   </a:tcPr>
                 </a:tc>
@@ -31167,7 +29160,7 @@
       </p:graphicFrame>
       <p:sp>
         <p:nvSpPr>
-          <p:cNvPr id="9" name="TextBox 8"/>
+          <p:cNvPr id="8" name="TextBox 7"/>
           <p:cNvSpPr txBox="1"/>
           <p:nvPr/>
         </p:nvSpPr>
@@ -31209,7 +29202,7 @@
       </p:sp>
       <p:sp>
         <p:nvSpPr>
-          <p:cNvPr id="10" name="Rectangle 9"/>
+          <p:cNvPr id="9" name="Rectangle 8"/>
           <p:cNvSpPr/>
           <p:nvPr/>
         </p:nvSpPr>
@@ -31258,7 +29251,7 @@
       </p:sp>
       <p:sp>
         <p:nvSpPr>
-          <p:cNvPr id="11" name="TextBox 10"/>
+          <p:cNvPr id="10" name="TextBox 9"/>
           <p:cNvSpPr txBox="1"/>
           <p:nvPr/>
         </p:nvSpPr>
@@ -31300,7 +29293,7 @@
       </p:sp>
       <p:sp>
         <p:nvSpPr>
-          <p:cNvPr id="12" name="TextBox 11"/>
+          <p:cNvPr id="11" name="TextBox 10"/>
           <p:cNvSpPr txBox="1"/>
           <p:nvPr/>
         </p:nvSpPr>
@@ -31342,7 +29335,7 @@
       </p:sp>
       <p:sp>
         <p:nvSpPr>
-          <p:cNvPr id="13" name="TextBox 12"/>
+          <p:cNvPr id="12" name="TextBox 11"/>
           <p:cNvSpPr txBox="1"/>
           <p:nvPr/>
         </p:nvSpPr>
@@ -31457,48 +29450,6 @@
         </p:nvSpPr>
         <p:spPr>
           <a:xfrm>
-            <a:off x="5897880" y="310896"/>
-            <a:ext cx="4800600" cy="256032"/>
-          </a:xfrm>
-          <a:prstGeom prst="rect">
-            <a:avLst/>
-          </a:prstGeom>
-          <a:noFill/>
-        </p:spPr>
-        <p:txBody>
-          <a:bodyPr wrap="none" lIns="9144" rIns="9144" tIns="9144" bIns="9144" anchor="t">
-            <a:spAutoFit/>
-          </a:bodyPr>
-          <a:lstStyle/>
-          <a:p>
-            <a:pPr algn="r">
-              <a:spcAft>
-                <a:spcPts val="0"/>
-              </a:spcAft>
-              <a:defRPr sz="680" b="1">
-                <a:solidFill>
-                  <a:srgbClr val="4F6B00"/>
-                </a:solidFill>
-                <a:latin typeface="Inter"/>
-              </a:defRPr>
-            </a:pPr>
-            <a:r>
-              <a:rPr>
-                <a:latin typeface="Inter"/>
-              </a:rPr>
-              <a:t>Illustrative, Gradient Maintained — demo data, not the client's holdings or managers</a:t>
-            </a:r>
-          </a:p>
-        </p:txBody>
-      </p:sp>
-      <p:sp>
-        <p:nvSpPr>
-          <p:cNvPr id="4" name="TextBox 3"/>
-          <p:cNvSpPr txBox="1"/>
-          <p:nvPr/>
-        </p:nvSpPr>
-        <p:spPr>
-          <a:xfrm>
             <a:off x="640080" y="566928"/>
             <a:ext cx="10058400" cy="530352"/>
           </a:xfrm>
@@ -31528,14 +29479,14 @@
               <a:rPr>
                 <a:latin typeface="Inter"/>
               </a:rPr>
-              <a:t>Appendix — Server Metric Methods and Disclosures</a:t>
+              <a:t>Appendix — Sources and methods — continued</a:t>
             </a:r>
           </a:p>
         </p:txBody>
       </p:sp>
       <p:sp>
         <p:nvSpPr>
-          <p:cNvPr id="5" name="Rectangle 4"/>
+          <p:cNvPr id="4" name="Rectangle 3"/>
           <p:cNvSpPr/>
           <p:nvPr/>
         </p:nvSpPr>
@@ -31584,7 +29535,7 @@
       </p:sp>
       <p:sp>
         <p:nvSpPr>
-          <p:cNvPr id="6" name="Rectangle 5"/>
+          <p:cNvPr id="5" name="Rectangle 4"/>
           <p:cNvSpPr/>
           <p:nvPr/>
         </p:nvSpPr>
@@ -31633,7 +29584,7 @@
       </p:sp>
       <p:sp>
         <p:nvSpPr>
-          <p:cNvPr id="7" name="TextBox 6"/>
+          <p:cNvPr id="6" name="TextBox 5"/>
           <p:cNvSpPr txBox="1"/>
           <p:nvPr/>
         </p:nvSpPr>
@@ -31668,14 +29619,14 @@
               <a:rPr>
                 <a:latin typeface="Inter"/>
               </a:rPr>
-              <a:t>B</a:t>
+              <a:t>A</a:t>
             </a:r>
           </a:p>
         </p:txBody>
       </p:sp>
       <p:sp>
         <p:nvSpPr>
-          <p:cNvPr id="8" name="TextBox 7"/>
+          <p:cNvPr id="7" name="TextBox 6"/>
           <p:cNvSpPr txBox="1"/>
           <p:nvPr/>
         </p:nvSpPr>
@@ -31710,6 +29661,1371 @@
               <a:rPr>
                 <a:latin typeface="Inter"/>
               </a:rPr>
+              <a:t>SOURCE AUDIT TRAIL</a:t>
+            </a:r>
+          </a:p>
+        </p:txBody>
+      </p:sp>
+      <p:graphicFrame>
+        <p:nvGraphicFramePr>
+          <p:cNvPr id="8" name="Table 7"/>
+          <p:cNvGraphicFramePr>
+            <a:graphicFrameLocks noGrp="1"/>
+          </p:cNvGraphicFramePr>
+          <p:nvPr/>
+        </p:nvGraphicFramePr>
+        <p:xfrm>
+          <a:off x="640080" y="1600200"/>
+          <a:ext cx="10908792" cy="4416552"/>
+        </p:xfrm>
+        <a:graphic>
+          <a:graphicData uri="http://schemas.openxmlformats.org/drawingml/2006/table">
+            <a:tbl>
+              <a:tblPr firstRow="1" bandRow="1">
+                <a:tableStyleId>{5C22544A-7EE6-4342-B048-85BDC9FD1C3A}</a:tableStyleId>
+              </a:tblPr>
+              <a:tblGrid>
+                <a:gridCol w="2011680"/>
+                <a:gridCol w="4448556"/>
+                <a:gridCol w="4448556"/>
+              </a:tblGrid>
+              <a:tr h="441655">
+                <a:tc>
+                  <a:txBody>
+                    <a:bodyPr/>
+                    <a:lstStyle/>
+                    <a:p>
+                      <a:pPr>
+                        <a:defRPr sz="750" b="1">
+                          <a:solidFill>
+                            <a:srgbClr val="FFFFFF"/>
+                          </a:solidFill>
+                          <a:latin typeface="Inter"/>
+                        </a:defRPr>
+                      </a:pPr>
+                      <a:r>
+                        <a:rPr>
+                          <a:latin typeface="Inter"/>
+                        </a:rPr>
+                        <a:t>Tag</a:t>
+                      </a:r>
+                    </a:p>
+                  </a:txBody>
+                  <a:tcPr marL="54864" marR="54864" marT="27432" marB="27432" anchor="ctr">
+                    <a:solidFill>
+                      <a:srgbClr val="0D1117"/>
+                    </a:solidFill>
+                  </a:tcPr>
+                </a:tc>
+                <a:tc>
+                  <a:txBody>
+                    <a:bodyPr/>
+                    <a:lstStyle/>
+                    <a:p>
+                      <a:pPr>
+                        <a:defRPr sz="750" b="1">
+                          <a:solidFill>
+                            <a:srgbClr val="FFFFFF"/>
+                          </a:solidFill>
+                          <a:latin typeface="Inter"/>
+                        </a:defRPr>
+                      </a:pPr>
+                      <a:r>
+                        <a:rPr>
+                          <a:latin typeface="Inter"/>
+                        </a:rPr>
+                        <a:t>Key parameters</a:t>
+                      </a:r>
+                    </a:p>
+                  </a:txBody>
+                  <a:tcPr marL="54864" marR="54864" marT="27432" marB="27432" anchor="ctr">
+                    <a:solidFill>
+                      <a:srgbClr val="0D1117"/>
+                    </a:solidFill>
+                  </a:tcPr>
+                </a:tc>
+                <a:tc>
+                  <a:txBody>
+                    <a:bodyPr/>
+                    <a:lstStyle/>
+                    <a:p>
+                      <a:pPr>
+                        <a:defRPr sz="750" b="1">
+                          <a:solidFill>
+                            <a:srgbClr val="FFFFFF"/>
+                          </a:solidFill>
+                          <a:latin typeface="Inter"/>
+                        </a:defRPr>
+                      </a:pPr>
+                      <a:r>
+                        <a:rPr>
+                          <a:latin typeface="Inter"/>
+                        </a:rPr>
+                        <a:t>Digest</a:t>
+                      </a:r>
+                    </a:p>
+                  </a:txBody>
+                  <a:tcPr marL="54864" marR="54864" marT="27432" marB="27432" anchor="ctr">
+                    <a:solidFill>
+                      <a:srgbClr val="0D1117"/>
+                    </a:solidFill>
+                  </a:tcPr>
+                </a:tc>
+              </a:tr>
+              <a:tr h="441655">
+                <a:tc>
+                  <a:txBody>
+                    <a:bodyPr/>
+                    <a:lstStyle/>
+                    <a:p>
+                      <a:pPr>
+                        <a:defRPr sz="800" b="1">
+                          <a:solidFill>
+                            <a:srgbClr val="0D1117"/>
+                          </a:solidFill>
+                          <a:latin typeface="Inter"/>
+                        </a:defRPr>
+                      </a:pPr>
+                      <a:r>
+                        <a:rPr>
+                          <a:latin typeface="Inter"/>
+                        </a:rPr>
+                        <a:t>S1</a:t>
+                      </a:r>
+                    </a:p>
+                  </a:txBody>
+                  <a:tcPr marL="54864" marR="54864" marT="27432" marB="27432" anchor="ctr">
+                    <a:solidFill>
+                      <a:srgbClr val="FFFFFF"/>
+                    </a:solidFill>
+                  </a:tcPr>
+                </a:tc>
+                <a:tc>
+                  <a:txBody>
+                    <a:bodyPr/>
+                    <a:lstStyle/>
+                    <a:p>
+                      <a:pPr>
+                        <a:defRPr sz="800" b="0">
+                          <a:solidFill>
+                            <a:srgbClr val="0D1117"/>
+                          </a:solidFill>
+                          <a:latin typeface="Inter"/>
+                        </a:defRPr>
+                      </a:pPr>
+                      <a:r>
+                        <a:rPr>
+                          <a:latin typeface="Inter"/>
+                        </a:rPr>
+                        <a:t>org=test</a:t>
+                      </a:r>
+                    </a:p>
+                  </a:txBody>
+                  <a:tcPr marL="54864" marR="54864" marT="27432" marB="27432" anchor="ctr">
+                    <a:solidFill>
+                      <a:srgbClr val="FFFFFF"/>
+                    </a:solidFill>
+                  </a:tcPr>
+                </a:tc>
+                <a:tc>
+                  <a:txBody>
+                    <a:bodyPr/>
+                    <a:lstStyle/>
+                    <a:p>
+                      <a:pPr>
+                        <a:defRPr sz="800" b="0">
+                          <a:solidFill>
+                            <a:srgbClr val="0D1117"/>
+                          </a:solidFill>
+                          <a:latin typeface="Inter"/>
+                        </a:defRPr>
+                      </a:pPr>
+                      <a:r>
+                        <a:rPr>
+                          <a:latin typeface="Inter"/>
+                        </a:rPr>
+                        <a:t>sha256:aaaaaaaaaaaaaaaaaaaaaaaaaaaaaaaaaaaaaaaaaaaaaaaaaaaaaaaaaaaaaaaa</a:t>
+                      </a:r>
+                    </a:p>
+                  </a:txBody>
+                  <a:tcPr marL="54864" marR="54864" marT="27432" marB="27432" anchor="ctr">
+                    <a:solidFill>
+                      <a:srgbClr val="FFFFFF"/>
+                    </a:solidFill>
+                  </a:tcPr>
+                </a:tc>
+              </a:tr>
+              <a:tr h="441655">
+                <a:tc>
+                  <a:txBody>
+                    <a:bodyPr/>
+                    <a:lstStyle/>
+                    <a:p>
+                      <a:pPr>
+                        <a:defRPr sz="800" b="1">
+                          <a:solidFill>
+                            <a:srgbClr val="0D1117"/>
+                          </a:solidFill>
+                          <a:latin typeface="Inter"/>
+                        </a:defRPr>
+                      </a:pPr>
+                      <a:r>
+                        <a:rPr>
+                          <a:latin typeface="Inter"/>
+                        </a:rPr>
+                        <a:t>S2</a:t>
+                      </a:r>
+                    </a:p>
+                  </a:txBody>
+                  <a:tcPr marL="54864" marR="54864" marT="27432" marB="27432" anchor="ctr">
+                    <a:solidFill>
+                      <a:srgbClr val="F5F7F9"/>
+                    </a:solidFill>
+                  </a:tcPr>
+                </a:tc>
+                <a:tc>
+                  <a:txBody>
+                    <a:bodyPr/>
+                    <a:lstStyle/>
+                    <a:p>
+                      <a:pPr>
+                        <a:defRPr sz="800" b="0">
+                          <a:solidFill>
+                            <a:srgbClr val="0D1117"/>
+                          </a:solidFill>
+                          <a:latin typeface="Inter"/>
+                        </a:defRPr>
+                      </a:pPr>
+                      <a:r>
+                        <a:rPr>
+                          <a:latin typeface="Inter"/>
+                        </a:rPr>
+                        <a:t>allocation_tree</a:t>
+                      </a:r>
+                    </a:p>
+                  </a:txBody>
+                  <a:tcPr marL="54864" marR="54864" marT="27432" marB="27432" anchor="ctr">
+                    <a:solidFill>
+                      <a:srgbClr val="F5F7F9"/>
+                    </a:solidFill>
+                  </a:tcPr>
+                </a:tc>
+                <a:tc>
+                  <a:txBody>
+                    <a:bodyPr/>
+                    <a:lstStyle/>
+                    <a:p>
+                      <a:pPr>
+                        <a:defRPr sz="800" b="0">
+                          <a:solidFill>
+                            <a:srgbClr val="0D1117"/>
+                          </a:solidFill>
+                          <a:latin typeface="Inter"/>
+                        </a:defRPr>
+                      </a:pPr>
+                      <a:r>
+                        <a:rPr>
+                          <a:latin typeface="Inter"/>
+                        </a:rPr>
+                        <a:t>sha256:aaaaaaaaaaaaaaaaaaaaaaaaaaaaaaaaaaaaaaaaaaaaaaaaaaaaaaaaaaaaaaaa</a:t>
+                      </a:r>
+                    </a:p>
+                  </a:txBody>
+                  <a:tcPr marL="54864" marR="54864" marT="27432" marB="27432" anchor="ctr">
+                    <a:solidFill>
+                      <a:srgbClr val="F5F7F9"/>
+                    </a:solidFill>
+                  </a:tcPr>
+                </a:tc>
+              </a:tr>
+              <a:tr h="441655">
+                <a:tc>
+                  <a:txBody>
+                    <a:bodyPr/>
+                    <a:lstStyle/>
+                    <a:p>
+                      <a:pPr>
+                        <a:defRPr sz="800" b="1">
+                          <a:solidFill>
+                            <a:srgbClr val="0D1117"/>
+                          </a:solidFill>
+                          <a:latin typeface="Inter"/>
+                        </a:defRPr>
+                      </a:pPr>
+                      <a:r>
+                        <a:rPr>
+                          <a:latin typeface="Inter"/>
+                        </a:rPr>
+                        <a:t>S3</a:t>
+                      </a:r>
+                    </a:p>
+                  </a:txBody>
+                  <a:tcPr marL="54864" marR="54864" marT="27432" marB="27432" anchor="ctr">
+                    <a:solidFill>
+                      <a:srgbClr val="FFFFFF"/>
+                    </a:solidFill>
+                  </a:tcPr>
+                </a:tc>
+                <a:tc>
+                  <a:txBody>
+                    <a:bodyPr/>
+                    <a:lstStyle/>
+                    <a:p>
+                      <a:pPr>
+                        <a:defRPr sz="800" b="0">
+                          <a:solidFill>
+                            <a:srgbClr val="0D1117"/>
+                          </a:solidFill>
+                          <a:latin typeface="Inter"/>
+                        </a:defRPr>
+                      </a:pPr>
+                      <a:r>
+                        <a:rPr>
+                          <a:latin typeface="Inter"/>
+                        </a:rPr>
+                        <a:t>portfolio=test</a:t>
+                      </a:r>
+                    </a:p>
+                  </a:txBody>
+                  <a:tcPr marL="54864" marR="54864" marT="27432" marB="27432" anchor="ctr">
+                    <a:solidFill>
+                      <a:srgbClr val="FFFFFF"/>
+                    </a:solidFill>
+                  </a:tcPr>
+                </a:tc>
+                <a:tc>
+                  <a:txBody>
+                    <a:bodyPr/>
+                    <a:lstStyle/>
+                    <a:p>
+                      <a:pPr>
+                        <a:defRPr sz="800" b="0">
+                          <a:solidFill>
+                            <a:srgbClr val="0D1117"/>
+                          </a:solidFill>
+                          <a:latin typeface="Inter"/>
+                        </a:defRPr>
+                      </a:pPr>
+                      <a:r>
+                        <a:rPr>
+                          <a:latin typeface="Inter"/>
+                        </a:rPr>
+                        <a:t>sha256:aaaaaaaaaaaaaaaaaaaaaaaaaaaaaaaaaaaaaaaaaaaaaaaaaaaaaaaaaaaaaaaa</a:t>
+                      </a:r>
+                    </a:p>
+                  </a:txBody>
+                  <a:tcPr marL="54864" marR="54864" marT="27432" marB="27432" anchor="ctr">
+                    <a:solidFill>
+                      <a:srgbClr val="FFFFFF"/>
+                    </a:solidFill>
+                  </a:tcPr>
+                </a:tc>
+              </a:tr>
+              <a:tr h="441655">
+                <a:tc>
+                  <a:txBody>
+                    <a:bodyPr/>
+                    <a:lstStyle/>
+                    <a:p>
+                      <a:pPr>
+                        <a:defRPr sz="800" b="1">
+                          <a:solidFill>
+                            <a:srgbClr val="0D1117"/>
+                          </a:solidFill>
+                          <a:latin typeface="Inter"/>
+                        </a:defRPr>
+                      </a:pPr>
+                      <a:r>
+                        <a:rPr>
+                          <a:latin typeface="Inter"/>
+                        </a:rPr>
+                        <a:t>S4</a:t>
+                      </a:r>
+                    </a:p>
+                  </a:txBody>
+                  <a:tcPr marL="54864" marR="54864" marT="27432" marB="27432" anchor="ctr">
+                    <a:solidFill>
+                      <a:srgbClr val="F5F7F9"/>
+                    </a:solidFill>
+                  </a:tcPr>
+                </a:tc>
+                <a:tc>
+                  <a:txBody>
+                    <a:bodyPr/>
+                    <a:lstStyle/>
+                    <a:p>
+                      <a:pPr>
+                        <a:defRPr sz="800" b="0">
+                          <a:solidFill>
+                            <a:srgbClr val="0D1117"/>
+                          </a:solidFill>
+                          <a:latin typeface="Inter"/>
+                        </a:defRPr>
+                      </a:pPr>
+                      <a:r>
+                        <a:rPr>
+                          <a:latin typeface="Inter"/>
+                        </a:rPr>
+                        <a:t>all pages</a:t>
+                      </a:r>
+                    </a:p>
+                  </a:txBody>
+                  <a:tcPr marL="54864" marR="54864" marT="27432" marB="27432" anchor="ctr">
+                    <a:solidFill>
+                      <a:srgbClr val="F5F7F9"/>
+                    </a:solidFill>
+                  </a:tcPr>
+                </a:tc>
+                <a:tc>
+                  <a:txBody>
+                    <a:bodyPr/>
+                    <a:lstStyle/>
+                    <a:p>
+                      <a:pPr>
+                        <a:defRPr sz="800" b="0">
+                          <a:solidFill>
+                            <a:srgbClr val="0D1117"/>
+                          </a:solidFill>
+                          <a:latin typeface="Inter"/>
+                        </a:defRPr>
+                      </a:pPr>
+                      <a:r>
+                        <a:rPr>
+                          <a:latin typeface="Inter"/>
+                        </a:rPr>
+                        <a:t>sha256:aaaaaaaaaaaaaaaaaaaaaaaaaaaaaaaaaaaaaaaaaaaaaaaaaaaaaaaaaaaaaaaa</a:t>
+                      </a:r>
+                    </a:p>
+                  </a:txBody>
+                  <a:tcPr marL="54864" marR="54864" marT="27432" marB="27432" anchor="ctr">
+                    <a:solidFill>
+                      <a:srgbClr val="F5F7F9"/>
+                    </a:solidFill>
+                  </a:tcPr>
+                </a:tc>
+              </a:tr>
+              <a:tr h="441655">
+                <a:tc>
+                  <a:txBody>
+                    <a:bodyPr/>
+                    <a:lstStyle/>
+                    <a:p>
+                      <a:pPr>
+                        <a:defRPr sz="800" b="1">
+                          <a:solidFill>
+                            <a:srgbClr val="0D1117"/>
+                          </a:solidFill>
+                          <a:latin typeface="Inter"/>
+                        </a:defRPr>
+                      </a:pPr>
+                      <a:r>
+                        <a:rPr>
+                          <a:latin typeface="Inter"/>
+                        </a:rPr>
+                        <a:t>S5</a:t>
+                      </a:r>
+                    </a:p>
+                  </a:txBody>
+                  <a:tcPr marL="54864" marR="54864" marT="27432" marB="27432" anchor="ctr">
+                    <a:solidFill>
+                      <a:srgbClr val="FFFFFF"/>
+                    </a:solidFill>
+                  </a:tcPr>
+                </a:tc>
+                <a:tc>
+                  <a:txBody>
+                    <a:bodyPr/>
+                    <a:lstStyle/>
+                    <a:p>
+                      <a:pPr>
+                        <a:defRPr sz="800" b="0">
+                          <a:solidFill>
+                            <a:srgbClr val="0D1117"/>
+                          </a:solidFill>
+                          <a:latin typeface="Inter"/>
+                        </a:defRPr>
+                      </a:pPr>
+                      <a:r>
+                        <a:rPr>
+                          <a:latin typeface="Inter"/>
+                        </a:rPr>
+                        <a:t>baseline</a:t>
+                      </a:r>
+                    </a:p>
+                  </a:txBody>
+                  <a:tcPr marL="54864" marR="54864" marT="27432" marB="27432" anchor="ctr">
+                    <a:solidFill>
+                      <a:srgbClr val="FFFFFF"/>
+                    </a:solidFill>
+                  </a:tcPr>
+                </a:tc>
+                <a:tc>
+                  <a:txBody>
+                    <a:bodyPr/>
+                    <a:lstStyle/>
+                    <a:p>
+                      <a:pPr>
+                        <a:defRPr sz="800" b="0">
+                          <a:solidFill>
+                            <a:srgbClr val="0D1117"/>
+                          </a:solidFill>
+                          <a:latin typeface="Inter"/>
+                        </a:defRPr>
+                      </a:pPr>
+                      <a:r>
+                        <a:rPr>
+                          <a:latin typeface="Inter"/>
+                        </a:rPr>
+                        <a:t>sha256:aaaaaaaaaaaaaaaaaaaaaaaaaaaaaaaaaaaaaaaaaaaaaaaaaaaaaaaaaaaaaaaa</a:t>
+                      </a:r>
+                    </a:p>
+                  </a:txBody>
+                  <a:tcPr marL="54864" marR="54864" marT="27432" marB="27432" anchor="ctr">
+                    <a:solidFill>
+                      <a:srgbClr val="FFFFFF"/>
+                    </a:solidFill>
+                  </a:tcPr>
+                </a:tc>
+              </a:tr>
+              <a:tr h="441655">
+                <a:tc>
+                  <a:txBody>
+                    <a:bodyPr/>
+                    <a:lstStyle/>
+                    <a:p>
+                      <a:pPr>
+                        <a:defRPr sz="800" b="1">
+                          <a:solidFill>
+                            <a:srgbClr val="0D1117"/>
+                          </a:solidFill>
+                          <a:latin typeface="Inter"/>
+                        </a:defRPr>
+                      </a:pPr>
+                      <a:r>
+                        <a:rPr>
+                          <a:latin typeface="Inter"/>
+                        </a:rPr>
+                        <a:t>S6</a:t>
+                      </a:r>
+                    </a:p>
+                  </a:txBody>
+                  <a:tcPr marL="54864" marR="54864" marT="27432" marB="27432" anchor="ctr">
+                    <a:solidFill>
+                      <a:srgbClr val="F5F7F9"/>
+                    </a:solidFill>
+                  </a:tcPr>
+                </a:tc>
+                <a:tc>
+                  <a:txBody>
+                    <a:bodyPr/>
+                    <a:lstStyle/>
+                    <a:p>
+                      <a:pPr>
+                        <a:defRPr sz="800" b="0">
+                          <a:solidFill>
+                            <a:srgbClr val="0D1117"/>
+                          </a:solidFill>
+                          <a:latin typeface="Inter"/>
+                        </a:defRPr>
+                      </a:pPr>
+                      <a:r>
+                        <a:rPr>
+                          <a:latin typeface="Inter"/>
+                        </a:rPr>
+                        <a:t>commitments</a:t>
+                      </a:r>
+                    </a:p>
+                  </a:txBody>
+                  <a:tcPr marL="54864" marR="54864" marT="27432" marB="27432" anchor="ctr">
+                    <a:solidFill>
+                      <a:srgbClr val="F5F7F9"/>
+                    </a:solidFill>
+                  </a:tcPr>
+                </a:tc>
+                <a:tc>
+                  <a:txBody>
+                    <a:bodyPr/>
+                    <a:lstStyle/>
+                    <a:p>
+                      <a:pPr>
+                        <a:defRPr sz="800" b="0">
+                          <a:solidFill>
+                            <a:srgbClr val="0D1117"/>
+                          </a:solidFill>
+                          <a:latin typeface="Inter"/>
+                        </a:defRPr>
+                      </a:pPr>
+                      <a:r>
+                        <a:rPr>
+                          <a:latin typeface="Inter"/>
+                        </a:rPr>
+                        <a:t>sha256:aaaaaaaaaaaaaaaaaaaaaaaaaaaaaaaaaaaaaaaaaaaaaaaaaaaaaaaaaaaaaaaa</a:t>
+                      </a:r>
+                    </a:p>
+                  </a:txBody>
+                  <a:tcPr marL="54864" marR="54864" marT="27432" marB="27432" anchor="ctr">
+                    <a:solidFill>
+                      <a:srgbClr val="F5F7F9"/>
+                    </a:solidFill>
+                  </a:tcPr>
+                </a:tc>
+              </a:tr>
+              <a:tr h="441655">
+                <a:tc>
+                  <a:txBody>
+                    <a:bodyPr/>
+                    <a:lstStyle/>
+                    <a:p>
+                      <a:pPr>
+                        <a:defRPr sz="800" b="1">
+                          <a:solidFill>
+                            <a:srgbClr val="0D1117"/>
+                          </a:solidFill>
+                          <a:latin typeface="Inter"/>
+                        </a:defRPr>
+                      </a:pPr>
+                      <a:r>
+                        <a:rPr>
+                          <a:latin typeface="Inter"/>
+                        </a:rPr>
+                        <a:t>S7</a:t>
+                      </a:r>
+                    </a:p>
+                  </a:txBody>
+                  <a:tcPr marL="54864" marR="54864" marT="27432" marB="27432" anchor="ctr">
+                    <a:solidFill>
+                      <a:srgbClr val="FFFFFF"/>
+                    </a:solidFill>
+                  </a:tcPr>
+                </a:tc>
+                <a:tc>
+                  <a:txBody>
+                    <a:bodyPr/>
+                    <a:lstStyle/>
+                    <a:p>
+                      <a:pPr>
+                        <a:defRPr sz="800" b="0">
+                          <a:solidFill>
+                            <a:srgbClr val="0D1117"/>
+                          </a:solidFill>
+                          <a:latin typeface="Inter"/>
+                        </a:defRPr>
+                      </a:pPr>
+                      <a:r>
+                        <a:rPr>
+                          <a:latin typeface="Inter"/>
+                        </a:rPr>
+                        <a:t>illustrative</a:t>
+                      </a:r>
+                    </a:p>
+                  </a:txBody>
+                  <a:tcPr marL="54864" marR="54864" marT="27432" marB="27432" anchor="ctr">
+                    <a:solidFill>
+                      <a:srgbClr val="FFFFFF"/>
+                    </a:solidFill>
+                  </a:tcPr>
+                </a:tc>
+                <a:tc>
+                  <a:txBody>
+                    <a:bodyPr/>
+                    <a:lstStyle/>
+                    <a:p>
+                      <a:pPr>
+                        <a:defRPr sz="800" b="0">
+                          <a:solidFill>
+                            <a:srgbClr val="0D1117"/>
+                          </a:solidFill>
+                          <a:latin typeface="Inter"/>
+                        </a:defRPr>
+                      </a:pPr>
+                      <a:r>
+                        <a:rPr>
+                          <a:latin typeface="Inter"/>
+                        </a:rPr>
+                        <a:t>sha256:aaaaaaaaaaaaaaaaaaaaaaaaaaaaaaaaaaaaaaaaaaaaaaaaaaaaaaaaaaaaaaaa</a:t>
+                      </a:r>
+                    </a:p>
+                  </a:txBody>
+                  <a:tcPr marL="54864" marR="54864" marT="27432" marB="27432" anchor="ctr">
+                    <a:solidFill>
+                      <a:srgbClr val="FFFFFF"/>
+                    </a:solidFill>
+                  </a:tcPr>
+                </a:tc>
+              </a:tr>
+              <a:tr h="441655">
+                <a:tc>
+                  <a:txBody>
+                    <a:bodyPr/>
+                    <a:lstStyle/>
+                    <a:p>
+                      <a:pPr>
+                        <a:defRPr sz="800" b="1">
+                          <a:solidFill>
+                            <a:srgbClr val="0D1117"/>
+                          </a:solidFill>
+                          <a:latin typeface="Inter"/>
+                        </a:defRPr>
+                      </a:pPr>
+                      <a:r>
+                        <a:rPr>
+                          <a:latin typeface="Inter"/>
+                        </a:rPr>
+                        <a:t>S8</a:t>
+                      </a:r>
+                    </a:p>
+                  </a:txBody>
+                  <a:tcPr marL="54864" marR="54864" marT="27432" marB="27432" anchor="ctr">
+                    <a:solidFill>
+                      <a:srgbClr val="F5F7F9"/>
+                    </a:solidFill>
+                  </a:tcPr>
+                </a:tc>
+                <a:tc>
+                  <a:txBody>
+                    <a:bodyPr/>
+                    <a:lstStyle/>
+                    <a:p>
+                      <a:pPr>
+                        <a:defRPr sz="800" b="0">
+                          <a:solidFill>
+                            <a:srgbClr val="0D1117"/>
+                          </a:solidFill>
+                          <a:latin typeface="Inter"/>
+                        </a:defRPr>
+                      </a:pPr>
+                      <a:r>
+                        <a:rPr>
+                          <a:latin typeface="Inter"/>
+                        </a:rPr>
+                        <a:t>all sections</a:t>
+                      </a:r>
+                    </a:p>
+                  </a:txBody>
+                  <a:tcPr marL="54864" marR="54864" marT="27432" marB="27432" anchor="ctr">
+                    <a:solidFill>
+                      <a:srgbClr val="F5F7F9"/>
+                    </a:solidFill>
+                  </a:tcPr>
+                </a:tc>
+                <a:tc>
+                  <a:txBody>
+                    <a:bodyPr/>
+                    <a:lstStyle/>
+                    <a:p>
+                      <a:pPr>
+                        <a:defRPr sz="800" b="0">
+                          <a:solidFill>
+                            <a:srgbClr val="0D1117"/>
+                          </a:solidFill>
+                          <a:latin typeface="Inter"/>
+                        </a:defRPr>
+                      </a:pPr>
+                      <a:r>
+                        <a:rPr>
+                          <a:latin typeface="Inter"/>
+                        </a:rPr>
+                        <a:t>sha256:aaaaaaaaaaaaaaaaaaaaaaaaaaaaaaaaaaaaaaaaaaaaaaaaaaaaaaaaaaaaaaaa</a:t>
+                      </a:r>
+                    </a:p>
+                  </a:txBody>
+                  <a:tcPr marL="54864" marR="54864" marT="27432" marB="27432" anchor="ctr">
+                    <a:solidFill>
+                      <a:srgbClr val="F5F7F9"/>
+                    </a:solidFill>
+                  </a:tcPr>
+                </a:tc>
+              </a:tr>
+              <a:tr h="441657">
+                <a:tc>
+                  <a:txBody>
+                    <a:bodyPr/>
+                    <a:lstStyle/>
+                    <a:p>
+                      <a:pPr>
+                        <a:defRPr sz="800" b="1">
+                          <a:solidFill>
+                            <a:srgbClr val="0D1117"/>
+                          </a:solidFill>
+                          <a:latin typeface="Inter"/>
+                        </a:defRPr>
+                      </a:pPr>
+                      <a:r>
+                        <a:rPr>
+                          <a:latin typeface="Inter"/>
+                        </a:rPr>
+                        <a:t>S9</a:t>
+                      </a:r>
+                    </a:p>
+                  </a:txBody>
+                  <a:tcPr marL="54864" marR="54864" marT="27432" marB="27432" anchor="ctr">
+                    <a:solidFill>
+                      <a:srgbClr val="FFFFFF"/>
+                    </a:solidFill>
+                  </a:tcPr>
+                </a:tc>
+                <a:tc>
+                  <a:txBody>
+                    <a:bodyPr/>
+                    <a:lstStyle/>
+                    <a:p>
+                      <a:pPr>
+                        <a:defRPr sz="800" b="0">
+                          <a:solidFill>
+                            <a:srgbClr val="0D1117"/>
+                          </a:solidFill>
+                          <a:latin typeface="Inter"/>
+                        </a:defRPr>
+                      </a:pPr>
+                      <a:r>
+                        <a:rPr>
+                          <a:latin typeface="Inter"/>
+                        </a:rPr>
+                        <a:t>paged; server aggregates</a:t>
+                      </a:r>
+                    </a:p>
+                  </a:txBody>
+                  <a:tcPr marL="54864" marR="54864" marT="27432" marB="27432" anchor="ctr">
+                    <a:solidFill>
+                      <a:srgbClr val="FFFFFF"/>
+                    </a:solidFill>
+                  </a:tcPr>
+                </a:tc>
+                <a:tc>
+                  <a:txBody>
+                    <a:bodyPr/>
+                    <a:lstStyle/>
+                    <a:p>
+                      <a:pPr>
+                        <a:defRPr sz="800" b="0">
+                          <a:solidFill>
+                            <a:srgbClr val="0D1117"/>
+                          </a:solidFill>
+                          <a:latin typeface="Inter"/>
+                        </a:defRPr>
+                      </a:pPr>
+                      <a:r>
+                        <a:rPr>
+                          <a:latin typeface="Inter"/>
+                        </a:rPr>
+                        <a:t>sha256:aaaaaaaaaaaaaaaaaaaaaaaaaaaaaaaaaaaaaaaaaaaaaaaaaaaaaaaaaaaaaaaa</a:t>
+                      </a:r>
+                    </a:p>
+                  </a:txBody>
+                  <a:tcPr marL="54864" marR="54864" marT="27432" marB="27432" anchor="ctr">
+                    <a:solidFill>
+                      <a:srgbClr val="FFFFFF"/>
+                    </a:solidFill>
+                  </a:tcPr>
+                </a:tc>
+              </a:tr>
+            </a:tbl>
+          </a:graphicData>
+        </a:graphic>
+      </p:graphicFrame>
+      <p:sp>
+        <p:nvSpPr>
+          <p:cNvPr id="9" name="TextBox 8"/>
+          <p:cNvSpPr txBox="1"/>
+          <p:nvPr/>
+        </p:nvSpPr>
+        <p:spPr>
+          <a:xfrm>
+            <a:off x="640080" y="6035040"/>
+            <a:ext cx="10908792" cy="164592"/>
+          </a:xfrm>
+          <a:prstGeom prst="rect">
+            <a:avLst/>
+          </a:prstGeom>
+          <a:noFill/>
+        </p:spPr>
+        <p:txBody>
+          <a:bodyPr wrap="none" lIns="9144" rIns="9144" tIns="9144" bIns="9144" anchor="t">
+            <a:spAutoFit/>
+          </a:bodyPr>
+          <a:lstStyle/>
+          <a:p>
+            <a:pPr algn="l">
+              <a:spcAft>
+                <a:spcPts val="0"/>
+              </a:spcAft>
+              <a:defRPr sz="680" b="0">
+                <a:solidFill>
+                  <a:srgbClr val="8A94A1"/>
+                </a:solidFill>
+                <a:latin typeface="Inter"/>
+              </a:defRPr>
+            </a:pPr>
+            <a:r>
+              <a:rPr>
+                <a:latin typeface="Inter"/>
+              </a:rPr>
+              <a:t>Data scope for every source: Illustrative sample data. Each digest is the SHA-256 fingerprint of the exact data the report used.</a:t>
+            </a:r>
+          </a:p>
+        </p:txBody>
+      </p:sp>
+      <p:sp>
+        <p:nvSpPr>
+          <p:cNvPr id="10" name="Rectangle 9"/>
+          <p:cNvSpPr/>
+          <p:nvPr/>
+        </p:nvSpPr>
+        <p:spPr>
+          <a:xfrm>
+            <a:off x="640080" y="6446520"/>
+            <a:ext cx="10908792" cy="9144"/>
+          </a:xfrm>
+          <a:prstGeom prst="rect">
+            <a:avLst/>
+          </a:prstGeom>
+          <a:solidFill>
+            <a:srgbClr val="E3E7EC"/>
+          </a:solidFill>
+          <a:ln>
+            <a:solidFill>
+              <a:srgbClr val="E3E7EC"/>
+            </a:solidFill>
+          </a:ln>
+        </p:spPr>
+        <p:style>
+          <a:lnRef idx="1">
+            <a:schemeClr val="accent1"/>
+          </a:lnRef>
+          <a:fillRef idx="3">
+            <a:schemeClr val="accent1"/>
+          </a:fillRef>
+          <a:effectRef idx="2">
+            <a:schemeClr val="accent1"/>
+          </a:effectRef>
+          <a:fontRef idx="minor">
+            <a:schemeClr val="lt1"/>
+          </a:fontRef>
+        </p:style>
+        <p:txBody>
+          <a:bodyPr rtlCol="0" anchor="ctr"/>
+          <a:lstStyle/>
+          <a:p>
+            <a:pPr algn="ctr">
+              <a:defRPr>
+                <a:latin typeface="Inter"/>
+              </a:defRPr>
+            </a:pPr>
+          </a:p>
+        </p:txBody>
+      </p:sp>
+      <p:sp>
+        <p:nvSpPr>
+          <p:cNvPr id="11" name="TextBox 10"/>
+          <p:cNvSpPr txBox="1"/>
+          <p:nvPr/>
+        </p:nvSpPr>
+        <p:spPr>
+          <a:xfrm>
+            <a:off x="640080" y="6501384"/>
+            <a:ext cx="4297680" cy="146304"/>
+          </a:xfrm>
+          <a:prstGeom prst="rect">
+            <a:avLst/>
+          </a:prstGeom>
+          <a:noFill/>
+        </p:spPr>
+        <p:txBody>
+          <a:bodyPr wrap="none" lIns="9144" rIns="9144" tIns="9144" bIns="9144" anchor="t">
+            <a:spAutoFit/>
+          </a:bodyPr>
+          <a:lstStyle/>
+          <a:p>
+            <a:pPr algn="l">
+              <a:spcAft>
+                <a:spcPts val="0"/>
+              </a:spcAft>
+              <a:defRPr sz="650" b="0">
+                <a:solidFill>
+                  <a:srgbClr val="8A94A1"/>
+                </a:solidFill>
+                <a:latin typeface="Inter"/>
+              </a:defRPr>
+            </a:pPr>
+            <a:r>
+              <a:rPr>
+                <a:latin typeface="Inter"/>
+              </a:rPr>
+              <a:t>Sources: S1 · S2 · S3 · S4 · S5 · S6 · S7 · S8 · S9</a:t>
+            </a:r>
+          </a:p>
+        </p:txBody>
+      </p:sp>
+      <p:sp>
+        <p:nvSpPr>
+          <p:cNvPr id="12" name="TextBox 11"/>
+          <p:cNvSpPr txBox="1"/>
+          <p:nvPr/>
+        </p:nvSpPr>
+        <p:spPr>
+          <a:xfrm>
+            <a:off x="4480560" y="6501384"/>
+            <a:ext cx="5303520" cy="146304"/>
+          </a:xfrm>
+          <a:prstGeom prst="rect">
+            <a:avLst/>
+          </a:prstGeom>
+          <a:noFill/>
+        </p:spPr>
+        <p:txBody>
+          <a:bodyPr wrap="none" lIns="9144" rIns="9144" tIns="9144" bIns="9144" anchor="t">
+            <a:spAutoFit/>
+          </a:bodyPr>
+          <a:lstStyle/>
+          <a:p>
+            <a:pPr algn="ctr">
+              <a:spcAft>
+                <a:spcPts val="0"/>
+              </a:spcAft>
+              <a:defRPr sz="650" b="0">
+                <a:solidFill>
+                  <a:srgbClr val="8A94A1"/>
+                </a:solidFill>
+                <a:latin typeface="Inter"/>
+              </a:defRPr>
+            </a:pPr>
+            <a:r>
+              <a:rPr>
+                <a:latin typeface="Inter"/>
+              </a:rPr>
+              <a:t>Confidential — Investment Committee · Data as of 2026-06-30</a:t>
+            </a:r>
+          </a:p>
+        </p:txBody>
+      </p:sp>
+      <p:sp>
+        <p:nvSpPr>
+          <p:cNvPr id="13" name="TextBox 12"/>
+          <p:cNvSpPr txBox="1"/>
+          <p:nvPr/>
+        </p:nvSpPr>
+        <p:spPr>
+          <a:xfrm>
+            <a:off x="10287000" y="6501384"/>
+            <a:ext cx="1261872" cy="146304"/>
+          </a:xfrm>
+          <a:prstGeom prst="rect">
+            <a:avLst/>
+          </a:prstGeom>
+          <a:noFill/>
+        </p:spPr>
+        <p:txBody>
+          <a:bodyPr wrap="none" lIns="9144" rIns="9144" tIns="9144" bIns="9144" anchor="t">
+            <a:spAutoFit/>
+          </a:bodyPr>
+          <a:lstStyle/>
+          <a:p>
+            <a:pPr algn="r">
+              <a:spcAft>
+                <a:spcPts val="0"/>
+              </a:spcAft>
+              <a:defRPr sz="650" b="0">
+                <a:solidFill>
+                  <a:srgbClr val="8A94A1"/>
+                </a:solidFill>
+                <a:latin typeface="Inter"/>
+              </a:defRPr>
+            </a:pPr>
+            <a:r>
+              <a:rPr>
+                <a:latin typeface="Inter"/>
+              </a:rPr>
+              <a:t>28</a:t>
+            </a:r>
+          </a:p>
+        </p:txBody>
+      </p:sp>
+    </p:spTree>
+  </p:cSld>
+  <p:clrMapOvr>
+    <a:masterClrMapping/>
+  </p:clrMapOvr>
+</p:sld>
+</file>
+
+<file path=ppt/slides/slide29.xml><?xml version="1.0" encoding="utf-8"?>
+<p:sld xmlns:a="http://schemas.openxmlformats.org/drawingml/2006/main" xmlns:p="http://schemas.openxmlformats.org/presentationml/2006/main" xmlns:r="http://schemas.openxmlformats.org/officeDocument/2006/relationships">
+  <p:cSld>
+    <p:spTree>
+      <p:nvGrpSpPr>
+        <p:cNvPr id="1" name=""/>
+        <p:cNvGrpSpPr/>
+        <p:nvPr/>
+      </p:nvGrpSpPr>
+      <p:grpSpPr/>
+      <p:sp>
+        <p:nvSpPr>
+          <p:cNvPr id="2" name="Rectangle 1"/>
+          <p:cNvSpPr/>
+          <p:nvPr/>
+        </p:nvSpPr>
+        <p:spPr>
+          <a:xfrm>
+            <a:off x="0" y="0"/>
+            <a:ext cx="12191695" cy="6858000"/>
+          </a:xfrm>
+          <a:prstGeom prst="rect">
+            <a:avLst/>
+          </a:prstGeom>
+          <a:solidFill>
+            <a:srgbClr val="FFFFFF"/>
+          </a:solidFill>
+          <a:ln>
+            <a:solidFill>
+              <a:srgbClr val="FFFFFF"/>
+            </a:solidFill>
+          </a:ln>
+        </p:spPr>
+        <p:style>
+          <a:lnRef idx="1">
+            <a:schemeClr val="accent1"/>
+          </a:lnRef>
+          <a:fillRef idx="3">
+            <a:schemeClr val="accent1"/>
+          </a:fillRef>
+          <a:effectRef idx="2">
+            <a:schemeClr val="accent1"/>
+          </a:effectRef>
+          <a:fontRef idx="minor">
+            <a:schemeClr val="lt1"/>
+          </a:fontRef>
+        </p:style>
+        <p:txBody>
+          <a:bodyPr rtlCol="0" anchor="ctr"/>
+          <a:lstStyle/>
+          <a:p>
+            <a:pPr algn="ctr">
+              <a:defRPr>
+                <a:latin typeface="Inter"/>
+              </a:defRPr>
+            </a:pPr>
+          </a:p>
+        </p:txBody>
+      </p:sp>
+      <p:sp>
+        <p:nvSpPr>
+          <p:cNvPr id="3" name="TextBox 2"/>
+          <p:cNvSpPr txBox="1"/>
+          <p:nvPr/>
+        </p:nvSpPr>
+        <p:spPr>
+          <a:xfrm>
+            <a:off x="640080" y="566928"/>
+            <a:ext cx="10058400" cy="530352"/>
+          </a:xfrm>
+          <a:prstGeom prst="rect">
+            <a:avLst/>
+          </a:prstGeom>
+          <a:noFill/>
+        </p:spPr>
+        <p:txBody>
+          <a:bodyPr wrap="none" lIns="9144" rIns="9144" tIns="9144" bIns="9144" anchor="t">
+            <a:spAutoFit/>
+          </a:bodyPr>
+          <a:lstStyle/>
+          <a:p>
+            <a:pPr algn="l">
+              <a:spcAft>
+                <a:spcPts val="0"/>
+              </a:spcAft>
+              <a:defRPr sz="2300" b="1">
+                <a:solidFill>
+                  <a:srgbClr val="0D1117"/>
+                </a:solidFill>
+                <a:latin typeface="Inter"/>
+              </a:defRPr>
+            </a:pPr>
+            <a:r>
+              <a:rPr>
+                <a:latin typeface="Inter"/>
+              </a:rPr>
+              <a:t>Appendix — Server Metric Methods and Disclosures</a:t>
+            </a:r>
+          </a:p>
+        </p:txBody>
+      </p:sp>
+      <p:sp>
+        <p:nvSpPr>
+          <p:cNvPr id="4" name="Rectangle 3"/>
+          <p:cNvSpPr/>
+          <p:nvPr/>
+        </p:nvSpPr>
+        <p:spPr>
+          <a:xfrm>
+            <a:off x="640080" y="1115568"/>
+            <a:ext cx="10908792" cy="18288"/>
+          </a:xfrm>
+          <a:prstGeom prst="rect">
+            <a:avLst/>
+          </a:prstGeom>
+          <a:solidFill>
+            <a:srgbClr val="0D1117"/>
+          </a:solidFill>
+          <a:ln>
+            <a:solidFill>
+              <a:srgbClr val="0D1117"/>
+            </a:solidFill>
+          </a:ln>
+        </p:spPr>
+        <p:style>
+          <a:lnRef idx="1">
+            <a:schemeClr val="accent1"/>
+          </a:lnRef>
+          <a:fillRef idx="3">
+            <a:schemeClr val="accent1"/>
+          </a:fillRef>
+          <a:effectRef idx="2">
+            <a:schemeClr val="accent1"/>
+          </a:effectRef>
+          <a:fontRef idx="minor">
+            <a:schemeClr val="lt1"/>
+          </a:fontRef>
+        </p:style>
+        <p:txBody>
+          <a:bodyPr rtlCol="0" anchor="ctr"/>
+          <a:lstStyle/>
+          <a:p>
+            <a:pPr algn="ctr">
+              <a:defRPr>
+                <a:latin typeface="Inter"/>
+              </a:defRPr>
+            </a:pPr>
+          </a:p>
+        </p:txBody>
+      </p:sp>
+      <p:sp>
+        <p:nvSpPr>
+          <p:cNvPr id="5" name="Rectangle 4"/>
+          <p:cNvSpPr/>
+          <p:nvPr/>
+        </p:nvSpPr>
+        <p:spPr>
+          <a:xfrm>
+            <a:off x="11018520" y="502920"/>
+            <a:ext cx="530352" cy="393192"/>
+          </a:xfrm>
+          <a:prstGeom prst="rect">
+            <a:avLst/>
+          </a:prstGeom>
+          <a:solidFill>
+            <a:srgbClr val="9AA5B1"/>
+          </a:solidFill>
+          <a:ln>
+            <a:solidFill>
+              <a:srgbClr val="9AA5B1"/>
+            </a:solidFill>
+          </a:ln>
+        </p:spPr>
+        <p:style>
+          <a:lnRef idx="1">
+            <a:schemeClr val="accent1"/>
+          </a:lnRef>
+          <a:fillRef idx="3">
+            <a:schemeClr val="accent1"/>
+          </a:fillRef>
+          <a:effectRef idx="2">
+            <a:schemeClr val="accent1"/>
+          </a:effectRef>
+          <a:fontRef idx="minor">
+            <a:schemeClr val="lt1"/>
+          </a:fontRef>
+        </p:style>
+        <p:txBody>
+          <a:bodyPr rtlCol="0" anchor="ctr"/>
+          <a:lstStyle/>
+          <a:p>
+            <a:pPr algn="ctr">
+              <a:defRPr>
+                <a:latin typeface="Inter"/>
+              </a:defRPr>
+            </a:pPr>
+          </a:p>
+        </p:txBody>
+      </p:sp>
+      <p:sp>
+        <p:nvSpPr>
+          <p:cNvPr id="6" name="TextBox 5"/>
+          <p:cNvSpPr txBox="1"/>
+          <p:nvPr/>
+        </p:nvSpPr>
+        <p:spPr>
+          <a:xfrm>
+            <a:off x="11045952" y="557784"/>
+            <a:ext cx="475488" cy="182880"/>
+          </a:xfrm>
+          <a:prstGeom prst="rect">
+            <a:avLst/>
+          </a:prstGeom>
+          <a:noFill/>
+        </p:spPr>
+        <p:txBody>
+          <a:bodyPr wrap="none" lIns="9144" rIns="9144" tIns="9144" bIns="9144" anchor="t">
+            <a:spAutoFit/>
+          </a:bodyPr>
+          <a:lstStyle/>
+          <a:p>
+            <a:pPr algn="ctr">
+              <a:spcAft>
+                <a:spcPts val="0"/>
+              </a:spcAft>
+              <a:defRPr sz="1000" b="1">
+                <a:solidFill>
+                  <a:srgbClr val="0D1117"/>
+                </a:solidFill>
+                <a:latin typeface="Inter"/>
+              </a:defRPr>
+            </a:pPr>
+            <a:r>
+              <a:rPr>
+                <a:latin typeface="Inter"/>
+              </a:rPr>
+              <a:t>B</a:t>
+            </a:r>
+          </a:p>
+        </p:txBody>
+      </p:sp>
+      <p:sp>
+        <p:nvSpPr>
+          <p:cNvPr id="7" name="TextBox 6"/>
+          <p:cNvSpPr txBox="1"/>
+          <p:nvPr/>
+        </p:nvSpPr>
+        <p:spPr>
+          <a:xfrm>
+            <a:off x="640080" y="1325880"/>
+            <a:ext cx="10908792" cy="201168"/>
+          </a:xfrm>
+          <a:prstGeom prst="rect">
+            <a:avLst/>
+          </a:prstGeom>
+          <a:noFill/>
+        </p:spPr>
+        <p:txBody>
+          <a:bodyPr wrap="none" lIns="9144" rIns="9144" tIns="9144" bIns="9144" anchor="t">
+            <a:spAutoFit/>
+          </a:bodyPr>
+          <a:lstStyle/>
+          <a:p>
+            <a:pPr algn="l">
+              <a:spcAft>
+                <a:spcPts val="0"/>
+              </a:spcAft>
+              <a:defRPr sz="720" b="1">
+                <a:solidFill>
+                  <a:srgbClr val="4A5563"/>
+                </a:solidFill>
+                <a:latin typeface="Inter"/>
+              </a:defRPr>
+            </a:pPr>
+            <a:r>
+              <a:rPr>
+                <a:latin typeface="Inter"/>
+              </a:rPr>
               <a:t>SERVER METRIC METHODS</a:t>
             </a:r>
           </a:p>
@@ -31717,7 +31033,7 @@
       </p:sp>
       <p:graphicFrame>
         <p:nvGraphicFramePr>
-          <p:cNvPr id="9" name="Table 8"/>
+          <p:cNvPr id="8" name="Table 7"/>
           <p:cNvGraphicFramePr>
             <a:graphicFrameLocks noGrp="1"/>
           </p:cNvGraphicFramePr>
@@ -32431,7 +31747,7 @@
       </p:graphicFrame>
       <p:sp>
         <p:nvSpPr>
-          <p:cNvPr id="10" name="TextBox 9"/>
+          <p:cNvPr id="9" name="TextBox 8"/>
           <p:cNvSpPr txBox="1"/>
           <p:nvPr/>
         </p:nvSpPr>
@@ -32473,7 +31789,7 @@
       </p:sp>
       <p:sp>
         <p:nvSpPr>
-          <p:cNvPr id="11" name="Rectangle 10"/>
+          <p:cNvPr id="10" name="Rectangle 9"/>
           <p:cNvSpPr/>
           <p:nvPr/>
         </p:nvSpPr>
@@ -32522,7 +31838,7 @@
       </p:sp>
       <p:sp>
         <p:nvSpPr>
-          <p:cNvPr id="12" name="TextBox 11"/>
+          <p:cNvPr id="11" name="TextBox 10"/>
           <p:cNvSpPr txBox="1"/>
           <p:nvPr/>
         </p:nvSpPr>
@@ -32564,7 +31880,7 @@
       </p:sp>
       <p:sp>
         <p:nvSpPr>
-          <p:cNvPr id="13" name="TextBox 12"/>
+          <p:cNvPr id="12" name="TextBox 11"/>
           <p:cNvSpPr txBox="1"/>
           <p:nvPr/>
         </p:nvSpPr>
@@ -32606,7 +31922,7 @@
       </p:sp>
       <p:sp>
         <p:nvSpPr>
-          <p:cNvPr id="14" name="TextBox 13"/>
+          <p:cNvPr id="13" name="TextBox 12"/>
           <p:cNvSpPr txBox="1"/>
           <p:nvPr/>
         </p:nvSpPr>
@@ -32641,7 +31957,7 @@
               <a:rPr>
                 <a:latin typeface="Inter"/>
               </a:rPr>
-              <a:t>28</a:t>
+              <a:t>29</a:t>
             </a:r>
           </a:p>
         </p:txBody>
@@ -32722,7 +32038,7 @@
         <p:spPr>
           <a:xfrm>
             <a:off x="640080" y="329184"/>
-            <a:ext cx="5303520" cy="182880"/>
+            <a:ext cx="9875520" cy="182880"/>
           </a:xfrm>
           <a:prstGeom prst="rect">
             <a:avLst/>
@@ -32763,48 +32079,6 @@
         </p:nvSpPr>
         <p:spPr>
           <a:xfrm>
-            <a:off x="5897880" y="310896"/>
-            <a:ext cx="4800600" cy="256032"/>
-          </a:xfrm>
-          <a:prstGeom prst="rect">
-            <a:avLst/>
-          </a:prstGeom>
-          <a:noFill/>
-        </p:spPr>
-        <p:txBody>
-          <a:bodyPr wrap="none" lIns="9144" rIns="9144" tIns="9144" bIns="9144" anchor="t">
-            <a:spAutoFit/>
-          </a:bodyPr>
-          <a:lstStyle/>
-          <a:p>
-            <a:pPr algn="r">
-              <a:spcAft>
-                <a:spcPts val="0"/>
-              </a:spcAft>
-              <a:defRPr sz="680" b="1">
-                <a:solidFill>
-                  <a:srgbClr val="4F6B00"/>
-                </a:solidFill>
-                <a:latin typeface="Inter"/>
-              </a:defRPr>
-            </a:pPr>
-            <a:r>
-              <a:rPr>
-                <a:latin typeface="Inter"/>
-              </a:rPr>
-              <a:t>Illustrative, Gradient Maintained — demo data, not the client's holdings or managers</a:t>
-            </a:r>
-          </a:p>
-        </p:txBody>
-      </p:sp>
-      <p:sp>
-        <p:nvSpPr>
-          <p:cNvPr id="5" name="TextBox 4"/>
-          <p:cNvSpPr txBox="1"/>
-          <p:nvPr/>
-        </p:nvSpPr>
-        <p:spPr>
-          <a:xfrm>
             <a:off x="640080" y="566928"/>
             <a:ext cx="10058400" cy="530352"/>
           </a:xfrm>
@@ -32841,7 +32115,7 @@
       </p:sp>
       <p:sp>
         <p:nvSpPr>
-          <p:cNvPr id="6" name="Rectangle 5"/>
+          <p:cNvPr id="5" name="Rectangle 4"/>
           <p:cNvSpPr/>
           <p:nvPr/>
         </p:nvSpPr>
@@ -32890,7 +32164,7 @@
       </p:sp>
       <p:sp>
         <p:nvSpPr>
-          <p:cNvPr id="7" name="Rectangle 6"/>
+          <p:cNvPr id="6" name="Rectangle 5"/>
           <p:cNvSpPr/>
           <p:nvPr/>
         </p:nvSpPr>
@@ -32939,7 +32213,7 @@
       </p:sp>
       <p:sp>
         <p:nvSpPr>
-          <p:cNvPr id="8" name="TextBox 7"/>
+          <p:cNvPr id="7" name="TextBox 6"/>
           <p:cNvSpPr txBox="1"/>
           <p:nvPr/>
         </p:nvSpPr>
@@ -32981,14 +32255,14 @@
       </p:sp>
       <p:sp>
         <p:nvSpPr>
-          <p:cNvPr id="9" name="Rectangle 8"/>
+          <p:cNvPr id="8" name="Rectangle 7"/>
           <p:cNvSpPr/>
           <p:nvPr/>
         </p:nvSpPr>
         <p:spPr>
           <a:xfrm>
             <a:off x="640080" y="1325880"/>
-            <a:ext cx="10908792" cy="929385"/>
+            <a:ext cx="10908792" cy="971695"/>
           </a:xfrm>
           <a:prstGeom prst="rect">
             <a:avLst/>
@@ -33030,14 +32304,14 @@
       </p:sp>
       <p:sp>
         <p:nvSpPr>
-          <p:cNvPr id="10" name="Rectangle 9"/>
+          <p:cNvPr id="9" name="Rectangle 8"/>
           <p:cNvSpPr/>
           <p:nvPr/>
         </p:nvSpPr>
         <p:spPr>
           <a:xfrm>
             <a:off x="640080" y="1325880"/>
-            <a:ext cx="54864" cy="929385"/>
+            <a:ext cx="54864" cy="971695"/>
           </a:xfrm>
           <a:prstGeom prst="rect">
             <a:avLst/>
@@ -33079,7 +32353,7 @@
       </p:sp>
       <p:sp>
         <p:nvSpPr>
-          <p:cNvPr id="11" name="TextBox 10"/>
+          <p:cNvPr id="10" name="TextBox 9"/>
           <p:cNvSpPr txBox="1"/>
           <p:nvPr/>
         </p:nvSpPr>
@@ -33121,14 +32395,14 @@
       </p:sp>
       <p:sp>
         <p:nvSpPr>
-          <p:cNvPr id="12" name="TextBox 11"/>
+          <p:cNvPr id="11" name="TextBox 10"/>
           <p:cNvSpPr txBox="1"/>
           <p:nvPr/>
         </p:nvSpPr>
         <p:spPr>
           <a:xfrm>
             <a:off x="804671" y="1719072"/>
-            <a:ext cx="10616184" cy="444753"/>
+            <a:ext cx="10616184" cy="487063"/>
           </a:xfrm>
           <a:prstGeom prst="rect">
             <a:avLst/>
@@ -33163,13 +32437,13 @@
       </p:sp>
       <p:sp>
         <p:nvSpPr>
-          <p:cNvPr id="13" name="TextBox 12"/>
+          <p:cNvPr id="12" name="TextBox 11"/>
           <p:cNvSpPr txBox="1"/>
           <p:nvPr/>
         </p:nvSpPr>
         <p:spPr>
           <a:xfrm>
-            <a:off x="640080" y="2364993"/>
+            <a:off x="640080" y="2407303"/>
             <a:ext cx="10908792" cy="201168"/>
           </a:xfrm>
           <a:prstGeom prst="rect">
@@ -33205,15 +32479,15 @@
       </p:sp>
       <p:graphicFrame>
         <p:nvGraphicFramePr>
-          <p:cNvPr id="14" name="Table 13"/>
+          <p:cNvPr id="13" name="Table 12"/>
           <p:cNvGraphicFramePr>
             <a:graphicFrameLocks noGrp="1"/>
           </p:cNvGraphicFramePr>
           <p:nvPr/>
         </p:nvGraphicFramePr>
         <p:xfrm>
-          <a:off x="640080" y="2639313"/>
-          <a:ext cx="10908792" cy="1301703"/>
+          <a:off x="640080" y="2681623"/>
+          <a:ext cx="10908792" cy="1373450"/>
         </p:xfrm>
         <a:graphic>
           <a:graphicData uri="http://schemas.openxmlformats.org/drawingml/2006/table">
@@ -33227,7 +32501,7 @@
                 <a:gridCol w="2965704"/>
                 <a:gridCol w="2965704"/>
               </a:tblGrid>
-              <a:tr h="325425">
+              <a:tr h="343362">
                 <a:tc>
                   <a:txBody>
                     <a:bodyPr/>
@@ -33337,7 +32611,7 @@
                   </a:tcPr>
                 </a:tc>
               </a:tr>
-              <a:tr h="325425">
+              <a:tr h="343362">
                 <a:tc>
                   <a:txBody>
                     <a:bodyPr/>
@@ -33447,7 +32721,7 @@
                   </a:tcPr>
                 </a:tc>
               </a:tr>
-              <a:tr h="325425">
+              <a:tr h="343362">
                 <a:tc>
                   <a:txBody>
                     <a:bodyPr/>
@@ -33557,7 +32831,7 @@
                   </a:tcPr>
                 </a:tc>
               </a:tr>
-              <a:tr h="325428">
+              <a:tr h="343364">
                 <a:tc>
                   <a:txBody>
                     <a:bodyPr/>
@@ -33673,14 +32947,14 @@
       </p:graphicFrame>
       <p:sp>
         <p:nvSpPr>
-          <p:cNvPr id="15" name="Rectangle 14"/>
+          <p:cNvPr id="14" name="Rectangle 13"/>
           <p:cNvSpPr/>
           <p:nvPr/>
         </p:nvSpPr>
         <p:spPr>
           <a:xfrm>
-            <a:off x="640080" y="4050745"/>
-            <a:ext cx="10908792" cy="929385"/>
+            <a:off x="640080" y="4164801"/>
+            <a:ext cx="10908792" cy="971695"/>
           </a:xfrm>
           <a:prstGeom prst="rect">
             <a:avLst/>
@@ -33722,14 +32996,14 @@
       </p:sp>
       <p:sp>
         <p:nvSpPr>
-          <p:cNvPr id="16" name="Rectangle 15"/>
+          <p:cNvPr id="15" name="Rectangle 14"/>
           <p:cNvSpPr/>
           <p:nvPr/>
         </p:nvSpPr>
         <p:spPr>
           <a:xfrm>
-            <a:off x="640080" y="4050745"/>
-            <a:ext cx="54864" cy="929385"/>
+            <a:off x="640080" y="4164801"/>
+            <a:ext cx="54864" cy="971695"/>
           </a:xfrm>
           <a:prstGeom prst="rect">
             <a:avLst/>
@@ -33771,13 +33045,13 @@
       </p:sp>
       <p:sp>
         <p:nvSpPr>
-          <p:cNvPr id="17" name="TextBox 16"/>
+          <p:cNvPr id="16" name="TextBox 15"/>
           <p:cNvSpPr txBox="1"/>
           <p:nvPr/>
         </p:nvSpPr>
         <p:spPr>
           <a:xfrm>
-            <a:off x="804671" y="4160473"/>
+            <a:off x="804671" y="4274529"/>
             <a:ext cx="10616184" cy="228600"/>
           </a:xfrm>
           <a:prstGeom prst="rect">
@@ -33813,14 +33087,14 @@
       </p:sp>
       <p:sp>
         <p:nvSpPr>
-          <p:cNvPr id="18" name="TextBox 17"/>
+          <p:cNvPr id="17" name="TextBox 16"/>
           <p:cNvSpPr txBox="1"/>
           <p:nvPr/>
         </p:nvSpPr>
         <p:spPr>
           <a:xfrm>
-            <a:off x="804671" y="4443937"/>
-            <a:ext cx="10616184" cy="444753"/>
+            <a:off x="804671" y="4557993"/>
+            <a:ext cx="10616184" cy="487063"/>
           </a:xfrm>
           <a:prstGeom prst="rect">
             <a:avLst/>
@@ -33855,14 +33129,14 @@
       </p:sp>
       <p:sp>
         <p:nvSpPr>
-          <p:cNvPr id="19" name="Rectangle 18"/>
+          <p:cNvPr id="18" name="Rectangle 17"/>
           <p:cNvSpPr/>
           <p:nvPr/>
         </p:nvSpPr>
         <p:spPr>
           <a:xfrm>
-            <a:off x="640080" y="5089858"/>
-            <a:ext cx="10908792" cy="1128061"/>
+            <a:off x="640080" y="5246224"/>
+            <a:ext cx="10908792" cy="971695"/>
           </a:xfrm>
           <a:prstGeom prst="rect">
             <a:avLst/>
@@ -33904,14 +33178,14 @@
       </p:sp>
       <p:sp>
         <p:nvSpPr>
-          <p:cNvPr id="20" name="Rectangle 19"/>
+          <p:cNvPr id="19" name="Rectangle 18"/>
           <p:cNvSpPr/>
           <p:nvPr/>
         </p:nvSpPr>
         <p:spPr>
           <a:xfrm>
-            <a:off x="640080" y="5089858"/>
-            <a:ext cx="54864" cy="1128061"/>
+            <a:off x="640080" y="5246224"/>
+            <a:ext cx="54864" cy="971695"/>
           </a:xfrm>
           <a:prstGeom prst="rect">
             <a:avLst/>
@@ -33953,13 +33227,13 @@
       </p:sp>
       <p:sp>
         <p:nvSpPr>
-          <p:cNvPr id="21" name="TextBox 20"/>
+          <p:cNvPr id="20" name="TextBox 19"/>
           <p:cNvSpPr txBox="1"/>
           <p:nvPr/>
         </p:nvSpPr>
         <p:spPr>
           <a:xfrm>
-            <a:off x="804671" y="5199586"/>
+            <a:off x="804671" y="5355952"/>
             <a:ext cx="10616184" cy="228600"/>
           </a:xfrm>
           <a:prstGeom prst="rect">
@@ -33988,21 +33262,21 @@
               <a:rPr>
                 <a:latin typeface="Inter"/>
               </a:rPr>
-              <a:t>Key judgment — headline signal</a:t>
+              <a:t>Key judgment — Pacing</a:t>
             </a:r>
           </a:p>
         </p:txBody>
       </p:sp>
       <p:sp>
         <p:nvSpPr>
-          <p:cNvPr id="22" name="TextBox 21"/>
+          <p:cNvPr id="21" name="TextBox 20"/>
           <p:cNvSpPr txBox="1"/>
           <p:nvPr/>
         </p:nvSpPr>
         <p:spPr>
           <a:xfrm>
-            <a:off x="804671" y="5483050"/>
-            <a:ext cx="10616184" cy="643429"/>
+            <a:off x="804671" y="5639416"/>
+            <a:ext cx="10616184" cy="487063"/>
           </a:xfrm>
           <a:prstGeom prst="rect">
             <a:avLst/>
@@ -34030,14 +33304,14 @@
               <a:rPr>
                 <a:latin typeface="Inter"/>
               </a:rPr>
-              <a:t>Observation: The sample report carries a pacing-and-concentration signal above the clear threshold [S1]. Why it matters: This signal focuses oversight on the report's most decision-relevant condition. Uncertainty: Evidence coverage may exclude newer or more detailed observations. What would change the view: A governed refresh showing a different signal or breached threshold.</a:t>
+              <a:t>Observation: Commitment pacing and manager concentration both need monitoring [S1]. Why it matters: The $45.0M first-year ceiling keeps the program inside its liquidity limits. Uncertainty: Capital calls depend on manager deployment speed. What would change the view: Calls running ahead of the pacing plan.</a:t>
             </a:r>
           </a:p>
         </p:txBody>
       </p:sp>
       <p:sp>
         <p:nvSpPr>
-          <p:cNvPr id="23" name="Rectangle 22"/>
+          <p:cNvPr id="22" name="Rectangle 21"/>
           <p:cNvSpPr/>
           <p:nvPr/>
         </p:nvSpPr>
@@ -34086,7 +33360,7 @@
       </p:sp>
       <p:sp>
         <p:nvSpPr>
-          <p:cNvPr id="24" name="TextBox 23"/>
+          <p:cNvPr id="23" name="TextBox 22"/>
           <p:cNvSpPr txBox="1"/>
           <p:nvPr/>
         </p:nvSpPr>
@@ -34128,7 +33402,7 @@
       </p:sp>
       <p:sp>
         <p:nvSpPr>
-          <p:cNvPr id="25" name="TextBox 24"/>
+          <p:cNvPr id="24" name="TextBox 23"/>
           <p:cNvSpPr txBox="1"/>
           <p:nvPr/>
         </p:nvSpPr>
@@ -34170,7 +33444,7 @@
       </p:sp>
       <p:sp>
         <p:nvSpPr>
-          <p:cNvPr id="26" name="TextBox 25"/>
+          <p:cNvPr id="25" name="TextBox 24"/>
           <p:cNvSpPr txBox="1"/>
           <p:nvPr/>
         </p:nvSpPr>
@@ -34286,7 +33560,7 @@
         <p:spPr>
           <a:xfrm>
             <a:off x="640080" y="329184"/>
-            <a:ext cx="5303520" cy="182880"/>
+            <a:ext cx="9875520" cy="182880"/>
           </a:xfrm>
           <a:prstGeom prst="rect">
             <a:avLst/>
@@ -34327,48 +33601,6 @@
         </p:nvSpPr>
         <p:spPr>
           <a:xfrm>
-            <a:off x="5897880" y="310896"/>
-            <a:ext cx="4800600" cy="256032"/>
-          </a:xfrm>
-          <a:prstGeom prst="rect">
-            <a:avLst/>
-          </a:prstGeom>
-          <a:noFill/>
-        </p:spPr>
-        <p:txBody>
-          <a:bodyPr wrap="none" lIns="9144" rIns="9144" tIns="9144" bIns="9144" anchor="t">
-            <a:spAutoFit/>
-          </a:bodyPr>
-          <a:lstStyle/>
-          <a:p>
-            <a:pPr algn="r">
-              <a:spcAft>
-                <a:spcPts val="0"/>
-              </a:spcAft>
-              <a:defRPr sz="680" b="1">
-                <a:solidFill>
-                  <a:srgbClr val="4F6B00"/>
-                </a:solidFill>
-                <a:latin typeface="Inter"/>
-              </a:defRPr>
-            </a:pPr>
-            <a:r>
-              <a:rPr>
-                <a:latin typeface="Inter"/>
-              </a:rPr>
-              <a:t>Illustrative, Gradient Maintained — demo data, not the client's holdings or managers</a:t>
-            </a:r>
-          </a:p>
-        </p:txBody>
-      </p:sp>
-      <p:sp>
-        <p:nvSpPr>
-          <p:cNvPr id="5" name="TextBox 4"/>
-          <p:cNvSpPr txBox="1"/>
-          <p:nvPr/>
-        </p:nvSpPr>
-        <p:spPr>
-          <a:xfrm>
             <a:off x="640080" y="566928"/>
             <a:ext cx="10058400" cy="530352"/>
           </a:xfrm>
@@ -34405,7 +33637,7 @@
       </p:sp>
       <p:sp>
         <p:nvSpPr>
-          <p:cNvPr id="6" name="Rectangle 5"/>
+          <p:cNvPr id="5" name="Rectangle 4"/>
           <p:cNvSpPr/>
           <p:nvPr/>
         </p:nvSpPr>
@@ -34454,7 +33686,7 @@
       </p:sp>
       <p:sp>
         <p:nvSpPr>
-          <p:cNvPr id="7" name="Rectangle 6"/>
+          <p:cNvPr id="6" name="Rectangle 5"/>
           <p:cNvSpPr/>
           <p:nvPr/>
         </p:nvSpPr>
@@ -34503,7 +33735,7 @@
       </p:sp>
       <p:sp>
         <p:nvSpPr>
-          <p:cNvPr id="8" name="TextBox 7"/>
+          <p:cNvPr id="7" name="TextBox 6"/>
           <p:cNvSpPr txBox="1"/>
           <p:nvPr/>
         </p:nvSpPr>
@@ -34545,14 +33777,14 @@
       </p:sp>
       <p:sp>
         <p:nvSpPr>
-          <p:cNvPr id="9" name="Rectangle 8"/>
+          <p:cNvPr id="8" name="Rectangle 7"/>
           <p:cNvSpPr/>
           <p:nvPr/>
         </p:nvSpPr>
         <p:spPr>
           <a:xfrm>
             <a:off x="640080" y="1325880"/>
-            <a:ext cx="10908792" cy="2160255"/>
+            <a:ext cx="10908792" cy="2391156"/>
           </a:xfrm>
           <a:prstGeom prst="rect">
             <a:avLst/>
@@ -34594,14 +33826,14 @@
       </p:sp>
       <p:sp>
         <p:nvSpPr>
-          <p:cNvPr id="10" name="Rectangle 9"/>
+          <p:cNvPr id="9" name="Rectangle 8"/>
           <p:cNvSpPr/>
           <p:nvPr/>
         </p:nvSpPr>
         <p:spPr>
           <a:xfrm>
             <a:off x="640080" y="1325880"/>
-            <a:ext cx="54864" cy="2160255"/>
+            <a:ext cx="54864" cy="2391156"/>
           </a:xfrm>
           <a:prstGeom prst="rect">
             <a:avLst/>
@@ -34643,7 +33875,7 @@
       </p:sp>
       <p:sp>
         <p:nvSpPr>
-          <p:cNvPr id="11" name="TextBox 10"/>
+          <p:cNvPr id="10" name="TextBox 9"/>
           <p:cNvSpPr txBox="1"/>
           <p:nvPr/>
         </p:nvSpPr>
@@ -34678,21 +33910,21 @@
               <a:rPr>
                 <a:latin typeface="Inter"/>
               </a:rPr>
-              <a:t>Key judgment — primary measure</a:t>
+              <a:t>Key judgment — Sleeve size</a:t>
             </a:r>
           </a:p>
         </p:txBody>
       </p:sp>
       <p:sp>
         <p:nvSpPr>
-          <p:cNvPr id="12" name="TextBox 11"/>
+          <p:cNvPr id="11" name="TextBox 10"/>
           <p:cNvSpPr txBox="1"/>
           <p:nvPr/>
         </p:nvSpPr>
         <p:spPr>
           <a:xfrm>
             <a:off x="804671" y="1719072"/>
-            <a:ext cx="10616184" cy="1675623"/>
+            <a:ext cx="10616184" cy="1906523"/>
           </a:xfrm>
           <a:prstGeom prst="rect">
             <a:avLst/>
@@ -34720,21 +33952,21 @@
               <a:rPr>
                 <a:latin typeface="Inter"/>
               </a:rPr>
-              <a:t>Observation: Private-markets weight is 23.0% in the review evidence [S2]. Why it matters: This measure establishes the baseline for comparing later governed results. Uncertainty: The source basis may omit newer observations outside the reviewed evidence. What would change the view: A refreshed source report showing a change above 1%.</a:t>
+              <a:t>Observation: Private markets are 23.0% of total NAV [S2]. Why it matters: New commitments are sized against this weight and the unfunded balance. Uncertainty: Private valuations lag public markets. What would change the view: A valuation update that moves the weight by more than 2pp.</a:t>
             </a:r>
           </a:p>
         </p:txBody>
       </p:sp>
       <p:sp>
         <p:nvSpPr>
-          <p:cNvPr id="13" name="Rectangle 12"/>
+          <p:cNvPr id="12" name="Rectangle 11"/>
           <p:cNvSpPr/>
           <p:nvPr/>
         </p:nvSpPr>
         <p:spPr>
           <a:xfrm>
-            <a:off x="640080" y="3595863"/>
-            <a:ext cx="10908792" cy="2622056"/>
+            <a:off x="640080" y="3826763"/>
+            <a:ext cx="10908792" cy="2391156"/>
           </a:xfrm>
           <a:prstGeom prst="rect">
             <a:avLst/>
@@ -34776,14 +34008,14 @@
       </p:sp>
       <p:sp>
         <p:nvSpPr>
-          <p:cNvPr id="14" name="Rectangle 13"/>
+          <p:cNvPr id="13" name="Rectangle 12"/>
           <p:cNvSpPr/>
           <p:nvPr/>
         </p:nvSpPr>
         <p:spPr>
           <a:xfrm>
-            <a:off x="640080" y="3595863"/>
-            <a:ext cx="54864" cy="2622056"/>
+            <a:off x="640080" y="3826763"/>
+            <a:ext cx="54864" cy="2391156"/>
           </a:xfrm>
           <a:prstGeom prst="rect">
             <a:avLst/>
@@ -34825,13 +34057,13 @@
       </p:sp>
       <p:sp>
         <p:nvSpPr>
-          <p:cNvPr id="15" name="TextBox 14"/>
+          <p:cNvPr id="14" name="TextBox 13"/>
           <p:cNvSpPr txBox="1"/>
           <p:nvPr/>
         </p:nvSpPr>
         <p:spPr>
           <a:xfrm>
-            <a:off x="804671" y="3705591"/>
+            <a:off x="804671" y="3936491"/>
             <a:ext cx="10616184" cy="228600"/>
           </a:xfrm>
           <a:prstGeom prst="rect">
@@ -34860,21 +34092,21 @@
               <a:rPr>
                 <a:latin typeface="Inter"/>
               </a:rPr>
-              <a:t>Key judgment — monitoring priority</a:t>
+              <a:t>Key judgment — Policy limit</a:t>
             </a:r>
           </a:p>
         </p:txBody>
       </p:sp>
       <p:sp>
         <p:nvSpPr>
-          <p:cNvPr id="16" name="TextBox 15"/>
+          <p:cNvPr id="15" name="TextBox 14"/>
           <p:cNvSpPr txBox="1"/>
           <p:nvPr/>
         </p:nvSpPr>
         <p:spPr>
           <a:xfrm>
-            <a:off x="804671" y="3989055"/>
-            <a:ext cx="10616184" cy="2137424"/>
+            <a:off x="804671" y="4219955"/>
+            <a:ext cx="10616184" cy="1906524"/>
           </a:xfrm>
           <a:prstGeom prst="rect">
             <a:avLst/>
@@ -34902,14 +34134,14 @@
               <a:rPr>
                 <a:latin typeface="Inter"/>
               </a:rPr>
-              <a:t>Observation: Policy status is Watch rather than Clear in the review evidence [S3]. Why it matters: This result determines which item receives priority in the next monitoring cycle. Uncertainty: Supporting coverage may omit later filings or corroborating detail. What would change the view: A new filing or report that resolves the item or changes it by 1%.</a:t>
+              <a:t>Observation: The private-markets allocation is near its policy limit [S3]. Why it matters: Each new commitment must be checked against the limit before signing. Uncertainty: The limit test uses lagged valuations. What would change the view: Distributions that bring the weight back toward target.</a:t>
             </a:r>
           </a:p>
         </p:txBody>
       </p:sp>
       <p:sp>
         <p:nvSpPr>
-          <p:cNvPr id="17" name="Rectangle 16"/>
+          <p:cNvPr id="16" name="Rectangle 15"/>
           <p:cNvSpPr/>
           <p:nvPr/>
         </p:nvSpPr>
@@ -34958,7 +34190,7 @@
       </p:sp>
       <p:sp>
         <p:nvSpPr>
-          <p:cNvPr id="18" name="TextBox 17"/>
+          <p:cNvPr id="17" name="TextBox 16"/>
           <p:cNvSpPr txBox="1"/>
           <p:nvPr/>
         </p:nvSpPr>
@@ -35000,7 +34232,7 @@
       </p:sp>
       <p:sp>
         <p:nvSpPr>
-          <p:cNvPr id="19" name="TextBox 18"/>
+          <p:cNvPr id="18" name="TextBox 17"/>
           <p:cNvSpPr txBox="1"/>
           <p:nvPr/>
         </p:nvSpPr>
@@ -35042,7 +34274,7 @@
       </p:sp>
       <p:sp>
         <p:nvSpPr>
-          <p:cNvPr id="20" name="TextBox 19"/>
+          <p:cNvPr id="19" name="TextBox 18"/>
           <p:cNvSpPr txBox="1"/>
           <p:nvPr/>
         </p:nvSpPr>
@@ -35158,7 +34390,7 @@
         <p:spPr>
           <a:xfrm>
             <a:off x="640080" y="329184"/>
-            <a:ext cx="5303520" cy="182880"/>
+            <a:ext cx="9875520" cy="182880"/>
           </a:xfrm>
           <a:prstGeom prst="rect">
             <a:avLst/>
@@ -35199,48 +34431,6 @@
         </p:nvSpPr>
         <p:spPr>
           <a:xfrm>
-            <a:off x="5897880" y="310896"/>
-            <a:ext cx="4800600" cy="256032"/>
-          </a:xfrm>
-          <a:prstGeom prst="rect">
-            <a:avLst/>
-          </a:prstGeom>
-          <a:noFill/>
-        </p:spPr>
-        <p:txBody>
-          <a:bodyPr wrap="none" lIns="9144" rIns="9144" tIns="9144" bIns="9144" anchor="t">
-            <a:spAutoFit/>
-          </a:bodyPr>
-          <a:lstStyle/>
-          <a:p>
-            <a:pPr algn="r">
-              <a:spcAft>
-                <a:spcPts val="0"/>
-              </a:spcAft>
-              <a:defRPr sz="680" b="1">
-                <a:solidFill>
-                  <a:srgbClr val="4F6B00"/>
-                </a:solidFill>
-                <a:latin typeface="Inter"/>
-              </a:defRPr>
-            </a:pPr>
-            <a:r>
-              <a:rPr>
-                <a:latin typeface="Inter"/>
-              </a:rPr>
-              <a:t>Illustrative, Gradient Maintained — demo data, not the client's holdings or managers</a:t>
-            </a:r>
-          </a:p>
-        </p:txBody>
-      </p:sp>
-      <p:sp>
-        <p:nvSpPr>
-          <p:cNvPr id="5" name="TextBox 4"/>
-          <p:cNvSpPr txBox="1"/>
-          <p:nvPr/>
-        </p:nvSpPr>
-        <p:spPr>
-          <a:xfrm>
             <a:off x="640080" y="566928"/>
             <a:ext cx="10058400" cy="530352"/>
           </a:xfrm>
@@ -35277,7 +34467,7 @@
       </p:sp>
       <p:sp>
         <p:nvSpPr>
-          <p:cNvPr id="6" name="Rectangle 5"/>
+          <p:cNvPr id="5" name="Rectangle 4"/>
           <p:cNvSpPr/>
           <p:nvPr/>
         </p:nvSpPr>
@@ -35326,7 +34516,7 @@
       </p:sp>
       <p:sp>
         <p:nvSpPr>
-          <p:cNvPr id="7" name="Rectangle 6"/>
+          <p:cNvPr id="6" name="Rectangle 5"/>
           <p:cNvSpPr/>
           <p:nvPr/>
         </p:nvSpPr>
@@ -35375,7 +34565,7 @@
       </p:sp>
       <p:sp>
         <p:nvSpPr>
-          <p:cNvPr id="8" name="TextBox 7"/>
+          <p:cNvPr id="7" name="TextBox 6"/>
           <p:cNvSpPr txBox="1"/>
           <p:nvPr/>
         </p:nvSpPr>
@@ -35417,7 +34607,7 @@
       </p:sp>
       <p:graphicFrame>
         <p:nvGraphicFramePr>
-          <p:cNvPr id="9" name="Table 8"/>
+          <p:cNvPr id="8" name="Table 7"/>
           <p:cNvGraphicFramePr>
             <a:graphicFrameLocks noGrp="1"/>
           </p:cNvGraphicFramePr>
@@ -35779,7 +34969,7 @@
       </p:graphicFrame>
       <p:sp>
         <p:nvSpPr>
-          <p:cNvPr id="10" name="TextBox 9"/>
+          <p:cNvPr id="9" name="TextBox 8"/>
           <p:cNvSpPr txBox="1"/>
           <p:nvPr/>
         </p:nvSpPr>
@@ -35821,7 +35011,7 @@
       </p:sp>
       <p:graphicFrame>
         <p:nvGraphicFramePr>
-          <p:cNvPr id="11" name="Table 10"/>
+          <p:cNvPr id="10" name="Table 9"/>
           <p:cNvGraphicFramePr>
             <a:graphicFrameLocks noGrp="1"/>
           </p:cNvGraphicFramePr>
@@ -36217,7 +35407,7 @@
                         <a:rPr>
                           <a:latin typeface="Inter"/>
                         </a:rPr>
-                        <a:t>● Watch</a:t>
+                        <a:t>● Near limit</a:t>
                       </a:r>
                     </a:p>
                   </a:txBody>
@@ -36398,7 +35588,7 @@
       </p:graphicFrame>
       <p:sp>
         <p:nvSpPr>
-          <p:cNvPr id="12" name="Rectangle 11"/>
+          <p:cNvPr id="11" name="Rectangle 10"/>
           <p:cNvSpPr/>
           <p:nvPr/>
         </p:nvSpPr>
@@ -36447,7 +35637,7 @@
       </p:sp>
       <p:sp>
         <p:nvSpPr>
-          <p:cNvPr id="13" name="TextBox 12"/>
+          <p:cNvPr id="12" name="TextBox 11"/>
           <p:cNvSpPr txBox="1"/>
           <p:nvPr/>
         </p:nvSpPr>
@@ -36489,7 +35679,7 @@
       </p:sp>
       <p:sp>
         <p:nvSpPr>
-          <p:cNvPr id="14" name="TextBox 13"/>
+          <p:cNvPr id="13" name="TextBox 12"/>
           <p:cNvSpPr txBox="1"/>
           <p:nvPr/>
         </p:nvSpPr>
@@ -36531,7 +35721,7 @@
       </p:sp>
       <p:sp>
         <p:nvSpPr>
-          <p:cNvPr id="15" name="TextBox 14"/>
+          <p:cNvPr id="14" name="TextBox 13"/>
           <p:cNvSpPr txBox="1"/>
           <p:nvPr/>
         </p:nvSpPr>
@@ -36647,7 +35837,7 @@
         <p:spPr>
           <a:xfrm>
             <a:off x="640080" y="329184"/>
-            <a:ext cx="5303520" cy="182880"/>
+            <a:ext cx="9875520" cy="182880"/>
           </a:xfrm>
           <a:prstGeom prst="rect">
             <a:avLst/>
@@ -36688,48 +35878,6 @@
         </p:nvSpPr>
         <p:spPr>
           <a:xfrm>
-            <a:off x="5897880" y="310896"/>
-            <a:ext cx="4800600" cy="256032"/>
-          </a:xfrm>
-          <a:prstGeom prst="rect">
-            <a:avLst/>
-          </a:prstGeom>
-          <a:noFill/>
-        </p:spPr>
-        <p:txBody>
-          <a:bodyPr wrap="none" lIns="9144" rIns="9144" tIns="9144" bIns="9144" anchor="t">
-            <a:spAutoFit/>
-          </a:bodyPr>
-          <a:lstStyle/>
-          <a:p>
-            <a:pPr algn="r">
-              <a:spcAft>
-                <a:spcPts val="0"/>
-              </a:spcAft>
-              <a:defRPr sz="680" b="1">
-                <a:solidFill>
-                  <a:srgbClr val="4F6B00"/>
-                </a:solidFill>
-                <a:latin typeface="Inter"/>
-              </a:defRPr>
-            </a:pPr>
-            <a:r>
-              <a:rPr>
-                <a:latin typeface="Inter"/>
-              </a:rPr>
-              <a:t>Illustrative, Gradient Maintained — demo data, not the client's holdings or managers</a:t>
-            </a:r>
-          </a:p>
-        </p:txBody>
-      </p:sp>
-      <p:sp>
-        <p:nvSpPr>
-          <p:cNvPr id="5" name="TextBox 4"/>
-          <p:cNvSpPr txBox="1"/>
-          <p:nvPr/>
-        </p:nvSpPr>
-        <p:spPr>
-          <a:xfrm>
             <a:off x="640080" y="566928"/>
             <a:ext cx="10058400" cy="530352"/>
           </a:xfrm>
@@ -36766,7 +35914,7 @@
       </p:sp>
       <p:sp>
         <p:nvSpPr>
-          <p:cNvPr id="6" name="Rectangle 5"/>
+          <p:cNvPr id="5" name="Rectangle 4"/>
           <p:cNvSpPr/>
           <p:nvPr/>
         </p:nvSpPr>
@@ -36815,7 +35963,7 @@
       </p:sp>
       <p:sp>
         <p:nvSpPr>
-          <p:cNvPr id="7" name="Rectangle 6"/>
+          <p:cNvPr id="6" name="Rectangle 5"/>
           <p:cNvSpPr/>
           <p:nvPr/>
         </p:nvSpPr>
@@ -36864,7 +36012,7 @@
       </p:sp>
       <p:sp>
         <p:nvSpPr>
-          <p:cNvPr id="8" name="TextBox 7"/>
+          <p:cNvPr id="7" name="TextBox 6"/>
           <p:cNvSpPr txBox="1"/>
           <p:nvPr/>
         </p:nvSpPr>
@@ -36906,7 +36054,7 @@
       </p:sp>
       <p:sp>
         <p:nvSpPr>
-          <p:cNvPr id="9" name="TextBox 8"/>
+          <p:cNvPr id="8" name="TextBox 7"/>
           <p:cNvSpPr txBox="1"/>
           <p:nvPr/>
         </p:nvSpPr>
@@ -36948,7 +36096,7 @@
       </p:sp>
       <p:graphicFrame>
         <p:nvGraphicFramePr>
-          <p:cNvPr id="10" name="Chart 9"/>
+          <p:cNvPr id="9" name="Chart 8"/>
           <p:cNvGraphicFramePr>
             <a:graphicFrameLocks noGrp="1"/>
           </p:cNvGraphicFramePr>
@@ -36966,7 +36114,7 @@
       </p:graphicFrame>
       <p:sp>
         <p:nvSpPr>
-          <p:cNvPr id="11" name="Rectangle 10"/>
+          <p:cNvPr id="10" name="Rectangle 9"/>
           <p:cNvSpPr/>
           <p:nvPr/>
         </p:nvSpPr>
@@ -37015,7 +36163,7 @@
       </p:sp>
       <p:sp>
         <p:nvSpPr>
-          <p:cNvPr id="12" name="TextBox 11"/>
+          <p:cNvPr id="11" name="TextBox 10"/>
           <p:cNvSpPr txBox="1"/>
           <p:nvPr/>
         </p:nvSpPr>
@@ -37057,7 +36205,7 @@
       </p:sp>
       <p:sp>
         <p:nvSpPr>
-          <p:cNvPr id="13" name="TextBox 12"/>
+          <p:cNvPr id="12" name="TextBox 11"/>
           <p:cNvSpPr txBox="1"/>
           <p:nvPr/>
         </p:nvSpPr>
@@ -37099,7 +36247,7 @@
       </p:sp>
       <p:sp>
         <p:nvSpPr>
-          <p:cNvPr id="14" name="TextBox 13"/>
+          <p:cNvPr id="13" name="TextBox 12"/>
           <p:cNvSpPr txBox="1"/>
           <p:nvPr/>
         </p:nvSpPr>
@@ -37215,7 +36363,7 @@
         <p:spPr>
           <a:xfrm>
             <a:off x="640080" y="329184"/>
-            <a:ext cx="5303520" cy="182880"/>
+            <a:ext cx="9875520" cy="182880"/>
           </a:xfrm>
           <a:prstGeom prst="rect">
             <a:avLst/>
@@ -37256,48 +36404,6 @@
         </p:nvSpPr>
         <p:spPr>
           <a:xfrm>
-            <a:off x="5897880" y="310896"/>
-            <a:ext cx="4800600" cy="256032"/>
-          </a:xfrm>
-          <a:prstGeom prst="rect">
-            <a:avLst/>
-          </a:prstGeom>
-          <a:noFill/>
-        </p:spPr>
-        <p:txBody>
-          <a:bodyPr wrap="none" lIns="9144" rIns="9144" tIns="9144" bIns="9144" anchor="t">
-            <a:spAutoFit/>
-          </a:bodyPr>
-          <a:lstStyle/>
-          <a:p>
-            <a:pPr algn="r">
-              <a:spcAft>
-                <a:spcPts val="0"/>
-              </a:spcAft>
-              <a:defRPr sz="680" b="1">
-                <a:solidFill>
-                  <a:srgbClr val="4F6B00"/>
-                </a:solidFill>
-                <a:latin typeface="Inter"/>
-              </a:defRPr>
-            </a:pPr>
-            <a:r>
-              <a:rPr>
-                <a:latin typeface="Inter"/>
-              </a:rPr>
-              <a:t>Illustrative, Gradient Maintained — demo data, not the client's holdings or managers</a:t>
-            </a:r>
-          </a:p>
-        </p:txBody>
-      </p:sp>
-      <p:sp>
-        <p:nvSpPr>
-          <p:cNvPr id="5" name="TextBox 4"/>
-          <p:cNvSpPr txBox="1"/>
-          <p:nvPr/>
-        </p:nvSpPr>
-        <p:spPr>
-          <a:xfrm>
             <a:off x="640080" y="566928"/>
             <a:ext cx="10058400" cy="530352"/>
           </a:xfrm>
@@ -37334,7 +36440,7 @@
       </p:sp>
       <p:sp>
         <p:nvSpPr>
-          <p:cNvPr id="6" name="Rectangle 5"/>
+          <p:cNvPr id="5" name="Rectangle 4"/>
           <p:cNvSpPr/>
           <p:nvPr/>
         </p:nvSpPr>
@@ -37383,7 +36489,7 @@
       </p:sp>
       <p:sp>
         <p:nvSpPr>
-          <p:cNvPr id="7" name="Rectangle 6"/>
+          <p:cNvPr id="6" name="Rectangle 5"/>
           <p:cNvSpPr/>
           <p:nvPr/>
         </p:nvSpPr>
@@ -37432,7 +36538,7 @@
       </p:sp>
       <p:sp>
         <p:nvSpPr>
-          <p:cNvPr id="8" name="TextBox 7"/>
+          <p:cNvPr id="7" name="TextBox 6"/>
           <p:cNvSpPr txBox="1"/>
           <p:nvPr/>
         </p:nvSpPr>
@@ -37474,7 +36580,7 @@
       </p:sp>
       <p:sp>
         <p:nvSpPr>
-          <p:cNvPr id="9" name="TextBox 8"/>
+          <p:cNvPr id="8" name="TextBox 7"/>
           <p:cNvSpPr txBox="1"/>
           <p:nvPr/>
         </p:nvSpPr>
@@ -37516,7 +36622,7 @@
       </p:sp>
       <p:graphicFrame>
         <p:nvGraphicFramePr>
-          <p:cNvPr id="10" name="Table 9"/>
+          <p:cNvPr id="9" name="Table 8"/>
           <p:cNvGraphicFramePr>
             <a:graphicFrameLocks noGrp="1"/>
           </p:cNvGraphicFramePr>
@@ -38202,7 +37308,7 @@
       </p:graphicFrame>
       <p:sp>
         <p:nvSpPr>
-          <p:cNvPr id="11" name="TextBox 10"/>
+          <p:cNvPr id="10" name="TextBox 9"/>
           <p:cNvSpPr txBox="1"/>
           <p:nvPr/>
         </p:nvSpPr>
@@ -38244,7 +37350,7 @@
       </p:sp>
       <p:graphicFrame>
         <p:nvGraphicFramePr>
-          <p:cNvPr id="12" name="Table 11"/>
+          <p:cNvPr id="11" name="Table 10"/>
           <p:cNvGraphicFramePr>
             <a:graphicFrameLocks noGrp="1"/>
           </p:cNvGraphicFramePr>
@@ -38506,7 +37612,7 @@
                         <a:rPr>
                           <a:latin typeface="Inter"/>
                         </a:rPr>
-                        <a:t>Partial</a:t>
+                        <a:t>Incomplete</a:t>
                       </a:r>
                     </a:p>
                   </a:txBody>
@@ -38614,7 +37720,7 @@
                         <a:rPr>
                           <a:latin typeface="Inter"/>
                         </a:rPr>
-                        <a:t>Partial — one unknown-grain holding excluded</a:t>
+                        <a:t>Incomplete — one unknown-grain holding excluded</a:t>
                       </a:r>
                     </a:p>
                   </a:txBody>
@@ -38712,7 +37818,7 @@
       </p:graphicFrame>
       <p:sp>
         <p:nvSpPr>
-          <p:cNvPr id="13" name="TextBox 12"/>
+          <p:cNvPr id="12" name="TextBox 11"/>
           <p:cNvSpPr txBox="1"/>
           <p:nvPr/>
         </p:nvSpPr>
@@ -38754,7 +37860,7 @@
       </p:sp>
       <p:sp>
         <p:nvSpPr>
-          <p:cNvPr id="14" name="Rectangle 13"/>
+          <p:cNvPr id="13" name="Rectangle 12"/>
           <p:cNvSpPr/>
           <p:nvPr/>
         </p:nvSpPr>
@@ -38803,7 +37909,7 @@
       </p:sp>
       <p:sp>
         <p:nvSpPr>
-          <p:cNvPr id="15" name="TextBox 14"/>
+          <p:cNvPr id="14" name="TextBox 13"/>
           <p:cNvSpPr txBox="1"/>
           <p:nvPr/>
         </p:nvSpPr>
@@ -38845,7 +37951,7 @@
       </p:sp>
       <p:sp>
         <p:nvSpPr>
-          <p:cNvPr id="16" name="TextBox 15"/>
+          <p:cNvPr id="15" name="TextBox 14"/>
           <p:cNvSpPr txBox="1"/>
           <p:nvPr/>
         </p:nvSpPr>
@@ -38887,7 +37993,7 @@
       </p:sp>
       <p:sp>
         <p:nvSpPr>
-          <p:cNvPr id="17" name="TextBox 16"/>
+          <p:cNvPr id="16" name="TextBox 15"/>
           <p:cNvSpPr txBox="1"/>
           <p:nvPr/>
         </p:nvSpPr>
@@ -39003,7 +38109,7 @@
         <p:spPr>
           <a:xfrm>
             <a:off x="640080" y="329184"/>
-            <a:ext cx="5303520" cy="182880"/>
+            <a:ext cx="9875520" cy="182880"/>
           </a:xfrm>
           <a:prstGeom prst="rect">
             <a:avLst/>
@@ -39044,48 +38150,6 @@
         </p:nvSpPr>
         <p:spPr>
           <a:xfrm>
-            <a:off x="5897880" y="310896"/>
-            <a:ext cx="4800600" cy="256032"/>
-          </a:xfrm>
-          <a:prstGeom prst="rect">
-            <a:avLst/>
-          </a:prstGeom>
-          <a:noFill/>
-        </p:spPr>
-        <p:txBody>
-          <a:bodyPr wrap="none" lIns="9144" rIns="9144" tIns="9144" bIns="9144" anchor="t">
-            <a:spAutoFit/>
-          </a:bodyPr>
-          <a:lstStyle/>
-          <a:p>
-            <a:pPr algn="r">
-              <a:spcAft>
-                <a:spcPts val="0"/>
-              </a:spcAft>
-              <a:defRPr sz="680" b="1">
-                <a:solidFill>
-                  <a:srgbClr val="4F6B00"/>
-                </a:solidFill>
-                <a:latin typeface="Inter"/>
-              </a:defRPr>
-            </a:pPr>
-            <a:r>
-              <a:rPr>
-                <a:latin typeface="Inter"/>
-              </a:rPr>
-              <a:t>Illustrative, Gradient Maintained — demo data, not the client's holdings or managers</a:t>
-            </a:r>
-          </a:p>
-        </p:txBody>
-      </p:sp>
-      <p:sp>
-        <p:nvSpPr>
-          <p:cNvPr id="5" name="TextBox 4"/>
-          <p:cNvSpPr txBox="1"/>
-          <p:nvPr/>
-        </p:nvSpPr>
-        <p:spPr>
-          <a:xfrm>
             <a:off x="640080" y="566928"/>
             <a:ext cx="10058400" cy="530352"/>
           </a:xfrm>
@@ -39122,7 +38186,7 @@
       </p:sp>
       <p:sp>
         <p:nvSpPr>
-          <p:cNvPr id="6" name="Rectangle 5"/>
+          <p:cNvPr id="5" name="Rectangle 4"/>
           <p:cNvSpPr/>
           <p:nvPr/>
         </p:nvSpPr>
@@ -39171,7 +38235,7 @@
       </p:sp>
       <p:sp>
         <p:nvSpPr>
-          <p:cNvPr id="7" name="Rectangle 6"/>
+          <p:cNvPr id="6" name="Rectangle 5"/>
           <p:cNvSpPr/>
           <p:nvPr/>
         </p:nvSpPr>
@@ -39220,7 +38284,7 @@
       </p:sp>
       <p:sp>
         <p:nvSpPr>
-          <p:cNvPr id="8" name="TextBox 7"/>
+          <p:cNvPr id="7" name="TextBox 6"/>
           <p:cNvSpPr txBox="1"/>
           <p:nvPr/>
         </p:nvSpPr>
@@ -39262,7 +38326,7 @@
       </p:sp>
       <p:sp>
         <p:nvSpPr>
-          <p:cNvPr id="9" name="TextBox 8"/>
+          <p:cNvPr id="8" name="TextBox 7"/>
           <p:cNvSpPr txBox="1"/>
           <p:nvPr/>
         </p:nvSpPr>
@@ -39304,7 +38368,7 @@
       </p:sp>
       <p:sp>
         <p:nvSpPr>
-          <p:cNvPr id="10" name="TextBox 9"/>
+          <p:cNvPr id="9" name="TextBox 8"/>
           <p:cNvSpPr txBox="1"/>
           <p:nvPr/>
         </p:nvSpPr>
@@ -39346,7 +38410,7 @@
       </p:sp>
       <p:sp>
         <p:nvSpPr>
-          <p:cNvPr id="11" name="Rectangle 10"/>
+          <p:cNvPr id="10" name="Rectangle 9"/>
           <p:cNvSpPr/>
           <p:nvPr/>
         </p:nvSpPr>
@@ -39395,7 +38459,7 @@
       </p:sp>
       <p:sp>
         <p:nvSpPr>
-          <p:cNvPr id="12" name="Oval 11"/>
+          <p:cNvPr id="11" name="Oval 10"/>
           <p:cNvSpPr/>
           <p:nvPr/>
         </p:nvSpPr>
@@ -39444,7 +38508,7 @@
       </p:sp>
       <p:sp>
         <p:nvSpPr>
-          <p:cNvPr id="13" name="Rectangle 12"/>
+          <p:cNvPr id="12" name="Rectangle 11"/>
           <p:cNvSpPr/>
           <p:nvPr/>
         </p:nvSpPr>
@@ -39493,7 +38557,7 @@
       </p:sp>
       <p:sp>
         <p:nvSpPr>
-          <p:cNvPr id="14" name="TextBox 13"/>
+          <p:cNvPr id="13" name="TextBox 12"/>
           <p:cNvSpPr txBox="1"/>
           <p:nvPr/>
         </p:nvSpPr>
@@ -39535,7 +38599,7 @@
       </p:sp>
       <p:sp>
         <p:nvSpPr>
-          <p:cNvPr id="15" name="Rectangle 14"/>
+          <p:cNvPr id="14" name="Rectangle 13"/>
           <p:cNvSpPr/>
           <p:nvPr/>
         </p:nvSpPr>
@@ -39584,7 +38648,7 @@
       </p:sp>
       <p:sp>
         <p:nvSpPr>
-          <p:cNvPr id="16" name="Oval 15"/>
+          <p:cNvPr id="15" name="Oval 14"/>
           <p:cNvSpPr/>
           <p:nvPr/>
         </p:nvSpPr>
@@ -39633,7 +38697,7 @@
       </p:sp>
       <p:sp>
         <p:nvSpPr>
-          <p:cNvPr id="17" name="Rectangle 16"/>
+          <p:cNvPr id="16" name="Rectangle 15"/>
           <p:cNvSpPr/>
           <p:nvPr/>
         </p:nvSpPr>
@@ -39682,7 +38746,7 @@
       </p:sp>
       <p:sp>
         <p:nvSpPr>
-          <p:cNvPr id="18" name="TextBox 17"/>
+          <p:cNvPr id="17" name="TextBox 16"/>
           <p:cNvSpPr txBox="1"/>
           <p:nvPr/>
         </p:nvSpPr>
@@ -39724,7 +38788,7 @@
       </p:sp>
       <p:sp>
         <p:nvSpPr>
-          <p:cNvPr id="19" name="Rectangle 18"/>
+          <p:cNvPr id="18" name="Rectangle 17"/>
           <p:cNvSpPr/>
           <p:nvPr/>
         </p:nvSpPr>
@@ -39773,7 +38837,7 @@
       </p:sp>
       <p:sp>
         <p:nvSpPr>
-          <p:cNvPr id="20" name="Oval 19"/>
+          <p:cNvPr id="19" name="Oval 18"/>
           <p:cNvSpPr/>
           <p:nvPr/>
         </p:nvSpPr>
@@ -39822,7 +38886,7 @@
       </p:sp>
       <p:sp>
         <p:nvSpPr>
-          <p:cNvPr id="21" name="Rectangle 20"/>
+          <p:cNvPr id="20" name="Rectangle 19"/>
           <p:cNvSpPr/>
           <p:nvPr/>
         </p:nvSpPr>
@@ -39871,7 +38935,7 @@
       </p:sp>
       <p:sp>
         <p:nvSpPr>
-          <p:cNvPr id="22" name="TextBox 21"/>
+          <p:cNvPr id="21" name="TextBox 20"/>
           <p:cNvSpPr txBox="1"/>
           <p:nvPr/>
         </p:nvSpPr>
@@ -39913,7 +38977,7 @@
       </p:sp>
       <p:sp>
         <p:nvSpPr>
-          <p:cNvPr id="23" name="Rectangle 22"/>
+          <p:cNvPr id="22" name="Rectangle 21"/>
           <p:cNvSpPr/>
           <p:nvPr/>
         </p:nvSpPr>
@@ -39962,7 +39026,7 @@
       </p:sp>
       <p:sp>
         <p:nvSpPr>
-          <p:cNvPr id="24" name="Oval 23"/>
+          <p:cNvPr id="23" name="Oval 22"/>
           <p:cNvSpPr/>
           <p:nvPr/>
         </p:nvSpPr>
@@ -40011,7 +39075,7 @@
       </p:sp>
       <p:sp>
         <p:nvSpPr>
-          <p:cNvPr id="25" name="Rectangle 24"/>
+          <p:cNvPr id="24" name="Rectangle 23"/>
           <p:cNvSpPr/>
           <p:nvPr/>
         </p:nvSpPr>
@@ -40060,7 +39124,7 @@
       </p:sp>
       <p:sp>
         <p:nvSpPr>
-          <p:cNvPr id="26" name="Rectangle 25"/>
+          <p:cNvPr id="25" name="Rectangle 24"/>
           <p:cNvSpPr/>
           <p:nvPr/>
         </p:nvSpPr>
@@ -40109,7 +39173,7 @@
       </p:sp>
       <p:sp>
         <p:nvSpPr>
-          <p:cNvPr id="27" name="TextBox 26"/>
+          <p:cNvPr id="26" name="TextBox 25"/>
           <p:cNvSpPr txBox="1"/>
           <p:nvPr/>
         </p:nvSpPr>
@@ -40151,7 +39215,7 @@
       </p:sp>
       <p:graphicFrame>
         <p:nvGraphicFramePr>
-          <p:cNvPr id="28" name="Chart 27"/>
+          <p:cNvPr id="27" name="Chart 26"/>
           <p:cNvGraphicFramePr>
             <a:graphicFrameLocks noGrp="1"/>
           </p:cNvGraphicFramePr>
@@ -40169,7 +39233,7 @@
       </p:graphicFrame>
       <p:sp>
         <p:nvSpPr>
-          <p:cNvPr id="29" name="Rectangle 28"/>
+          <p:cNvPr id="28" name="Rectangle 27"/>
           <p:cNvSpPr/>
           <p:nvPr/>
         </p:nvSpPr>
@@ -40218,7 +39282,7 @@
       </p:sp>
       <p:sp>
         <p:nvSpPr>
-          <p:cNvPr id="30" name="TextBox 29"/>
+          <p:cNvPr id="29" name="TextBox 28"/>
           <p:cNvSpPr txBox="1"/>
           <p:nvPr/>
         </p:nvSpPr>
@@ -40260,7 +39324,7 @@
       </p:sp>
       <p:sp>
         <p:nvSpPr>
-          <p:cNvPr id="31" name="TextBox 30"/>
+          <p:cNvPr id="30" name="TextBox 29"/>
           <p:cNvSpPr txBox="1"/>
           <p:nvPr/>
         </p:nvSpPr>
@@ -40302,7 +39366,7 @@
       </p:sp>
       <p:sp>
         <p:nvSpPr>
-          <p:cNvPr id="32" name="TextBox 31"/>
+          <p:cNvPr id="31" name="TextBox 30"/>
           <p:cNvSpPr txBox="1"/>
           <p:nvPr/>
         </p:nvSpPr>
@@ -40418,7 +39482,7 @@
         <p:spPr>
           <a:xfrm>
             <a:off x="640080" y="329184"/>
-            <a:ext cx="5303520" cy="182880"/>
+            <a:ext cx="9875520" cy="182880"/>
           </a:xfrm>
           <a:prstGeom prst="rect">
             <a:avLst/>
@@ -40459,48 +39523,6 @@
         </p:nvSpPr>
         <p:spPr>
           <a:xfrm>
-            <a:off x="5897880" y="310896"/>
-            <a:ext cx="4800600" cy="256032"/>
-          </a:xfrm>
-          <a:prstGeom prst="rect">
-            <a:avLst/>
-          </a:prstGeom>
-          <a:noFill/>
-        </p:spPr>
-        <p:txBody>
-          <a:bodyPr wrap="none" lIns="9144" rIns="9144" tIns="9144" bIns="9144" anchor="t">
-            <a:spAutoFit/>
-          </a:bodyPr>
-          <a:lstStyle/>
-          <a:p>
-            <a:pPr algn="r">
-              <a:spcAft>
-                <a:spcPts val="0"/>
-              </a:spcAft>
-              <a:defRPr sz="680" b="1">
-                <a:solidFill>
-                  <a:srgbClr val="4F6B00"/>
-                </a:solidFill>
-                <a:latin typeface="Inter"/>
-              </a:defRPr>
-            </a:pPr>
-            <a:r>
-              <a:rPr>
-                <a:latin typeface="Inter"/>
-              </a:rPr>
-              <a:t>Illustrative, Gradient Maintained — demo data, not the client's holdings or managers</a:t>
-            </a:r>
-          </a:p>
-        </p:txBody>
-      </p:sp>
-      <p:sp>
-        <p:nvSpPr>
-          <p:cNvPr id="5" name="TextBox 4"/>
-          <p:cNvSpPr txBox="1"/>
-          <p:nvPr/>
-        </p:nvSpPr>
-        <p:spPr>
-          <a:xfrm>
             <a:off x="640080" y="566928"/>
             <a:ext cx="10058400" cy="530352"/>
           </a:xfrm>
@@ -40537,7 +39559,7 @@
       </p:sp>
       <p:sp>
         <p:nvSpPr>
-          <p:cNvPr id="6" name="Rectangle 5"/>
+          <p:cNvPr id="5" name="Rectangle 4"/>
           <p:cNvSpPr/>
           <p:nvPr/>
         </p:nvSpPr>
@@ -40586,7 +39608,7 @@
       </p:sp>
       <p:sp>
         <p:nvSpPr>
-          <p:cNvPr id="7" name="Rectangle 6"/>
+          <p:cNvPr id="6" name="Rectangle 5"/>
           <p:cNvSpPr/>
           <p:nvPr/>
         </p:nvSpPr>
@@ -40635,7 +39657,7 @@
       </p:sp>
       <p:sp>
         <p:nvSpPr>
-          <p:cNvPr id="8" name="TextBox 7"/>
+          <p:cNvPr id="7" name="TextBox 6"/>
           <p:cNvSpPr txBox="1"/>
           <p:nvPr/>
         </p:nvSpPr>
@@ -40677,7 +39699,7 @@
       </p:sp>
       <p:sp>
         <p:nvSpPr>
-          <p:cNvPr id="9" name="TextBox 8"/>
+          <p:cNvPr id="8" name="TextBox 7"/>
           <p:cNvSpPr txBox="1"/>
           <p:nvPr/>
         </p:nvSpPr>
@@ -40719,7 +39741,7 @@
       </p:sp>
       <p:graphicFrame>
         <p:nvGraphicFramePr>
-          <p:cNvPr id="10" name="Chart 9"/>
+          <p:cNvPr id="9" name="Chart 8"/>
           <p:cNvGraphicFramePr>
             <a:graphicFrameLocks noGrp="1"/>
           </p:cNvGraphicFramePr>
@@ -40737,7 +39759,7 @@
       </p:graphicFrame>
       <p:sp>
         <p:nvSpPr>
-          <p:cNvPr id="11" name="Rectangle 10"/>
+          <p:cNvPr id="10" name="Rectangle 9"/>
           <p:cNvSpPr/>
           <p:nvPr/>
         </p:nvSpPr>
@@ -40786,7 +39808,7 @@
       </p:sp>
       <p:sp>
         <p:nvSpPr>
-          <p:cNvPr id="12" name="TextBox 11"/>
+          <p:cNvPr id="11" name="TextBox 10"/>
           <p:cNvSpPr txBox="1"/>
           <p:nvPr/>
         </p:nvSpPr>
@@ -40828,7 +39850,7 @@
       </p:sp>
       <p:graphicFrame>
         <p:nvGraphicFramePr>
-          <p:cNvPr id="13" name="Chart 12"/>
+          <p:cNvPr id="12" name="Chart 11"/>
           <p:cNvGraphicFramePr>
             <a:graphicFrameLocks noGrp="1"/>
           </p:cNvGraphicFramePr>
@@ -40846,7 +39868,7 @@
       </p:graphicFrame>
       <p:sp>
         <p:nvSpPr>
-          <p:cNvPr id="14" name="Rectangle 13"/>
+          <p:cNvPr id="13" name="Rectangle 12"/>
           <p:cNvSpPr/>
           <p:nvPr/>
         </p:nvSpPr>
@@ -40895,7 +39917,7 @@
       </p:sp>
       <p:sp>
         <p:nvSpPr>
-          <p:cNvPr id="15" name="TextBox 14"/>
+          <p:cNvPr id="14" name="TextBox 13"/>
           <p:cNvSpPr txBox="1"/>
           <p:nvPr/>
         </p:nvSpPr>
@@ -40937,7 +39959,7 @@
       </p:sp>
       <p:sp>
         <p:nvSpPr>
-          <p:cNvPr id="16" name="TextBox 15"/>
+          <p:cNvPr id="15" name="TextBox 14"/>
           <p:cNvSpPr txBox="1"/>
           <p:nvPr/>
         </p:nvSpPr>
@@ -40979,7 +40001,7 @@
       </p:sp>
       <p:sp>
         <p:nvSpPr>
-          <p:cNvPr id="17" name="TextBox 16"/>
+          <p:cNvPr id="16" name="TextBox 15"/>
           <p:cNvSpPr txBox="1"/>
           <p:nvPr/>
         </p:nvSpPr>
